--- a/docs/deck/BOX_Solutions_Revised.pptx
+++ b/docs/deck/BOX_Solutions_Revised.pptx
@@ -4048,7 +4048,7 @@
             <a:r>
               <a:rPr lang="en-US" sz="1150" b="1" dirty="0">
                 <a:solidFill>
-                  <a:srgbClr val="FFFFFF"/>
+                  <a:srgbClr val="15224B"/>
                 </a:solidFill>
                 <a:latin typeface="Segoe UI" pitchFamily="34" charset="0"/>
                 <a:ea typeface="Segoe UI" pitchFamily="34" charset="-122"/>
@@ -4360,7 +4360,7 @@
             <a:r>
               <a:rPr lang="en-US" sz="1150" b="1" dirty="0">
                 <a:solidFill>
-                  <a:srgbClr val="FFFFFF"/>
+                  <a:srgbClr val="15224B"/>
                 </a:solidFill>
                 <a:latin typeface="Segoe UI" pitchFamily="34" charset="0"/>
                 <a:ea typeface="Segoe UI" pitchFamily="34" charset="-122"/>
@@ -4672,7 +4672,7 @@
             <a:r>
               <a:rPr lang="en-US" sz="1150" b="1" dirty="0">
                 <a:solidFill>
-                  <a:srgbClr val="FFFFFF"/>
+                  <a:srgbClr val="15224B"/>
                 </a:solidFill>
                 <a:latin typeface="Segoe UI" pitchFamily="34" charset="0"/>
                 <a:ea typeface="Segoe UI" pitchFamily="34" charset="-122"/>
@@ -5613,7 +5613,7 @@
         <p:spPr>
           <a:xfrm>
             <a:off x="657860" y="3530600"/>
-            <a:ext cx="3479800" cy="1346200"/>
+            <a:ext cx="3479800" cy="1270000"/>
           </a:xfrm>
           <a:prstGeom prst="rect">
             <a:avLst/>
@@ -5730,7 +5730,7 @@
         </p:nvSpPr>
         <p:spPr>
           <a:xfrm>
-            <a:off x="657860" y="4927600"/>
+            <a:off x="657860" y="4851400"/>
             <a:ext cx="3479800" cy="152400"/>
           </a:xfrm>
           <a:prstGeom prst="rect">
@@ -5769,8 +5769,8 @@
         </p:nvSpPr>
         <p:spPr>
           <a:xfrm>
-            <a:off x="657860" y="5105400"/>
-            <a:ext cx="3479800" cy="635000"/>
+            <a:off x="657860" y="5029200"/>
+            <a:ext cx="3479800" cy="584200"/>
           </a:xfrm>
           <a:prstGeom prst="rect">
             <a:avLst/>
@@ -5995,7 +5995,7 @@
         <p:spPr>
           <a:xfrm>
             <a:off x="4391660" y="3530600"/>
-            <a:ext cx="3479800" cy="1346200"/>
+            <a:ext cx="3479800" cy="1270000"/>
           </a:xfrm>
           <a:prstGeom prst="rect">
             <a:avLst/>
@@ -6112,7 +6112,7 @@
         </p:nvSpPr>
         <p:spPr>
           <a:xfrm>
-            <a:off x="4391660" y="4927600"/>
+            <a:off x="4391660" y="4851400"/>
             <a:ext cx="3479800" cy="152400"/>
           </a:xfrm>
           <a:prstGeom prst="rect">
@@ -6151,8 +6151,8 @@
         </p:nvSpPr>
         <p:spPr>
           <a:xfrm>
-            <a:off x="4391660" y="5105400"/>
-            <a:ext cx="3479800" cy="635000"/>
+            <a:off x="4391660" y="5029200"/>
+            <a:ext cx="3479800" cy="584200"/>
           </a:xfrm>
           <a:prstGeom prst="rect">
             <a:avLst/>
@@ -6377,7 +6377,7 @@
         <p:spPr>
           <a:xfrm>
             <a:off x="8125460" y="3530600"/>
-            <a:ext cx="3479800" cy="1346200"/>
+            <a:ext cx="3479800" cy="1270000"/>
           </a:xfrm>
           <a:prstGeom prst="rect">
             <a:avLst/>
@@ -6494,7 +6494,7 @@
         </p:nvSpPr>
         <p:spPr>
           <a:xfrm>
-            <a:off x="8125460" y="4927600"/>
+            <a:off x="8125460" y="4851400"/>
             <a:ext cx="3479800" cy="152400"/>
           </a:xfrm>
           <a:prstGeom prst="rect">
@@ -6533,8 +6533,8 @@
         </p:nvSpPr>
         <p:spPr>
           <a:xfrm>
-            <a:off x="8125460" y="5105400"/>
-            <a:ext cx="3479800" cy="635000"/>
+            <a:off x="8125460" y="5029200"/>
+            <a:ext cx="3479800" cy="584200"/>
           </a:xfrm>
           <a:prstGeom prst="rect">
             <a:avLst/>
@@ -7275,7 +7275,7 @@
         <p:spPr>
           <a:xfrm>
             <a:off x="657860" y="3530600"/>
-            <a:ext cx="3479800" cy="1346200"/>
+            <a:ext cx="3479800" cy="1270000"/>
           </a:xfrm>
           <a:prstGeom prst="rect">
             <a:avLst/>
@@ -7392,7 +7392,7 @@
         </p:nvSpPr>
         <p:spPr>
           <a:xfrm>
-            <a:off x="657860" y="4927600"/>
+            <a:off x="657860" y="4851400"/>
             <a:ext cx="3479800" cy="152400"/>
           </a:xfrm>
           <a:prstGeom prst="rect">
@@ -7431,8 +7431,8 @@
         </p:nvSpPr>
         <p:spPr>
           <a:xfrm>
-            <a:off x="657860" y="5105400"/>
-            <a:ext cx="3479800" cy="635000"/>
+            <a:off x="657860" y="5029200"/>
+            <a:ext cx="3479800" cy="584200"/>
           </a:xfrm>
           <a:prstGeom prst="rect">
             <a:avLst/>
@@ -7657,7 +7657,7 @@
         <p:spPr>
           <a:xfrm>
             <a:off x="4391660" y="3530600"/>
-            <a:ext cx="3479800" cy="1346200"/>
+            <a:ext cx="3479800" cy="1270000"/>
           </a:xfrm>
           <a:prstGeom prst="rect">
             <a:avLst/>
@@ -7774,7 +7774,7 @@
         </p:nvSpPr>
         <p:spPr>
           <a:xfrm>
-            <a:off x="4391660" y="4927600"/>
+            <a:off x="4391660" y="4851400"/>
             <a:ext cx="3479800" cy="152400"/>
           </a:xfrm>
           <a:prstGeom prst="rect">
@@ -7813,8 +7813,8 @@
         </p:nvSpPr>
         <p:spPr>
           <a:xfrm>
-            <a:off x="4391660" y="5105400"/>
-            <a:ext cx="3479800" cy="635000"/>
+            <a:off x="4391660" y="5029200"/>
+            <a:ext cx="3479800" cy="584200"/>
           </a:xfrm>
           <a:prstGeom prst="rect">
             <a:avLst/>
@@ -8039,7 +8039,7 @@
         <p:spPr>
           <a:xfrm>
             <a:off x="8125460" y="3530600"/>
-            <a:ext cx="3479800" cy="1346200"/>
+            <a:ext cx="3479800" cy="1270000"/>
           </a:xfrm>
           <a:prstGeom prst="rect">
             <a:avLst/>
@@ -8156,7 +8156,7 @@
         </p:nvSpPr>
         <p:spPr>
           <a:xfrm>
-            <a:off x="8125460" y="4927600"/>
+            <a:off x="8125460" y="4851400"/>
             <a:ext cx="3479800" cy="152400"/>
           </a:xfrm>
           <a:prstGeom prst="rect">
@@ -8195,8 +8195,8 @@
         </p:nvSpPr>
         <p:spPr>
           <a:xfrm>
-            <a:off x="8125460" y="5105400"/>
-            <a:ext cx="3479800" cy="635000"/>
+            <a:off x="8125460" y="5029200"/>
+            <a:ext cx="3479800" cy="584200"/>
           </a:xfrm>
           <a:prstGeom prst="rect">
             <a:avLst/>
@@ -8937,7 +8937,7 @@
         <p:spPr>
           <a:xfrm>
             <a:off x="657860" y="3530600"/>
-            <a:ext cx="3479800" cy="1346200"/>
+            <a:ext cx="3479800" cy="1270000"/>
           </a:xfrm>
           <a:prstGeom prst="rect">
             <a:avLst/>
@@ -9054,7 +9054,7 @@
         </p:nvSpPr>
         <p:spPr>
           <a:xfrm>
-            <a:off x="657860" y="4927600"/>
+            <a:off x="657860" y="4851400"/>
             <a:ext cx="3479800" cy="152400"/>
           </a:xfrm>
           <a:prstGeom prst="rect">
@@ -9093,8 +9093,8 @@
         </p:nvSpPr>
         <p:spPr>
           <a:xfrm>
-            <a:off x="657860" y="5105400"/>
-            <a:ext cx="3479800" cy="635000"/>
+            <a:off x="657860" y="5029200"/>
+            <a:ext cx="3479800" cy="584200"/>
           </a:xfrm>
           <a:prstGeom prst="rect">
             <a:avLst/>
@@ -9319,7 +9319,7 @@
         <p:spPr>
           <a:xfrm>
             <a:off x="4391660" y="3530600"/>
-            <a:ext cx="3479800" cy="1346200"/>
+            <a:ext cx="3479800" cy="1270000"/>
           </a:xfrm>
           <a:prstGeom prst="rect">
             <a:avLst/>
@@ -9436,7 +9436,7 @@
         </p:nvSpPr>
         <p:spPr>
           <a:xfrm>
-            <a:off x="4391660" y="4927600"/>
+            <a:off x="4391660" y="4851400"/>
             <a:ext cx="3479800" cy="152400"/>
           </a:xfrm>
           <a:prstGeom prst="rect">
@@ -9475,8 +9475,8 @@
         </p:nvSpPr>
         <p:spPr>
           <a:xfrm>
-            <a:off x="4391660" y="5105400"/>
-            <a:ext cx="3479800" cy="635000"/>
+            <a:off x="4391660" y="5029200"/>
+            <a:ext cx="3479800" cy="584200"/>
           </a:xfrm>
           <a:prstGeom prst="rect">
             <a:avLst/>
@@ -9701,7 +9701,7 @@
         <p:spPr>
           <a:xfrm>
             <a:off x="8125460" y="3530600"/>
-            <a:ext cx="3479800" cy="1346200"/>
+            <a:ext cx="3479800" cy="1270000"/>
           </a:xfrm>
           <a:prstGeom prst="rect">
             <a:avLst/>
@@ -9818,7 +9818,7 @@
         </p:nvSpPr>
         <p:spPr>
           <a:xfrm>
-            <a:off x="8125460" y="4927600"/>
+            <a:off x="8125460" y="4851400"/>
             <a:ext cx="3479800" cy="152400"/>
           </a:xfrm>
           <a:prstGeom prst="rect">
@@ -9857,8 +9857,8 @@
         </p:nvSpPr>
         <p:spPr>
           <a:xfrm>
-            <a:off x="8125460" y="5105400"/>
-            <a:ext cx="3479800" cy="635000"/>
+            <a:off x="8125460" y="5029200"/>
+            <a:ext cx="3479800" cy="584200"/>
           </a:xfrm>
           <a:prstGeom prst="rect">
             <a:avLst/>
@@ -10453,124 +10453,7 @@
       </p:sp>
       <p:sp>
         <p:nvSpPr>
-          <p:cNvPr id="13" name="Text 9"/>
-          <p:cNvSpPr txBox="1"/>
-          <p:nvPr/>
-        </p:nvSpPr>
-        <p:spPr>
-          <a:xfrm>
-            <a:off x="749300" y="2794000"/>
-            <a:ext cx="3238500" cy="330200"/>
-          </a:xfrm>
-          <a:prstGeom prst="rect">
-            <a:avLst/>
-          </a:prstGeom>
-          <a:noFill/>
-          <a:ln/>
-        </p:spPr>
-        <p:txBody>
-          <a:bodyPr wrap="square" lIns="0" tIns="0" rIns="0" bIns="0" rtlCol="0" anchor="t"/>
-          <a:lstStyle/>
-          <a:p>
-            <a:pPr indent="0" marL="0">
-              <a:buNone/>
-            </a:pPr>
-            <a:r>
-              <a:rPr lang="en-US" sz="1000" b="1" dirty="0">
-                <a:solidFill>
-                  <a:srgbClr val="15224B"/>
-                </a:solidFill>
-                <a:latin typeface="Segoe UI" pitchFamily="34" charset="0"/>
-                <a:ea typeface="Segoe UI" pitchFamily="34" charset="-122"/>
-                <a:cs typeface="Segoe UI" pitchFamily="34" charset="-120"/>
-              </a:rPr>
-              <a:t>ACE opportunities accepted</a:t>
-            </a:r>
-            <a:endParaRPr lang="en-US" sz="1000" dirty="0"/>
-          </a:p>
-        </p:txBody>
-      </p:sp>
-      <p:sp>
-        <p:nvSpPr>
-          <p:cNvPr id="14" name="Text 10"/>
-          <p:cNvSpPr txBox="1"/>
-          <p:nvPr/>
-        </p:nvSpPr>
-        <p:spPr>
-          <a:xfrm>
-            <a:off x="4191000" y="2794000"/>
-            <a:ext cx="4191000" cy="330200"/>
-          </a:xfrm>
-          <a:prstGeom prst="rect">
-            <a:avLst/>
-          </a:prstGeom>
-          <a:noFill/>
-          <a:ln/>
-        </p:spPr>
-        <p:txBody>
-          <a:bodyPr wrap="square" lIns="0" tIns="0" rIns="0" bIns="0" rtlCol="0" anchor="t"/>
-          <a:lstStyle/>
-          <a:p>
-            <a:pPr indent="0" marL="0">
-              <a:buNone/>
-            </a:pPr>
-            <a:r>
-              <a:rPr lang="en-US" sz="1000" dirty="0">
-                <a:solidFill>
-                  <a:srgbClr val="5B6378"/>
-                </a:solidFill>
-                <a:latin typeface="Segoe UI Semilight" pitchFamily="34" charset="0"/>
-                <a:ea typeface="Segoe UI Semilight" pitchFamily="34" charset="-122"/>
-                <a:cs typeface="Segoe UI Semilight" pitchFamily="34" charset="-120"/>
-              </a:rPr>
-              <a:t>AWS Partner Central — [whose instance, to confirm]</a:t>
-            </a:r>
-            <a:endParaRPr lang="en-US" sz="1000" dirty="0"/>
-          </a:p>
-        </p:txBody>
-      </p:sp>
-      <p:sp>
-        <p:nvSpPr>
-          <p:cNvPr id="15" name="Text 11"/>
-          <p:cNvSpPr txBox="1"/>
-          <p:nvPr/>
-        </p:nvSpPr>
-        <p:spPr>
-          <a:xfrm>
-            <a:off x="8614410" y="2794000"/>
-            <a:ext cx="2895600" cy="330200"/>
-          </a:xfrm>
-          <a:prstGeom prst="rect">
-            <a:avLst/>
-          </a:prstGeom>
-          <a:noFill/>
-          <a:ln/>
-        </p:spPr>
-        <p:txBody>
-          <a:bodyPr wrap="square" lIns="0" tIns="0" rIns="0" bIns="0" rtlCol="0" anchor="t"/>
-          <a:lstStyle/>
-          <a:p>
-            <a:pPr indent="0" marL="0">
-              <a:buNone/>
-            </a:pPr>
-            <a:r>
-              <a:rPr lang="en-US" sz="1000" dirty="0">
-                <a:solidFill>
-                  <a:srgbClr val="5B6378"/>
-                </a:solidFill>
-                <a:latin typeface="Segoe UI Semilight" pitchFamily="34" charset="0"/>
-                <a:ea typeface="Segoe UI Semilight" pitchFamily="34" charset="-122"/>
-                <a:cs typeface="Segoe UI Semilight" pitchFamily="34" charset="-120"/>
-              </a:rPr>
-              <a:t>Monthly</a:t>
-            </a:r>
-            <a:endParaRPr lang="en-US" sz="1000" dirty="0"/>
-          </a:p>
-        </p:txBody>
-      </p:sp>
-      <p:sp>
-        <p:nvSpPr>
-          <p:cNvPr id="16" name="Shape 12"/>
+          <p:cNvPr id="13" name="Shape 9"/>
           <p:cNvSpPr/>
           <p:nvPr/>
         </p:nvSpPr>
@@ -10590,241 +10473,7 @@
       </p:sp>
       <p:sp>
         <p:nvSpPr>
-          <p:cNvPr id="17" name="Text 13"/>
-          <p:cNvSpPr txBox="1"/>
-          <p:nvPr/>
-        </p:nvSpPr>
-        <p:spPr>
-          <a:xfrm>
-            <a:off x="749300" y="3124200"/>
-            <a:ext cx="3238500" cy="330200"/>
-          </a:xfrm>
-          <a:prstGeom prst="rect">
-            <a:avLst/>
-          </a:prstGeom>
-          <a:noFill/>
-          <a:ln/>
-        </p:spPr>
-        <p:txBody>
-          <a:bodyPr wrap="square" lIns="0" tIns="0" rIns="0" bIns="0" rtlCol="0" anchor="t"/>
-          <a:lstStyle/>
-          <a:p>
-            <a:pPr indent="0" marL="0">
-              <a:buNone/>
-            </a:pPr>
-            <a:r>
-              <a:rPr lang="en-US" sz="1000" b="1" dirty="0">
-                <a:solidFill>
-                  <a:srgbClr val="15224B"/>
-                </a:solidFill>
-                <a:latin typeface="Segoe UI" pitchFamily="34" charset="0"/>
-                <a:ea typeface="Segoe UI" pitchFamily="34" charset="-122"/>
-                <a:cs typeface="Segoe UI" pitchFamily="34" charset="-120"/>
-              </a:rPr>
-              <a:t>AWS-attributed pipeline</a:t>
-            </a:r>
-            <a:endParaRPr lang="en-US" sz="1000" dirty="0"/>
-          </a:p>
-        </p:txBody>
-      </p:sp>
-      <p:sp>
-        <p:nvSpPr>
-          <p:cNvPr id="18" name="Text 14"/>
-          <p:cNvSpPr txBox="1"/>
-          <p:nvPr/>
-        </p:nvSpPr>
-        <p:spPr>
-          <a:xfrm>
-            <a:off x="4191000" y="3124200"/>
-            <a:ext cx="4191000" cy="330200"/>
-          </a:xfrm>
-          <a:prstGeom prst="rect">
-            <a:avLst/>
-          </a:prstGeom>
-          <a:noFill/>
-          <a:ln/>
-        </p:spPr>
-        <p:txBody>
-          <a:bodyPr wrap="square" lIns="0" tIns="0" rIns="0" bIns="0" rtlCol="0" anchor="t"/>
-          <a:lstStyle/>
-          <a:p>
-            <a:pPr indent="0" marL="0">
-              <a:buNone/>
-            </a:pPr>
-            <a:r>
-              <a:rPr lang="en-US" sz="1000" dirty="0">
-                <a:solidFill>
-                  <a:srgbClr val="5B6378"/>
-                </a:solidFill>
-                <a:latin typeface="Segoe UI Semilight" pitchFamily="34" charset="0"/>
-                <a:ea typeface="Segoe UI Semilight" pitchFamily="34" charset="-122"/>
-                <a:cs typeface="Segoe UI Semilight" pitchFamily="34" charset="-120"/>
-              </a:rPr>
-              <a:t>Partner Central / ACE export, drawn by OBP</a:t>
-            </a:r>
-            <a:endParaRPr lang="en-US" sz="1000" dirty="0"/>
-          </a:p>
-        </p:txBody>
-      </p:sp>
-      <p:sp>
-        <p:nvSpPr>
-          <p:cNvPr id="19" name="Text 15"/>
-          <p:cNvSpPr txBox="1"/>
-          <p:nvPr/>
-        </p:nvSpPr>
-        <p:spPr>
-          <a:xfrm>
-            <a:off x="8614410" y="3124200"/>
-            <a:ext cx="2895600" cy="330200"/>
-          </a:xfrm>
-          <a:prstGeom prst="rect">
-            <a:avLst/>
-          </a:prstGeom>
-          <a:noFill/>
-          <a:ln/>
-        </p:spPr>
-        <p:txBody>
-          <a:bodyPr wrap="square" lIns="0" tIns="0" rIns="0" bIns="0" rtlCol="0" anchor="t"/>
-          <a:lstStyle/>
-          <a:p>
-            <a:pPr indent="0" marL="0">
-              <a:buNone/>
-            </a:pPr>
-            <a:r>
-              <a:rPr lang="en-US" sz="1000" dirty="0">
-                <a:solidFill>
-                  <a:srgbClr val="5B6378"/>
-                </a:solidFill>
-                <a:latin typeface="Segoe UI Semilight" pitchFamily="34" charset="0"/>
-                <a:ea typeface="Segoe UI Semilight" pitchFamily="34" charset="-122"/>
-                <a:cs typeface="Segoe UI Semilight" pitchFamily="34" charset="-120"/>
-              </a:rPr>
-              <a:t>Monthly</a:t>
-            </a:r>
-            <a:endParaRPr lang="en-US" sz="1000" dirty="0"/>
-          </a:p>
-        </p:txBody>
-      </p:sp>
-      <p:sp>
-        <p:nvSpPr>
-          <p:cNvPr id="20" name="Text 16"/>
-          <p:cNvSpPr txBox="1"/>
-          <p:nvPr/>
-        </p:nvSpPr>
-        <p:spPr>
-          <a:xfrm>
-            <a:off x="749300" y="3454400"/>
-            <a:ext cx="3238500" cy="330200"/>
-          </a:xfrm>
-          <a:prstGeom prst="rect">
-            <a:avLst/>
-          </a:prstGeom>
-          <a:noFill/>
-          <a:ln/>
-        </p:spPr>
-        <p:txBody>
-          <a:bodyPr wrap="square" lIns="0" tIns="0" rIns="0" bIns="0" rtlCol="0" anchor="t"/>
-          <a:lstStyle/>
-          <a:p>
-            <a:pPr indent="0" marL="0">
-              <a:buNone/>
-            </a:pPr>
-            <a:r>
-              <a:rPr lang="en-US" sz="1000" b="1" dirty="0">
-                <a:solidFill>
-                  <a:srgbClr val="15224B"/>
-                </a:solidFill>
-                <a:latin typeface="Segoe UI" pitchFamily="34" charset="0"/>
-                <a:ea typeface="Segoe UI" pitchFamily="34" charset="-122"/>
-                <a:cs typeface="Segoe UI" pitchFamily="34" charset="-120"/>
-              </a:rPr>
-              <a:t>Private offers issued</a:t>
-            </a:r>
-            <a:endParaRPr lang="en-US" sz="1000" dirty="0"/>
-          </a:p>
-        </p:txBody>
-      </p:sp>
-      <p:sp>
-        <p:nvSpPr>
-          <p:cNvPr id="21" name="Text 17"/>
-          <p:cNvSpPr txBox="1"/>
-          <p:nvPr/>
-        </p:nvSpPr>
-        <p:spPr>
-          <a:xfrm>
-            <a:off x="4191000" y="3454400"/>
-            <a:ext cx="4191000" cy="330200"/>
-          </a:xfrm>
-          <a:prstGeom prst="rect">
-            <a:avLst/>
-          </a:prstGeom>
-          <a:noFill/>
-          <a:ln/>
-        </p:spPr>
-        <p:txBody>
-          <a:bodyPr wrap="square" lIns="0" tIns="0" rIns="0" bIns="0" rtlCol="0" anchor="t"/>
-          <a:lstStyle/>
-          <a:p>
-            <a:pPr indent="0" marL="0">
-              <a:buNone/>
-            </a:pPr>
-            <a:r>
-              <a:rPr lang="en-US" sz="1000" dirty="0">
-                <a:solidFill>
-                  <a:srgbClr val="5B6378"/>
-                </a:solidFill>
-                <a:latin typeface="Segoe UI Semilight" pitchFamily="34" charset="0"/>
-                <a:ea typeface="Segoe UI Semilight" pitchFamily="34" charset="-122"/>
-                <a:cs typeface="Segoe UI Semilight" pitchFamily="34" charset="-120"/>
-              </a:rPr>
-              <a:t>Automatum’s seller account</a:t>
-            </a:r>
-            <a:endParaRPr lang="en-US" sz="1000" dirty="0"/>
-          </a:p>
-        </p:txBody>
-      </p:sp>
-      <p:sp>
-        <p:nvSpPr>
-          <p:cNvPr id="22" name="Text 18"/>
-          <p:cNvSpPr txBox="1"/>
-          <p:nvPr/>
-        </p:nvSpPr>
-        <p:spPr>
-          <a:xfrm>
-            <a:off x="8614410" y="3454400"/>
-            <a:ext cx="2895600" cy="330200"/>
-          </a:xfrm>
-          <a:prstGeom prst="rect">
-            <a:avLst/>
-          </a:prstGeom>
-          <a:noFill/>
-          <a:ln/>
-        </p:spPr>
-        <p:txBody>
-          <a:bodyPr wrap="square" lIns="0" tIns="0" rIns="0" bIns="0" rtlCol="0" anchor="t"/>
-          <a:lstStyle/>
-          <a:p>
-            <a:pPr indent="0" marL="0">
-              <a:buNone/>
-            </a:pPr>
-            <a:r>
-              <a:rPr lang="en-US" sz="1000" dirty="0">
-                <a:solidFill>
-                  <a:srgbClr val="5B6378"/>
-                </a:solidFill>
-                <a:latin typeface="Segoe UI Semilight" pitchFamily="34" charset="0"/>
-                <a:ea typeface="Segoe UI Semilight" pitchFamily="34" charset="-122"/>
-                <a:cs typeface="Segoe UI Semilight" pitchFamily="34" charset="-120"/>
-              </a:rPr>
-              <a:t>Monthly</a:t>
-            </a:r>
-            <a:endParaRPr lang="en-US" sz="1000" dirty="0"/>
-          </a:p>
-        </p:txBody>
-      </p:sp>
-      <p:sp>
-        <p:nvSpPr>
-          <p:cNvPr id="23" name="Shape 19"/>
+          <p:cNvPr id="14" name="Shape 10"/>
           <p:cNvSpPr/>
           <p:nvPr/>
         </p:nvSpPr>
@@ -10844,241 +10493,7 @@
       </p:sp>
       <p:sp>
         <p:nvSpPr>
-          <p:cNvPr id="24" name="Text 20"/>
-          <p:cNvSpPr txBox="1"/>
-          <p:nvPr/>
-        </p:nvSpPr>
-        <p:spPr>
-          <a:xfrm>
-            <a:off x="749300" y="3784600"/>
-            <a:ext cx="3238500" cy="330200"/>
-          </a:xfrm>
-          <a:prstGeom prst="rect">
-            <a:avLst/>
-          </a:prstGeom>
-          <a:noFill/>
-          <a:ln/>
-        </p:spPr>
-        <p:txBody>
-          <a:bodyPr wrap="square" lIns="0" tIns="0" rIns="0" bIns="0" rtlCol="0" anchor="t"/>
-          <a:lstStyle/>
-          <a:p>
-            <a:pPr indent="0" marL="0">
-              <a:buNone/>
-            </a:pPr>
-            <a:r>
-              <a:rPr lang="en-US" sz="1000" b="1" dirty="0">
-                <a:solidFill>
-                  <a:srgbClr val="15224B"/>
-                </a:solidFill>
-                <a:latin typeface="Segoe UI" pitchFamily="34" charset="0"/>
-                <a:ea typeface="Segoe UI" pitchFamily="34" charset="-122"/>
-                <a:cs typeface="Segoe UI" pitchFamily="34" charset="-120"/>
-              </a:rPr>
-              <a:t>Marketplace revenue and disbursements</a:t>
-            </a:r>
-            <a:endParaRPr lang="en-US" sz="1000" dirty="0"/>
-          </a:p>
-        </p:txBody>
-      </p:sp>
-      <p:sp>
-        <p:nvSpPr>
-          <p:cNvPr id="25" name="Text 21"/>
-          <p:cNvSpPr txBox="1"/>
-          <p:nvPr/>
-        </p:nvSpPr>
-        <p:spPr>
-          <a:xfrm>
-            <a:off x="4191000" y="3784600"/>
-            <a:ext cx="4191000" cy="330200"/>
-          </a:xfrm>
-          <a:prstGeom prst="rect">
-            <a:avLst/>
-          </a:prstGeom>
-          <a:noFill/>
-          <a:ln/>
-        </p:spPr>
-        <p:txBody>
-          <a:bodyPr wrap="square" lIns="0" tIns="0" rIns="0" bIns="0" rtlCol="0" anchor="t"/>
-          <a:lstStyle/>
-          <a:p>
-            <a:pPr indent="0" marL="0">
-              <a:buNone/>
-            </a:pPr>
-            <a:r>
-              <a:rPr lang="en-US" sz="1000" dirty="0">
-                <a:solidFill>
-                  <a:srgbClr val="5B6378"/>
-                </a:solidFill>
-                <a:latin typeface="Segoe UI Semilight" pitchFamily="34" charset="0"/>
-                <a:ea typeface="Segoe UI Semilight" pitchFamily="34" charset="-122"/>
-                <a:cs typeface="Segoe UI Semilight" pitchFamily="34" charset="-120"/>
-              </a:rPr>
-              <a:t>AWS seller reporting, reconciled by OBP</a:t>
-            </a:r>
-            <a:endParaRPr lang="en-US" sz="1000" dirty="0"/>
-          </a:p>
-        </p:txBody>
-      </p:sp>
-      <p:sp>
-        <p:nvSpPr>
-          <p:cNvPr id="26" name="Text 22"/>
-          <p:cNvSpPr txBox="1"/>
-          <p:nvPr/>
-        </p:nvSpPr>
-        <p:spPr>
-          <a:xfrm>
-            <a:off x="8614410" y="3784600"/>
-            <a:ext cx="2895600" cy="330200"/>
-          </a:xfrm>
-          <a:prstGeom prst="rect">
-            <a:avLst/>
-          </a:prstGeom>
-          <a:noFill/>
-          <a:ln/>
-        </p:spPr>
-        <p:txBody>
-          <a:bodyPr wrap="square" lIns="0" tIns="0" rIns="0" bIns="0" rtlCol="0" anchor="t"/>
-          <a:lstStyle/>
-          <a:p>
-            <a:pPr indent="0" marL="0">
-              <a:buNone/>
-            </a:pPr>
-            <a:r>
-              <a:rPr lang="en-US" sz="1000" dirty="0">
-                <a:solidFill>
-                  <a:srgbClr val="5B6378"/>
-                </a:solidFill>
-                <a:latin typeface="Segoe UI Semilight" pitchFamily="34" charset="0"/>
-                <a:ea typeface="Segoe UI Semilight" pitchFamily="34" charset="-122"/>
-                <a:cs typeface="Segoe UI Semilight" pitchFamily="34" charset="-120"/>
-              </a:rPr>
-              <a:t>Monthly, against AWS statements</a:t>
-            </a:r>
-            <a:endParaRPr lang="en-US" sz="1000" dirty="0"/>
-          </a:p>
-        </p:txBody>
-      </p:sp>
-      <p:sp>
-        <p:nvSpPr>
-          <p:cNvPr id="27" name="Text 23"/>
-          <p:cNvSpPr txBox="1"/>
-          <p:nvPr/>
-        </p:nvSpPr>
-        <p:spPr>
-          <a:xfrm>
-            <a:off x="749300" y="4114800"/>
-            <a:ext cx="3238500" cy="330200"/>
-          </a:xfrm>
-          <a:prstGeom prst="rect">
-            <a:avLst/>
-          </a:prstGeom>
-          <a:noFill/>
-          <a:ln/>
-        </p:spPr>
-        <p:txBody>
-          <a:bodyPr wrap="square" lIns="0" tIns="0" rIns="0" bIns="0" rtlCol="0" anchor="t"/>
-          <a:lstStyle/>
-          <a:p>
-            <a:pPr indent="0" marL="0">
-              <a:buNone/>
-            </a:pPr>
-            <a:r>
-              <a:rPr lang="en-US" sz="1000" b="1" dirty="0">
-                <a:solidFill>
-                  <a:srgbClr val="15224B"/>
-                </a:solidFill>
-                <a:latin typeface="Segoe UI" pitchFamily="34" charset="0"/>
-                <a:ea typeface="Segoe UI" pitchFamily="34" charset="-122"/>
-                <a:cs typeface="Segoe UI" pitchFamily="34" charset="-120"/>
-              </a:rPr>
-              <a:t>Partners issuing offers</a:t>
-            </a:r>
-            <a:endParaRPr lang="en-US" sz="1000" dirty="0"/>
-          </a:p>
-        </p:txBody>
-      </p:sp>
-      <p:sp>
-        <p:nvSpPr>
-          <p:cNvPr id="28" name="Text 24"/>
-          <p:cNvSpPr txBox="1"/>
-          <p:nvPr/>
-        </p:nvSpPr>
-        <p:spPr>
-          <a:xfrm>
-            <a:off x="4191000" y="4114800"/>
-            <a:ext cx="4191000" cy="330200"/>
-          </a:xfrm>
-          <a:prstGeom prst="rect">
-            <a:avLst/>
-          </a:prstGeom>
-          <a:noFill/>
-          <a:ln/>
-        </p:spPr>
-        <p:txBody>
-          <a:bodyPr wrap="square" lIns="0" tIns="0" rIns="0" bIns="0" rtlCol="0" anchor="t"/>
-          <a:lstStyle/>
-          <a:p>
-            <a:pPr indent="0" marL="0">
-              <a:buNone/>
-            </a:pPr>
-            <a:r>
-              <a:rPr lang="en-US" sz="1000" dirty="0">
-                <a:solidFill>
-                  <a:srgbClr val="5B6378"/>
-                </a:solidFill>
-                <a:latin typeface="Segoe UI Semilight" pitchFamily="34" charset="0"/>
-                <a:ea typeface="Segoe UI Semilight" pitchFamily="34" charset="-122"/>
-                <a:cs typeface="Segoe UI Semilight" pitchFamily="34" charset="-120"/>
-              </a:rPr>
-              <a:t>Kiflo — system of record</a:t>
-            </a:r>
-            <a:endParaRPr lang="en-US" sz="1000" dirty="0"/>
-          </a:p>
-        </p:txBody>
-      </p:sp>
-      <p:sp>
-        <p:nvSpPr>
-          <p:cNvPr id="29" name="Text 25"/>
-          <p:cNvSpPr txBox="1"/>
-          <p:nvPr/>
-        </p:nvSpPr>
-        <p:spPr>
-          <a:xfrm>
-            <a:off x="8614410" y="4114800"/>
-            <a:ext cx="2895600" cy="330200"/>
-          </a:xfrm>
-          <a:prstGeom prst="rect">
-            <a:avLst/>
-          </a:prstGeom>
-          <a:noFill/>
-          <a:ln/>
-        </p:spPr>
-        <p:txBody>
-          <a:bodyPr wrap="square" lIns="0" tIns="0" rIns="0" bIns="0" rtlCol="0" anchor="t"/>
-          <a:lstStyle/>
-          <a:p>
-            <a:pPr indent="0" marL="0">
-              <a:buNone/>
-            </a:pPr>
-            <a:r>
-              <a:rPr lang="en-US" sz="1000" dirty="0">
-                <a:solidFill>
-                  <a:srgbClr val="5B6378"/>
-                </a:solidFill>
-                <a:latin typeface="Segoe UI Semilight" pitchFamily="34" charset="0"/>
-                <a:ea typeface="Segoe UI Semilight" pitchFamily="34" charset="-122"/>
-                <a:cs typeface="Segoe UI Semilight" pitchFamily="34" charset="-120"/>
-              </a:rPr>
-              <a:t>Monthly</a:t>
-            </a:r>
-            <a:endParaRPr lang="en-US" sz="1000" dirty="0"/>
-          </a:p>
-        </p:txBody>
-      </p:sp>
-      <p:sp>
-        <p:nvSpPr>
-          <p:cNvPr id="30" name="Shape 26"/>
+          <p:cNvPr id="15" name="Shape 11"/>
           <p:cNvSpPr/>
           <p:nvPr/>
         </p:nvSpPr>
@@ -11098,6 +10513,591 @@
       </p:sp>
       <p:sp>
         <p:nvSpPr>
+          <p:cNvPr id="16" name="Text 12"/>
+          <p:cNvSpPr txBox="1"/>
+          <p:nvPr/>
+        </p:nvSpPr>
+        <p:spPr>
+          <a:xfrm>
+            <a:off x="749300" y="2794000"/>
+            <a:ext cx="3238500" cy="330200"/>
+          </a:xfrm>
+          <a:prstGeom prst="rect">
+            <a:avLst/>
+          </a:prstGeom>
+          <a:noFill/>
+          <a:ln/>
+        </p:spPr>
+        <p:txBody>
+          <a:bodyPr wrap="square" lIns="0" tIns="0" rIns="0" bIns="0" rtlCol="0" anchor="t"/>
+          <a:lstStyle/>
+          <a:p>
+            <a:pPr indent="0" marL="0">
+              <a:buNone/>
+            </a:pPr>
+            <a:r>
+              <a:rPr lang="en-US" sz="1000" b="1" dirty="0">
+                <a:solidFill>
+                  <a:srgbClr val="15224B"/>
+                </a:solidFill>
+                <a:latin typeface="Segoe UI" pitchFamily="34" charset="0"/>
+                <a:ea typeface="Segoe UI" pitchFamily="34" charset="-122"/>
+                <a:cs typeface="Segoe UI" pitchFamily="34" charset="-120"/>
+              </a:rPr>
+              <a:t>ACE opportunities accepted</a:t>
+            </a:r>
+            <a:endParaRPr lang="en-US" sz="1000" dirty="0"/>
+          </a:p>
+        </p:txBody>
+      </p:sp>
+      <p:sp>
+        <p:nvSpPr>
+          <p:cNvPr id="17" name="Text 13"/>
+          <p:cNvSpPr txBox="1"/>
+          <p:nvPr/>
+        </p:nvSpPr>
+        <p:spPr>
+          <a:xfrm>
+            <a:off x="4191000" y="2794000"/>
+            <a:ext cx="4191000" cy="330200"/>
+          </a:xfrm>
+          <a:prstGeom prst="rect">
+            <a:avLst/>
+          </a:prstGeom>
+          <a:noFill/>
+          <a:ln/>
+        </p:spPr>
+        <p:txBody>
+          <a:bodyPr wrap="square" lIns="0" tIns="0" rIns="0" bIns="0" rtlCol="0" anchor="t"/>
+          <a:lstStyle/>
+          <a:p>
+            <a:pPr indent="0" marL="0">
+              <a:buNone/>
+            </a:pPr>
+            <a:r>
+              <a:rPr lang="en-US" sz="1000" dirty="0">
+                <a:solidFill>
+                  <a:srgbClr val="5B6378"/>
+                </a:solidFill>
+                <a:latin typeface="Segoe UI Semilight" pitchFamily="34" charset="0"/>
+                <a:ea typeface="Segoe UI Semilight" pitchFamily="34" charset="-122"/>
+                <a:cs typeface="Segoe UI Semilight" pitchFamily="34" charset="-120"/>
+              </a:rPr>
+              <a:t>AWS Partner Central — [whose instance, to confirm]</a:t>
+            </a:r>
+            <a:endParaRPr lang="en-US" sz="1000" dirty="0"/>
+          </a:p>
+        </p:txBody>
+      </p:sp>
+      <p:sp>
+        <p:nvSpPr>
+          <p:cNvPr id="18" name="Text 14"/>
+          <p:cNvSpPr txBox="1"/>
+          <p:nvPr/>
+        </p:nvSpPr>
+        <p:spPr>
+          <a:xfrm>
+            <a:off x="8614410" y="2794000"/>
+            <a:ext cx="2895600" cy="330200"/>
+          </a:xfrm>
+          <a:prstGeom prst="rect">
+            <a:avLst/>
+          </a:prstGeom>
+          <a:noFill/>
+          <a:ln/>
+        </p:spPr>
+        <p:txBody>
+          <a:bodyPr wrap="square" lIns="0" tIns="0" rIns="0" bIns="0" rtlCol="0" anchor="t"/>
+          <a:lstStyle/>
+          <a:p>
+            <a:pPr indent="0" marL="0">
+              <a:buNone/>
+            </a:pPr>
+            <a:r>
+              <a:rPr lang="en-US" sz="1000" dirty="0">
+                <a:solidFill>
+                  <a:srgbClr val="5B6378"/>
+                </a:solidFill>
+                <a:latin typeface="Segoe UI Semilight" pitchFamily="34" charset="0"/>
+                <a:ea typeface="Segoe UI Semilight" pitchFamily="34" charset="-122"/>
+                <a:cs typeface="Segoe UI Semilight" pitchFamily="34" charset="-120"/>
+              </a:rPr>
+              <a:t>Monthly</a:t>
+            </a:r>
+            <a:endParaRPr lang="en-US" sz="1000" dirty="0"/>
+          </a:p>
+        </p:txBody>
+      </p:sp>
+      <p:sp>
+        <p:nvSpPr>
+          <p:cNvPr id="19" name="Text 15"/>
+          <p:cNvSpPr txBox="1"/>
+          <p:nvPr/>
+        </p:nvSpPr>
+        <p:spPr>
+          <a:xfrm>
+            <a:off x="749300" y="3124200"/>
+            <a:ext cx="3238500" cy="330200"/>
+          </a:xfrm>
+          <a:prstGeom prst="rect">
+            <a:avLst/>
+          </a:prstGeom>
+          <a:noFill/>
+          <a:ln/>
+        </p:spPr>
+        <p:txBody>
+          <a:bodyPr wrap="square" lIns="0" tIns="0" rIns="0" bIns="0" rtlCol="0" anchor="t"/>
+          <a:lstStyle/>
+          <a:p>
+            <a:pPr indent="0" marL="0">
+              <a:buNone/>
+            </a:pPr>
+            <a:r>
+              <a:rPr lang="en-US" sz="1000" b="1" dirty="0">
+                <a:solidFill>
+                  <a:srgbClr val="15224B"/>
+                </a:solidFill>
+                <a:latin typeface="Segoe UI" pitchFamily="34" charset="0"/>
+                <a:ea typeface="Segoe UI" pitchFamily="34" charset="-122"/>
+                <a:cs typeface="Segoe UI" pitchFamily="34" charset="-120"/>
+              </a:rPr>
+              <a:t>AWS-attributed pipeline</a:t>
+            </a:r>
+            <a:endParaRPr lang="en-US" sz="1000" dirty="0"/>
+          </a:p>
+        </p:txBody>
+      </p:sp>
+      <p:sp>
+        <p:nvSpPr>
+          <p:cNvPr id="20" name="Text 16"/>
+          <p:cNvSpPr txBox="1"/>
+          <p:nvPr/>
+        </p:nvSpPr>
+        <p:spPr>
+          <a:xfrm>
+            <a:off x="4191000" y="3124200"/>
+            <a:ext cx="4191000" cy="330200"/>
+          </a:xfrm>
+          <a:prstGeom prst="rect">
+            <a:avLst/>
+          </a:prstGeom>
+          <a:noFill/>
+          <a:ln/>
+        </p:spPr>
+        <p:txBody>
+          <a:bodyPr wrap="square" lIns="0" tIns="0" rIns="0" bIns="0" rtlCol="0" anchor="t"/>
+          <a:lstStyle/>
+          <a:p>
+            <a:pPr indent="0" marL="0">
+              <a:buNone/>
+            </a:pPr>
+            <a:r>
+              <a:rPr lang="en-US" sz="1000" dirty="0">
+                <a:solidFill>
+                  <a:srgbClr val="5B6378"/>
+                </a:solidFill>
+                <a:latin typeface="Segoe UI Semilight" pitchFamily="34" charset="0"/>
+                <a:ea typeface="Segoe UI Semilight" pitchFamily="34" charset="-122"/>
+                <a:cs typeface="Segoe UI Semilight" pitchFamily="34" charset="-120"/>
+              </a:rPr>
+              <a:t>Partner Central / ACE export, drawn by OBP</a:t>
+            </a:r>
+            <a:endParaRPr lang="en-US" sz="1000" dirty="0"/>
+          </a:p>
+        </p:txBody>
+      </p:sp>
+      <p:sp>
+        <p:nvSpPr>
+          <p:cNvPr id="21" name="Text 17"/>
+          <p:cNvSpPr txBox="1"/>
+          <p:nvPr/>
+        </p:nvSpPr>
+        <p:spPr>
+          <a:xfrm>
+            <a:off x="8614410" y="3124200"/>
+            <a:ext cx="2895600" cy="330200"/>
+          </a:xfrm>
+          <a:prstGeom prst="rect">
+            <a:avLst/>
+          </a:prstGeom>
+          <a:noFill/>
+          <a:ln/>
+        </p:spPr>
+        <p:txBody>
+          <a:bodyPr wrap="square" lIns="0" tIns="0" rIns="0" bIns="0" rtlCol="0" anchor="t"/>
+          <a:lstStyle/>
+          <a:p>
+            <a:pPr indent="0" marL="0">
+              <a:buNone/>
+            </a:pPr>
+            <a:r>
+              <a:rPr lang="en-US" sz="1000" dirty="0">
+                <a:solidFill>
+                  <a:srgbClr val="5B6378"/>
+                </a:solidFill>
+                <a:latin typeface="Segoe UI Semilight" pitchFamily="34" charset="0"/>
+                <a:ea typeface="Segoe UI Semilight" pitchFamily="34" charset="-122"/>
+                <a:cs typeface="Segoe UI Semilight" pitchFamily="34" charset="-120"/>
+              </a:rPr>
+              <a:t>Monthly</a:t>
+            </a:r>
+            <a:endParaRPr lang="en-US" sz="1000" dirty="0"/>
+          </a:p>
+        </p:txBody>
+      </p:sp>
+      <p:sp>
+        <p:nvSpPr>
+          <p:cNvPr id="22" name="Text 18"/>
+          <p:cNvSpPr txBox="1"/>
+          <p:nvPr/>
+        </p:nvSpPr>
+        <p:spPr>
+          <a:xfrm>
+            <a:off x="749300" y="3454400"/>
+            <a:ext cx="3238500" cy="330200"/>
+          </a:xfrm>
+          <a:prstGeom prst="rect">
+            <a:avLst/>
+          </a:prstGeom>
+          <a:noFill/>
+          <a:ln/>
+        </p:spPr>
+        <p:txBody>
+          <a:bodyPr wrap="square" lIns="0" tIns="0" rIns="0" bIns="0" rtlCol="0" anchor="t"/>
+          <a:lstStyle/>
+          <a:p>
+            <a:pPr indent="0" marL="0">
+              <a:buNone/>
+            </a:pPr>
+            <a:r>
+              <a:rPr lang="en-US" sz="1000" b="1" dirty="0">
+                <a:solidFill>
+                  <a:srgbClr val="15224B"/>
+                </a:solidFill>
+                <a:latin typeface="Segoe UI" pitchFamily="34" charset="0"/>
+                <a:ea typeface="Segoe UI" pitchFamily="34" charset="-122"/>
+                <a:cs typeface="Segoe UI" pitchFamily="34" charset="-120"/>
+              </a:rPr>
+              <a:t>Private offers issued</a:t>
+            </a:r>
+            <a:endParaRPr lang="en-US" sz="1000" dirty="0"/>
+          </a:p>
+        </p:txBody>
+      </p:sp>
+      <p:sp>
+        <p:nvSpPr>
+          <p:cNvPr id="23" name="Text 19"/>
+          <p:cNvSpPr txBox="1"/>
+          <p:nvPr/>
+        </p:nvSpPr>
+        <p:spPr>
+          <a:xfrm>
+            <a:off x="4191000" y="3454400"/>
+            <a:ext cx="4191000" cy="330200"/>
+          </a:xfrm>
+          <a:prstGeom prst="rect">
+            <a:avLst/>
+          </a:prstGeom>
+          <a:noFill/>
+          <a:ln/>
+        </p:spPr>
+        <p:txBody>
+          <a:bodyPr wrap="square" lIns="0" tIns="0" rIns="0" bIns="0" rtlCol="0" anchor="t"/>
+          <a:lstStyle/>
+          <a:p>
+            <a:pPr indent="0" marL="0">
+              <a:buNone/>
+            </a:pPr>
+            <a:r>
+              <a:rPr lang="en-US" sz="1000" dirty="0">
+                <a:solidFill>
+                  <a:srgbClr val="5B6378"/>
+                </a:solidFill>
+                <a:latin typeface="Segoe UI Semilight" pitchFamily="34" charset="0"/>
+                <a:ea typeface="Segoe UI Semilight" pitchFamily="34" charset="-122"/>
+                <a:cs typeface="Segoe UI Semilight" pitchFamily="34" charset="-120"/>
+              </a:rPr>
+              <a:t>Automatum’s seller account</a:t>
+            </a:r>
+            <a:endParaRPr lang="en-US" sz="1000" dirty="0"/>
+          </a:p>
+        </p:txBody>
+      </p:sp>
+      <p:sp>
+        <p:nvSpPr>
+          <p:cNvPr id="24" name="Text 20"/>
+          <p:cNvSpPr txBox="1"/>
+          <p:nvPr/>
+        </p:nvSpPr>
+        <p:spPr>
+          <a:xfrm>
+            <a:off x="8614410" y="3454400"/>
+            <a:ext cx="2895600" cy="330200"/>
+          </a:xfrm>
+          <a:prstGeom prst="rect">
+            <a:avLst/>
+          </a:prstGeom>
+          <a:noFill/>
+          <a:ln/>
+        </p:spPr>
+        <p:txBody>
+          <a:bodyPr wrap="square" lIns="0" tIns="0" rIns="0" bIns="0" rtlCol="0" anchor="t"/>
+          <a:lstStyle/>
+          <a:p>
+            <a:pPr indent="0" marL="0">
+              <a:buNone/>
+            </a:pPr>
+            <a:r>
+              <a:rPr lang="en-US" sz="1000" dirty="0">
+                <a:solidFill>
+                  <a:srgbClr val="5B6378"/>
+                </a:solidFill>
+                <a:latin typeface="Segoe UI Semilight" pitchFamily="34" charset="0"/>
+                <a:ea typeface="Segoe UI Semilight" pitchFamily="34" charset="-122"/>
+                <a:cs typeface="Segoe UI Semilight" pitchFamily="34" charset="-120"/>
+              </a:rPr>
+              <a:t>Monthly</a:t>
+            </a:r>
+            <a:endParaRPr lang="en-US" sz="1000" dirty="0"/>
+          </a:p>
+        </p:txBody>
+      </p:sp>
+      <p:sp>
+        <p:nvSpPr>
+          <p:cNvPr id="25" name="Text 21"/>
+          <p:cNvSpPr txBox="1"/>
+          <p:nvPr/>
+        </p:nvSpPr>
+        <p:spPr>
+          <a:xfrm>
+            <a:off x="749300" y="3784600"/>
+            <a:ext cx="3238500" cy="330200"/>
+          </a:xfrm>
+          <a:prstGeom prst="rect">
+            <a:avLst/>
+          </a:prstGeom>
+          <a:noFill/>
+          <a:ln/>
+        </p:spPr>
+        <p:txBody>
+          <a:bodyPr wrap="square" lIns="0" tIns="0" rIns="0" bIns="0" rtlCol="0" anchor="t"/>
+          <a:lstStyle/>
+          <a:p>
+            <a:pPr indent="0" marL="0">
+              <a:buNone/>
+            </a:pPr>
+            <a:r>
+              <a:rPr lang="en-US" sz="1000" b="1" dirty="0">
+                <a:solidFill>
+                  <a:srgbClr val="15224B"/>
+                </a:solidFill>
+                <a:latin typeface="Segoe UI" pitchFamily="34" charset="0"/>
+                <a:ea typeface="Segoe UI" pitchFamily="34" charset="-122"/>
+                <a:cs typeface="Segoe UI" pitchFamily="34" charset="-120"/>
+              </a:rPr>
+              <a:t>Marketplace revenue and disbursements</a:t>
+            </a:r>
+            <a:endParaRPr lang="en-US" sz="1000" dirty="0"/>
+          </a:p>
+        </p:txBody>
+      </p:sp>
+      <p:sp>
+        <p:nvSpPr>
+          <p:cNvPr id="26" name="Text 22"/>
+          <p:cNvSpPr txBox="1"/>
+          <p:nvPr/>
+        </p:nvSpPr>
+        <p:spPr>
+          <a:xfrm>
+            <a:off x="4191000" y="3784600"/>
+            <a:ext cx="4191000" cy="330200"/>
+          </a:xfrm>
+          <a:prstGeom prst="rect">
+            <a:avLst/>
+          </a:prstGeom>
+          <a:noFill/>
+          <a:ln/>
+        </p:spPr>
+        <p:txBody>
+          <a:bodyPr wrap="square" lIns="0" tIns="0" rIns="0" bIns="0" rtlCol="0" anchor="t"/>
+          <a:lstStyle/>
+          <a:p>
+            <a:pPr indent="0" marL="0">
+              <a:buNone/>
+            </a:pPr>
+            <a:r>
+              <a:rPr lang="en-US" sz="1000" dirty="0">
+                <a:solidFill>
+                  <a:srgbClr val="5B6378"/>
+                </a:solidFill>
+                <a:latin typeface="Segoe UI Semilight" pitchFamily="34" charset="0"/>
+                <a:ea typeface="Segoe UI Semilight" pitchFamily="34" charset="-122"/>
+                <a:cs typeface="Segoe UI Semilight" pitchFamily="34" charset="-120"/>
+              </a:rPr>
+              <a:t>AWS seller reporting, reconciled by OBP</a:t>
+            </a:r>
+            <a:endParaRPr lang="en-US" sz="1000" dirty="0"/>
+          </a:p>
+        </p:txBody>
+      </p:sp>
+      <p:sp>
+        <p:nvSpPr>
+          <p:cNvPr id="27" name="Text 23"/>
+          <p:cNvSpPr txBox="1"/>
+          <p:nvPr/>
+        </p:nvSpPr>
+        <p:spPr>
+          <a:xfrm>
+            <a:off x="8614410" y="3784600"/>
+            <a:ext cx="2895600" cy="330200"/>
+          </a:xfrm>
+          <a:prstGeom prst="rect">
+            <a:avLst/>
+          </a:prstGeom>
+          <a:noFill/>
+          <a:ln/>
+        </p:spPr>
+        <p:txBody>
+          <a:bodyPr wrap="square" lIns="0" tIns="0" rIns="0" bIns="0" rtlCol="0" anchor="t"/>
+          <a:lstStyle/>
+          <a:p>
+            <a:pPr indent="0" marL="0">
+              <a:buNone/>
+            </a:pPr>
+            <a:r>
+              <a:rPr lang="en-US" sz="1000" dirty="0">
+                <a:solidFill>
+                  <a:srgbClr val="5B6378"/>
+                </a:solidFill>
+                <a:latin typeface="Segoe UI Semilight" pitchFamily="34" charset="0"/>
+                <a:ea typeface="Segoe UI Semilight" pitchFamily="34" charset="-122"/>
+                <a:cs typeface="Segoe UI Semilight" pitchFamily="34" charset="-120"/>
+              </a:rPr>
+              <a:t>Monthly, against AWS statements</a:t>
+            </a:r>
+            <a:endParaRPr lang="en-US" sz="1000" dirty="0"/>
+          </a:p>
+        </p:txBody>
+      </p:sp>
+      <p:sp>
+        <p:nvSpPr>
+          <p:cNvPr id="28" name="Text 24"/>
+          <p:cNvSpPr txBox="1"/>
+          <p:nvPr/>
+        </p:nvSpPr>
+        <p:spPr>
+          <a:xfrm>
+            <a:off x="749300" y="4114800"/>
+            <a:ext cx="3238500" cy="330200"/>
+          </a:xfrm>
+          <a:prstGeom prst="rect">
+            <a:avLst/>
+          </a:prstGeom>
+          <a:noFill/>
+          <a:ln/>
+        </p:spPr>
+        <p:txBody>
+          <a:bodyPr wrap="square" lIns="0" tIns="0" rIns="0" bIns="0" rtlCol="0" anchor="t"/>
+          <a:lstStyle/>
+          <a:p>
+            <a:pPr indent="0" marL="0">
+              <a:buNone/>
+            </a:pPr>
+            <a:r>
+              <a:rPr lang="en-US" sz="1000" b="1" dirty="0">
+                <a:solidFill>
+                  <a:srgbClr val="15224B"/>
+                </a:solidFill>
+                <a:latin typeface="Segoe UI" pitchFamily="34" charset="0"/>
+                <a:ea typeface="Segoe UI" pitchFamily="34" charset="-122"/>
+                <a:cs typeface="Segoe UI" pitchFamily="34" charset="-120"/>
+              </a:rPr>
+              <a:t>Partners issuing offers</a:t>
+            </a:r>
+            <a:endParaRPr lang="en-US" sz="1000" dirty="0"/>
+          </a:p>
+        </p:txBody>
+      </p:sp>
+      <p:sp>
+        <p:nvSpPr>
+          <p:cNvPr id="29" name="Text 25"/>
+          <p:cNvSpPr txBox="1"/>
+          <p:nvPr/>
+        </p:nvSpPr>
+        <p:spPr>
+          <a:xfrm>
+            <a:off x="4191000" y="4114800"/>
+            <a:ext cx="4191000" cy="330200"/>
+          </a:xfrm>
+          <a:prstGeom prst="rect">
+            <a:avLst/>
+          </a:prstGeom>
+          <a:noFill/>
+          <a:ln/>
+        </p:spPr>
+        <p:txBody>
+          <a:bodyPr wrap="square" lIns="0" tIns="0" rIns="0" bIns="0" rtlCol="0" anchor="t"/>
+          <a:lstStyle/>
+          <a:p>
+            <a:pPr indent="0" marL="0">
+              <a:buNone/>
+            </a:pPr>
+            <a:r>
+              <a:rPr lang="en-US" sz="1000" dirty="0">
+                <a:solidFill>
+                  <a:srgbClr val="5B6378"/>
+                </a:solidFill>
+                <a:latin typeface="Segoe UI Semilight" pitchFamily="34" charset="0"/>
+                <a:ea typeface="Segoe UI Semilight" pitchFamily="34" charset="-122"/>
+                <a:cs typeface="Segoe UI Semilight" pitchFamily="34" charset="-120"/>
+              </a:rPr>
+              <a:t>Kiflo — system of record</a:t>
+            </a:r>
+            <a:endParaRPr lang="en-US" sz="1000" dirty="0"/>
+          </a:p>
+        </p:txBody>
+      </p:sp>
+      <p:sp>
+        <p:nvSpPr>
+          <p:cNvPr id="30" name="Text 26"/>
+          <p:cNvSpPr txBox="1"/>
+          <p:nvPr/>
+        </p:nvSpPr>
+        <p:spPr>
+          <a:xfrm>
+            <a:off x="8614410" y="4114800"/>
+            <a:ext cx="2895600" cy="330200"/>
+          </a:xfrm>
+          <a:prstGeom prst="rect">
+            <a:avLst/>
+          </a:prstGeom>
+          <a:noFill/>
+          <a:ln/>
+        </p:spPr>
+        <p:txBody>
+          <a:bodyPr wrap="square" lIns="0" tIns="0" rIns="0" bIns="0" rtlCol="0" anchor="t"/>
+          <a:lstStyle/>
+          <a:p>
+            <a:pPr indent="0" marL="0">
+              <a:buNone/>
+            </a:pPr>
+            <a:r>
+              <a:rPr lang="en-US" sz="1000" dirty="0">
+                <a:solidFill>
+                  <a:srgbClr val="5B6378"/>
+                </a:solidFill>
+                <a:latin typeface="Segoe UI Semilight" pitchFamily="34" charset="0"/>
+                <a:ea typeface="Segoe UI Semilight" pitchFamily="34" charset="-122"/>
+                <a:cs typeface="Segoe UI Semilight" pitchFamily="34" charset="-120"/>
+              </a:rPr>
+              <a:t>Monthly</a:t>
+            </a:r>
+            <a:endParaRPr lang="en-US" sz="1000" dirty="0"/>
+          </a:p>
+        </p:txBody>
+      </p:sp>
+      <p:sp>
+        <p:nvSpPr>
           <p:cNvPr id="31" name="Text 27"/>
           <p:cNvSpPr txBox="1"/>
           <p:nvPr/>
@@ -11338,7 +11338,7 @@
         </p:nvSpPr>
         <p:spPr>
           <a:xfrm>
-            <a:off x="749300" y="5080000"/>
+            <a:off x="749300" y="5232400"/>
             <a:ext cx="10795000" cy="203200"/>
           </a:xfrm>
           <a:prstGeom prst="rect">
@@ -11903,7 +11903,7 @@
             <a:r>
               <a:rPr lang="en-US" sz="900" b="1" dirty="0">
                 <a:solidFill>
-                  <a:srgbClr val="121B47"/>
+                  <a:srgbClr val="C6D2EA"/>
                 </a:solidFill>
                 <a:latin typeface="Segoe UI" pitchFamily="34" charset="0"/>
                 <a:ea typeface="Segoe UI" pitchFamily="34" charset="-122"/>
@@ -11917,7 +11917,7 @@
             <a:r>
               <a:rPr lang="en-US" sz="900" dirty="0">
                 <a:solidFill>
-                  <a:srgbClr val="9AA2B5"/>
+                  <a:srgbClr val="6C7BA6"/>
                 </a:solidFill>
                 <a:latin typeface="Segoe UI" pitchFamily="34" charset="0"/>
                 <a:ea typeface="Segoe UI" pitchFamily="34" charset="-122"/>
@@ -11931,7 +11931,7 @@
             <a:r>
               <a:rPr lang="en-US" sz="900" b="1" dirty="0">
                 <a:solidFill>
-                  <a:srgbClr val="1C4E9D"/>
+                  <a:srgbClr val="9FD0FF"/>
                 </a:solidFill>
                 <a:latin typeface="Segoe UI" pitchFamily="34" charset="0"/>
                 <a:ea typeface="Segoe UI" pitchFamily="34" charset="-122"/>
@@ -11970,7 +11970,7 @@
             <a:r>
               <a:rPr lang="en-US" sz="900" dirty="0">
                 <a:solidFill>
-                  <a:srgbClr val="9AA2B5"/>
+                  <a:srgbClr val="8FA0C6"/>
                 </a:solidFill>
                 <a:latin typeface="Segoe UI" pitchFamily="34" charset="0"/>
                 <a:ea typeface="Segoe UI" pitchFamily="34" charset="-122"/>
@@ -13587,131 +13587,14 @@
       </p:sp>
       <p:sp>
         <p:nvSpPr>
-          <p:cNvPr id="9" name="Text 5"/>
-          <p:cNvSpPr txBox="1"/>
-          <p:nvPr/>
-        </p:nvSpPr>
-        <p:spPr>
-          <a:xfrm>
-            <a:off x="749300" y="2489200"/>
-            <a:ext cx="1397000" cy="1041400"/>
-          </a:xfrm>
-          <a:prstGeom prst="rect">
-            <a:avLst/>
-          </a:prstGeom>
-          <a:noFill/>
-          <a:ln/>
-        </p:spPr>
-        <p:txBody>
-          <a:bodyPr wrap="square" lIns="0" tIns="0" rIns="0" bIns="0" rtlCol="0" anchor="t"/>
-          <a:lstStyle/>
-          <a:p>
-            <a:pPr indent="0" marL="0">
-              <a:buNone/>
-            </a:pPr>
-            <a:r>
-              <a:rPr lang="en-US" sz="900" b="1" dirty="0">
-                <a:solidFill>
-                  <a:srgbClr val="15224B"/>
-                </a:solidFill>
-                <a:latin typeface="Segoe UI" pitchFamily="34" charset="0"/>
-                <a:ea typeface="Segoe UI" pitchFamily="34" charset="-122"/>
-                <a:cs typeface="Segoe UI" pitchFamily="34" charset="-120"/>
-              </a:rPr>
-              <a:t>ASecureCloud</a:t>
-            </a:r>
-            <a:endParaRPr lang="en-US" sz="900" dirty="0"/>
-          </a:p>
-        </p:txBody>
-      </p:sp>
-      <p:sp>
-        <p:nvSpPr>
-          <p:cNvPr id="10" name="Text 6"/>
-          <p:cNvSpPr txBox="1"/>
-          <p:nvPr/>
-        </p:nvSpPr>
-        <p:spPr>
-          <a:xfrm>
-            <a:off x="2286000" y="2489200"/>
-            <a:ext cx="3810000" cy="1041400"/>
-          </a:xfrm>
-          <a:prstGeom prst="rect">
-            <a:avLst/>
-          </a:prstGeom>
-          <a:noFill/>
-          <a:ln/>
-        </p:spPr>
-        <p:txBody>
-          <a:bodyPr wrap="square" lIns="0" tIns="0" rIns="0" bIns="0" rtlCol="0" anchor="t"/>
-          <a:lstStyle/>
-          <a:p>
-            <a:pPr indent="0" marL="0">
-              <a:buNone/>
-            </a:pPr>
-            <a:r>
-              <a:rPr lang="en-US" sz="900" dirty="0">
-                <a:solidFill>
-                  <a:srgbClr val="5B6378"/>
-                </a:solidFill>
-                <a:latin typeface="Segoe UI Semilight" pitchFamily="34" charset="0"/>
-                <a:ea typeface="Segoe UI Semilight" pitchFamily="34" charset="-122"/>
-                <a:cs typeface="Segoe UI Semilight" pitchFamily="34" charset="-120"/>
-              </a:rPr>
-              <a:t>Automates data collection for a Well-Architected review, suggests answers, and generates CloudFormation and AWS CLI templates that resolve findings.</a:t>
-            </a:r>
-            <a:endParaRPr lang="en-US" sz="900" dirty="0"/>
-          </a:p>
-        </p:txBody>
-      </p:sp>
-      <p:sp>
-        <p:nvSpPr>
-          <p:cNvPr id="11" name="Text 7"/>
-          <p:cNvSpPr txBox="1"/>
-          <p:nvPr/>
-        </p:nvSpPr>
-        <p:spPr>
-          <a:xfrm>
-            <a:off x="6477000" y="2489200"/>
-            <a:ext cx="2895600" cy="1041400"/>
-          </a:xfrm>
-          <a:prstGeom prst="rect">
-            <a:avLst/>
-          </a:prstGeom>
-          <a:noFill/>
-          <a:ln/>
-        </p:spPr>
-        <p:txBody>
-          <a:bodyPr wrap="square" lIns="0" tIns="0" rIns="0" bIns="0" rtlCol="0" anchor="t"/>
-          <a:lstStyle/>
-          <a:p>
-            <a:pPr indent="0" marL="0">
-              <a:buNone/>
-            </a:pPr>
-            <a:r>
-              <a:rPr lang="en-US" sz="900" dirty="0">
-                <a:solidFill>
-                  <a:srgbClr val="5B6378"/>
-                </a:solidFill>
-                <a:latin typeface="Segoe UI Semilight" pitchFamily="34" charset="0"/>
-                <a:ea typeface="Segoe UI Semilight" pitchFamily="34" charset="-122"/>
-                <a:cs typeface="Segoe UI Semilight" pitchFamily="34" charset="-120"/>
-              </a:rPr>
-              <a:t>Licensed and operated by OBP. Premium required for Well-Architected reviews; licences reassign between accounts and are held as a pool.</a:t>
-            </a:r>
-            <a:endParaRPr lang="en-US" sz="900" dirty="0"/>
-          </a:p>
-        </p:txBody>
-      </p:sp>
-      <p:sp>
-        <p:nvSpPr>
-          <p:cNvPr id="12" name="Shape 8"/>
+          <p:cNvPr id="9" name="Shape 5"/>
           <p:cNvSpPr/>
           <p:nvPr/>
         </p:nvSpPr>
         <p:spPr>
           <a:xfrm>
-            <a:off x="566420" y="3460750"/>
-            <a:ext cx="11055350" cy="1041400"/>
+            <a:off x="566420" y="3308350"/>
+            <a:ext cx="11055350" cy="939800"/>
           </a:xfrm>
           <a:prstGeom prst="rect">
             <a:avLst/>
@@ -13724,14 +13607,131 @@
       </p:sp>
       <p:sp>
         <p:nvSpPr>
+          <p:cNvPr id="10" name="Text 6"/>
+          <p:cNvSpPr txBox="1"/>
+          <p:nvPr/>
+        </p:nvSpPr>
+        <p:spPr>
+          <a:xfrm>
+            <a:off x="749300" y="2438400"/>
+            <a:ext cx="1397000" cy="939800"/>
+          </a:xfrm>
+          <a:prstGeom prst="rect">
+            <a:avLst/>
+          </a:prstGeom>
+          <a:noFill/>
+          <a:ln/>
+        </p:spPr>
+        <p:txBody>
+          <a:bodyPr wrap="square" lIns="0" tIns="0" rIns="0" bIns="0" rtlCol="0" anchor="t"/>
+          <a:lstStyle/>
+          <a:p>
+            <a:pPr indent="0" marL="0">
+              <a:buNone/>
+            </a:pPr>
+            <a:r>
+              <a:rPr lang="en-US" sz="900" b="1" dirty="0">
+                <a:solidFill>
+                  <a:srgbClr val="15224B"/>
+                </a:solidFill>
+                <a:latin typeface="Segoe UI" pitchFamily="34" charset="0"/>
+                <a:ea typeface="Segoe UI" pitchFamily="34" charset="-122"/>
+                <a:cs typeface="Segoe UI" pitchFamily="34" charset="-120"/>
+              </a:rPr>
+              <a:t>ASecureCloud</a:t>
+            </a:r>
+            <a:endParaRPr lang="en-US" sz="900" dirty="0"/>
+          </a:p>
+        </p:txBody>
+      </p:sp>
+      <p:sp>
+        <p:nvSpPr>
+          <p:cNvPr id="11" name="Text 7"/>
+          <p:cNvSpPr txBox="1"/>
+          <p:nvPr/>
+        </p:nvSpPr>
+        <p:spPr>
+          <a:xfrm>
+            <a:off x="2286000" y="2438400"/>
+            <a:ext cx="3810000" cy="939800"/>
+          </a:xfrm>
+          <a:prstGeom prst="rect">
+            <a:avLst/>
+          </a:prstGeom>
+          <a:noFill/>
+          <a:ln/>
+        </p:spPr>
+        <p:txBody>
+          <a:bodyPr wrap="square" lIns="0" tIns="0" rIns="0" bIns="0" rtlCol="0" anchor="t"/>
+          <a:lstStyle/>
+          <a:p>
+            <a:pPr indent="0" marL="0">
+              <a:buNone/>
+            </a:pPr>
+            <a:r>
+              <a:rPr lang="en-US" sz="900" dirty="0">
+                <a:solidFill>
+                  <a:srgbClr val="5B6378"/>
+                </a:solidFill>
+                <a:latin typeface="Segoe UI Semilight" pitchFamily="34" charset="0"/>
+                <a:ea typeface="Segoe UI Semilight" pitchFamily="34" charset="-122"/>
+                <a:cs typeface="Segoe UI Semilight" pitchFamily="34" charset="-120"/>
+              </a:rPr>
+              <a:t>Automates data collection for a Well-Architected review, suggests answers, and generates CloudFormation and AWS CLI templates that resolve findings.</a:t>
+            </a:r>
+            <a:endParaRPr lang="en-US" sz="900" dirty="0"/>
+          </a:p>
+        </p:txBody>
+      </p:sp>
+      <p:sp>
+        <p:nvSpPr>
+          <p:cNvPr id="12" name="Text 8"/>
+          <p:cNvSpPr txBox="1"/>
+          <p:nvPr/>
+        </p:nvSpPr>
+        <p:spPr>
+          <a:xfrm>
+            <a:off x="6477000" y="2438400"/>
+            <a:ext cx="2895600" cy="939800"/>
+          </a:xfrm>
+          <a:prstGeom prst="rect">
+            <a:avLst/>
+          </a:prstGeom>
+          <a:noFill/>
+          <a:ln/>
+        </p:spPr>
+        <p:txBody>
+          <a:bodyPr wrap="square" lIns="0" tIns="0" rIns="0" bIns="0" rtlCol="0" anchor="t"/>
+          <a:lstStyle/>
+          <a:p>
+            <a:pPr indent="0" marL="0">
+              <a:buNone/>
+            </a:pPr>
+            <a:r>
+              <a:rPr lang="en-US" sz="900" dirty="0">
+                <a:solidFill>
+                  <a:srgbClr val="5B6378"/>
+                </a:solidFill>
+                <a:latin typeface="Segoe UI Semilight" pitchFamily="34" charset="0"/>
+                <a:ea typeface="Segoe UI Semilight" pitchFamily="34" charset="-122"/>
+                <a:cs typeface="Segoe UI Semilight" pitchFamily="34" charset="-120"/>
+              </a:rPr>
+              <a:t>Licensed and operated by OBP. Premium required for Well-Architected reviews; licences reassign between accounts and are held as a pool.</a:t>
+            </a:r>
+            <a:endParaRPr lang="en-US" sz="900" dirty="0"/>
+          </a:p>
+        </p:txBody>
+      </p:sp>
+      <p:sp>
+        <p:nvSpPr>
           <p:cNvPr id="13" name="Text 9"/>
           <p:cNvSpPr txBox="1"/>
           <p:nvPr/>
         </p:nvSpPr>
         <p:spPr>
           <a:xfrm>
-            <a:off x="749300" y="3530600"/>
-            <a:ext cx="1397000" cy="1041400"/>
+            <a:off x="749300" y="3378200"/>
+            <a:ext cx="1397000" cy="939800"/>
           </a:xfrm>
           <a:prstGeom prst="rect">
             <a:avLst/>
@@ -13769,8 +13769,8 @@
         </p:nvSpPr>
         <p:spPr>
           <a:xfrm>
-            <a:off x="2286000" y="3530600"/>
-            <a:ext cx="3810000" cy="1041400"/>
+            <a:off x="2286000" y="3378200"/>
+            <a:ext cx="3810000" cy="939800"/>
           </a:xfrm>
           <a:prstGeom prst="rect">
             <a:avLst/>
@@ -13808,8 +13808,8 @@
         </p:nvSpPr>
         <p:spPr>
           <a:xfrm>
-            <a:off x="6477000" y="3530600"/>
-            <a:ext cx="2895600" cy="1041400"/>
+            <a:off x="6477000" y="3378200"/>
+            <a:ext cx="2895600" cy="939800"/>
           </a:xfrm>
           <a:prstGeom prst="rect">
             <a:avLst/>
@@ -13847,8 +13847,8 @@
         </p:nvSpPr>
         <p:spPr>
           <a:xfrm>
-            <a:off x="749300" y="4572000"/>
-            <a:ext cx="1397000" cy="1041400"/>
+            <a:off x="749300" y="4318000"/>
+            <a:ext cx="1397000" cy="939800"/>
           </a:xfrm>
           <a:prstGeom prst="rect">
             <a:avLst/>
@@ -13886,8 +13886,8 @@
         </p:nvSpPr>
         <p:spPr>
           <a:xfrm>
-            <a:off x="2286000" y="4572000"/>
-            <a:ext cx="3810000" cy="1041400"/>
+            <a:off x="2286000" y="4318000"/>
+            <a:ext cx="3810000" cy="939800"/>
           </a:xfrm>
           <a:prstGeom prst="rect">
             <a:avLst/>
@@ -13925,8 +13925,8 @@
         </p:nvSpPr>
         <p:spPr>
           <a:xfrm>
-            <a:off x="6477000" y="4572000"/>
-            <a:ext cx="2895600" cy="1041400"/>
+            <a:off x="6477000" y="4318000"/>
+            <a:ext cx="2895600" cy="939800"/>
           </a:xfrm>
           <a:prstGeom prst="rect">
             <a:avLst/>
@@ -13958,14 +13958,36 @@
       </p:sp>
       <p:sp>
         <p:nvSpPr>
-          <p:cNvPr id="19" name="Text 15"/>
-          <p:cNvSpPr txBox="1"/>
-          <p:nvPr/>
-        </p:nvSpPr>
-        <p:spPr>
-          <a:xfrm>
-            <a:off x="749300" y="5486400"/>
-            <a:ext cx="10795000" cy="203200"/>
+          <p:cNvPr id="19" name="Shape 15"/>
+          <p:cNvSpPr/>
+          <p:nvPr/>
+        </p:nvSpPr>
+        <p:spPr>
+          <a:xfrm>
+            <a:off x="566420" y="5760720"/>
+            <a:ext cx="11057890" cy="566420"/>
+          </a:xfrm>
+          <a:prstGeom prst="roundRect">
+            <a:avLst>
+              <a:gd name="adj" fmla="val 22601"/>
+            </a:avLst>
+          </a:prstGeom>
+          <a:solidFill>
+            <a:srgbClr val="15224B"/>
+          </a:solidFill>
+          <a:ln/>
+        </p:spPr>
+      </p:sp>
+      <p:sp>
+        <p:nvSpPr>
+          <p:cNvPr id="20" name="Text 16"/>
+          <p:cNvSpPr txBox="1"/>
+          <p:nvPr/>
+        </p:nvSpPr>
+        <p:spPr>
+          <a:xfrm>
+            <a:off x="838200" y="5867400"/>
+            <a:ext cx="10541000" cy="355600"/>
           </a:xfrm>
           <a:prstGeom prst="rect">
             <a:avLst/>
@@ -13981,7 +14003,7 @@
               <a:buNone/>
             </a:pPr>
             <a:r>
-              <a:rPr lang="en-US" sz="900" b="1" dirty="0">
+              <a:rPr lang="en-US" sz="1050" b="1" spc="110" kern="0" dirty="0">
                 <a:solidFill>
                   <a:srgbClr val="F36F20"/>
                 </a:solidFill>
@@ -13989,23 +14011,23 @@
                 <a:ea typeface="Segoe UI" pitchFamily="34" charset="-122"/>
                 <a:cs typeface="Segoe UI" pitchFamily="34" charset="-120"/>
               </a:rPr>
-              <a:t>Not yet named:  </a:t>
-            </a:r>
-            <a:pPr indent="0" marL="0">
-              <a:buNone/>
-            </a:pPr>
-            <a:r>
-              <a:rPr lang="en-US" sz="900" dirty="0">
-                <a:solidFill>
-                  <a:srgbClr val="5B6378"/>
-                </a:solidFill>
-                <a:latin typeface="Segoe UI Semilight" pitchFamily="34" charset="0"/>
-                <a:ea typeface="Segoe UI Semilight" pitchFamily="34" charset="-122"/>
-                <a:cs typeface="Segoe UI Semilight" pitchFamily="34" charset="-120"/>
-              </a:rPr>
-              <a:t>the deck names no component for Managed AWS Alliances or Managed Marketplace Operations, and no Automatum software on the software line of any of the four listings. Name them or mark them confirmed-empty.</a:t>
-            </a:r>
-            <a:endParaRPr lang="en-US" sz="900" dirty="0"/>
+              <a:t>NOT YET NAMED</a:t>
+            </a:r>
+            <a:pPr indent="0" marL="0">
+              <a:buNone/>
+            </a:pPr>
+            <a:r>
+              <a:rPr lang="en-US" sz="1050" dirty="0">
+                <a:solidFill>
+                  <a:srgbClr val="D7E1F5"/>
+                </a:solidFill>
+                <a:latin typeface="Segoe UI Semilight" pitchFamily="34" charset="0"/>
+                <a:ea typeface="Segoe UI Semilight" pitchFamily="34" charset="-122"/>
+                <a:cs typeface="Segoe UI Semilight" pitchFamily="34" charset="-120"/>
+              </a:rPr>
+              <a:t>    No component is named for Alliances or Operations, and no Automatum software for the software line of any of the four listings. Name them, or mark them confirmed-empty.</a:t>
+            </a:r>
+            <a:endParaRPr lang="en-US" sz="1050" dirty="0"/>
           </a:p>
         </p:txBody>
       </p:sp>
@@ -14313,8 +14335,8 @@
         </p:nvSpPr>
         <p:spPr>
           <a:xfrm>
-            <a:off x="566420" y="2292350"/>
-            <a:ext cx="11055350" cy="311150"/>
+            <a:off x="566420" y="2216150"/>
+            <a:ext cx="11055350" cy="279400"/>
           </a:xfrm>
           <a:prstGeom prst="rect">
             <a:avLst/>
@@ -14333,7 +14355,7 @@
         </p:nvSpPr>
         <p:spPr>
           <a:xfrm>
-            <a:off x="749300" y="2362200"/>
+            <a:off x="749300" y="2286000"/>
             <a:ext cx="2413000" cy="203200"/>
           </a:xfrm>
           <a:prstGeom prst="rect">
@@ -14350,7 +14372,7 @@
               <a:buNone/>
             </a:pPr>
             <a:r>
-              <a:rPr lang="en-US" sz="900" b="1" dirty="0">
+              <a:rPr lang="en-US" sz="850" b="1" dirty="0">
                 <a:solidFill>
                   <a:srgbClr val="FFFFFF"/>
                 </a:solidFill>
@@ -14360,7 +14382,7 @@
               </a:rPr>
               <a:t>Term</a:t>
             </a:r>
-            <a:endParaRPr lang="en-US" sz="900" dirty="0"/>
+            <a:endParaRPr lang="en-US" sz="850" dirty="0"/>
           </a:p>
         </p:txBody>
       </p:sp>
@@ -14372,7 +14394,7 @@
         </p:nvSpPr>
         <p:spPr>
           <a:xfrm>
-            <a:off x="3327400" y="2362200"/>
+            <a:off x="3327400" y="2286000"/>
             <a:ext cx="5270500" cy="203200"/>
           </a:xfrm>
           <a:prstGeom prst="rect">
@@ -14389,7 +14411,7 @@
               <a:buNone/>
             </a:pPr>
             <a:r>
-              <a:rPr lang="en-US" sz="900" b="1" dirty="0">
+              <a:rPr lang="en-US" sz="850" b="1" dirty="0">
                 <a:solidFill>
                   <a:srgbClr val="FFFFFF"/>
                 </a:solidFill>
@@ -14399,7 +14421,7 @@
               </a:rPr>
               <a:t>What has to be settled</a:t>
             </a:r>
-            <a:endParaRPr lang="en-US" sz="900" dirty="0"/>
+            <a:endParaRPr lang="en-US" sz="850" dirty="0"/>
           </a:p>
         </p:txBody>
       </p:sp>
@@ -14411,7 +14433,7 @@
         </p:nvSpPr>
         <p:spPr>
           <a:xfrm>
-            <a:off x="8890000" y="2362200"/>
+            <a:off x="8890000" y="2286000"/>
             <a:ext cx="2895600" cy="203200"/>
           </a:xfrm>
           <a:prstGeom prst="rect">
@@ -14428,7 +14450,7 @@
               <a:buNone/>
             </a:pPr>
             <a:r>
-              <a:rPr lang="en-US" sz="900" b="1" dirty="0">
+              <a:rPr lang="en-US" sz="850" b="1" dirty="0">
                 <a:solidFill>
                   <a:srgbClr val="FFFFFF"/>
                 </a:solidFill>
@@ -14438,137 +14460,20 @@
               </a:rPr>
               <a:t>Owner and status</a:t>
             </a:r>
-            <a:endParaRPr lang="en-US" sz="900" dirty="0"/>
-          </a:p>
-        </p:txBody>
-      </p:sp>
-      <p:sp>
-        <p:nvSpPr>
-          <p:cNvPr id="13" name="Text 9"/>
-          <p:cNvSpPr txBox="1"/>
-          <p:nvPr/>
-        </p:nvSpPr>
-        <p:spPr>
-          <a:xfrm>
-            <a:off x="749300" y="2724150"/>
-            <a:ext cx="2413000" cy="311150"/>
-          </a:xfrm>
-          <a:prstGeom prst="rect">
-            <a:avLst/>
-          </a:prstGeom>
-          <a:noFill/>
-          <a:ln/>
-        </p:spPr>
-        <p:txBody>
-          <a:bodyPr wrap="square" lIns="0" tIns="0" rIns="0" bIns="0" rtlCol="0" anchor="t"/>
-          <a:lstStyle/>
-          <a:p>
-            <a:pPr indent="0" marL="0">
-              <a:buNone/>
-            </a:pPr>
-            <a:r>
-              <a:rPr lang="en-US" sz="900" b="1" dirty="0">
-                <a:solidFill>
-                  <a:srgbClr val="15224B"/>
-                </a:solidFill>
-                <a:latin typeface="Segoe UI" pitchFamily="34" charset="0"/>
-                <a:ea typeface="Segoe UI" pitchFamily="34" charset="-122"/>
-                <a:cs typeface="Segoe UI" pitchFamily="34" charset="-120"/>
-              </a:rPr>
-              <a:t>Flow of funds and payment trigger</a:t>
-            </a:r>
-            <a:endParaRPr lang="en-US" sz="900" dirty="0"/>
-          </a:p>
-        </p:txBody>
-      </p:sp>
-      <p:sp>
-        <p:nvSpPr>
-          <p:cNvPr id="14" name="Text 10"/>
-          <p:cNvSpPr txBox="1"/>
-          <p:nvPr/>
-        </p:nvSpPr>
-        <p:spPr>
-          <a:xfrm>
-            <a:off x="3327400" y="2724150"/>
-            <a:ext cx="5270500" cy="311150"/>
-          </a:xfrm>
-          <a:prstGeom prst="rect">
-            <a:avLst/>
-          </a:prstGeom>
-          <a:noFill/>
-          <a:ln/>
-        </p:spPr>
-        <p:txBody>
-          <a:bodyPr wrap="square" lIns="0" tIns="0" rIns="0" bIns="0" rtlCol="0" anchor="t"/>
-          <a:lstStyle/>
-          <a:p>
-            <a:pPr indent="0" marL="0">
-              <a:buNone/>
-            </a:pPr>
-            <a:r>
-              <a:rPr lang="en-US" sz="900" dirty="0">
-                <a:solidFill>
-                  <a:srgbClr val="5B6378"/>
-                </a:solidFill>
-                <a:latin typeface="Segoe UI Semilight" pitchFamily="34" charset="0"/>
-                <a:ea typeface="Segoe UI Semilight" pitchFamily="34" charset="-122"/>
-                <a:cs typeface="Segoe UI Semilight" pitchFamily="34" charset="-120"/>
-              </a:rPr>
-              <a:t>AWS disbursement to Automatum vs invoice at [N] days; who carries the float, including the Accelerator’s 50/50</a:t>
-            </a:r>
-            <a:endParaRPr lang="en-US" sz="900" dirty="0"/>
-          </a:p>
-        </p:txBody>
-      </p:sp>
-      <p:sp>
-        <p:nvSpPr>
-          <p:cNvPr id="15" name="Text 11"/>
-          <p:cNvSpPr txBox="1"/>
-          <p:nvPr/>
-        </p:nvSpPr>
-        <p:spPr>
-          <a:xfrm>
-            <a:off x="8890000" y="2724150"/>
-            <a:ext cx="2895600" cy="311150"/>
-          </a:xfrm>
-          <a:prstGeom prst="rect">
-            <a:avLst/>
-          </a:prstGeom>
-          <a:noFill/>
-          <a:ln/>
-        </p:spPr>
-        <p:txBody>
-          <a:bodyPr wrap="square" lIns="0" tIns="0" rIns="0" bIns="0" rtlCol="0" anchor="t"/>
-          <a:lstStyle/>
-          <a:p>
-            <a:pPr indent="0" marL="0">
-              <a:buNone/>
-            </a:pPr>
-            <a:r>
-              <a:rPr lang="en-US" sz="900" dirty="0">
-                <a:solidFill>
-                  <a:srgbClr val="5B6378"/>
-                </a:solidFill>
-                <a:latin typeface="Segoe UI Semilight" pitchFamily="34" charset="0"/>
-                <a:ea typeface="Segoe UI Semilight" pitchFamily="34" charset="-122"/>
-                <a:cs typeface="Segoe UI Semilight" pitchFamily="34" charset="-120"/>
-              </a:rPr>
-              <a:t>Both · to agree</a:t>
-            </a:r>
-            <a:endParaRPr lang="en-US" sz="900" dirty="0"/>
-          </a:p>
-        </p:txBody>
-      </p:sp>
-      <p:sp>
-        <p:nvSpPr>
-          <p:cNvPr id="16" name="Shape 12"/>
+            <a:endParaRPr lang="en-US" sz="850" dirty="0"/>
+          </a:p>
+        </p:txBody>
+      </p:sp>
+      <p:sp>
+        <p:nvSpPr>
+          <p:cNvPr id="13" name="Shape 9"/>
           <p:cNvSpPr/>
           <p:nvPr/>
         </p:nvSpPr>
         <p:spPr>
           <a:xfrm>
-            <a:off x="566420" y="2965450"/>
-            <a:ext cx="11055350" cy="311150"/>
+            <a:off x="566420" y="2825750"/>
+            <a:ext cx="11055350" cy="279400"/>
           </a:xfrm>
           <a:prstGeom prst="rect">
             <a:avLst/>
@@ -14581,248 +14486,14 @@
       </p:sp>
       <p:sp>
         <p:nvSpPr>
-          <p:cNvPr id="17" name="Text 13"/>
-          <p:cNvSpPr txBox="1"/>
-          <p:nvPr/>
-        </p:nvSpPr>
-        <p:spPr>
-          <a:xfrm>
-            <a:off x="749300" y="3035300"/>
-            <a:ext cx="2413000" cy="311150"/>
-          </a:xfrm>
-          <a:prstGeom prst="rect">
-            <a:avLst/>
-          </a:prstGeom>
-          <a:noFill/>
-          <a:ln/>
-        </p:spPr>
-        <p:txBody>
-          <a:bodyPr wrap="square" lIns="0" tIns="0" rIns="0" bIns="0" rtlCol="0" anchor="t"/>
-          <a:lstStyle/>
-          <a:p>
-            <a:pPr indent="0" marL="0">
-              <a:buNone/>
-            </a:pPr>
-            <a:r>
-              <a:rPr lang="en-US" sz="900" b="1" dirty="0">
-                <a:solidFill>
-                  <a:srgbClr val="15224B"/>
-                </a:solidFill>
-                <a:latin typeface="Segoe UI" pitchFamily="34" charset="0"/>
-                <a:ea typeface="Segoe UI" pitchFamily="34" charset="-122"/>
-                <a:cs typeface="Segoe UI" pitchFamily="34" charset="-120"/>
-              </a:rPr>
-              <a:t>Revenue split, software line</a:t>
-            </a:r>
-            <a:endParaRPr lang="en-US" sz="900" dirty="0"/>
-          </a:p>
-        </p:txBody>
-      </p:sp>
-      <p:sp>
-        <p:nvSpPr>
-          <p:cNvPr id="18" name="Text 14"/>
-          <p:cNvSpPr txBox="1"/>
-          <p:nvPr/>
-        </p:nvSpPr>
-        <p:spPr>
-          <a:xfrm>
-            <a:off x="3327400" y="3035300"/>
-            <a:ext cx="5270500" cy="311150"/>
-          </a:xfrm>
-          <a:prstGeom prst="rect">
-            <a:avLst/>
-          </a:prstGeom>
-          <a:noFill/>
-          <a:ln/>
-        </p:spPr>
-        <p:txBody>
-          <a:bodyPr wrap="square" lIns="0" tIns="0" rIns="0" bIns="0" rtlCol="0" anchor="t"/>
-          <a:lstStyle/>
-          <a:p>
-            <a:pPr indent="0" marL="0">
-              <a:buNone/>
-            </a:pPr>
-            <a:r>
-              <a:rPr lang="en-US" sz="900" dirty="0">
-                <a:solidFill>
-                  <a:srgbClr val="5B6378"/>
-                </a:solidFill>
-                <a:latin typeface="Segoe UI Semilight" pitchFamily="34" charset="0"/>
-                <a:ea typeface="Segoe UI Semilight" pitchFamily="34" charset="-122"/>
-                <a:cs typeface="Segoe UI Semilight" pitchFamily="34" charset="-120"/>
-              </a:rPr>
-              <a:t>Follows the licensor</a:t>
-            </a:r>
-            <a:endParaRPr lang="en-US" sz="900" dirty="0"/>
-          </a:p>
-        </p:txBody>
-      </p:sp>
-      <p:sp>
-        <p:nvSpPr>
-          <p:cNvPr id="19" name="Text 15"/>
-          <p:cNvSpPr txBox="1"/>
-          <p:nvPr/>
-        </p:nvSpPr>
-        <p:spPr>
-          <a:xfrm>
-            <a:off x="8890000" y="3035300"/>
-            <a:ext cx="2895600" cy="311150"/>
-          </a:xfrm>
-          <a:prstGeom prst="rect">
-            <a:avLst/>
-          </a:prstGeom>
-          <a:noFill/>
-          <a:ln/>
-        </p:spPr>
-        <p:txBody>
-          <a:bodyPr wrap="square" lIns="0" tIns="0" rIns="0" bIns="0" rtlCol="0" anchor="t"/>
-          <a:lstStyle/>
-          <a:p>
-            <a:pPr indent="0" marL="0">
-              <a:buNone/>
-            </a:pPr>
-            <a:r>
-              <a:rPr lang="en-US" sz="900" dirty="0">
-                <a:solidFill>
-                  <a:srgbClr val="5B6378"/>
-                </a:solidFill>
-                <a:latin typeface="Segoe UI Semilight" pitchFamily="34" charset="0"/>
-                <a:ea typeface="Segoe UI Semilight" pitchFamily="34" charset="-122"/>
-                <a:cs typeface="Segoe UI Semilight" pitchFamily="34" charset="-120"/>
-              </a:rPr>
-              <a:t>Both · to agree</a:t>
-            </a:r>
-            <a:endParaRPr lang="en-US" sz="900" dirty="0"/>
-          </a:p>
-        </p:txBody>
-      </p:sp>
-      <p:sp>
-        <p:nvSpPr>
-          <p:cNvPr id="20" name="Text 16"/>
-          <p:cNvSpPr txBox="1"/>
-          <p:nvPr/>
-        </p:nvSpPr>
-        <p:spPr>
-          <a:xfrm>
-            <a:off x="749300" y="3346450"/>
-            <a:ext cx="2413000" cy="311150"/>
-          </a:xfrm>
-          <a:prstGeom prst="rect">
-            <a:avLst/>
-          </a:prstGeom>
-          <a:noFill/>
-          <a:ln/>
-        </p:spPr>
-        <p:txBody>
-          <a:bodyPr wrap="square" lIns="0" tIns="0" rIns="0" bIns="0" rtlCol="0" anchor="t"/>
-          <a:lstStyle/>
-          <a:p>
-            <a:pPr indent="0" marL="0">
-              <a:buNone/>
-            </a:pPr>
-            <a:r>
-              <a:rPr lang="en-US" sz="900" b="1" dirty="0">
-                <a:solidFill>
-                  <a:srgbClr val="15224B"/>
-                </a:solidFill>
-                <a:latin typeface="Segoe UI" pitchFamily="34" charset="0"/>
-                <a:ea typeface="Segoe UI" pitchFamily="34" charset="-122"/>
-                <a:cs typeface="Segoe UI" pitchFamily="34" charset="-120"/>
-              </a:rPr>
-              <a:t>Revenue split, professional services line</a:t>
-            </a:r>
-            <a:endParaRPr lang="en-US" sz="900" dirty="0"/>
-          </a:p>
-        </p:txBody>
-      </p:sp>
-      <p:sp>
-        <p:nvSpPr>
-          <p:cNvPr id="21" name="Text 17"/>
-          <p:cNvSpPr txBox="1"/>
-          <p:nvPr/>
-        </p:nvSpPr>
-        <p:spPr>
-          <a:xfrm>
-            <a:off x="3327400" y="3346450"/>
-            <a:ext cx="5270500" cy="311150"/>
-          </a:xfrm>
-          <a:prstGeom prst="rect">
-            <a:avLst/>
-          </a:prstGeom>
-          <a:noFill/>
-          <a:ln/>
-        </p:spPr>
-        <p:txBody>
-          <a:bodyPr wrap="square" lIns="0" tIns="0" rIns="0" bIns="0" rtlCol="0" anchor="t"/>
-          <a:lstStyle/>
-          <a:p>
-            <a:pPr indent="0" marL="0">
-              <a:buNone/>
-            </a:pPr>
-            <a:r>
-              <a:rPr lang="en-US" sz="900" dirty="0">
-                <a:solidFill>
-                  <a:srgbClr val="5B6378"/>
-                </a:solidFill>
-                <a:latin typeface="Segoe UI Semilight" pitchFamily="34" charset="0"/>
-                <a:ea typeface="Segoe UI Semilight" pitchFamily="34" charset="-122"/>
-                <a:cs typeface="Segoe UI Semilight" pitchFamily="34" charset="-120"/>
-              </a:rPr>
-              <a:t>Follows the delivering party</a:t>
-            </a:r>
-            <a:endParaRPr lang="en-US" sz="900" dirty="0"/>
-          </a:p>
-        </p:txBody>
-      </p:sp>
-      <p:sp>
-        <p:nvSpPr>
-          <p:cNvPr id="22" name="Text 18"/>
-          <p:cNvSpPr txBox="1"/>
-          <p:nvPr/>
-        </p:nvSpPr>
-        <p:spPr>
-          <a:xfrm>
-            <a:off x="8890000" y="3346450"/>
-            <a:ext cx="2895600" cy="311150"/>
-          </a:xfrm>
-          <a:prstGeom prst="rect">
-            <a:avLst/>
-          </a:prstGeom>
-          <a:noFill/>
-          <a:ln/>
-        </p:spPr>
-        <p:txBody>
-          <a:bodyPr wrap="square" lIns="0" tIns="0" rIns="0" bIns="0" rtlCol="0" anchor="t"/>
-          <a:lstStyle/>
-          <a:p>
-            <a:pPr indent="0" marL="0">
-              <a:buNone/>
-            </a:pPr>
-            <a:r>
-              <a:rPr lang="en-US" sz="900" dirty="0">
-                <a:solidFill>
-                  <a:srgbClr val="5B6378"/>
-                </a:solidFill>
-                <a:latin typeface="Segoe UI Semilight" pitchFamily="34" charset="0"/>
-                <a:ea typeface="Segoe UI Semilight" pitchFamily="34" charset="-122"/>
-                <a:cs typeface="Segoe UI Semilight" pitchFamily="34" charset="-120"/>
-              </a:rPr>
-              <a:t>Both · to agree</a:t>
-            </a:r>
-            <a:endParaRPr lang="en-US" sz="900" dirty="0"/>
-          </a:p>
-        </p:txBody>
-      </p:sp>
-      <p:sp>
-        <p:nvSpPr>
-          <p:cNvPr id="23" name="Shape 19"/>
+          <p:cNvPr id="14" name="Shape 10"/>
           <p:cNvSpPr/>
           <p:nvPr/>
         </p:nvSpPr>
         <p:spPr>
           <a:xfrm>
-            <a:off x="566420" y="3587750"/>
-            <a:ext cx="11055350" cy="311150"/>
+            <a:off x="566420" y="3384550"/>
+            <a:ext cx="11055350" cy="279400"/>
           </a:xfrm>
           <a:prstGeom prst="rect">
             <a:avLst/>
@@ -14835,248 +14506,14 @@
       </p:sp>
       <p:sp>
         <p:nvSpPr>
-          <p:cNvPr id="24" name="Text 20"/>
-          <p:cNvSpPr txBox="1"/>
-          <p:nvPr/>
-        </p:nvSpPr>
-        <p:spPr>
-          <a:xfrm>
-            <a:off x="749300" y="3657600"/>
-            <a:ext cx="2413000" cy="311150"/>
-          </a:xfrm>
-          <a:prstGeom prst="rect">
-            <a:avLst/>
-          </a:prstGeom>
-          <a:noFill/>
-          <a:ln/>
-        </p:spPr>
-        <p:txBody>
-          <a:bodyPr wrap="square" lIns="0" tIns="0" rIns="0" bIns="0" rtlCol="0" anchor="t"/>
-          <a:lstStyle/>
-          <a:p>
-            <a:pPr indent="0" marL="0">
-              <a:buNone/>
-            </a:pPr>
-            <a:r>
-              <a:rPr lang="en-US" sz="900" b="1" dirty="0">
-                <a:solidFill>
-                  <a:srgbClr val="15224B"/>
-                </a:solidFill>
-                <a:latin typeface="Segoe UI" pitchFamily="34" charset="0"/>
-                <a:ea typeface="Segoe UI" pitchFamily="34" charset="-122"/>
-                <a:cs typeface="Segoe UI" pitchFamily="34" charset="-120"/>
-              </a:rPr>
-              <a:t>Marketplace listing fee</a:t>
-            </a:r>
-            <a:endParaRPr lang="en-US" sz="900" dirty="0"/>
-          </a:p>
-        </p:txBody>
-      </p:sp>
-      <p:sp>
-        <p:nvSpPr>
-          <p:cNvPr id="25" name="Text 21"/>
-          <p:cNvSpPr txBox="1"/>
-          <p:nvPr/>
-        </p:nvSpPr>
-        <p:spPr>
-          <a:xfrm>
-            <a:off x="3327400" y="3657600"/>
-            <a:ext cx="5270500" cy="311150"/>
-          </a:xfrm>
-          <a:prstGeom prst="rect">
-            <a:avLst/>
-          </a:prstGeom>
-          <a:noFill/>
-          <a:ln/>
-        </p:spPr>
-        <p:txBody>
-          <a:bodyPr wrap="square" lIns="0" tIns="0" rIns="0" bIns="0" rtlCol="0" anchor="t"/>
-          <a:lstStyle/>
-          <a:p>
-            <a:pPr indent="0" marL="0">
-              <a:buNone/>
-            </a:pPr>
-            <a:r>
-              <a:rPr lang="en-US" sz="900" dirty="0">
-                <a:solidFill>
-                  <a:srgbClr val="5B6378"/>
-                </a:solidFill>
-                <a:latin typeface="Segoe UI Semilight" pitchFamily="34" charset="0"/>
-                <a:ea typeface="Segoe UI Semilight" pitchFamily="34" charset="-122"/>
-                <a:cs typeface="Segoe UI Semilight" pitchFamily="34" charset="-120"/>
-              </a:rPr>
-              <a:t>Rates, mechanics and how it is netted</a:t>
-            </a:r>
-            <a:endParaRPr lang="en-US" sz="900" dirty="0"/>
-          </a:p>
-        </p:txBody>
-      </p:sp>
-      <p:sp>
-        <p:nvSpPr>
-          <p:cNvPr id="26" name="Text 22"/>
-          <p:cNvSpPr txBox="1"/>
-          <p:nvPr/>
-        </p:nvSpPr>
-        <p:spPr>
-          <a:xfrm>
-            <a:off x="8890000" y="3657600"/>
-            <a:ext cx="2895600" cy="311150"/>
-          </a:xfrm>
-          <a:prstGeom prst="rect">
-            <a:avLst/>
-          </a:prstGeom>
-          <a:noFill/>
-          <a:ln/>
-        </p:spPr>
-        <p:txBody>
-          <a:bodyPr wrap="square" lIns="0" tIns="0" rIns="0" bIns="0" rtlCol="0" anchor="t"/>
-          <a:lstStyle/>
-          <a:p>
-            <a:pPr indent="0" marL="0">
-              <a:buNone/>
-            </a:pPr>
-            <a:r>
-              <a:rPr lang="en-US" sz="900" dirty="0">
-                <a:solidFill>
-                  <a:srgbClr val="5B6378"/>
-                </a:solidFill>
-                <a:latin typeface="Segoe UI Semilight" pitchFamily="34" charset="0"/>
-                <a:ea typeface="Segoe UI Semilight" pitchFamily="34" charset="-122"/>
-                <a:cs typeface="Segoe UI Semilight" pitchFamily="34" charset="-120"/>
-              </a:rPr>
-              <a:t>Automatum · to confirm</a:t>
-            </a:r>
-            <a:endParaRPr lang="en-US" sz="900" dirty="0"/>
-          </a:p>
-        </p:txBody>
-      </p:sp>
-      <p:sp>
-        <p:nvSpPr>
-          <p:cNvPr id="27" name="Text 23"/>
-          <p:cNvSpPr txBox="1"/>
-          <p:nvPr/>
-        </p:nvSpPr>
-        <p:spPr>
-          <a:xfrm>
-            <a:off x="749300" y="3968750"/>
-            <a:ext cx="2413000" cy="311150"/>
-          </a:xfrm>
-          <a:prstGeom prst="rect">
-            <a:avLst/>
-          </a:prstGeom>
-          <a:noFill/>
-          <a:ln/>
-        </p:spPr>
-        <p:txBody>
-          <a:bodyPr wrap="square" lIns="0" tIns="0" rIns="0" bIns="0" rtlCol="0" anchor="t"/>
-          <a:lstStyle/>
-          <a:p>
-            <a:pPr indent="0" marL="0">
-              <a:buNone/>
-            </a:pPr>
-            <a:r>
-              <a:rPr lang="en-US" sz="900" b="1" dirty="0">
-                <a:solidFill>
-                  <a:srgbClr val="15224B"/>
-                </a:solidFill>
-                <a:latin typeface="Segoe UI" pitchFamily="34" charset="0"/>
-                <a:ea typeface="Segoe UI" pitchFamily="34" charset="-122"/>
-                <a:cs typeface="Segoe UI" pitchFamily="34" charset="-120"/>
-              </a:rPr>
-              <a:t>Milestone cash and credits</a:t>
-            </a:r>
-            <a:endParaRPr lang="en-US" sz="900" dirty="0"/>
-          </a:p>
-        </p:txBody>
-      </p:sp>
-      <p:sp>
-        <p:nvSpPr>
-          <p:cNvPr id="28" name="Text 24"/>
-          <p:cNvSpPr txBox="1"/>
-          <p:nvPr/>
-        </p:nvSpPr>
-        <p:spPr>
-          <a:xfrm>
-            <a:off x="3327400" y="3968750"/>
-            <a:ext cx="5270500" cy="311150"/>
-          </a:xfrm>
-          <a:prstGeom prst="rect">
-            <a:avLst/>
-          </a:prstGeom>
-          <a:noFill/>
-          <a:ln/>
-        </p:spPr>
-        <p:txBody>
-          <a:bodyPr wrap="square" lIns="0" tIns="0" rIns="0" bIns="0" rtlCol="0" anchor="t"/>
-          <a:lstStyle/>
-          <a:p>
-            <a:pPr indent="0" marL="0">
-              <a:buNone/>
-            </a:pPr>
-            <a:r>
-              <a:rPr lang="en-US" sz="900" dirty="0">
-                <a:solidFill>
-                  <a:srgbClr val="5B6378"/>
-                </a:solidFill>
-                <a:latin typeface="Segoe UI Semilight" pitchFamily="34" charset="0"/>
-                <a:ea typeface="Segoe UI Semilight" pitchFamily="34" charset="-122"/>
-                <a:cs typeface="Segoe UI Semilight" pitchFamily="34" charset="-120"/>
-              </a:rPr>
-              <a:t>Figures are established; the division is not. Credits are worth face value only to the party with spend to offset</a:t>
-            </a:r>
-            <a:endParaRPr lang="en-US" sz="900" dirty="0"/>
-          </a:p>
-        </p:txBody>
-      </p:sp>
-      <p:sp>
-        <p:nvSpPr>
-          <p:cNvPr id="29" name="Text 25"/>
-          <p:cNvSpPr txBox="1"/>
-          <p:nvPr/>
-        </p:nvSpPr>
-        <p:spPr>
-          <a:xfrm>
-            <a:off x="8890000" y="3968750"/>
-            <a:ext cx="2895600" cy="311150"/>
-          </a:xfrm>
-          <a:prstGeom prst="rect">
-            <a:avLst/>
-          </a:prstGeom>
-          <a:noFill/>
-          <a:ln/>
-        </p:spPr>
-        <p:txBody>
-          <a:bodyPr wrap="square" lIns="0" tIns="0" rIns="0" bIns="0" rtlCol="0" anchor="t"/>
-          <a:lstStyle/>
-          <a:p>
-            <a:pPr indent="0" marL="0">
-              <a:buNone/>
-            </a:pPr>
-            <a:r>
-              <a:rPr lang="en-US" sz="900" dirty="0">
-                <a:solidFill>
-                  <a:srgbClr val="5B6378"/>
-                </a:solidFill>
-                <a:latin typeface="Segoe UI Semilight" pitchFamily="34" charset="0"/>
-                <a:ea typeface="Segoe UI Semilight" pitchFamily="34" charset="-122"/>
-                <a:cs typeface="Segoe UI Semilight" pitchFamily="34" charset="-120"/>
-              </a:rPr>
-              <a:t>Both · to agree</a:t>
-            </a:r>
-            <a:endParaRPr lang="en-US" sz="900" dirty="0"/>
-          </a:p>
-        </p:txBody>
-      </p:sp>
-      <p:sp>
-        <p:nvSpPr>
-          <p:cNvPr id="30" name="Shape 26"/>
+          <p:cNvPr id="15" name="Shape 11"/>
           <p:cNvSpPr/>
           <p:nvPr/>
         </p:nvSpPr>
         <p:spPr>
           <a:xfrm>
-            <a:off x="566420" y="4210050"/>
-            <a:ext cx="11055350" cy="311150"/>
+            <a:off x="566420" y="3943350"/>
+            <a:ext cx="11055350" cy="279400"/>
           </a:xfrm>
           <a:prstGeom prst="rect">
             <a:avLst/>
@@ -15089,248 +14526,14 @@
       </p:sp>
       <p:sp>
         <p:nvSpPr>
-          <p:cNvPr id="31" name="Text 27"/>
-          <p:cNvSpPr txBox="1"/>
-          <p:nvPr/>
-        </p:nvSpPr>
-        <p:spPr>
-          <a:xfrm>
-            <a:off x="749300" y="4279900"/>
-            <a:ext cx="2413000" cy="311150"/>
-          </a:xfrm>
-          <a:prstGeom prst="rect">
-            <a:avLst/>
-          </a:prstGeom>
-          <a:noFill/>
-          <a:ln/>
-        </p:spPr>
-        <p:txBody>
-          <a:bodyPr wrap="square" lIns="0" tIns="0" rIns="0" bIns="0" rtlCol="0" anchor="t"/>
-          <a:lstStyle/>
-          <a:p>
-            <a:pPr indent="0" marL="0">
-              <a:buNone/>
-            </a:pPr>
-            <a:r>
-              <a:rPr lang="en-US" sz="900" b="1" dirty="0">
-                <a:solidFill>
-                  <a:srgbClr val="15224B"/>
-                </a:solidFill>
-                <a:latin typeface="Segoe UI" pitchFamily="34" charset="0"/>
-                <a:ea typeface="Segoe UI" pitchFamily="34" charset="-122"/>
-                <a:cs typeface="Segoe UI" pitchFamily="34" charset="-120"/>
-              </a:rPr>
-              <a:t>Milestone 3 — the 55 leads</a:t>
-            </a:r>
-            <a:endParaRPr lang="en-US" sz="900" dirty="0"/>
-          </a:p>
-        </p:txBody>
-      </p:sp>
-      <p:sp>
-        <p:nvSpPr>
-          <p:cNvPr id="32" name="Text 28"/>
-          <p:cNvSpPr txBox="1"/>
-          <p:nvPr/>
-        </p:nvSpPr>
-        <p:spPr>
-          <a:xfrm>
-            <a:off x="3327400" y="4279900"/>
-            <a:ext cx="5270500" cy="311150"/>
-          </a:xfrm>
-          <a:prstGeom prst="rect">
-            <a:avLst/>
-          </a:prstGeom>
-          <a:noFill/>
-          <a:ln/>
-        </p:spPr>
-        <p:txBody>
-          <a:bodyPr wrap="square" lIns="0" tIns="0" rIns="0" bIns="0" rtlCol="0" anchor="t"/>
-          <a:lstStyle/>
-          <a:p>
-            <a:pPr indent="0" marL="0">
-              <a:buNone/>
-            </a:pPr>
-            <a:r>
-              <a:rPr lang="en-US" sz="900" dirty="0">
-                <a:solidFill>
-                  <a:srgbClr val="5B6378"/>
-                </a:solidFill>
-                <a:latin typeface="Segoe UI Semilight" pitchFamily="34" charset="0"/>
-                <a:ea typeface="Segoe UI Semilight" pitchFamily="34" charset="-122"/>
-                <a:cs typeface="Segoe UI Semilight" pitchFamily="34" charset="-120"/>
-              </a:rPr>
-              <a:t>Confirm the direction before agreeing who owns them</a:t>
-            </a:r>
-            <a:endParaRPr lang="en-US" sz="900" dirty="0"/>
-          </a:p>
-        </p:txBody>
-      </p:sp>
-      <p:sp>
-        <p:nvSpPr>
-          <p:cNvPr id="33" name="Text 29"/>
-          <p:cNvSpPr txBox="1"/>
-          <p:nvPr/>
-        </p:nvSpPr>
-        <p:spPr>
-          <a:xfrm>
-            <a:off x="8890000" y="4279900"/>
-            <a:ext cx="2895600" cy="311150"/>
-          </a:xfrm>
-          <a:prstGeom prst="rect">
-            <a:avLst/>
-          </a:prstGeom>
-          <a:noFill/>
-          <a:ln/>
-        </p:spPr>
-        <p:txBody>
-          <a:bodyPr wrap="square" lIns="0" tIns="0" rIns="0" bIns="0" rtlCol="0" anchor="t"/>
-          <a:lstStyle/>
-          <a:p>
-            <a:pPr indent="0" marL="0">
-              <a:buNone/>
-            </a:pPr>
-            <a:r>
-              <a:rPr lang="en-US" sz="900" dirty="0">
-                <a:solidFill>
-                  <a:srgbClr val="5B6378"/>
-                </a:solidFill>
-                <a:latin typeface="Segoe UI Semilight" pitchFamily="34" charset="0"/>
-                <a:ea typeface="Segoe UI Semilight" pitchFamily="34" charset="-122"/>
-                <a:cs typeface="Segoe UI Semilight" pitchFamily="34" charset="-120"/>
-              </a:rPr>
-              <a:t>Both · to confirm</a:t>
-            </a:r>
-            <a:endParaRPr lang="en-US" sz="900" dirty="0"/>
-          </a:p>
-        </p:txBody>
-      </p:sp>
-      <p:sp>
-        <p:nvSpPr>
-          <p:cNvPr id="34" name="Text 30"/>
-          <p:cNvSpPr txBox="1"/>
-          <p:nvPr/>
-        </p:nvSpPr>
-        <p:spPr>
-          <a:xfrm>
-            <a:off x="749300" y="4591050"/>
-            <a:ext cx="2413000" cy="311150"/>
-          </a:xfrm>
-          <a:prstGeom prst="rect">
-            <a:avLst/>
-          </a:prstGeom>
-          <a:noFill/>
-          <a:ln/>
-        </p:spPr>
-        <p:txBody>
-          <a:bodyPr wrap="square" lIns="0" tIns="0" rIns="0" bIns="0" rtlCol="0" anchor="t"/>
-          <a:lstStyle/>
-          <a:p>
-            <a:pPr indent="0" marL="0">
-              <a:buNone/>
-            </a:pPr>
-            <a:r>
-              <a:rPr lang="en-US" sz="900" b="1" dirty="0">
-                <a:solidFill>
-                  <a:srgbClr val="15224B"/>
-                </a:solidFill>
-                <a:latin typeface="Segoe UI" pitchFamily="34" charset="0"/>
-                <a:ea typeface="Segoe UI" pitchFamily="34" charset="-122"/>
-                <a:cs typeface="Segoe UI" pitchFamily="34" charset="-120"/>
-              </a:rPr>
-              <a:t>Component cost recovery</a:t>
-            </a:r>
-            <a:endParaRPr lang="en-US" sz="900" dirty="0"/>
-          </a:p>
-        </p:txBody>
-      </p:sp>
-      <p:sp>
-        <p:nvSpPr>
-          <p:cNvPr id="35" name="Text 31"/>
-          <p:cNvSpPr txBox="1"/>
-          <p:nvPr/>
-        </p:nvSpPr>
-        <p:spPr>
-          <a:xfrm>
-            <a:off x="3327400" y="4591050"/>
-            <a:ext cx="5270500" cy="311150"/>
-          </a:xfrm>
-          <a:prstGeom prst="rect">
-            <a:avLst/>
-          </a:prstGeom>
-          <a:noFill/>
-          <a:ln/>
-        </p:spPr>
-        <p:txBody>
-          <a:bodyPr wrap="square" lIns="0" tIns="0" rIns="0" bIns="0" rtlCol="0" anchor="t"/>
-          <a:lstStyle/>
-          <a:p>
-            <a:pPr indent="0" marL="0">
-              <a:buNone/>
-            </a:pPr>
-            <a:r>
-              <a:rPr lang="en-US" sz="900" dirty="0">
-                <a:solidFill>
-                  <a:srgbClr val="5B6378"/>
-                </a:solidFill>
-                <a:latin typeface="Segoe UI Semilight" pitchFamily="34" charset="0"/>
-                <a:ea typeface="Segoe UI Semilight" pitchFamily="34" charset="-122"/>
-                <a:cs typeface="Segoe UI Semilight" pitchFamily="34" charset="-120"/>
-              </a:rPr>
-              <a:t>ASecureCloud and Kiflo, stress-tested against the $2,500 rung</a:t>
-            </a:r>
-            <a:endParaRPr lang="en-US" sz="900" dirty="0"/>
-          </a:p>
-        </p:txBody>
-      </p:sp>
-      <p:sp>
-        <p:nvSpPr>
-          <p:cNvPr id="36" name="Text 32"/>
-          <p:cNvSpPr txBox="1"/>
-          <p:nvPr/>
-        </p:nvSpPr>
-        <p:spPr>
-          <a:xfrm>
-            <a:off x="8890000" y="4591050"/>
-            <a:ext cx="2895600" cy="311150"/>
-          </a:xfrm>
-          <a:prstGeom prst="rect">
-            <a:avLst/>
-          </a:prstGeom>
-          <a:noFill/>
-          <a:ln/>
-        </p:spPr>
-        <p:txBody>
-          <a:bodyPr wrap="square" lIns="0" tIns="0" rIns="0" bIns="0" rtlCol="0" anchor="t"/>
-          <a:lstStyle/>
-          <a:p>
-            <a:pPr indent="0" marL="0">
-              <a:buNone/>
-            </a:pPr>
-            <a:r>
-              <a:rPr lang="en-US" sz="900" dirty="0">
-                <a:solidFill>
-                  <a:srgbClr val="5B6378"/>
-                </a:solidFill>
-                <a:latin typeface="Segoe UI Semilight" pitchFamily="34" charset="0"/>
-                <a:ea typeface="Segoe UI Semilight" pitchFamily="34" charset="-122"/>
-                <a:cs typeface="Segoe UI Semilight" pitchFamily="34" charset="-120"/>
-              </a:rPr>
-              <a:t>OBP · to model</a:t>
-            </a:r>
-            <a:endParaRPr lang="en-US" sz="900" dirty="0"/>
-          </a:p>
-        </p:txBody>
-      </p:sp>
-      <p:sp>
-        <p:nvSpPr>
-          <p:cNvPr id="37" name="Shape 33"/>
+          <p:cNvPr id="16" name="Shape 12"/>
           <p:cNvSpPr/>
           <p:nvPr/>
         </p:nvSpPr>
         <p:spPr>
           <a:xfrm>
-            <a:off x="566420" y="4832350"/>
-            <a:ext cx="11055350" cy="311150"/>
+            <a:off x="566420" y="4502150"/>
+            <a:ext cx="11055350" cy="279400"/>
           </a:xfrm>
           <a:prstGeom prst="rect">
             <a:avLst/>
@@ -15343,248 +14546,14 @@
       </p:sp>
       <p:sp>
         <p:nvSpPr>
-          <p:cNvPr id="38" name="Text 34"/>
-          <p:cNvSpPr txBox="1"/>
-          <p:nvPr/>
-        </p:nvSpPr>
-        <p:spPr>
-          <a:xfrm>
-            <a:off x="749300" y="4902200"/>
-            <a:ext cx="2413000" cy="311150"/>
-          </a:xfrm>
-          <a:prstGeom prst="rect">
-            <a:avLst/>
-          </a:prstGeom>
-          <a:noFill/>
-          <a:ln/>
-        </p:spPr>
-        <p:txBody>
-          <a:bodyPr wrap="square" lIns="0" tIns="0" rIns="0" bIns="0" rtlCol="0" anchor="t"/>
-          <a:lstStyle/>
-          <a:p>
-            <a:pPr indent="0" marL="0">
-              <a:buNone/>
-            </a:pPr>
-            <a:r>
-              <a:rPr lang="en-US" sz="900" b="1" dirty="0">
-                <a:solidFill>
-                  <a:srgbClr val="15224B"/>
-                </a:solidFill>
-                <a:latin typeface="Segoe UI" pitchFamily="34" charset="0"/>
-                <a:ea typeface="Segoe UI" pitchFamily="34" charset="-122"/>
-                <a:cs typeface="Segoe UI" pitchFamily="34" charset="-120"/>
-              </a:rPr>
-              <a:t>Back-to-back internal SLAs</a:t>
-            </a:r>
-            <a:endParaRPr lang="en-US" sz="900" dirty="0"/>
-          </a:p>
-        </p:txBody>
-      </p:sp>
-      <p:sp>
-        <p:nvSpPr>
-          <p:cNvPr id="39" name="Text 35"/>
-          <p:cNvSpPr txBox="1"/>
-          <p:nvPr/>
-        </p:nvSpPr>
-        <p:spPr>
-          <a:xfrm>
-            <a:off x="3327400" y="4902200"/>
-            <a:ext cx="5270500" cy="311150"/>
-          </a:xfrm>
-          <a:prstGeom prst="rect">
-            <a:avLst/>
-          </a:prstGeom>
-          <a:noFill/>
-          <a:ln/>
-        </p:spPr>
-        <p:txBody>
-          <a:bodyPr wrap="square" lIns="0" tIns="0" rIns="0" bIns="0" rtlCol="0" anchor="t"/>
-          <a:lstStyle/>
-          <a:p>
-            <a:pPr indent="0" marL="0">
-              <a:buNone/>
-            </a:pPr>
-            <a:r>
-              <a:rPr lang="en-US" sz="900" dirty="0">
-                <a:solidFill>
-                  <a:srgbClr val="5B6378"/>
-                </a:solidFill>
-                <a:latin typeface="Segoe UI Semilight" pitchFamily="34" charset="0"/>
-                <a:ea typeface="Segoe UI Semilight" pitchFamily="34" charset="-122"/>
-                <a:cs typeface="Segoe UI Semilight" pitchFamily="34" charset="-120"/>
-              </a:rPr>
-              <a:t>Offer issue, listing configuration, selling authorizations, ACE instance, reporting feed</a:t>
-            </a:r>
-            <a:endParaRPr lang="en-US" sz="900" dirty="0"/>
-          </a:p>
-        </p:txBody>
-      </p:sp>
-      <p:sp>
-        <p:nvSpPr>
-          <p:cNvPr id="40" name="Text 36"/>
-          <p:cNvSpPr txBox="1"/>
-          <p:nvPr/>
-        </p:nvSpPr>
-        <p:spPr>
-          <a:xfrm>
-            <a:off x="8890000" y="4902200"/>
-            <a:ext cx="2895600" cy="311150"/>
-          </a:xfrm>
-          <a:prstGeom prst="rect">
-            <a:avLst/>
-          </a:prstGeom>
-          <a:noFill/>
-          <a:ln/>
-        </p:spPr>
-        <p:txBody>
-          <a:bodyPr wrap="square" lIns="0" tIns="0" rIns="0" bIns="0" rtlCol="0" anchor="t"/>
-          <a:lstStyle/>
-          <a:p>
-            <a:pPr indent="0" marL="0">
-              <a:buNone/>
-            </a:pPr>
-            <a:r>
-              <a:rPr lang="en-US" sz="900" dirty="0">
-                <a:solidFill>
-                  <a:srgbClr val="5B6378"/>
-                </a:solidFill>
-                <a:latin typeface="Segoe UI Semilight" pitchFamily="34" charset="0"/>
-                <a:ea typeface="Segoe UI Semilight" pitchFamily="34" charset="-122"/>
-                <a:cs typeface="Segoe UI Semilight" pitchFamily="34" charset="-120"/>
-              </a:rPr>
-              <a:t>Automatum · BLOCKING</a:t>
-            </a:r>
-            <a:endParaRPr lang="en-US" sz="900" dirty="0"/>
-          </a:p>
-        </p:txBody>
-      </p:sp>
-      <p:sp>
-        <p:nvSpPr>
-          <p:cNvPr id="41" name="Text 37"/>
-          <p:cNvSpPr txBox="1"/>
-          <p:nvPr/>
-        </p:nvSpPr>
-        <p:spPr>
-          <a:xfrm>
-            <a:off x="749300" y="5213350"/>
-            <a:ext cx="2413000" cy="311150"/>
-          </a:xfrm>
-          <a:prstGeom prst="rect">
-            <a:avLst/>
-          </a:prstGeom>
-          <a:noFill/>
-          <a:ln/>
-        </p:spPr>
-        <p:txBody>
-          <a:bodyPr wrap="square" lIns="0" tIns="0" rIns="0" bIns="0" rtlCol="0" anchor="t"/>
-          <a:lstStyle/>
-          <a:p>
-            <a:pPr indent="0" marL="0">
-              <a:buNone/>
-            </a:pPr>
-            <a:r>
-              <a:rPr lang="en-US" sz="900" b="1" dirty="0">
-                <a:solidFill>
-                  <a:srgbClr val="15224B"/>
-                </a:solidFill>
-                <a:latin typeface="Segoe UI" pitchFamily="34" charset="0"/>
-                <a:ea typeface="Segoe UI" pitchFamily="34" charset="-122"/>
-                <a:cs typeface="Segoe UI" pitchFamily="34" charset="-120"/>
-              </a:rPr>
-              <a:t>Renewal, churn and exit</a:t>
-            </a:r>
-            <a:endParaRPr lang="en-US" sz="900" dirty="0"/>
-          </a:p>
-        </p:txBody>
-      </p:sp>
-      <p:sp>
-        <p:nvSpPr>
-          <p:cNvPr id="42" name="Text 38"/>
-          <p:cNvSpPr txBox="1"/>
-          <p:nvPr/>
-        </p:nvSpPr>
-        <p:spPr>
-          <a:xfrm>
-            <a:off x="3327400" y="5213350"/>
-            <a:ext cx="5270500" cy="311150"/>
-          </a:xfrm>
-          <a:prstGeom prst="rect">
-            <a:avLst/>
-          </a:prstGeom>
-          <a:noFill/>
-          <a:ln/>
-        </p:spPr>
-        <p:txBody>
-          <a:bodyPr wrap="square" lIns="0" tIns="0" rIns="0" bIns="0" rtlCol="0" anchor="t"/>
-          <a:lstStyle/>
-          <a:p>
-            <a:pPr indent="0" marL="0">
-              <a:buNone/>
-            </a:pPr>
-            <a:r>
-              <a:rPr lang="en-US" sz="900" dirty="0">
-                <a:solidFill>
-                  <a:srgbClr val="5B6378"/>
-                </a:solidFill>
-                <a:latin typeface="Segoe UI Semilight" pitchFamily="34" charset="0"/>
-                <a:ea typeface="Segoe UI Semilight" pitchFamily="34" charset="-122"/>
-                <a:cs typeface="Segoe UI Semilight" pitchFamily="34" charset="-120"/>
-              </a:rPr>
-              <a:t>Ownership of partner agreements and Kiflo channel data at end of term</a:t>
-            </a:r>
-            <a:endParaRPr lang="en-US" sz="900" dirty="0"/>
-          </a:p>
-        </p:txBody>
-      </p:sp>
-      <p:sp>
-        <p:nvSpPr>
-          <p:cNvPr id="43" name="Text 39"/>
-          <p:cNvSpPr txBox="1"/>
-          <p:nvPr/>
-        </p:nvSpPr>
-        <p:spPr>
-          <a:xfrm>
-            <a:off x="8890000" y="5213350"/>
-            <a:ext cx="2895600" cy="311150"/>
-          </a:xfrm>
-          <a:prstGeom prst="rect">
-            <a:avLst/>
-          </a:prstGeom>
-          <a:noFill/>
-          <a:ln/>
-        </p:spPr>
-        <p:txBody>
-          <a:bodyPr wrap="square" lIns="0" tIns="0" rIns="0" bIns="0" rtlCol="0" anchor="t"/>
-          <a:lstStyle/>
-          <a:p>
-            <a:pPr indent="0" marL="0">
-              <a:buNone/>
-            </a:pPr>
-            <a:r>
-              <a:rPr lang="en-US" sz="900" dirty="0">
-                <a:solidFill>
-                  <a:srgbClr val="5B6378"/>
-                </a:solidFill>
-                <a:latin typeface="Segoe UI Semilight" pitchFamily="34" charset="0"/>
-                <a:ea typeface="Segoe UI Semilight" pitchFamily="34" charset="-122"/>
-                <a:cs typeface="Segoe UI Semilight" pitchFamily="34" charset="-120"/>
-              </a:rPr>
-              <a:t>Both · to agree</a:t>
-            </a:r>
-            <a:endParaRPr lang="en-US" sz="900" dirty="0"/>
-          </a:p>
-        </p:txBody>
-      </p:sp>
-      <p:sp>
-        <p:nvSpPr>
-          <p:cNvPr id="44" name="Shape 40"/>
+          <p:cNvPr id="17" name="Shape 13"/>
           <p:cNvSpPr/>
           <p:nvPr/>
         </p:nvSpPr>
         <p:spPr>
           <a:xfrm>
-            <a:off x="566420" y="5454650"/>
-            <a:ext cx="11055350" cy="311150"/>
+            <a:off x="566420" y="5060950"/>
+            <a:ext cx="11055350" cy="279400"/>
           </a:xfrm>
           <a:prstGeom prst="rect">
             <a:avLst/>
@@ -15597,30 +14566,1083 @@
       </p:sp>
       <p:sp>
         <p:nvSpPr>
+          <p:cNvPr id="18" name="Text 14"/>
+          <p:cNvSpPr txBox="1"/>
+          <p:nvPr/>
+        </p:nvSpPr>
+        <p:spPr>
+          <a:xfrm>
+            <a:off x="749300" y="2616200"/>
+            <a:ext cx="2413000" cy="279400"/>
+          </a:xfrm>
+          <a:prstGeom prst="rect">
+            <a:avLst/>
+          </a:prstGeom>
+          <a:noFill/>
+          <a:ln/>
+        </p:spPr>
+        <p:txBody>
+          <a:bodyPr wrap="square" lIns="0" tIns="0" rIns="0" bIns="0" rtlCol="0" anchor="t"/>
+          <a:lstStyle/>
+          <a:p>
+            <a:pPr indent="0" marL="0">
+              <a:buNone/>
+            </a:pPr>
+            <a:r>
+              <a:rPr lang="en-US" sz="850" b="1" dirty="0">
+                <a:solidFill>
+                  <a:srgbClr val="15224B"/>
+                </a:solidFill>
+                <a:latin typeface="Segoe UI" pitchFamily="34" charset="0"/>
+                <a:ea typeface="Segoe UI" pitchFamily="34" charset="-122"/>
+                <a:cs typeface="Segoe UI" pitchFamily="34" charset="-120"/>
+              </a:rPr>
+              <a:t>Flow of funds and payment trigger</a:t>
+            </a:r>
+            <a:endParaRPr lang="en-US" sz="850" dirty="0"/>
+          </a:p>
+        </p:txBody>
+      </p:sp>
+      <p:sp>
+        <p:nvSpPr>
+          <p:cNvPr id="19" name="Text 15"/>
+          <p:cNvSpPr txBox="1"/>
+          <p:nvPr/>
+        </p:nvSpPr>
+        <p:spPr>
+          <a:xfrm>
+            <a:off x="3327400" y="2616200"/>
+            <a:ext cx="5270500" cy="279400"/>
+          </a:xfrm>
+          <a:prstGeom prst="rect">
+            <a:avLst/>
+          </a:prstGeom>
+          <a:noFill/>
+          <a:ln/>
+        </p:spPr>
+        <p:txBody>
+          <a:bodyPr wrap="square" lIns="0" tIns="0" rIns="0" bIns="0" rtlCol="0" anchor="t"/>
+          <a:lstStyle/>
+          <a:p>
+            <a:pPr indent="0" marL="0">
+              <a:buNone/>
+            </a:pPr>
+            <a:r>
+              <a:rPr lang="en-US" sz="850" dirty="0">
+                <a:solidFill>
+                  <a:srgbClr val="5B6378"/>
+                </a:solidFill>
+                <a:latin typeface="Segoe UI Semilight" pitchFamily="34" charset="0"/>
+                <a:ea typeface="Segoe UI Semilight" pitchFamily="34" charset="-122"/>
+                <a:cs typeface="Segoe UI Semilight" pitchFamily="34" charset="-120"/>
+              </a:rPr>
+              <a:t>AWS disbursement to Automatum vs invoice at [N] days; who carries the float, including the Accelerator’s 50/50</a:t>
+            </a:r>
+            <a:endParaRPr lang="en-US" sz="850" dirty="0"/>
+          </a:p>
+        </p:txBody>
+      </p:sp>
+      <p:sp>
+        <p:nvSpPr>
+          <p:cNvPr id="20" name="Text 16"/>
+          <p:cNvSpPr txBox="1"/>
+          <p:nvPr/>
+        </p:nvSpPr>
+        <p:spPr>
+          <a:xfrm>
+            <a:off x="8890000" y="2616200"/>
+            <a:ext cx="2895600" cy="279400"/>
+          </a:xfrm>
+          <a:prstGeom prst="rect">
+            <a:avLst/>
+          </a:prstGeom>
+          <a:noFill/>
+          <a:ln/>
+        </p:spPr>
+        <p:txBody>
+          <a:bodyPr wrap="square" lIns="0" tIns="0" rIns="0" bIns="0" rtlCol="0" anchor="t"/>
+          <a:lstStyle/>
+          <a:p>
+            <a:pPr indent="0" marL="0">
+              <a:buNone/>
+            </a:pPr>
+            <a:r>
+              <a:rPr lang="en-US" sz="850" dirty="0">
+                <a:solidFill>
+                  <a:srgbClr val="5B6378"/>
+                </a:solidFill>
+                <a:latin typeface="Segoe UI Semilight" pitchFamily="34" charset="0"/>
+                <a:ea typeface="Segoe UI Semilight" pitchFamily="34" charset="-122"/>
+                <a:cs typeface="Segoe UI Semilight" pitchFamily="34" charset="-120"/>
+              </a:rPr>
+              <a:t>Both · to agree</a:t>
+            </a:r>
+            <a:endParaRPr lang="en-US" sz="850" dirty="0"/>
+          </a:p>
+        </p:txBody>
+      </p:sp>
+      <p:sp>
+        <p:nvSpPr>
+          <p:cNvPr id="21" name="Text 17"/>
+          <p:cNvSpPr txBox="1"/>
+          <p:nvPr/>
+        </p:nvSpPr>
+        <p:spPr>
+          <a:xfrm>
+            <a:off x="749300" y="2895600"/>
+            <a:ext cx="2413000" cy="279400"/>
+          </a:xfrm>
+          <a:prstGeom prst="rect">
+            <a:avLst/>
+          </a:prstGeom>
+          <a:noFill/>
+          <a:ln/>
+        </p:spPr>
+        <p:txBody>
+          <a:bodyPr wrap="square" lIns="0" tIns="0" rIns="0" bIns="0" rtlCol="0" anchor="t"/>
+          <a:lstStyle/>
+          <a:p>
+            <a:pPr indent="0" marL="0">
+              <a:buNone/>
+            </a:pPr>
+            <a:r>
+              <a:rPr lang="en-US" sz="850" b="1" dirty="0">
+                <a:solidFill>
+                  <a:srgbClr val="15224B"/>
+                </a:solidFill>
+                <a:latin typeface="Segoe UI" pitchFamily="34" charset="0"/>
+                <a:ea typeface="Segoe UI" pitchFamily="34" charset="-122"/>
+                <a:cs typeface="Segoe UI" pitchFamily="34" charset="-120"/>
+              </a:rPr>
+              <a:t>Revenue split, software line</a:t>
+            </a:r>
+            <a:endParaRPr lang="en-US" sz="850" dirty="0"/>
+          </a:p>
+        </p:txBody>
+      </p:sp>
+      <p:sp>
+        <p:nvSpPr>
+          <p:cNvPr id="22" name="Text 18"/>
+          <p:cNvSpPr txBox="1"/>
+          <p:nvPr/>
+        </p:nvSpPr>
+        <p:spPr>
+          <a:xfrm>
+            <a:off x="3327400" y="2895600"/>
+            <a:ext cx="5270500" cy="279400"/>
+          </a:xfrm>
+          <a:prstGeom prst="rect">
+            <a:avLst/>
+          </a:prstGeom>
+          <a:noFill/>
+          <a:ln/>
+        </p:spPr>
+        <p:txBody>
+          <a:bodyPr wrap="square" lIns="0" tIns="0" rIns="0" bIns="0" rtlCol="0" anchor="t"/>
+          <a:lstStyle/>
+          <a:p>
+            <a:pPr indent="0" marL="0">
+              <a:buNone/>
+            </a:pPr>
+            <a:r>
+              <a:rPr lang="en-US" sz="850" dirty="0">
+                <a:solidFill>
+                  <a:srgbClr val="5B6378"/>
+                </a:solidFill>
+                <a:latin typeface="Segoe UI Semilight" pitchFamily="34" charset="0"/>
+                <a:ea typeface="Segoe UI Semilight" pitchFamily="34" charset="-122"/>
+                <a:cs typeface="Segoe UI Semilight" pitchFamily="34" charset="-120"/>
+              </a:rPr>
+              <a:t>Follows the licensor</a:t>
+            </a:r>
+            <a:endParaRPr lang="en-US" sz="850" dirty="0"/>
+          </a:p>
+        </p:txBody>
+      </p:sp>
+      <p:sp>
+        <p:nvSpPr>
+          <p:cNvPr id="23" name="Text 19"/>
+          <p:cNvSpPr txBox="1"/>
+          <p:nvPr/>
+        </p:nvSpPr>
+        <p:spPr>
+          <a:xfrm>
+            <a:off x="8890000" y="2895600"/>
+            <a:ext cx="2895600" cy="279400"/>
+          </a:xfrm>
+          <a:prstGeom prst="rect">
+            <a:avLst/>
+          </a:prstGeom>
+          <a:noFill/>
+          <a:ln/>
+        </p:spPr>
+        <p:txBody>
+          <a:bodyPr wrap="square" lIns="0" tIns="0" rIns="0" bIns="0" rtlCol="0" anchor="t"/>
+          <a:lstStyle/>
+          <a:p>
+            <a:pPr indent="0" marL="0">
+              <a:buNone/>
+            </a:pPr>
+            <a:r>
+              <a:rPr lang="en-US" sz="850" dirty="0">
+                <a:solidFill>
+                  <a:srgbClr val="5B6378"/>
+                </a:solidFill>
+                <a:latin typeface="Segoe UI Semilight" pitchFamily="34" charset="0"/>
+                <a:ea typeface="Segoe UI Semilight" pitchFamily="34" charset="-122"/>
+                <a:cs typeface="Segoe UI Semilight" pitchFamily="34" charset="-120"/>
+              </a:rPr>
+              <a:t>Both · to agree</a:t>
+            </a:r>
+            <a:endParaRPr lang="en-US" sz="850" dirty="0"/>
+          </a:p>
+        </p:txBody>
+      </p:sp>
+      <p:sp>
+        <p:nvSpPr>
+          <p:cNvPr id="24" name="Text 20"/>
+          <p:cNvSpPr txBox="1"/>
+          <p:nvPr/>
+        </p:nvSpPr>
+        <p:spPr>
+          <a:xfrm>
+            <a:off x="749300" y="3175000"/>
+            <a:ext cx="2413000" cy="279400"/>
+          </a:xfrm>
+          <a:prstGeom prst="rect">
+            <a:avLst/>
+          </a:prstGeom>
+          <a:noFill/>
+          <a:ln/>
+        </p:spPr>
+        <p:txBody>
+          <a:bodyPr wrap="square" lIns="0" tIns="0" rIns="0" bIns="0" rtlCol="0" anchor="t"/>
+          <a:lstStyle/>
+          <a:p>
+            <a:pPr indent="0" marL="0">
+              <a:buNone/>
+            </a:pPr>
+            <a:r>
+              <a:rPr lang="en-US" sz="850" b="1" dirty="0">
+                <a:solidFill>
+                  <a:srgbClr val="15224B"/>
+                </a:solidFill>
+                <a:latin typeface="Segoe UI" pitchFamily="34" charset="0"/>
+                <a:ea typeface="Segoe UI" pitchFamily="34" charset="-122"/>
+                <a:cs typeface="Segoe UI" pitchFamily="34" charset="-120"/>
+              </a:rPr>
+              <a:t>Revenue split, professional services line</a:t>
+            </a:r>
+            <a:endParaRPr lang="en-US" sz="850" dirty="0"/>
+          </a:p>
+        </p:txBody>
+      </p:sp>
+      <p:sp>
+        <p:nvSpPr>
+          <p:cNvPr id="25" name="Text 21"/>
+          <p:cNvSpPr txBox="1"/>
+          <p:nvPr/>
+        </p:nvSpPr>
+        <p:spPr>
+          <a:xfrm>
+            <a:off x="3327400" y="3175000"/>
+            <a:ext cx="5270500" cy="279400"/>
+          </a:xfrm>
+          <a:prstGeom prst="rect">
+            <a:avLst/>
+          </a:prstGeom>
+          <a:noFill/>
+          <a:ln/>
+        </p:spPr>
+        <p:txBody>
+          <a:bodyPr wrap="square" lIns="0" tIns="0" rIns="0" bIns="0" rtlCol="0" anchor="t"/>
+          <a:lstStyle/>
+          <a:p>
+            <a:pPr indent="0" marL="0">
+              <a:buNone/>
+            </a:pPr>
+            <a:r>
+              <a:rPr lang="en-US" sz="850" dirty="0">
+                <a:solidFill>
+                  <a:srgbClr val="5B6378"/>
+                </a:solidFill>
+                <a:latin typeface="Segoe UI Semilight" pitchFamily="34" charset="0"/>
+                <a:ea typeface="Segoe UI Semilight" pitchFamily="34" charset="-122"/>
+                <a:cs typeface="Segoe UI Semilight" pitchFamily="34" charset="-120"/>
+              </a:rPr>
+              <a:t>Follows the delivering party</a:t>
+            </a:r>
+            <a:endParaRPr lang="en-US" sz="850" dirty="0"/>
+          </a:p>
+        </p:txBody>
+      </p:sp>
+      <p:sp>
+        <p:nvSpPr>
+          <p:cNvPr id="26" name="Text 22"/>
+          <p:cNvSpPr txBox="1"/>
+          <p:nvPr/>
+        </p:nvSpPr>
+        <p:spPr>
+          <a:xfrm>
+            <a:off x="8890000" y="3175000"/>
+            <a:ext cx="2895600" cy="279400"/>
+          </a:xfrm>
+          <a:prstGeom prst="rect">
+            <a:avLst/>
+          </a:prstGeom>
+          <a:noFill/>
+          <a:ln/>
+        </p:spPr>
+        <p:txBody>
+          <a:bodyPr wrap="square" lIns="0" tIns="0" rIns="0" bIns="0" rtlCol="0" anchor="t"/>
+          <a:lstStyle/>
+          <a:p>
+            <a:pPr indent="0" marL="0">
+              <a:buNone/>
+            </a:pPr>
+            <a:r>
+              <a:rPr lang="en-US" sz="850" dirty="0">
+                <a:solidFill>
+                  <a:srgbClr val="5B6378"/>
+                </a:solidFill>
+                <a:latin typeface="Segoe UI Semilight" pitchFamily="34" charset="0"/>
+                <a:ea typeface="Segoe UI Semilight" pitchFamily="34" charset="-122"/>
+                <a:cs typeface="Segoe UI Semilight" pitchFamily="34" charset="-120"/>
+              </a:rPr>
+              <a:t>Both · to agree</a:t>
+            </a:r>
+            <a:endParaRPr lang="en-US" sz="850" dirty="0"/>
+          </a:p>
+        </p:txBody>
+      </p:sp>
+      <p:sp>
+        <p:nvSpPr>
+          <p:cNvPr id="27" name="Text 23"/>
+          <p:cNvSpPr txBox="1"/>
+          <p:nvPr/>
+        </p:nvSpPr>
+        <p:spPr>
+          <a:xfrm>
+            <a:off x="749300" y="3454400"/>
+            <a:ext cx="2413000" cy="279400"/>
+          </a:xfrm>
+          <a:prstGeom prst="rect">
+            <a:avLst/>
+          </a:prstGeom>
+          <a:noFill/>
+          <a:ln/>
+        </p:spPr>
+        <p:txBody>
+          <a:bodyPr wrap="square" lIns="0" tIns="0" rIns="0" bIns="0" rtlCol="0" anchor="t"/>
+          <a:lstStyle/>
+          <a:p>
+            <a:pPr indent="0" marL="0">
+              <a:buNone/>
+            </a:pPr>
+            <a:r>
+              <a:rPr lang="en-US" sz="850" b="1" dirty="0">
+                <a:solidFill>
+                  <a:srgbClr val="15224B"/>
+                </a:solidFill>
+                <a:latin typeface="Segoe UI" pitchFamily="34" charset="0"/>
+                <a:ea typeface="Segoe UI" pitchFamily="34" charset="-122"/>
+                <a:cs typeface="Segoe UI" pitchFamily="34" charset="-120"/>
+              </a:rPr>
+              <a:t>Marketplace listing fee</a:t>
+            </a:r>
+            <a:endParaRPr lang="en-US" sz="850" dirty="0"/>
+          </a:p>
+        </p:txBody>
+      </p:sp>
+      <p:sp>
+        <p:nvSpPr>
+          <p:cNvPr id="28" name="Text 24"/>
+          <p:cNvSpPr txBox="1"/>
+          <p:nvPr/>
+        </p:nvSpPr>
+        <p:spPr>
+          <a:xfrm>
+            <a:off x="3327400" y="3454400"/>
+            <a:ext cx="5270500" cy="279400"/>
+          </a:xfrm>
+          <a:prstGeom prst="rect">
+            <a:avLst/>
+          </a:prstGeom>
+          <a:noFill/>
+          <a:ln/>
+        </p:spPr>
+        <p:txBody>
+          <a:bodyPr wrap="square" lIns="0" tIns="0" rIns="0" bIns="0" rtlCol="0" anchor="t"/>
+          <a:lstStyle/>
+          <a:p>
+            <a:pPr indent="0" marL="0">
+              <a:buNone/>
+            </a:pPr>
+            <a:r>
+              <a:rPr lang="en-US" sz="850" dirty="0">
+                <a:solidFill>
+                  <a:srgbClr val="5B6378"/>
+                </a:solidFill>
+                <a:latin typeface="Segoe UI Semilight" pitchFamily="34" charset="0"/>
+                <a:ea typeface="Segoe UI Semilight" pitchFamily="34" charset="-122"/>
+                <a:cs typeface="Segoe UI Semilight" pitchFamily="34" charset="-120"/>
+              </a:rPr>
+              <a:t>Rates, mechanics and how it is netted</a:t>
+            </a:r>
+            <a:endParaRPr lang="en-US" sz="850" dirty="0"/>
+          </a:p>
+        </p:txBody>
+      </p:sp>
+      <p:sp>
+        <p:nvSpPr>
+          <p:cNvPr id="29" name="Text 25"/>
+          <p:cNvSpPr txBox="1"/>
+          <p:nvPr/>
+        </p:nvSpPr>
+        <p:spPr>
+          <a:xfrm>
+            <a:off x="8890000" y="3454400"/>
+            <a:ext cx="2895600" cy="279400"/>
+          </a:xfrm>
+          <a:prstGeom prst="rect">
+            <a:avLst/>
+          </a:prstGeom>
+          <a:noFill/>
+          <a:ln/>
+        </p:spPr>
+        <p:txBody>
+          <a:bodyPr wrap="square" lIns="0" tIns="0" rIns="0" bIns="0" rtlCol="0" anchor="t"/>
+          <a:lstStyle/>
+          <a:p>
+            <a:pPr indent="0" marL="0">
+              <a:buNone/>
+            </a:pPr>
+            <a:r>
+              <a:rPr lang="en-US" sz="850" dirty="0">
+                <a:solidFill>
+                  <a:srgbClr val="5B6378"/>
+                </a:solidFill>
+                <a:latin typeface="Segoe UI Semilight" pitchFamily="34" charset="0"/>
+                <a:ea typeface="Segoe UI Semilight" pitchFamily="34" charset="-122"/>
+                <a:cs typeface="Segoe UI Semilight" pitchFamily="34" charset="-120"/>
+              </a:rPr>
+              <a:t>Automatum · to confirm</a:t>
+            </a:r>
+            <a:endParaRPr lang="en-US" sz="850" dirty="0"/>
+          </a:p>
+        </p:txBody>
+      </p:sp>
+      <p:sp>
+        <p:nvSpPr>
+          <p:cNvPr id="30" name="Text 26"/>
+          <p:cNvSpPr txBox="1"/>
+          <p:nvPr/>
+        </p:nvSpPr>
+        <p:spPr>
+          <a:xfrm>
+            <a:off x="749300" y="3733800"/>
+            <a:ext cx="2413000" cy="279400"/>
+          </a:xfrm>
+          <a:prstGeom prst="rect">
+            <a:avLst/>
+          </a:prstGeom>
+          <a:noFill/>
+          <a:ln/>
+        </p:spPr>
+        <p:txBody>
+          <a:bodyPr wrap="square" lIns="0" tIns="0" rIns="0" bIns="0" rtlCol="0" anchor="t"/>
+          <a:lstStyle/>
+          <a:p>
+            <a:pPr indent="0" marL="0">
+              <a:buNone/>
+            </a:pPr>
+            <a:r>
+              <a:rPr lang="en-US" sz="850" b="1" dirty="0">
+                <a:solidFill>
+                  <a:srgbClr val="15224B"/>
+                </a:solidFill>
+                <a:latin typeface="Segoe UI" pitchFamily="34" charset="0"/>
+                <a:ea typeface="Segoe UI" pitchFamily="34" charset="-122"/>
+                <a:cs typeface="Segoe UI" pitchFamily="34" charset="-120"/>
+              </a:rPr>
+              <a:t>Milestone cash and credits</a:t>
+            </a:r>
+            <a:endParaRPr lang="en-US" sz="850" dirty="0"/>
+          </a:p>
+        </p:txBody>
+      </p:sp>
+      <p:sp>
+        <p:nvSpPr>
+          <p:cNvPr id="31" name="Text 27"/>
+          <p:cNvSpPr txBox="1"/>
+          <p:nvPr/>
+        </p:nvSpPr>
+        <p:spPr>
+          <a:xfrm>
+            <a:off x="3327400" y="3733800"/>
+            <a:ext cx="5270500" cy="279400"/>
+          </a:xfrm>
+          <a:prstGeom prst="rect">
+            <a:avLst/>
+          </a:prstGeom>
+          <a:noFill/>
+          <a:ln/>
+        </p:spPr>
+        <p:txBody>
+          <a:bodyPr wrap="square" lIns="0" tIns="0" rIns="0" bIns="0" rtlCol="0" anchor="t"/>
+          <a:lstStyle/>
+          <a:p>
+            <a:pPr indent="0" marL="0">
+              <a:buNone/>
+            </a:pPr>
+            <a:r>
+              <a:rPr lang="en-US" sz="850" dirty="0">
+                <a:solidFill>
+                  <a:srgbClr val="5B6378"/>
+                </a:solidFill>
+                <a:latin typeface="Segoe UI Semilight" pitchFamily="34" charset="0"/>
+                <a:ea typeface="Segoe UI Semilight" pitchFamily="34" charset="-122"/>
+                <a:cs typeface="Segoe UI Semilight" pitchFamily="34" charset="-120"/>
+              </a:rPr>
+              <a:t>Figures are established; the division is not. Credits are worth face value only to the party with spend to offset</a:t>
+            </a:r>
+            <a:endParaRPr lang="en-US" sz="850" dirty="0"/>
+          </a:p>
+        </p:txBody>
+      </p:sp>
+      <p:sp>
+        <p:nvSpPr>
+          <p:cNvPr id="32" name="Text 28"/>
+          <p:cNvSpPr txBox="1"/>
+          <p:nvPr/>
+        </p:nvSpPr>
+        <p:spPr>
+          <a:xfrm>
+            <a:off x="8890000" y="3733800"/>
+            <a:ext cx="2895600" cy="279400"/>
+          </a:xfrm>
+          <a:prstGeom prst="rect">
+            <a:avLst/>
+          </a:prstGeom>
+          <a:noFill/>
+          <a:ln/>
+        </p:spPr>
+        <p:txBody>
+          <a:bodyPr wrap="square" lIns="0" tIns="0" rIns="0" bIns="0" rtlCol="0" anchor="t"/>
+          <a:lstStyle/>
+          <a:p>
+            <a:pPr indent="0" marL="0">
+              <a:buNone/>
+            </a:pPr>
+            <a:r>
+              <a:rPr lang="en-US" sz="850" dirty="0">
+                <a:solidFill>
+                  <a:srgbClr val="5B6378"/>
+                </a:solidFill>
+                <a:latin typeface="Segoe UI Semilight" pitchFamily="34" charset="0"/>
+                <a:ea typeface="Segoe UI Semilight" pitchFamily="34" charset="-122"/>
+                <a:cs typeface="Segoe UI Semilight" pitchFamily="34" charset="-120"/>
+              </a:rPr>
+              <a:t>Both · to agree</a:t>
+            </a:r>
+            <a:endParaRPr lang="en-US" sz="850" dirty="0"/>
+          </a:p>
+        </p:txBody>
+      </p:sp>
+      <p:sp>
+        <p:nvSpPr>
+          <p:cNvPr id="33" name="Text 29"/>
+          <p:cNvSpPr txBox="1"/>
+          <p:nvPr/>
+        </p:nvSpPr>
+        <p:spPr>
+          <a:xfrm>
+            <a:off x="749300" y="4013200"/>
+            <a:ext cx="2413000" cy="279400"/>
+          </a:xfrm>
+          <a:prstGeom prst="rect">
+            <a:avLst/>
+          </a:prstGeom>
+          <a:noFill/>
+          <a:ln/>
+        </p:spPr>
+        <p:txBody>
+          <a:bodyPr wrap="square" lIns="0" tIns="0" rIns="0" bIns="0" rtlCol="0" anchor="t"/>
+          <a:lstStyle/>
+          <a:p>
+            <a:pPr indent="0" marL="0">
+              <a:buNone/>
+            </a:pPr>
+            <a:r>
+              <a:rPr lang="en-US" sz="850" b="1" dirty="0">
+                <a:solidFill>
+                  <a:srgbClr val="15224B"/>
+                </a:solidFill>
+                <a:latin typeface="Segoe UI" pitchFamily="34" charset="0"/>
+                <a:ea typeface="Segoe UI" pitchFamily="34" charset="-122"/>
+                <a:cs typeface="Segoe UI" pitchFamily="34" charset="-120"/>
+              </a:rPr>
+              <a:t>Milestone 3 — the 55 leads</a:t>
+            </a:r>
+            <a:endParaRPr lang="en-US" sz="850" dirty="0"/>
+          </a:p>
+        </p:txBody>
+      </p:sp>
+      <p:sp>
+        <p:nvSpPr>
+          <p:cNvPr id="34" name="Text 30"/>
+          <p:cNvSpPr txBox="1"/>
+          <p:nvPr/>
+        </p:nvSpPr>
+        <p:spPr>
+          <a:xfrm>
+            <a:off x="3327400" y="4013200"/>
+            <a:ext cx="5270500" cy="279400"/>
+          </a:xfrm>
+          <a:prstGeom prst="rect">
+            <a:avLst/>
+          </a:prstGeom>
+          <a:noFill/>
+          <a:ln/>
+        </p:spPr>
+        <p:txBody>
+          <a:bodyPr wrap="square" lIns="0" tIns="0" rIns="0" bIns="0" rtlCol="0" anchor="t"/>
+          <a:lstStyle/>
+          <a:p>
+            <a:pPr indent="0" marL="0">
+              <a:buNone/>
+            </a:pPr>
+            <a:r>
+              <a:rPr lang="en-US" sz="850" dirty="0">
+                <a:solidFill>
+                  <a:srgbClr val="5B6378"/>
+                </a:solidFill>
+                <a:latin typeface="Segoe UI Semilight" pitchFamily="34" charset="0"/>
+                <a:ea typeface="Segoe UI Semilight" pitchFamily="34" charset="-122"/>
+                <a:cs typeface="Segoe UI Semilight" pitchFamily="34" charset="-120"/>
+              </a:rPr>
+              <a:t>Confirm the direction before agreeing who owns them</a:t>
+            </a:r>
+            <a:endParaRPr lang="en-US" sz="850" dirty="0"/>
+          </a:p>
+        </p:txBody>
+      </p:sp>
+      <p:sp>
+        <p:nvSpPr>
+          <p:cNvPr id="35" name="Text 31"/>
+          <p:cNvSpPr txBox="1"/>
+          <p:nvPr/>
+        </p:nvSpPr>
+        <p:spPr>
+          <a:xfrm>
+            <a:off x="8890000" y="4013200"/>
+            <a:ext cx="2895600" cy="279400"/>
+          </a:xfrm>
+          <a:prstGeom prst="rect">
+            <a:avLst/>
+          </a:prstGeom>
+          <a:noFill/>
+          <a:ln/>
+        </p:spPr>
+        <p:txBody>
+          <a:bodyPr wrap="square" lIns="0" tIns="0" rIns="0" bIns="0" rtlCol="0" anchor="t"/>
+          <a:lstStyle/>
+          <a:p>
+            <a:pPr indent="0" marL="0">
+              <a:buNone/>
+            </a:pPr>
+            <a:r>
+              <a:rPr lang="en-US" sz="850" dirty="0">
+                <a:solidFill>
+                  <a:srgbClr val="5B6378"/>
+                </a:solidFill>
+                <a:latin typeface="Segoe UI Semilight" pitchFamily="34" charset="0"/>
+                <a:ea typeface="Segoe UI Semilight" pitchFamily="34" charset="-122"/>
+                <a:cs typeface="Segoe UI Semilight" pitchFamily="34" charset="-120"/>
+              </a:rPr>
+              <a:t>Both · to confirm</a:t>
+            </a:r>
+            <a:endParaRPr lang="en-US" sz="850" dirty="0"/>
+          </a:p>
+        </p:txBody>
+      </p:sp>
+      <p:sp>
+        <p:nvSpPr>
+          <p:cNvPr id="36" name="Text 32"/>
+          <p:cNvSpPr txBox="1"/>
+          <p:nvPr/>
+        </p:nvSpPr>
+        <p:spPr>
+          <a:xfrm>
+            <a:off x="749300" y="4292600"/>
+            <a:ext cx="2413000" cy="279400"/>
+          </a:xfrm>
+          <a:prstGeom prst="rect">
+            <a:avLst/>
+          </a:prstGeom>
+          <a:noFill/>
+          <a:ln/>
+        </p:spPr>
+        <p:txBody>
+          <a:bodyPr wrap="square" lIns="0" tIns="0" rIns="0" bIns="0" rtlCol="0" anchor="t"/>
+          <a:lstStyle/>
+          <a:p>
+            <a:pPr indent="0" marL="0">
+              <a:buNone/>
+            </a:pPr>
+            <a:r>
+              <a:rPr lang="en-US" sz="850" b="1" dirty="0">
+                <a:solidFill>
+                  <a:srgbClr val="15224B"/>
+                </a:solidFill>
+                <a:latin typeface="Segoe UI" pitchFamily="34" charset="0"/>
+                <a:ea typeface="Segoe UI" pitchFamily="34" charset="-122"/>
+                <a:cs typeface="Segoe UI" pitchFamily="34" charset="-120"/>
+              </a:rPr>
+              <a:t>Component cost recovery</a:t>
+            </a:r>
+            <a:endParaRPr lang="en-US" sz="850" dirty="0"/>
+          </a:p>
+        </p:txBody>
+      </p:sp>
+      <p:sp>
+        <p:nvSpPr>
+          <p:cNvPr id="37" name="Text 33"/>
+          <p:cNvSpPr txBox="1"/>
+          <p:nvPr/>
+        </p:nvSpPr>
+        <p:spPr>
+          <a:xfrm>
+            <a:off x="3327400" y="4292600"/>
+            <a:ext cx="5270500" cy="279400"/>
+          </a:xfrm>
+          <a:prstGeom prst="rect">
+            <a:avLst/>
+          </a:prstGeom>
+          <a:noFill/>
+          <a:ln/>
+        </p:spPr>
+        <p:txBody>
+          <a:bodyPr wrap="square" lIns="0" tIns="0" rIns="0" bIns="0" rtlCol="0" anchor="t"/>
+          <a:lstStyle/>
+          <a:p>
+            <a:pPr indent="0" marL="0">
+              <a:buNone/>
+            </a:pPr>
+            <a:r>
+              <a:rPr lang="en-US" sz="850" dirty="0">
+                <a:solidFill>
+                  <a:srgbClr val="5B6378"/>
+                </a:solidFill>
+                <a:latin typeface="Segoe UI Semilight" pitchFamily="34" charset="0"/>
+                <a:ea typeface="Segoe UI Semilight" pitchFamily="34" charset="-122"/>
+                <a:cs typeface="Segoe UI Semilight" pitchFamily="34" charset="-120"/>
+              </a:rPr>
+              <a:t>ASecureCloud and Kiflo, stress-tested against the $2,500 rung</a:t>
+            </a:r>
+            <a:endParaRPr lang="en-US" sz="850" dirty="0"/>
+          </a:p>
+        </p:txBody>
+      </p:sp>
+      <p:sp>
+        <p:nvSpPr>
+          <p:cNvPr id="38" name="Text 34"/>
+          <p:cNvSpPr txBox="1"/>
+          <p:nvPr/>
+        </p:nvSpPr>
+        <p:spPr>
+          <a:xfrm>
+            <a:off x="8890000" y="4292600"/>
+            <a:ext cx="2895600" cy="279400"/>
+          </a:xfrm>
+          <a:prstGeom prst="rect">
+            <a:avLst/>
+          </a:prstGeom>
+          <a:noFill/>
+          <a:ln/>
+        </p:spPr>
+        <p:txBody>
+          <a:bodyPr wrap="square" lIns="0" tIns="0" rIns="0" bIns="0" rtlCol="0" anchor="t"/>
+          <a:lstStyle/>
+          <a:p>
+            <a:pPr indent="0" marL="0">
+              <a:buNone/>
+            </a:pPr>
+            <a:r>
+              <a:rPr lang="en-US" sz="850" dirty="0">
+                <a:solidFill>
+                  <a:srgbClr val="5B6378"/>
+                </a:solidFill>
+                <a:latin typeface="Segoe UI Semilight" pitchFamily="34" charset="0"/>
+                <a:ea typeface="Segoe UI Semilight" pitchFamily="34" charset="-122"/>
+                <a:cs typeface="Segoe UI Semilight" pitchFamily="34" charset="-120"/>
+              </a:rPr>
+              <a:t>OBP · to model</a:t>
+            </a:r>
+            <a:endParaRPr lang="en-US" sz="850" dirty="0"/>
+          </a:p>
+        </p:txBody>
+      </p:sp>
+      <p:sp>
+        <p:nvSpPr>
+          <p:cNvPr id="39" name="Text 35"/>
+          <p:cNvSpPr txBox="1"/>
+          <p:nvPr/>
+        </p:nvSpPr>
+        <p:spPr>
+          <a:xfrm>
+            <a:off x="749300" y="4572000"/>
+            <a:ext cx="2413000" cy="279400"/>
+          </a:xfrm>
+          <a:prstGeom prst="rect">
+            <a:avLst/>
+          </a:prstGeom>
+          <a:noFill/>
+          <a:ln/>
+        </p:spPr>
+        <p:txBody>
+          <a:bodyPr wrap="square" lIns="0" tIns="0" rIns="0" bIns="0" rtlCol="0" anchor="t"/>
+          <a:lstStyle/>
+          <a:p>
+            <a:pPr indent="0" marL="0">
+              <a:buNone/>
+            </a:pPr>
+            <a:r>
+              <a:rPr lang="en-US" sz="850" b="1" dirty="0">
+                <a:solidFill>
+                  <a:srgbClr val="15224B"/>
+                </a:solidFill>
+                <a:latin typeface="Segoe UI" pitchFamily="34" charset="0"/>
+                <a:ea typeface="Segoe UI" pitchFamily="34" charset="-122"/>
+                <a:cs typeface="Segoe UI" pitchFamily="34" charset="-120"/>
+              </a:rPr>
+              <a:t>Back-to-back internal SLAs</a:t>
+            </a:r>
+            <a:endParaRPr lang="en-US" sz="850" dirty="0"/>
+          </a:p>
+        </p:txBody>
+      </p:sp>
+      <p:sp>
+        <p:nvSpPr>
+          <p:cNvPr id="40" name="Text 36"/>
+          <p:cNvSpPr txBox="1"/>
+          <p:nvPr/>
+        </p:nvSpPr>
+        <p:spPr>
+          <a:xfrm>
+            <a:off x="3327400" y="4572000"/>
+            <a:ext cx="5270500" cy="279400"/>
+          </a:xfrm>
+          <a:prstGeom prst="rect">
+            <a:avLst/>
+          </a:prstGeom>
+          <a:noFill/>
+          <a:ln/>
+        </p:spPr>
+        <p:txBody>
+          <a:bodyPr wrap="square" lIns="0" tIns="0" rIns="0" bIns="0" rtlCol="0" anchor="t"/>
+          <a:lstStyle/>
+          <a:p>
+            <a:pPr indent="0" marL="0">
+              <a:buNone/>
+            </a:pPr>
+            <a:r>
+              <a:rPr lang="en-US" sz="850" dirty="0">
+                <a:solidFill>
+                  <a:srgbClr val="5B6378"/>
+                </a:solidFill>
+                <a:latin typeface="Segoe UI Semilight" pitchFamily="34" charset="0"/>
+                <a:ea typeface="Segoe UI Semilight" pitchFamily="34" charset="-122"/>
+                <a:cs typeface="Segoe UI Semilight" pitchFamily="34" charset="-120"/>
+              </a:rPr>
+              <a:t>Offer issue, listing configuration, selling authorizations, ACE instance, reporting feed</a:t>
+            </a:r>
+            <a:endParaRPr lang="en-US" sz="850" dirty="0"/>
+          </a:p>
+        </p:txBody>
+      </p:sp>
+      <p:sp>
+        <p:nvSpPr>
+          <p:cNvPr id="41" name="Text 37"/>
+          <p:cNvSpPr txBox="1"/>
+          <p:nvPr/>
+        </p:nvSpPr>
+        <p:spPr>
+          <a:xfrm>
+            <a:off x="8890000" y="4572000"/>
+            <a:ext cx="2895600" cy="279400"/>
+          </a:xfrm>
+          <a:prstGeom prst="rect">
+            <a:avLst/>
+          </a:prstGeom>
+          <a:noFill/>
+          <a:ln/>
+        </p:spPr>
+        <p:txBody>
+          <a:bodyPr wrap="square" lIns="0" tIns="0" rIns="0" bIns="0" rtlCol="0" anchor="t"/>
+          <a:lstStyle/>
+          <a:p>
+            <a:pPr indent="0" marL="0">
+              <a:buNone/>
+            </a:pPr>
+            <a:r>
+              <a:rPr lang="en-US" sz="850" dirty="0">
+                <a:solidFill>
+                  <a:srgbClr val="5B6378"/>
+                </a:solidFill>
+                <a:latin typeface="Segoe UI Semilight" pitchFamily="34" charset="0"/>
+                <a:ea typeface="Segoe UI Semilight" pitchFamily="34" charset="-122"/>
+                <a:cs typeface="Segoe UI Semilight" pitchFamily="34" charset="-120"/>
+              </a:rPr>
+              <a:t>Automatum · BLOCKING</a:t>
+            </a:r>
+            <a:endParaRPr lang="en-US" sz="850" dirty="0"/>
+          </a:p>
+        </p:txBody>
+      </p:sp>
+      <p:sp>
+        <p:nvSpPr>
+          <p:cNvPr id="42" name="Text 38"/>
+          <p:cNvSpPr txBox="1"/>
+          <p:nvPr/>
+        </p:nvSpPr>
+        <p:spPr>
+          <a:xfrm>
+            <a:off x="749300" y="4851400"/>
+            <a:ext cx="2413000" cy="279400"/>
+          </a:xfrm>
+          <a:prstGeom prst="rect">
+            <a:avLst/>
+          </a:prstGeom>
+          <a:noFill/>
+          <a:ln/>
+        </p:spPr>
+        <p:txBody>
+          <a:bodyPr wrap="square" lIns="0" tIns="0" rIns="0" bIns="0" rtlCol="0" anchor="t"/>
+          <a:lstStyle/>
+          <a:p>
+            <a:pPr indent="0" marL="0">
+              <a:buNone/>
+            </a:pPr>
+            <a:r>
+              <a:rPr lang="en-US" sz="850" b="1" dirty="0">
+                <a:solidFill>
+                  <a:srgbClr val="15224B"/>
+                </a:solidFill>
+                <a:latin typeface="Segoe UI" pitchFamily="34" charset="0"/>
+                <a:ea typeface="Segoe UI" pitchFamily="34" charset="-122"/>
+                <a:cs typeface="Segoe UI" pitchFamily="34" charset="-120"/>
+              </a:rPr>
+              <a:t>Renewal, churn and exit</a:t>
+            </a:r>
+            <a:endParaRPr lang="en-US" sz="850" dirty="0"/>
+          </a:p>
+        </p:txBody>
+      </p:sp>
+      <p:sp>
+        <p:nvSpPr>
+          <p:cNvPr id="43" name="Text 39"/>
+          <p:cNvSpPr txBox="1"/>
+          <p:nvPr/>
+        </p:nvSpPr>
+        <p:spPr>
+          <a:xfrm>
+            <a:off x="3327400" y="4851400"/>
+            <a:ext cx="5270500" cy="279400"/>
+          </a:xfrm>
+          <a:prstGeom prst="rect">
+            <a:avLst/>
+          </a:prstGeom>
+          <a:noFill/>
+          <a:ln/>
+        </p:spPr>
+        <p:txBody>
+          <a:bodyPr wrap="square" lIns="0" tIns="0" rIns="0" bIns="0" rtlCol="0" anchor="t"/>
+          <a:lstStyle/>
+          <a:p>
+            <a:pPr indent="0" marL="0">
+              <a:buNone/>
+            </a:pPr>
+            <a:r>
+              <a:rPr lang="en-US" sz="850" dirty="0">
+                <a:solidFill>
+                  <a:srgbClr val="5B6378"/>
+                </a:solidFill>
+                <a:latin typeface="Segoe UI Semilight" pitchFamily="34" charset="0"/>
+                <a:ea typeface="Segoe UI Semilight" pitchFamily="34" charset="-122"/>
+                <a:cs typeface="Segoe UI Semilight" pitchFamily="34" charset="-120"/>
+              </a:rPr>
+              <a:t>Ownership of partner agreements and Kiflo channel data at end of term</a:t>
+            </a:r>
+            <a:endParaRPr lang="en-US" sz="850" dirty="0"/>
+          </a:p>
+        </p:txBody>
+      </p:sp>
+      <p:sp>
+        <p:nvSpPr>
+          <p:cNvPr id="44" name="Text 40"/>
+          <p:cNvSpPr txBox="1"/>
+          <p:nvPr/>
+        </p:nvSpPr>
+        <p:spPr>
+          <a:xfrm>
+            <a:off x="8890000" y="4851400"/>
+            <a:ext cx="2895600" cy="279400"/>
+          </a:xfrm>
+          <a:prstGeom prst="rect">
+            <a:avLst/>
+          </a:prstGeom>
+          <a:noFill/>
+          <a:ln/>
+        </p:spPr>
+        <p:txBody>
+          <a:bodyPr wrap="square" lIns="0" tIns="0" rIns="0" bIns="0" rtlCol="0" anchor="t"/>
+          <a:lstStyle/>
+          <a:p>
+            <a:pPr indent="0" marL="0">
+              <a:buNone/>
+            </a:pPr>
+            <a:r>
+              <a:rPr lang="en-US" sz="850" dirty="0">
+                <a:solidFill>
+                  <a:srgbClr val="5B6378"/>
+                </a:solidFill>
+                <a:latin typeface="Segoe UI Semilight" pitchFamily="34" charset="0"/>
+                <a:ea typeface="Segoe UI Semilight" pitchFamily="34" charset="-122"/>
+                <a:cs typeface="Segoe UI Semilight" pitchFamily="34" charset="-120"/>
+              </a:rPr>
+              <a:t>Both · to agree</a:t>
+            </a:r>
+            <a:endParaRPr lang="en-US" sz="850" dirty="0"/>
+          </a:p>
+        </p:txBody>
+      </p:sp>
+      <p:sp>
+        <p:nvSpPr>
           <p:cNvPr id="45" name="Text 41"/>
           <p:cNvSpPr txBox="1"/>
           <p:nvPr/>
         </p:nvSpPr>
         <p:spPr>
           <a:xfrm>
-            <a:off x="749300" y="5524500"/>
-            <a:ext cx="2413000" cy="311150"/>
-          </a:xfrm>
-          <a:prstGeom prst="rect">
-            <a:avLst/>
-          </a:prstGeom>
-          <a:noFill/>
-          <a:ln/>
-        </p:spPr>
-        <p:txBody>
-          <a:bodyPr wrap="square" lIns="0" tIns="0" rIns="0" bIns="0" rtlCol="0" anchor="t"/>
-          <a:lstStyle/>
-          <a:p>
-            <a:pPr indent="0" marL="0">
-              <a:buNone/>
-            </a:pPr>
-            <a:r>
-              <a:rPr lang="en-US" sz="900" b="1" dirty="0">
+            <a:off x="749300" y="5130800"/>
+            <a:ext cx="2413000" cy="279400"/>
+          </a:xfrm>
+          <a:prstGeom prst="rect">
+            <a:avLst/>
+          </a:prstGeom>
+          <a:noFill/>
+          <a:ln/>
+        </p:spPr>
+        <p:txBody>
+          <a:bodyPr wrap="square" lIns="0" tIns="0" rIns="0" bIns="0" rtlCol="0" anchor="t"/>
+          <a:lstStyle/>
+          <a:p>
+            <a:pPr indent="0" marL="0">
+              <a:buNone/>
+            </a:pPr>
+            <a:r>
+              <a:rPr lang="en-US" sz="850" b="1" dirty="0">
                 <a:solidFill>
                   <a:srgbClr val="15224B"/>
                 </a:solidFill>
@@ -15630,7 +15652,7 @@
               </a:rPr>
               <a:t>Exclusivity and reporting access</a:t>
             </a:r>
-            <a:endParaRPr lang="en-US" sz="900" dirty="0"/>
+            <a:endParaRPr lang="en-US" sz="850" dirty="0"/>
           </a:p>
         </p:txBody>
       </p:sp>
@@ -15642,24 +15664,24 @@
         </p:nvSpPr>
         <p:spPr>
           <a:xfrm>
-            <a:off x="3327400" y="5524500"/>
-            <a:ext cx="5270500" cy="311150"/>
-          </a:xfrm>
-          <a:prstGeom prst="rect">
-            <a:avLst/>
-          </a:prstGeom>
-          <a:noFill/>
-          <a:ln/>
-        </p:spPr>
-        <p:txBody>
-          <a:bodyPr wrap="square" lIns="0" tIns="0" rIns="0" bIns="0" rtlCol="0" anchor="t"/>
-          <a:lstStyle/>
-          <a:p>
-            <a:pPr indent="0" marL="0">
-              <a:buNone/>
-            </a:pPr>
-            <a:r>
-              <a:rPr lang="en-US" sz="900" dirty="0">
+            <a:off x="3327400" y="5130800"/>
+            <a:ext cx="5270500" cy="279400"/>
+          </a:xfrm>
+          <a:prstGeom prst="rect">
+            <a:avLst/>
+          </a:prstGeom>
+          <a:noFill/>
+          <a:ln/>
+        </p:spPr>
+        <p:txBody>
+          <a:bodyPr wrap="square" lIns="0" tIns="0" rIns="0" bIns="0" rtlCol="0" anchor="t"/>
+          <a:lstStyle/>
+          <a:p>
+            <a:pPr indent="0" marL="0">
+              <a:buNone/>
+            </a:pPr>
+            <a:r>
+              <a:rPr lang="en-US" sz="850" dirty="0">
                 <a:solidFill>
                   <a:srgbClr val="5B6378"/>
                 </a:solidFill>
@@ -15669,7 +15691,7 @@
               </a:rPr>
               <a:t>Scope boundary, and OBP’s access to Marketplace seller reporting</a:t>
             </a:r>
-            <a:endParaRPr lang="en-US" sz="900" dirty="0"/>
+            <a:endParaRPr lang="en-US" sz="850" dirty="0"/>
           </a:p>
         </p:txBody>
       </p:sp>
@@ -15681,24 +15703,24 @@
         </p:nvSpPr>
         <p:spPr>
           <a:xfrm>
-            <a:off x="8890000" y="5524500"/>
-            <a:ext cx="2895600" cy="311150"/>
-          </a:xfrm>
-          <a:prstGeom prst="rect">
-            <a:avLst/>
-          </a:prstGeom>
-          <a:noFill/>
-          <a:ln/>
-        </p:spPr>
-        <p:txBody>
-          <a:bodyPr wrap="square" lIns="0" tIns="0" rIns="0" bIns="0" rtlCol="0" anchor="t"/>
-          <a:lstStyle/>
-          <a:p>
-            <a:pPr indent="0" marL="0">
-              <a:buNone/>
-            </a:pPr>
-            <a:r>
-              <a:rPr lang="en-US" sz="900" dirty="0">
+            <a:off x="8890000" y="5130800"/>
+            <a:ext cx="2895600" cy="279400"/>
+          </a:xfrm>
+          <a:prstGeom prst="rect">
+            <a:avLst/>
+          </a:prstGeom>
+          <a:noFill/>
+          <a:ln/>
+        </p:spPr>
+        <p:txBody>
+          <a:bodyPr wrap="square" lIns="0" tIns="0" rIns="0" bIns="0" rtlCol="0" anchor="t"/>
+          <a:lstStyle/>
+          <a:p>
+            <a:pPr indent="0" marL="0">
+              <a:buNone/>
+            </a:pPr>
+            <a:r>
+              <a:rPr lang="en-US" sz="850" dirty="0">
                 <a:solidFill>
                   <a:srgbClr val="5B6378"/>
                 </a:solidFill>
@@ -15708,7 +15730,7 @@
               </a:rPr>
               <a:t>Both · to agree</a:t>
             </a:r>
-            <a:endParaRPr lang="en-US" sz="900" dirty="0"/>
+            <a:endParaRPr lang="en-US" sz="850" dirty="0"/>
           </a:p>
         </p:txBody>
       </p:sp>
@@ -16110,7 +16132,7 @@
             <a:r>
               <a:rPr lang="en-US" sz="1600" b="1" dirty="0">
                 <a:solidFill>
-                  <a:srgbClr val="FFFFFF"/>
+                  <a:srgbClr val="15224B"/>
                 </a:solidFill>
                 <a:latin typeface="Segoe UI" pitchFamily="34" charset="0"/>
                 <a:ea typeface="Segoe UI" pitchFamily="34" charset="-122"/>
@@ -16188,7 +16210,7 @@
             <a:r>
               <a:rPr lang="en-US" sz="1600" b="1" dirty="0">
                 <a:solidFill>
-                  <a:srgbClr val="FFFFFF"/>
+                  <a:srgbClr val="15224B"/>
                 </a:solidFill>
                 <a:latin typeface="Segoe UI" pitchFamily="34" charset="0"/>
                 <a:ea typeface="Segoe UI" pitchFamily="34" charset="-122"/>
@@ -16266,7 +16288,7 @@
             <a:r>
               <a:rPr lang="en-US" sz="1600" b="1" dirty="0">
                 <a:solidFill>
-                  <a:srgbClr val="FFFFFF"/>
+                  <a:srgbClr val="15224B"/>
                 </a:solidFill>
                 <a:latin typeface="Segoe UI" pitchFamily="34" charset="0"/>
                 <a:ea typeface="Segoe UI" pitchFamily="34" charset="-122"/>
@@ -16361,7 +16383,7 @@
             <a:r>
               <a:rPr lang="en-US" sz="1600" b="1" dirty="0">
                 <a:solidFill>
-                  <a:srgbClr val="FFFFFF"/>
+                  <a:srgbClr val="15224B"/>
                 </a:solidFill>
                 <a:latin typeface="Segoe UI" pitchFamily="34" charset="0"/>
                 <a:ea typeface="Segoe UI" pitchFamily="34" charset="-122"/>
@@ -16421,7 +16443,7 @@
         <p:spPr>
           <a:xfrm>
             <a:off x="1023620" y="3759200"/>
-            <a:ext cx="3411220" cy="584200"/>
+            <a:ext cx="2730500" cy="584200"/>
           </a:xfrm>
           <a:prstGeom prst="rect">
             <a:avLst/>
@@ -16460,7 +16482,7 @@
         <p:spPr>
           <a:xfrm>
             <a:off x="1023620" y="4140200"/>
-            <a:ext cx="3411220" cy="1524000"/>
+            <a:ext cx="2730500" cy="1524000"/>
           </a:xfrm>
           <a:prstGeom prst="rect">
             <a:avLst/>
@@ -16499,7 +16521,7 @@
         <p:spPr>
           <a:xfrm>
             <a:off x="4765040" y="3759200"/>
-            <a:ext cx="3411220" cy="584200"/>
+            <a:ext cx="2730500" cy="584200"/>
           </a:xfrm>
           <a:prstGeom prst="rect">
             <a:avLst/>
@@ -16538,7 +16560,7 @@
         <p:spPr>
           <a:xfrm>
             <a:off x="4765040" y="4140200"/>
-            <a:ext cx="3411220" cy="1524000"/>
+            <a:ext cx="2730500" cy="1524000"/>
           </a:xfrm>
           <a:prstGeom prst="rect">
             <a:avLst/>
@@ -16577,7 +16599,7 @@
         <p:spPr>
           <a:xfrm>
             <a:off x="8506460" y="3759200"/>
-            <a:ext cx="3411220" cy="584200"/>
+            <a:ext cx="2730500" cy="584200"/>
           </a:xfrm>
           <a:prstGeom prst="rect">
             <a:avLst/>
@@ -16616,7 +16638,7 @@
         <p:spPr>
           <a:xfrm>
             <a:off x="8506460" y="4140200"/>
-            <a:ext cx="3411220" cy="1524000"/>
+            <a:ext cx="2730500" cy="1524000"/>
           </a:xfrm>
           <a:prstGeom prst="rect">
             <a:avLst/>
@@ -16994,8 +17016,8 @@
         </p:blipFill>
         <p:spPr>
           <a:xfrm>
-            <a:off x="420370" y="2523490"/>
-            <a:ext cx="2933700" cy="2908300"/>
+            <a:off x="515620" y="2523490"/>
+            <a:ext cx="3644900" cy="2908300"/>
           </a:xfrm>
           <a:prstGeom prst="rect">
             <a:avLst/>
@@ -17010,8 +17032,8 @@
         </p:nvSpPr>
         <p:spPr>
           <a:xfrm>
-            <a:off x="1023620" y="2540000"/>
-            <a:ext cx="3411220" cy="584200"/>
+            <a:off x="1023620" y="2794000"/>
+            <a:ext cx="2730500" cy="584200"/>
           </a:xfrm>
           <a:prstGeom prst="rect">
             <a:avLst/>
@@ -17049,8 +17071,8 @@
         </p:nvSpPr>
         <p:spPr>
           <a:xfrm>
-            <a:off x="1023620" y="2921000"/>
-            <a:ext cx="3411220" cy="203200"/>
+            <a:off x="1023620" y="3175000"/>
+            <a:ext cx="2730500" cy="203200"/>
           </a:xfrm>
           <a:prstGeom prst="rect">
             <a:avLst/>
@@ -17088,8 +17110,8 @@
         </p:nvSpPr>
         <p:spPr>
           <a:xfrm>
-            <a:off x="1023620" y="3136900"/>
-            <a:ext cx="3411220" cy="2578100"/>
+            <a:off x="1023620" y="3390900"/>
+            <a:ext cx="2730500" cy="2324100"/>
           </a:xfrm>
           <a:prstGeom prst="rect">
             <a:avLst/>
@@ -17135,8 +17157,8 @@
         </p:blipFill>
         <p:spPr>
           <a:xfrm>
-            <a:off x="4161790" y="2523490"/>
-            <a:ext cx="2933700" cy="2908300"/>
+            <a:off x="4257040" y="2523490"/>
+            <a:ext cx="3644900" cy="2908300"/>
           </a:xfrm>
           <a:prstGeom prst="rect">
             <a:avLst/>
@@ -17151,8 +17173,8 @@
         </p:nvSpPr>
         <p:spPr>
           <a:xfrm>
-            <a:off x="4765040" y="2540000"/>
-            <a:ext cx="3411220" cy="584200"/>
+            <a:off x="4765040" y="2794000"/>
+            <a:ext cx="2730500" cy="584200"/>
           </a:xfrm>
           <a:prstGeom prst="rect">
             <a:avLst/>
@@ -17190,8 +17212,8 @@
         </p:nvSpPr>
         <p:spPr>
           <a:xfrm>
-            <a:off x="4765040" y="2921000"/>
-            <a:ext cx="3411220" cy="203200"/>
+            <a:off x="4765040" y="3175000"/>
+            <a:ext cx="2730500" cy="203200"/>
           </a:xfrm>
           <a:prstGeom prst="rect">
             <a:avLst/>
@@ -17229,8 +17251,8 @@
         </p:nvSpPr>
         <p:spPr>
           <a:xfrm>
-            <a:off x="4765040" y="3136900"/>
-            <a:ext cx="3411220" cy="2578100"/>
+            <a:off x="4765040" y="3390900"/>
+            <a:ext cx="2730500" cy="2324100"/>
           </a:xfrm>
           <a:prstGeom prst="rect">
             <a:avLst/>
@@ -17276,8 +17298,8 @@
         </p:blipFill>
         <p:spPr>
           <a:xfrm>
-            <a:off x="7903210" y="2523490"/>
-            <a:ext cx="2933700" cy="2908300"/>
+            <a:off x="7998460" y="2523490"/>
+            <a:ext cx="3644900" cy="2908300"/>
           </a:xfrm>
           <a:prstGeom prst="rect">
             <a:avLst/>
@@ -17292,8 +17314,8 @@
         </p:nvSpPr>
         <p:spPr>
           <a:xfrm>
-            <a:off x="8506460" y="2540000"/>
-            <a:ext cx="3411220" cy="584200"/>
+            <a:off x="8506460" y="2794000"/>
+            <a:ext cx="2730500" cy="584200"/>
           </a:xfrm>
           <a:prstGeom prst="rect">
             <a:avLst/>
@@ -17331,8 +17353,8 @@
         </p:nvSpPr>
         <p:spPr>
           <a:xfrm>
-            <a:off x="8506460" y="2921000"/>
-            <a:ext cx="3411220" cy="203200"/>
+            <a:off x="8506460" y="3175000"/>
+            <a:ext cx="2730500" cy="203200"/>
           </a:xfrm>
           <a:prstGeom prst="rect">
             <a:avLst/>
@@ -17370,8 +17392,8 @@
         </p:nvSpPr>
         <p:spPr>
           <a:xfrm>
-            <a:off x="8506460" y="3136900"/>
-            <a:ext cx="3411220" cy="2578100"/>
+            <a:off x="8506460" y="3390900"/>
+            <a:ext cx="2730500" cy="2324100"/>
           </a:xfrm>
           <a:prstGeom prst="rect">
             <a:avLst/>
@@ -17763,7 +17785,7 @@
             <a:r>
               <a:rPr lang="en-US" sz="1300" b="1" dirty="0">
                 <a:solidFill>
-                  <a:srgbClr val="FFFFFF"/>
+                  <a:srgbClr val="15224B"/>
                 </a:solidFill>
                 <a:latin typeface="Segoe UI" pitchFamily="34" charset="0"/>
                 <a:ea typeface="Segoe UI" pitchFamily="34" charset="-122"/>
@@ -18013,7 +18035,7 @@
             <a:r>
               <a:rPr lang="en-US" sz="1300" b="1" dirty="0">
                 <a:solidFill>
-                  <a:srgbClr val="FFFFFF"/>
+                  <a:srgbClr val="15224B"/>
                 </a:solidFill>
                 <a:latin typeface="Segoe UI" pitchFamily="34" charset="0"/>
                 <a:ea typeface="Segoe UI" pitchFamily="34" charset="-122"/>
@@ -18610,8 +18632,8 @@
         </p:nvSpPr>
         <p:spPr>
           <a:xfrm>
-            <a:off x="566420" y="2292350"/>
-            <a:ext cx="11055350" cy="317500"/>
+            <a:off x="566420" y="2216150"/>
+            <a:ext cx="11055350" cy="292100"/>
           </a:xfrm>
           <a:prstGeom prst="rect">
             <a:avLst/>
@@ -18630,7 +18652,7 @@
         </p:nvSpPr>
         <p:spPr>
           <a:xfrm>
-            <a:off x="749300" y="2362200"/>
+            <a:off x="749300" y="2286000"/>
             <a:ext cx="4191000" cy="203200"/>
           </a:xfrm>
           <a:prstGeom prst="rect">
@@ -18647,7 +18669,7 @@
               <a:buNone/>
             </a:pPr>
             <a:r>
-              <a:rPr lang="en-US" sz="1000" b="1" dirty="0">
+              <a:rPr lang="en-US" sz="950" b="1" dirty="0">
                 <a:solidFill>
                   <a:srgbClr val="FFFFFF"/>
                 </a:solidFill>
@@ -18657,7 +18679,7 @@
               </a:rPr>
               <a:t>Entry condition or item</a:t>
             </a:r>
-            <a:endParaRPr lang="en-US" sz="1000" dirty="0"/>
+            <a:endParaRPr lang="en-US" sz="950" dirty="0"/>
           </a:p>
         </p:txBody>
       </p:sp>
@@ -18669,7 +18691,7 @@
         </p:nvSpPr>
         <p:spPr>
           <a:xfrm>
-            <a:off x="5143500" y="2362200"/>
+            <a:off x="5143500" y="2286000"/>
             <a:ext cx="1905000" cy="203200"/>
           </a:xfrm>
           <a:prstGeom prst="rect">
@@ -18686,7 +18708,7 @@
               <a:buNone/>
             </a:pPr>
             <a:r>
-              <a:rPr lang="en-US" sz="1000" b="1" dirty="0">
+              <a:rPr lang="en-US" sz="950" b="1" dirty="0">
                 <a:solidFill>
                   <a:srgbClr val="FFFFFF"/>
                 </a:solidFill>
@@ -18696,7 +18718,7 @@
               </a:rPr>
               <a:t>Owner</a:t>
             </a:r>
-            <a:endParaRPr lang="en-US" sz="1000" dirty="0"/>
+            <a:endParaRPr lang="en-US" sz="950" dirty="0"/>
           </a:p>
         </p:txBody>
       </p:sp>
@@ -18708,7 +18730,7 @@
         </p:nvSpPr>
         <p:spPr>
           <a:xfrm>
-            <a:off x="7366000" y="2362200"/>
+            <a:off x="7366000" y="2286000"/>
             <a:ext cx="2895600" cy="203200"/>
           </a:xfrm>
           <a:prstGeom prst="rect">
@@ -18725,7 +18747,7 @@
               <a:buNone/>
             </a:pPr>
             <a:r>
-              <a:rPr lang="en-US" sz="1000" b="1" dirty="0">
+              <a:rPr lang="en-US" sz="950" b="1" dirty="0">
                 <a:solidFill>
                   <a:srgbClr val="FFFFFF"/>
                 </a:solidFill>
@@ -18735,137 +18757,20 @@
               </a:rPr>
               <a:t>Standing</a:t>
             </a:r>
-            <a:endParaRPr lang="en-US" sz="1000" dirty="0"/>
-          </a:p>
-        </p:txBody>
-      </p:sp>
-      <p:sp>
-        <p:nvSpPr>
-          <p:cNvPr id="13" name="Text 9"/>
-          <p:cNvSpPr txBox="1"/>
-          <p:nvPr/>
-        </p:nvSpPr>
-        <p:spPr>
-          <a:xfrm>
-            <a:off x="749300" y="2730500"/>
-            <a:ext cx="4191000" cy="317500"/>
-          </a:xfrm>
-          <a:prstGeom prst="rect">
-            <a:avLst/>
-          </a:prstGeom>
-          <a:noFill/>
-          <a:ln/>
-        </p:spPr>
-        <p:txBody>
-          <a:bodyPr wrap="square" lIns="0" tIns="0" rIns="0" bIns="0" rtlCol="0" anchor="t"/>
-          <a:lstStyle/>
-          <a:p>
-            <a:pPr indent="0" marL="0">
-              <a:buNone/>
-            </a:pPr>
-            <a:r>
-              <a:rPr lang="en-US" sz="1000" b="1" dirty="0">
-                <a:solidFill>
-                  <a:srgbClr val="15224B"/>
-                </a:solidFill>
-                <a:latin typeface="Segoe UI" pitchFamily="34" charset="0"/>
-                <a:ea typeface="Segoe UI" pitchFamily="34" charset="-122"/>
-                <a:cs typeface="Segoe UI" pitchFamily="34" charset="-120"/>
-              </a:rPr>
-              <a:t>Validated or Differentiated held by the lead partner</a:t>
-            </a:r>
-            <a:endParaRPr lang="en-US" sz="1000" dirty="0"/>
-          </a:p>
-        </p:txBody>
-      </p:sp>
-      <p:sp>
-        <p:nvSpPr>
-          <p:cNvPr id="14" name="Text 10"/>
-          <p:cNvSpPr txBox="1"/>
-          <p:nvPr/>
-        </p:nvSpPr>
-        <p:spPr>
-          <a:xfrm>
-            <a:off x="5143500" y="2730500"/>
-            <a:ext cx="1905000" cy="317500"/>
-          </a:xfrm>
-          <a:prstGeom prst="rect">
-            <a:avLst/>
-          </a:prstGeom>
-          <a:noFill/>
-          <a:ln/>
-        </p:spPr>
-        <p:txBody>
-          <a:bodyPr wrap="square" lIns="0" tIns="0" rIns="0" bIns="0" rtlCol="0" anchor="t"/>
-          <a:lstStyle/>
-          <a:p>
-            <a:pPr indent="0" marL="0">
-              <a:buNone/>
-            </a:pPr>
-            <a:r>
-              <a:rPr lang="en-US" sz="1000" dirty="0">
-                <a:solidFill>
-                  <a:srgbClr val="5B6378"/>
-                </a:solidFill>
-                <a:latin typeface="Segoe UI Semilight" pitchFamily="34" charset="0"/>
-                <a:ea typeface="Segoe UI Semilight" pitchFamily="34" charset="-122"/>
-                <a:cs typeface="Segoe UI Semilight" pitchFamily="34" charset="-120"/>
-              </a:rPr>
-              <a:t>Automatum</a:t>
-            </a:r>
-            <a:endParaRPr lang="en-US" sz="1000" dirty="0"/>
-          </a:p>
-        </p:txBody>
-      </p:sp>
-      <p:sp>
-        <p:nvSpPr>
-          <p:cNvPr id="15" name="Text 11"/>
-          <p:cNvSpPr txBox="1"/>
-          <p:nvPr/>
-        </p:nvSpPr>
-        <p:spPr>
-          <a:xfrm>
-            <a:off x="7366000" y="2730500"/>
-            <a:ext cx="2895600" cy="317500"/>
-          </a:xfrm>
-          <a:prstGeom prst="rect">
-            <a:avLst/>
-          </a:prstGeom>
-          <a:noFill/>
-          <a:ln/>
-        </p:spPr>
-        <p:txBody>
-          <a:bodyPr wrap="square" lIns="0" tIns="0" rIns="0" bIns="0" rtlCol="0" anchor="t"/>
-          <a:lstStyle/>
-          <a:p>
-            <a:pPr indent="0" marL="0">
-              <a:buNone/>
-            </a:pPr>
-            <a:r>
-              <a:rPr lang="en-US" sz="1000" dirty="0">
-                <a:solidFill>
-                  <a:srgbClr val="5B6378"/>
-                </a:solidFill>
-                <a:latin typeface="Segoe UI Semilight" pitchFamily="34" charset="0"/>
-                <a:ea typeface="Segoe UI Semilight" pitchFamily="34" charset="-122"/>
-                <a:cs typeface="Segoe UI Semilight" pitchFamily="34" charset="-120"/>
-              </a:rPr>
-              <a:t>Stated by Automatum (Aein, email) — evidence to attach</a:t>
-            </a:r>
-            <a:endParaRPr lang="en-US" sz="1000" dirty="0"/>
-          </a:p>
-        </p:txBody>
-      </p:sp>
-      <p:sp>
-        <p:nvSpPr>
-          <p:cNvPr id="16" name="Shape 12"/>
+            <a:endParaRPr lang="en-US" sz="950" dirty="0"/>
+          </a:p>
+        </p:txBody>
+      </p:sp>
+      <p:sp>
+        <p:nvSpPr>
+          <p:cNvPr id="13" name="Shape 9"/>
           <p:cNvSpPr/>
           <p:nvPr/>
         </p:nvSpPr>
         <p:spPr>
           <a:xfrm>
-            <a:off x="566420" y="2978150"/>
-            <a:ext cx="11055350" cy="317500"/>
+            <a:off x="566420" y="2851150"/>
+            <a:ext cx="11055350" cy="292100"/>
           </a:xfrm>
           <a:prstGeom prst="rect">
             <a:avLst/>
@@ -18878,248 +18783,14 @@
       </p:sp>
       <p:sp>
         <p:nvSpPr>
-          <p:cNvPr id="17" name="Text 13"/>
-          <p:cNvSpPr txBox="1"/>
-          <p:nvPr/>
-        </p:nvSpPr>
-        <p:spPr>
-          <a:xfrm>
-            <a:off x="749300" y="3048000"/>
-            <a:ext cx="4191000" cy="317500"/>
-          </a:xfrm>
-          <a:prstGeom prst="rect">
-            <a:avLst/>
-          </a:prstGeom>
-          <a:noFill/>
-          <a:ln/>
-        </p:spPr>
-        <p:txBody>
-          <a:bodyPr wrap="square" lIns="0" tIns="0" rIns="0" bIns="0" rtlCol="0" anchor="t"/>
-          <a:lstStyle/>
-          <a:p>
-            <a:pPr indent="0" marL="0">
-              <a:buNone/>
-            </a:pPr>
-            <a:r>
-              <a:rPr lang="en-US" sz="1000" b="1" dirty="0">
-                <a:solidFill>
-                  <a:srgbClr val="15224B"/>
-                </a:solidFill>
-                <a:latin typeface="Segoe UI" pitchFamily="34" charset="0"/>
-                <a:ea typeface="Segoe UI" pitchFamily="34" charset="-122"/>
-                <a:cs typeface="Segoe UI" pitchFamily="34" charset="-120"/>
-              </a:rPr>
-              <a:t>Automatum is lead partner of record on all four Solution IDs</a:t>
-            </a:r>
-            <a:endParaRPr lang="en-US" sz="1000" dirty="0"/>
-          </a:p>
-        </p:txBody>
-      </p:sp>
-      <p:sp>
-        <p:nvSpPr>
-          <p:cNvPr id="18" name="Text 14"/>
-          <p:cNvSpPr txBox="1"/>
-          <p:nvPr/>
-        </p:nvSpPr>
-        <p:spPr>
-          <a:xfrm>
-            <a:off x="5143500" y="3048000"/>
-            <a:ext cx="1905000" cy="317500"/>
-          </a:xfrm>
-          <a:prstGeom prst="rect">
-            <a:avLst/>
-          </a:prstGeom>
-          <a:noFill/>
-          <a:ln/>
-        </p:spPr>
-        <p:txBody>
-          <a:bodyPr wrap="square" lIns="0" tIns="0" rIns="0" bIns="0" rtlCol="0" anchor="t"/>
-          <a:lstStyle/>
-          <a:p>
-            <a:pPr indent="0" marL="0">
-              <a:buNone/>
-            </a:pPr>
-            <a:r>
-              <a:rPr lang="en-US" sz="1000" dirty="0">
-                <a:solidFill>
-                  <a:srgbClr val="5B6378"/>
-                </a:solidFill>
-                <a:latin typeface="Segoe UI Semilight" pitchFamily="34" charset="0"/>
-                <a:ea typeface="Segoe UI Semilight" pitchFamily="34" charset="-122"/>
-                <a:cs typeface="Segoe UI Semilight" pitchFamily="34" charset="-120"/>
-              </a:rPr>
-              <a:t>Automatum</a:t>
-            </a:r>
-            <a:endParaRPr lang="en-US" sz="1000" dirty="0"/>
-          </a:p>
-        </p:txBody>
-      </p:sp>
-      <p:sp>
-        <p:nvSpPr>
-          <p:cNvPr id="19" name="Text 15"/>
-          <p:cNvSpPr txBox="1"/>
-          <p:nvPr/>
-        </p:nvSpPr>
-        <p:spPr>
-          <a:xfrm>
-            <a:off x="7366000" y="3048000"/>
-            <a:ext cx="2895600" cy="317500"/>
-          </a:xfrm>
-          <a:prstGeom prst="rect">
-            <a:avLst/>
-          </a:prstGeom>
-          <a:noFill/>
-          <a:ln/>
-        </p:spPr>
-        <p:txBody>
-          <a:bodyPr wrap="square" lIns="0" tIns="0" rIns="0" bIns="0" rtlCol="0" anchor="t"/>
-          <a:lstStyle/>
-          <a:p>
-            <a:pPr indent="0" marL="0">
-              <a:buNone/>
-            </a:pPr>
-            <a:r>
-              <a:rPr lang="en-US" sz="1000" dirty="0">
-                <a:solidFill>
-                  <a:srgbClr val="5B6378"/>
-                </a:solidFill>
-                <a:latin typeface="Segoe UI Semilight" pitchFamily="34" charset="0"/>
-                <a:ea typeface="Segoe UI Semilight" pitchFamily="34" charset="-122"/>
-                <a:cs typeface="Segoe UI Semilight" pitchFamily="34" charset="-120"/>
-              </a:rPr>
-              <a:t>To confirm</a:t>
-            </a:r>
-            <a:endParaRPr lang="en-US" sz="1000" dirty="0"/>
-          </a:p>
-        </p:txBody>
-      </p:sp>
-      <p:sp>
-        <p:nvSpPr>
-          <p:cNvPr id="20" name="Text 16"/>
-          <p:cNvSpPr txBox="1"/>
-          <p:nvPr/>
-        </p:nvSpPr>
-        <p:spPr>
-          <a:xfrm>
-            <a:off x="749300" y="3365500"/>
-            <a:ext cx="4191000" cy="317500"/>
-          </a:xfrm>
-          <a:prstGeom prst="rect">
-            <a:avLst/>
-          </a:prstGeom>
-          <a:noFill/>
-          <a:ln/>
-        </p:spPr>
-        <p:txBody>
-          <a:bodyPr wrap="square" lIns="0" tIns="0" rIns="0" bIns="0" rtlCol="0" anchor="t"/>
-          <a:lstStyle/>
-          <a:p>
-            <a:pPr indent="0" marL="0">
-              <a:buNone/>
-            </a:pPr>
-            <a:r>
-              <a:rPr lang="en-US" sz="1000" b="1" dirty="0">
-                <a:solidFill>
-                  <a:srgbClr val="15224B"/>
-                </a:solidFill>
-                <a:latin typeface="Segoe UI" pitchFamily="34" charset="0"/>
-                <a:ea typeface="Segoe UI" pitchFamily="34" charset="-122"/>
-                <a:cs typeface="Segoe UI" pitchFamily="34" charset="-120"/>
-              </a:rPr>
-              <a:t>Solution listed within 12 months</a:t>
-            </a:r>
-            <a:endParaRPr lang="en-US" sz="1000" dirty="0"/>
-          </a:p>
-        </p:txBody>
-      </p:sp>
-      <p:sp>
-        <p:nvSpPr>
-          <p:cNvPr id="21" name="Text 17"/>
-          <p:cNvSpPr txBox="1"/>
-          <p:nvPr/>
-        </p:nvSpPr>
-        <p:spPr>
-          <a:xfrm>
-            <a:off x="5143500" y="3365500"/>
-            <a:ext cx="1905000" cy="317500"/>
-          </a:xfrm>
-          <a:prstGeom prst="rect">
-            <a:avLst/>
-          </a:prstGeom>
-          <a:noFill/>
-          <a:ln/>
-        </p:spPr>
-        <p:txBody>
-          <a:bodyPr wrap="square" lIns="0" tIns="0" rIns="0" bIns="0" rtlCol="0" anchor="t"/>
-          <a:lstStyle/>
-          <a:p>
-            <a:pPr indent="0" marL="0">
-              <a:buNone/>
-            </a:pPr>
-            <a:r>
-              <a:rPr lang="en-US" sz="1000" dirty="0">
-                <a:solidFill>
-                  <a:srgbClr val="5B6378"/>
-                </a:solidFill>
-                <a:latin typeface="Segoe UI Semilight" pitchFamily="34" charset="0"/>
-                <a:ea typeface="Segoe UI Semilight" pitchFamily="34" charset="-122"/>
-                <a:cs typeface="Segoe UI Semilight" pitchFamily="34" charset="-120"/>
-              </a:rPr>
-              <a:t>Automatum + OBP</a:t>
-            </a:r>
-            <a:endParaRPr lang="en-US" sz="1000" dirty="0"/>
-          </a:p>
-        </p:txBody>
-      </p:sp>
-      <p:sp>
-        <p:nvSpPr>
-          <p:cNvPr id="22" name="Text 18"/>
-          <p:cNvSpPr txBox="1"/>
-          <p:nvPr/>
-        </p:nvSpPr>
-        <p:spPr>
-          <a:xfrm>
-            <a:off x="7366000" y="3365500"/>
-            <a:ext cx="2895600" cy="317500"/>
-          </a:xfrm>
-          <a:prstGeom prst="rect">
-            <a:avLst/>
-          </a:prstGeom>
-          <a:noFill/>
-          <a:ln/>
-        </p:spPr>
-        <p:txBody>
-          <a:bodyPr wrap="square" lIns="0" tIns="0" rIns="0" bIns="0" rtlCol="0" anchor="t"/>
-          <a:lstStyle/>
-          <a:p>
-            <a:pPr indent="0" marL="0">
-              <a:buNone/>
-            </a:pPr>
-            <a:r>
-              <a:rPr lang="en-US" sz="1000" dirty="0">
-                <a:solidFill>
-                  <a:srgbClr val="5B6378"/>
-                </a:solidFill>
-                <a:latin typeface="Segoe UI Semilight" pitchFamily="34" charset="0"/>
-                <a:ea typeface="Segoe UI Semilight" pitchFamily="34" charset="-122"/>
-                <a:cs typeface="Segoe UI Semilight" pitchFamily="34" charset="-120"/>
-              </a:rPr>
-              <a:t>[Per-wave deadlines once the clock basis is confirmed]</a:t>
-            </a:r>
-            <a:endParaRPr lang="en-US" sz="1000" dirty="0"/>
-          </a:p>
-        </p:txBody>
-      </p:sp>
-      <p:sp>
-        <p:nvSpPr>
-          <p:cNvPr id="23" name="Shape 19"/>
+          <p:cNvPr id="14" name="Shape 10"/>
           <p:cNvSpPr/>
           <p:nvPr/>
         </p:nvSpPr>
         <p:spPr>
           <a:xfrm>
-            <a:off x="566420" y="3613150"/>
-            <a:ext cx="11055350" cy="317500"/>
+            <a:off x="566420" y="3435350"/>
+            <a:ext cx="11055350" cy="292100"/>
           </a:xfrm>
           <a:prstGeom prst="rect">
             <a:avLst/>
@@ -19132,248 +18803,14 @@
       </p:sp>
       <p:sp>
         <p:nvSpPr>
-          <p:cNvPr id="24" name="Text 20"/>
-          <p:cNvSpPr txBox="1"/>
-          <p:nvPr/>
-        </p:nvSpPr>
-        <p:spPr>
-          <a:xfrm>
-            <a:off x="749300" y="3683000"/>
-            <a:ext cx="4191000" cy="317500"/>
-          </a:xfrm>
-          <a:prstGeom prst="rect">
-            <a:avLst/>
-          </a:prstGeom>
-          <a:noFill/>
-          <a:ln/>
-        </p:spPr>
-        <p:txBody>
-          <a:bodyPr wrap="square" lIns="0" tIns="0" rIns="0" bIns="0" rtlCol="0" anchor="t"/>
-          <a:lstStyle/>
-          <a:p>
-            <a:pPr indent="0" marL="0">
-              <a:buNone/>
-            </a:pPr>
-            <a:r>
-              <a:rPr lang="en-US" sz="1000" b="1" dirty="0">
-                <a:solidFill>
-                  <a:srgbClr val="15224B"/>
-                </a:solidFill>
-                <a:latin typeface="Segoe UI" pitchFamily="34" charset="0"/>
-                <a:ea typeface="Segoe UI" pitchFamily="34" charset="-122"/>
-                <a:cs typeface="Segoe UI" pitchFamily="34" charset="-120"/>
-              </a:rPr>
-              <a:t>Five ACE opportunity submissions per solution</a:t>
-            </a:r>
-            <a:endParaRPr lang="en-US" sz="1000" dirty="0"/>
-          </a:p>
-        </p:txBody>
-      </p:sp>
-      <p:sp>
-        <p:nvSpPr>
-          <p:cNvPr id="25" name="Text 21"/>
-          <p:cNvSpPr txBox="1"/>
-          <p:nvPr/>
-        </p:nvSpPr>
-        <p:spPr>
-          <a:xfrm>
-            <a:off x="5143500" y="3683000"/>
-            <a:ext cx="1905000" cy="317500"/>
-          </a:xfrm>
-          <a:prstGeom prst="rect">
-            <a:avLst/>
-          </a:prstGeom>
-          <a:noFill/>
-          <a:ln/>
-        </p:spPr>
-        <p:txBody>
-          <a:bodyPr wrap="square" lIns="0" tIns="0" rIns="0" bIns="0" rtlCol="0" anchor="t"/>
-          <a:lstStyle/>
-          <a:p>
-            <a:pPr indent="0" marL="0">
-              <a:buNone/>
-            </a:pPr>
-            <a:r>
-              <a:rPr lang="en-US" sz="1000" dirty="0">
-                <a:solidFill>
-                  <a:srgbClr val="5B6378"/>
-                </a:solidFill>
-                <a:latin typeface="Segoe UI Semilight" pitchFamily="34" charset="0"/>
-                <a:ea typeface="Segoe UI Semilight" pitchFamily="34" charset="-122"/>
-                <a:cs typeface="Segoe UI Semilight" pitchFamily="34" charset="-120"/>
-              </a:rPr>
-              <a:t>OBP</a:t>
-            </a:r>
-            <a:endParaRPr lang="en-US" sz="1000" dirty="0"/>
-          </a:p>
-        </p:txBody>
-      </p:sp>
-      <p:sp>
-        <p:nvSpPr>
-          <p:cNvPr id="26" name="Text 22"/>
-          <p:cNvSpPr txBox="1"/>
-          <p:nvPr/>
-        </p:nvSpPr>
-        <p:spPr>
-          <a:xfrm>
-            <a:off x="7366000" y="3683000"/>
-            <a:ext cx="2895600" cy="317500"/>
-          </a:xfrm>
-          <a:prstGeom prst="rect">
-            <a:avLst/>
-          </a:prstGeom>
-          <a:noFill/>
-          <a:ln/>
-        </p:spPr>
-        <p:txBody>
-          <a:bodyPr wrap="square" lIns="0" tIns="0" rIns="0" bIns="0" rtlCol="0" anchor="t"/>
-          <a:lstStyle/>
-          <a:p>
-            <a:pPr indent="0" marL="0">
-              <a:buNone/>
-            </a:pPr>
-            <a:r>
-              <a:rPr lang="en-US" sz="1000" dirty="0">
-                <a:solidFill>
-                  <a:srgbClr val="5B6378"/>
-                </a:solidFill>
-                <a:latin typeface="Segoe UI Semilight" pitchFamily="34" charset="0"/>
-                <a:ea typeface="Segoe UI Semilight" pitchFamily="34" charset="-122"/>
-                <a:cs typeface="Segoe UI Semilight" pitchFamily="34" charset="-120"/>
-              </a:rPr>
-              <a:t>Built into each solution’s plan</a:t>
-            </a:r>
-            <a:endParaRPr lang="en-US" sz="1000" dirty="0"/>
-          </a:p>
-        </p:txBody>
-      </p:sp>
-      <p:sp>
-        <p:nvSpPr>
-          <p:cNvPr id="27" name="Text 23"/>
-          <p:cNvSpPr txBox="1"/>
-          <p:nvPr/>
-        </p:nvSpPr>
-        <p:spPr>
-          <a:xfrm>
-            <a:off x="749300" y="4000500"/>
-            <a:ext cx="4191000" cy="317500"/>
-          </a:xfrm>
-          <a:prstGeom prst="rect">
-            <a:avLst/>
-          </a:prstGeom>
-          <a:noFill/>
-          <a:ln/>
-        </p:spPr>
-        <p:txBody>
-          <a:bodyPr wrap="square" lIns="0" tIns="0" rIns="0" bIns="0" rtlCol="0" anchor="t"/>
-          <a:lstStyle/>
-          <a:p>
-            <a:pPr indent="0" marL="0">
-              <a:buNone/>
-            </a:pPr>
-            <a:r>
-              <a:rPr lang="en-US" sz="1000" b="1" dirty="0">
-                <a:solidFill>
-                  <a:srgbClr val="15224B"/>
-                </a:solidFill>
-                <a:latin typeface="Segoe UI" pitchFamily="34" charset="0"/>
-                <a:ea typeface="Segoe UI" pitchFamily="34" charset="-122"/>
-                <a:cs typeface="Segoe UI" pitchFamily="34" charset="-120"/>
-              </a:rPr>
-              <a:t>Milestone 1 Feasibility Study per solution</a:t>
-            </a:r>
-            <a:endParaRPr lang="en-US" sz="1000" dirty="0"/>
-          </a:p>
-        </p:txBody>
-      </p:sp>
-      <p:sp>
-        <p:nvSpPr>
-          <p:cNvPr id="28" name="Text 24"/>
-          <p:cNvSpPr txBox="1"/>
-          <p:nvPr/>
-        </p:nvSpPr>
-        <p:spPr>
-          <a:xfrm>
-            <a:off x="5143500" y="4000500"/>
-            <a:ext cx="1905000" cy="317500"/>
-          </a:xfrm>
-          <a:prstGeom prst="rect">
-            <a:avLst/>
-          </a:prstGeom>
-          <a:noFill/>
-          <a:ln/>
-        </p:spPr>
-        <p:txBody>
-          <a:bodyPr wrap="square" lIns="0" tIns="0" rIns="0" bIns="0" rtlCol="0" anchor="t"/>
-          <a:lstStyle/>
-          <a:p>
-            <a:pPr indent="0" marL="0">
-              <a:buNone/>
-            </a:pPr>
-            <a:r>
-              <a:rPr lang="en-US" sz="1000" dirty="0">
-                <a:solidFill>
-                  <a:srgbClr val="5B6378"/>
-                </a:solidFill>
-                <a:latin typeface="Segoe UI Semilight" pitchFamily="34" charset="0"/>
-                <a:ea typeface="Segoe UI Semilight" pitchFamily="34" charset="-122"/>
-                <a:cs typeface="Segoe UI Semilight" pitchFamily="34" charset="-120"/>
-              </a:rPr>
-              <a:t>OBP</a:t>
-            </a:r>
-            <a:endParaRPr lang="en-US" sz="1000" dirty="0"/>
-          </a:p>
-        </p:txBody>
-      </p:sp>
-      <p:sp>
-        <p:nvSpPr>
-          <p:cNvPr id="29" name="Text 25"/>
-          <p:cNvSpPr txBox="1"/>
-          <p:nvPr/>
-        </p:nvSpPr>
-        <p:spPr>
-          <a:xfrm>
-            <a:off x="7366000" y="4000500"/>
-            <a:ext cx="2895600" cy="317500"/>
-          </a:xfrm>
-          <a:prstGeom prst="rect">
-            <a:avLst/>
-          </a:prstGeom>
-          <a:noFill/>
-          <a:ln/>
-        </p:spPr>
-        <p:txBody>
-          <a:bodyPr wrap="square" lIns="0" tIns="0" rIns="0" bIns="0" rtlCol="0" anchor="t"/>
-          <a:lstStyle/>
-          <a:p>
-            <a:pPr indent="0" marL="0">
-              <a:buNone/>
-            </a:pPr>
-            <a:r>
-              <a:rPr lang="en-US" sz="1000" dirty="0">
-                <a:solidFill>
-                  <a:srgbClr val="5B6378"/>
-                </a:solidFill>
-                <a:latin typeface="Segoe UI Semilight" pitchFamily="34" charset="0"/>
-                <a:ea typeface="Segoe UI Semilight" pitchFamily="34" charset="-122"/>
-                <a:cs typeface="Segoe UI Semilight" pitchFamily="34" charset="-120"/>
-              </a:rPr>
-              <a:t>Drafted from the overviews</a:t>
-            </a:r>
-            <a:endParaRPr lang="en-US" sz="1000" dirty="0"/>
-          </a:p>
-        </p:txBody>
-      </p:sp>
-      <p:sp>
-        <p:nvSpPr>
-          <p:cNvPr id="30" name="Shape 26"/>
+          <p:cNvPr id="15" name="Shape 11"/>
           <p:cNvSpPr/>
           <p:nvPr/>
         </p:nvSpPr>
         <p:spPr>
           <a:xfrm>
-            <a:off x="566420" y="4248150"/>
-            <a:ext cx="11055350" cy="317500"/>
+            <a:off x="566420" y="4019550"/>
+            <a:ext cx="11055350" cy="292100"/>
           </a:xfrm>
           <a:prstGeom prst="rect">
             <a:avLst/>
@@ -19386,248 +18823,14 @@
       </p:sp>
       <p:sp>
         <p:nvSpPr>
-          <p:cNvPr id="31" name="Text 27"/>
-          <p:cNvSpPr txBox="1"/>
-          <p:nvPr/>
-        </p:nvSpPr>
-        <p:spPr>
-          <a:xfrm>
-            <a:off x="749300" y="4318000"/>
-            <a:ext cx="4191000" cy="317500"/>
-          </a:xfrm>
-          <a:prstGeom prst="rect">
-            <a:avLst/>
-          </a:prstGeom>
-          <a:noFill/>
-          <a:ln/>
-        </p:spPr>
-        <p:txBody>
-          <a:bodyPr wrap="square" lIns="0" tIns="0" rIns="0" bIns="0" rtlCol="0" anchor="t"/>
-          <a:lstStyle/>
-          <a:p>
-            <a:pPr indent="0" marL="0">
-              <a:buNone/>
-            </a:pPr>
-            <a:r>
-              <a:rPr lang="en-US" sz="1000" b="1" dirty="0">
-                <a:solidFill>
-                  <a:srgbClr val="15224B"/>
-                </a:solidFill>
-                <a:latin typeface="Segoe UI" pitchFamily="34" charset="0"/>
-                <a:ea typeface="Segoe UI" pitchFamily="34" charset="-122"/>
-                <a:cs typeface="Segoe UI" pitchFamily="34" charset="-120"/>
-              </a:rPr>
-              <a:t>Commit / target set per retainer rung</a:t>
-            </a:r>
-            <a:endParaRPr lang="en-US" sz="1000" dirty="0"/>
-          </a:p>
-        </p:txBody>
-      </p:sp>
-      <p:sp>
-        <p:nvSpPr>
-          <p:cNvPr id="32" name="Text 28"/>
-          <p:cNvSpPr txBox="1"/>
-          <p:nvPr/>
-        </p:nvSpPr>
-        <p:spPr>
-          <a:xfrm>
-            <a:off x="5143500" y="4318000"/>
-            <a:ext cx="1905000" cy="317500"/>
-          </a:xfrm>
-          <a:prstGeom prst="rect">
-            <a:avLst/>
-          </a:prstGeom>
-          <a:noFill/>
-          <a:ln/>
-        </p:spPr>
-        <p:txBody>
-          <a:bodyPr wrap="square" lIns="0" tIns="0" rIns="0" bIns="0" rtlCol="0" anchor="t"/>
-          <a:lstStyle/>
-          <a:p>
-            <a:pPr indent="0" marL="0">
-              <a:buNone/>
-            </a:pPr>
-            <a:r>
-              <a:rPr lang="en-US" sz="1000" dirty="0">
-                <a:solidFill>
-                  <a:srgbClr val="5B6378"/>
-                </a:solidFill>
-                <a:latin typeface="Segoe UI Semilight" pitchFamily="34" charset="0"/>
-                <a:ea typeface="Segoe UI Semilight" pitchFamily="34" charset="-122"/>
-                <a:cs typeface="Segoe UI Semilight" pitchFamily="34" charset="-120"/>
-              </a:rPr>
-              <a:t>OBP</a:t>
-            </a:r>
-            <a:endParaRPr lang="en-US" sz="1000" dirty="0"/>
-          </a:p>
-        </p:txBody>
-      </p:sp>
-      <p:sp>
-        <p:nvSpPr>
-          <p:cNvPr id="33" name="Text 29"/>
-          <p:cNvSpPr txBox="1"/>
-          <p:nvPr/>
-        </p:nvSpPr>
-        <p:spPr>
-          <a:xfrm>
-            <a:off x="7366000" y="4318000"/>
-            <a:ext cx="2895600" cy="317500"/>
-          </a:xfrm>
-          <a:prstGeom prst="rect">
-            <a:avLst/>
-          </a:prstGeom>
-          <a:noFill/>
-          <a:ln/>
-        </p:spPr>
-        <p:txBody>
-          <a:bodyPr wrap="square" lIns="0" tIns="0" rIns="0" bIns="0" rtlCol="0" anchor="t"/>
-          <a:lstStyle/>
-          <a:p>
-            <a:pPr indent="0" marL="0">
-              <a:buNone/>
-            </a:pPr>
-            <a:r>
-              <a:rPr lang="en-US" sz="1000" dirty="0">
-                <a:solidFill>
-                  <a:srgbClr val="5B6378"/>
-                </a:solidFill>
-                <a:latin typeface="Segoe UI Semilight" pitchFamily="34" charset="0"/>
-                <a:ea typeface="Segoe UI Semilight" pitchFamily="34" charset="-122"/>
-                <a:cs typeface="Segoe UI Semilight" pitchFamily="34" charset="-120"/>
-              </a:rPr>
-              <a:t>In draft — placeholders to close by [date]</a:t>
-            </a:r>
-            <a:endParaRPr lang="en-US" sz="1000" dirty="0"/>
-          </a:p>
-        </p:txBody>
-      </p:sp>
-      <p:sp>
-        <p:nvSpPr>
-          <p:cNvPr id="34" name="Text 30"/>
-          <p:cNvSpPr txBox="1"/>
-          <p:nvPr/>
-        </p:nvSpPr>
-        <p:spPr>
-          <a:xfrm>
-            <a:off x="749300" y="4635500"/>
-            <a:ext cx="4191000" cy="317500"/>
-          </a:xfrm>
-          <a:prstGeom prst="rect">
-            <a:avLst/>
-          </a:prstGeom>
-          <a:noFill/>
-          <a:ln/>
-        </p:spPr>
-        <p:txBody>
-          <a:bodyPr wrap="square" lIns="0" tIns="0" rIns="0" bIns="0" rtlCol="0" anchor="t"/>
-          <a:lstStyle/>
-          <a:p>
-            <a:pPr indent="0" marL="0">
-              <a:buNone/>
-            </a:pPr>
-            <a:r>
-              <a:rPr lang="en-US" sz="1000" b="1" dirty="0">
-                <a:solidFill>
-                  <a:srgbClr val="15224B"/>
-                </a:solidFill>
-                <a:latin typeface="Segoe UI" pitchFamily="34" charset="0"/>
-                <a:ea typeface="Segoe UI" pitchFamily="34" charset="-122"/>
-                <a:cs typeface="Segoe UI" pitchFamily="34" charset="-120"/>
-              </a:rPr>
-              <a:t>Included band and overflow rate per rung</a:t>
-            </a:r>
-            <a:endParaRPr lang="en-US" sz="1000" dirty="0"/>
-          </a:p>
-        </p:txBody>
-      </p:sp>
-      <p:sp>
-        <p:nvSpPr>
-          <p:cNvPr id="35" name="Text 31"/>
-          <p:cNvSpPr txBox="1"/>
-          <p:nvPr/>
-        </p:nvSpPr>
-        <p:spPr>
-          <a:xfrm>
-            <a:off x="5143500" y="4635500"/>
-            <a:ext cx="1905000" cy="317500"/>
-          </a:xfrm>
-          <a:prstGeom prst="rect">
-            <a:avLst/>
-          </a:prstGeom>
-          <a:noFill/>
-          <a:ln/>
-        </p:spPr>
-        <p:txBody>
-          <a:bodyPr wrap="square" lIns="0" tIns="0" rIns="0" bIns="0" rtlCol="0" anchor="t"/>
-          <a:lstStyle/>
-          <a:p>
-            <a:pPr indent="0" marL="0">
-              <a:buNone/>
-            </a:pPr>
-            <a:r>
-              <a:rPr lang="en-US" sz="1000" dirty="0">
-                <a:solidFill>
-                  <a:srgbClr val="5B6378"/>
-                </a:solidFill>
-                <a:latin typeface="Segoe UI Semilight" pitchFamily="34" charset="0"/>
-                <a:ea typeface="Segoe UI Semilight" pitchFamily="34" charset="-122"/>
-                <a:cs typeface="Segoe UI Semilight" pitchFamily="34" charset="-120"/>
-              </a:rPr>
-              <a:t>OBP commercial</a:t>
-            </a:r>
-            <a:endParaRPr lang="en-US" sz="1000" dirty="0"/>
-          </a:p>
-        </p:txBody>
-      </p:sp>
-      <p:sp>
-        <p:nvSpPr>
-          <p:cNvPr id="36" name="Text 32"/>
-          <p:cNvSpPr txBox="1"/>
-          <p:nvPr/>
-        </p:nvSpPr>
-        <p:spPr>
-          <a:xfrm>
-            <a:off x="7366000" y="4635500"/>
-            <a:ext cx="2895600" cy="317500"/>
-          </a:xfrm>
-          <a:prstGeom prst="rect">
-            <a:avLst/>
-          </a:prstGeom>
-          <a:noFill/>
-          <a:ln/>
-        </p:spPr>
-        <p:txBody>
-          <a:bodyPr wrap="square" lIns="0" tIns="0" rIns="0" bIns="0" rtlCol="0" anchor="t"/>
-          <a:lstStyle/>
-          <a:p>
-            <a:pPr indent="0" marL="0">
-              <a:buNone/>
-            </a:pPr>
-            <a:r>
-              <a:rPr lang="en-US" sz="1000" dirty="0">
-                <a:solidFill>
-                  <a:srgbClr val="5B6378"/>
-                </a:solidFill>
-                <a:latin typeface="Segoe UI Semilight" pitchFamily="34" charset="0"/>
-                <a:ea typeface="Segoe UI Semilight" pitchFamily="34" charset="-122"/>
-                <a:cs typeface="Segoe UI Semilight" pitchFamily="34" charset="-120"/>
-              </a:rPr>
-              <a:t>To decide</a:t>
-            </a:r>
-            <a:endParaRPr lang="en-US" sz="1000" dirty="0"/>
-          </a:p>
-        </p:txBody>
-      </p:sp>
-      <p:sp>
-        <p:nvSpPr>
-          <p:cNvPr id="37" name="Shape 33"/>
+          <p:cNvPr id="16" name="Shape 12"/>
           <p:cNvSpPr/>
           <p:nvPr/>
         </p:nvSpPr>
         <p:spPr>
           <a:xfrm>
-            <a:off x="566420" y="4883150"/>
-            <a:ext cx="11055350" cy="317500"/>
+            <a:off x="566420" y="4603750"/>
+            <a:ext cx="11055350" cy="292100"/>
           </a:xfrm>
           <a:prstGeom prst="rect">
             <a:avLst/>
@@ -19640,30 +18843,849 @@
       </p:sp>
       <p:sp>
         <p:nvSpPr>
+          <p:cNvPr id="17" name="Text 13"/>
+          <p:cNvSpPr txBox="1"/>
+          <p:nvPr/>
+        </p:nvSpPr>
+        <p:spPr>
+          <a:xfrm>
+            <a:off x="749300" y="2628900"/>
+            <a:ext cx="4191000" cy="292100"/>
+          </a:xfrm>
+          <a:prstGeom prst="rect">
+            <a:avLst/>
+          </a:prstGeom>
+          <a:noFill/>
+          <a:ln/>
+        </p:spPr>
+        <p:txBody>
+          <a:bodyPr wrap="square" lIns="0" tIns="0" rIns="0" bIns="0" rtlCol="0" anchor="t"/>
+          <a:lstStyle/>
+          <a:p>
+            <a:pPr indent="0" marL="0">
+              <a:buNone/>
+            </a:pPr>
+            <a:r>
+              <a:rPr lang="en-US" sz="950" b="1" dirty="0">
+                <a:solidFill>
+                  <a:srgbClr val="15224B"/>
+                </a:solidFill>
+                <a:latin typeface="Segoe UI" pitchFamily="34" charset="0"/>
+                <a:ea typeface="Segoe UI" pitchFamily="34" charset="-122"/>
+                <a:cs typeface="Segoe UI" pitchFamily="34" charset="-120"/>
+              </a:rPr>
+              <a:t>Validated or Differentiated held by the lead partner</a:t>
+            </a:r>
+            <a:endParaRPr lang="en-US" sz="950" dirty="0"/>
+          </a:p>
+        </p:txBody>
+      </p:sp>
+      <p:sp>
+        <p:nvSpPr>
+          <p:cNvPr id="18" name="Text 14"/>
+          <p:cNvSpPr txBox="1"/>
+          <p:nvPr/>
+        </p:nvSpPr>
+        <p:spPr>
+          <a:xfrm>
+            <a:off x="5143500" y="2628900"/>
+            <a:ext cx="1905000" cy="292100"/>
+          </a:xfrm>
+          <a:prstGeom prst="rect">
+            <a:avLst/>
+          </a:prstGeom>
+          <a:noFill/>
+          <a:ln/>
+        </p:spPr>
+        <p:txBody>
+          <a:bodyPr wrap="square" lIns="0" tIns="0" rIns="0" bIns="0" rtlCol="0" anchor="t"/>
+          <a:lstStyle/>
+          <a:p>
+            <a:pPr indent="0" marL="0">
+              <a:buNone/>
+            </a:pPr>
+            <a:r>
+              <a:rPr lang="en-US" sz="950" dirty="0">
+                <a:solidFill>
+                  <a:srgbClr val="5B6378"/>
+                </a:solidFill>
+                <a:latin typeface="Segoe UI Semilight" pitchFamily="34" charset="0"/>
+                <a:ea typeface="Segoe UI Semilight" pitchFamily="34" charset="-122"/>
+                <a:cs typeface="Segoe UI Semilight" pitchFamily="34" charset="-120"/>
+              </a:rPr>
+              <a:t>Automatum</a:t>
+            </a:r>
+            <a:endParaRPr lang="en-US" sz="950" dirty="0"/>
+          </a:p>
+        </p:txBody>
+      </p:sp>
+      <p:sp>
+        <p:nvSpPr>
+          <p:cNvPr id="19" name="Text 15"/>
+          <p:cNvSpPr txBox="1"/>
+          <p:nvPr/>
+        </p:nvSpPr>
+        <p:spPr>
+          <a:xfrm>
+            <a:off x="7366000" y="2628900"/>
+            <a:ext cx="2895600" cy="292100"/>
+          </a:xfrm>
+          <a:prstGeom prst="rect">
+            <a:avLst/>
+          </a:prstGeom>
+          <a:noFill/>
+          <a:ln/>
+        </p:spPr>
+        <p:txBody>
+          <a:bodyPr wrap="square" lIns="0" tIns="0" rIns="0" bIns="0" rtlCol="0" anchor="t"/>
+          <a:lstStyle/>
+          <a:p>
+            <a:pPr indent="0" marL="0">
+              <a:buNone/>
+            </a:pPr>
+            <a:r>
+              <a:rPr lang="en-US" sz="950" dirty="0">
+                <a:solidFill>
+                  <a:srgbClr val="5B6378"/>
+                </a:solidFill>
+                <a:latin typeface="Segoe UI Semilight" pitchFamily="34" charset="0"/>
+                <a:ea typeface="Segoe UI Semilight" pitchFamily="34" charset="-122"/>
+                <a:cs typeface="Segoe UI Semilight" pitchFamily="34" charset="-120"/>
+              </a:rPr>
+              <a:t>Stated by Automatum (Aein, email) — evidence to attach</a:t>
+            </a:r>
+            <a:endParaRPr lang="en-US" sz="950" dirty="0"/>
+          </a:p>
+        </p:txBody>
+      </p:sp>
+      <p:sp>
+        <p:nvSpPr>
+          <p:cNvPr id="20" name="Text 16"/>
+          <p:cNvSpPr txBox="1"/>
+          <p:nvPr/>
+        </p:nvSpPr>
+        <p:spPr>
+          <a:xfrm>
+            <a:off x="749300" y="2921000"/>
+            <a:ext cx="4191000" cy="292100"/>
+          </a:xfrm>
+          <a:prstGeom prst="rect">
+            <a:avLst/>
+          </a:prstGeom>
+          <a:noFill/>
+          <a:ln/>
+        </p:spPr>
+        <p:txBody>
+          <a:bodyPr wrap="square" lIns="0" tIns="0" rIns="0" bIns="0" rtlCol="0" anchor="t"/>
+          <a:lstStyle/>
+          <a:p>
+            <a:pPr indent="0" marL="0">
+              <a:buNone/>
+            </a:pPr>
+            <a:r>
+              <a:rPr lang="en-US" sz="950" b="1" dirty="0">
+                <a:solidFill>
+                  <a:srgbClr val="15224B"/>
+                </a:solidFill>
+                <a:latin typeface="Segoe UI" pitchFamily="34" charset="0"/>
+                <a:ea typeface="Segoe UI" pitchFamily="34" charset="-122"/>
+                <a:cs typeface="Segoe UI" pitchFamily="34" charset="-120"/>
+              </a:rPr>
+              <a:t>Automatum is lead partner of record on all four Solution IDs</a:t>
+            </a:r>
+            <a:endParaRPr lang="en-US" sz="950" dirty="0"/>
+          </a:p>
+        </p:txBody>
+      </p:sp>
+      <p:sp>
+        <p:nvSpPr>
+          <p:cNvPr id="21" name="Text 17"/>
+          <p:cNvSpPr txBox="1"/>
+          <p:nvPr/>
+        </p:nvSpPr>
+        <p:spPr>
+          <a:xfrm>
+            <a:off x="5143500" y="2921000"/>
+            <a:ext cx="1905000" cy="292100"/>
+          </a:xfrm>
+          <a:prstGeom prst="rect">
+            <a:avLst/>
+          </a:prstGeom>
+          <a:noFill/>
+          <a:ln/>
+        </p:spPr>
+        <p:txBody>
+          <a:bodyPr wrap="square" lIns="0" tIns="0" rIns="0" bIns="0" rtlCol="0" anchor="t"/>
+          <a:lstStyle/>
+          <a:p>
+            <a:pPr indent="0" marL="0">
+              <a:buNone/>
+            </a:pPr>
+            <a:r>
+              <a:rPr lang="en-US" sz="950" dirty="0">
+                <a:solidFill>
+                  <a:srgbClr val="5B6378"/>
+                </a:solidFill>
+                <a:latin typeface="Segoe UI Semilight" pitchFamily="34" charset="0"/>
+                <a:ea typeface="Segoe UI Semilight" pitchFamily="34" charset="-122"/>
+                <a:cs typeface="Segoe UI Semilight" pitchFamily="34" charset="-120"/>
+              </a:rPr>
+              <a:t>Automatum</a:t>
+            </a:r>
+            <a:endParaRPr lang="en-US" sz="950" dirty="0"/>
+          </a:p>
+        </p:txBody>
+      </p:sp>
+      <p:sp>
+        <p:nvSpPr>
+          <p:cNvPr id="22" name="Text 18"/>
+          <p:cNvSpPr txBox="1"/>
+          <p:nvPr/>
+        </p:nvSpPr>
+        <p:spPr>
+          <a:xfrm>
+            <a:off x="7366000" y="2921000"/>
+            <a:ext cx="2895600" cy="292100"/>
+          </a:xfrm>
+          <a:prstGeom prst="rect">
+            <a:avLst/>
+          </a:prstGeom>
+          <a:noFill/>
+          <a:ln/>
+        </p:spPr>
+        <p:txBody>
+          <a:bodyPr wrap="square" lIns="0" tIns="0" rIns="0" bIns="0" rtlCol="0" anchor="t"/>
+          <a:lstStyle/>
+          <a:p>
+            <a:pPr indent="0" marL="0">
+              <a:buNone/>
+            </a:pPr>
+            <a:r>
+              <a:rPr lang="en-US" sz="950" dirty="0">
+                <a:solidFill>
+                  <a:srgbClr val="5B6378"/>
+                </a:solidFill>
+                <a:latin typeface="Segoe UI Semilight" pitchFamily="34" charset="0"/>
+                <a:ea typeface="Segoe UI Semilight" pitchFamily="34" charset="-122"/>
+                <a:cs typeface="Segoe UI Semilight" pitchFamily="34" charset="-120"/>
+              </a:rPr>
+              <a:t>To confirm</a:t>
+            </a:r>
+            <a:endParaRPr lang="en-US" sz="950" dirty="0"/>
+          </a:p>
+        </p:txBody>
+      </p:sp>
+      <p:sp>
+        <p:nvSpPr>
+          <p:cNvPr id="23" name="Text 19"/>
+          <p:cNvSpPr txBox="1"/>
+          <p:nvPr/>
+        </p:nvSpPr>
+        <p:spPr>
+          <a:xfrm>
+            <a:off x="749300" y="3213100"/>
+            <a:ext cx="4191000" cy="292100"/>
+          </a:xfrm>
+          <a:prstGeom prst="rect">
+            <a:avLst/>
+          </a:prstGeom>
+          <a:noFill/>
+          <a:ln/>
+        </p:spPr>
+        <p:txBody>
+          <a:bodyPr wrap="square" lIns="0" tIns="0" rIns="0" bIns="0" rtlCol="0" anchor="t"/>
+          <a:lstStyle/>
+          <a:p>
+            <a:pPr indent="0" marL="0">
+              <a:buNone/>
+            </a:pPr>
+            <a:r>
+              <a:rPr lang="en-US" sz="950" b="1" dirty="0">
+                <a:solidFill>
+                  <a:srgbClr val="15224B"/>
+                </a:solidFill>
+                <a:latin typeface="Segoe UI" pitchFamily="34" charset="0"/>
+                <a:ea typeface="Segoe UI" pitchFamily="34" charset="-122"/>
+                <a:cs typeface="Segoe UI" pitchFamily="34" charset="-120"/>
+              </a:rPr>
+              <a:t>Solution listed within 12 months</a:t>
+            </a:r>
+            <a:endParaRPr lang="en-US" sz="950" dirty="0"/>
+          </a:p>
+        </p:txBody>
+      </p:sp>
+      <p:sp>
+        <p:nvSpPr>
+          <p:cNvPr id="24" name="Text 20"/>
+          <p:cNvSpPr txBox="1"/>
+          <p:nvPr/>
+        </p:nvSpPr>
+        <p:spPr>
+          <a:xfrm>
+            <a:off x="5143500" y="3213100"/>
+            <a:ext cx="1905000" cy="292100"/>
+          </a:xfrm>
+          <a:prstGeom prst="rect">
+            <a:avLst/>
+          </a:prstGeom>
+          <a:noFill/>
+          <a:ln/>
+        </p:spPr>
+        <p:txBody>
+          <a:bodyPr wrap="square" lIns="0" tIns="0" rIns="0" bIns="0" rtlCol="0" anchor="t"/>
+          <a:lstStyle/>
+          <a:p>
+            <a:pPr indent="0" marL="0">
+              <a:buNone/>
+            </a:pPr>
+            <a:r>
+              <a:rPr lang="en-US" sz="950" dirty="0">
+                <a:solidFill>
+                  <a:srgbClr val="5B6378"/>
+                </a:solidFill>
+                <a:latin typeface="Segoe UI Semilight" pitchFamily="34" charset="0"/>
+                <a:ea typeface="Segoe UI Semilight" pitchFamily="34" charset="-122"/>
+                <a:cs typeface="Segoe UI Semilight" pitchFamily="34" charset="-120"/>
+              </a:rPr>
+              <a:t>Automatum + OBP</a:t>
+            </a:r>
+            <a:endParaRPr lang="en-US" sz="950" dirty="0"/>
+          </a:p>
+        </p:txBody>
+      </p:sp>
+      <p:sp>
+        <p:nvSpPr>
+          <p:cNvPr id="25" name="Text 21"/>
+          <p:cNvSpPr txBox="1"/>
+          <p:nvPr/>
+        </p:nvSpPr>
+        <p:spPr>
+          <a:xfrm>
+            <a:off x="7366000" y="3213100"/>
+            <a:ext cx="2895600" cy="292100"/>
+          </a:xfrm>
+          <a:prstGeom prst="rect">
+            <a:avLst/>
+          </a:prstGeom>
+          <a:noFill/>
+          <a:ln/>
+        </p:spPr>
+        <p:txBody>
+          <a:bodyPr wrap="square" lIns="0" tIns="0" rIns="0" bIns="0" rtlCol="0" anchor="t"/>
+          <a:lstStyle/>
+          <a:p>
+            <a:pPr indent="0" marL="0">
+              <a:buNone/>
+            </a:pPr>
+            <a:r>
+              <a:rPr lang="en-US" sz="950" dirty="0">
+                <a:solidFill>
+                  <a:srgbClr val="5B6378"/>
+                </a:solidFill>
+                <a:latin typeface="Segoe UI Semilight" pitchFamily="34" charset="0"/>
+                <a:ea typeface="Segoe UI Semilight" pitchFamily="34" charset="-122"/>
+                <a:cs typeface="Segoe UI Semilight" pitchFamily="34" charset="-120"/>
+              </a:rPr>
+              <a:t>[Per-wave deadlines once the clock basis is confirmed]</a:t>
+            </a:r>
+            <a:endParaRPr lang="en-US" sz="950" dirty="0"/>
+          </a:p>
+        </p:txBody>
+      </p:sp>
+      <p:sp>
+        <p:nvSpPr>
+          <p:cNvPr id="26" name="Text 22"/>
+          <p:cNvSpPr txBox="1"/>
+          <p:nvPr/>
+        </p:nvSpPr>
+        <p:spPr>
+          <a:xfrm>
+            <a:off x="749300" y="3505200"/>
+            <a:ext cx="4191000" cy="292100"/>
+          </a:xfrm>
+          <a:prstGeom prst="rect">
+            <a:avLst/>
+          </a:prstGeom>
+          <a:noFill/>
+          <a:ln/>
+        </p:spPr>
+        <p:txBody>
+          <a:bodyPr wrap="square" lIns="0" tIns="0" rIns="0" bIns="0" rtlCol="0" anchor="t"/>
+          <a:lstStyle/>
+          <a:p>
+            <a:pPr indent="0" marL="0">
+              <a:buNone/>
+            </a:pPr>
+            <a:r>
+              <a:rPr lang="en-US" sz="950" b="1" dirty="0">
+                <a:solidFill>
+                  <a:srgbClr val="15224B"/>
+                </a:solidFill>
+                <a:latin typeface="Segoe UI" pitchFamily="34" charset="0"/>
+                <a:ea typeface="Segoe UI" pitchFamily="34" charset="-122"/>
+                <a:cs typeface="Segoe UI" pitchFamily="34" charset="-120"/>
+              </a:rPr>
+              <a:t>Five ACE opportunity submissions per solution</a:t>
+            </a:r>
+            <a:endParaRPr lang="en-US" sz="950" dirty="0"/>
+          </a:p>
+        </p:txBody>
+      </p:sp>
+      <p:sp>
+        <p:nvSpPr>
+          <p:cNvPr id="27" name="Text 23"/>
+          <p:cNvSpPr txBox="1"/>
+          <p:nvPr/>
+        </p:nvSpPr>
+        <p:spPr>
+          <a:xfrm>
+            <a:off x="5143500" y="3505200"/>
+            <a:ext cx="1905000" cy="292100"/>
+          </a:xfrm>
+          <a:prstGeom prst="rect">
+            <a:avLst/>
+          </a:prstGeom>
+          <a:noFill/>
+          <a:ln/>
+        </p:spPr>
+        <p:txBody>
+          <a:bodyPr wrap="square" lIns="0" tIns="0" rIns="0" bIns="0" rtlCol="0" anchor="t"/>
+          <a:lstStyle/>
+          <a:p>
+            <a:pPr indent="0" marL="0">
+              <a:buNone/>
+            </a:pPr>
+            <a:r>
+              <a:rPr lang="en-US" sz="950" dirty="0">
+                <a:solidFill>
+                  <a:srgbClr val="5B6378"/>
+                </a:solidFill>
+                <a:latin typeface="Segoe UI Semilight" pitchFamily="34" charset="0"/>
+                <a:ea typeface="Segoe UI Semilight" pitchFamily="34" charset="-122"/>
+                <a:cs typeface="Segoe UI Semilight" pitchFamily="34" charset="-120"/>
+              </a:rPr>
+              <a:t>OBP</a:t>
+            </a:r>
+            <a:endParaRPr lang="en-US" sz="950" dirty="0"/>
+          </a:p>
+        </p:txBody>
+      </p:sp>
+      <p:sp>
+        <p:nvSpPr>
+          <p:cNvPr id="28" name="Text 24"/>
+          <p:cNvSpPr txBox="1"/>
+          <p:nvPr/>
+        </p:nvSpPr>
+        <p:spPr>
+          <a:xfrm>
+            <a:off x="7366000" y="3505200"/>
+            <a:ext cx="2895600" cy="292100"/>
+          </a:xfrm>
+          <a:prstGeom prst="rect">
+            <a:avLst/>
+          </a:prstGeom>
+          <a:noFill/>
+          <a:ln/>
+        </p:spPr>
+        <p:txBody>
+          <a:bodyPr wrap="square" lIns="0" tIns="0" rIns="0" bIns="0" rtlCol="0" anchor="t"/>
+          <a:lstStyle/>
+          <a:p>
+            <a:pPr indent="0" marL="0">
+              <a:buNone/>
+            </a:pPr>
+            <a:r>
+              <a:rPr lang="en-US" sz="950" dirty="0">
+                <a:solidFill>
+                  <a:srgbClr val="5B6378"/>
+                </a:solidFill>
+                <a:latin typeface="Segoe UI Semilight" pitchFamily="34" charset="0"/>
+                <a:ea typeface="Segoe UI Semilight" pitchFamily="34" charset="-122"/>
+                <a:cs typeface="Segoe UI Semilight" pitchFamily="34" charset="-120"/>
+              </a:rPr>
+              <a:t>Built into each solution’s plan</a:t>
+            </a:r>
+            <a:endParaRPr lang="en-US" sz="950" dirty="0"/>
+          </a:p>
+        </p:txBody>
+      </p:sp>
+      <p:sp>
+        <p:nvSpPr>
+          <p:cNvPr id="29" name="Text 25"/>
+          <p:cNvSpPr txBox="1"/>
+          <p:nvPr/>
+        </p:nvSpPr>
+        <p:spPr>
+          <a:xfrm>
+            <a:off x="749300" y="3797300"/>
+            <a:ext cx="4191000" cy="292100"/>
+          </a:xfrm>
+          <a:prstGeom prst="rect">
+            <a:avLst/>
+          </a:prstGeom>
+          <a:noFill/>
+          <a:ln/>
+        </p:spPr>
+        <p:txBody>
+          <a:bodyPr wrap="square" lIns="0" tIns="0" rIns="0" bIns="0" rtlCol="0" anchor="t"/>
+          <a:lstStyle/>
+          <a:p>
+            <a:pPr indent="0" marL="0">
+              <a:buNone/>
+            </a:pPr>
+            <a:r>
+              <a:rPr lang="en-US" sz="950" b="1" dirty="0">
+                <a:solidFill>
+                  <a:srgbClr val="15224B"/>
+                </a:solidFill>
+                <a:latin typeface="Segoe UI" pitchFamily="34" charset="0"/>
+                <a:ea typeface="Segoe UI" pitchFamily="34" charset="-122"/>
+                <a:cs typeface="Segoe UI" pitchFamily="34" charset="-120"/>
+              </a:rPr>
+              <a:t>Milestone 1 Feasibility Study per solution</a:t>
+            </a:r>
+            <a:endParaRPr lang="en-US" sz="950" dirty="0"/>
+          </a:p>
+        </p:txBody>
+      </p:sp>
+      <p:sp>
+        <p:nvSpPr>
+          <p:cNvPr id="30" name="Text 26"/>
+          <p:cNvSpPr txBox="1"/>
+          <p:nvPr/>
+        </p:nvSpPr>
+        <p:spPr>
+          <a:xfrm>
+            <a:off x="5143500" y="3797300"/>
+            <a:ext cx="1905000" cy="292100"/>
+          </a:xfrm>
+          <a:prstGeom prst="rect">
+            <a:avLst/>
+          </a:prstGeom>
+          <a:noFill/>
+          <a:ln/>
+        </p:spPr>
+        <p:txBody>
+          <a:bodyPr wrap="square" lIns="0" tIns="0" rIns="0" bIns="0" rtlCol="0" anchor="t"/>
+          <a:lstStyle/>
+          <a:p>
+            <a:pPr indent="0" marL="0">
+              <a:buNone/>
+            </a:pPr>
+            <a:r>
+              <a:rPr lang="en-US" sz="950" dirty="0">
+                <a:solidFill>
+                  <a:srgbClr val="5B6378"/>
+                </a:solidFill>
+                <a:latin typeface="Segoe UI Semilight" pitchFamily="34" charset="0"/>
+                <a:ea typeface="Segoe UI Semilight" pitchFamily="34" charset="-122"/>
+                <a:cs typeface="Segoe UI Semilight" pitchFamily="34" charset="-120"/>
+              </a:rPr>
+              <a:t>OBP</a:t>
+            </a:r>
+            <a:endParaRPr lang="en-US" sz="950" dirty="0"/>
+          </a:p>
+        </p:txBody>
+      </p:sp>
+      <p:sp>
+        <p:nvSpPr>
+          <p:cNvPr id="31" name="Text 27"/>
+          <p:cNvSpPr txBox="1"/>
+          <p:nvPr/>
+        </p:nvSpPr>
+        <p:spPr>
+          <a:xfrm>
+            <a:off x="7366000" y="3797300"/>
+            <a:ext cx="2895600" cy="292100"/>
+          </a:xfrm>
+          <a:prstGeom prst="rect">
+            <a:avLst/>
+          </a:prstGeom>
+          <a:noFill/>
+          <a:ln/>
+        </p:spPr>
+        <p:txBody>
+          <a:bodyPr wrap="square" lIns="0" tIns="0" rIns="0" bIns="0" rtlCol="0" anchor="t"/>
+          <a:lstStyle/>
+          <a:p>
+            <a:pPr indent="0" marL="0">
+              <a:buNone/>
+            </a:pPr>
+            <a:r>
+              <a:rPr lang="en-US" sz="950" dirty="0">
+                <a:solidFill>
+                  <a:srgbClr val="5B6378"/>
+                </a:solidFill>
+                <a:latin typeface="Segoe UI Semilight" pitchFamily="34" charset="0"/>
+                <a:ea typeface="Segoe UI Semilight" pitchFamily="34" charset="-122"/>
+                <a:cs typeface="Segoe UI Semilight" pitchFamily="34" charset="-120"/>
+              </a:rPr>
+              <a:t>Drafted from the overviews</a:t>
+            </a:r>
+            <a:endParaRPr lang="en-US" sz="950" dirty="0"/>
+          </a:p>
+        </p:txBody>
+      </p:sp>
+      <p:sp>
+        <p:nvSpPr>
+          <p:cNvPr id="32" name="Text 28"/>
+          <p:cNvSpPr txBox="1"/>
+          <p:nvPr/>
+        </p:nvSpPr>
+        <p:spPr>
+          <a:xfrm>
+            <a:off x="749300" y="4089400"/>
+            <a:ext cx="4191000" cy="292100"/>
+          </a:xfrm>
+          <a:prstGeom prst="rect">
+            <a:avLst/>
+          </a:prstGeom>
+          <a:noFill/>
+          <a:ln/>
+        </p:spPr>
+        <p:txBody>
+          <a:bodyPr wrap="square" lIns="0" tIns="0" rIns="0" bIns="0" rtlCol="0" anchor="t"/>
+          <a:lstStyle/>
+          <a:p>
+            <a:pPr indent="0" marL="0">
+              <a:buNone/>
+            </a:pPr>
+            <a:r>
+              <a:rPr lang="en-US" sz="950" b="1" dirty="0">
+                <a:solidFill>
+                  <a:srgbClr val="15224B"/>
+                </a:solidFill>
+                <a:latin typeface="Segoe UI" pitchFamily="34" charset="0"/>
+                <a:ea typeface="Segoe UI" pitchFamily="34" charset="-122"/>
+                <a:cs typeface="Segoe UI" pitchFamily="34" charset="-120"/>
+              </a:rPr>
+              <a:t>Commit / target set per retainer rung</a:t>
+            </a:r>
+            <a:endParaRPr lang="en-US" sz="950" dirty="0"/>
+          </a:p>
+        </p:txBody>
+      </p:sp>
+      <p:sp>
+        <p:nvSpPr>
+          <p:cNvPr id="33" name="Text 29"/>
+          <p:cNvSpPr txBox="1"/>
+          <p:nvPr/>
+        </p:nvSpPr>
+        <p:spPr>
+          <a:xfrm>
+            <a:off x="5143500" y="4089400"/>
+            <a:ext cx="1905000" cy="292100"/>
+          </a:xfrm>
+          <a:prstGeom prst="rect">
+            <a:avLst/>
+          </a:prstGeom>
+          <a:noFill/>
+          <a:ln/>
+        </p:spPr>
+        <p:txBody>
+          <a:bodyPr wrap="square" lIns="0" tIns="0" rIns="0" bIns="0" rtlCol="0" anchor="t"/>
+          <a:lstStyle/>
+          <a:p>
+            <a:pPr indent="0" marL="0">
+              <a:buNone/>
+            </a:pPr>
+            <a:r>
+              <a:rPr lang="en-US" sz="950" dirty="0">
+                <a:solidFill>
+                  <a:srgbClr val="5B6378"/>
+                </a:solidFill>
+                <a:latin typeface="Segoe UI Semilight" pitchFamily="34" charset="0"/>
+                <a:ea typeface="Segoe UI Semilight" pitchFamily="34" charset="-122"/>
+                <a:cs typeface="Segoe UI Semilight" pitchFamily="34" charset="-120"/>
+              </a:rPr>
+              <a:t>OBP</a:t>
+            </a:r>
+            <a:endParaRPr lang="en-US" sz="950" dirty="0"/>
+          </a:p>
+        </p:txBody>
+      </p:sp>
+      <p:sp>
+        <p:nvSpPr>
+          <p:cNvPr id="34" name="Text 30"/>
+          <p:cNvSpPr txBox="1"/>
+          <p:nvPr/>
+        </p:nvSpPr>
+        <p:spPr>
+          <a:xfrm>
+            <a:off x="7366000" y="4089400"/>
+            <a:ext cx="2895600" cy="292100"/>
+          </a:xfrm>
+          <a:prstGeom prst="rect">
+            <a:avLst/>
+          </a:prstGeom>
+          <a:noFill/>
+          <a:ln/>
+        </p:spPr>
+        <p:txBody>
+          <a:bodyPr wrap="square" lIns="0" tIns="0" rIns="0" bIns="0" rtlCol="0" anchor="t"/>
+          <a:lstStyle/>
+          <a:p>
+            <a:pPr indent="0" marL="0">
+              <a:buNone/>
+            </a:pPr>
+            <a:r>
+              <a:rPr lang="en-US" sz="950" dirty="0">
+                <a:solidFill>
+                  <a:srgbClr val="5B6378"/>
+                </a:solidFill>
+                <a:latin typeface="Segoe UI Semilight" pitchFamily="34" charset="0"/>
+                <a:ea typeface="Segoe UI Semilight" pitchFamily="34" charset="-122"/>
+                <a:cs typeface="Segoe UI Semilight" pitchFamily="34" charset="-120"/>
+              </a:rPr>
+              <a:t>In draft — placeholders to close by [date]</a:t>
+            </a:r>
+            <a:endParaRPr lang="en-US" sz="950" dirty="0"/>
+          </a:p>
+        </p:txBody>
+      </p:sp>
+      <p:sp>
+        <p:nvSpPr>
+          <p:cNvPr id="35" name="Text 31"/>
+          <p:cNvSpPr txBox="1"/>
+          <p:nvPr/>
+        </p:nvSpPr>
+        <p:spPr>
+          <a:xfrm>
+            <a:off x="749300" y="4381500"/>
+            <a:ext cx="4191000" cy="292100"/>
+          </a:xfrm>
+          <a:prstGeom prst="rect">
+            <a:avLst/>
+          </a:prstGeom>
+          <a:noFill/>
+          <a:ln/>
+        </p:spPr>
+        <p:txBody>
+          <a:bodyPr wrap="square" lIns="0" tIns="0" rIns="0" bIns="0" rtlCol="0" anchor="t"/>
+          <a:lstStyle/>
+          <a:p>
+            <a:pPr indent="0" marL="0">
+              <a:buNone/>
+            </a:pPr>
+            <a:r>
+              <a:rPr lang="en-US" sz="950" b="1" dirty="0">
+                <a:solidFill>
+                  <a:srgbClr val="15224B"/>
+                </a:solidFill>
+                <a:latin typeface="Segoe UI" pitchFamily="34" charset="0"/>
+                <a:ea typeface="Segoe UI" pitchFamily="34" charset="-122"/>
+                <a:cs typeface="Segoe UI" pitchFamily="34" charset="-120"/>
+              </a:rPr>
+              <a:t>Included band and overflow rate per rung</a:t>
+            </a:r>
+            <a:endParaRPr lang="en-US" sz="950" dirty="0"/>
+          </a:p>
+        </p:txBody>
+      </p:sp>
+      <p:sp>
+        <p:nvSpPr>
+          <p:cNvPr id="36" name="Text 32"/>
+          <p:cNvSpPr txBox="1"/>
+          <p:nvPr/>
+        </p:nvSpPr>
+        <p:spPr>
+          <a:xfrm>
+            <a:off x="5143500" y="4381500"/>
+            <a:ext cx="1905000" cy="292100"/>
+          </a:xfrm>
+          <a:prstGeom prst="rect">
+            <a:avLst/>
+          </a:prstGeom>
+          <a:noFill/>
+          <a:ln/>
+        </p:spPr>
+        <p:txBody>
+          <a:bodyPr wrap="square" lIns="0" tIns="0" rIns="0" bIns="0" rtlCol="0" anchor="t"/>
+          <a:lstStyle/>
+          <a:p>
+            <a:pPr indent="0" marL="0">
+              <a:buNone/>
+            </a:pPr>
+            <a:r>
+              <a:rPr lang="en-US" sz="950" dirty="0">
+                <a:solidFill>
+                  <a:srgbClr val="5B6378"/>
+                </a:solidFill>
+                <a:latin typeface="Segoe UI Semilight" pitchFamily="34" charset="0"/>
+                <a:ea typeface="Segoe UI Semilight" pitchFamily="34" charset="-122"/>
+                <a:cs typeface="Segoe UI Semilight" pitchFamily="34" charset="-120"/>
+              </a:rPr>
+              <a:t>OBP commercial</a:t>
+            </a:r>
+            <a:endParaRPr lang="en-US" sz="950" dirty="0"/>
+          </a:p>
+        </p:txBody>
+      </p:sp>
+      <p:sp>
+        <p:nvSpPr>
+          <p:cNvPr id="37" name="Text 33"/>
+          <p:cNvSpPr txBox="1"/>
+          <p:nvPr/>
+        </p:nvSpPr>
+        <p:spPr>
+          <a:xfrm>
+            <a:off x="7366000" y="4381500"/>
+            <a:ext cx="2895600" cy="292100"/>
+          </a:xfrm>
+          <a:prstGeom prst="rect">
+            <a:avLst/>
+          </a:prstGeom>
+          <a:noFill/>
+          <a:ln/>
+        </p:spPr>
+        <p:txBody>
+          <a:bodyPr wrap="square" lIns="0" tIns="0" rIns="0" bIns="0" rtlCol="0" anchor="t"/>
+          <a:lstStyle/>
+          <a:p>
+            <a:pPr indent="0" marL="0">
+              <a:buNone/>
+            </a:pPr>
+            <a:r>
+              <a:rPr lang="en-US" sz="950" dirty="0">
+                <a:solidFill>
+                  <a:srgbClr val="5B6378"/>
+                </a:solidFill>
+                <a:latin typeface="Segoe UI Semilight" pitchFamily="34" charset="0"/>
+                <a:ea typeface="Segoe UI Semilight" pitchFamily="34" charset="-122"/>
+                <a:cs typeface="Segoe UI Semilight" pitchFamily="34" charset="-120"/>
+              </a:rPr>
+              <a:t>To decide</a:t>
+            </a:r>
+            <a:endParaRPr lang="en-US" sz="950" dirty="0"/>
+          </a:p>
+        </p:txBody>
+      </p:sp>
+      <p:sp>
+        <p:nvSpPr>
           <p:cNvPr id="38" name="Text 34"/>
           <p:cNvSpPr txBox="1"/>
           <p:nvPr/>
         </p:nvSpPr>
         <p:spPr>
           <a:xfrm>
-            <a:off x="749300" y="4953000"/>
-            <a:ext cx="4191000" cy="317500"/>
-          </a:xfrm>
-          <a:prstGeom prst="rect">
-            <a:avLst/>
-          </a:prstGeom>
-          <a:noFill/>
-          <a:ln/>
-        </p:spPr>
-        <p:txBody>
-          <a:bodyPr wrap="square" lIns="0" tIns="0" rIns="0" bIns="0" rtlCol="0" anchor="t"/>
-          <a:lstStyle/>
-          <a:p>
-            <a:pPr indent="0" marL="0">
-              <a:buNone/>
-            </a:pPr>
-            <a:r>
-              <a:rPr lang="en-US" sz="1000" b="1" dirty="0">
+            <a:off x="749300" y="4673600"/>
+            <a:ext cx="4191000" cy="292100"/>
+          </a:xfrm>
+          <a:prstGeom prst="rect">
+            <a:avLst/>
+          </a:prstGeom>
+          <a:noFill/>
+          <a:ln/>
+        </p:spPr>
+        <p:txBody>
+          <a:bodyPr wrap="square" lIns="0" tIns="0" rIns="0" bIns="0" rtlCol="0" anchor="t"/>
+          <a:lstStyle/>
+          <a:p>
+            <a:pPr indent="0" marL="0">
+              <a:buNone/>
+            </a:pPr>
+            <a:r>
+              <a:rPr lang="en-US" sz="950" b="1" dirty="0">
                 <a:solidFill>
                   <a:srgbClr val="15224B"/>
                 </a:solidFill>
@@ -19673,7 +19695,7 @@
               </a:rPr>
               <a:t>Automatum back-to-back turnarounds</a:t>
             </a:r>
-            <a:endParaRPr lang="en-US" sz="1000" dirty="0"/>
+            <a:endParaRPr lang="en-US" sz="950" dirty="0"/>
           </a:p>
         </p:txBody>
       </p:sp>
@@ -19685,24 +19707,24 @@
         </p:nvSpPr>
         <p:spPr>
           <a:xfrm>
-            <a:off x="5143500" y="4953000"/>
-            <a:ext cx="1905000" cy="317500"/>
-          </a:xfrm>
-          <a:prstGeom prst="rect">
-            <a:avLst/>
-          </a:prstGeom>
-          <a:noFill/>
-          <a:ln/>
-        </p:spPr>
-        <p:txBody>
-          <a:bodyPr wrap="square" lIns="0" tIns="0" rIns="0" bIns="0" rtlCol="0" anchor="t"/>
-          <a:lstStyle/>
-          <a:p>
-            <a:pPr indent="0" marL="0">
-              <a:buNone/>
-            </a:pPr>
-            <a:r>
-              <a:rPr lang="en-US" sz="1000" dirty="0">
+            <a:off x="5143500" y="4673600"/>
+            <a:ext cx="1905000" cy="292100"/>
+          </a:xfrm>
+          <a:prstGeom prst="rect">
+            <a:avLst/>
+          </a:prstGeom>
+          <a:noFill/>
+          <a:ln/>
+        </p:spPr>
+        <p:txBody>
+          <a:bodyPr wrap="square" lIns="0" tIns="0" rIns="0" bIns="0" rtlCol="0" anchor="t"/>
+          <a:lstStyle/>
+          <a:p>
+            <a:pPr indent="0" marL="0">
+              <a:buNone/>
+            </a:pPr>
+            <a:r>
+              <a:rPr lang="en-US" sz="950" dirty="0">
                 <a:solidFill>
                   <a:srgbClr val="5B6378"/>
                 </a:solidFill>
@@ -19712,7 +19734,7 @@
               </a:rPr>
               <a:t>Automatum</a:t>
             </a:r>
-            <a:endParaRPr lang="en-US" sz="1000" dirty="0"/>
+            <a:endParaRPr lang="en-US" sz="950" dirty="0"/>
           </a:p>
         </p:txBody>
       </p:sp>
@@ -19724,24 +19746,24 @@
         </p:nvSpPr>
         <p:spPr>
           <a:xfrm>
-            <a:off x="7366000" y="4953000"/>
-            <a:ext cx="2895600" cy="317500"/>
-          </a:xfrm>
-          <a:prstGeom prst="rect">
-            <a:avLst/>
-          </a:prstGeom>
-          <a:noFill/>
-          <a:ln/>
-        </p:spPr>
-        <p:txBody>
-          <a:bodyPr wrap="square" lIns="0" tIns="0" rIns="0" bIns="0" rtlCol="0" anchor="t"/>
-          <a:lstStyle/>
-          <a:p>
-            <a:pPr indent="0" marL="0">
-              <a:buNone/>
-            </a:pPr>
-            <a:r>
-              <a:rPr lang="en-US" sz="1000" dirty="0">
+            <a:off x="7366000" y="4673600"/>
+            <a:ext cx="2895600" cy="292100"/>
+          </a:xfrm>
+          <a:prstGeom prst="rect">
+            <a:avLst/>
+          </a:prstGeom>
+          <a:noFill/>
+          <a:ln/>
+        </p:spPr>
+        <p:txBody>
+          <a:bodyPr wrap="square" lIns="0" tIns="0" rIns="0" bIns="0" rtlCol="0" anchor="t"/>
+          <a:lstStyle/>
+          <a:p>
+            <a:pPr indent="0" marL="0">
+              <a:buNone/>
+            </a:pPr>
+            <a:r>
+              <a:rPr lang="en-US" sz="950" dirty="0">
                 <a:solidFill>
                   <a:srgbClr val="5B6378"/>
                 </a:solidFill>
@@ -19751,7 +19773,7 @@
               </a:rPr>
               <a:t>To agree on the call</a:t>
             </a:r>
-            <a:endParaRPr lang="en-US" sz="1000" dirty="0"/>
+            <a:endParaRPr lang="en-US" sz="950" dirty="0"/>
           </a:p>
         </p:txBody>
       </p:sp>
@@ -19763,24 +19785,24 @@
         </p:nvSpPr>
         <p:spPr>
           <a:xfrm>
-            <a:off x="749300" y="5270500"/>
-            <a:ext cx="4191000" cy="317500"/>
-          </a:xfrm>
-          <a:prstGeom prst="rect">
-            <a:avLst/>
-          </a:prstGeom>
-          <a:noFill/>
-          <a:ln/>
-        </p:spPr>
-        <p:txBody>
-          <a:bodyPr wrap="square" lIns="0" tIns="0" rIns="0" bIns="0" rtlCol="0" anchor="t"/>
-          <a:lstStyle/>
-          <a:p>
-            <a:pPr indent="0" marL="0">
-              <a:buNone/>
-            </a:pPr>
-            <a:r>
-              <a:rPr lang="en-US" sz="1000" b="1" dirty="0">
+            <a:off x="749300" y="4965700"/>
+            <a:ext cx="4191000" cy="292100"/>
+          </a:xfrm>
+          <a:prstGeom prst="rect">
+            <a:avLst/>
+          </a:prstGeom>
+          <a:noFill/>
+          <a:ln/>
+        </p:spPr>
+        <p:txBody>
+          <a:bodyPr wrap="square" lIns="0" tIns="0" rIns="0" bIns="0" rtlCol="0" anchor="t"/>
+          <a:lstStyle/>
+          <a:p>
+            <a:pPr indent="0" marL="0">
+              <a:buNone/>
+            </a:pPr>
+            <a:r>
+              <a:rPr lang="en-US" sz="950" b="1" dirty="0">
                 <a:solidFill>
                   <a:srgbClr val="15224B"/>
                 </a:solidFill>
@@ -19790,7 +19812,7 @@
               </a:rPr>
               <a:t>Commercial terms between OBP and Automatum</a:t>
             </a:r>
-            <a:endParaRPr lang="en-US" sz="1000" dirty="0"/>
+            <a:endParaRPr lang="en-US" sz="950" dirty="0"/>
           </a:p>
         </p:txBody>
       </p:sp>
@@ -19802,24 +19824,24 @@
         </p:nvSpPr>
         <p:spPr>
           <a:xfrm>
-            <a:off x="5143500" y="5270500"/>
-            <a:ext cx="1905000" cy="317500"/>
-          </a:xfrm>
-          <a:prstGeom prst="rect">
-            <a:avLst/>
-          </a:prstGeom>
-          <a:noFill/>
-          <a:ln/>
-        </p:spPr>
-        <p:txBody>
-          <a:bodyPr wrap="square" lIns="0" tIns="0" rIns="0" bIns="0" rtlCol="0" anchor="t"/>
-          <a:lstStyle/>
-          <a:p>
-            <a:pPr indent="0" marL="0">
-              <a:buNone/>
-            </a:pPr>
-            <a:r>
-              <a:rPr lang="en-US" sz="1000" dirty="0">
+            <a:off x="5143500" y="4965700"/>
+            <a:ext cx="1905000" cy="292100"/>
+          </a:xfrm>
+          <a:prstGeom prst="rect">
+            <a:avLst/>
+          </a:prstGeom>
+          <a:noFill/>
+          <a:ln/>
+        </p:spPr>
+        <p:txBody>
+          <a:bodyPr wrap="square" lIns="0" tIns="0" rIns="0" bIns="0" rtlCol="0" anchor="t"/>
+          <a:lstStyle/>
+          <a:p>
+            <a:pPr indent="0" marL="0">
+              <a:buNone/>
+            </a:pPr>
+            <a:r>
+              <a:rPr lang="en-US" sz="950" dirty="0">
                 <a:solidFill>
                   <a:srgbClr val="5B6378"/>
                 </a:solidFill>
@@ -19829,7 +19851,7 @@
               </a:rPr>
               <a:t>OBP + Automatum</a:t>
             </a:r>
-            <a:endParaRPr lang="en-US" sz="1000" dirty="0"/>
+            <a:endParaRPr lang="en-US" sz="950" dirty="0"/>
           </a:p>
         </p:txBody>
       </p:sp>
@@ -19841,24 +19863,24 @@
         </p:nvSpPr>
         <p:spPr>
           <a:xfrm>
-            <a:off x="7366000" y="5270500"/>
-            <a:ext cx="2895600" cy="317500"/>
-          </a:xfrm>
-          <a:prstGeom prst="rect">
-            <a:avLst/>
-          </a:prstGeom>
-          <a:noFill/>
-          <a:ln/>
-        </p:spPr>
-        <p:txBody>
-          <a:bodyPr wrap="square" lIns="0" tIns="0" rIns="0" bIns="0" rtlCol="0" anchor="t"/>
-          <a:lstStyle/>
-          <a:p>
-            <a:pPr indent="0" marL="0">
-              <a:buNone/>
-            </a:pPr>
-            <a:r>
-              <a:rPr lang="en-US" sz="1000" dirty="0">
+            <a:off x="7366000" y="4965700"/>
+            <a:ext cx="2895600" cy="292100"/>
+          </a:xfrm>
+          <a:prstGeom prst="rect">
+            <a:avLst/>
+          </a:prstGeom>
+          <a:noFill/>
+          <a:ln/>
+        </p:spPr>
+        <p:txBody>
+          <a:bodyPr wrap="square" lIns="0" tIns="0" rIns="0" bIns="0" rtlCol="0" anchor="t"/>
+          <a:lstStyle/>
+          <a:p>
+            <a:pPr indent="0" marL="0">
+              <a:buNone/>
+            </a:pPr>
+            <a:r>
+              <a:rPr lang="en-US" sz="950" dirty="0">
                 <a:solidFill>
                   <a:srgbClr val="5B6378"/>
                 </a:solidFill>
@@ -19868,7 +19890,7 @@
               </a:rPr>
               <a:t>On the agenda for [call date]</a:t>
             </a:r>
-            <a:endParaRPr lang="en-US" sz="1000" dirty="0"/>
+            <a:endParaRPr lang="en-US" sz="950" dirty="0"/>
           </a:p>
         </p:txBody>
       </p:sp>
@@ -19880,7 +19902,7 @@
         </p:nvSpPr>
         <p:spPr>
           <a:xfrm>
-            <a:off x="749300" y="5384800"/>
+            <a:off x="749300" y="5334000"/>
             <a:ext cx="10795000" cy="355600"/>
           </a:xfrm>
           <a:prstGeom prst="rect">
@@ -20298,8 +20320,8 @@
         </p:blipFill>
         <p:spPr>
           <a:xfrm>
-            <a:off x="420370" y="2523490"/>
-            <a:ext cx="2933700" cy="2908300"/>
+            <a:off x="515620" y="2523490"/>
+            <a:ext cx="3644900" cy="2336800"/>
           </a:xfrm>
           <a:prstGeom prst="rect">
             <a:avLst/>
@@ -20314,8 +20336,8 @@
         </p:nvSpPr>
         <p:spPr>
           <a:xfrm>
-            <a:off x="1023620" y="2540000"/>
-            <a:ext cx="3411220" cy="584200"/>
+            <a:off x="1023620" y="2794000"/>
+            <a:ext cx="2730500" cy="584200"/>
           </a:xfrm>
           <a:prstGeom prst="rect">
             <a:avLst/>
@@ -20353,8 +20375,8 @@
         </p:nvSpPr>
         <p:spPr>
           <a:xfrm>
-            <a:off x="1023620" y="2921000"/>
-            <a:ext cx="3411220" cy="1524000"/>
+            <a:off x="1023620" y="3175000"/>
+            <a:ext cx="2730500" cy="1270000"/>
           </a:xfrm>
           <a:prstGeom prst="rect">
             <a:avLst/>
@@ -20400,8 +20422,8 @@
         </p:blipFill>
         <p:spPr>
           <a:xfrm>
-            <a:off x="4161790" y="2523490"/>
-            <a:ext cx="2933700" cy="2908300"/>
+            <a:off x="4257040" y="2523490"/>
+            <a:ext cx="3644900" cy="2336800"/>
           </a:xfrm>
           <a:prstGeom prst="rect">
             <a:avLst/>
@@ -20416,8 +20438,8 @@
         </p:nvSpPr>
         <p:spPr>
           <a:xfrm>
-            <a:off x="4765040" y="2540000"/>
-            <a:ext cx="3411220" cy="584200"/>
+            <a:off x="4765040" y="2794000"/>
+            <a:ext cx="2730500" cy="584200"/>
           </a:xfrm>
           <a:prstGeom prst="rect">
             <a:avLst/>
@@ -20455,8 +20477,8 @@
         </p:nvSpPr>
         <p:spPr>
           <a:xfrm>
-            <a:off x="4765040" y="2921000"/>
-            <a:ext cx="3411220" cy="1524000"/>
+            <a:off x="4765040" y="3175000"/>
+            <a:ext cx="2730500" cy="1270000"/>
           </a:xfrm>
           <a:prstGeom prst="rect">
             <a:avLst/>
@@ -20502,8 +20524,8 @@
         </p:blipFill>
         <p:spPr>
           <a:xfrm>
-            <a:off x="7903210" y="2523490"/>
-            <a:ext cx="2933700" cy="2908300"/>
+            <a:off x="7998460" y="2523490"/>
+            <a:ext cx="3644900" cy="2336800"/>
           </a:xfrm>
           <a:prstGeom prst="rect">
             <a:avLst/>
@@ -20518,8 +20540,8 @@
         </p:nvSpPr>
         <p:spPr>
           <a:xfrm>
-            <a:off x="8506460" y="2540000"/>
-            <a:ext cx="3411220" cy="584200"/>
+            <a:off x="8506460" y="2794000"/>
+            <a:ext cx="2730500" cy="584200"/>
           </a:xfrm>
           <a:prstGeom prst="rect">
             <a:avLst/>
@@ -20557,8 +20579,8 @@
         </p:nvSpPr>
         <p:spPr>
           <a:xfrm>
-            <a:off x="8506460" y="2921000"/>
-            <a:ext cx="3411220" cy="1524000"/>
+            <a:off x="8506460" y="3175000"/>
+            <a:ext cx="2730500" cy="1270000"/>
           </a:xfrm>
           <a:prstGeom prst="rect">
             <a:avLst/>
@@ -20596,7 +20618,7 @@
         </p:nvSpPr>
         <p:spPr>
           <a:xfrm>
-            <a:off x="657860" y="4800600"/>
+            <a:off x="657860" y="4978400"/>
             <a:ext cx="6350000" cy="177800"/>
           </a:xfrm>
           <a:prstGeom prst="rect">
@@ -20635,8 +20657,8 @@
         </p:nvSpPr>
         <p:spPr>
           <a:xfrm>
-            <a:off x="657860" y="5003800"/>
-            <a:ext cx="10871200" cy="406400"/>
+            <a:off x="657860" y="5181600"/>
+            <a:ext cx="10871200" cy="431800"/>
           </a:xfrm>
           <a:prstGeom prst="rect">
             <a:avLst/>
@@ -21123,7 +21145,7 @@
             <a:r>
               <a:rPr lang="en-US" sz="900" b="1" dirty="0">
                 <a:solidFill>
-                  <a:srgbClr val="121B47"/>
+                  <a:srgbClr val="C6D2EA"/>
                 </a:solidFill>
                 <a:latin typeface="Segoe UI" pitchFamily="34" charset="0"/>
                 <a:ea typeface="Segoe UI" pitchFamily="34" charset="-122"/>
@@ -21137,7 +21159,7 @@
             <a:r>
               <a:rPr lang="en-US" sz="900" dirty="0">
                 <a:solidFill>
-                  <a:srgbClr val="9AA2B5"/>
+                  <a:srgbClr val="6C7BA6"/>
                 </a:solidFill>
                 <a:latin typeface="Segoe UI" pitchFamily="34" charset="0"/>
                 <a:ea typeface="Segoe UI" pitchFamily="34" charset="-122"/>
@@ -21151,7 +21173,7 @@
             <a:r>
               <a:rPr lang="en-US" sz="900" b="1" dirty="0">
                 <a:solidFill>
-                  <a:srgbClr val="1C4E9D"/>
+                  <a:srgbClr val="9FD0FF"/>
                 </a:solidFill>
                 <a:latin typeface="Segoe UI" pitchFamily="34" charset="0"/>
                 <a:ea typeface="Segoe UI" pitchFamily="34" charset="-122"/>
@@ -21190,7 +21212,7 @@
             <a:r>
               <a:rPr lang="en-US" sz="900" dirty="0">
                 <a:solidFill>
-                  <a:srgbClr val="9AA2B5"/>
+                  <a:srgbClr val="8FA0C6"/>
                 </a:solidFill>
                 <a:latin typeface="Segoe UI" pitchFamily="34" charset="0"/>
                 <a:ea typeface="Segoe UI" pitchFamily="34" charset="-122"/>
@@ -21514,8 +21536,8 @@
         </p:blipFill>
         <p:spPr>
           <a:xfrm>
-            <a:off x="420370" y="2472690"/>
-            <a:ext cx="2933700" cy="2908300"/>
+            <a:off x="515620" y="2472690"/>
+            <a:ext cx="2819400" cy="2908300"/>
           </a:xfrm>
           <a:prstGeom prst="rect">
             <a:avLst/>
@@ -21555,7 +21577,7 @@
         <p:spPr>
           <a:xfrm>
             <a:off x="1023620" y="3149600"/>
-            <a:ext cx="2476500" cy="584200"/>
+            <a:ext cx="1905000" cy="584200"/>
           </a:xfrm>
           <a:prstGeom prst="rect">
             <a:avLst/>
@@ -21594,7 +21616,7 @@
         <p:spPr>
           <a:xfrm>
             <a:off x="1023620" y="3708400"/>
-            <a:ext cx="2476500" cy="1905000"/>
+            <a:ext cx="1905000" cy="1905000"/>
           </a:xfrm>
           <a:prstGeom prst="rect">
             <a:avLst/>
@@ -21640,8 +21662,8 @@
         </p:blipFill>
         <p:spPr>
           <a:xfrm>
-            <a:off x="3227070" y="2472690"/>
-            <a:ext cx="2933700" cy="2908300"/>
+            <a:off x="3322320" y="2472690"/>
+            <a:ext cx="2819400" cy="2908300"/>
           </a:xfrm>
           <a:prstGeom prst="rect">
             <a:avLst/>
@@ -21681,7 +21703,7 @@
         <p:spPr>
           <a:xfrm>
             <a:off x="3830320" y="3149600"/>
-            <a:ext cx="2476500" cy="584200"/>
+            <a:ext cx="1905000" cy="584200"/>
           </a:xfrm>
           <a:prstGeom prst="rect">
             <a:avLst/>
@@ -21720,7 +21742,7 @@
         <p:spPr>
           <a:xfrm>
             <a:off x="3830320" y="3708400"/>
-            <a:ext cx="2476500" cy="1905000"/>
+            <a:ext cx="1905000" cy="1905000"/>
           </a:xfrm>
           <a:prstGeom prst="rect">
             <a:avLst/>
@@ -21766,8 +21788,8 @@
         </p:blipFill>
         <p:spPr>
           <a:xfrm>
-            <a:off x="6033770" y="2472690"/>
-            <a:ext cx="2933700" cy="2908300"/>
+            <a:off x="6129020" y="2472690"/>
+            <a:ext cx="2819400" cy="2908300"/>
           </a:xfrm>
           <a:prstGeom prst="rect">
             <a:avLst/>
@@ -21807,7 +21829,7 @@
         <p:spPr>
           <a:xfrm>
             <a:off x="6637020" y="3149600"/>
-            <a:ext cx="2476500" cy="584200"/>
+            <a:ext cx="1905000" cy="584200"/>
           </a:xfrm>
           <a:prstGeom prst="rect">
             <a:avLst/>
@@ -21845,8 +21867,8 @@
         </p:nvSpPr>
         <p:spPr>
           <a:xfrm>
-            <a:off x="6637020" y="3530600"/>
-            <a:ext cx="2476500" cy="2082800"/>
+            <a:off x="6637020" y="3708400"/>
+            <a:ext cx="1905000" cy="1905000"/>
           </a:xfrm>
           <a:prstGeom prst="rect">
             <a:avLst/>
@@ -21892,8 +21914,8 @@
         </p:blipFill>
         <p:spPr>
           <a:xfrm>
-            <a:off x="8840470" y="2472690"/>
-            <a:ext cx="2933700" cy="2908300"/>
+            <a:off x="8935720" y="2472690"/>
+            <a:ext cx="2819400" cy="2908300"/>
           </a:xfrm>
           <a:prstGeom prst="rect">
             <a:avLst/>
@@ -21933,7 +21955,7 @@
         <p:spPr>
           <a:xfrm>
             <a:off x="9443720" y="3149600"/>
-            <a:ext cx="2476500" cy="584200"/>
+            <a:ext cx="1905000" cy="584200"/>
           </a:xfrm>
           <a:prstGeom prst="rect">
             <a:avLst/>
@@ -21971,8 +21993,8 @@
         </p:nvSpPr>
         <p:spPr>
           <a:xfrm>
-            <a:off x="9443720" y="3530600"/>
-            <a:ext cx="2476500" cy="2082800"/>
+            <a:off x="9443720" y="3708400"/>
+            <a:ext cx="1905000" cy="1905000"/>
           </a:xfrm>
           <a:prstGeom prst="rect">
             <a:avLst/>
@@ -22538,7 +22560,7 @@
         <p:spPr>
           <a:xfrm>
             <a:off x="657860" y="2667000"/>
-            <a:ext cx="1219200" cy="431800"/>
+            <a:ext cx="1219200" cy="381000"/>
           </a:xfrm>
           <a:prstGeom prst="rect">
             <a:avLst/>
@@ -22577,7 +22599,7 @@
         <p:spPr>
           <a:xfrm>
             <a:off x="2006600" y="2667000"/>
-            <a:ext cx="2235200" cy="431800"/>
+            <a:ext cx="2235200" cy="381000"/>
           </a:xfrm>
           <a:prstGeom prst="rect">
             <a:avLst/>
@@ -22616,7 +22638,7 @@
         <p:spPr>
           <a:xfrm>
             <a:off x="4419600" y="2667000"/>
-            <a:ext cx="2235200" cy="431800"/>
+            <a:ext cx="2235200" cy="381000"/>
           </a:xfrm>
           <a:prstGeom prst="rect">
             <a:avLst/>
@@ -22655,7 +22677,7 @@
         <p:spPr>
           <a:xfrm>
             <a:off x="6832600" y="2667000"/>
-            <a:ext cx="2235200" cy="431800"/>
+            <a:ext cx="2235200" cy="381000"/>
           </a:xfrm>
           <a:prstGeom prst="rect">
             <a:avLst/>
@@ -22694,7 +22716,7 @@
         <p:spPr>
           <a:xfrm>
             <a:off x="9245600" y="2667000"/>
-            <a:ext cx="2235200" cy="431800"/>
+            <a:ext cx="2235200" cy="381000"/>
           </a:xfrm>
           <a:prstGeom prst="rect">
             <a:avLst/>
@@ -22732,8 +22754,8 @@
         </p:nvSpPr>
         <p:spPr>
           <a:xfrm>
-            <a:off x="657860" y="3098800"/>
-            <a:ext cx="1219200" cy="711200"/>
+            <a:off x="657860" y="3048000"/>
+            <a:ext cx="1219200" cy="635000"/>
           </a:xfrm>
           <a:prstGeom prst="rect">
             <a:avLst/>
@@ -22771,8 +22793,8 @@
         </p:nvSpPr>
         <p:spPr>
           <a:xfrm>
-            <a:off x="2006600" y="3098800"/>
-            <a:ext cx="2235200" cy="711200"/>
+            <a:off x="2006600" y="3048000"/>
+            <a:ext cx="2235200" cy="635000"/>
           </a:xfrm>
           <a:prstGeom prst="rect">
             <a:avLst/>
@@ -22810,8 +22832,8 @@
         </p:nvSpPr>
         <p:spPr>
           <a:xfrm>
-            <a:off x="4419600" y="3098800"/>
-            <a:ext cx="2235200" cy="711200"/>
+            <a:off x="4419600" y="3048000"/>
+            <a:ext cx="2235200" cy="635000"/>
           </a:xfrm>
           <a:prstGeom prst="rect">
             <a:avLst/>
@@ -22849,8 +22871,8 @@
         </p:nvSpPr>
         <p:spPr>
           <a:xfrm>
-            <a:off x="6832600" y="3098800"/>
-            <a:ext cx="2235200" cy="711200"/>
+            <a:off x="6832600" y="3048000"/>
+            <a:ext cx="2235200" cy="635000"/>
           </a:xfrm>
           <a:prstGeom prst="rect">
             <a:avLst/>
@@ -22888,8 +22910,8 @@
         </p:nvSpPr>
         <p:spPr>
           <a:xfrm>
-            <a:off x="9245600" y="3098800"/>
-            <a:ext cx="2235200" cy="711200"/>
+            <a:off x="9245600" y="3048000"/>
+            <a:ext cx="2235200" cy="635000"/>
           </a:xfrm>
           <a:prstGeom prst="rect">
             <a:avLst/>
@@ -22927,8 +22949,8 @@
         </p:nvSpPr>
         <p:spPr>
           <a:xfrm>
-            <a:off x="657860" y="3810000"/>
-            <a:ext cx="1219200" cy="838200"/>
+            <a:off x="657860" y="3683000"/>
+            <a:ext cx="1219200" cy="762000"/>
           </a:xfrm>
           <a:prstGeom prst="rect">
             <a:avLst/>
@@ -22966,8 +22988,8 @@
         </p:nvSpPr>
         <p:spPr>
           <a:xfrm>
-            <a:off x="2006600" y="3810000"/>
-            <a:ext cx="2235200" cy="838200"/>
+            <a:off x="2006600" y="3683000"/>
+            <a:ext cx="2235200" cy="762000"/>
           </a:xfrm>
           <a:prstGeom prst="rect">
             <a:avLst/>
@@ -23005,8 +23027,8 @@
         </p:nvSpPr>
         <p:spPr>
           <a:xfrm>
-            <a:off x="4419600" y="3810000"/>
-            <a:ext cx="2235200" cy="838200"/>
+            <a:off x="4419600" y="3683000"/>
+            <a:ext cx="2235200" cy="762000"/>
           </a:xfrm>
           <a:prstGeom prst="rect">
             <a:avLst/>
@@ -23044,8 +23066,8 @@
         </p:nvSpPr>
         <p:spPr>
           <a:xfrm>
-            <a:off x="6832600" y="3810000"/>
-            <a:ext cx="2235200" cy="838200"/>
+            <a:off x="6832600" y="3683000"/>
+            <a:ext cx="2235200" cy="762000"/>
           </a:xfrm>
           <a:prstGeom prst="rect">
             <a:avLst/>
@@ -23083,8 +23105,8 @@
         </p:nvSpPr>
         <p:spPr>
           <a:xfrm>
-            <a:off x="9245600" y="3810000"/>
-            <a:ext cx="2235200" cy="838200"/>
+            <a:off x="9245600" y="3683000"/>
+            <a:ext cx="2235200" cy="762000"/>
           </a:xfrm>
           <a:prstGeom prst="rect">
             <a:avLst/>
@@ -23122,8 +23144,8 @@
         </p:nvSpPr>
         <p:spPr>
           <a:xfrm>
-            <a:off x="657860" y="4648200"/>
-            <a:ext cx="1219200" cy="558800"/>
+            <a:off x="657860" y="4445000"/>
+            <a:ext cx="1219200" cy="508000"/>
           </a:xfrm>
           <a:prstGeom prst="rect">
             <a:avLst/>
@@ -23161,8 +23183,8 @@
         </p:nvSpPr>
         <p:spPr>
           <a:xfrm>
-            <a:off x="2006600" y="4648200"/>
-            <a:ext cx="2235200" cy="558800"/>
+            <a:off x="2006600" y="4445000"/>
+            <a:ext cx="2235200" cy="508000"/>
           </a:xfrm>
           <a:prstGeom prst="rect">
             <a:avLst/>
@@ -23200,8 +23222,8 @@
         </p:nvSpPr>
         <p:spPr>
           <a:xfrm>
-            <a:off x="4419600" y="4648200"/>
-            <a:ext cx="2235200" cy="558800"/>
+            <a:off x="4419600" y="4445000"/>
+            <a:ext cx="2235200" cy="508000"/>
           </a:xfrm>
           <a:prstGeom prst="rect">
             <a:avLst/>
@@ -23239,8 +23261,8 @@
         </p:nvSpPr>
         <p:spPr>
           <a:xfrm>
-            <a:off x="6832600" y="4648200"/>
-            <a:ext cx="2235200" cy="558800"/>
+            <a:off x="6832600" y="4445000"/>
+            <a:ext cx="2235200" cy="508000"/>
           </a:xfrm>
           <a:prstGeom prst="rect">
             <a:avLst/>
@@ -23278,8 +23300,8 @@
         </p:nvSpPr>
         <p:spPr>
           <a:xfrm>
-            <a:off x="9245600" y="4648200"/>
-            <a:ext cx="2235200" cy="558800"/>
+            <a:off x="9245600" y="4445000"/>
+            <a:ext cx="2235200" cy="508000"/>
           </a:xfrm>
           <a:prstGeom prst="rect">
             <a:avLst/>
@@ -23317,8 +23339,8 @@
         </p:nvSpPr>
         <p:spPr>
           <a:xfrm>
-            <a:off x="657860" y="5207000"/>
-            <a:ext cx="1219200" cy="431800"/>
+            <a:off x="657860" y="4953000"/>
+            <a:ext cx="1219200" cy="381000"/>
           </a:xfrm>
           <a:prstGeom prst="rect">
             <a:avLst/>
@@ -23356,8 +23378,8 @@
         </p:nvSpPr>
         <p:spPr>
           <a:xfrm>
-            <a:off x="2006600" y="5207000"/>
-            <a:ext cx="2235200" cy="431800"/>
+            <a:off x="2006600" y="4953000"/>
+            <a:ext cx="2235200" cy="381000"/>
           </a:xfrm>
           <a:prstGeom prst="rect">
             <a:avLst/>
@@ -23395,8 +23417,8 @@
         </p:nvSpPr>
         <p:spPr>
           <a:xfrm>
-            <a:off x="4419600" y="5207000"/>
-            <a:ext cx="2235200" cy="431800"/>
+            <a:off x="4419600" y="4953000"/>
+            <a:ext cx="2235200" cy="381000"/>
           </a:xfrm>
           <a:prstGeom prst="rect">
             <a:avLst/>
@@ -23434,8 +23456,8 @@
         </p:nvSpPr>
         <p:spPr>
           <a:xfrm>
-            <a:off x="6832600" y="5207000"/>
-            <a:ext cx="2235200" cy="431800"/>
+            <a:off x="6832600" y="4953000"/>
+            <a:ext cx="2235200" cy="381000"/>
           </a:xfrm>
           <a:prstGeom prst="rect">
             <a:avLst/>
@@ -23473,8 +23495,8 @@
         </p:nvSpPr>
         <p:spPr>
           <a:xfrm>
-            <a:off x="9245600" y="5207000"/>
-            <a:ext cx="2235200" cy="431800"/>
+            <a:off x="9245600" y="4953000"/>
+            <a:ext cx="2235200" cy="381000"/>
           </a:xfrm>
           <a:prstGeom prst="rect">
             <a:avLst/>
@@ -23512,7 +23534,7 @@
         </p:nvSpPr>
         <p:spPr>
           <a:xfrm>
-            <a:off x="657860" y="5486400"/>
+            <a:off x="657860" y="5435600"/>
             <a:ext cx="6350000" cy="177800"/>
           </a:xfrm>
           <a:prstGeom prst="rect">
@@ -23930,8 +23952,8 @@
         </p:blipFill>
         <p:spPr>
           <a:xfrm>
-            <a:off x="420370" y="2523490"/>
-            <a:ext cx="2933700" cy="2908300"/>
+            <a:off x="515620" y="2523490"/>
+            <a:ext cx="3644900" cy="2908300"/>
           </a:xfrm>
           <a:prstGeom prst="rect">
             <a:avLst/>
@@ -23946,8 +23968,8 @@
         </p:nvSpPr>
         <p:spPr>
           <a:xfrm>
-            <a:off x="1023620" y="2540000"/>
-            <a:ext cx="3411220" cy="584200"/>
+            <a:off x="1023620" y="2794000"/>
+            <a:ext cx="2730500" cy="584200"/>
           </a:xfrm>
           <a:prstGeom prst="rect">
             <a:avLst/>
@@ -23985,8 +24007,8 @@
         </p:nvSpPr>
         <p:spPr>
           <a:xfrm>
-            <a:off x="1023620" y="2921000"/>
-            <a:ext cx="3411220" cy="2540000"/>
+            <a:off x="1023620" y="3175000"/>
+            <a:ext cx="2730500" cy="2286000"/>
           </a:xfrm>
           <a:prstGeom prst="rect">
             <a:avLst/>
@@ -24032,8 +24054,8 @@
         </p:blipFill>
         <p:spPr>
           <a:xfrm>
-            <a:off x="4161790" y="2523490"/>
-            <a:ext cx="2933700" cy="2908300"/>
+            <a:off x="4257040" y="2523490"/>
+            <a:ext cx="3644900" cy="2908300"/>
           </a:xfrm>
           <a:prstGeom prst="rect">
             <a:avLst/>
@@ -24048,8 +24070,8 @@
         </p:nvSpPr>
         <p:spPr>
           <a:xfrm>
-            <a:off x="4765040" y="2540000"/>
-            <a:ext cx="3411220" cy="584200"/>
+            <a:off x="4765040" y="2794000"/>
+            <a:ext cx="2730500" cy="584200"/>
           </a:xfrm>
           <a:prstGeom prst="rect">
             <a:avLst/>
@@ -24087,8 +24109,8 @@
         </p:nvSpPr>
         <p:spPr>
           <a:xfrm>
-            <a:off x="4765040" y="2921000"/>
-            <a:ext cx="3411220" cy="2540000"/>
+            <a:off x="4765040" y="3175000"/>
+            <a:ext cx="2730500" cy="2286000"/>
           </a:xfrm>
           <a:prstGeom prst="rect">
             <a:avLst/>
@@ -24134,8 +24156,8 @@
         </p:blipFill>
         <p:spPr>
           <a:xfrm>
-            <a:off x="7903210" y="2523490"/>
-            <a:ext cx="2933700" cy="2908300"/>
+            <a:off x="7998460" y="2523490"/>
+            <a:ext cx="3644900" cy="2908300"/>
           </a:xfrm>
           <a:prstGeom prst="rect">
             <a:avLst/>
@@ -24150,8 +24172,8 @@
         </p:nvSpPr>
         <p:spPr>
           <a:xfrm>
-            <a:off x="8506460" y="2540000"/>
-            <a:ext cx="3411220" cy="584200"/>
+            <a:off x="8506460" y="2794000"/>
+            <a:ext cx="2730500" cy="584200"/>
           </a:xfrm>
           <a:prstGeom prst="rect">
             <a:avLst/>
@@ -24189,8 +24211,8 @@
         </p:nvSpPr>
         <p:spPr>
           <a:xfrm>
-            <a:off x="8506460" y="2921000"/>
-            <a:ext cx="3411220" cy="2540000"/>
+            <a:off x="8506460" y="3175000"/>
+            <a:ext cx="2730500" cy="2286000"/>
           </a:xfrm>
           <a:prstGeom prst="rect">
             <a:avLst/>
@@ -24914,7 +24936,7 @@
         </p:nvSpPr>
         <p:spPr>
           <a:xfrm>
-            <a:off x="7211060" y="2921000"/>
+            <a:off x="7211060" y="3098800"/>
             <a:ext cx="1930400" cy="203200"/>
           </a:xfrm>
           <a:prstGeom prst="rect">
@@ -24953,8 +24975,8 @@
         </p:nvSpPr>
         <p:spPr>
           <a:xfrm>
-            <a:off x="7211060" y="3136900"/>
-            <a:ext cx="1930400" cy="2324100"/>
+            <a:off x="7211060" y="3314700"/>
+            <a:ext cx="1930400" cy="2146300"/>
           </a:xfrm>
           <a:prstGeom prst="rect">
             <a:avLst/>
@@ -25621,7 +25643,7 @@
             <a:r>
               <a:rPr lang="en-US" sz="900" b="1" dirty="0">
                 <a:solidFill>
-                  <a:srgbClr val="121B47"/>
+                  <a:srgbClr val="C6D2EA"/>
                 </a:solidFill>
                 <a:latin typeface="Segoe UI" pitchFamily="34" charset="0"/>
                 <a:ea typeface="Segoe UI" pitchFamily="34" charset="-122"/>
@@ -25635,7 +25657,7 @@
             <a:r>
               <a:rPr lang="en-US" sz="900" dirty="0">
                 <a:solidFill>
-                  <a:srgbClr val="9AA2B5"/>
+                  <a:srgbClr val="6C7BA6"/>
                 </a:solidFill>
                 <a:latin typeface="Segoe UI" pitchFamily="34" charset="0"/>
                 <a:ea typeface="Segoe UI" pitchFamily="34" charset="-122"/>
@@ -25649,7 +25671,7 @@
             <a:r>
               <a:rPr lang="en-US" sz="900" b="1" dirty="0">
                 <a:solidFill>
-                  <a:srgbClr val="1C4E9D"/>
+                  <a:srgbClr val="9FD0FF"/>
                 </a:solidFill>
                 <a:latin typeface="Segoe UI" pitchFamily="34" charset="0"/>
                 <a:ea typeface="Segoe UI" pitchFamily="34" charset="-122"/>
@@ -25688,7 +25710,7 @@
             <a:r>
               <a:rPr lang="en-US" sz="900" dirty="0">
                 <a:solidFill>
-                  <a:srgbClr val="9AA2B5"/>
+                  <a:srgbClr val="8FA0C6"/>
                 </a:solidFill>
                 <a:latin typeface="Segoe UI" pitchFamily="34" charset="0"/>
                 <a:ea typeface="Segoe UI" pitchFamily="34" charset="-122"/>
@@ -26023,7 +26045,7 @@
             <a:r>
               <a:rPr lang="en-US" sz="1200" b="1" dirty="0">
                 <a:solidFill>
-                  <a:srgbClr val="FFFFFF"/>
+                  <a:srgbClr val="15224B"/>
                 </a:solidFill>
                 <a:latin typeface="Segoe UI" pitchFamily="34" charset="0"/>
                 <a:ea typeface="Segoe UI" pitchFamily="34" charset="-122"/>
@@ -26101,7 +26123,7 @@
             <a:r>
               <a:rPr lang="en-US" sz="1200" b="1" dirty="0">
                 <a:solidFill>
-                  <a:srgbClr val="FFFFFF"/>
+                  <a:srgbClr val="15224B"/>
                 </a:solidFill>
                 <a:latin typeface="Segoe UI" pitchFamily="34" charset="0"/>
                 <a:ea typeface="Segoe UI" pitchFamily="34" charset="-122"/>
@@ -26160,8 +26182,8 @@
         </p:nvSpPr>
         <p:spPr>
           <a:xfrm>
-            <a:off x="566420" y="3105150"/>
-            <a:ext cx="11055350" cy="317500"/>
+            <a:off x="566420" y="3054350"/>
+            <a:ext cx="11055350" cy="355600"/>
           </a:xfrm>
           <a:prstGeom prst="rect">
             <a:avLst/>
@@ -26180,7 +26202,7 @@
         </p:nvSpPr>
         <p:spPr>
           <a:xfrm>
-            <a:off x="749300" y="3175000"/>
+            <a:off x="749300" y="3124200"/>
             <a:ext cx="1930400" cy="203200"/>
           </a:xfrm>
           <a:prstGeom prst="rect">
@@ -26197,7 +26219,7 @@
               <a:buNone/>
             </a:pPr>
             <a:r>
-              <a:rPr lang="en-US" sz="1050" b="1" dirty="0">
+              <a:rPr lang="en-US" sz="1000" b="1" dirty="0">
                 <a:solidFill>
                   <a:srgbClr val="FFFFFF"/>
                 </a:solidFill>
@@ -26207,7 +26229,7 @@
               </a:rPr>
               <a:t>Term</a:t>
             </a:r>
-            <a:endParaRPr lang="en-US" sz="1050" dirty="0"/>
+            <a:endParaRPr lang="en-US" sz="1000" dirty="0"/>
           </a:p>
         </p:txBody>
       </p:sp>
@@ -26219,7 +26241,7 @@
         </p:nvSpPr>
         <p:spPr>
           <a:xfrm>
-            <a:off x="2857500" y="3175000"/>
+            <a:off x="2857500" y="3124200"/>
             <a:ext cx="8509000" cy="203200"/>
           </a:xfrm>
           <a:prstGeom prst="rect">
@@ -26236,7 +26258,7 @@
               <a:buNone/>
             </a:pPr>
             <a:r>
-              <a:rPr lang="en-US" sz="1050" b="1" dirty="0">
+              <a:rPr lang="en-US" sz="1000" b="1" dirty="0">
                 <a:solidFill>
                   <a:srgbClr val="FFFFFF"/>
                 </a:solidFill>
@@ -26246,98 +26268,20 @@
               </a:rPr>
               <a:t>What it covers</a:t>
             </a:r>
-            <a:endParaRPr lang="en-US" sz="1050" dirty="0"/>
-          </a:p>
-        </p:txBody>
-      </p:sp>
-      <p:sp>
-        <p:nvSpPr>
-          <p:cNvPr id="16" name="Text 12"/>
-          <p:cNvSpPr txBox="1"/>
-          <p:nvPr/>
-        </p:nvSpPr>
-        <p:spPr>
-          <a:xfrm>
-            <a:off x="749300" y="3543300"/>
-            <a:ext cx="1930400" cy="317500"/>
-          </a:xfrm>
-          <a:prstGeom prst="rect">
-            <a:avLst/>
-          </a:prstGeom>
-          <a:noFill/>
-          <a:ln/>
-        </p:spPr>
-        <p:txBody>
-          <a:bodyPr wrap="square" lIns="0" tIns="0" rIns="0" bIns="0" rtlCol="0" anchor="t"/>
-          <a:lstStyle/>
-          <a:p>
-            <a:pPr indent="0" marL="0">
-              <a:buNone/>
-            </a:pPr>
-            <a:r>
-              <a:rPr lang="en-US" sz="1050" b="1" dirty="0">
-                <a:solidFill>
-                  <a:srgbClr val="15224B"/>
-                </a:solidFill>
-                <a:latin typeface="Segoe UI" pitchFamily="34" charset="0"/>
-                <a:ea typeface="Segoe UI" pitchFamily="34" charset="-122"/>
-                <a:cs typeface="Segoe UI" pitchFamily="34" charset="-120"/>
-              </a:rPr>
-              <a:t>Fee</a:t>
-            </a:r>
-            <a:endParaRPr lang="en-US" sz="1050" dirty="0"/>
-          </a:p>
-        </p:txBody>
-      </p:sp>
-      <p:sp>
-        <p:nvSpPr>
-          <p:cNvPr id="17" name="Text 13"/>
-          <p:cNvSpPr txBox="1"/>
-          <p:nvPr/>
-        </p:nvSpPr>
-        <p:spPr>
-          <a:xfrm>
-            <a:off x="2857500" y="3543300"/>
-            <a:ext cx="8509000" cy="317500"/>
-          </a:xfrm>
-          <a:prstGeom prst="rect">
-            <a:avLst/>
-          </a:prstGeom>
-          <a:noFill/>
-          <a:ln/>
-        </p:spPr>
-        <p:txBody>
-          <a:bodyPr wrap="square" lIns="0" tIns="0" rIns="0" bIns="0" rtlCol="0" anchor="t"/>
-          <a:lstStyle/>
-          <a:p>
-            <a:pPr indent="0" marL="0">
-              <a:buNone/>
-            </a:pPr>
-            <a:r>
-              <a:rPr lang="en-US" sz="1050" dirty="0">
-                <a:solidFill>
-                  <a:srgbClr val="5B6378"/>
-                </a:solidFill>
-                <a:latin typeface="Segoe UI Semilight" pitchFamily="34" charset="0"/>
-                <a:ea typeface="Segoe UI Semilight" pitchFamily="34" charset="-122"/>
-                <a:cs typeface="Segoe UI Semilight" pitchFamily="34" charset="-120"/>
-              </a:rPr>
-              <a:t>$10,000 fixed</a:t>
-            </a:r>
-            <a:endParaRPr lang="en-US" sz="1050" dirty="0"/>
-          </a:p>
-        </p:txBody>
-      </p:sp>
-      <p:sp>
-        <p:nvSpPr>
-          <p:cNvPr id="18" name="Shape 14"/>
+            <a:endParaRPr lang="en-US" sz="1000" dirty="0"/>
+          </a:p>
+        </p:txBody>
+      </p:sp>
+      <p:sp>
+        <p:nvSpPr>
+          <p:cNvPr id="16" name="Shape 12"/>
           <p:cNvSpPr/>
           <p:nvPr/>
         </p:nvSpPr>
         <p:spPr>
           <a:xfrm>
-            <a:off x="566420" y="3790950"/>
-            <a:ext cx="11055350" cy="317500"/>
+            <a:off x="566420" y="3816350"/>
+            <a:ext cx="11055350" cy="355600"/>
           </a:xfrm>
           <a:prstGeom prst="rect">
             <a:avLst/>
@@ -26350,170 +26294,14 @@
       </p:sp>
       <p:sp>
         <p:nvSpPr>
-          <p:cNvPr id="19" name="Text 15"/>
-          <p:cNvSpPr txBox="1"/>
-          <p:nvPr/>
-        </p:nvSpPr>
-        <p:spPr>
-          <a:xfrm>
-            <a:off x="749300" y="3860800"/>
-            <a:ext cx="1930400" cy="317500"/>
-          </a:xfrm>
-          <a:prstGeom prst="rect">
-            <a:avLst/>
-          </a:prstGeom>
-          <a:noFill/>
-          <a:ln/>
-        </p:spPr>
-        <p:txBody>
-          <a:bodyPr wrap="square" lIns="0" tIns="0" rIns="0" bIns="0" rtlCol="0" anchor="t"/>
-          <a:lstStyle/>
-          <a:p>
-            <a:pPr indent="0" marL="0">
-              <a:buNone/>
-            </a:pPr>
-            <a:r>
-              <a:rPr lang="en-US" sz="1050" b="1" dirty="0">
-                <a:solidFill>
-                  <a:srgbClr val="15224B"/>
-                </a:solidFill>
-                <a:latin typeface="Segoe UI" pitchFamily="34" charset="0"/>
-                <a:ea typeface="Segoe UI" pitchFamily="34" charset="-122"/>
-                <a:cs typeface="Segoe UI" pitchFamily="34" charset="-120"/>
-              </a:rPr>
-              <a:t>Payment</a:t>
-            </a:r>
-            <a:endParaRPr lang="en-US" sz="1050" dirty="0"/>
-          </a:p>
-        </p:txBody>
-      </p:sp>
-      <p:sp>
-        <p:nvSpPr>
-          <p:cNvPr id="20" name="Text 16"/>
-          <p:cNvSpPr txBox="1"/>
-          <p:nvPr/>
-        </p:nvSpPr>
-        <p:spPr>
-          <a:xfrm>
-            <a:off x="2857500" y="3860800"/>
-            <a:ext cx="8509000" cy="317500"/>
-          </a:xfrm>
-          <a:prstGeom prst="rect">
-            <a:avLst/>
-          </a:prstGeom>
-          <a:noFill/>
-          <a:ln/>
-        </p:spPr>
-        <p:txBody>
-          <a:bodyPr wrap="square" lIns="0" tIns="0" rIns="0" bIns="0" rtlCol="0" anchor="t"/>
-          <a:lstStyle/>
-          <a:p>
-            <a:pPr indent="0" marL="0">
-              <a:buNone/>
-            </a:pPr>
-            <a:r>
-              <a:rPr lang="en-US" sz="1050" dirty="0">
-                <a:solidFill>
-                  <a:srgbClr val="5B6378"/>
-                </a:solidFill>
-                <a:latin typeface="Segoe UI Semilight" pitchFamily="34" charset="0"/>
-                <a:ea typeface="Segoe UI Semilight" pitchFamily="34" charset="-122"/>
-                <a:cs typeface="Segoe UI Semilight" pitchFamily="34" charset="-120"/>
-              </a:rPr>
-              <a:t>50% on signature, 50% on completion</a:t>
-            </a:r>
-            <a:endParaRPr lang="en-US" sz="1050" dirty="0"/>
-          </a:p>
-        </p:txBody>
-      </p:sp>
-      <p:sp>
-        <p:nvSpPr>
-          <p:cNvPr id="21" name="Text 17"/>
-          <p:cNvSpPr txBox="1"/>
-          <p:nvPr/>
-        </p:nvSpPr>
-        <p:spPr>
-          <a:xfrm>
-            <a:off x="749300" y="4178300"/>
-            <a:ext cx="1930400" cy="317500"/>
-          </a:xfrm>
-          <a:prstGeom prst="rect">
-            <a:avLst/>
-          </a:prstGeom>
-          <a:noFill/>
-          <a:ln/>
-        </p:spPr>
-        <p:txBody>
-          <a:bodyPr wrap="square" lIns="0" tIns="0" rIns="0" bIns="0" rtlCol="0" anchor="t"/>
-          <a:lstStyle/>
-          <a:p>
-            <a:pPr indent="0" marL="0">
-              <a:buNone/>
-            </a:pPr>
-            <a:r>
-              <a:rPr lang="en-US" sz="1050" b="1" dirty="0">
-                <a:solidFill>
-                  <a:srgbClr val="15224B"/>
-                </a:solidFill>
-                <a:latin typeface="Segoe UI" pitchFamily="34" charset="0"/>
-                <a:ea typeface="Segoe UI" pitchFamily="34" charset="-122"/>
-                <a:cs typeface="Segoe UI" pitchFamily="34" charset="-120"/>
-              </a:rPr>
-              <a:t>Remediation</a:t>
-            </a:r>
-            <a:endParaRPr lang="en-US" sz="1050" dirty="0"/>
-          </a:p>
-        </p:txBody>
-      </p:sp>
-      <p:sp>
-        <p:nvSpPr>
-          <p:cNvPr id="22" name="Text 18"/>
-          <p:cNvSpPr txBox="1"/>
-          <p:nvPr/>
-        </p:nvSpPr>
-        <p:spPr>
-          <a:xfrm>
-            <a:off x="2857500" y="4178300"/>
-            <a:ext cx="8509000" cy="317500"/>
-          </a:xfrm>
-          <a:prstGeom prst="rect">
-            <a:avLst/>
-          </a:prstGeom>
-          <a:noFill/>
-          <a:ln/>
-        </p:spPr>
-        <p:txBody>
-          <a:bodyPr wrap="square" lIns="0" tIns="0" rIns="0" bIns="0" rtlCol="0" anchor="t"/>
-          <a:lstStyle/>
-          <a:p>
-            <a:pPr indent="0" marL="0">
-              <a:buNone/>
-            </a:pPr>
-            <a:r>
-              <a:rPr lang="en-US" sz="1050" dirty="0">
-                <a:solidFill>
-                  <a:srgbClr val="5B6378"/>
-                </a:solidFill>
-                <a:latin typeface="Segoe UI Semilight" pitchFamily="34" charset="0"/>
-                <a:ea typeface="Segoe UI Semilight" pitchFamily="34" charset="-122"/>
-                <a:cs typeface="Segoe UI Semilight" pitchFamily="34" charset="-120"/>
-              </a:rPr>
-              <a:t>20 hours included; further blocks of 10 hours at $1,000 each</a:t>
-            </a:r>
-            <a:endParaRPr lang="en-US" sz="1050" dirty="0"/>
-          </a:p>
-        </p:txBody>
-      </p:sp>
-      <p:sp>
-        <p:nvSpPr>
-          <p:cNvPr id="23" name="Shape 19"/>
+          <p:cNvPr id="17" name="Shape 13"/>
           <p:cNvSpPr/>
           <p:nvPr/>
         </p:nvSpPr>
         <p:spPr>
           <a:xfrm>
-            <a:off x="566420" y="4425950"/>
-            <a:ext cx="11055350" cy="317500"/>
+            <a:off x="566420" y="4527550"/>
+            <a:ext cx="11055350" cy="355600"/>
           </a:xfrm>
           <a:prstGeom prst="rect">
             <a:avLst/>
@@ -26526,170 +26314,14 @@
       </p:sp>
       <p:sp>
         <p:nvSpPr>
-          <p:cNvPr id="24" name="Text 20"/>
-          <p:cNvSpPr txBox="1"/>
-          <p:nvPr/>
-        </p:nvSpPr>
-        <p:spPr>
-          <a:xfrm>
-            <a:off x="749300" y="4495800"/>
-            <a:ext cx="1930400" cy="317500"/>
-          </a:xfrm>
-          <a:prstGeom prst="rect">
-            <a:avLst/>
-          </a:prstGeom>
-          <a:noFill/>
-          <a:ln/>
-        </p:spPr>
-        <p:txBody>
-          <a:bodyPr wrap="square" lIns="0" tIns="0" rIns="0" bIns="0" rtlCol="0" anchor="t"/>
-          <a:lstStyle/>
-          <a:p>
-            <a:pPr indent="0" marL="0">
-              <a:buNone/>
-            </a:pPr>
-            <a:r>
-              <a:rPr lang="en-US" sz="1050" b="1" dirty="0">
-                <a:solidFill>
-                  <a:srgbClr val="15224B"/>
-                </a:solidFill>
-                <a:latin typeface="Segoe UI" pitchFamily="34" charset="0"/>
-                <a:ea typeface="Segoe UI" pitchFamily="34" charset="-122"/>
-                <a:cs typeface="Segoe UI" pitchFamily="34" charset="-120"/>
-              </a:rPr>
-              <a:t>Delivery</a:t>
-            </a:r>
-            <a:endParaRPr lang="en-US" sz="1050" dirty="0"/>
-          </a:p>
-        </p:txBody>
-      </p:sp>
-      <p:sp>
-        <p:nvSpPr>
-          <p:cNvPr id="25" name="Text 21"/>
-          <p:cNvSpPr txBox="1"/>
-          <p:nvPr/>
-        </p:nvSpPr>
-        <p:spPr>
-          <a:xfrm>
-            <a:off x="2857500" y="4495800"/>
-            <a:ext cx="8509000" cy="317500"/>
-          </a:xfrm>
-          <a:prstGeom prst="rect">
-            <a:avLst/>
-          </a:prstGeom>
-          <a:noFill/>
-          <a:ln/>
-        </p:spPr>
-        <p:txBody>
-          <a:bodyPr wrap="square" lIns="0" tIns="0" rIns="0" bIns="0" rtlCol="0" anchor="t"/>
-          <a:lstStyle/>
-          <a:p>
-            <a:pPr indent="0" marL="0">
-              <a:buNone/>
-            </a:pPr>
-            <a:r>
-              <a:rPr lang="en-US" sz="1050" dirty="0">
-                <a:solidFill>
-                  <a:srgbClr val="5B6378"/>
-                </a:solidFill>
-                <a:latin typeface="Segoe UI Semilight" pitchFamily="34" charset="0"/>
-                <a:ea typeface="Segoe UI Semilight" pitchFamily="34" charset="-122"/>
-                <a:cs typeface="Segoe UI Semilight" pitchFamily="34" charset="-120"/>
-              </a:rPr>
-              <a:t>14 to 18 business days</a:t>
-            </a:r>
-            <a:endParaRPr lang="en-US" sz="1050" dirty="0"/>
-          </a:p>
-        </p:txBody>
-      </p:sp>
-      <p:sp>
-        <p:nvSpPr>
-          <p:cNvPr id="26" name="Text 22"/>
-          <p:cNvSpPr txBox="1"/>
-          <p:nvPr/>
-        </p:nvSpPr>
-        <p:spPr>
-          <a:xfrm>
-            <a:off x="749300" y="4813300"/>
-            <a:ext cx="1930400" cy="317500"/>
-          </a:xfrm>
-          <a:prstGeom prst="rect">
-            <a:avLst/>
-          </a:prstGeom>
-          <a:noFill/>
-          <a:ln/>
-        </p:spPr>
-        <p:txBody>
-          <a:bodyPr wrap="square" lIns="0" tIns="0" rIns="0" bIns="0" rtlCol="0" anchor="t"/>
-          <a:lstStyle/>
-          <a:p>
-            <a:pPr indent="0" marL="0">
-              <a:buNone/>
-            </a:pPr>
-            <a:r>
-              <a:rPr lang="en-US" sz="1050" b="1" dirty="0">
-                <a:solidFill>
-                  <a:srgbClr val="15224B"/>
-                </a:solidFill>
-                <a:latin typeface="Segoe UI" pitchFamily="34" charset="0"/>
-                <a:ea typeface="Segoe UI" pitchFamily="34" charset="-122"/>
-                <a:cs typeface="Segoe UI" pitchFamily="34" charset="-120"/>
-              </a:rPr>
-              <a:t>Customer supplies / clock start</a:t>
-            </a:r>
-            <a:endParaRPr lang="en-US" sz="1050" dirty="0"/>
-          </a:p>
-        </p:txBody>
-      </p:sp>
-      <p:sp>
-        <p:nvSpPr>
-          <p:cNvPr id="27" name="Text 23"/>
-          <p:cNvSpPr txBox="1"/>
-          <p:nvPr/>
-        </p:nvSpPr>
-        <p:spPr>
-          <a:xfrm>
-            <a:off x="2857500" y="4813300"/>
-            <a:ext cx="8509000" cy="317500"/>
-          </a:xfrm>
-          <a:prstGeom prst="rect">
-            <a:avLst/>
-          </a:prstGeom>
-          <a:noFill/>
-          <a:ln/>
-        </p:spPr>
-        <p:txBody>
-          <a:bodyPr wrap="square" lIns="0" tIns="0" rIns="0" bIns="0" rtlCol="0" anchor="t"/>
-          <a:lstStyle/>
-          <a:p>
-            <a:pPr indent="0" marL="0">
-              <a:buNone/>
-            </a:pPr>
-            <a:r>
-              <a:rPr lang="en-US" sz="1050" dirty="0">
-                <a:solidFill>
-                  <a:srgbClr val="5B6378"/>
-                </a:solidFill>
-                <a:latin typeface="Segoe UI Semilight" pitchFamily="34" charset="0"/>
-                <a:ea typeface="Segoe UI Semilight" pitchFamily="34" charset="-122"/>
-                <a:cs typeface="Segoe UI Semilight" pitchFamily="34" charset="-120"/>
-              </a:rPr>
-              <a:t>[What starts the clock]; engineering availability for remediation, tax, bank and legal data for seller registration</a:t>
-            </a:r>
-            <a:endParaRPr lang="en-US" sz="1050" dirty="0"/>
-          </a:p>
-        </p:txBody>
-      </p:sp>
-      <p:sp>
-        <p:nvSpPr>
-          <p:cNvPr id="28" name="Shape 24"/>
+          <p:cNvPr id="18" name="Shape 14"/>
           <p:cNvSpPr/>
           <p:nvPr/>
         </p:nvSpPr>
         <p:spPr>
           <a:xfrm>
-            <a:off x="566420" y="5060950"/>
-            <a:ext cx="11055350" cy="317500"/>
+            <a:off x="566420" y="5238750"/>
+            <a:ext cx="11055350" cy="355600"/>
           </a:xfrm>
           <a:prstGeom prst="rect">
             <a:avLst/>
@@ -26702,30 +26334,420 @@
       </p:sp>
       <p:sp>
         <p:nvSpPr>
+          <p:cNvPr id="19" name="Text 15"/>
+          <p:cNvSpPr txBox="1"/>
+          <p:nvPr/>
+        </p:nvSpPr>
+        <p:spPr>
+          <a:xfrm>
+            <a:off x="749300" y="3530600"/>
+            <a:ext cx="1930400" cy="355600"/>
+          </a:xfrm>
+          <a:prstGeom prst="rect">
+            <a:avLst/>
+          </a:prstGeom>
+          <a:noFill/>
+          <a:ln/>
+        </p:spPr>
+        <p:txBody>
+          <a:bodyPr wrap="square" lIns="0" tIns="0" rIns="0" bIns="0" rtlCol="0" anchor="t"/>
+          <a:lstStyle/>
+          <a:p>
+            <a:pPr indent="0" marL="0">
+              <a:buNone/>
+            </a:pPr>
+            <a:r>
+              <a:rPr lang="en-US" sz="1000" b="1" dirty="0">
+                <a:solidFill>
+                  <a:srgbClr val="15224B"/>
+                </a:solidFill>
+                <a:latin typeface="Segoe UI" pitchFamily="34" charset="0"/>
+                <a:ea typeface="Segoe UI" pitchFamily="34" charset="-122"/>
+                <a:cs typeface="Segoe UI" pitchFamily="34" charset="-120"/>
+              </a:rPr>
+              <a:t>Fee</a:t>
+            </a:r>
+            <a:endParaRPr lang="en-US" sz="1000" dirty="0"/>
+          </a:p>
+        </p:txBody>
+      </p:sp>
+      <p:sp>
+        <p:nvSpPr>
+          <p:cNvPr id="20" name="Text 16"/>
+          <p:cNvSpPr txBox="1"/>
+          <p:nvPr/>
+        </p:nvSpPr>
+        <p:spPr>
+          <a:xfrm>
+            <a:off x="2857500" y="3530600"/>
+            <a:ext cx="8509000" cy="355600"/>
+          </a:xfrm>
+          <a:prstGeom prst="rect">
+            <a:avLst/>
+          </a:prstGeom>
+          <a:noFill/>
+          <a:ln/>
+        </p:spPr>
+        <p:txBody>
+          <a:bodyPr wrap="square" lIns="0" tIns="0" rIns="0" bIns="0" rtlCol="0" anchor="t"/>
+          <a:lstStyle/>
+          <a:p>
+            <a:pPr indent="0" marL="0">
+              <a:buNone/>
+            </a:pPr>
+            <a:r>
+              <a:rPr lang="en-US" sz="1000" dirty="0">
+                <a:solidFill>
+                  <a:srgbClr val="5B6378"/>
+                </a:solidFill>
+                <a:latin typeface="Segoe UI Semilight" pitchFamily="34" charset="0"/>
+                <a:ea typeface="Segoe UI Semilight" pitchFamily="34" charset="-122"/>
+                <a:cs typeface="Segoe UI Semilight" pitchFamily="34" charset="-120"/>
+              </a:rPr>
+              <a:t>$10,000 fixed</a:t>
+            </a:r>
+            <a:endParaRPr lang="en-US" sz="1000" dirty="0"/>
+          </a:p>
+        </p:txBody>
+      </p:sp>
+      <p:sp>
+        <p:nvSpPr>
+          <p:cNvPr id="21" name="Text 17"/>
+          <p:cNvSpPr txBox="1"/>
+          <p:nvPr/>
+        </p:nvSpPr>
+        <p:spPr>
+          <a:xfrm>
+            <a:off x="749300" y="3886200"/>
+            <a:ext cx="1930400" cy="355600"/>
+          </a:xfrm>
+          <a:prstGeom prst="rect">
+            <a:avLst/>
+          </a:prstGeom>
+          <a:noFill/>
+          <a:ln/>
+        </p:spPr>
+        <p:txBody>
+          <a:bodyPr wrap="square" lIns="0" tIns="0" rIns="0" bIns="0" rtlCol="0" anchor="t"/>
+          <a:lstStyle/>
+          <a:p>
+            <a:pPr indent="0" marL="0">
+              <a:buNone/>
+            </a:pPr>
+            <a:r>
+              <a:rPr lang="en-US" sz="1000" b="1" dirty="0">
+                <a:solidFill>
+                  <a:srgbClr val="15224B"/>
+                </a:solidFill>
+                <a:latin typeface="Segoe UI" pitchFamily="34" charset="0"/>
+                <a:ea typeface="Segoe UI" pitchFamily="34" charset="-122"/>
+                <a:cs typeface="Segoe UI" pitchFamily="34" charset="-120"/>
+              </a:rPr>
+              <a:t>Payment</a:t>
+            </a:r>
+            <a:endParaRPr lang="en-US" sz="1000" dirty="0"/>
+          </a:p>
+        </p:txBody>
+      </p:sp>
+      <p:sp>
+        <p:nvSpPr>
+          <p:cNvPr id="22" name="Text 18"/>
+          <p:cNvSpPr txBox="1"/>
+          <p:nvPr/>
+        </p:nvSpPr>
+        <p:spPr>
+          <a:xfrm>
+            <a:off x="2857500" y="3886200"/>
+            <a:ext cx="8509000" cy="355600"/>
+          </a:xfrm>
+          <a:prstGeom prst="rect">
+            <a:avLst/>
+          </a:prstGeom>
+          <a:noFill/>
+          <a:ln/>
+        </p:spPr>
+        <p:txBody>
+          <a:bodyPr wrap="square" lIns="0" tIns="0" rIns="0" bIns="0" rtlCol="0" anchor="t"/>
+          <a:lstStyle/>
+          <a:p>
+            <a:pPr indent="0" marL="0">
+              <a:buNone/>
+            </a:pPr>
+            <a:r>
+              <a:rPr lang="en-US" sz="1000" dirty="0">
+                <a:solidFill>
+                  <a:srgbClr val="5B6378"/>
+                </a:solidFill>
+                <a:latin typeface="Segoe UI Semilight" pitchFamily="34" charset="0"/>
+                <a:ea typeface="Segoe UI Semilight" pitchFamily="34" charset="-122"/>
+                <a:cs typeface="Segoe UI Semilight" pitchFamily="34" charset="-120"/>
+              </a:rPr>
+              <a:t>50% on signature, 50% on completion</a:t>
+            </a:r>
+            <a:endParaRPr lang="en-US" sz="1000" dirty="0"/>
+          </a:p>
+        </p:txBody>
+      </p:sp>
+      <p:sp>
+        <p:nvSpPr>
+          <p:cNvPr id="23" name="Text 19"/>
+          <p:cNvSpPr txBox="1"/>
+          <p:nvPr/>
+        </p:nvSpPr>
+        <p:spPr>
+          <a:xfrm>
+            <a:off x="749300" y="4241800"/>
+            <a:ext cx="1930400" cy="355600"/>
+          </a:xfrm>
+          <a:prstGeom prst="rect">
+            <a:avLst/>
+          </a:prstGeom>
+          <a:noFill/>
+          <a:ln/>
+        </p:spPr>
+        <p:txBody>
+          <a:bodyPr wrap="square" lIns="0" tIns="0" rIns="0" bIns="0" rtlCol="0" anchor="t"/>
+          <a:lstStyle/>
+          <a:p>
+            <a:pPr indent="0" marL="0">
+              <a:buNone/>
+            </a:pPr>
+            <a:r>
+              <a:rPr lang="en-US" sz="1000" b="1" dirty="0">
+                <a:solidFill>
+                  <a:srgbClr val="15224B"/>
+                </a:solidFill>
+                <a:latin typeface="Segoe UI" pitchFamily="34" charset="0"/>
+                <a:ea typeface="Segoe UI" pitchFamily="34" charset="-122"/>
+                <a:cs typeface="Segoe UI" pitchFamily="34" charset="-120"/>
+              </a:rPr>
+              <a:t>Remediation</a:t>
+            </a:r>
+            <a:endParaRPr lang="en-US" sz="1000" dirty="0"/>
+          </a:p>
+        </p:txBody>
+      </p:sp>
+      <p:sp>
+        <p:nvSpPr>
+          <p:cNvPr id="24" name="Text 20"/>
+          <p:cNvSpPr txBox="1"/>
+          <p:nvPr/>
+        </p:nvSpPr>
+        <p:spPr>
+          <a:xfrm>
+            <a:off x="2857500" y="4241800"/>
+            <a:ext cx="8509000" cy="355600"/>
+          </a:xfrm>
+          <a:prstGeom prst="rect">
+            <a:avLst/>
+          </a:prstGeom>
+          <a:noFill/>
+          <a:ln/>
+        </p:spPr>
+        <p:txBody>
+          <a:bodyPr wrap="square" lIns="0" tIns="0" rIns="0" bIns="0" rtlCol="0" anchor="t"/>
+          <a:lstStyle/>
+          <a:p>
+            <a:pPr indent="0" marL="0">
+              <a:buNone/>
+            </a:pPr>
+            <a:r>
+              <a:rPr lang="en-US" sz="1000" dirty="0">
+                <a:solidFill>
+                  <a:srgbClr val="5B6378"/>
+                </a:solidFill>
+                <a:latin typeface="Segoe UI Semilight" pitchFamily="34" charset="0"/>
+                <a:ea typeface="Segoe UI Semilight" pitchFamily="34" charset="-122"/>
+                <a:cs typeface="Segoe UI Semilight" pitchFamily="34" charset="-120"/>
+              </a:rPr>
+              <a:t>20 hours included; further blocks of 10 hours at $1,000 each</a:t>
+            </a:r>
+            <a:endParaRPr lang="en-US" sz="1000" dirty="0"/>
+          </a:p>
+        </p:txBody>
+      </p:sp>
+      <p:sp>
+        <p:nvSpPr>
+          <p:cNvPr id="25" name="Text 21"/>
+          <p:cNvSpPr txBox="1"/>
+          <p:nvPr/>
+        </p:nvSpPr>
+        <p:spPr>
+          <a:xfrm>
+            <a:off x="749300" y="4597400"/>
+            <a:ext cx="1930400" cy="355600"/>
+          </a:xfrm>
+          <a:prstGeom prst="rect">
+            <a:avLst/>
+          </a:prstGeom>
+          <a:noFill/>
+          <a:ln/>
+        </p:spPr>
+        <p:txBody>
+          <a:bodyPr wrap="square" lIns="0" tIns="0" rIns="0" bIns="0" rtlCol="0" anchor="t"/>
+          <a:lstStyle/>
+          <a:p>
+            <a:pPr indent="0" marL="0">
+              <a:buNone/>
+            </a:pPr>
+            <a:r>
+              <a:rPr lang="en-US" sz="1000" b="1" dirty="0">
+                <a:solidFill>
+                  <a:srgbClr val="15224B"/>
+                </a:solidFill>
+                <a:latin typeface="Segoe UI" pitchFamily="34" charset="0"/>
+                <a:ea typeface="Segoe UI" pitchFamily="34" charset="-122"/>
+                <a:cs typeface="Segoe UI" pitchFamily="34" charset="-120"/>
+              </a:rPr>
+              <a:t>Delivery</a:t>
+            </a:r>
+            <a:endParaRPr lang="en-US" sz="1000" dirty="0"/>
+          </a:p>
+        </p:txBody>
+      </p:sp>
+      <p:sp>
+        <p:nvSpPr>
+          <p:cNvPr id="26" name="Text 22"/>
+          <p:cNvSpPr txBox="1"/>
+          <p:nvPr/>
+        </p:nvSpPr>
+        <p:spPr>
+          <a:xfrm>
+            <a:off x="2857500" y="4597400"/>
+            <a:ext cx="8509000" cy="355600"/>
+          </a:xfrm>
+          <a:prstGeom prst="rect">
+            <a:avLst/>
+          </a:prstGeom>
+          <a:noFill/>
+          <a:ln/>
+        </p:spPr>
+        <p:txBody>
+          <a:bodyPr wrap="square" lIns="0" tIns="0" rIns="0" bIns="0" rtlCol="0" anchor="t"/>
+          <a:lstStyle/>
+          <a:p>
+            <a:pPr indent="0" marL="0">
+              <a:buNone/>
+            </a:pPr>
+            <a:r>
+              <a:rPr lang="en-US" sz="1000" dirty="0">
+                <a:solidFill>
+                  <a:srgbClr val="5B6378"/>
+                </a:solidFill>
+                <a:latin typeface="Segoe UI Semilight" pitchFamily="34" charset="0"/>
+                <a:ea typeface="Segoe UI Semilight" pitchFamily="34" charset="-122"/>
+                <a:cs typeface="Segoe UI Semilight" pitchFamily="34" charset="-120"/>
+              </a:rPr>
+              <a:t>14 to 18 business days</a:t>
+            </a:r>
+            <a:endParaRPr lang="en-US" sz="1000" dirty="0"/>
+          </a:p>
+        </p:txBody>
+      </p:sp>
+      <p:sp>
+        <p:nvSpPr>
+          <p:cNvPr id="27" name="Text 23"/>
+          <p:cNvSpPr txBox="1"/>
+          <p:nvPr/>
+        </p:nvSpPr>
+        <p:spPr>
+          <a:xfrm>
+            <a:off x="749300" y="4953000"/>
+            <a:ext cx="1930400" cy="355600"/>
+          </a:xfrm>
+          <a:prstGeom prst="rect">
+            <a:avLst/>
+          </a:prstGeom>
+          <a:noFill/>
+          <a:ln/>
+        </p:spPr>
+        <p:txBody>
+          <a:bodyPr wrap="square" lIns="0" tIns="0" rIns="0" bIns="0" rtlCol="0" anchor="t"/>
+          <a:lstStyle/>
+          <a:p>
+            <a:pPr indent="0" marL="0">
+              <a:buNone/>
+            </a:pPr>
+            <a:r>
+              <a:rPr lang="en-US" sz="1000" b="1" dirty="0">
+                <a:solidFill>
+                  <a:srgbClr val="15224B"/>
+                </a:solidFill>
+                <a:latin typeface="Segoe UI" pitchFamily="34" charset="0"/>
+                <a:ea typeface="Segoe UI" pitchFamily="34" charset="-122"/>
+                <a:cs typeface="Segoe UI" pitchFamily="34" charset="-120"/>
+              </a:rPr>
+              <a:t>Customer supplies / clock start</a:t>
+            </a:r>
+            <a:endParaRPr lang="en-US" sz="1000" dirty="0"/>
+          </a:p>
+        </p:txBody>
+      </p:sp>
+      <p:sp>
+        <p:nvSpPr>
+          <p:cNvPr id="28" name="Text 24"/>
+          <p:cNvSpPr txBox="1"/>
+          <p:nvPr/>
+        </p:nvSpPr>
+        <p:spPr>
+          <a:xfrm>
+            <a:off x="2857500" y="4953000"/>
+            <a:ext cx="8509000" cy="355600"/>
+          </a:xfrm>
+          <a:prstGeom prst="rect">
+            <a:avLst/>
+          </a:prstGeom>
+          <a:noFill/>
+          <a:ln/>
+        </p:spPr>
+        <p:txBody>
+          <a:bodyPr wrap="square" lIns="0" tIns="0" rIns="0" bIns="0" rtlCol="0" anchor="t"/>
+          <a:lstStyle/>
+          <a:p>
+            <a:pPr indent="0" marL="0">
+              <a:buNone/>
+            </a:pPr>
+            <a:r>
+              <a:rPr lang="en-US" sz="1000" dirty="0">
+                <a:solidFill>
+                  <a:srgbClr val="5B6378"/>
+                </a:solidFill>
+                <a:latin typeface="Segoe UI Semilight" pitchFamily="34" charset="0"/>
+                <a:ea typeface="Segoe UI Semilight" pitchFamily="34" charset="-122"/>
+                <a:cs typeface="Segoe UI Semilight" pitchFamily="34" charset="-120"/>
+              </a:rPr>
+              <a:t>[What starts the clock]; engineering availability for remediation, tax, bank and legal data for seller registration</a:t>
+            </a:r>
+            <a:endParaRPr lang="en-US" sz="1000" dirty="0"/>
+          </a:p>
+        </p:txBody>
+      </p:sp>
+      <p:sp>
+        <p:nvSpPr>
           <p:cNvPr id="29" name="Text 25"/>
           <p:cNvSpPr txBox="1"/>
           <p:nvPr/>
         </p:nvSpPr>
         <p:spPr>
           <a:xfrm>
-            <a:off x="749300" y="5130800"/>
-            <a:ext cx="1930400" cy="317500"/>
-          </a:xfrm>
-          <a:prstGeom prst="rect">
-            <a:avLst/>
-          </a:prstGeom>
-          <a:noFill/>
-          <a:ln/>
-        </p:spPr>
-        <p:txBody>
-          <a:bodyPr wrap="square" lIns="0" tIns="0" rIns="0" bIns="0" rtlCol="0" anchor="t"/>
-          <a:lstStyle/>
-          <a:p>
-            <a:pPr indent="0" marL="0">
-              <a:buNone/>
-            </a:pPr>
-            <a:r>
-              <a:rPr lang="en-US" sz="1050" b="1" dirty="0">
+            <a:off x="749300" y="5308600"/>
+            <a:ext cx="1930400" cy="355600"/>
+          </a:xfrm>
+          <a:prstGeom prst="rect">
+            <a:avLst/>
+          </a:prstGeom>
+          <a:noFill/>
+          <a:ln/>
+        </p:spPr>
+        <p:txBody>
+          <a:bodyPr wrap="square" lIns="0" tIns="0" rIns="0" bIns="0" rtlCol="0" anchor="t"/>
+          <a:lstStyle/>
+          <a:p>
+            <a:pPr indent="0" marL="0">
+              <a:buNone/>
+            </a:pPr>
+            <a:r>
+              <a:rPr lang="en-US" sz="1000" b="1" dirty="0">
                 <a:solidFill>
                   <a:srgbClr val="15224B"/>
                 </a:solidFill>
@@ -26735,7 +26757,7 @@
               </a:rPr>
               <a:t>We target, not commit</a:t>
             </a:r>
-            <a:endParaRPr lang="en-US" sz="1050" dirty="0"/>
+            <a:endParaRPr lang="en-US" sz="1000" dirty="0"/>
           </a:p>
         </p:txBody>
       </p:sp>
@@ -26747,24 +26769,24 @@
         </p:nvSpPr>
         <p:spPr>
           <a:xfrm>
-            <a:off x="2857500" y="5130800"/>
-            <a:ext cx="8509000" cy="317500"/>
-          </a:xfrm>
-          <a:prstGeom prst="rect">
-            <a:avLst/>
-          </a:prstGeom>
-          <a:noFill/>
-          <a:ln/>
-        </p:spPr>
-        <p:txBody>
-          <a:bodyPr wrap="square" lIns="0" tIns="0" rIns="0" bIns="0" rtlCol="0" anchor="t"/>
-          <a:lstStyle/>
-          <a:p>
-            <a:pPr indent="0" marL="0">
-              <a:buNone/>
-            </a:pPr>
-            <a:r>
-              <a:rPr lang="en-US" sz="1050" dirty="0">
+            <a:off x="2857500" y="5308600"/>
+            <a:ext cx="8509000" cy="355600"/>
+          </a:xfrm>
+          <a:prstGeom prst="rect">
+            <a:avLst/>
+          </a:prstGeom>
+          <a:noFill/>
+          <a:ln/>
+        </p:spPr>
+        <p:txBody>
+          <a:bodyPr wrap="square" lIns="0" tIns="0" rIns="0" bIns="0" rtlCol="0" anchor="t"/>
+          <a:lstStyle/>
+          <a:p>
+            <a:pPr indent="0" marL="0">
+              <a:buNone/>
+            </a:pPr>
+            <a:r>
+              <a:rPr lang="en-US" sz="1000" dirty="0">
                 <a:solidFill>
                   <a:srgbClr val="5B6378"/>
                 </a:solidFill>
@@ -26774,7 +26796,7 @@
               </a:rPr>
               <a:t>Publication date — AWS’s review queue and the customer’s product govern it</a:t>
             </a:r>
-            <a:endParaRPr lang="en-US" sz="1050" dirty="0"/>
+            <a:endParaRPr lang="en-US" sz="1000" dirty="0"/>
           </a:p>
         </p:txBody>
       </p:sp>
@@ -26786,24 +26808,24 @@
         </p:nvSpPr>
         <p:spPr>
           <a:xfrm>
-            <a:off x="749300" y="5448300"/>
-            <a:ext cx="1930400" cy="317500"/>
-          </a:xfrm>
-          <a:prstGeom prst="rect">
-            <a:avLst/>
-          </a:prstGeom>
-          <a:noFill/>
-          <a:ln/>
-        </p:spPr>
-        <p:txBody>
-          <a:bodyPr wrap="square" lIns="0" tIns="0" rIns="0" bIns="0" rtlCol="0" anchor="t"/>
-          <a:lstStyle/>
-          <a:p>
-            <a:pPr indent="0" marL="0">
-              <a:buNone/>
-            </a:pPr>
-            <a:r>
-              <a:rPr lang="en-US" sz="1050" b="1" dirty="0">
+            <a:off x="749300" y="5664200"/>
+            <a:ext cx="1930400" cy="355600"/>
+          </a:xfrm>
+          <a:prstGeom prst="rect">
+            <a:avLst/>
+          </a:prstGeom>
+          <a:noFill/>
+          <a:ln/>
+        </p:spPr>
+        <p:txBody>
+          <a:bodyPr wrap="square" lIns="0" tIns="0" rIns="0" bIns="0" rtlCol="0" anchor="t"/>
+          <a:lstStyle/>
+          <a:p>
+            <a:pPr indent="0" marL="0">
+              <a:buNone/>
+            </a:pPr>
+            <a:r>
+              <a:rPr lang="en-US" sz="1000" b="1" dirty="0">
                 <a:solidFill>
                   <a:srgbClr val="15224B"/>
                 </a:solidFill>
@@ -26813,7 +26835,7 @@
               </a:rPr>
               <a:t>Not included</a:t>
             </a:r>
-            <a:endParaRPr lang="en-US" sz="1050" dirty="0"/>
+            <a:endParaRPr lang="en-US" sz="1000" dirty="0"/>
           </a:p>
         </p:txBody>
       </p:sp>
@@ -26825,24 +26847,24 @@
         </p:nvSpPr>
         <p:spPr>
           <a:xfrm>
-            <a:off x="2857500" y="5448300"/>
-            <a:ext cx="8509000" cy="317500"/>
-          </a:xfrm>
-          <a:prstGeom prst="rect">
-            <a:avLst/>
-          </a:prstGeom>
-          <a:noFill/>
-          <a:ln/>
-        </p:spPr>
-        <p:txBody>
-          <a:bodyPr wrap="square" lIns="0" tIns="0" rIns="0" bIns="0" rtlCol="0" anchor="t"/>
-          <a:lstStyle/>
-          <a:p>
-            <a:pPr indent="0" marL="0">
-              <a:buNone/>
-            </a:pPr>
-            <a:r>
-              <a:rPr lang="en-US" sz="1050" dirty="0">
+            <a:off x="2857500" y="5664200"/>
+            <a:ext cx="8509000" cy="355600"/>
+          </a:xfrm>
+          <a:prstGeom prst="rect">
+            <a:avLst/>
+          </a:prstGeom>
+          <a:noFill/>
+          <a:ln/>
+        </p:spPr>
+        <p:txBody>
+          <a:bodyPr wrap="square" lIns="0" tIns="0" rIns="0" bIns="0" rtlCol="0" anchor="t"/>
+          <a:lstStyle/>
+          <a:p>
+            <a:pPr indent="0" marL="0">
+              <a:buNone/>
+            </a:pPr>
+            <a:r>
+              <a:rPr lang="en-US" sz="1000" dirty="0">
                 <a:solidFill>
                   <a:srgbClr val="5B6378"/>
                 </a:solidFill>
@@ -26852,7 +26874,7 @@
               </a:rPr>
               <a:t>Ongoing operation of the listing — that is Managed Marketplace Operations</a:t>
             </a:r>
-            <a:endParaRPr lang="en-US" sz="1050" dirty="0"/>
+            <a:endParaRPr lang="en-US" sz="1000" dirty="0"/>
           </a:p>
         </p:txBody>
       </p:sp>

--- a/docs/deck/BOX_Solutions_Revised.pptx
+++ b/docs/deck/BOX_Solutions_Revised.pptx
@@ -5216,7 +5216,7 @@
                 <a:ea typeface="Segoe UI Semilight" pitchFamily="34" charset="-122"/>
                 <a:cs typeface="Segoe UI Semilight" pitchFamily="34" charset="-120"/>
               </a:rPr>
-              <a:t>Put a named owner on the AWS partnership. Three strictly additive tiers.</a:t>
+              <a:t>Put a named owner on the AWS partnership, and drive the ISV’s own AWS program progression. Three strictly additive tiers.</a:t>
             </a:r>
             <a:endParaRPr lang="en-US" sz="1250" dirty="0"/>
           </a:p>
@@ -5361,7 +5361,7 @@
                 <a:ea typeface="Segoe UI Semilight" pitchFamily="34" charset="-122"/>
                 <a:cs typeface="Segoe UI Semilight" pitchFamily="34" charset="-120"/>
               </a:rPr>
-              <a:t>ENTRY CONDITION — requires a published listing, delivered by the Accelerator or already in place. Alliances runs the partnership around a listing; it does not produce one.</a:t>
+              <a:t>ENTRY CONDITION — the ISV holds the partner stage each program requires. [Marketplace listing as a prerequisite — to confirm.]</a:t>
             </a:r>
             <a:endParaRPr lang="en-US" sz="850" dirty="0"/>
           </a:p>
@@ -5414,7 +5414,7 @@
                 <a:ea typeface="Segoe UI Semilight" pitchFamily="34" charset="-122"/>
                 <a:cs typeface="Segoe UI Semilight" pitchFamily="34" charset="-120"/>
               </a:rPr>
-              <a:t>A named Director of Alliances at [N] hours a month with a named backup, [N] partnership reviews and [N] quarterly AWS plans delivered, each with a written action log issued within [N] business days.</a:t>
+              <a:t>A named Director of Alliances at [N] hours a month with a named backup, [N] partnership reviews and [N] quarterly AWS plans delivered, and every application, event, check and artifact below prepared, filed or run.</a:t>
             </a:r>
             <a:endParaRPr lang="en-US" sz="950" dirty="0"/>
           </a:p>
@@ -5467,7 +5467,7 @@
                 <a:ea typeface="Segoe UI Semilight" pitchFamily="34" charset="-122"/>
                 <a:cs typeface="Segoe UI Semilight" pitchFamily="34" charset="-120"/>
               </a:rPr>
-              <a:t>Partner-tier progress, AWS-attributed pipeline, and accepted co-sell opportunities.</a:t>
+              <a:t>Acceptance into ISV Accelerate and the Competency programs, MDF availability, BOX Program listings approved, and AWS-sourced leads — every one of these is AWS’s decision, not OBP’s.</a:t>
             </a:r>
             <a:endParaRPr lang="en-US" sz="950" dirty="0"/>
           </a:p>
@@ -5636,7 +5636,7 @@
               <a:buChar char="•"/>
             </a:pPr>
             <a:r>
-              <a:rPr lang="en-US" sz="780" dirty="0">
+              <a:rPr lang="en-US" sz="750" dirty="0">
                 <a:solidFill>
                   <a:srgbClr val="5B6378"/>
                 </a:solidFill>
@@ -5646,7 +5646,7 @@
               </a:rPr>
               <a:t>Named alliance lead at [N] hours a month, with a named backup</a:t>
             </a:r>
-            <a:endParaRPr lang="en-US" sz="780" dirty="0"/>
+            <a:endParaRPr lang="en-US" sz="750" dirty="0"/>
           </a:p>
           <a:p>
             <a:pPr marL="127000" indent="-127000">
@@ -5660,7 +5660,7 @@
               <a:buChar char="•"/>
             </a:pPr>
             <a:r>
-              <a:rPr lang="en-US" sz="780" dirty="0">
+              <a:rPr lang="en-US" sz="750" dirty="0">
                 <a:solidFill>
                   <a:srgbClr val="5B6378"/>
                 </a:solidFill>
@@ -5668,9 +5668,9 @@
                 <a:ea typeface="Segoe UI Semilight" pitchFamily="34" charset="-122"/>
                 <a:cs typeface="Segoe UI Semilight" pitchFamily="34" charset="-120"/>
               </a:rPr>
-              <a:t>Monthly partnership review scheduled, held and minuted; action log within [N] business days</a:t>
-            </a:r>
-            <a:endParaRPr lang="en-US" sz="780" dirty="0"/>
+              <a:t>Monthly partnership review held and minuted; action log within [N] business days, and a quarterly AWS partnership plan</a:t>
+            </a:r>
+            <a:endParaRPr lang="en-US" sz="750" dirty="0"/>
           </a:p>
           <a:p>
             <a:pPr marL="127000" indent="-127000">
@@ -5684,7 +5684,7 @@
               <a:buChar char="•"/>
             </a:pPr>
             <a:r>
-              <a:rPr lang="en-US" sz="780" dirty="0">
+              <a:rPr lang="en-US" sz="750" dirty="0">
                 <a:solidFill>
                   <a:srgbClr val="5B6378"/>
                 </a:solidFill>
@@ -5692,9 +5692,9 @@
                 <a:ea typeface="Segoe UI Semilight" pitchFamily="34" charset="-122"/>
                 <a:cs typeface="Segoe UI Semilight" pitchFamily="34" charset="-120"/>
               </a:rPr>
-              <a:t>Quarterly AWS partnership plan with dated actions and named owners</a:t>
-            </a:r>
-            <a:endParaRPr lang="en-US" sz="780" dirty="0"/>
+              <a:t>ISV Accelerate, Competency and MDF applications prepared and filed</a:t>
+            </a:r>
+            <a:endParaRPr lang="en-US" sz="750" dirty="0"/>
           </a:p>
           <a:p>
             <a:pPr marL="127000" indent="-127000">
@@ -5708,7 +5708,7 @@
               <a:buChar char="•"/>
             </a:pPr>
             <a:r>
-              <a:rPr lang="en-US" sz="780" dirty="0">
+              <a:rPr lang="en-US" sz="750" dirty="0">
                 <a:solidFill>
                   <a:srgbClr val="5B6378"/>
                 </a:solidFill>
@@ -5716,71 +5716,10 @@
                 <a:ea typeface="Segoe UI Semilight" pitchFamily="34" charset="-122"/>
                 <a:cs typeface="Segoe UI Semilight" pitchFamily="34" charset="-120"/>
               </a:rPr>
-              <a:t>Listing and compliance items tracked, chased and reported with status at each review</a:t>
-            </a:r>
-            <a:endParaRPr lang="en-US" sz="780" dirty="0"/>
-          </a:p>
-        </p:txBody>
-      </p:sp>
-      <p:sp>
-        <p:nvSpPr>
-          <p:cNvPr id="16" name="Text 12"/>
-          <p:cNvSpPr txBox="1"/>
-          <p:nvPr/>
-        </p:nvSpPr>
-        <p:spPr>
-          <a:xfrm>
-            <a:off x="657860" y="4851400"/>
-            <a:ext cx="3479800" cy="152400"/>
-          </a:xfrm>
-          <a:prstGeom prst="rect">
-            <a:avLst/>
-          </a:prstGeom>
-          <a:noFill/>
-          <a:ln/>
-        </p:spPr>
-        <p:txBody>
-          <a:bodyPr wrap="square" lIns="0" tIns="0" rIns="0" bIns="0" rtlCol="0" anchor="t"/>
-          <a:lstStyle/>
-          <a:p>
-            <a:pPr indent="0" marL="0">
-              <a:buNone/>
-            </a:pPr>
-            <a:r>
-              <a:rPr lang="en-US" sz="800" b="1" spc="110" kern="0" dirty="0">
-                <a:solidFill>
-                  <a:srgbClr val="9AA2B5"/>
-                </a:solidFill>
-                <a:latin typeface="Segoe UI" pitchFamily="34" charset="0"/>
-                <a:ea typeface="Segoe UI" pitchFamily="34" charset="-122"/>
-                <a:cs typeface="Segoe UI" pitchFamily="34" charset="-120"/>
-              </a:rPr>
-              <a:t>WE TARGET</a:t>
-            </a:r>
-            <a:endParaRPr lang="en-US" sz="800" dirty="0"/>
-          </a:p>
-        </p:txBody>
-      </p:sp>
-      <p:sp>
-        <p:nvSpPr>
-          <p:cNvPr id="17" name="Text 13"/>
-          <p:cNvSpPr txBox="1"/>
-          <p:nvPr/>
-        </p:nvSpPr>
-        <p:spPr>
-          <a:xfrm>
-            <a:off x="657860" y="5029200"/>
-            <a:ext cx="3479800" cy="584200"/>
-          </a:xfrm>
-          <a:prstGeom prst="rect">
-            <a:avLst/>
-          </a:prstGeom>
-          <a:noFill/>
-          <a:ln/>
-        </p:spPr>
-        <p:txBody>
-          <a:bodyPr wrap="square" lIns="0" tIns="0" rIns="0" bIns="0" rtlCol="0" anchor="t"/>
-          <a:lstStyle/>
+              <a:t>One BOX Program listing submission prepared and filed</a:t>
+            </a:r>
+            <a:endParaRPr lang="en-US" sz="750" dirty="0"/>
+          </a:p>
           <a:p>
             <a:pPr marL="127000" indent="-127000">
               <a:lnSpc>
@@ -5793,18 +5732,79 @@
               <a:buChar char="•"/>
             </a:pPr>
             <a:r>
-              <a:rPr lang="en-US" sz="780" dirty="0">
+              <a:rPr lang="en-US" sz="750" dirty="0">
+                <a:solidFill>
+                  <a:srgbClr val="5B6378"/>
+                </a:solidFill>
+                <a:latin typeface="Segoe UI Semilight" pitchFamily="34" charset="0"/>
+                <a:ea typeface="Segoe UI Semilight" pitchFamily="34" charset="-122"/>
+                <a:cs typeface="Segoe UI Semilight" pitchFamily="34" charset="-120"/>
+              </a:rPr>
+              <a:t>AWS-facing marketing support produced: 1-pagers, solution decks</a:t>
+            </a:r>
+            <a:endParaRPr lang="en-US" sz="750" dirty="0"/>
+          </a:p>
+        </p:txBody>
+      </p:sp>
+      <p:sp>
+        <p:nvSpPr>
+          <p:cNvPr id="16" name="Text 12"/>
+          <p:cNvSpPr txBox="1"/>
+          <p:nvPr/>
+        </p:nvSpPr>
+        <p:spPr>
+          <a:xfrm>
+            <a:off x="657860" y="4851400"/>
+            <a:ext cx="3479800" cy="152400"/>
+          </a:xfrm>
+          <a:prstGeom prst="rect">
+            <a:avLst/>
+          </a:prstGeom>
+          <a:noFill/>
+          <a:ln/>
+        </p:spPr>
+        <p:txBody>
+          <a:bodyPr wrap="square" lIns="0" tIns="0" rIns="0" bIns="0" rtlCol="0" anchor="t"/>
+          <a:lstStyle/>
+          <a:p>
+            <a:pPr indent="0" marL="0">
+              <a:buNone/>
+            </a:pPr>
+            <a:r>
+              <a:rPr lang="en-US" sz="800" b="1" spc="110" kern="0" dirty="0">
                 <a:solidFill>
                   <a:srgbClr val="9AA2B5"/>
                 </a:solidFill>
-                <a:latin typeface="Segoe UI Semilight" pitchFamily="34" charset="0"/>
-                <a:ea typeface="Segoe UI Semilight" pitchFamily="34" charset="-122"/>
-                <a:cs typeface="Segoe UI Semilight" pitchFamily="34" charset="-120"/>
-              </a:rPr>
-              <a:t>Listing published and transacting inside the term</a:t>
-            </a:r>
-            <a:endParaRPr lang="en-US" sz="780" dirty="0"/>
-          </a:p>
+                <a:latin typeface="Segoe UI" pitchFamily="34" charset="0"/>
+                <a:ea typeface="Segoe UI" pitchFamily="34" charset="-122"/>
+                <a:cs typeface="Segoe UI" pitchFamily="34" charset="-120"/>
+              </a:rPr>
+              <a:t>WE TARGET</a:t>
+            </a:r>
+            <a:endParaRPr lang="en-US" sz="800" dirty="0"/>
+          </a:p>
+        </p:txBody>
+      </p:sp>
+      <p:sp>
+        <p:nvSpPr>
+          <p:cNvPr id="17" name="Text 13"/>
+          <p:cNvSpPr txBox="1"/>
+          <p:nvPr/>
+        </p:nvSpPr>
+        <p:spPr>
+          <a:xfrm>
+            <a:off x="657860" y="5029200"/>
+            <a:ext cx="3479800" cy="584200"/>
+          </a:xfrm>
+          <a:prstGeom prst="rect">
+            <a:avLst/>
+          </a:prstGeom>
+          <a:noFill/>
+          <a:ln/>
+        </p:spPr>
+        <p:txBody>
+          <a:bodyPr wrap="square" lIns="0" tIns="0" rIns="0" bIns="0" rtlCol="0" anchor="t"/>
+          <a:lstStyle/>
           <a:p>
             <a:pPr marL="127000" indent="-127000">
               <a:lnSpc>
@@ -5825,7 +5825,7 @@
                 <a:ea typeface="Segoe UI Semilight" pitchFamily="34" charset="-122"/>
                 <a:cs typeface="Segoe UI Semilight" pitchFamily="34" charset="-120"/>
               </a:rPr>
-              <a:t>Partner-tier progress accepted by AWS at [target tier]</a:t>
+              <a:t>ISV-A acceptance — unlocking up to 25k in MDF</a:t>
             </a:r>
             <a:endParaRPr lang="en-US" sz="780" dirty="0"/>
           </a:p>
@@ -5849,163 +5849,10 @@
                 <a:ea typeface="Segoe UI Semilight" pitchFamily="34" charset="-122"/>
                 <a:cs typeface="Segoe UI Semilight" pitchFamily="34" charset="-120"/>
               </a:rPr>
-              <a:t>[N] named AWS field contacts engaged</a:t>
+              <a:t>(1) Competency acceptance — unlocking up to 50k in MDF</a:t>
             </a:r>
             <a:endParaRPr lang="en-US" sz="780" dirty="0"/>
           </a:p>
-        </p:txBody>
-      </p:sp>
-      <p:sp>
-        <p:nvSpPr>
-          <p:cNvPr id="18" name="Text 14"/>
-          <p:cNvSpPr txBox="1"/>
-          <p:nvPr/>
-        </p:nvSpPr>
-        <p:spPr>
-          <a:xfrm>
-            <a:off x="4391660" y="2895600"/>
-            <a:ext cx="3479800" cy="203200"/>
-          </a:xfrm>
-          <a:prstGeom prst="rect">
-            <a:avLst/>
-          </a:prstGeom>
-          <a:noFill/>
-          <a:ln/>
-        </p:spPr>
-        <p:txBody>
-          <a:bodyPr wrap="square" lIns="0" tIns="0" rIns="0" bIns="0" rtlCol="0" anchor="ctr"/>
-          <a:lstStyle/>
-          <a:p>
-            <a:pPr indent="0" marL="0">
-              <a:buNone/>
-            </a:pPr>
-            <a:r>
-              <a:rPr lang="en-US" sz="1200" b="1" dirty="0">
-                <a:solidFill>
-                  <a:srgbClr val="15224B"/>
-                </a:solidFill>
-                <a:latin typeface="Segoe UI" pitchFamily="34" charset="0"/>
-                <a:ea typeface="Segoe UI" pitchFamily="34" charset="-122"/>
-                <a:cs typeface="Segoe UI" pitchFamily="34" charset="-120"/>
-              </a:rPr>
-              <a:t>Growth</a:t>
-            </a:r>
-            <a:pPr indent="0" marL="0">
-              <a:buNone/>
-            </a:pPr>
-            <a:r>
-              <a:rPr lang="en-US" sz="1200" b="1" dirty="0">
-                <a:solidFill>
-                  <a:srgbClr val="F36F20"/>
-                </a:solidFill>
-                <a:latin typeface="Segoe UI" pitchFamily="34" charset="0"/>
-                <a:ea typeface="Segoe UI" pitchFamily="34" charset="-122"/>
-                <a:cs typeface="Segoe UI" pitchFamily="34" charset="-120"/>
-              </a:rPr>
-              <a:t>   $5,000 / mo</a:t>
-            </a:r>
-            <a:endParaRPr lang="en-US" sz="1200" dirty="0"/>
-          </a:p>
-        </p:txBody>
-      </p:sp>
-      <p:sp>
-        <p:nvSpPr>
-          <p:cNvPr id="19" name="Text 15"/>
-          <p:cNvSpPr txBox="1"/>
-          <p:nvPr/>
-        </p:nvSpPr>
-        <p:spPr>
-          <a:xfrm>
-            <a:off x="4391660" y="3136900"/>
-            <a:ext cx="3479800" cy="330200"/>
-          </a:xfrm>
-          <a:prstGeom prst="rect">
-            <a:avLst/>
-          </a:prstGeom>
-          <a:noFill/>
-          <a:ln/>
-        </p:spPr>
-        <p:txBody>
-          <a:bodyPr wrap="square" lIns="0" tIns="0" rIns="0" bIns="0" rtlCol="0" anchor="t"/>
-          <a:lstStyle/>
-          <a:p>
-            <a:pPr indent="0" marL="0">
-              <a:buNone/>
-            </a:pPr>
-            <a:r>
-              <a:rPr lang="en-US" sz="850" dirty="0">
-                <a:solidFill>
-                  <a:srgbClr val="2E7CC4"/>
-                </a:solidFill>
-                <a:latin typeface="Segoe UI Semilight" pitchFamily="34" charset="0"/>
-                <a:ea typeface="Segoe UI Semilight" pitchFamily="34" charset="-122"/>
-                <a:cs typeface="Segoe UI Semilight" pitchFamily="34" charset="-120"/>
-              </a:rPr>
-              <a:t>Adds to Essentials — run the co-sell desk.</a:t>
-            </a:r>
-            <a:endParaRPr lang="en-US" sz="850" dirty="0"/>
-          </a:p>
-        </p:txBody>
-      </p:sp>
-      <p:sp>
-        <p:nvSpPr>
-          <p:cNvPr id="20" name="Text 16"/>
-          <p:cNvSpPr txBox="1"/>
-          <p:nvPr/>
-        </p:nvSpPr>
-        <p:spPr>
-          <a:xfrm>
-            <a:off x="4391660" y="3352800"/>
-            <a:ext cx="3479800" cy="152400"/>
-          </a:xfrm>
-          <a:prstGeom prst="rect">
-            <a:avLst/>
-          </a:prstGeom>
-          <a:noFill/>
-          <a:ln/>
-        </p:spPr>
-        <p:txBody>
-          <a:bodyPr wrap="square" lIns="0" tIns="0" rIns="0" bIns="0" rtlCol="0" anchor="t"/>
-          <a:lstStyle/>
-          <a:p>
-            <a:pPr indent="0" marL="0">
-              <a:buNone/>
-            </a:pPr>
-            <a:r>
-              <a:rPr lang="en-US" sz="800" b="1" spc="110" kern="0" dirty="0">
-                <a:solidFill>
-                  <a:srgbClr val="F36F20"/>
-                </a:solidFill>
-                <a:latin typeface="Segoe UI" pitchFamily="34" charset="0"/>
-                <a:ea typeface="Segoe UI" pitchFamily="34" charset="-122"/>
-                <a:cs typeface="Segoe UI" pitchFamily="34" charset="-120"/>
-              </a:rPr>
-              <a:t>WE COMMIT</a:t>
-            </a:r>
-            <a:endParaRPr lang="en-US" sz="800" dirty="0"/>
-          </a:p>
-        </p:txBody>
-      </p:sp>
-      <p:sp>
-        <p:nvSpPr>
-          <p:cNvPr id="21" name="Text 17"/>
-          <p:cNvSpPr txBox="1"/>
-          <p:nvPr/>
-        </p:nvSpPr>
-        <p:spPr>
-          <a:xfrm>
-            <a:off x="4391660" y="3530600"/>
-            <a:ext cx="3479800" cy="1270000"/>
-          </a:xfrm>
-          <a:prstGeom prst="rect">
-            <a:avLst/>
-          </a:prstGeom>
-          <a:noFill/>
-          <a:ln/>
-        </p:spPr>
-        <p:txBody>
-          <a:bodyPr wrap="square" lIns="0" tIns="0" rIns="0" bIns="0" rtlCol="0" anchor="t"/>
-          <a:lstStyle/>
           <a:p>
             <a:pPr marL="127000" indent="-127000">
               <a:lnSpc>
@@ -6020,16 +5867,169 @@
             <a:r>
               <a:rPr lang="en-US" sz="780" dirty="0">
                 <a:solidFill>
-                  <a:srgbClr val="5B6378"/>
-                </a:solidFill>
-                <a:latin typeface="Segoe UI Semilight" pitchFamily="34" charset="0"/>
-                <a:ea typeface="Segoe UI Semilight" pitchFamily="34" charset="-122"/>
-                <a:cs typeface="Segoe UI Semilight" pitchFamily="34" charset="-120"/>
-              </a:rPr>
-              <a:t>Mid-month pipeline review added to the monthly</a:t>
+                  <a:srgbClr val="9AA2B5"/>
+                </a:solidFill>
+                <a:latin typeface="Segoe UI Semilight" pitchFamily="34" charset="0"/>
+                <a:ea typeface="Segoe UI Semilight" pitchFamily="34" charset="-122"/>
+                <a:cs typeface="Segoe UI Semilight" pitchFamily="34" charset="-120"/>
+              </a:rPr>
+              <a:t>(1) BOX Program listing — unlocking 35k in AWS credits, 35k in cash and 55 leads via a sponsored AWS marketing campaign</a:t>
             </a:r>
             <a:endParaRPr lang="en-US" sz="780" dirty="0"/>
           </a:p>
+        </p:txBody>
+      </p:sp>
+      <p:sp>
+        <p:nvSpPr>
+          <p:cNvPr id="18" name="Text 14"/>
+          <p:cNvSpPr txBox="1"/>
+          <p:nvPr/>
+        </p:nvSpPr>
+        <p:spPr>
+          <a:xfrm>
+            <a:off x="4391660" y="2895600"/>
+            <a:ext cx="3479800" cy="203200"/>
+          </a:xfrm>
+          <a:prstGeom prst="rect">
+            <a:avLst/>
+          </a:prstGeom>
+          <a:noFill/>
+          <a:ln/>
+        </p:spPr>
+        <p:txBody>
+          <a:bodyPr wrap="square" lIns="0" tIns="0" rIns="0" bIns="0" rtlCol="0" anchor="ctr"/>
+          <a:lstStyle/>
+          <a:p>
+            <a:pPr indent="0" marL="0">
+              <a:buNone/>
+            </a:pPr>
+            <a:r>
+              <a:rPr lang="en-US" sz="1200" b="1" dirty="0">
+                <a:solidFill>
+                  <a:srgbClr val="15224B"/>
+                </a:solidFill>
+                <a:latin typeface="Segoe UI" pitchFamily="34" charset="0"/>
+                <a:ea typeface="Segoe UI" pitchFamily="34" charset="-122"/>
+                <a:cs typeface="Segoe UI" pitchFamily="34" charset="-120"/>
+              </a:rPr>
+              <a:t>Growth</a:t>
+            </a:r>
+            <a:pPr indent="0" marL="0">
+              <a:buNone/>
+            </a:pPr>
+            <a:r>
+              <a:rPr lang="en-US" sz="1200" b="1" dirty="0">
+                <a:solidFill>
+                  <a:srgbClr val="F36F20"/>
+                </a:solidFill>
+                <a:latin typeface="Segoe UI" pitchFamily="34" charset="0"/>
+                <a:ea typeface="Segoe UI" pitchFamily="34" charset="-122"/>
+                <a:cs typeface="Segoe UI" pitchFamily="34" charset="-120"/>
+              </a:rPr>
+              <a:t>   $5,000 / mo</a:t>
+            </a:r>
+            <a:endParaRPr lang="en-US" sz="1200" dirty="0"/>
+          </a:p>
+        </p:txBody>
+      </p:sp>
+      <p:sp>
+        <p:nvSpPr>
+          <p:cNvPr id="19" name="Text 15"/>
+          <p:cNvSpPr txBox="1"/>
+          <p:nvPr/>
+        </p:nvSpPr>
+        <p:spPr>
+          <a:xfrm>
+            <a:off x="4391660" y="3136900"/>
+            <a:ext cx="3479800" cy="330200"/>
+          </a:xfrm>
+          <a:prstGeom prst="rect">
+            <a:avLst/>
+          </a:prstGeom>
+          <a:noFill/>
+          <a:ln/>
+        </p:spPr>
+        <p:txBody>
+          <a:bodyPr wrap="square" lIns="0" tIns="0" rIns="0" bIns="0" rtlCol="0" anchor="t"/>
+          <a:lstStyle/>
+          <a:p>
+            <a:pPr indent="0" marL="0">
+              <a:buNone/>
+            </a:pPr>
+            <a:r>
+              <a:rPr lang="en-US" sz="850" dirty="0">
+                <a:solidFill>
+                  <a:srgbClr val="2E7CC4"/>
+                </a:solidFill>
+                <a:latin typeface="Segoe UI Semilight" pitchFamily="34" charset="0"/>
+                <a:ea typeface="Segoe UI Semilight" pitchFamily="34" charset="-122"/>
+                <a:cs typeface="Segoe UI Semilight" pitchFamily="34" charset="-120"/>
+              </a:rPr>
+              <a:t>Adds to Essentials — scale the programs.</a:t>
+            </a:r>
+            <a:endParaRPr lang="en-US" sz="850" dirty="0"/>
+          </a:p>
+        </p:txBody>
+      </p:sp>
+      <p:sp>
+        <p:nvSpPr>
+          <p:cNvPr id="20" name="Text 16"/>
+          <p:cNvSpPr txBox="1"/>
+          <p:nvPr/>
+        </p:nvSpPr>
+        <p:spPr>
+          <a:xfrm>
+            <a:off x="4391660" y="3352800"/>
+            <a:ext cx="3479800" cy="152400"/>
+          </a:xfrm>
+          <a:prstGeom prst="rect">
+            <a:avLst/>
+          </a:prstGeom>
+          <a:noFill/>
+          <a:ln/>
+        </p:spPr>
+        <p:txBody>
+          <a:bodyPr wrap="square" lIns="0" tIns="0" rIns="0" bIns="0" rtlCol="0" anchor="t"/>
+          <a:lstStyle/>
+          <a:p>
+            <a:pPr indent="0" marL="0">
+              <a:buNone/>
+            </a:pPr>
+            <a:r>
+              <a:rPr lang="en-US" sz="800" b="1" spc="110" kern="0" dirty="0">
+                <a:solidFill>
+                  <a:srgbClr val="F36F20"/>
+                </a:solidFill>
+                <a:latin typeface="Segoe UI" pitchFamily="34" charset="0"/>
+                <a:ea typeface="Segoe UI" pitchFamily="34" charset="-122"/>
+                <a:cs typeface="Segoe UI" pitchFamily="34" charset="-120"/>
+              </a:rPr>
+              <a:t>WE COMMIT</a:t>
+            </a:r>
+            <a:endParaRPr lang="en-US" sz="800" dirty="0"/>
+          </a:p>
+        </p:txBody>
+      </p:sp>
+      <p:sp>
+        <p:nvSpPr>
+          <p:cNvPr id="21" name="Text 17"/>
+          <p:cNvSpPr txBox="1"/>
+          <p:nvPr/>
+        </p:nvSpPr>
+        <p:spPr>
+          <a:xfrm>
+            <a:off x="4391660" y="3530600"/>
+            <a:ext cx="3479800" cy="1270000"/>
+          </a:xfrm>
+          <a:prstGeom prst="rect">
+            <a:avLst/>
+          </a:prstGeom>
+          <a:noFill/>
+          <a:ln/>
+        </p:spPr>
+        <p:txBody>
+          <a:bodyPr wrap="square" lIns="0" tIns="0" rIns="0" bIns="0" rtlCol="0" anchor="t"/>
+          <a:lstStyle/>
           <a:p>
             <a:pPr marL="127000" indent="-127000">
               <a:lnSpc>
@@ -6042,7 +6042,7 @@
               <a:buChar char="•"/>
             </a:pPr>
             <a:r>
-              <a:rPr lang="en-US" sz="780" dirty="0">
+              <a:rPr lang="en-US" sz="750" dirty="0">
                 <a:solidFill>
                   <a:srgbClr val="5B6378"/>
                 </a:solidFill>
@@ -6050,9 +6050,9 @@
                 <a:ea typeface="Segoe UI Semilight" pitchFamily="34" charset="-122"/>
                 <a:cs typeface="Segoe UI Semilight" pitchFamily="34" charset="-120"/>
               </a:rPr>
-              <a:t>Co-sell package filed within [N] business days of a complete opportunity record; up to [N] a month, further at [$X]</a:t>
-            </a:r>
-            <a:endParaRPr lang="en-US" sz="780" dirty="0"/>
+              <a:t>Quarterly events organised and run: Lunch &amp; Learn, Immersion Day, Meet-Up</a:t>
+            </a:r>
+            <a:endParaRPr lang="en-US" sz="750" dirty="0"/>
           </a:p>
           <a:p>
             <a:pPr marL="127000" indent="-127000">
@@ -6066,7 +6066,7 @@
               <a:buChar char="•"/>
             </a:pPr>
             <a:r>
-              <a:rPr lang="en-US" sz="780" dirty="0">
+              <a:rPr lang="en-US" sz="750" dirty="0">
                 <a:solidFill>
                   <a:srgbClr val="5B6378"/>
                 </a:solidFill>
@@ -6074,9 +6074,9 @@
                 <a:ea typeface="Segoe UI Semilight" pitchFamily="34" charset="-122"/>
                 <a:cs typeface="Segoe UI Semilight" pitchFamily="34" charset="-120"/>
               </a:rPr>
-              <a:t>Rejection reason written back within [N] business days; one rework where curable from customer information</a:t>
-            </a:r>
-            <a:endParaRPr lang="en-US" sz="780" dirty="0"/>
+              <a:t>Weekly ACE hygiene checks, with exceptions written back</a:t>
+            </a:r>
+            <a:endParaRPr lang="en-US" sz="750" dirty="0"/>
           </a:p>
           <a:p>
             <a:pPr marL="127000" indent="-127000">
@@ -6090,7 +6090,7 @@
               <a:buChar char="•"/>
             </a:pPr>
             <a:r>
-              <a:rPr lang="en-US" sz="780" dirty="0">
+              <a:rPr lang="en-US" sz="750" dirty="0">
                 <a:solidFill>
                   <a:srgbClr val="5B6378"/>
                 </a:solidFill>
@@ -6098,71 +6098,10 @@
                 <a:ea typeface="Segoe UI Semilight" pitchFamily="34" charset="-122"/>
                 <a:cs typeface="Segoe UI Semilight" pitchFamily="34" charset="-120"/>
               </a:rPr>
-              <a:t>Monthly written update to the ISV’s AWS PDM and account team</a:t>
-            </a:r>
-            <a:endParaRPr lang="en-US" sz="780" dirty="0"/>
-          </a:p>
-        </p:txBody>
-      </p:sp>
-      <p:sp>
-        <p:nvSpPr>
-          <p:cNvPr id="22" name="Text 18"/>
-          <p:cNvSpPr txBox="1"/>
-          <p:nvPr/>
-        </p:nvSpPr>
-        <p:spPr>
-          <a:xfrm>
-            <a:off x="4391660" y="4851400"/>
-            <a:ext cx="3479800" cy="152400"/>
-          </a:xfrm>
-          <a:prstGeom prst="rect">
-            <a:avLst/>
-          </a:prstGeom>
-          <a:noFill/>
-          <a:ln/>
-        </p:spPr>
-        <p:txBody>
-          <a:bodyPr wrap="square" lIns="0" tIns="0" rIns="0" bIns="0" rtlCol="0" anchor="t"/>
-          <a:lstStyle/>
-          <a:p>
-            <a:pPr indent="0" marL="0">
-              <a:buNone/>
-            </a:pPr>
-            <a:r>
-              <a:rPr lang="en-US" sz="800" b="1" spc="110" kern="0" dirty="0">
-                <a:solidFill>
-                  <a:srgbClr val="9AA2B5"/>
-                </a:solidFill>
-                <a:latin typeface="Segoe UI" pitchFamily="34" charset="0"/>
-                <a:ea typeface="Segoe UI" pitchFamily="34" charset="-122"/>
-                <a:cs typeface="Segoe UI" pitchFamily="34" charset="-120"/>
-              </a:rPr>
-              <a:t>WE TARGET</a:t>
-            </a:r>
-            <a:endParaRPr lang="en-US" sz="800" dirty="0"/>
-          </a:p>
-        </p:txBody>
-      </p:sp>
-      <p:sp>
-        <p:nvSpPr>
-          <p:cNvPr id="23" name="Text 19"/>
-          <p:cNvSpPr txBox="1"/>
-          <p:nvPr/>
-        </p:nvSpPr>
-        <p:spPr>
-          <a:xfrm>
-            <a:off x="4391660" y="5029200"/>
-            <a:ext cx="3479800" cy="584200"/>
-          </a:xfrm>
-          <a:prstGeom prst="rect">
-            <a:avLst/>
-          </a:prstGeom>
-          <a:noFill/>
-          <a:ln/>
-        </p:spPr>
-        <p:txBody>
-          <a:bodyPr wrap="square" lIns="0" tIns="0" rIns="0" bIns="0" rtlCol="0" anchor="t"/>
-          <a:lstStyle/>
+              <a:t>Funding applications prepared and filed</a:t>
+            </a:r>
+            <a:endParaRPr lang="en-US" sz="750" dirty="0"/>
+          </a:p>
           <a:p>
             <a:pPr marL="127000" indent="-127000">
               <a:lnSpc>
@@ -6175,18 +6114,79 @@
               <a:buChar char="•"/>
             </a:pPr>
             <a:r>
-              <a:rPr lang="en-US" sz="780" dirty="0">
+              <a:rPr lang="en-US" sz="750" dirty="0">
+                <a:solidFill>
+                  <a:srgbClr val="5B6378"/>
+                </a:solidFill>
+                <a:latin typeface="Segoe UI Semilight" pitchFamily="34" charset="0"/>
+                <a:ea typeface="Segoe UI Semilight" pitchFamily="34" charset="-122"/>
+                <a:cs typeface="Segoe UI Semilight" pitchFamily="34" charset="-120"/>
+              </a:rPr>
+              <a:t>Up to (3) Competency and (3) BOX Program listing submissions prepared and filed</a:t>
+            </a:r>
+            <a:endParaRPr lang="en-US" sz="750" dirty="0"/>
+          </a:p>
+        </p:txBody>
+      </p:sp>
+      <p:sp>
+        <p:nvSpPr>
+          <p:cNvPr id="22" name="Text 18"/>
+          <p:cNvSpPr txBox="1"/>
+          <p:nvPr/>
+        </p:nvSpPr>
+        <p:spPr>
+          <a:xfrm>
+            <a:off x="4391660" y="4851400"/>
+            <a:ext cx="3479800" cy="152400"/>
+          </a:xfrm>
+          <a:prstGeom prst="rect">
+            <a:avLst/>
+          </a:prstGeom>
+          <a:noFill/>
+          <a:ln/>
+        </p:spPr>
+        <p:txBody>
+          <a:bodyPr wrap="square" lIns="0" tIns="0" rIns="0" bIns="0" rtlCol="0" anchor="t"/>
+          <a:lstStyle/>
+          <a:p>
+            <a:pPr indent="0" marL="0">
+              <a:buNone/>
+            </a:pPr>
+            <a:r>
+              <a:rPr lang="en-US" sz="800" b="1" spc="110" kern="0" dirty="0">
                 <a:solidFill>
                   <a:srgbClr val="9AA2B5"/>
                 </a:solidFill>
-                <a:latin typeface="Segoe UI Semilight" pitchFamily="34" charset="0"/>
-                <a:ea typeface="Segoe UI Semilight" pitchFamily="34" charset="-122"/>
-                <a:cs typeface="Segoe UI Semilight" pitchFamily="34" charset="-120"/>
-              </a:rPr>
-              <a:t>[N] ACE opportunities accepted — acceptance is AWS’s decision</a:t>
-            </a:r>
-            <a:endParaRPr lang="en-US" sz="780" dirty="0"/>
-          </a:p>
+                <a:latin typeface="Segoe UI" pitchFamily="34" charset="0"/>
+                <a:ea typeface="Segoe UI" pitchFamily="34" charset="-122"/>
+                <a:cs typeface="Segoe UI" pitchFamily="34" charset="-120"/>
+              </a:rPr>
+              <a:t>WE TARGET</a:t>
+            </a:r>
+            <a:endParaRPr lang="en-US" sz="800" dirty="0"/>
+          </a:p>
+        </p:txBody>
+      </p:sp>
+      <p:sp>
+        <p:nvSpPr>
+          <p:cNvPr id="23" name="Text 19"/>
+          <p:cNvSpPr txBox="1"/>
+          <p:nvPr/>
+        </p:nvSpPr>
+        <p:spPr>
+          <a:xfrm>
+            <a:off x="4391660" y="5029200"/>
+            <a:ext cx="3479800" cy="584200"/>
+          </a:xfrm>
+          <a:prstGeom prst="rect">
+            <a:avLst/>
+          </a:prstGeom>
+          <a:noFill/>
+          <a:ln/>
+        </p:spPr>
+        <p:txBody>
+          <a:bodyPr wrap="square" lIns="0" tIns="0" rIns="0" bIns="0" rtlCol="0" anchor="t"/>
+          <a:lstStyle/>
           <a:p>
             <a:pPr marL="127000" indent="-127000">
               <a:lnSpc>
@@ -6207,7 +6207,7 @@
                 <a:ea typeface="Segoe UI Semilight" pitchFamily="34" charset="-122"/>
                 <a:cs typeface="Segoe UI Semilight" pitchFamily="34" charset="-120"/>
               </a:rPr>
-              <a:t>[$X] AWS-attributed pipeline created</a:t>
+              <a:t>ISV-A acceptance, and up to (3) Competency acceptances</a:t>
             </a:r>
             <a:endParaRPr lang="en-US" sz="780" dirty="0"/>
           </a:p>
@@ -6231,163 +6231,10 @@
                 <a:ea typeface="Segoe UI Semilight" pitchFamily="34" charset="-122"/>
                 <a:cs typeface="Segoe UI Semilight" pitchFamily="34" charset="-120"/>
               </a:rPr>
-              <a:t>[N] first meetings sourced through AWS</a:t>
+              <a:t>Up to (3) BOX Program listings approved</a:t>
             </a:r>
             <a:endParaRPr lang="en-US" sz="780" dirty="0"/>
           </a:p>
-        </p:txBody>
-      </p:sp>
-      <p:sp>
-        <p:nvSpPr>
-          <p:cNvPr id="24" name="Text 20"/>
-          <p:cNvSpPr txBox="1"/>
-          <p:nvPr/>
-        </p:nvSpPr>
-        <p:spPr>
-          <a:xfrm>
-            <a:off x="8125460" y="2895600"/>
-            <a:ext cx="3479800" cy="203200"/>
-          </a:xfrm>
-          <a:prstGeom prst="rect">
-            <a:avLst/>
-          </a:prstGeom>
-          <a:noFill/>
-          <a:ln/>
-        </p:spPr>
-        <p:txBody>
-          <a:bodyPr wrap="square" lIns="0" tIns="0" rIns="0" bIns="0" rtlCol="0" anchor="ctr"/>
-          <a:lstStyle/>
-          <a:p>
-            <a:pPr indent="0" marL="0">
-              <a:buNone/>
-            </a:pPr>
-            <a:r>
-              <a:rPr lang="en-US" sz="1200" b="1" dirty="0">
-                <a:solidFill>
-                  <a:srgbClr val="15224B"/>
-                </a:solidFill>
-                <a:latin typeface="Segoe UI" pitchFamily="34" charset="0"/>
-                <a:ea typeface="Segoe UI" pitchFamily="34" charset="-122"/>
-                <a:cs typeface="Segoe UI" pitchFamily="34" charset="-120"/>
-              </a:rPr>
-              <a:t>Professional</a:t>
-            </a:r>
-            <a:pPr indent="0" marL="0">
-              <a:buNone/>
-            </a:pPr>
-            <a:r>
-              <a:rPr lang="en-US" sz="1200" b="1" dirty="0">
-                <a:solidFill>
-                  <a:srgbClr val="F36F20"/>
-                </a:solidFill>
-                <a:latin typeface="Segoe UI" pitchFamily="34" charset="0"/>
-                <a:ea typeface="Segoe UI" pitchFamily="34" charset="-122"/>
-                <a:cs typeface="Segoe UI" pitchFamily="34" charset="-120"/>
-              </a:rPr>
-              <a:t>   $7,500 / mo</a:t>
-            </a:r>
-            <a:endParaRPr lang="en-US" sz="1200" dirty="0"/>
-          </a:p>
-        </p:txBody>
-      </p:sp>
-      <p:sp>
-        <p:nvSpPr>
-          <p:cNvPr id="25" name="Text 21"/>
-          <p:cNvSpPr txBox="1"/>
-          <p:nvPr/>
-        </p:nvSpPr>
-        <p:spPr>
-          <a:xfrm>
-            <a:off x="8125460" y="3136900"/>
-            <a:ext cx="3479800" cy="330200"/>
-          </a:xfrm>
-          <a:prstGeom prst="rect">
-            <a:avLst/>
-          </a:prstGeom>
-          <a:noFill/>
-          <a:ln/>
-        </p:spPr>
-        <p:txBody>
-          <a:bodyPr wrap="square" lIns="0" tIns="0" rIns="0" bIns="0" rtlCol="0" anchor="t"/>
-          <a:lstStyle/>
-          <a:p>
-            <a:pPr indent="0" marL="0">
-              <a:buNone/>
-            </a:pPr>
-            <a:r>
-              <a:rPr lang="en-US" sz="850" dirty="0">
-                <a:solidFill>
-                  <a:srgbClr val="2E7CC4"/>
-                </a:solidFill>
-                <a:latin typeface="Segoe UI Semilight" pitchFamily="34" charset="0"/>
-                <a:ea typeface="Segoe UI Semilight" pitchFamily="34" charset="-122"/>
-                <a:cs typeface="Segoe UI Semilight" pitchFamily="34" charset="-120"/>
-              </a:rPr>
-              <a:t>Adds to Growth — run the deal desk.</a:t>
-            </a:r>
-            <a:endParaRPr lang="en-US" sz="850" dirty="0"/>
-          </a:p>
-        </p:txBody>
-      </p:sp>
-      <p:sp>
-        <p:nvSpPr>
-          <p:cNvPr id="26" name="Text 22"/>
-          <p:cNvSpPr txBox="1"/>
-          <p:nvPr/>
-        </p:nvSpPr>
-        <p:spPr>
-          <a:xfrm>
-            <a:off x="8125460" y="3352800"/>
-            <a:ext cx="3479800" cy="152400"/>
-          </a:xfrm>
-          <a:prstGeom prst="rect">
-            <a:avLst/>
-          </a:prstGeom>
-          <a:noFill/>
-          <a:ln/>
-        </p:spPr>
-        <p:txBody>
-          <a:bodyPr wrap="square" lIns="0" tIns="0" rIns="0" bIns="0" rtlCol="0" anchor="t"/>
-          <a:lstStyle/>
-          <a:p>
-            <a:pPr indent="0" marL="0">
-              <a:buNone/>
-            </a:pPr>
-            <a:r>
-              <a:rPr lang="en-US" sz="800" b="1" spc="110" kern="0" dirty="0">
-                <a:solidFill>
-                  <a:srgbClr val="F36F20"/>
-                </a:solidFill>
-                <a:latin typeface="Segoe UI" pitchFamily="34" charset="0"/>
-                <a:ea typeface="Segoe UI" pitchFamily="34" charset="-122"/>
-                <a:cs typeface="Segoe UI" pitchFamily="34" charset="-120"/>
-              </a:rPr>
-              <a:t>WE COMMIT</a:t>
-            </a:r>
-            <a:endParaRPr lang="en-US" sz="800" dirty="0"/>
-          </a:p>
-        </p:txBody>
-      </p:sp>
-      <p:sp>
-        <p:nvSpPr>
-          <p:cNvPr id="27" name="Text 23"/>
-          <p:cNvSpPr txBox="1"/>
-          <p:nvPr/>
-        </p:nvSpPr>
-        <p:spPr>
-          <a:xfrm>
-            <a:off x="8125460" y="3530600"/>
-            <a:ext cx="3479800" cy="1270000"/>
-          </a:xfrm>
-          <a:prstGeom prst="rect">
-            <a:avLst/>
-          </a:prstGeom>
-          <a:noFill/>
-          <a:ln/>
-        </p:spPr>
-        <p:txBody>
-          <a:bodyPr wrap="square" lIns="0" tIns="0" rIns="0" bIns="0" rtlCol="0" anchor="t"/>
-          <a:lstStyle/>
           <a:p>
             <a:pPr marL="127000" indent="-127000">
               <a:lnSpc>
@@ -6402,16 +6249,169 @@
             <a:r>
               <a:rPr lang="en-US" sz="780" dirty="0">
                 <a:solidFill>
-                  <a:srgbClr val="5B6378"/>
-                </a:solidFill>
-                <a:latin typeface="Segoe UI Semilight" pitchFamily="34" charset="0"/>
-                <a:ea typeface="Segoe UI Semilight" pitchFamily="34" charset="-122"/>
-                <a:cs typeface="Segoe UI Semilight" pitchFamily="34" charset="-120"/>
-              </a:rPr>
-              <a:t>Private offer terms drafted within [N] business days of a complete, priced, customer-approved request, and submitted to Automatum for issue; up to [N] a month</a:t>
+                  <a:srgbClr val="9AA2B5"/>
+                </a:solidFill>
+                <a:latin typeface="Segoe UI Semilight" pitchFamily="34" charset="0"/>
+                <a:ea typeface="Segoe UI Semilight" pitchFamily="34" charset="-122"/>
+                <a:cs typeface="Segoe UI Semilight" pitchFamily="34" charset="-120"/>
+              </a:rPr>
+              <a:t>55+ leads via sponsored AWS marketing campaigns</a:t>
             </a:r>
             <a:endParaRPr lang="en-US" sz="780" dirty="0"/>
           </a:p>
+        </p:txBody>
+      </p:sp>
+      <p:sp>
+        <p:nvSpPr>
+          <p:cNvPr id="24" name="Text 20"/>
+          <p:cNvSpPr txBox="1"/>
+          <p:nvPr/>
+        </p:nvSpPr>
+        <p:spPr>
+          <a:xfrm>
+            <a:off x="8125460" y="2895600"/>
+            <a:ext cx="3479800" cy="203200"/>
+          </a:xfrm>
+          <a:prstGeom prst="rect">
+            <a:avLst/>
+          </a:prstGeom>
+          <a:noFill/>
+          <a:ln/>
+        </p:spPr>
+        <p:txBody>
+          <a:bodyPr wrap="square" lIns="0" tIns="0" rIns="0" bIns="0" rtlCol="0" anchor="ctr"/>
+          <a:lstStyle/>
+          <a:p>
+            <a:pPr indent="0" marL="0">
+              <a:buNone/>
+            </a:pPr>
+            <a:r>
+              <a:rPr lang="en-US" sz="1200" b="1" dirty="0">
+                <a:solidFill>
+                  <a:srgbClr val="15224B"/>
+                </a:solidFill>
+                <a:latin typeface="Segoe UI" pitchFamily="34" charset="0"/>
+                <a:ea typeface="Segoe UI" pitchFamily="34" charset="-122"/>
+                <a:cs typeface="Segoe UI" pitchFamily="34" charset="-120"/>
+              </a:rPr>
+              <a:t>Professional</a:t>
+            </a:r>
+            <a:pPr indent="0" marL="0">
+              <a:buNone/>
+            </a:pPr>
+            <a:r>
+              <a:rPr lang="en-US" sz="1200" b="1" dirty="0">
+                <a:solidFill>
+                  <a:srgbClr val="F36F20"/>
+                </a:solidFill>
+                <a:latin typeface="Segoe UI" pitchFamily="34" charset="0"/>
+                <a:ea typeface="Segoe UI" pitchFamily="34" charset="-122"/>
+                <a:cs typeface="Segoe UI" pitchFamily="34" charset="-120"/>
+              </a:rPr>
+              <a:t>   $7,500 / mo</a:t>
+            </a:r>
+            <a:endParaRPr lang="en-US" sz="1200" dirty="0"/>
+          </a:p>
+        </p:txBody>
+      </p:sp>
+      <p:sp>
+        <p:nvSpPr>
+          <p:cNvPr id="25" name="Text 21"/>
+          <p:cNvSpPr txBox="1"/>
+          <p:nvPr/>
+        </p:nvSpPr>
+        <p:spPr>
+          <a:xfrm>
+            <a:off x="8125460" y="3136900"/>
+            <a:ext cx="3479800" cy="330200"/>
+          </a:xfrm>
+          <a:prstGeom prst="rect">
+            <a:avLst/>
+          </a:prstGeom>
+          <a:noFill/>
+          <a:ln/>
+        </p:spPr>
+        <p:txBody>
+          <a:bodyPr wrap="square" lIns="0" tIns="0" rIns="0" bIns="0" rtlCol="0" anchor="t"/>
+          <a:lstStyle/>
+          <a:p>
+            <a:pPr indent="0" marL="0">
+              <a:buNone/>
+            </a:pPr>
+            <a:r>
+              <a:rPr lang="en-US" sz="850" dirty="0">
+                <a:solidFill>
+                  <a:srgbClr val="2E7CC4"/>
+                </a:solidFill>
+                <a:latin typeface="Segoe UI Semilight" pitchFamily="34" charset="0"/>
+                <a:ea typeface="Segoe UI Semilight" pitchFamily="34" charset="-122"/>
+                <a:cs typeface="Segoe UI Semilight" pitchFamily="34" charset="-120"/>
+              </a:rPr>
+              <a:t>Adds to Growth — open the AWS field.</a:t>
+            </a:r>
+            <a:endParaRPr lang="en-US" sz="850" dirty="0"/>
+          </a:p>
+        </p:txBody>
+      </p:sp>
+      <p:sp>
+        <p:nvSpPr>
+          <p:cNvPr id="26" name="Text 22"/>
+          <p:cNvSpPr txBox="1"/>
+          <p:nvPr/>
+        </p:nvSpPr>
+        <p:spPr>
+          <a:xfrm>
+            <a:off x="8125460" y="3352800"/>
+            <a:ext cx="3479800" cy="152400"/>
+          </a:xfrm>
+          <a:prstGeom prst="rect">
+            <a:avLst/>
+          </a:prstGeom>
+          <a:noFill/>
+          <a:ln/>
+        </p:spPr>
+        <p:txBody>
+          <a:bodyPr wrap="square" lIns="0" tIns="0" rIns="0" bIns="0" rtlCol="0" anchor="t"/>
+          <a:lstStyle/>
+          <a:p>
+            <a:pPr indent="0" marL="0">
+              <a:buNone/>
+            </a:pPr>
+            <a:r>
+              <a:rPr lang="en-US" sz="800" b="1" spc="110" kern="0" dirty="0">
+                <a:solidFill>
+                  <a:srgbClr val="F36F20"/>
+                </a:solidFill>
+                <a:latin typeface="Segoe UI" pitchFamily="34" charset="0"/>
+                <a:ea typeface="Segoe UI" pitchFamily="34" charset="-122"/>
+                <a:cs typeface="Segoe UI" pitchFamily="34" charset="-120"/>
+              </a:rPr>
+              <a:t>WE COMMIT</a:t>
+            </a:r>
+            <a:endParaRPr lang="en-US" sz="800" dirty="0"/>
+          </a:p>
+        </p:txBody>
+      </p:sp>
+      <p:sp>
+        <p:nvSpPr>
+          <p:cNvPr id="27" name="Text 23"/>
+          <p:cNvSpPr txBox="1"/>
+          <p:nvPr/>
+        </p:nvSpPr>
+        <p:spPr>
+          <a:xfrm>
+            <a:off x="8125460" y="3530600"/>
+            <a:ext cx="3479800" cy="1270000"/>
+          </a:xfrm>
+          <a:prstGeom prst="rect">
+            <a:avLst/>
+          </a:prstGeom>
+          <a:noFill/>
+          <a:ln/>
+        </p:spPr>
+        <p:txBody>
+          <a:bodyPr wrap="square" lIns="0" tIns="0" rIns="0" bIns="0" rtlCol="0" anchor="t"/>
+          <a:lstStyle/>
           <a:p>
             <a:pPr marL="127000" indent="-127000">
               <a:lnSpc>
@@ -6424,7 +6424,7 @@
               <a:buChar char="•"/>
             </a:pPr>
             <a:r>
-              <a:rPr lang="en-US" sz="780" dirty="0">
+              <a:rPr lang="en-US" sz="750" dirty="0">
                 <a:solidFill>
                   <a:srgbClr val="5B6378"/>
                 </a:solidFill>
@@ -6432,9 +6432,9 @@
                 <a:ea typeface="Segoe UI Semilight" pitchFamily="34" charset="-122"/>
                 <a:cs typeface="Segoe UI Semilight" pitchFamily="34" charset="-120"/>
               </a:rPr>
-              <a:t>Weekly deal review with the ISV’s sales lead; written next action on every open opportunity</a:t>
-            </a:r>
-            <a:endParaRPr lang="en-US" sz="780" dirty="0"/>
+              <a:t>Applications prepared and filed across all applicable Competency programs</a:t>
+            </a:r>
+            <a:endParaRPr lang="en-US" sz="750" dirty="0"/>
           </a:p>
           <a:p>
             <a:pPr marL="127000" indent="-127000">
@@ -6448,7 +6448,7 @@
               <a:buChar char="•"/>
             </a:pPr>
             <a:r>
-              <a:rPr lang="en-US" sz="780" dirty="0">
+              <a:rPr lang="en-US" sz="750" dirty="0">
                 <a:solidFill>
                   <a:srgbClr val="5B6378"/>
                 </a:solidFill>
@@ -6456,9 +6456,9 @@
                 <a:ea typeface="Segoe UI Semilight" pitchFamily="34" charset="-122"/>
                 <a:cs typeface="Segoe UI Semilight" pitchFamily="34" charset="-120"/>
               </a:rPr>
-              <a:t>ACE records updated within [N] business days of notification</a:t>
-            </a:r>
-            <a:endParaRPr lang="en-US" sz="780" dirty="0"/>
+              <a:t>BOX Program listing submissions filed with no cap</a:t>
+            </a:r>
+            <a:endParaRPr lang="en-US" sz="750" dirty="0"/>
           </a:p>
           <a:p>
             <a:pPr marL="127000" indent="-127000">
@@ -6472,7 +6472,7 @@
               <a:buChar char="•"/>
             </a:pPr>
             <a:r>
-              <a:rPr lang="en-US" sz="780" dirty="0">
+              <a:rPr lang="en-US" sz="750" dirty="0">
                 <a:solidFill>
                   <a:srgbClr val="5B6378"/>
                 </a:solidFill>
@@ -6480,71 +6480,10 @@
                 <a:ea typeface="Segoe UI Semilight" pitchFamily="34" charset="-122"/>
                 <a:cs typeface="Segoe UI Semilight" pitchFamily="34" charset="-120"/>
               </a:rPr>
-              <a:t>[N] business-hour response on deal-blocking requests within [coverage window, time zone]</a:t>
-            </a:r>
-            <a:endParaRPr lang="en-US" sz="780" dirty="0"/>
-          </a:p>
-        </p:txBody>
-      </p:sp>
-      <p:sp>
-        <p:nvSpPr>
-          <p:cNvPr id="28" name="Text 24"/>
-          <p:cNvSpPr txBox="1"/>
-          <p:nvPr/>
-        </p:nvSpPr>
-        <p:spPr>
-          <a:xfrm>
-            <a:off x="8125460" y="4851400"/>
-            <a:ext cx="3479800" cy="152400"/>
-          </a:xfrm>
-          <a:prstGeom prst="rect">
-            <a:avLst/>
-          </a:prstGeom>
-          <a:noFill/>
-          <a:ln/>
-        </p:spPr>
-        <p:txBody>
-          <a:bodyPr wrap="square" lIns="0" tIns="0" rIns="0" bIns="0" rtlCol="0" anchor="t"/>
-          <a:lstStyle/>
-          <a:p>
-            <a:pPr indent="0" marL="0">
-              <a:buNone/>
-            </a:pPr>
-            <a:r>
-              <a:rPr lang="en-US" sz="800" b="1" spc="110" kern="0" dirty="0">
-                <a:solidFill>
-                  <a:srgbClr val="9AA2B5"/>
-                </a:solidFill>
-                <a:latin typeface="Segoe UI" pitchFamily="34" charset="0"/>
-                <a:ea typeface="Segoe UI" pitchFamily="34" charset="-122"/>
-                <a:cs typeface="Segoe UI" pitchFamily="34" charset="-120"/>
-              </a:rPr>
-              <a:t>WE TARGET</a:t>
-            </a:r>
-            <a:endParaRPr lang="en-US" sz="800" dirty="0"/>
-          </a:p>
-        </p:txBody>
-      </p:sp>
-      <p:sp>
-        <p:nvSpPr>
-          <p:cNvPr id="29" name="Text 25"/>
-          <p:cNvSpPr txBox="1"/>
-          <p:nvPr/>
-        </p:nvSpPr>
-        <p:spPr>
-          <a:xfrm>
-            <a:off x="8125460" y="5029200"/>
-            <a:ext cx="3479800" cy="584200"/>
-          </a:xfrm>
-          <a:prstGeom prst="rect">
-            <a:avLst/>
-          </a:prstGeom>
-          <a:noFill/>
-          <a:ln/>
-        </p:spPr>
-        <p:txBody>
-          <a:bodyPr wrap="square" lIns="0" tIns="0" rIns="0" bIns="0" rtlCol="0" anchor="t"/>
-          <a:lstStyle/>
+              <a:t>(4) Account Executive and (2) Partner Sales Manager introductions made and logged</a:t>
+            </a:r>
+            <a:endParaRPr lang="en-US" sz="750" dirty="0"/>
+          </a:p>
           <a:p>
             <a:pPr marL="127000" indent="-127000">
               <a:lnSpc>
@@ -6557,18 +6496,79 @@
               <a:buChar char="•"/>
             </a:pPr>
             <a:r>
-              <a:rPr lang="en-US" sz="780" dirty="0">
+              <a:rPr lang="en-US" sz="750" dirty="0">
+                <a:solidFill>
+                  <a:srgbClr val="5B6378"/>
+                </a:solidFill>
+                <a:latin typeface="Segoe UI Semilight" pitchFamily="34" charset="0"/>
+                <a:ea typeface="Segoe UI Semilight" pitchFamily="34" charset="-122"/>
+                <a:cs typeface="Segoe UI Semilight" pitchFamily="34" charset="-120"/>
+              </a:rPr>
+              <a:t>(1) Segment Leader introduction made and logged</a:t>
+            </a:r>
+            <a:endParaRPr lang="en-US" sz="750" dirty="0"/>
+          </a:p>
+        </p:txBody>
+      </p:sp>
+      <p:sp>
+        <p:nvSpPr>
+          <p:cNvPr id="28" name="Text 24"/>
+          <p:cNvSpPr txBox="1"/>
+          <p:nvPr/>
+        </p:nvSpPr>
+        <p:spPr>
+          <a:xfrm>
+            <a:off x="8125460" y="4851400"/>
+            <a:ext cx="3479800" cy="152400"/>
+          </a:xfrm>
+          <a:prstGeom prst="rect">
+            <a:avLst/>
+          </a:prstGeom>
+          <a:noFill/>
+          <a:ln/>
+        </p:spPr>
+        <p:txBody>
+          <a:bodyPr wrap="square" lIns="0" tIns="0" rIns="0" bIns="0" rtlCol="0" anchor="t"/>
+          <a:lstStyle/>
+          <a:p>
+            <a:pPr indent="0" marL="0">
+              <a:buNone/>
+            </a:pPr>
+            <a:r>
+              <a:rPr lang="en-US" sz="800" b="1" spc="110" kern="0" dirty="0">
                 <a:solidFill>
                   <a:srgbClr val="9AA2B5"/>
                 </a:solidFill>
-                <a:latin typeface="Segoe UI Semilight" pitchFamily="34" charset="0"/>
-                <a:ea typeface="Segoe UI Semilight" pitchFamily="34" charset="-122"/>
-                <a:cs typeface="Segoe UI Semilight" pitchFamily="34" charset="-120"/>
-              </a:rPr>
-              <a:t>[N] private offers issued; [$X] transacted</a:t>
-            </a:r>
-            <a:endParaRPr lang="en-US" sz="780" dirty="0"/>
-          </a:p>
+                <a:latin typeface="Segoe UI" pitchFamily="34" charset="0"/>
+                <a:ea typeface="Segoe UI" pitchFamily="34" charset="-122"/>
+                <a:cs typeface="Segoe UI" pitchFamily="34" charset="-120"/>
+              </a:rPr>
+              <a:t>WE TARGET</a:t>
+            </a:r>
+            <a:endParaRPr lang="en-US" sz="800" dirty="0"/>
+          </a:p>
+        </p:txBody>
+      </p:sp>
+      <p:sp>
+        <p:nvSpPr>
+          <p:cNvPr id="29" name="Text 25"/>
+          <p:cNvSpPr txBox="1"/>
+          <p:nvPr/>
+        </p:nvSpPr>
+        <p:spPr>
+          <a:xfrm>
+            <a:off x="8125460" y="5029200"/>
+            <a:ext cx="3479800" cy="584200"/>
+          </a:xfrm>
+          <a:prstGeom prst="rect">
+            <a:avLst/>
+          </a:prstGeom>
+          <a:noFill/>
+          <a:ln/>
+        </p:spPr>
+        <p:txBody>
+          <a:bodyPr wrap="square" lIns="0" tIns="0" rIns="0" bIns="0" rtlCol="0" anchor="t"/>
+          <a:lstStyle/>
           <a:p>
             <a:pPr marL="127000" indent="-127000">
               <a:lnSpc>
@@ -6589,7 +6589,7 @@
                 <a:ea typeface="Segoe UI Semilight" pitchFamily="34" charset="-122"/>
                 <a:cs typeface="Segoe UI Semilight" pitchFamily="34" charset="-120"/>
               </a:rPr>
-              <a:t>[N] opportunities Closed Won — the close sits with the ISV’s sales team</a:t>
+              <a:t>Acceptance across all applicable Competency programs</a:t>
             </a:r>
             <a:endParaRPr lang="en-US" sz="780" dirty="0"/>
           </a:p>
@@ -6613,7 +6613,31 @@
                 <a:ea typeface="Segoe UI Semilight" pitchFamily="34" charset="-122"/>
                 <a:cs typeface="Segoe UI Semilight" pitchFamily="34" charset="-120"/>
               </a:rPr>
-              <a:t>[N] AWS funding requests approved — AWS decides</a:t>
+              <a:t>Listings uncapped, subject to AWS approval</a:t>
+            </a:r>
+            <a:endParaRPr lang="en-US" sz="780" dirty="0"/>
+          </a:p>
+          <a:p>
+            <a:pPr marL="127000" indent="-127000">
+              <a:lnSpc>
+                <a:spcPct val="112000"/>
+              </a:lnSpc>
+              <a:spcAft>
+                <a:spcPts val="300"/>
+              </a:spcAft>
+              <a:buSzPct val="100000"/>
+              <a:buChar char="•"/>
+            </a:pPr>
+            <a:r>
+              <a:rPr lang="en-US" sz="780" dirty="0">
+                <a:solidFill>
+                  <a:srgbClr val="9AA2B5"/>
+                </a:solidFill>
+                <a:latin typeface="Segoe UI Semilight" pitchFamily="34" charset="0"/>
+                <a:ea typeface="Segoe UI Semilight" pitchFamily="34" charset="-122"/>
+                <a:cs typeface="Segoe UI Semilight" pitchFamily="34" charset="-120"/>
+              </a:rPr>
+              <a:t>Meetings held and opportunities sourced from the introductions</a:t>
             </a:r>
             <a:endParaRPr lang="en-US" sz="780" dirty="0"/>
           </a:p>
@@ -6688,7 +6712,7 @@
                 <a:ea typeface="Segoe UI Semilight" pitchFamily="34" charset="-122"/>
                 <a:cs typeface="Segoe UI Semilight" pitchFamily="34" charset="-120"/>
               </a:rPr>
-              <a:t>    Automatum issues every offer. [Partner Central instance for ACE filing — to confirm.] All bracketed figures gate on the staffing model.</a:t>
+              <a:t>    The ISV’s OWN BOX Program benefits, which this retainer drives them toward — separate from the four Automatum × OBP solutions and their milestones. [“BOX Program listing” to be defined; it is not the Accelerator’s Marketplace listing.]</a:t>
             </a:r>
             <a:endParaRPr lang="en-US" sz="1050" dirty="0"/>
           </a:p>
@@ -7298,7 +7322,7 @@
               <a:buChar char="•"/>
             </a:pPr>
             <a:r>
-              <a:rPr lang="en-US" sz="780" dirty="0">
+              <a:rPr lang="en-US" sz="750" dirty="0">
                 <a:solidFill>
                   <a:srgbClr val="5B6378"/>
                 </a:solidFill>
@@ -7308,7 +7332,7 @@
               </a:rPr>
               <a:t>Named operations owner with a named backup; desk open [coverage hours, time zone]</a:t>
             </a:r>
-            <a:endParaRPr lang="en-US" sz="780" dirty="0"/>
+            <a:endParaRPr lang="en-US" sz="750" dirty="0"/>
           </a:p>
           <a:p>
             <a:pPr marL="127000" indent="-127000">
@@ -7322,7 +7346,7 @@
               <a:buChar char="•"/>
             </a:pPr>
             <a:r>
-              <a:rPr lang="en-US" sz="780" dirty="0">
+              <a:rPr lang="en-US" sz="750" dirty="0">
                 <a:solidFill>
                   <a:srgbClr val="5B6378"/>
                 </a:solidFill>
@@ -7332,7 +7356,7 @@
               </a:rPr>
               <a:t>Offers drafted and submitted to Automatum for issue within [N] business days of a complete request; up to [N] a month, further at [$X]</a:t>
             </a:r>
-            <a:endParaRPr lang="en-US" sz="780" dirty="0"/>
+            <a:endParaRPr lang="en-US" sz="750" dirty="0"/>
           </a:p>
           <a:p>
             <a:pPr marL="127000" indent="-127000">
@@ -7346,7 +7370,7 @@
               <a:buChar char="•"/>
             </a:pPr>
             <a:r>
-              <a:rPr lang="en-US" sz="780" dirty="0">
+              <a:rPr lang="en-US" sz="750" dirty="0">
                 <a:solidFill>
                   <a:srgbClr val="5B6378"/>
                 </a:solidFill>
@@ -7356,7 +7380,7 @@
               </a:rPr>
               <a:t>Listing configuration changes submitted to AWS within [N] business days</a:t>
             </a:r>
-            <a:endParaRPr lang="en-US" sz="780" dirty="0"/>
+            <a:endParaRPr lang="en-US" sz="750" dirty="0"/>
           </a:p>
           <a:p>
             <a:pPr marL="127000" indent="-127000">
@@ -7370,7 +7394,7 @@
               <a:buChar char="•"/>
             </a:pPr>
             <a:r>
-              <a:rPr lang="en-US" sz="780" dirty="0">
+              <a:rPr lang="en-US" sz="750" dirty="0">
                 <a:solidFill>
                   <a:srgbClr val="5B6378"/>
                 </a:solidFill>
@@ -7380,7 +7404,7 @@
               </a:rPr>
               <a:t>Monthly operating report on a fixed date, reconciled against AWS statements as published</a:t>
             </a:r>
-            <a:endParaRPr lang="en-US" sz="780" dirty="0"/>
+            <a:endParaRPr lang="en-US" sz="750" dirty="0"/>
           </a:p>
         </p:txBody>
       </p:sp>
@@ -7680,7 +7704,7 @@
               <a:buChar char="•"/>
             </a:pPr>
             <a:r>
-              <a:rPr lang="en-US" sz="780" dirty="0">
+              <a:rPr lang="en-US" sz="750" dirty="0">
                 <a:solidFill>
                   <a:srgbClr val="5B6378"/>
                 </a:solidFill>
@@ -7690,7 +7714,7 @@
               </a:rPr>
               <a:t>Higher band: up to [N] offers a month; integration exceptions listed monthly and cleared within [N] business days</a:t>
             </a:r>
-            <a:endParaRPr lang="en-US" sz="780" dirty="0"/>
+            <a:endParaRPr lang="en-US" sz="750" dirty="0"/>
           </a:p>
           <a:p>
             <a:pPr marL="127000" indent="-127000">
@@ -7704,7 +7728,7 @@
               <a:buChar char="•"/>
             </a:pPr>
             <a:r>
-              <a:rPr lang="en-US" sz="780" dirty="0">
+              <a:rPr lang="en-US" sz="750" dirty="0">
                 <a:solidFill>
                   <a:srgbClr val="5B6378"/>
                 </a:solidFill>
@@ -7714,7 +7738,7 @@
               </a:rPr>
               <a:t>Weekly offer-desk stand-up with the customer’s named sales lead, with written actions</a:t>
             </a:r>
-            <a:endParaRPr lang="en-US" sz="780" dirty="0"/>
+            <a:endParaRPr lang="en-US" sz="750" dirty="0"/>
           </a:p>
           <a:p>
             <a:pPr marL="127000" indent="-127000">
@@ -7728,7 +7752,7 @@
               <a:buChar char="•"/>
             </a:pPr>
             <a:r>
-              <a:rPr lang="en-US" sz="780" dirty="0">
+              <a:rPr lang="en-US" sz="750" dirty="0">
                 <a:solidFill>
                   <a:srgbClr val="5B6378"/>
                 </a:solidFill>
@@ -7738,7 +7762,7 @@
               </a:rPr>
               <a:t>Expiry watch: every agreement flagged [N] days out with a renewal offer drafted</a:t>
             </a:r>
-            <a:endParaRPr lang="en-US" sz="780" dirty="0"/>
+            <a:endParaRPr lang="en-US" sz="750" dirty="0"/>
           </a:p>
           <a:p>
             <a:pPr marL="127000" indent="-127000">
@@ -7752,7 +7776,7 @@
               <a:buChar char="•"/>
             </a:pPr>
             <a:r>
-              <a:rPr lang="en-US" sz="780" dirty="0">
+              <a:rPr lang="en-US" sz="750" dirty="0">
                 <a:solidFill>
                   <a:srgbClr val="5B6378"/>
                 </a:solidFill>
@@ -7762,7 +7786,7 @@
               </a:rPr>
               <a:t>AWS-mandated changes assessed within [N] business days of notice, with an implementation plan issued</a:t>
             </a:r>
-            <a:endParaRPr lang="en-US" sz="780" dirty="0"/>
+            <a:endParaRPr lang="en-US" sz="750" dirty="0"/>
           </a:p>
         </p:txBody>
       </p:sp>
@@ -8062,7 +8086,7 @@
               <a:buChar char="•"/>
             </a:pPr>
             <a:r>
-              <a:rPr lang="en-US" sz="780" dirty="0">
+              <a:rPr lang="en-US" sz="750" dirty="0">
                 <a:solidFill>
                   <a:srgbClr val="5B6378"/>
                 </a:solidFill>
@@ -8072,7 +8096,7 @@
               </a:rPr>
               <a:t>Top band: up to [N] offers a month; same-day drafting and submission for standard offers received before [cut-off time]</a:t>
             </a:r>
-            <a:endParaRPr lang="en-US" sz="780" dirty="0"/>
+            <a:endParaRPr lang="en-US" sz="750" dirty="0"/>
           </a:p>
           <a:p>
             <a:pPr marL="127000" indent="-127000">
@@ -8086,7 +8110,7 @@
               <a:buChar char="•"/>
             </a:pPr>
             <a:r>
-              <a:rPr lang="en-US" sz="780" dirty="0">
+              <a:rPr lang="en-US" sz="750" dirty="0">
                 <a:solidFill>
                   <a:srgbClr val="5B6378"/>
                 </a:solidFill>
@@ -8096,7 +8120,7 @@
               </a:rPr>
               <a:t>Coverage extended to [window, time zone] — this rung’s increment is coverage and response band</a:t>
             </a:r>
-            <a:endParaRPr lang="en-US" sz="780" dirty="0"/>
+            <a:endParaRPr lang="en-US" sz="750" dirty="0"/>
           </a:p>
           <a:p>
             <a:pPr marL="127000" indent="-127000">
@@ -8110,7 +8134,7 @@
               <a:buChar char="•"/>
             </a:pPr>
             <a:r>
-              <a:rPr lang="en-US" sz="780" dirty="0">
+              <a:rPr lang="en-US" sz="750" dirty="0">
                 <a:solidFill>
                   <a:srgbClr val="5B6378"/>
                 </a:solidFill>
@@ -8120,7 +8144,7 @@
               </a:rPr>
               <a:t>Weekly reporting; monthly reconciliation with every variance explained in writing</a:t>
             </a:r>
-            <a:endParaRPr lang="en-US" sz="780" dirty="0"/>
+            <a:endParaRPr lang="en-US" sz="750" dirty="0"/>
           </a:p>
           <a:p>
             <a:pPr marL="127000" indent="-127000">
@@ -8134,7 +8158,7 @@
               <a:buChar char="•"/>
             </a:pPr>
             <a:r>
-              <a:rPr lang="en-US" sz="780" dirty="0">
+              <a:rPr lang="en-US" sz="750" dirty="0">
                 <a:solidFill>
                   <a:srgbClr val="5B6378"/>
                 </a:solidFill>
@@ -8144,7 +8168,7 @@
               </a:rPr>
               <a:t>Quarterly listing engineering review delivered as a written change plan</a:t>
             </a:r>
-            <a:endParaRPr lang="en-US" sz="780" dirty="0"/>
+            <a:endParaRPr lang="en-US" sz="750" dirty="0"/>
           </a:p>
         </p:txBody>
       </p:sp>
@@ -8960,7 +8984,7 @@
               <a:buChar char="•"/>
             </a:pPr>
             <a:r>
-              <a:rPr lang="en-US" sz="780" dirty="0">
+              <a:rPr lang="en-US" sz="750" dirty="0">
                 <a:solidFill>
                   <a:srgbClr val="5B6378"/>
                 </a:solidFill>
@@ -8970,7 +8994,7 @@
               </a:rPr>
               <a:t>Named channel manager at [N] hours, with a named backup</a:t>
             </a:r>
-            <a:endParaRPr lang="en-US" sz="780" dirty="0"/>
+            <a:endParaRPr lang="en-US" sz="750" dirty="0"/>
           </a:p>
           <a:p>
             <a:pPr marL="127000" indent="-127000">
@@ -8984,7 +9008,7 @@
               <a:buChar char="•"/>
             </a:pPr>
             <a:r>
-              <a:rPr lang="en-US" sz="780" dirty="0">
+              <a:rPr lang="en-US" sz="750" dirty="0">
                 <a:solidFill>
                   <a:srgbClr val="5B6378"/>
                 </a:solidFill>
@@ -8994,7 +9018,7 @@
               </a:rPr>
               <a:t>Agreement pack — partner agreement, margin schedule, registration rules — drafted and issued for signature within [N] business days of kickoff</a:t>
             </a:r>
-            <a:endParaRPr lang="en-US" sz="780" dirty="0"/>
+            <a:endParaRPr lang="en-US" sz="750" dirty="0"/>
           </a:p>
           <a:p>
             <a:pPr marL="127000" indent="-127000">
@@ -9008,7 +9032,7 @@
               <a:buChar char="•"/>
             </a:pPr>
             <a:r>
-              <a:rPr lang="en-US" sz="780" dirty="0">
+              <a:rPr lang="en-US" sz="750" dirty="0">
                 <a:solidFill>
                   <a:srgbClr val="5B6378"/>
                 </a:solidFill>
@@ -9018,7 +9042,7 @@
               </a:rPr>
               <a:t>Kiflo portal live within [N] business days of [named customer inputs]; resold by OBP inside the fee, [N] seats included, further at [$Z]</a:t>
             </a:r>
-            <a:endParaRPr lang="en-US" sz="780" dirty="0"/>
+            <a:endParaRPr lang="en-US" sz="750" dirty="0"/>
           </a:p>
           <a:p>
             <a:pPr marL="127000" indent="-127000">
@@ -9032,7 +9056,7 @@
               <a:buChar char="•"/>
             </a:pPr>
             <a:r>
-              <a:rPr lang="en-US" sz="780" dirty="0">
+              <a:rPr lang="en-US" sz="750" dirty="0">
                 <a:solidFill>
                   <a:srgbClr val="5B6378"/>
                 </a:solidFill>
@@ -9042,7 +9066,7 @@
               </a:rPr>
               <a:t>Registration recommendation within [N] business days, plus the customer’s decision logged</a:t>
             </a:r>
-            <a:endParaRPr lang="en-US" sz="780" dirty="0"/>
+            <a:endParaRPr lang="en-US" sz="750" dirty="0"/>
           </a:p>
         </p:txBody>
       </p:sp>
@@ -9342,7 +9366,7 @@
               <a:buChar char="•"/>
             </a:pPr>
             <a:r>
-              <a:rPr lang="en-US" sz="780" dirty="0">
+              <a:rPr lang="en-US" sz="750" dirty="0">
                 <a:solidFill>
                   <a:srgbClr val="5B6378"/>
                 </a:solidFill>
@@ -9352,7 +9376,7 @@
               </a:rPr>
               <a:t>A second partner type in scope; [N] targeted approaches a month across both</a:t>
             </a:r>
-            <a:endParaRPr lang="en-US" sz="780" dirty="0"/>
+            <a:endParaRPr lang="en-US" sz="750" dirty="0"/>
           </a:p>
           <a:p>
             <a:pPr marL="127000" indent="-127000">
@@ -9366,7 +9390,7 @@
               <a:buChar char="•"/>
             </a:pPr>
             <a:r>
-              <a:rPr lang="en-US" sz="780" dirty="0">
+              <a:rPr lang="en-US" sz="750" dirty="0">
                 <a:solidFill>
                   <a:srgbClr val="5B6378"/>
                 </a:solidFill>
@@ -9376,7 +9400,7 @@
               </a:rPr>
               <a:t>Enablement built and run — [N] sessions scheduled and held; attendance not guaranteed</a:t>
             </a:r>
-            <a:endParaRPr lang="en-US" sz="780" dirty="0"/>
+            <a:endParaRPr lang="en-US" sz="750" dirty="0"/>
           </a:p>
           <a:p>
             <a:pPr marL="127000" indent="-127000">
@@ -9390,7 +9414,7 @@
               <a:buChar char="•"/>
             </a:pPr>
             <a:r>
-              <a:rPr lang="en-US" sz="780" dirty="0">
+              <a:rPr lang="en-US" sz="750" dirty="0">
                 <a:solidFill>
                   <a:srgbClr val="5B6378"/>
                 </a:solidFill>
@@ -9400,7 +9424,7 @@
               </a:rPr>
               <a:t>Written activation plan for up to [N] partners, reviewed monthly until first offer</a:t>
             </a:r>
-            <a:endParaRPr lang="en-US" sz="780" dirty="0"/>
+            <a:endParaRPr lang="en-US" sz="750" dirty="0"/>
           </a:p>
           <a:p>
             <a:pPr marL="127000" indent="-127000">
@@ -9414,7 +9438,7 @@
               <a:buChar char="•"/>
             </a:pPr>
             <a:r>
-              <a:rPr lang="en-US" sz="780" dirty="0">
+              <a:rPr lang="en-US" sz="750" dirty="0">
                 <a:solidFill>
                   <a:srgbClr val="5B6378"/>
                 </a:solidFill>
@@ -9424,7 +9448,7 @@
               </a:rPr>
               <a:t>Selling authorization and offer requests submitted to Automatum within [N] business days</a:t>
             </a:r>
-            <a:endParaRPr lang="en-US" sz="780" dirty="0"/>
+            <a:endParaRPr lang="en-US" sz="750" dirty="0"/>
           </a:p>
         </p:txBody>
       </p:sp>
@@ -9724,7 +9748,7 @@
               <a:buChar char="•"/>
             </a:pPr>
             <a:r>
-              <a:rPr lang="en-US" sz="780" dirty="0">
+              <a:rPr lang="en-US" sz="750" dirty="0">
                 <a:solidFill>
                   <a:srgbClr val="5B6378"/>
                 </a:solidFill>
@@ -9734,7 +9758,7 @@
               </a:rPr>
               <a:t>Named deal-desk owner with a stated coverage window</a:t>
             </a:r>
-            <a:endParaRPr lang="en-US" sz="780" dirty="0"/>
+            <a:endParaRPr lang="en-US" sz="750" dirty="0"/>
           </a:p>
           <a:p>
             <a:pPr marL="127000" indent="-127000">
@@ -9748,7 +9772,7 @@
               <a:buChar char="•"/>
             </a:pPr>
             <a:r>
-              <a:rPr lang="en-US" sz="780" dirty="0">
+              <a:rPr lang="en-US" sz="750" dirty="0">
                 <a:solidFill>
                   <a:srgbClr val="5B6378"/>
                 </a:solidFill>
@@ -9758,7 +9782,7 @@
               </a:rPr>
               <a:t>Performance reviews offered monthly to up to [N] issuing partners, with written recovery plans</a:t>
             </a:r>
-            <a:endParaRPr lang="en-US" sz="780" dirty="0"/>
+            <a:endParaRPr lang="en-US" sz="750" dirty="0"/>
           </a:p>
           <a:p>
             <a:pPr marL="127000" indent="-127000">
@@ -9772,7 +9796,7 @@
               <a:buChar char="•"/>
             </a:pPr>
             <a:r>
-              <a:rPr lang="en-US" sz="780" dirty="0">
+              <a:rPr lang="en-US" sz="750" dirty="0">
                 <a:solidFill>
                   <a:srgbClr val="5B6378"/>
                 </a:solidFill>
@@ -9782,7 +9806,7 @@
               </a:rPr>
               <a:t>Every eligible partner-sourced deal filed within [N] business days of registration</a:t>
             </a:r>
-            <a:endParaRPr lang="en-US" sz="780" dirty="0"/>
+            <a:endParaRPr lang="en-US" sz="750" dirty="0"/>
           </a:p>
           <a:p>
             <a:pPr marL="127000" indent="-127000">
@@ -9796,7 +9820,7 @@
               <a:buChar char="•"/>
             </a:pPr>
             <a:r>
-              <a:rPr lang="en-US" sz="780" dirty="0">
+              <a:rPr lang="en-US" sz="750" dirty="0">
                 <a:solidFill>
                   <a:srgbClr val="5B6378"/>
                 </a:solidFill>
@@ -9806,7 +9830,7 @@
               </a:rPr>
               <a:t>Quarterly channel pack reporting margin paid, commission accrued and revenue attributed</a:t>
             </a:r>
-            <a:endParaRPr lang="en-US" sz="780" dirty="0"/>
+            <a:endParaRPr lang="en-US" sz="750" dirty="0"/>
           </a:p>
         </p:txBody>
       </p:sp>
@@ -13091,7 +13115,7 @@
                 <a:ea typeface="Segoe UI Semilight" pitchFamily="34" charset="-122"/>
                 <a:cs typeface="Segoe UI Semilight" pitchFamily="34" charset="-120"/>
               </a:rPr>
-              <a:t>One-time listing production</a:t>
+              <a:t>One-time production of the AWS Marketplace listing</a:t>
             </a:r>
             <a:endParaRPr lang="en-US" sz="800" dirty="0"/>
           </a:p>
@@ -13130,7 +13154,7 @@
                 <a:ea typeface="Segoe UI Semilight" pitchFamily="34" charset="-122"/>
                 <a:cs typeface="Segoe UI Semilight" pitchFamily="34" charset="-120"/>
               </a:rPr>
-              <a:t>Co-sell opportunities and AWS funding</a:t>
+              <a:t>The AWS partnership programme, and the ISV’s own BOX Program listings — not the Marketplace listing</a:t>
             </a:r>
             <a:endParaRPr lang="en-US" sz="800" dirty="0"/>
           </a:p>
@@ -13169,7 +13193,7 @@
                 <a:ea typeface="Segoe UI Semilight" pitchFamily="34" charset="-122"/>
                 <a:cs typeface="Segoe UI Semilight" pitchFamily="34" charset="-120"/>
               </a:rPr>
-              <a:t>The customer’s own listing, offers and reconciliation</a:t>
+              <a:t>The customer’s own Marketplace listing, offers and reconciliation</a:t>
             </a:r>
             <a:endParaRPr lang="en-US" sz="800" dirty="0"/>
           </a:p>
@@ -15993,7 +16017,7 @@
                 <a:ea typeface="Segoe UI Semilight" pitchFamily="34" charset="-122"/>
                 <a:cs typeface="Segoe UI Semilight" pitchFamily="34" charset="-120"/>
               </a:rPr>
-              <a:t>Cash and credits are separate instruments, up to the amounts shown.</a:t>
+              <a:t>The four Automatum × OBP solutions’ own milestones. Cash and credits are separate instruments, up to the amounts shown.</a:t>
             </a:r>
             <a:endParaRPr lang="en-US" sz="1250" dirty="0"/>
           </a:p>
@@ -16333,24 +16357,7 @@
                 <a:ea typeface="Segoe UI Semilight" pitchFamily="34" charset="-122"/>
                 <a:cs typeface="Segoe UI Semilight" pitchFamily="34" charset="-120"/>
               </a:rPr>
-              <a:t>Confirmed project leads — Milestone 3, AWS-funded.</a:t>
-            </a:r>
-            <a:endParaRPr lang="en-US" sz="850" dirty="0"/>
-          </a:p>
-          <a:p>
-            <a:pPr indent="0" marL="0">
-              <a:buNone/>
-            </a:pPr>
-            <a:r>
-              <a:rPr lang="en-US" sz="850" dirty="0">
-                <a:solidFill>
-                  <a:srgbClr val="5B6378"/>
-                </a:solidFill>
-                <a:latin typeface="Segoe UI Semilight" pitchFamily="34" charset="0"/>
-                <a:ea typeface="Segoe UI Semilight" pitchFamily="34" charset="-122"/>
-                <a:cs typeface="Segoe UI Semilight" pitchFamily="34" charset="-120"/>
-              </a:rPr>
-              <a:t>[Direction to confirm: owed by the partners, or flowing to them?]</a:t>
+              <a:t>Project leads generated for the participant via a sponsored AWS marketing campaign — Milestone 3, AWS-funded.</a:t>
             </a:r>
             <a:endParaRPr lang="en-US" sz="850" dirty="0"/>
           </a:p>
@@ -16442,6 +16449,45 @@
         </p:nvSpPr>
         <p:spPr>
           <a:xfrm>
+            <a:off x="657860" y="3479800"/>
+            <a:ext cx="10871200" cy="203200"/>
+          </a:xfrm>
+          <a:prstGeom prst="rect">
+            <a:avLst/>
+          </a:prstGeom>
+          <a:noFill/>
+          <a:ln/>
+        </p:spPr>
+        <p:txBody>
+          <a:bodyPr wrap="square" lIns="0" tIns="0" rIns="0" bIns="0" rtlCol="0" anchor="t"/>
+          <a:lstStyle/>
+          <a:p>
+            <a:pPr indent="0" marL="0">
+              <a:buNone/>
+            </a:pPr>
+            <a:r>
+              <a:rPr lang="en-US" sz="850" dirty="0">
+                <a:solidFill>
+                  <a:srgbClr val="9AA2B5"/>
+                </a:solidFill>
+                <a:latin typeface="Segoe UI Semilight" pitchFamily="34" charset="0"/>
+                <a:ea typeface="Segoe UI Semilight" pitchFamily="34" charset="-122"/>
+                <a:cs typeface="Segoe UI Semilight" pitchFamily="34" charset="-120"/>
+              </a:rPr>
+              <a:t>THE RULE — each solution carries its own Solution ID and its own five ACE submissions; an opportunity belongs to one solution. Milestone apportionment between OBP and Automatum is open — see partner economics.</a:t>
+            </a:r>
+            <a:endParaRPr lang="en-US" sz="850" dirty="0"/>
+          </a:p>
+        </p:txBody>
+      </p:sp>
+      <p:sp>
+        <p:nvSpPr>
+          <p:cNvPr id="18" name="Text 14"/>
+          <p:cNvSpPr txBox="1"/>
+          <p:nvPr/>
+        </p:nvSpPr>
+        <p:spPr>
+          <a:xfrm>
             <a:off x="1023620" y="3759200"/>
             <a:ext cx="2730500" cy="584200"/>
           </a:xfrm>
@@ -16475,7 +16521,7 @@
       </p:sp>
       <p:sp>
         <p:nvSpPr>
-          <p:cNvPr id="18" name="Text 14"/>
+          <p:cNvPr id="19" name="Text 15"/>
           <p:cNvSpPr txBox="1"/>
           <p:nvPr/>
         </p:nvSpPr>
@@ -16514,7 +16560,7 @@
       </p:sp>
       <p:sp>
         <p:nvSpPr>
-          <p:cNvPr id="19" name="Text 15"/>
+          <p:cNvPr id="20" name="Text 16"/>
           <p:cNvSpPr txBox="1"/>
           <p:nvPr/>
         </p:nvSpPr>
@@ -16553,7 +16599,7 @@
       </p:sp>
       <p:sp>
         <p:nvSpPr>
-          <p:cNvPr id="20" name="Text 16"/>
+          <p:cNvPr id="21" name="Text 17"/>
           <p:cNvSpPr txBox="1"/>
           <p:nvPr/>
         </p:nvSpPr>
@@ -16592,7 +16638,7 @@
       </p:sp>
       <p:sp>
         <p:nvSpPr>
-          <p:cNvPr id="21" name="Text 17"/>
+          <p:cNvPr id="22" name="Text 18"/>
           <p:cNvSpPr txBox="1"/>
           <p:nvPr/>
         </p:nvSpPr>
@@ -16631,7 +16677,7 @@
       </p:sp>
       <p:sp>
         <p:nvSpPr>
-          <p:cNvPr id="22" name="Text 18"/>
+          <p:cNvPr id="23" name="Text 19"/>
           <p:cNvSpPr txBox="1"/>
           <p:nvPr/>
         </p:nvSpPr>
@@ -16670,7 +16716,7 @@
       </p:sp>
       <p:sp>
         <p:nvSpPr>
-          <p:cNvPr id="23" name="Shape 19"/>
+          <p:cNvPr id="24" name="Shape 20"/>
           <p:cNvSpPr/>
           <p:nvPr/>
         </p:nvSpPr>
@@ -16692,7 +16738,7 @@
       </p:sp>
       <p:sp>
         <p:nvSpPr>
-          <p:cNvPr id="24" name="Text 20"/>
+          <p:cNvPr id="25" name="Text 21"/>
           <p:cNvSpPr txBox="1"/>
           <p:nvPr/>
         </p:nvSpPr>
@@ -16723,7 +16769,7 @@
                 <a:ea typeface="Segoe UI" pitchFamily="34" charset="-122"/>
                 <a:cs typeface="Segoe UI" pitchFamily="34" charset="-120"/>
               </a:rPr>
-              <a:t>THE RULE</a:t>
+              <a:t>TWO PARTICIPATIONS, ONE SCHEDULE</a:t>
             </a:r>
             <a:pPr indent="0" marL="0">
               <a:buNone/>
@@ -16737,7 +16783,7 @@
                 <a:ea typeface="Segoe UI Semilight" pitchFamily="34" charset="-122"/>
                 <a:cs typeface="Segoe UI Semilight" pitchFamily="34" charset="-120"/>
               </a:rPr>
-              <a:t>    Each solution carries its own Solution ID and its own five ACE submissions; an opportunity belongs to one solution. Milestone apportionment is open — see partner economics.</a:t>
+              <a:t>    These are OUR four solutions’ milestones. An ISV pursuing its own BOX Program listings earns the same schedule separately — see Managed AWS Alliances. Same figures, different participant, not the same money.</a:t>
             </a:r>
             <a:endParaRPr lang="en-US" sz="1050" dirty="0"/>
           </a:p>

--- a/docs/deck/BOX_Solutions_Revised.pptx
+++ b/docs/deck/BOX_Solutions_Revised.pptx
@@ -4249,7 +4249,7 @@
                 <a:ea typeface="Segoe UI Semilight" pitchFamily="34" charset="-122"/>
                 <a:cs typeface="Segoe UI Semilight" pitchFamily="34" charset="-120"/>
               </a:rPr>
-              <a:t>run the co-sell desk</a:t>
+              <a:t>scale the programs</a:t>
             </a:r>
             <a:endParaRPr lang="en-US" sz="850" dirty="0"/>
           </a:p>
@@ -4327,7 +4327,7 @@
                 <a:ea typeface="Segoe UI Semilight" pitchFamily="34" charset="-122"/>
                 <a:cs typeface="Segoe UI Semilight" pitchFamily="34" charset="-120"/>
               </a:rPr>
-              <a:t>run the deal desk</a:t>
+              <a:t>open the AWS field</a:t>
             </a:r>
             <a:endParaRPr lang="en-US" sz="850" dirty="0"/>
           </a:p>
@@ -4483,7 +4483,7 @@
                 <a:ea typeface="Segoe UI Semilight" pitchFamily="34" charset="-122"/>
                 <a:cs typeface="Segoe UI Semilight" pitchFamily="34" charset="-120"/>
               </a:rPr>
-              <a:t>get it transacting</a:t>
+              <a:t>build, publish and transact</a:t>
             </a:r>
             <a:endParaRPr lang="en-US" sz="850" dirty="0"/>
           </a:p>
@@ -4561,7 +4561,7 @@
                 <a:ea typeface="Segoe UI Semilight" pitchFamily="34" charset="-122"/>
                 <a:cs typeface="Segoe UI Semilight" pitchFamily="34" charset="-120"/>
               </a:rPr>
-              <a:t>run it on a tighter cadence</a:t>
+              <a:t>same nine services, deeper band</a:t>
             </a:r>
             <a:endParaRPr lang="en-US" sz="850" dirty="0"/>
           </a:p>
@@ -4639,7 +4639,7 @@
                 <a:ea typeface="Segoe UI Semilight" pitchFamily="34" charset="-122"/>
                 <a:cs typeface="Segoe UI Semilight" pitchFamily="34" charset="-120"/>
               </a:rPr>
-              <a:t>run it at volume</a:t>
+              <a:t>same nine services, top band</a:t>
             </a:r>
             <a:endParaRPr lang="en-US" sz="850" dirty="0"/>
           </a:p>
@@ -4717,7 +4717,7 @@
                 <a:ea typeface="Segoe UI Semilight" pitchFamily="34" charset="-122"/>
                 <a:cs typeface="Segoe UI Semilight" pitchFamily="34" charset="-120"/>
               </a:rPr>
-              <a:t>[CRO / VP Channel] · Kiflo, resold inside the fee</a:t>
+              <a:t>[CRO / VP Channel] · Kiflo Core, inside the fee</a:t>
             </a:r>
             <a:endParaRPr lang="en-US" sz="800" dirty="0"/>
           </a:p>
@@ -4795,7 +4795,7 @@
                 <a:ea typeface="Segoe UI Semilight" pitchFamily="34" charset="-122"/>
                 <a:cs typeface="Segoe UI Semilight" pitchFamily="34" charset="-120"/>
               </a:rPr>
-              <a:t>stand the channel up</a:t>
+              <a:t>up to (6) partners managed</a:t>
             </a:r>
             <a:endParaRPr lang="en-US" sz="850" dirty="0"/>
           </a:p>
@@ -4834,7 +4834,7 @@
                 <a:ea typeface="Segoe UI" pitchFamily="34" charset="-122"/>
                 <a:cs typeface="Segoe UI" pitchFamily="34" charset="-120"/>
               </a:rPr>
-              <a:t>[Expand or Activate]</a:t>
+              <a:t>Expand</a:t>
             </a:r>
             <a:endParaRPr lang="en-US" sz="1100" dirty="0"/>
           </a:p>
@@ -4873,7 +4873,7 @@
                 <a:ea typeface="Segoe UI Semilight" pitchFamily="34" charset="-122"/>
                 <a:cs typeface="Segoe UI Semilight" pitchFamily="34" charset="-120"/>
               </a:rPr>
-              <a:t>widen the transacting roster</a:t>
+              <a:t>up to (12) partners managed</a:t>
             </a:r>
             <a:endParaRPr lang="en-US" sz="850" dirty="0"/>
           </a:p>
@@ -4951,7 +4951,7 @@
                 <a:ea typeface="Segoe UI Semilight" pitchFamily="34" charset="-122"/>
                 <a:cs typeface="Segoe UI Semilight" pitchFamily="34" charset="-120"/>
               </a:rPr>
-              <a:t>operate the channel end to end</a:t>
+              <a:t>roster uncapped</a:t>
             </a:r>
             <a:endParaRPr lang="en-US" sz="850" dirty="0"/>
           </a:p>
@@ -6902,7 +6902,7 @@
                 <a:ea typeface="Segoe UI Semilight" pitchFamily="34" charset="-122"/>
                 <a:cs typeface="Segoe UI Semilight" pitchFamily="34" charset="-120"/>
               </a:rPr>
-              <a:t>Operate a live listing at volume. All nine services at every rung — volume, response time and reporting cadence set the rung.</a:t>
+              <a:t>Get a listing live and operate it at volume. All nine services at every rung — volume, turnaround and review cadence set the rung.</a:t>
             </a:r>
             <a:endParaRPr lang="en-US" sz="1250" dirty="0"/>
           </a:p>
@@ -7047,7 +7047,7 @@
                 <a:ea typeface="Segoe UI Semilight" pitchFamily="34" charset="-122"/>
                 <a:cs typeface="Segoe UI Semilight" pitchFamily="34" charset="-120"/>
               </a:rPr>
-              <a:t>ENTRY CONDITION — requires a published AWS Marketplace listing, delivered by the Accelerator or already in place.</a:t>
+              <a:t>ENTRY CONDITION — none. Launch includes the listing work; the Accelerator remains the fixed-fee route to the same listing in 14 to 18 business days.</a:t>
             </a:r>
             <a:endParaRPr lang="en-US" sz="850" dirty="0"/>
           </a:p>
@@ -7100,7 +7100,7 @@
                 <a:ea typeface="Segoe UI Semilight" pitchFamily="34" charset="-122"/>
                 <a:cs typeface="Segoe UI Semilight" pitchFamily="34" charset="-120"/>
               </a:rPr>
-              <a:t>A named operations owner running the listing to a written service level issued at onboarding, twelve monthly operating packs, and an annual state-of-the-listing review.</a:t>
+              <a:t>A named operations owner who takes the product through Well-Architected review, FTR and publication, then runs the offer desk to the band bought, with listing changes inside the rung’s turnaround and a monthly report on offers, Marketplace revenue and listing health.</a:t>
             </a:r>
             <a:endParaRPr lang="en-US" sz="950" dirty="0"/>
           </a:p>
@@ -7153,7 +7153,7 @@
                 <a:ea typeface="Segoe UI Semilight" pitchFamily="34" charset="-122"/>
                 <a:cs typeface="Segoe UI Semilight" pitchFamily="34" charset="-120"/>
               </a:rPr>
-              <a:t>Transacting subscriptions, renewal rate, and Marketplace-transacted revenue.</a:t>
+              <a:t>FTR acceptance, the publication date, offers accepted and Marketplace revenue — AWS’s review queue and the customer’s deal flow govern every one.</a:t>
             </a:r>
             <a:endParaRPr lang="en-US" sz="950" dirty="0"/>
           </a:p>
@@ -7245,7 +7245,7 @@
                 <a:ea typeface="Segoe UI Semilight" pitchFamily="34" charset="-122"/>
                 <a:cs typeface="Segoe UI Semilight" pitchFamily="34" charset="-120"/>
               </a:rPr>
-              <a:t>Get it transacting.</a:t>
+              <a:t>Get it built, published and transacting.</a:t>
             </a:r>
             <a:endParaRPr lang="en-US" sz="850" dirty="0"/>
           </a:p>
@@ -7330,7 +7330,7 @@
                 <a:ea typeface="Segoe UI Semilight" pitchFamily="34" charset="-122"/>
                 <a:cs typeface="Segoe UI Semilight" pitchFamily="34" charset="-120"/>
               </a:rPr>
-              <a:t>Named operations owner with a named backup; desk open [coverage hours, time zone]</a:t>
+              <a:t>(1) WAFR conducted, findings remediated — the FTR takes a completed WAFR as its input</a:t>
             </a:r>
             <a:endParaRPr lang="en-US" sz="750" dirty="0"/>
           </a:p>
@@ -7354,7 +7354,7 @@
                 <a:ea typeface="Segoe UI Semilight" pitchFamily="34" charset="-122"/>
                 <a:cs typeface="Segoe UI Semilight" pitchFamily="34" charset="-120"/>
               </a:rPr>
-              <a:t>Offers drafted and submitted to Automatum for issue within [N] business days of a complete request; up to [N] a month, further at [$X]</a:t>
+              <a:t>FTR prepared and submitted; listing built, configured and taken through publication, with AMMP diagrams maintained</a:t>
             </a:r>
             <a:endParaRPr lang="en-US" sz="750" dirty="0"/>
           </a:p>
@@ -7378,7 +7378,7 @@
                 <a:ea typeface="Segoe UI Semilight" pitchFamily="34" charset="-122"/>
                 <a:cs typeface="Segoe UI Semilight" pitchFamily="34" charset="-120"/>
               </a:rPr>
-              <a:t>Listing configuration changes submitted to AWS within [N] business days</a:t>
+              <a:t>CRM integration configured; private offer desk — up to (50) offers a year, direct and CPPO</a:t>
             </a:r>
             <a:endParaRPr lang="en-US" sz="750" dirty="0"/>
           </a:p>
@@ -7402,7 +7402,7 @@
                 <a:ea typeface="Segoe UI Semilight" pitchFamily="34" charset="-122"/>
                 <a:cs typeface="Segoe UI Semilight" pitchFamily="34" charset="-120"/>
               </a:rPr>
-              <a:t>Monthly operating report on a fixed date, reconciled against AWS statements as published</a:t>
+              <a:t>Listing changes in 5 business days; monthly reporting on offers, revenue and listing health</a:t>
             </a:r>
             <a:endParaRPr lang="en-US" sz="750" dirty="0"/>
           </a:p>
@@ -7487,7 +7487,7 @@
                 <a:ea typeface="Segoe UI Semilight" pitchFamily="34" charset="-122"/>
                 <a:cs typeface="Segoe UI Semilight" pitchFamily="34" charset="-120"/>
               </a:rPr>
-              <a:t>First offer issued and accepted within [N] days of onboarding</a:t>
+              <a:t>FTR acceptance — AWS decides; it grants AWS Qualified Software status and Solutions Finder placement, valid 2 years</a:t>
             </a:r>
             <a:endParaRPr lang="en-US" sz="780" dirty="0"/>
           </a:p>
@@ -7511,7 +7511,7 @@
                 <a:ea typeface="Segoe UI Semilight" pitchFamily="34" charset="-122"/>
                 <a:cs typeface="Segoe UI Semilight" pitchFamily="34" charset="-120"/>
               </a:rPr>
-              <a:t>[N] transacting subscriptions by month twelve</a:t>
+              <a:t>Publication date — AWS’s review queue governs it</a:t>
             </a:r>
             <a:endParaRPr lang="en-US" sz="780" dirty="0"/>
           </a:p>
@@ -7535,7 +7535,7 @@
                 <a:ea typeface="Segoe UI Semilight" pitchFamily="34" charset="-122"/>
                 <a:cs typeface="Segoe UI Semilight" pitchFamily="34" charset="-120"/>
               </a:rPr>
-              <a:t>Reconciliation complete with no open exception</a:t>
+              <a:t>Offers accepted and Marketplace revenue transacted</a:t>
             </a:r>
             <a:endParaRPr lang="en-US" sz="780" dirty="0"/>
           </a:p>
@@ -7627,7 +7627,7 @@
                 <a:ea typeface="Segoe UI Semilight" pitchFamily="34" charset="-122"/>
                 <a:cs typeface="Segoe UI Semilight" pitchFamily="34" charset="-120"/>
               </a:rPr>
-              <a:t>Adds depth — run it on a tighter cadence.</a:t>
+              <a:t>Same nine services, deeper band.</a:t>
             </a:r>
             <a:endParaRPr lang="en-US" sz="850" dirty="0"/>
           </a:p>
@@ -7712,7 +7712,7 @@
                 <a:ea typeface="Segoe UI Semilight" pitchFamily="34" charset="-122"/>
                 <a:cs typeface="Segoe UI Semilight" pitchFamily="34" charset="-120"/>
               </a:rPr>
-              <a:t>Higher band: up to [N] offers a month; integration exceptions listed monthly and cleared within [N] business days</a:t>
+              <a:t>(2) Well-Architected Framework Reviews conducted, findings remediated</a:t>
             </a:r>
             <a:endParaRPr lang="en-US" sz="750" dirty="0"/>
           </a:p>
@@ -7736,7 +7736,7 @@
                 <a:ea typeface="Segoe UI Semilight" pitchFamily="34" charset="-122"/>
                 <a:cs typeface="Segoe UI Semilight" pitchFamily="34" charset="-120"/>
               </a:rPr>
-              <a:t>Weekly offer-desk stand-up with the customer’s named sales lead, with written actions</a:t>
+              <a:t>Private offer desk — up to (100) offers a year</a:t>
             </a:r>
             <a:endParaRPr lang="en-US" sz="750" dirty="0"/>
           </a:p>
@@ -7760,7 +7760,7 @@
                 <a:ea typeface="Segoe UI Semilight" pitchFamily="34" charset="-122"/>
                 <a:cs typeface="Segoe UI Semilight" pitchFamily="34" charset="-120"/>
               </a:rPr>
-              <a:t>Expiry watch: every agreement flagged [N] days out with a renewal offer drafted</a:t>
+              <a:t>Listing configuration changes in 3 business days</a:t>
             </a:r>
             <a:endParaRPr lang="en-US" sz="750" dirty="0"/>
           </a:p>
@@ -7784,7 +7784,7 @@
                 <a:ea typeface="Segoe UI Semilight" pitchFamily="34" charset="-122"/>
                 <a:cs typeface="Segoe UI Semilight" pitchFamily="34" charset="-120"/>
               </a:rPr>
-              <a:t>AWS-mandated changes assessed within [N] business days of notice, with an implementation plan issued</a:t>
+              <a:t>FTR, listing publication, AMMP diagrams, CRM integration and monthly reporting as at Launch</a:t>
             </a:r>
             <a:endParaRPr lang="en-US" sz="750" dirty="0"/>
           </a:p>
@@ -7869,7 +7869,7 @@
                 <a:ea typeface="Segoe UI Semilight" pitchFamily="34" charset="-122"/>
                 <a:cs typeface="Segoe UI Semilight" pitchFamily="34" charset="-120"/>
               </a:rPr>
-              <a:t>[N] offers issued per quarter</a:t>
+              <a:t>FTR acceptance and Qualified Software status — AWS decides</a:t>
             </a:r>
             <a:endParaRPr lang="en-US" sz="780" dirty="0"/>
           </a:p>
@@ -7893,7 +7893,7 @@
                 <a:ea typeface="Segoe UI Semilight" pitchFamily="34" charset="-122"/>
                 <a:cs typeface="Segoe UI Semilight" pitchFamily="34" charset="-120"/>
               </a:rPr>
-              <a:t>[X]% of expiring agreements renewed</a:t>
+              <a:t>Offers accepted and Marketplace revenue transacted</a:t>
             </a:r>
             <a:endParaRPr lang="en-US" sz="780" dirty="0"/>
           </a:p>
@@ -7917,7 +7917,7 @@
                 <a:ea typeface="Segoe UI Semilight" pitchFamily="34" charset="-122"/>
                 <a:cs typeface="Segoe UI Semilight" pitchFamily="34" charset="-120"/>
               </a:rPr>
-              <a:t>Changes landed before AWS’s stated deadline</a:t>
+              <a:t>Demand at the band bought — offers issued follows the customer’s deal flow</a:t>
             </a:r>
             <a:endParaRPr lang="en-US" sz="780" dirty="0"/>
           </a:p>
@@ -8009,7 +8009,7 @@
                 <a:ea typeface="Segoe UI Semilight" pitchFamily="34" charset="-122"/>
                 <a:cs typeface="Segoe UI Semilight" pitchFamily="34" charset="-120"/>
               </a:rPr>
-              <a:t>Adds depth — run it at volume.</a:t>
+              <a:t>Same nine services, top band.</a:t>
             </a:r>
             <a:endParaRPr lang="en-US" sz="850" dirty="0"/>
           </a:p>
@@ -8094,7 +8094,7 @@
                 <a:ea typeface="Segoe UI Semilight" pitchFamily="34" charset="-122"/>
                 <a:cs typeface="Segoe UI Semilight" pitchFamily="34" charset="-120"/>
               </a:rPr>
-              <a:t>Top band: up to [N] offers a month; same-day drafting and submission for standard offers received before [cut-off time]</a:t>
+              <a:t>(4) Well-Architected Framework Reviews conducted, findings remediated</a:t>
             </a:r>
             <a:endParaRPr lang="en-US" sz="750" dirty="0"/>
           </a:p>
@@ -8118,7 +8118,7 @@
                 <a:ea typeface="Segoe UI Semilight" pitchFamily="34" charset="-122"/>
                 <a:cs typeface="Segoe UI Semilight" pitchFamily="34" charset="-120"/>
               </a:rPr>
-              <a:t>Coverage extended to [window, time zone] — this rung’s increment is coverage and response band</a:t>
+              <a:t>Private offer desk — up to (200) offers a year</a:t>
             </a:r>
             <a:endParaRPr lang="en-US" sz="750" dirty="0"/>
           </a:p>
@@ -8142,7 +8142,7 @@
                 <a:ea typeface="Segoe UI Semilight" pitchFamily="34" charset="-122"/>
                 <a:cs typeface="Segoe UI Semilight" pitchFamily="34" charset="-120"/>
               </a:rPr>
-              <a:t>Weekly reporting; monthly reconciliation with every variance explained in writing</a:t>
+              <a:t>Listing configuration changes in 1 business day</a:t>
             </a:r>
             <a:endParaRPr lang="en-US" sz="750" dirty="0"/>
           </a:p>
@@ -8166,7 +8166,7 @@
                 <a:ea typeface="Segoe UI Semilight" pitchFamily="34" charset="-122"/>
                 <a:cs typeface="Segoe UI Semilight" pitchFamily="34" charset="-120"/>
               </a:rPr>
-              <a:t>Quarterly listing engineering review delivered as a written change plan</a:t>
+              <a:t>FTR, listing publication, AMMP diagrams, CRM integration and monthly reporting as at Launch</a:t>
             </a:r>
             <a:endParaRPr lang="en-US" sz="750" dirty="0"/>
           </a:p>
@@ -8251,7 +8251,7 @@
                 <a:ea typeface="Segoe UI Semilight" pitchFamily="34" charset="-122"/>
                 <a:cs typeface="Segoe UI Semilight" pitchFamily="34" charset="-120"/>
               </a:rPr>
-              <a:t>A desk running at [N]+ offers a month</a:t>
+              <a:t>FTR acceptance and Qualified Software status — AWS decides</a:t>
             </a:r>
             <a:endParaRPr lang="en-US" sz="780" dirty="0"/>
           </a:p>
@@ -8275,7 +8275,7 @@
                 <a:ea typeface="Segoe UI Semilight" pitchFamily="34" charset="-122"/>
                 <a:cs typeface="Segoe UI Semilight" pitchFamily="34" charset="-120"/>
               </a:rPr>
-              <a:t>[$X] Marketplace-transacted revenue over the term</a:t>
+              <a:t>Offers accepted and Marketplace revenue transacted</a:t>
             </a:r>
             <a:endParaRPr lang="en-US" sz="780" dirty="0"/>
           </a:p>
@@ -8299,7 +8299,7 @@
                 <a:ea typeface="Segoe UI Semilight" pitchFamily="34" charset="-122"/>
                 <a:cs typeface="Segoe UI Semilight" pitchFamily="34" charset="-120"/>
               </a:rPr>
-              <a:t>[X]% of revenue reconciled with no open exception</a:t>
+              <a:t>Demand at the band bought — offers issued follows the customer’s deal flow</a:t>
             </a:r>
             <a:endParaRPr lang="en-US" sz="780" dirty="0"/>
           </a:p>
@@ -8374,7 +8374,7 @@
                 <a:ea typeface="Segoe UI Semilight" pitchFamily="34" charset="-122"/>
                 <a:cs typeface="Segoe UI Semilight" pitchFamily="34" charset="-120"/>
               </a:rPr>
-              <a:t>    Offer issue turnaround is committed only where Automatum’s matching internal turnaround is in place. Selling authorizations and partner-issued offers sit in Managed Partner Development.</a:t>
+              <a:t>    Nine services in three groups: compliance engineering · listing engineering · the offer desk and reporting. [Grouping proposed — confirm. CPPO also appears in Partner Development: originated there, executed here.]</a:t>
             </a:r>
             <a:endParaRPr lang="en-US" sz="1050" dirty="0"/>
           </a:p>
@@ -8564,7 +8564,7 @@
                 <a:ea typeface="Segoe UI Semilight" pitchFamily="34" charset="-122"/>
                 <a:cs typeface="Segoe UI Semilight" pitchFamily="34" charset="-120"/>
               </a:rPr>
-              <a:t>Build and run a reseller channel. The headline number is partners issuing offers — not roster size.</a:t>
+              <a:t>Build and run a reseller channel. Roster under management is what we commit; partners issuing offers is what we report.</a:t>
             </a:r>
             <a:endParaRPr lang="en-US" sz="1250" dirty="0"/>
           </a:p>
@@ -8709,7 +8709,7 @@
                 <a:ea typeface="Segoe UI Semilight" pitchFamily="34" charset="-122"/>
                 <a:cs typeface="Segoe UI Semilight" pitchFamily="34" charset="-120"/>
               </a:rPr>
-              <a:t>[CONFIRM WITH AUTOMATUM — can a third-party reseller issue offers against Automatum’s listing under its seller-of-record position, and by what mechanism? The scoreboard below rests on it.]</a:t>
+              <a:t>WHY TWELVE MONTHS — ramp from first outreach to first partner transaction models at 8 months, which is what sets the term.</a:t>
             </a:r>
             <a:endParaRPr lang="en-US" sz="850" dirty="0"/>
           </a:p>
@@ -8762,7 +8762,7 @@
                 <a:ea typeface="Segoe UI Semilight" pitchFamily="34" charset="-122"/>
                 <a:cs typeface="Segoe UI Semilight" pitchFamily="34" charset="-120"/>
               </a:rPr>
-              <a:t>A named channel manager, an agreement pack issued for signature, a live Kiflo portal, recruitment and enablement on a named cadence, and a monthly report whose headline number is partners issuing offers.</a:t>
+              <a:t>A named channel manager recruiting and managing the roster at the rung’s cap, a CPPO deal desk at the rung’s turnaround with selling authorizations drafted, issued and tracked, training on cadence, channel reviews with sourced-pipeline and attribution reporting, and Kiflo Core operated inside the fee.</a:t>
             </a:r>
             <a:endParaRPr lang="en-US" sz="950" dirty="0"/>
           </a:p>
@@ -8815,7 +8815,7 @@
                 <a:ea typeface="Segoe UI Semilight" pitchFamily="34" charset="-122"/>
                 <a:cs typeface="Segoe UI Semilight" pitchFamily="34" charset="-120"/>
               </a:rPr>
-              <a:t>[X] partners issuing offers and [$Y] partner-sourced Marketplace revenue by month twelve.</a:t>
+              <a:t>Partners issuing offers — the headline number — plus partner-sourced pipeline and revenue. Each partner clears its own AWS gate, which is the partner’s act, not OBP’s.</a:t>
             </a:r>
             <a:endParaRPr lang="en-US" sz="950" dirty="0"/>
           </a:p>
@@ -8992,7 +8992,7 @@
                 <a:ea typeface="Segoe UI Semilight" pitchFamily="34" charset="-122"/>
                 <a:cs typeface="Segoe UI Semilight" pitchFamily="34" charset="-120"/>
               </a:rPr>
-              <a:t>Named channel manager at [N] hours, with a named backup</a:t>
+              <a:t>Up to (6) net new partners recruited and under management</a:t>
             </a:r>
             <a:endParaRPr lang="en-US" sz="750" dirty="0"/>
           </a:p>
@@ -9016,7 +9016,7 @@
                 <a:ea typeface="Segoe UI Semilight" pitchFamily="34" charset="-122"/>
                 <a:cs typeface="Segoe UI Semilight" pitchFamily="34" charset="-120"/>
               </a:rPr>
-              <a:t>Agreement pack — partner agreement, margin schedule, registration rules — drafted and issued for signature within [N] business days of kickoff</a:t>
+              <a:t>Twice-yearly partner training and enablement sessions held</a:t>
             </a:r>
             <a:endParaRPr lang="en-US" sz="750" dirty="0"/>
           </a:p>
@@ -9040,7 +9040,7 @@
                 <a:ea typeface="Segoe UI Semilight" pitchFamily="34" charset="-122"/>
                 <a:cs typeface="Segoe UI Semilight" pitchFamily="34" charset="-120"/>
               </a:rPr>
-              <a:t>Kiflo portal live within [N] business days of [named customer inputs]; resold by OBP inside the fee, [N] seats included, further at [$Z]</a:t>
+              <a:t>CPPO deal desk — 1 business day turnaround; recurring selling authorizations drafted, issued and tracked in AWS Marketplace</a:t>
             </a:r>
             <a:endParaRPr lang="en-US" sz="750" dirty="0"/>
           </a:p>
@@ -9064,71 +9064,10 @@
                 <a:ea typeface="Segoe UI Semilight" pitchFamily="34" charset="-122"/>
                 <a:cs typeface="Segoe UI Semilight" pitchFamily="34" charset="-120"/>
               </a:rPr>
-              <a:t>Registration recommendation within [N] business days, plus the customer’s decision logged</a:t>
+              <a:t>Quarterly channel reviews with sourced-pipeline and attribution reporting</a:t>
             </a:r>
             <a:endParaRPr lang="en-US" sz="750" dirty="0"/>
           </a:p>
-        </p:txBody>
-      </p:sp>
-      <p:sp>
-        <p:nvSpPr>
-          <p:cNvPr id="16" name="Text 12"/>
-          <p:cNvSpPr txBox="1"/>
-          <p:nvPr/>
-        </p:nvSpPr>
-        <p:spPr>
-          <a:xfrm>
-            <a:off x="657860" y="4851400"/>
-            <a:ext cx="3479800" cy="152400"/>
-          </a:xfrm>
-          <a:prstGeom prst="rect">
-            <a:avLst/>
-          </a:prstGeom>
-          <a:noFill/>
-          <a:ln/>
-        </p:spPr>
-        <p:txBody>
-          <a:bodyPr wrap="square" lIns="0" tIns="0" rIns="0" bIns="0" rtlCol="0" anchor="t"/>
-          <a:lstStyle/>
-          <a:p>
-            <a:pPr indent="0" marL="0">
-              <a:buNone/>
-            </a:pPr>
-            <a:r>
-              <a:rPr lang="en-US" sz="800" b="1" spc="110" kern="0" dirty="0">
-                <a:solidFill>
-                  <a:srgbClr val="9AA2B5"/>
-                </a:solidFill>
-                <a:latin typeface="Segoe UI" pitchFamily="34" charset="0"/>
-                <a:ea typeface="Segoe UI" pitchFamily="34" charset="-122"/>
-                <a:cs typeface="Segoe UI" pitchFamily="34" charset="-120"/>
-              </a:rPr>
-              <a:t>WE TARGET</a:t>
-            </a:r>
-            <a:endParaRPr lang="en-US" sz="800" dirty="0"/>
-          </a:p>
-        </p:txBody>
-      </p:sp>
-      <p:sp>
-        <p:nvSpPr>
-          <p:cNvPr id="17" name="Text 13"/>
-          <p:cNvSpPr txBox="1"/>
-          <p:nvPr/>
-        </p:nvSpPr>
-        <p:spPr>
-          <a:xfrm>
-            <a:off x="657860" y="5029200"/>
-            <a:ext cx="3479800" cy="584200"/>
-          </a:xfrm>
-          <a:prstGeom prst="rect">
-            <a:avLst/>
-          </a:prstGeom>
-          <a:noFill/>
-          <a:ln/>
-        </p:spPr>
-        <p:txBody>
-          <a:bodyPr wrap="square" lIns="0" tIns="0" rIns="0" bIns="0" rtlCol="0" anchor="t"/>
-          <a:lstStyle/>
           <a:p>
             <a:pPr marL="127000" indent="-127000">
               <a:lnSpc>
@@ -9141,18 +9080,79 @@
               <a:buChar char="•"/>
             </a:pPr>
             <a:r>
-              <a:rPr lang="en-US" sz="780" dirty="0">
+              <a:rPr lang="en-US" sz="750" dirty="0">
+                <a:solidFill>
+                  <a:srgbClr val="5B6378"/>
+                </a:solidFill>
+                <a:latin typeface="Segoe UI Semilight" pitchFamily="34" charset="0"/>
+                <a:ea typeface="Segoe UI Semilight" pitchFamily="34" charset="-122"/>
+                <a:cs typeface="Segoe UI Semilight" pitchFamily="34" charset="-120"/>
+              </a:rPr>
+              <a:t>Kiflo Core stood up and operated inside the fee; PRM attribution configured for the channel</a:t>
+            </a:r>
+            <a:endParaRPr lang="en-US" sz="750" dirty="0"/>
+          </a:p>
+        </p:txBody>
+      </p:sp>
+      <p:sp>
+        <p:nvSpPr>
+          <p:cNvPr id="16" name="Text 12"/>
+          <p:cNvSpPr txBox="1"/>
+          <p:nvPr/>
+        </p:nvSpPr>
+        <p:spPr>
+          <a:xfrm>
+            <a:off x="657860" y="4851400"/>
+            <a:ext cx="3479800" cy="152400"/>
+          </a:xfrm>
+          <a:prstGeom prst="rect">
+            <a:avLst/>
+          </a:prstGeom>
+          <a:noFill/>
+          <a:ln/>
+        </p:spPr>
+        <p:txBody>
+          <a:bodyPr wrap="square" lIns="0" tIns="0" rIns="0" bIns="0" rtlCol="0" anchor="t"/>
+          <a:lstStyle/>
+          <a:p>
+            <a:pPr indent="0" marL="0">
+              <a:buNone/>
+            </a:pPr>
+            <a:r>
+              <a:rPr lang="en-US" sz="800" b="1" spc="110" kern="0" dirty="0">
                 <a:solidFill>
                   <a:srgbClr val="9AA2B5"/>
                 </a:solidFill>
-                <a:latin typeface="Segoe UI Semilight" pitchFamily="34" charset="0"/>
-                <a:ea typeface="Segoe UI Semilight" pitchFamily="34" charset="-122"/>
-                <a:cs typeface="Segoe UI Semilight" pitchFamily="34" charset="-120"/>
-              </a:rPr>
-              <a:t>[N] partners signed by month [6]</a:t>
-            </a:r>
-            <a:endParaRPr lang="en-US" sz="780" dirty="0"/>
-          </a:p>
+                <a:latin typeface="Segoe UI" pitchFamily="34" charset="0"/>
+                <a:ea typeface="Segoe UI" pitchFamily="34" charset="-122"/>
+                <a:cs typeface="Segoe UI" pitchFamily="34" charset="-120"/>
+              </a:rPr>
+              <a:t>WE TARGET</a:t>
+            </a:r>
+            <a:endParaRPr lang="en-US" sz="800" dirty="0"/>
+          </a:p>
+        </p:txBody>
+      </p:sp>
+      <p:sp>
+        <p:nvSpPr>
+          <p:cNvPr id="17" name="Text 13"/>
+          <p:cNvSpPr txBox="1"/>
+          <p:nvPr/>
+        </p:nvSpPr>
+        <p:spPr>
+          <a:xfrm>
+            <a:off x="657860" y="5029200"/>
+            <a:ext cx="3479800" cy="584200"/>
+          </a:xfrm>
+          <a:prstGeom prst="rect">
+            <a:avLst/>
+          </a:prstGeom>
+          <a:noFill/>
+          <a:ln/>
+        </p:spPr>
+        <p:txBody>
+          <a:bodyPr wrap="square" lIns="0" tIns="0" rIns="0" bIns="0" rtlCol="0" anchor="t"/>
+          <a:lstStyle/>
           <a:p>
             <a:pPr marL="127000" indent="-127000">
               <a:lnSpc>
@@ -9173,7 +9173,7 @@
                 <a:ea typeface="Segoe UI Semilight" pitchFamily="34" charset="-122"/>
                 <a:cs typeface="Segoe UI Semilight" pitchFamily="34" charset="-120"/>
               </a:rPr>
-              <a:t>First partner-issued offer by month [N]</a:t>
+              <a:t>Partners issuing offers — reported monthly, the number to hold us to</a:t>
             </a:r>
             <a:endParaRPr lang="en-US" sz="780" dirty="0"/>
           </a:p>
@@ -9197,163 +9197,10 @@
                 <a:ea typeface="Segoe UI Semilight" pitchFamily="34" charset="-122"/>
                 <a:cs typeface="Segoe UI Semilight" pitchFamily="34" charset="-120"/>
               </a:rPr>
-              <a:t>[N] partners issuing offers by month twelve</a:t>
+              <a:t>Each partner clears its own AWS gate: seller registration, tax interview, disbursement, service-linked role</a:t>
             </a:r>
             <a:endParaRPr lang="en-US" sz="780" dirty="0"/>
           </a:p>
-        </p:txBody>
-      </p:sp>
-      <p:sp>
-        <p:nvSpPr>
-          <p:cNvPr id="18" name="Text 14"/>
-          <p:cNvSpPr txBox="1"/>
-          <p:nvPr/>
-        </p:nvSpPr>
-        <p:spPr>
-          <a:xfrm>
-            <a:off x="4391660" y="2895600"/>
-            <a:ext cx="3479800" cy="203200"/>
-          </a:xfrm>
-          <a:prstGeom prst="rect">
-            <a:avLst/>
-          </a:prstGeom>
-          <a:noFill/>
-          <a:ln/>
-        </p:spPr>
-        <p:txBody>
-          <a:bodyPr wrap="square" lIns="0" tIns="0" rIns="0" bIns="0" rtlCol="0" anchor="ctr"/>
-          <a:lstStyle/>
-          <a:p>
-            <a:pPr indent="0" marL="0">
-              <a:buNone/>
-            </a:pPr>
-            <a:r>
-              <a:rPr lang="en-US" sz="1200" b="1" dirty="0">
-                <a:solidFill>
-                  <a:srgbClr val="15224B"/>
-                </a:solidFill>
-                <a:latin typeface="Segoe UI" pitchFamily="34" charset="0"/>
-                <a:ea typeface="Segoe UI" pitchFamily="34" charset="-122"/>
-                <a:cs typeface="Segoe UI" pitchFamily="34" charset="-120"/>
-              </a:rPr>
-              <a:t>[Expand or Activate]</a:t>
-            </a:r>
-            <a:pPr indent="0" marL="0">
-              <a:buNone/>
-            </a:pPr>
-            <a:r>
-              <a:rPr lang="en-US" sz="1200" b="1" dirty="0">
-                <a:solidFill>
-                  <a:srgbClr val="F36F20"/>
-                </a:solidFill>
-                <a:latin typeface="Segoe UI" pitchFamily="34" charset="0"/>
-                <a:ea typeface="Segoe UI" pitchFamily="34" charset="-122"/>
-                <a:cs typeface="Segoe UI" pitchFamily="34" charset="-120"/>
-              </a:rPr>
-              <a:t>   $5,000 / mo</a:t>
-            </a:r>
-            <a:endParaRPr lang="en-US" sz="1200" dirty="0"/>
-          </a:p>
-        </p:txBody>
-      </p:sp>
-      <p:sp>
-        <p:nvSpPr>
-          <p:cNvPr id="19" name="Text 15"/>
-          <p:cNvSpPr txBox="1"/>
-          <p:nvPr/>
-        </p:nvSpPr>
-        <p:spPr>
-          <a:xfrm>
-            <a:off x="4391660" y="3136900"/>
-            <a:ext cx="3479800" cy="330200"/>
-          </a:xfrm>
-          <a:prstGeom prst="rect">
-            <a:avLst/>
-          </a:prstGeom>
-          <a:noFill/>
-          <a:ln/>
-        </p:spPr>
-        <p:txBody>
-          <a:bodyPr wrap="square" lIns="0" tIns="0" rIns="0" bIns="0" rtlCol="0" anchor="t"/>
-          <a:lstStyle/>
-          <a:p>
-            <a:pPr indent="0" marL="0">
-              <a:buNone/>
-            </a:pPr>
-            <a:r>
-              <a:rPr lang="en-US" sz="850" dirty="0">
-                <a:solidFill>
-                  <a:srgbClr val="2E7CC4"/>
-                </a:solidFill>
-                <a:latin typeface="Segoe UI Semilight" pitchFamily="34" charset="0"/>
-                <a:ea typeface="Segoe UI Semilight" pitchFamily="34" charset="-122"/>
-                <a:cs typeface="Segoe UI Semilight" pitchFamily="34" charset="-120"/>
-              </a:rPr>
-              <a:t>Adds to Establish — widen the transacting roster.</a:t>
-            </a:r>
-            <a:endParaRPr lang="en-US" sz="850" dirty="0"/>
-          </a:p>
-        </p:txBody>
-      </p:sp>
-      <p:sp>
-        <p:nvSpPr>
-          <p:cNvPr id="20" name="Text 16"/>
-          <p:cNvSpPr txBox="1"/>
-          <p:nvPr/>
-        </p:nvSpPr>
-        <p:spPr>
-          <a:xfrm>
-            <a:off x="4391660" y="3352800"/>
-            <a:ext cx="3479800" cy="152400"/>
-          </a:xfrm>
-          <a:prstGeom prst="rect">
-            <a:avLst/>
-          </a:prstGeom>
-          <a:noFill/>
-          <a:ln/>
-        </p:spPr>
-        <p:txBody>
-          <a:bodyPr wrap="square" lIns="0" tIns="0" rIns="0" bIns="0" rtlCol="0" anchor="t"/>
-          <a:lstStyle/>
-          <a:p>
-            <a:pPr indent="0" marL="0">
-              <a:buNone/>
-            </a:pPr>
-            <a:r>
-              <a:rPr lang="en-US" sz="800" b="1" spc="110" kern="0" dirty="0">
-                <a:solidFill>
-                  <a:srgbClr val="F36F20"/>
-                </a:solidFill>
-                <a:latin typeface="Segoe UI" pitchFamily="34" charset="0"/>
-                <a:ea typeface="Segoe UI" pitchFamily="34" charset="-122"/>
-                <a:cs typeface="Segoe UI" pitchFamily="34" charset="-120"/>
-              </a:rPr>
-              <a:t>WE COMMIT</a:t>
-            </a:r>
-            <a:endParaRPr lang="en-US" sz="800" dirty="0"/>
-          </a:p>
-        </p:txBody>
-      </p:sp>
-      <p:sp>
-        <p:nvSpPr>
-          <p:cNvPr id="21" name="Text 17"/>
-          <p:cNvSpPr txBox="1"/>
-          <p:nvPr/>
-        </p:nvSpPr>
-        <p:spPr>
-          <a:xfrm>
-            <a:off x="4391660" y="3530600"/>
-            <a:ext cx="3479800" cy="1270000"/>
-          </a:xfrm>
-          <a:prstGeom prst="rect">
-            <a:avLst/>
-          </a:prstGeom>
-          <a:noFill/>
-          <a:ln/>
-        </p:spPr>
-        <p:txBody>
-          <a:bodyPr wrap="square" lIns="0" tIns="0" rIns="0" bIns="0" rtlCol="0" anchor="t"/>
-          <a:lstStyle/>
           <a:p>
             <a:pPr marL="127000" indent="-127000">
               <a:lnSpc>
@@ -9366,18 +9213,171 @@
               <a:buChar char="•"/>
             </a:pPr>
             <a:r>
-              <a:rPr lang="en-US" sz="750" dirty="0">
-                <a:solidFill>
-                  <a:srgbClr val="5B6378"/>
-                </a:solidFill>
-                <a:latin typeface="Segoe UI Semilight" pitchFamily="34" charset="0"/>
-                <a:ea typeface="Segoe UI Semilight" pitchFamily="34" charset="-122"/>
-                <a:cs typeface="Segoe UI Semilight" pitchFamily="34" charset="-120"/>
-              </a:rPr>
-              <a:t>A second partner type in scope; [N] targeted approaches a month across both</a:t>
-            </a:r>
-            <a:endParaRPr lang="en-US" sz="750" dirty="0"/>
-          </a:p>
+              <a:rPr lang="en-US" sz="780" dirty="0">
+                <a:solidFill>
+                  <a:srgbClr val="9AA2B5"/>
+                </a:solidFill>
+                <a:latin typeface="Segoe UI Semilight" pitchFamily="34" charset="0"/>
+                <a:ea typeface="Segoe UI Semilight" pitchFamily="34" charset="-122"/>
+                <a:cs typeface="Segoe UI Semilight" pitchFamily="34" charset="-120"/>
+              </a:rPr>
+              <a:t>Partner-sourced pipeline and revenue</a:t>
+            </a:r>
+            <a:endParaRPr lang="en-US" sz="780" dirty="0"/>
+          </a:p>
+        </p:txBody>
+      </p:sp>
+      <p:sp>
+        <p:nvSpPr>
+          <p:cNvPr id="18" name="Text 14"/>
+          <p:cNvSpPr txBox="1"/>
+          <p:nvPr/>
+        </p:nvSpPr>
+        <p:spPr>
+          <a:xfrm>
+            <a:off x="4391660" y="2895600"/>
+            <a:ext cx="3479800" cy="203200"/>
+          </a:xfrm>
+          <a:prstGeom prst="rect">
+            <a:avLst/>
+          </a:prstGeom>
+          <a:noFill/>
+          <a:ln/>
+        </p:spPr>
+        <p:txBody>
+          <a:bodyPr wrap="square" lIns="0" tIns="0" rIns="0" bIns="0" rtlCol="0" anchor="ctr"/>
+          <a:lstStyle/>
+          <a:p>
+            <a:pPr indent="0" marL="0">
+              <a:buNone/>
+            </a:pPr>
+            <a:r>
+              <a:rPr lang="en-US" sz="1200" b="1" dirty="0">
+                <a:solidFill>
+                  <a:srgbClr val="15224B"/>
+                </a:solidFill>
+                <a:latin typeface="Segoe UI" pitchFamily="34" charset="0"/>
+                <a:ea typeface="Segoe UI" pitchFamily="34" charset="-122"/>
+                <a:cs typeface="Segoe UI" pitchFamily="34" charset="-120"/>
+              </a:rPr>
+              <a:t>Expand</a:t>
+            </a:r>
+            <a:pPr indent="0" marL="0">
+              <a:buNone/>
+            </a:pPr>
+            <a:r>
+              <a:rPr lang="en-US" sz="1200" b="1" dirty="0">
+                <a:solidFill>
+                  <a:srgbClr val="F36F20"/>
+                </a:solidFill>
+                <a:latin typeface="Segoe UI" pitchFamily="34" charset="0"/>
+                <a:ea typeface="Segoe UI" pitchFamily="34" charset="-122"/>
+                <a:cs typeface="Segoe UI" pitchFamily="34" charset="-120"/>
+              </a:rPr>
+              <a:t>   $5,000 / mo</a:t>
+            </a:r>
+            <a:endParaRPr lang="en-US" sz="1200" dirty="0"/>
+          </a:p>
+        </p:txBody>
+      </p:sp>
+      <p:sp>
+        <p:nvSpPr>
+          <p:cNvPr id="19" name="Text 15"/>
+          <p:cNvSpPr txBox="1"/>
+          <p:nvPr/>
+        </p:nvSpPr>
+        <p:spPr>
+          <a:xfrm>
+            <a:off x="4391660" y="3136900"/>
+            <a:ext cx="3479800" cy="330200"/>
+          </a:xfrm>
+          <a:prstGeom prst="rect">
+            <a:avLst/>
+          </a:prstGeom>
+          <a:noFill/>
+          <a:ln/>
+        </p:spPr>
+        <p:txBody>
+          <a:bodyPr wrap="square" lIns="0" tIns="0" rIns="0" bIns="0" rtlCol="0" anchor="t"/>
+          <a:lstStyle/>
+          <a:p>
+            <a:pPr indent="0" marL="0">
+              <a:buNone/>
+            </a:pPr>
+            <a:r>
+              <a:rPr lang="en-US" sz="850" dirty="0">
+                <a:solidFill>
+                  <a:srgbClr val="2E7CC4"/>
+                </a:solidFill>
+                <a:latin typeface="Segoe UI Semilight" pitchFamily="34" charset="0"/>
+                <a:ea typeface="Segoe UI Semilight" pitchFamily="34" charset="-122"/>
+                <a:cs typeface="Segoe UI Semilight" pitchFamily="34" charset="-120"/>
+              </a:rPr>
+              <a:t>Widen the roster under management.</a:t>
+            </a:r>
+            <a:endParaRPr lang="en-US" sz="850" dirty="0"/>
+          </a:p>
+        </p:txBody>
+      </p:sp>
+      <p:sp>
+        <p:nvSpPr>
+          <p:cNvPr id="20" name="Text 16"/>
+          <p:cNvSpPr txBox="1"/>
+          <p:nvPr/>
+        </p:nvSpPr>
+        <p:spPr>
+          <a:xfrm>
+            <a:off x="4391660" y="3352800"/>
+            <a:ext cx="3479800" cy="152400"/>
+          </a:xfrm>
+          <a:prstGeom prst="rect">
+            <a:avLst/>
+          </a:prstGeom>
+          <a:noFill/>
+          <a:ln/>
+        </p:spPr>
+        <p:txBody>
+          <a:bodyPr wrap="square" lIns="0" tIns="0" rIns="0" bIns="0" rtlCol="0" anchor="t"/>
+          <a:lstStyle/>
+          <a:p>
+            <a:pPr indent="0" marL="0">
+              <a:buNone/>
+            </a:pPr>
+            <a:r>
+              <a:rPr lang="en-US" sz="800" b="1" spc="110" kern="0" dirty="0">
+                <a:solidFill>
+                  <a:srgbClr val="F36F20"/>
+                </a:solidFill>
+                <a:latin typeface="Segoe UI" pitchFamily="34" charset="0"/>
+                <a:ea typeface="Segoe UI" pitchFamily="34" charset="-122"/>
+                <a:cs typeface="Segoe UI" pitchFamily="34" charset="-120"/>
+              </a:rPr>
+              <a:t>WE COMMIT</a:t>
+            </a:r>
+            <a:endParaRPr lang="en-US" sz="800" dirty="0"/>
+          </a:p>
+        </p:txBody>
+      </p:sp>
+      <p:sp>
+        <p:nvSpPr>
+          <p:cNvPr id="21" name="Text 17"/>
+          <p:cNvSpPr txBox="1"/>
+          <p:nvPr/>
+        </p:nvSpPr>
+        <p:spPr>
+          <a:xfrm>
+            <a:off x="4391660" y="3530600"/>
+            <a:ext cx="3479800" cy="1270000"/>
+          </a:xfrm>
+          <a:prstGeom prst="rect">
+            <a:avLst/>
+          </a:prstGeom>
+          <a:noFill/>
+          <a:ln/>
+        </p:spPr>
+        <p:txBody>
+          <a:bodyPr wrap="square" lIns="0" tIns="0" rIns="0" bIns="0" rtlCol="0" anchor="t"/>
+          <a:lstStyle/>
           <a:p>
             <a:pPr marL="127000" indent="-127000">
               <a:lnSpc>
@@ -9398,7 +9398,7 @@
                 <a:ea typeface="Segoe UI Semilight" pitchFamily="34" charset="-122"/>
                 <a:cs typeface="Segoe UI Semilight" pitchFamily="34" charset="-120"/>
               </a:rPr>
-              <a:t>Enablement built and run — [N] sessions scheduled and held; attendance not guaranteed</a:t>
+              <a:t>Up to (12) net new partners recruited and under management</a:t>
             </a:r>
             <a:endParaRPr lang="en-US" sz="750" dirty="0"/>
           </a:p>
@@ -9422,7 +9422,7 @@
                 <a:ea typeface="Segoe UI Semilight" pitchFamily="34" charset="-122"/>
                 <a:cs typeface="Segoe UI Semilight" pitchFamily="34" charset="-120"/>
               </a:rPr>
-              <a:t>Written activation plan for up to [N] partners, reviewed monthly until first offer</a:t>
+              <a:t>Quarterly partner training and enablement sessions</a:t>
             </a:r>
             <a:endParaRPr lang="en-US" sz="750" dirty="0"/>
           </a:p>
@@ -9446,71 +9446,10 @@
                 <a:ea typeface="Segoe UI Semilight" pitchFamily="34" charset="-122"/>
                 <a:cs typeface="Segoe UI Semilight" pitchFamily="34" charset="-120"/>
               </a:rPr>
-              <a:t>Selling authorization and offer requests submitted to Automatum within [N] business days</a:t>
+              <a:t>CPPO deal desk — 8 business hour turnaround</a:t>
             </a:r>
             <a:endParaRPr lang="en-US" sz="750" dirty="0"/>
           </a:p>
-        </p:txBody>
-      </p:sp>
-      <p:sp>
-        <p:nvSpPr>
-          <p:cNvPr id="22" name="Text 18"/>
-          <p:cNvSpPr txBox="1"/>
-          <p:nvPr/>
-        </p:nvSpPr>
-        <p:spPr>
-          <a:xfrm>
-            <a:off x="4391660" y="4851400"/>
-            <a:ext cx="3479800" cy="152400"/>
-          </a:xfrm>
-          <a:prstGeom prst="rect">
-            <a:avLst/>
-          </a:prstGeom>
-          <a:noFill/>
-          <a:ln/>
-        </p:spPr>
-        <p:txBody>
-          <a:bodyPr wrap="square" lIns="0" tIns="0" rIns="0" bIns="0" rtlCol="0" anchor="t"/>
-          <a:lstStyle/>
-          <a:p>
-            <a:pPr indent="0" marL="0">
-              <a:buNone/>
-            </a:pPr>
-            <a:r>
-              <a:rPr lang="en-US" sz="800" b="1" spc="110" kern="0" dirty="0">
-                <a:solidFill>
-                  <a:srgbClr val="9AA2B5"/>
-                </a:solidFill>
-                <a:latin typeface="Segoe UI" pitchFamily="34" charset="0"/>
-                <a:ea typeface="Segoe UI" pitchFamily="34" charset="-122"/>
-                <a:cs typeface="Segoe UI" pitchFamily="34" charset="-120"/>
-              </a:rPr>
-              <a:t>WE TARGET</a:t>
-            </a:r>
-            <a:endParaRPr lang="en-US" sz="800" dirty="0"/>
-          </a:p>
-        </p:txBody>
-      </p:sp>
-      <p:sp>
-        <p:nvSpPr>
-          <p:cNvPr id="23" name="Text 19"/>
-          <p:cNvSpPr txBox="1"/>
-          <p:nvPr/>
-        </p:nvSpPr>
-        <p:spPr>
-          <a:xfrm>
-            <a:off x="4391660" y="5029200"/>
-            <a:ext cx="3479800" cy="584200"/>
-          </a:xfrm>
-          <a:prstGeom prst="rect">
-            <a:avLst/>
-          </a:prstGeom>
-          <a:noFill/>
-          <a:ln/>
-        </p:spPr>
-        <p:txBody>
-          <a:bodyPr wrap="square" lIns="0" tIns="0" rIns="0" bIns="0" rtlCol="0" anchor="t"/>
-          <a:lstStyle/>
           <a:p>
             <a:pPr marL="127000" indent="-127000">
               <a:lnSpc>
@@ -9523,17 +9462,17 @@
               <a:buChar char="•"/>
             </a:pPr>
             <a:r>
-              <a:rPr lang="en-US" sz="780" dirty="0">
-                <a:solidFill>
-                  <a:srgbClr val="9AA2B5"/>
-                </a:solidFill>
-                <a:latin typeface="Segoe UI Semilight" pitchFamily="34" charset="0"/>
-                <a:ea typeface="Segoe UI Semilight" pitchFamily="34" charset="-122"/>
-                <a:cs typeface="Segoe UI Semilight" pitchFamily="34" charset="-120"/>
-              </a:rPr>
-              <a:t>[N] partners issuing offers by month twelve</a:t>
-            </a:r>
-            <a:endParaRPr lang="en-US" sz="780" dirty="0"/>
+              <a:rPr lang="en-US" sz="750" dirty="0">
+                <a:solidFill>
+                  <a:srgbClr val="5B6378"/>
+                </a:solidFill>
+                <a:latin typeface="Segoe UI Semilight" pitchFamily="34" charset="0"/>
+                <a:ea typeface="Segoe UI Semilight" pitchFamily="34" charset="-122"/>
+                <a:cs typeface="Segoe UI Semilight" pitchFamily="34" charset="-120"/>
+              </a:rPr>
+              <a:t>Monthly channel reviews with sourced-pipeline and attribution reporting</a:t>
+            </a:r>
+            <a:endParaRPr lang="en-US" sz="750" dirty="0"/>
           </a:p>
           <a:p>
             <a:pPr marL="127000" indent="-127000">
@@ -9547,18 +9486,79 @@
               <a:buChar char="•"/>
             </a:pPr>
             <a:r>
-              <a:rPr lang="en-US" sz="780" dirty="0">
+              <a:rPr lang="en-US" sz="750" dirty="0">
+                <a:solidFill>
+                  <a:srgbClr val="5B6378"/>
+                </a:solidFill>
+                <a:latin typeface="Segoe UI Semilight" pitchFamily="34" charset="0"/>
+                <a:ea typeface="Segoe UI Semilight" pitchFamily="34" charset="-122"/>
+                <a:cs typeface="Segoe UI Semilight" pitchFamily="34" charset="-120"/>
+              </a:rPr>
+              <a:t>Kiflo Core operated inside the fee; PRM attribution maintained across the roster</a:t>
+            </a:r>
+            <a:endParaRPr lang="en-US" sz="750" dirty="0"/>
+          </a:p>
+        </p:txBody>
+      </p:sp>
+      <p:sp>
+        <p:nvSpPr>
+          <p:cNvPr id="22" name="Text 18"/>
+          <p:cNvSpPr txBox="1"/>
+          <p:nvPr/>
+        </p:nvSpPr>
+        <p:spPr>
+          <a:xfrm>
+            <a:off x="4391660" y="4851400"/>
+            <a:ext cx="3479800" cy="152400"/>
+          </a:xfrm>
+          <a:prstGeom prst="rect">
+            <a:avLst/>
+          </a:prstGeom>
+          <a:noFill/>
+          <a:ln/>
+        </p:spPr>
+        <p:txBody>
+          <a:bodyPr wrap="square" lIns="0" tIns="0" rIns="0" bIns="0" rtlCol="0" anchor="t"/>
+          <a:lstStyle/>
+          <a:p>
+            <a:pPr indent="0" marL="0">
+              <a:buNone/>
+            </a:pPr>
+            <a:r>
+              <a:rPr lang="en-US" sz="800" b="1" spc="110" kern="0" dirty="0">
                 <a:solidFill>
                   <a:srgbClr val="9AA2B5"/>
                 </a:solidFill>
-                <a:latin typeface="Segoe UI Semilight" pitchFamily="34" charset="0"/>
-                <a:ea typeface="Segoe UI Semilight" pitchFamily="34" charset="-122"/>
-                <a:cs typeface="Segoe UI Semilight" pitchFamily="34" charset="-120"/>
-              </a:rPr>
-              <a:t>[N] partner-registered deals a quarter</a:t>
-            </a:r>
-            <a:endParaRPr lang="en-US" sz="780" dirty="0"/>
-          </a:p>
+                <a:latin typeface="Segoe UI" pitchFamily="34" charset="0"/>
+                <a:ea typeface="Segoe UI" pitchFamily="34" charset="-122"/>
+                <a:cs typeface="Segoe UI" pitchFamily="34" charset="-120"/>
+              </a:rPr>
+              <a:t>WE TARGET</a:t>
+            </a:r>
+            <a:endParaRPr lang="en-US" sz="800" dirty="0"/>
+          </a:p>
+        </p:txBody>
+      </p:sp>
+      <p:sp>
+        <p:nvSpPr>
+          <p:cNvPr id="23" name="Text 19"/>
+          <p:cNvSpPr txBox="1"/>
+          <p:nvPr/>
+        </p:nvSpPr>
+        <p:spPr>
+          <a:xfrm>
+            <a:off x="4391660" y="5029200"/>
+            <a:ext cx="3479800" cy="584200"/>
+          </a:xfrm>
+          <a:prstGeom prst="rect">
+            <a:avLst/>
+          </a:prstGeom>
+          <a:noFill/>
+          <a:ln/>
+        </p:spPr>
+        <p:txBody>
+          <a:bodyPr wrap="square" lIns="0" tIns="0" rIns="0" bIns="0" rtlCol="0" anchor="t"/>
+          <a:lstStyle/>
           <a:p>
             <a:pPr marL="127000" indent="-127000">
               <a:lnSpc>
@@ -9579,163 +9579,10 @@
                 <a:ea typeface="Segoe UI Semilight" pitchFamily="34" charset="-122"/>
                 <a:cs typeface="Segoe UI Semilight" pitchFamily="34" charset="-120"/>
               </a:rPr>
-              <a:t>[$X] partner-sourced pipeline standing in Kiflo</a:t>
+              <a:t>Partners issuing offers — reported monthly</a:t>
             </a:r>
             <a:endParaRPr lang="en-US" sz="780" dirty="0"/>
           </a:p>
-        </p:txBody>
-      </p:sp>
-      <p:sp>
-        <p:nvSpPr>
-          <p:cNvPr id="24" name="Text 20"/>
-          <p:cNvSpPr txBox="1"/>
-          <p:nvPr/>
-        </p:nvSpPr>
-        <p:spPr>
-          <a:xfrm>
-            <a:off x="8125460" y="2895600"/>
-            <a:ext cx="3479800" cy="203200"/>
-          </a:xfrm>
-          <a:prstGeom prst="rect">
-            <a:avLst/>
-          </a:prstGeom>
-          <a:noFill/>
-          <a:ln/>
-        </p:spPr>
-        <p:txBody>
-          <a:bodyPr wrap="square" lIns="0" tIns="0" rIns="0" bIns="0" rtlCol="0" anchor="ctr"/>
-          <a:lstStyle/>
-          <a:p>
-            <a:pPr indent="0" marL="0">
-              <a:buNone/>
-            </a:pPr>
-            <a:r>
-              <a:rPr lang="en-US" sz="1200" b="1" dirty="0">
-                <a:solidFill>
-                  <a:srgbClr val="15224B"/>
-                </a:solidFill>
-                <a:latin typeface="Segoe UI" pitchFamily="34" charset="0"/>
-                <a:ea typeface="Segoe UI" pitchFamily="34" charset="-122"/>
-                <a:cs typeface="Segoe UI" pitchFamily="34" charset="-120"/>
-              </a:rPr>
-              <a:t>Accelerate</a:t>
-            </a:r>
-            <a:pPr indent="0" marL="0">
-              <a:buNone/>
-            </a:pPr>
-            <a:r>
-              <a:rPr lang="en-US" sz="1200" b="1" dirty="0">
-                <a:solidFill>
-                  <a:srgbClr val="F36F20"/>
-                </a:solidFill>
-                <a:latin typeface="Segoe UI" pitchFamily="34" charset="0"/>
-                <a:ea typeface="Segoe UI" pitchFamily="34" charset="-122"/>
-                <a:cs typeface="Segoe UI" pitchFamily="34" charset="-120"/>
-              </a:rPr>
-              <a:t>   $7,500 / mo</a:t>
-            </a:r>
-            <a:endParaRPr lang="en-US" sz="1200" dirty="0"/>
-          </a:p>
-        </p:txBody>
-      </p:sp>
-      <p:sp>
-        <p:nvSpPr>
-          <p:cNvPr id="25" name="Text 21"/>
-          <p:cNvSpPr txBox="1"/>
-          <p:nvPr/>
-        </p:nvSpPr>
-        <p:spPr>
-          <a:xfrm>
-            <a:off x="8125460" y="3136900"/>
-            <a:ext cx="3479800" cy="330200"/>
-          </a:xfrm>
-          <a:prstGeom prst="rect">
-            <a:avLst/>
-          </a:prstGeom>
-          <a:noFill/>
-          <a:ln/>
-        </p:spPr>
-        <p:txBody>
-          <a:bodyPr wrap="square" lIns="0" tIns="0" rIns="0" bIns="0" rtlCol="0" anchor="t"/>
-          <a:lstStyle/>
-          <a:p>
-            <a:pPr indent="0" marL="0">
-              <a:buNone/>
-            </a:pPr>
-            <a:r>
-              <a:rPr lang="en-US" sz="850" dirty="0">
-                <a:solidFill>
-                  <a:srgbClr val="2E7CC4"/>
-                </a:solidFill>
-                <a:latin typeface="Segoe UI Semilight" pitchFamily="34" charset="0"/>
-                <a:ea typeface="Segoe UI Semilight" pitchFamily="34" charset="-122"/>
-                <a:cs typeface="Segoe UI Semilight" pitchFamily="34" charset="-120"/>
-              </a:rPr>
-              <a:t>Adds to the middle rung — operate the channel end to end.</a:t>
-            </a:r>
-            <a:endParaRPr lang="en-US" sz="850" dirty="0"/>
-          </a:p>
-        </p:txBody>
-      </p:sp>
-      <p:sp>
-        <p:nvSpPr>
-          <p:cNvPr id="26" name="Text 22"/>
-          <p:cNvSpPr txBox="1"/>
-          <p:nvPr/>
-        </p:nvSpPr>
-        <p:spPr>
-          <a:xfrm>
-            <a:off x="8125460" y="3352800"/>
-            <a:ext cx="3479800" cy="152400"/>
-          </a:xfrm>
-          <a:prstGeom prst="rect">
-            <a:avLst/>
-          </a:prstGeom>
-          <a:noFill/>
-          <a:ln/>
-        </p:spPr>
-        <p:txBody>
-          <a:bodyPr wrap="square" lIns="0" tIns="0" rIns="0" bIns="0" rtlCol="0" anchor="t"/>
-          <a:lstStyle/>
-          <a:p>
-            <a:pPr indent="0" marL="0">
-              <a:buNone/>
-            </a:pPr>
-            <a:r>
-              <a:rPr lang="en-US" sz="800" b="1" spc="110" kern="0" dirty="0">
-                <a:solidFill>
-                  <a:srgbClr val="F36F20"/>
-                </a:solidFill>
-                <a:latin typeface="Segoe UI" pitchFamily="34" charset="0"/>
-                <a:ea typeface="Segoe UI" pitchFamily="34" charset="-122"/>
-                <a:cs typeface="Segoe UI" pitchFamily="34" charset="-120"/>
-              </a:rPr>
-              <a:t>WE COMMIT</a:t>
-            </a:r>
-            <a:endParaRPr lang="en-US" sz="800" dirty="0"/>
-          </a:p>
-        </p:txBody>
-      </p:sp>
-      <p:sp>
-        <p:nvSpPr>
-          <p:cNvPr id="27" name="Text 23"/>
-          <p:cNvSpPr txBox="1"/>
-          <p:nvPr/>
-        </p:nvSpPr>
-        <p:spPr>
-          <a:xfrm>
-            <a:off x="8125460" y="3530600"/>
-            <a:ext cx="3479800" cy="1270000"/>
-          </a:xfrm>
-          <a:prstGeom prst="rect">
-            <a:avLst/>
-          </a:prstGeom>
-          <a:noFill/>
-          <a:ln/>
-        </p:spPr>
-        <p:txBody>
-          <a:bodyPr wrap="square" lIns="0" tIns="0" rIns="0" bIns="0" rtlCol="0" anchor="t"/>
-          <a:lstStyle/>
           <a:p>
             <a:pPr marL="127000" indent="-127000">
               <a:lnSpc>
@@ -9748,17 +9595,17 @@
               <a:buChar char="•"/>
             </a:pPr>
             <a:r>
-              <a:rPr lang="en-US" sz="750" dirty="0">
-                <a:solidFill>
-                  <a:srgbClr val="5B6378"/>
-                </a:solidFill>
-                <a:latin typeface="Segoe UI Semilight" pitchFamily="34" charset="0"/>
-                <a:ea typeface="Segoe UI Semilight" pitchFamily="34" charset="-122"/>
-                <a:cs typeface="Segoe UI Semilight" pitchFamily="34" charset="-120"/>
-              </a:rPr>
-              <a:t>Named deal-desk owner with a stated coverage window</a:t>
-            </a:r>
-            <a:endParaRPr lang="en-US" sz="750" dirty="0"/>
+              <a:rPr lang="en-US" sz="780" dirty="0">
+                <a:solidFill>
+                  <a:srgbClr val="9AA2B5"/>
+                </a:solidFill>
+                <a:latin typeface="Segoe UI Semilight" pitchFamily="34" charset="0"/>
+                <a:ea typeface="Segoe UI Semilight" pitchFamily="34" charset="-122"/>
+                <a:cs typeface="Segoe UI Semilight" pitchFamily="34" charset="-120"/>
+              </a:rPr>
+              <a:t>Each partner clears its own AWS gate — the partner’s act, not OBP’s</a:t>
+            </a:r>
+            <a:endParaRPr lang="en-US" sz="780" dirty="0"/>
           </a:p>
           <a:p>
             <a:pPr marL="127000" indent="-127000">
@@ -9772,18 +9619,171 @@
               <a:buChar char="•"/>
             </a:pPr>
             <a:r>
-              <a:rPr lang="en-US" sz="750" dirty="0">
-                <a:solidFill>
-                  <a:srgbClr val="5B6378"/>
-                </a:solidFill>
-                <a:latin typeface="Segoe UI Semilight" pitchFamily="34" charset="0"/>
-                <a:ea typeface="Segoe UI Semilight" pitchFamily="34" charset="-122"/>
-                <a:cs typeface="Segoe UI Semilight" pitchFamily="34" charset="-120"/>
-              </a:rPr>
-              <a:t>Performance reviews offered monthly to up to [N] issuing partners, with written recovery plans</a:t>
-            </a:r>
-            <a:endParaRPr lang="en-US" sz="750" dirty="0"/>
-          </a:p>
+              <a:rPr lang="en-US" sz="780" dirty="0">
+                <a:solidFill>
+                  <a:srgbClr val="9AA2B5"/>
+                </a:solidFill>
+                <a:latin typeface="Segoe UI Semilight" pitchFamily="34" charset="0"/>
+                <a:ea typeface="Segoe UI Semilight" pitchFamily="34" charset="-122"/>
+                <a:cs typeface="Segoe UI Semilight" pitchFamily="34" charset="-120"/>
+              </a:rPr>
+              <a:t>Partner-sourced pipeline and revenue</a:t>
+            </a:r>
+            <a:endParaRPr lang="en-US" sz="780" dirty="0"/>
+          </a:p>
+        </p:txBody>
+      </p:sp>
+      <p:sp>
+        <p:nvSpPr>
+          <p:cNvPr id="24" name="Text 20"/>
+          <p:cNvSpPr txBox="1"/>
+          <p:nvPr/>
+        </p:nvSpPr>
+        <p:spPr>
+          <a:xfrm>
+            <a:off x="8125460" y="2895600"/>
+            <a:ext cx="3479800" cy="203200"/>
+          </a:xfrm>
+          <a:prstGeom prst="rect">
+            <a:avLst/>
+          </a:prstGeom>
+          <a:noFill/>
+          <a:ln/>
+        </p:spPr>
+        <p:txBody>
+          <a:bodyPr wrap="square" lIns="0" tIns="0" rIns="0" bIns="0" rtlCol="0" anchor="ctr"/>
+          <a:lstStyle/>
+          <a:p>
+            <a:pPr indent="0" marL="0">
+              <a:buNone/>
+            </a:pPr>
+            <a:r>
+              <a:rPr lang="en-US" sz="1200" b="1" dirty="0">
+                <a:solidFill>
+                  <a:srgbClr val="15224B"/>
+                </a:solidFill>
+                <a:latin typeface="Segoe UI" pitchFamily="34" charset="0"/>
+                <a:ea typeface="Segoe UI" pitchFamily="34" charset="-122"/>
+                <a:cs typeface="Segoe UI" pitchFamily="34" charset="-120"/>
+              </a:rPr>
+              <a:t>Accelerate</a:t>
+            </a:r>
+            <a:pPr indent="0" marL="0">
+              <a:buNone/>
+            </a:pPr>
+            <a:r>
+              <a:rPr lang="en-US" sz="1200" b="1" dirty="0">
+                <a:solidFill>
+                  <a:srgbClr val="F36F20"/>
+                </a:solidFill>
+                <a:latin typeface="Segoe UI" pitchFamily="34" charset="0"/>
+                <a:ea typeface="Segoe UI" pitchFamily="34" charset="-122"/>
+                <a:cs typeface="Segoe UI" pitchFamily="34" charset="-120"/>
+              </a:rPr>
+              <a:t>   $7,500 / mo</a:t>
+            </a:r>
+            <a:endParaRPr lang="en-US" sz="1200" dirty="0"/>
+          </a:p>
+        </p:txBody>
+      </p:sp>
+      <p:sp>
+        <p:nvSpPr>
+          <p:cNvPr id="25" name="Text 21"/>
+          <p:cNvSpPr txBox="1"/>
+          <p:nvPr/>
+        </p:nvSpPr>
+        <p:spPr>
+          <a:xfrm>
+            <a:off x="8125460" y="3136900"/>
+            <a:ext cx="3479800" cy="330200"/>
+          </a:xfrm>
+          <a:prstGeom prst="rect">
+            <a:avLst/>
+          </a:prstGeom>
+          <a:noFill/>
+          <a:ln/>
+        </p:spPr>
+        <p:txBody>
+          <a:bodyPr wrap="square" lIns="0" tIns="0" rIns="0" bIns="0" rtlCol="0" anchor="t"/>
+          <a:lstStyle/>
+          <a:p>
+            <a:pPr indent="0" marL="0">
+              <a:buNone/>
+            </a:pPr>
+            <a:r>
+              <a:rPr lang="en-US" sz="850" dirty="0">
+                <a:solidFill>
+                  <a:srgbClr val="2E7CC4"/>
+                </a:solidFill>
+                <a:latin typeface="Segoe UI Semilight" pitchFamily="34" charset="0"/>
+                <a:ea typeface="Segoe UI Semilight" pitchFamily="34" charset="-122"/>
+                <a:cs typeface="Segoe UI Semilight" pitchFamily="34" charset="-120"/>
+              </a:rPr>
+              <a:t>Operate the channel end to end.</a:t>
+            </a:r>
+            <a:endParaRPr lang="en-US" sz="850" dirty="0"/>
+          </a:p>
+        </p:txBody>
+      </p:sp>
+      <p:sp>
+        <p:nvSpPr>
+          <p:cNvPr id="26" name="Text 22"/>
+          <p:cNvSpPr txBox="1"/>
+          <p:nvPr/>
+        </p:nvSpPr>
+        <p:spPr>
+          <a:xfrm>
+            <a:off x="8125460" y="3352800"/>
+            <a:ext cx="3479800" cy="152400"/>
+          </a:xfrm>
+          <a:prstGeom prst="rect">
+            <a:avLst/>
+          </a:prstGeom>
+          <a:noFill/>
+          <a:ln/>
+        </p:spPr>
+        <p:txBody>
+          <a:bodyPr wrap="square" lIns="0" tIns="0" rIns="0" bIns="0" rtlCol="0" anchor="t"/>
+          <a:lstStyle/>
+          <a:p>
+            <a:pPr indent="0" marL="0">
+              <a:buNone/>
+            </a:pPr>
+            <a:r>
+              <a:rPr lang="en-US" sz="800" b="1" spc="110" kern="0" dirty="0">
+                <a:solidFill>
+                  <a:srgbClr val="F36F20"/>
+                </a:solidFill>
+                <a:latin typeface="Segoe UI" pitchFamily="34" charset="0"/>
+                <a:ea typeface="Segoe UI" pitchFamily="34" charset="-122"/>
+                <a:cs typeface="Segoe UI" pitchFamily="34" charset="-120"/>
+              </a:rPr>
+              <a:t>WE COMMIT</a:t>
+            </a:r>
+            <a:endParaRPr lang="en-US" sz="800" dirty="0"/>
+          </a:p>
+        </p:txBody>
+      </p:sp>
+      <p:sp>
+        <p:nvSpPr>
+          <p:cNvPr id="27" name="Text 23"/>
+          <p:cNvSpPr txBox="1"/>
+          <p:nvPr/>
+        </p:nvSpPr>
+        <p:spPr>
+          <a:xfrm>
+            <a:off x="8125460" y="3530600"/>
+            <a:ext cx="3479800" cy="1270000"/>
+          </a:xfrm>
+          <a:prstGeom prst="rect">
+            <a:avLst/>
+          </a:prstGeom>
+          <a:noFill/>
+          <a:ln/>
+        </p:spPr>
+        <p:txBody>
+          <a:bodyPr wrap="square" lIns="0" tIns="0" rIns="0" bIns="0" rtlCol="0" anchor="t"/>
+          <a:lstStyle/>
           <a:p>
             <a:pPr marL="127000" indent="-127000">
               <a:lnSpc>
@@ -9804,7 +9804,7 @@
                 <a:ea typeface="Segoe UI Semilight" pitchFamily="34" charset="-122"/>
                 <a:cs typeface="Segoe UI Semilight" pitchFamily="34" charset="-120"/>
               </a:rPr>
-              <a:t>Every eligible partner-sourced deal filed within [N] business days of registration</a:t>
+              <a:t>No cap on net new partners recruited and under management</a:t>
             </a:r>
             <a:endParaRPr lang="en-US" sz="750" dirty="0"/>
           </a:p>
@@ -9828,71 +9828,10 @@
                 <a:ea typeface="Segoe UI Semilight" pitchFamily="34" charset="-122"/>
                 <a:cs typeface="Segoe UI Semilight" pitchFamily="34" charset="-120"/>
               </a:rPr>
-              <a:t>Quarterly channel pack reporting margin paid, commission accrued and revenue attributed</a:t>
+              <a:t>Monthly partner training and enablement sessions</a:t>
             </a:r>
             <a:endParaRPr lang="en-US" sz="750" dirty="0"/>
           </a:p>
-        </p:txBody>
-      </p:sp>
-      <p:sp>
-        <p:nvSpPr>
-          <p:cNvPr id="28" name="Text 24"/>
-          <p:cNvSpPr txBox="1"/>
-          <p:nvPr/>
-        </p:nvSpPr>
-        <p:spPr>
-          <a:xfrm>
-            <a:off x="8125460" y="4851400"/>
-            <a:ext cx="3479800" cy="152400"/>
-          </a:xfrm>
-          <a:prstGeom prst="rect">
-            <a:avLst/>
-          </a:prstGeom>
-          <a:noFill/>
-          <a:ln/>
-        </p:spPr>
-        <p:txBody>
-          <a:bodyPr wrap="square" lIns="0" tIns="0" rIns="0" bIns="0" rtlCol="0" anchor="t"/>
-          <a:lstStyle/>
-          <a:p>
-            <a:pPr indent="0" marL="0">
-              <a:buNone/>
-            </a:pPr>
-            <a:r>
-              <a:rPr lang="en-US" sz="800" b="1" spc="110" kern="0" dirty="0">
-                <a:solidFill>
-                  <a:srgbClr val="9AA2B5"/>
-                </a:solidFill>
-                <a:latin typeface="Segoe UI" pitchFamily="34" charset="0"/>
-                <a:ea typeface="Segoe UI" pitchFamily="34" charset="-122"/>
-                <a:cs typeface="Segoe UI" pitchFamily="34" charset="-120"/>
-              </a:rPr>
-              <a:t>WE TARGET</a:t>
-            </a:r>
-            <a:endParaRPr lang="en-US" sz="800" dirty="0"/>
-          </a:p>
-        </p:txBody>
-      </p:sp>
-      <p:sp>
-        <p:nvSpPr>
-          <p:cNvPr id="29" name="Text 25"/>
-          <p:cNvSpPr txBox="1"/>
-          <p:nvPr/>
-        </p:nvSpPr>
-        <p:spPr>
-          <a:xfrm>
-            <a:off x="8125460" y="5029200"/>
-            <a:ext cx="3479800" cy="584200"/>
-          </a:xfrm>
-          <a:prstGeom prst="rect">
-            <a:avLst/>
-          </a:prstGeom>
-          <a:noFill/>
-          <a:ln/>
-        </p:spPr>
-        <p:txBody>
-          <a:bodyPr wrap="square" lIns="0" tIns="0" rIns="0" bIns="0" rtlCol="0" anchor="t"/>
-          <a:lstStyle/>
           <a:p>
             <a:pPr marL="127000" indent="-127000">
               <a:lnSpc>
@@ -9905,17 +9844,17 @@
               <a:buChar char="•"/>
             </a:pPr>
             <a:r>
-              <a:rPr lang="en-US" sz="780" dirty="0">
-                <a:solidFill>
-                  <a:srgbClr val="9AA2B5"/>
-                </a:solidFill>
-                <a:latin typeface="Segoe UI Semilight" pitchFamily="34" charset="0"/>
-                <a:ea typeface="Segoe UI Semilight" pitchFamily="34" charset="-122"/>
-                <a:cs typeface="Segoe UI Semilight" pitchFamily="34" charset="-120"/>
-              </a:rPr>
-              <a:t>[N] partners issuing offers, sustained per quarter</a:t>
-            </a:r>
-            <a:endParaRPr lang="en-US" sz="780" dirty="0"/>
+              <a:rPr lang="en-US" sz="750" dirty="0">
+                <a:solidFill>
+                  <a:srgbClr val="5B6378"/>
+                </a:solidFill>
+                <a:latin typeface="Segoe UI Semilight" pitchFamily="34" charset="0"/>
+                <a:ea typeface="Segoe UI Semilight" pitchFamily="34" charset="-122"/>
+                <a:cs typeface="Segoe UI Semilight" pitchFamily="34" charset="-120"/>
+              </a:rPr>
+              <a:t>CPPO deal desk — 4 business hour turnaround</a:t>
+            </a:r>
+            <a:endParaRPr lang="en-US" sz="750" dirty="0"/>
           </a:p>
           <a:p>
             <a:pPr marL="127000" indent="-127000">
@@ -9929,17 +9868,17 @@
               <a:buChar char="•"/>
             </a:pPr>
             <a:r>
-              <a:rPr lang="en-US" sz="780" dirty="0">
-                <a:solidFill>
-                  <a:srgbClr val="9AA2B5"/>
-                </a:solidFill>
-                <a:latin typeface="Segoe UI Semilight" pitchFamily="34" charset="0"/>
-                <a:ea typeface="Segoe UI Semilight" pitchFamily="34" charset="-122"/>
-                <a:cs typeface="Segoe UI Semilight" pitchFamily="34" charset="-120"/>
-              </a:rPr>
-              <a:t>[$Y] partner-sourced revenue; conversion and attribution rates</a:t>
-            </a:r>
-            <a:endParaRPr lang="en-US" sz="780" dirty="0"/>
+              <a:rPr lang="en-US" sz="750" dirty="0">
+                <a:solidFill>
+                  <a:srgbClr val="5B6378"/>
+                </a:solidFill>
+                <a:latin typeface="Segoe UI Semilight" pitchFamily="34" charset="0"/>
+                <a:ea typeface="Segoe UI Semilight" pitchFamily="34" charset="-122"/>
+                <a:cs typeface="Segoe UI Semilight" pitchFamily="34" charset="-120"/>
+              </a:rPr>
+              <a:t>Fortnightly channel reviews with sourced-pipeline and attribution reporting</a:t>
+            </a:r>
+            <a:endParaRPr lang="en-US" sz="750" dirty="0"/>
           </a:p>
           <a:p>
             <a:pPr marL="127000" indent="-127000">
@@ -9953,6 +9892,91 @@
               <a:buChar char="•"/>
             </a:pPr>
             <a:r>
+              <a:rPr lang="en-US" sz="750" dirty="0">
+                <a:solidFill>
+                  <a:srgbClr val="5B6378"/>
+                </a:solidFill>
+                <a:latin typeface="Segoe UI Semilight" pitchFamily="34" charset="0"/>
+                <a:ea typeface="Segoe UI Semilight" pitchFamily="34" charset="-122"/>
+                <a:cs typeface="Segoe UI Semilight" pitchFamily="34" charset="-120"/>
+              </a:rPr>
+              <a:t>Kiflo Core operated inside the fee; PRM attribution maintained across the roster</a:t>
+            </a:r>
+            <a:endParaRPr lang="en-US" sz="750" dirty="0"/>
+          </a:p>
+        </p:txBody>
+      </p:sp>
+      <p:sp>
+        <p:nvSpPr>
+          <p:cNvPr id="28" name="Text 24"/>
+          <p:cNvSpPr txBox="1"/>
+          <p:nvPr/>
+        </p:nvSpPr>
+        <p:spPr>
+          <a:xfrm>
+            <a:off x="8125460" y="4851400"/>
+            <a:ext cx="3479800" cy="152400"/>
+          </a:xfrm>
+          <a:prstGeom prst="rect">
+            <a:avLst/>
+          </a:prstGeom>
+          <a:noFill/>
+          <a:ln/>
+        </p:spPr>
+        <p:txBody>
+          <a:bodyPr wrap="square" lIns="0" tIns="0" rIns="0" bIns="0" rtlCol="0" anchor="t"/>
+          <a:lstStyle/>
+          <a:p>
+            <a:pPr indent="0" marL="0">
+              <a:buNone/>
+            </a:pPr>
+            <a:r>
+              <a:rPr lang="en-US" sz="800" b="1" spc="110" kern="0" dirty="0">
+                <a:solidFill>
+                  <a:srgbClr val="9AA2B5"/>
+                </a:solidFill>
+                <a:latin typeface="Segoe UI" pitchFamily="34" charset="0"/>
+                <a:ea typeface="Segoe UI" pitchFamily="34" charset="-122"/>
+                <a:cs typeface="Segoe UI" pitchFamily="34" charset="-120"/>
+              </a:rPr>
+              <a:t>WE TARGET</a:t>
+            </a:r>
+            <a:endParaRPr lang="en-US" sz="800" dirty="0"/>
+          </a:p>
+        </p:txBody>
+      </p:sp>
+      <p:sp>
+        <p:nvSpPr>
+          <p:cNvPr id="29" name="Text 25"/>
+          <p:cNvSpPr txBox="1"/>
+          <p:nvPr/>
+        </p:nvSpPr>
+        <p:spPr>
+          <a:xfrm>
+            <a:off x="8125460" y="5029200"/>
+            <a:ext cx="3479800" cy="584200"/>
+          </a:xfrm>
+          <a:prstGeom prst="rect">
+            <a:avLst/>
+          </a:prstGeom>
+          <a:noFill/>
+          <a:ln/>
+        </p:spPr>
+        <p:txBody>
+          <a:bodyPr wrap="square" lIns="0" tIns="0" rIns="0" bIns="0" rtlCol="0" anchor="t"/>
+          <a:lstStyle/>
+          <a:p>
+            <a:pPr marL="127000" indent="-127000">
+              <a:lnSpc>
+                <a:spcPct val="112000"/>
+              </a:lnSpc>
+              <a:spcAft>
+                <a:spcPts val="300"/>
+              </a:spcAft>
+              <a:buSzPct val="100000"/>
+              <a:buChar char="•"/>
+            </a:pPr>
+            <a:r>
               <a:rPr lang="en-US" sz="780" dirty="0">
                 <a:solidFill>
                   <a:srgbClr val="9AA2B5"/>
@@ -9961,7 +9985,55 @@
                 <a:ea typeface="Segoe UI Semilight" pitchFamily="34" charset="-122"/>
                 <a:cs typeface="Segoe UI Semilight" pitchFamily="34" charset="-120"/>
               </a:rPr>
-              <a:t>Partner-sourced ACE count — separate from the programme’s five per Solution ID</a:t>
+              <a:t>Partners issuing offers — reported monthly</a:t>
+            </a:r>
+            <a:endParaRPr lang="en-US" sz="780" dirty="0"/>
+          </a:p>
+          <a:p>
+            <a:pPr marL="127000" indent="-127000">
+              <a:lnSpc>
+                <a:spcPct val="112000"/>
+              </a:lnSpc>
+              <a:spcAft>
+                <a:spcPts val="300"/>
+              </a:spcAft>
+              <a:buSzPct val="100000"/>
+              <a:buChar char="•"/>
+            </a:pPr>
+            <a:r>
+              <a:rPr lang="en-US" sz="780" dirty="0">
+                <a:solidFill>
+                  <a:srgbClr val="9AA2B5"/>
+                </a:solidFill>
+                <a:latin typeface="Segoe UI Semilight" pitchFamily="34" charset="0"/>
+                <a:ea typeface="Segoe UI Semilight" pitchFamily="34" charset="-122"/>
+                <a:cs typeface="Segoe UI Semilight" pitchFamily="34" charset="-120"/>
+              </a:rPr>
+              <a:t>Each partner clears its own AWS gate — the partner’s act, not OBP’s</a:t>
+            </a:r>
+            <a:endParaRPr lang="en-US" sz="780" dirty="0"/>
+          </a:p>
+          <a:p>
+            <a:pPr marL="127000" indent="-127000">
+              <a:lnSpc>
+                <a:spcPct val="112000"/>
+              </a:lnSpc>
+              <a:spcAft>
+                <a:spcPts val="300"/>
+              </a:spcAft>
+              <a:buSzPct val="100000"/>
+              <a:buChar char="•"/>
+            </a:pPr>
+            <a:r>
+              <a:rPr lang="en-US" sz="780" dirty="0">
+                <a:solidFill>
+                  <a:srgbClr val="9AA2B5"/>
+                </a:solidFill>
+                <a:latin typeface="Segoe UI Semilight" pitchFamily="34" charset="0"/>
+                <a:ea typeface="Segoe UI Semilight" pitchFamily="34" charset="-122"/>
+                <a:cs typeface="Segoe UI Semilight" pitchFamily="34" charset="-120"/>
+              </a:rPr>
+              <a:t>Partner-sourced pipeline and revenue</a:t>
             </a:r>
             <a:endParaRPr lang="en-US" sz="780" dirty="0"/>
           </a:p>
@@ -10036,7 +10108,7 @@
                 <a:ea typeface="Segoe UI Semilight" pitchFamily="34" charset="-122"/>
                 <a:cs typeface="Segoe UI Semilight" pitchFamily="34" charset="-120"/>
               </a:rPr>
-              <a:t>    Execution of an agreement needs the customer’s legal function and the partner’s countersignature — a target, not a commit. Rung names and partner types [P] / [P+1] / [P+2] to confirm.</a:t>
+              <a:t>    AWS permits only one partner identifier per resource, so partner attribution runs on user agent string rather than competing tags. [CPPO boundary with Managed Marketplace Operations — originated here, executed on the listing there — to confirm.]</a:t>
             </a:r>
             <a:endParaRPr lang="en-US" sz="1050" dirty="0"/>
           </a:p>
@@ -13115,7 +13187,7 @@
                 <a:ea typeface="Segoe UI Semilight" pitchFamily="34" charset="-122"/>
                 <a:cs typeface="Segoe UI Semilight" pitchFamily="34" charset="-120"/>
               </a:rPr>
-              <a:t>One-time production of the AWS Marketplace listing</a:t>
+              <a:t>Listing production as a fixed-fee project, nothing ongoing</a:t>
             </a:r>
             <a:endParaRPr lang="en-US" sz="800" dirty="0"/>
           </a:p>
@@ -13154,7 +13226,7 @@
                 <a:ea typeface="Segoe UI Semilight" pitchFamily="34" charset="-122"/>
                 <a:cs typeface="Segoe UI Semilight" pitchFamily="34" charset="-120"/>
               </a:rPr>
-              <a:t>The AWS partnership programme, and the ISV’s own BOX Program listings — not the Marketplace listing</a:t>
+              <a:t>The AWS partnership programme, and the ISV’s own BOX Program listings</a:t>
             </a:r>
             <a:endParaRPr lang="en-US" sz="800" dirty="0"/>
           </a:p>
@@ -13193,7 +13265,7 @@
                 <a:ea typeface="Segoe UI Semilight" pitchFamily="34" charset="-122"/>
                 <a:cs typeface="Segoe UI Semilight" pitchFamily="34" charset="-120"/>
               </a:rPr>
-              <a:t>The customer’s own Marketplace listing, offers and reconciliation</a:t>
+              <a:t>Listing production AND twelve months of operation; CPPO executed on the listing</a:t>
             </a:r>
             <a:endParaRPr lang="en-US" sz="800" dirty="0"/>
           </a:p>
@@ -13232,7 +13304,7 @@
                 <a:ea typeface="Segoe UI Semilight" pitchFamily="34" charset="-122"/>
                 <a:cs typeface="Segoe UI Semilight" pitchFamily="34" charset="-120"/>
               </a:rPr>
-              <a:t>Third-party sellers and partner-issued offers</a:t>
+              <a:t>Partner recruitment and management; CPPO originated with partners</a:t>
             </a:r>
             <a:endParaRPr lang="en-US" sz="800" dirty="0"/>
           </a:p>
@@ -13857,7 +13929,7 @@
                 <a:ea typeface="Segoe UI Semilight" pitchFamily="34" charset="-122"/>
                 <a:cs typeface="Segoe UI Semilight" pitchFamily="34" charset="-120"/>
               </a:rPr>
-              <a:t>Resold by OBP inside Managed Partner Development, at every tier. System of record behind the partners-issuing-offers count. [Pricing basis, seats per rung, edition per rung — to confirm.]</a:t>
+              <a:t>Kiflo Core stood up and operated by OBP inside Managed Partner Development at every tier, included in the engagement fee. System of record behind the partners-issuing-offers count, and carries PRM attribution across the roster. [Seats per rung — to confirm.]</a:t>
             </a:r>
             <a:endParaRPr lang="en-US" sz="900" dirty="0"/>
           </a:p>
@@ -21938,7 +22010,7 @@
                 <a:ea typeface="Segoe UI Semilight" pitchFamily="34" charset="-122"/>
                 <a:cs typeface="Segoe UI Semilight" pitchFamily="34" charset="-120"/>
               </a:rPr>
-              <a:t>Nine services in three groups — [listing engineering / the offer desk / reporting and integrations — proposed, confirm with Automatum] — at every tier. Volume, response time and reporting cadence set the rung.</a:t>
+              <a:t>Nine services in three groups — compliance engineering, listing engineering, the offer desk and reporting — at every tier. Volume, turnaround and review cadence set the rung. Launch includes the listing work itself.</a:t>
             </a:r>
             <a:endParaRPr lang="en-US" sz="900" dirty="0"/>
           </a:p>
@@ -22064,7 +22136,7 @@
                 <a:ea typeface="Segoe UI Semilight" pitchFamily="34" charset="-122"/>
                 <a:cs typeface="Segoe UI Semilight" pitchFamily="34" charset="-120"/>
               </a:rPr>
-              <a:t>Partners recruited, enabled and operated — measured by partners issuing offers, not roster size; no cap on roster size. Partner types set the tiers.</a:t>
+              <a:t>Partners recruited and managed to a committed roster — up to (6), up to (12), or uncapped. Partners issuing offers is the number we report; roster under management is the number we commit.</a:t>
             </a:r>
             <a:endParaRPr lang="en-US" sz="900" dirty="0"/>
           </a:p>
@@ -23059,7 +23131,7 @@
                 <a:ea typeface="Segoe UI Semilight" pitchFamily="34" charset="-122"/>
                 <a:cs typeface="Segoe UI Semilight" pitchFamily="34" charset="-120"/>
               </a:rPr>
-              <a:t>The one-time path to a published, transacting listing</a:t>
+              <a:t>The fixed-fee route to a published listing in 14 to 18 business days, with nothing ongoing</a:t>
             </a:r>
             <a:endParaRPr lang="en-US" sz="850" dirty="0"/>
           </a:p>
@@ -23098,7 +23170,7 @@
                 <a:ea typeface="Segoe UI Semilight" pitchFamily="34" charset="-122"/>
                 <a:cs typeface="Segoe UI Semilight" pitchFamily="34" charset="-120"/>
               </a:rPr>
-              <a:t>The AWS partnership programme around a listing — not the listing work</a:t>
+              <a:t>The AWS partnership programme and the ISV’s own BOX Program listings — not the Marketplace listing work</a:t>
             </a:r>
             <a:endParaRPr lang="en-US" sz="850" dirty="0"/>
           </a:p>
@@ -23137,7 +23209,7 @@
                 <a:ea typeface="Segoe UI Semilight" pitchFamily="34" charset="-122"/>
                 <a:cs typeface="Segoe UI Semilight" pitchFamily="34" charset="-120"/>
               </a:rPr>
-              <a:t>Running a listing that already exists</a:t>
+              <a:t>Builds the listing AND operates it for twelve months — Launch includes WAFR, FTR and publication</a:t>
             </a:r>
             <a:endParaRPr lang="en-US" sz="850" dirty="0"/>
           </a:p>
@@ -26228,8 +26300,8 @@
         </p:nvSpPr>
         <p:spPr>
           <a:xfrm>
-            <a:off x="566420" y="3054350"/>
-            <a:ext cx="11055350" cy="355600"/>
+            <a:off x="566420" y="2952750"/>
+            <a:ext cx="11055350" cy="330200"/>
           </a:xfrm>
           <a:prstGeom prst="rect">
             <a:avLst/>
@@ -26248,7 +26320,7 @@
         </p:nvSpPr>
         <p:spPr>
           <a:xfrm>
-            <a:off x="749300" y="3124200"/>
+            <a:off x="749300" y="3022600"/>
             <a:ext cx="1930400" cy="203200"/>
           </a:xfrm>
           <a:prstGeom prst="rect">
@@ -26265,7 +26337,7 @@
               <a:buNone/>
             </a:pPr>
             <a:r>
-              <a:rPr lang="en-US" sz="1000" b="1" dirty="0">
+              <a:rPr lang="en-US" sz="950" b="1" dirty="0">
                 <a:solidFill>
                   <a:srgbClr val="FFFFFF"/>
                 </a:solidFill>
@@ -26275,7 +26347,7 @@
               </a:rPr>
               <a:t>Term</a:t>
             </a:r>
-            <a:endParaRPr lang="en-US" sz="1000" dirty="0"/>
+            <a:endParaRPr lang="en-US" sz="950" dirty="0"/>
           </a:p>
         </p:txBody>
       </p:sp>
@@ -26287,7 +26359,7 @@
         </p:nvSpPr>
         <p:spPr>
           <a:xfrm>
-            <a:off x="2857500" y="3124200"/>
+            <a:off x="2857500" y="3022600"/>
             <a:ext cx="8509000" cy="203200"/>
           </a:xfrm>
           <a:prstGeom prst="rect">
@@ -26304,7 +26376,7 @@
               <a:buNone/>
             </a:pPr>
             <a:r>
-              <a:rPr lang="en-US" sz="1000" b="1" dirty="0">
+              <a:rPr lang="en-US" sz="950" b="1" dirty="0">
                 <a:solidFill>
                   <a:srgbClr val="FFFFFF"/>
                 </a:solidFill>
@@ -26314,7 +26386,7 @@
               </a:rPr>
               <a:t>What it covers</a:t>
             </a:r>
-            <a:endParaRPr lang="en-US" sz="1000" dirty="0"/>
+            <a:endParaRPr lang="en-US" sz="950" dirty="0"/>
           </a:p>
         </p:txBody>
       </p:sp>
@@ -26326,8 +26398,8 @@
         </p:nvSpPr>
         <p:spPr>
           <a:xfrm>
-            <a:off x="566420" y="3816350"/>
-            <a:ext cx="11055350" cy="355600"/>
+            <a:off x="566420" y="3663950"/>
+            <a:ext cx="11055350" cy="330200"/>
           </a:xfrm>
           <a:prstGeom prst="rect">
             <a:avLst/>
@@ -26346,8 +26418,8 @@
         </p:nvSpPr>
         <p:spPr>
           <a:xfrm>
-            <a:off x="566420" y="4527550"/>
-            <a:ext cx="11055350" cy="355600"/>
+            <a:off x="566420" y="4324350"/>
+            <a:ext cx="11055350" cy="330200"/>
           </a:xfrm>
           <a:prstGeom prst="rect">
             <a:avLst/>
@@ -26366,8 +26438,8 @@
         </p:nvSpPr>
         <p:spPr>
           <a:xfrm>
-            <a:off x="566420" y="5238750"/>
-            <a:ext cx="11055350" cy="355600"/>
+            <a:off x="566420" y="4984750"/>
+            <a:ext cx="11055350" cy="330200"/>
           </a:xfrm>
           <a:prstGeom prst="rect">
             <a:avLst/>
@@ -26380,30 +26452,50 @@
       </p:sp>
       <p:sp>
         <p:nvSpPr>
-          <p:cNvPr id="19" name="Text 15"/>
-          <p:cNvSpPr txBox="1"/>
-          <p:nvPr/>
-        </p:nvSpPr>
-        <p:spPr>
-          <a:xfrm>
-            <a:off x="749300" y="3530600"/>
-            <a:ext cx="1930400" cy="355600"/>
-          </a:xfrm>
-          <a:prstGeom prst="rect">
-            <a:avLst/>
-          </a:prstGeom>
-          <a:noFill/>
-          <a:ln/>
-        </p:spPr>
-        <p:txBody>
-          <a:bodyPr wrap="square" lIns="0" tIns="0" rIns="0" bIns="0" rtlCol="0" anchor="t"/>
-          <a:lstStyle/>
-          <a:p>
-            <a:pPr indent="0" marL="0">
-              <a:buNone/>
-            </a:pPr>
-            <a:r>
-              <a:rPr lang="en-US" sz="1000" b="1" dirty="0">
+          <p:cNvPr id="19" name="Shape 15"/>
+          <p:cNvSpPr/>
+          <p:nvPr/>
+        </p:nvSpPr>
+        <p:spPr>
+          <a:xfrm>
+            <a:off x="566420" y="5645150"/>
+            <a:ext cx="11055350" cy="330200"/>
+          </a:xfrm>
+          <a:prstGeom prst="rect">
+            <a:avLst/>
+          </a:prstGeom>
+          <a:solidFill>
+            <a:srgbClr val="F5F8FC"/>
+          </a:solidFill>
+          <a:ln/>
+        </p:spPr>
+      </p:sp>
+      <p:sp>
+        <p:nvSpPr>
+          <p:cNvPr id="20" name="Text 16"/>
+          <p:cNvSpPr txBox="1"/>
+          <p:nvPr/>
+        </p:nvSpPr>
+        <p:spPr>
+          <a:xfrm>
+            <a:off x="749300" y="3403600"/>
+            <a:ext cx="1930400" cy="330200"/>
+          </a:xfrm>
+          <a:prstGeom prst="rect">
+            <a:avLst/>
+          </a:prstGeom>
+          <a:noFill/>
+          <a:ln/>
+        </p:spPr>
+        <p:txBody>
+          <a:bodyPr wrap="square" lIns="0" tIns="0" rIns="0" bIns="0" rtlCol="0" anchor="t"/>
+          <a:lstStyle/>
+          <a:p>
+            <a:pPr indent="0" marL="0">
+              <a:buNone/>
+            </a:pPr>
+            <a:r>
+              <a:rPr lang="en-US" sz="950" b="1" dirty="0">
                 <a:solidFill>
                   <a:srgbClr val="15224B"/>
                 </a:solidFill>
@@ -26413,36 +26505,36 @@
               </a:rPr>
               <a:t>Fee</a:t>
             </a:r>
-            <a:endParaRPr lang="en-US" sz="1000" dirty="0"/>
-          </a:p>
-        </p:txBody>
-      </p:sp>
-      <p:sp>
-        <p:nvSpPr>
-          <p:cNvPr id="20" name="Text 16"/>
-          <p:cNvSpPr txBox="1"/>
-          <p:nvPr/>
-        </p:nvSpPr>
-        <p:spPr>
-          <a:xfrm>
-            <a:off x="2857500" y="3530600"/>
-            <a:ext cx="8509000" cy="355600"/>
-          </a:xfrm>
-          <a:prstGeom prst="rect">
-            <a:avLst/>
-          </a:prstGeom>
-          <a:noFill/>
-          <a:ln/>
-        </p:spPr>
-        <p:txBody>
-          <a:bodyPr wrap="square" lIns="0" tIns="0" rIns="0" bIns="0" rtlCol="0" anchor="t"/>
-          <a:lstStyle/>
-          <a:p>
-            <a:pPr indent="0" marL="0">
-              <a:buNone/>
-            </a:pPr>
-            <a:r>
-              <a:rPr lang="en-US" sz="1000" dirty="0">
+            <a:endParaRPr lang="en-US" sz="950" dirty="0"/>
+          </a:p>
+        </p:txBody>
+      </p:sp>
+      <p:sp>
+        <p:nvSpPr>
+          <p:cNvPr id="21" name="Text 17"/>
+          <p:cNvSpPr txBox="1"/>
+          <p:nvPr/>
+        </p:nvSpPr>
+        <p:spPr>
+          <a:xfrm>
+            <a:off x="2857500" y="3403600"/>
+            <a:ext cx="8509000" cy="330200"/>
+          </a:xfrm>
+          <a:prstGeom prst="rect">
+            <a:avLst/>
+          </a:prstGeom>
+          <a:noFill/>
+          <a:ln/>
+        </p:spPr>
+        <p:txBody>
+          <a:bodyPr wrap="square" lIns="0" tIns="0" rIns="0" bIns="0" rtlCol="0" anchor="t"/>
+          <a:lstStyle/>
+          <a:p>
+            <a:pPr indent="0" marL="0">
+              <a:buNone/>
+            </a:pPr>
+            <a:r>
+              <a:rPr lang="en-US" sz="950" dirty="0">
                 <a:solidFill>
                   <a:srgbClr val="5B6378"/>
                 </a:solidFill>
@@ -26452,36 +26544,36 @@
               </a:rPr>
               <a:t>$10,000 fixed</a:t>
             </a:r>
-            <a:endParaRPr lang="en-US" sz="1000" dirty="0"/>
-          </a:p>
-        </p:txBody>
-      </p:sp>
-      <p:sp>
-        <p:nvSpPr>
-          <p:cNvPr id="21" name="Text 17"/>
-          <p:cNvSpPr txBox="1"/>
-          <p:nvPr/>
-        </p:nvSpPr>
-        <p:spPr>
-          <a:xfrm>
-            <a:off x="749300" y="3886200"/>
-            <a:ext cx="1930400" cy="355600"/>
-          </a:xfrm>
-          <a:prstGeom prst="rect">
-            <a:avLst/>
-          </a:prstGeom>
-          <a:noFill/>
-          <a:ln/>
-        </p:spPr>
-        <p:txBody>
-          <a:bodyPr wrap="square" lIns="0" tIns="0" rIns="0" bIns="0" rtlCol="0" anchor="t"/>
-          <a:lstStyle/>
-          <a:p>
-            <a:pPr indent="0" marL="0">
-              <a:buNone/>
-            </a:pPr>
-            <a:r>
-              <a:rPr lang="en-US" sz="1000" b="1" dirty="0">
+            <a:endParaRPr lang="en-US" sz="950" dirty="0"/>
+          </a:p>
+        </p:txBody>
+      </p:sp>
+      <p:sp>
+        <p:nvSpPr>
+          <p:cNvPr id="22" name="Text 18"/>
+          <p:cNvSpPr txBox="1"/>
+          <p:nvPr/>
+        </p:nvSpPr>
+        <p:spPr>
+          <a:xfrm>
+            <a:off x="749300" y="3733800"/>
+            <a:ext cx="1930400" cy="330200"/>
+          </a:xfrm>
+          <a:prstGeom prst="rect">
+            <a:avLst/>
+          </a:prstGeom>
+          <a:noFill/>
+          <a:ln/>
+        </p:spPr>
+        <p:txBody>
+          <a:bodyPr wrap="square" lIns="0" tIns="0" rIns="0" bIns="0" rtlCol="0" anchor="t"/>
+          <a:lstStyle/>
+          <a:p>
+            <a:pPr indent="0" marL="0">
+              <a:buNone/>
+            </a:pPr>
+            <a:r>
+              <a:rPr lang="en-US" sz="950" b="1" dirty="0">
                 <a:solidFill>
                   <a:srgbClr val="15224B"/>
                 </a:solidFill>
@@ -26491,36 +26583,36 @@
               </a:rPr>
               <a:t>Payment</a:t>
             </a:r>
-            <a:endParaRPr lang="en-US" sz="1000" dirty="0"/>
-          </a:p>
-        </p:txBody>
-      </p:sp>
-      <p:sp>
-        <p:nvSpPr>
-          <p:cNvPr id="22" name="Text 18"/>
-          <p:cNvSpPr txBox="1"/>
-          <p:nvPr/>
-        </p:nvSpPr>
-        <p:spPr>
-          <a:xfrm>
-            <a:off x="2857500" y="3886200"/>
-            <a:ext cx="8509000" cy="355600"/>
-          </a:xfrm>
-          <a:prstGeom prst="rect">
-            <a:avLst/>
-          </a:prstGeom>
-          <a:noFill/>
-          <a:ln/>
-        </p:spPr>
-        <p:txBody>
-          <a:bodyPr wrap="square" lIns="0" tIns="0" rIns="0" bIns="0" rtlCol="0" anchor="t"/>
-          <a:lstStyle/>
-          <a:p>
-            <a:pPr indent="0" marL="0">
-              <a:buNone/>
-            </a:pPr>
-            <a:r>
-              <a:rPr lang="en-US" sz="1000" dirty="0">
+            <a:endParaRPr lang="en-US" sz="950" dirty="0"/>
+          </a:p>
+        </p:txBody>
+      </p:sp>
+      <p:sp>
+        <p:nvSpPr>
+          <p:cNvPr id="23" name="Text 19"/>
+          <p:cNvSpPr txBox="1"/>
+          <p:nvPr/>
+        </p:nvSpPr>
+        <p:spPr>
+          <a:xfrm>
+            <a:off x="2857500" y="3733800"/>
+            <a:ext cx="8509000" cy="330200"/>
+          </a:xfrm>
+          <a:prstGeom prst="rect">
+            <a:avLst/>
+          </a:prstGeom>
+          <a:noFill/>
+          <a:ln/>
+        </p:spPr>
+        <p:txBody>
+          <a:bodyPr wrap="square" lIns="0" tIns="0" rIns="0" bIns="0" rtlCol="0" anchor="t"/>
+          <a:lstStyle/>
+          <a:p>
+            <a:pPr indent="0" marL="0">
+              <a:buNone/>
+            </a:pPr>
+            <a:r>
+              <a:rPr lang="en-US" sz="950" dirty="0">
                 <a:solidFill>
                   <a:srgbClr val="5B6378"/>
                 </a:solidFill>
@@ -26530,36 +26622,36 @@
               </a:rPr>
               <a:t>50% on signature, 50% on completion</a:t>
             </a:r>
-            <a:endParaRPr lang="en-US" sz="1000" dirty="0"/>
-          </a:p>
-        </p:txBody>
-      </p:sp>
-      <p:sp>
-        <p:nvSpPr>
-          <p:cNvPr id="23" name="Text 19"/>
-          <p:cNvSpPr txBox="1"/>
-          <p:nvPr/>
-        </p:nvSpPr>
-        <p:spPr>
-          <a:xfrm>
-            <a:off x="749300" y="4241800"/>
-            <a:ext cx="1930400" cy="355600"/>
-          </a:xfrm>
-          <a:prstGeom prst="rect">
-            <a:avLst/>
-          </a:prstGeom>
-          <a:noFill/>
-          <a:ln/>
-        </p:spPr>
-        <p:txBody>
-          <a:bodyPr wrap="square" lIns="0" tIns="0" rIns="0" bIns="0" rtlCol="0" anchor="t"/>
-          <a:lstStyle/>
-          <a:p>
-            <a:pPr indent="0" marL="0">
-              <a:buNone/>
-            </a:pPr>
-            <a:r>
-              <a:rPr lang="en-US" sz="1000" b="1" dirty="0">
+            <a:endParaRPr lang="en-US" sz="950" dirty="0"/>
+          </a:p>
+        </p:txBody>
+      </p:sp>
+      <p:sp>
+        <p:nvSpPr>
+          <p:cNvPr id="24" name="Text 20"/>
+          <p:cNvSpPr txBox="1"/>
+          <p:nvPr/>
+        </p:nvSpPr>
+        <p:spPr>
+          <a:xfrm>
+            <a:off x="749300" y="4064000"/>
+            <a:ext cx="1930400" cy="330200"/>
+          </a:xfrm>
+          <a:prstGeom prst="rect">
+            <a:avLst/>
+          </a:prstGeom>
+          <a:noFill/>
+          <a:ln/>
+        </p:spPr>
+        <p:txBody>
+          <a:bodyPr wrap="square" lIns="0" tIns="0" rIns="0" bIns="0" rtlCol="0" anchor="t"/>
+          <a:lstStyle/>
+          <a:p>
+            <a:pPr indent="0" marL="0">
+              <a:buNone/>
+            </a:pPr>
+            <a:r>
+              <a:rPr lang="en-US" sz="950" b="1" dirty="0">
                 <a:solidFill>
                   <a:srgbClr val="15224B"/>
                 </a:solidFill>
@@ -26569,36 +26661,36 @@
               </a:rPr>
               <a:t>Remediation</a:t>
             </a:r>
-            <a:endParaRPr lang="en-US" sz="1000" dirty="0"/>
-          </a:p>
-        </p:txBody>
-      </p:sp>
-      <p:sp>
-        <p:nvSpPr>
-          <p:cNvPr id="24" name="Text 20"/>
-          <p:cNvSpPr txBox="1"/>
-          <p:nvPr/>
-        </p:nvSpPr>
-        <p:spPr>
-          <a:xfrm>
-            <a:off x="2857500" y="4241800"/>
-            <a:ext cx="8509000" cy="355600"/>
-          </a:xfrm>
-          <a:prstGeom prst="rect">
-            <a:avLst/>
-          </a:prstGeom>
-          <a:noFill/>
-          <a:ln/>
-        </p:spPr>
-        <p:txBody>
-          <a:bodyPr wrap="square" lIns="0" tIns="0" rIns="0" bIns="0" rtlCol="0" anchor="t"/>
-          <a:lstStyle/>
-          <a:p>
-            <a:pPr indent="0" marL="0">
-              <a:buNone/>
-            </a:pPr>
-            <a:r>
-              <a:rPr lang="en-US" sz="1000" dirty="0">
+            <a:endParaRPr lang="en-US" sz="950" dirty="0"/>
+          </a:p>
+        </p:txBody>
+      </p:sp>
+      <p:sp>
+        <p:nvSpPr>
+          <p:cNvPr id="25" name="Text 21"/>
+          <p:cNvSpPr txBox="1"/>
+          <p:nvPr/>
+        </p:nvSpPr>
+        <p:spPr>
+          <a:xfrm>
+            <a:off x="2857500" y="4064000"/>
+            <a:ext cx="8509000" cy="330200"/>
+          </a:xfrm>
+          <a:prstGeom prst="rect">
+            <a:avLst/>
+          </a:prstGeom>
+          <a:noFill/>
+          <a:ln/>
+        </p:spPr>
+        <p:txBody>
+          <a:bodyPr wrap="square" lIns="0" tIns="0" rIns="0" bIns="0" rtlCol="0" anchor="t"/>
+          <a:lstStyle/>
+          <a:p>
+            <a:pPr indent="0" marL="0">
+              <a:buNone/>
+            </a:pPr>
+            <a:r>
+              <a:rPr lang="en-US" sz="950" dirty="0">
                 <a:solidFill>
                   <a:srgbClr val="5B6378"/>
                 </a:solidFill>
@@ -26608,36 +26700,36 @@
               </a:rPr>
               <a:t>20 hours included; further blocks of 10 hours at $1,000 each</a:t>
             </a:r>
-            <a:endParaRPr lang="en-US" sz="1000" dirty="0"/>
-          </a:p>
-        </p:txBody>
-      </p:sp>
-      <p:sp>
-        <p:nvSpPr>
-          <p:cNvPr id="25" name="Text 21"/>
-          <p:cNvSpPr txBox="1"/>
-          <p:nvPr/>
-        </p:nvSpPr>
-        <p:spPr>
-          <a:xfrm>
-            <a:off x="749300" y="4597400"/>
-            <a:ext cx="1930400" cy="355600"/>
-          </a:xfrm>
-          <a:prstGeom prst="rect">
-            <a:avLst/>
-          </a:prstGeom>
-          <a:noFill/>
-          <a:ln/>
-        </p:spPr>
-        <p:txBody>
-          <a:bodyPr wrap="square" lIns="0" tIns="0" rIns="0" bIns="0" rtlCol="0" anchor="t"/>
-          <a:lstStyle/>
-          <a:p>
-            <a:pPr indent="0" marL="0">
-              <a:buNone/>
-            </a:pPr>
-            <a:r>
-              <a:rPr lang="en-US" sz="1000" b="1" dirty="0">
+            <a:endParaRPr lang="en-US" sz="950" dirty="0"/>
+          </a:p>
+        </p:txBody>
+      </p:sp>
+      <p:sp>
+        <p:nvSpPr>
+          <p:cNvPr id="26" name="Text 22"/>
+          <p:cNvSpPr txBox="1"/>
+          <p:nvPr/>
+        </p:nvSpPr>
+        <p:spPr>
+          <a:xfrm>
+            <a:off x="749300" y="4394200"/>
+            <a:ext cx="1930400" cy="330200"/>
+          </a:xfrm>
+          <a:prstGeom prst="rect">
+            <a:avLst/>
+          </a:prstGeom>
+          <a:noFill/>
+          <a:ln/>
+        </p:spPr>
+        <p:txBody>
+          <a:bodyPr wrap="square" lIns="0" tIns="0" rIns="0" bIns="0" rtlCol="0" anchor="t"/>
+          <a:lstStyle/>
+          <a:p>
+            <a:pPr indent="0" marL="0">
+              <a:buNone/>
+            </a:pPr>
+            <a:r>
+              <a:rPr lang="en-US" sz="950" b="1" dirty="0">
                 <a:solidFill>
                   <a:srgbClr val="15224B"/>
                 </a:solidFill>
@@ -26647,36 +26739,36 @@
               </a:rPr>
               <a:t>Delivery</a:t>
             </a:r>
-            <a:endParaRPr lang="en-US" sz="1000" dirty="0"/>
-          </a:p>
-        </p:txBody>
-      </p:sp>
-      <p:sp>
-        <p:nvSpPr>
-          <p:cNvPr id="26" name="Text 22"/>
-          <p:cNvSpPr txBox="1"/>
-          <p:nvPr/>
-        </p:nvSpPr>
-        <p:spPr>
-          <a:xfrm>
-            <a:off x="2857500" y="4597400"/>
-            <a:ext cx="8509000" cy="355600"/>
-          </a:xfrm>
-          <a:prstGeom prst="rect">
-            <a:avLst/>
-          </a:prstGeom>
-          <a:noFill/>
-          <a:ln/>
-        </p:spPr>
-        <p:txBody>
-          <a:bodyPr wrap="square" lIns="0" tIns="0" rIns="0" bIns="0" rtlCol="0" anchor="t"/>
-          <a:lstStyle/>
-          <a:p>
-            <a:pPr indent="0" marL="0">
-              <a:buNone/>
-            </a:pPr>
-            <a:r>
-              <a:rPr lang="en-US" sz="1000" dirty="0">
+            <a:endParaRPr lang="en-US" sz="950" dirty="0"/>
+          </a:p>
+        </p:txBody>
+      </p:sp>
+      <p:sp>
+        <p:nvSpPr>
+          <p:cNvPr id="27" name="Text 23"/>
+          <p:cNvSpPr txBox="1"/>
+          <p:nvPr/>
+        </p:nvSpPr>
+        <p:spPr>
+          <a:xfrm>
+            <a:off x="2857500" y="4394200"/>
+            <a:ext cx="8509000" cy="330200"/>
+          </a:xfrm>
+          <a:prstGeom prst="rect">
+            <a:avLst/>
+          </a:prstGeom>
+          <a:noFill/>
+          <a:ln/>
+        </p:spPr>
+        <p:txBody>
+          <a:bodyPr wrap="square" lIns="0" tIns="0" rIns="0" bIns="0" rtlCol="0" anchor="t"/>
+          <a:lstStyle/>
+          <a:p>
+            <a:pPr indent="0" marL="0">
+              <a:buNone/>
+            </a:pPr>
+            <a:r>
+              <a:rPr lang="en-US" sz="950" dirty="0">
                 <a:solidFill>
                   <a:srgbClr val="5B6378"/>
                 </a:solidFill>
@@ -26686,36 +26778,36 @@
               </a:rPr>
               <a:t>14 to 18 business days</a:t>
             </a:r>
-            <a:endParaRPr lang="en-US" sz="1000" dirty="0"/>
-          </a:p>
-        </p:txBody>
-      </p:sp>
-      <p:sp>
-        <p:nvSpPr>
-          <p:cNvPr id="27" name="Text 23"/>
-          <p:cNvSpPr txBox="1"/>
-          <p:nvPr/>
-        </p:nvSpPr>
-        <p:spPr>
-          <a:xfrm>
-            <a:off x="749300" y="4953000"/>
-            <a:ext cx="1930400" cy="355600"/>
-          </a:xfrm>
-          <a:prstGeom prst="rect">
-            <a:avLst/>
-          </a:prstGeom>
-          <a:noFill/>
-          <a:ln/>
-        </p:spPr>
-        <p:txBody>
-          <a:bodyPr wrap="square" lIns="0" tIns="0" rIns="0" bIns="0" rtlCol="0" anchor="t"/>
-          <a:lstStyle/>
-          <a:p>
-            <a:pPr indent="0" marL="0">
-              <a:buNone/>
-            </a:pPr>
-            <a:r>
-              <a:rPr lang="en-US" sz="1000" b="1" dirty="0">
+            <a:endParaRPr lang="en-US" sz="950" dirty="0"/>
+          </a:p>
+        </p:txBody>
+      </p:sp>
+      <p:sp>
+        <p:nvSpPr>
+          <p:cNvPr id="28" name="Text 24"/>
+          <p:cNvSpPr txBox="1"/>
+          <p:nvPr/>
+        </p:nvSpPr>
+        <p:spPr>
+          <a:xfrm>
+            <a:off x="749300" y="4724400"/>
+            <a:ext cx="1930400" cy="330200"/>
+          </a:xfrm>
+          <a:prstGeom prst="rect">
+            <a:avLst/>
+          </a:prstGeom>
+          <a:noFill/>
+          <a:ln/>
+        </p:spPr>
+        <p:txBody>
+          <a:bodyPr wrap="square" lIns="0" tIns="0" rIns="0" bIns="0" rtlCol="0" anchor="t"/>
+          <a:lstStyle/>
+          <a:p>
+            <a:pPr indent="0" marL="0">
+              <a:buNone/>
+            </a:pPr>
+            <a:r>
+              <a:rPr lang="en-US" sz="950" b="1" dirty="0">
                 <a:solidFill>
                   <a:srgbClr val="15224B"/>
                 </a:solidFill>
@@ -26725,36 +26817,36 @@
               </a:rPr>
               <a:t>Customer supplies / clock start</a:t>
             </a:r>
-            <a:endParaRPr lang="en-US" sz="1000" dirty="0"/>
-          </a:p>
-        </p:txBody>
-      </p:sp>
-      <p:sp>
-        <p:nvSpPr>
-          <p:cNvPr id="28" name="Text 24"/>
-          <p:cNvSpPr txBox="1"/>
-          <p:nvPr/>
-        </p:nvSpPr>
-        <p:spPr>
-          <a:xfrm>
-            <a:off x="2857500" y="4953000"/>
-            <a:ext cx="8509000" cy="355600"/>
-          </a:xfrm>
-          <a:prstGeom prst="rect">
-            <a:avLst/>
-          </a:prstGeom>
-          <a:noFill/>
-          <a:ln/>
-        </p:spPr>
-        <p:txBody>
-          <a:bodyPr wrap="square" lIns="0" tIns="0" rIns="0" bIns="0" rtlCol="0" anchor="t"/>
-          <a:lstStyle/>
-          <a:p>
-            <a:pPr indent="0" marL="0">
-              <a:buNone/>
-            </a:pPr>
-            <a:r>
-              <a:rPr lang="en-US" sz="1000" dirty="0">
+            <a:endParaRPr lang="en-US" sz="950" dirty="0"/>
+          </a:p>
+        </p:txBody>
+      </p:sp>
+      <p:sp>
+        <p:nvSpPr>
+          <p:cNvPr id="29" name="Text 25"/>
+          <p:cNvSpPr txBox="1"/>
+          <p:nvPr/>
+        </p:nvSpPr>
+        <p:spPr>
+          <a:xfrm>
+            <a:off x="2857500" y="4724400"/>
+            <a:ext cx="8509000" cy="330200"/>
+          </a:xfrm>
+          <a:prstGeom prst="rect">
+            <a:avLst/>
+          </a:prstGeom>
+          <a:noFill/>
+          <a:ln/>
+        </p:spPr>
+        <p:txBody>
+          <a:bodyPr wrap="square" lIns="0" tIns="0" rIns="0" bIns="0" rtlCol="0" anchor="t"/>
+          <a:lstStyle/>
+          <a:p>
+            <a:pPr indent="0" marL="0">
+              <a:buNone/>
+            </a:pPr>
+            <a:r>
+              <a:rPr lang="en-US" sz="950" dirty="0">
                 <a:solidFill>
                   <a:srgbClr val="5B6378"/>
                 </a:solidFill>
@@ -26764,36 +26856,36 @@
               </a:rPr>
               <a:t>[What starts the clock]; engineering availability for remediation, tax, bank and legal data for seller registration</a:t>
             </a:r>
-            <a:endParaRPr lang="en-US" sz="1000" dirty="0"/>
-          </a:p>
-        </p:txBody>
-      </p:sp>
-      <p:sp>
-        <p:nvSpPr>
-          <p:cNvPr id="29" name="Text 25"/>
-          <p:cNvSpPr txBox="1"/>
-          <p:nvPr/>
-        </p:nvSpPr>
-        <p:spPr>
-          <a:xfrm>
-            <a:off x="749300" y="5308600"/>
-            <a:ext cx="1930400" cy="355600"/>
-          </a:xfrm>
-          <a:prstGeom prst="rect">
-            <a:avLst/>
-          </a:prstGeom>
-          <a:noFill/>
-          <a:ln/>
-        </p:spPr>
-        <p:txBody>
-          <a:bodyPr wrap="square" lIns="0" tIns="0" rIns="0" bIns="0" rtlCol="0" anchor="t"/>
-          <a:lstStyle/>
-          <a:p>
-            <a:pPr indent="0" marL="0">
-              <a:buNone/>
-            </a:pPr>
-            <a:r>
-              <a:rPr lang="en-US" sz="1000" b="1" dirty="0">
+            <a:endParaRPr lang="en-US" sz="950" dirty="0"/>
+          </a:p>
+        </p:txBody>
+      </p:sp>
+      <p:sp>
+        <p:nvSpPr>
+          <p:cNvPr id="30" name="Text 26"/>
+          <p:cNvSpPr txBox="1"/>
+          <p:nvPr/>
+        </p:nvSpPr>
+        <p:spPr>
+          <a:xfrm>
+            <a:off x="749300" y="5054600"/>
+            <a:ext cx="1930400" cy="330200"/>
+          </a:xfrm>
+          <a:prstGeom prst="rect">
+            <a:avLst/>
+          </a:prstGeom>
+          <a:noFill/>
+          <a:ln/>
+        </p:spPr>
+        <p:txBody>
+          <a:bodyPr wrap="square" lIns="0" tIns="0" rIns="0" bIns="0" rtlCol="0" anchor="t"/>
+          <a:lstStyle/>
+          <a:p>
+            <a:pPr indent="0" marL="0">
+              <a:buNone/>
+            </a:pPr>
+            <a:r>
+              <a:rPr lang="en-US" sz="950" b="1" dirty="0">
                 <a:solidFill>
                   <a:srgbClr val="15224B"/>
                 </a:solidFill>
@@ -26803,36 +26895,36 @@
               </a:rPr>
               <a:t>We target, not commit</a:t>
             </a:r>
-            <a:endParaRPr lang="en-US" sz="1000" dirty="0"/>
-          </a:p>
-        </p:txBody>
-      </p:sp>
-      <p:sp>
-        <p:nvSpPr>
-          <p:cNvPr id="30" name="Text 26"/>
-          <p:cNvSpPr txBox="1"/>
-          <p:nvPr/>
-        </p:nvSpPr>
-        <p:spPr>
-          <a:xfrm>
-            <a:off x="2857500" y="5308600"/>
-            <a:ext cx="8509000" cy="355600"/>
-          </a:xfrm>
-          <a:prstGeom prst="rect">
-            <a:avLst/>
-          </a:prstGeom>
-          <a:noFill/>
-          <a:ln/>
-        </p:spPr>
-        <p:txBody>
-          <a:bodyPr wrap="square" lIns="0" tIns="0" rIns="0" bIns="0" rtlCol="0" anchor="t"/>
-          <a:lstStyle/>
-          <a:p>
-            <a:pPr indent="0" marL="0">
-              <a:buNone/>
-            </a:pPr>
-            <a:r>
-              <a:rPr lang="en-US" sz="1000" dirty="0">
+            <a:endParaRPr lang="en-US" sz="950" dirty="0"/>
+          </a:p>
+        </p:txBody>
+      </p:sp>
+      <p:sp>
+        <p:nvSpPr>
+          <p:cNvPr id="31" name="Text 27"/>
+          <p:cNvSpPr txBox="1"/>
+          <p:nvPr/>
+        </p:nvSpPr>
+        <p:spPr>
+          <a:xfrm>
+            <a:off x="2857500" y="5054600"/>
+            <a:ext cx="8509000" cy="330200"/>
+          </a:xfrm>
+          <a:prstGeom prst="rect">
+            <a:avLst/>
+          </a:prstGeom>
+          <a:noFill/>
+          <a:ln/>
+        </p:spPr>
+        <p:txBody>
+          <a:bodyPr wrap="square" lIns="0" tIns="0" rIns="0" bIns="0" rtlCol="0" anchor="t"/>
+          <a:lstStyle/>
+          <a:p>
+            <a:pPr indent="0" marL="0">
+              <a:buNone/>
+            </a:pPr>
+            <a:r>
+              <a:rPr lang="en-US" sz="950" dirty="0">
                 <a:solidFill>
                   <a:srgbClr val="5B6378"/>
                 </a:solidFill>
@@ -26842,36 +26934,36 @@
               </a:rPr>
               <a:t>Publication date — AWS’s review queue and the customer’s product govern it</a:t>
             </a:r>
-            <a:endParaRPr lang="en-US" sz="1000" dirty="0"/>
-          </a:p>
-        </p:txBody>
-      </p:sp>
-      <p:sp>
-        <p:nvSpPr>
-          <p:cNvPr id="31" name="Text 27"/>
-          <p:cNvSpPr txBox="1"/>
-          <p:nvPr/>
-        </p:nvSpPr>
-        <p:spPr>
-          <a:xfrm>
-            <a:off x="749300" y="5664200"/>
-            <a:ext cx="1930400" cy="355600"/>
-          </a:xfrm>
-          <a:prstGeom prst="rect">
-            <a:avLst/>
-          </a:prstGeom>
-          <a:noFill/>
-          <a:ln/>
-        </p:spPr>
-        <p:txBody>
-          <a:bodyPr wrap="square" lIns="0" tIns="0" rIns="0" bIns="0" rtlCol="0" anchor="t"/>
-          <a:lstStyle/>
-          <a:p>
-            <a:pPr indent="0" marL="0">
-              <a:buNone/>
-            </a:pPr>
-            <a:r>
-              <a:rPr lang="en-US" sz="1000" b="1" dirty="0">
+            <a:endParaRPr lang="en-US" sz="950" dirty="0"/>
+          </a:p>
+        </p:txBody>
+      </p:sp>
+      <p:sp>
+        <p:nvSpPr>
+          <p:cNvPr id="32" name="Text 28"/>
+          <p:cNvSpPr txBox="1"/>
+          <p:nvPr/>
+        </p:nvSpPr>
+        <p:spPr>
+          <a:xfrm>
+            <a:off x="749300" y="5384800"/>
+            <a:ext cx="1930400" cy="330200"/>
+          </a:xfrm>
+          <a:prstGeom prst="rect">
+            <a:avLst/>
+          </a:prstGeom>
+          <a:noFill/>
+          <a:ln/>
+        </p:spPr>
+        <p:txBody>
+          <a:bodyPr wrap="square" lIns="0" tIns="0" rIns="0" bIns="0" rtlCol="0" anchor="t"/>
+          <a:lstStyle/>
+          <a:p>
+            <a:pPr indent="0" marL="0">
+              <a:buNone/>
+            </a:pPr>
+            <a:r>
+              <a:rPr lang="en-US" sz="950" b="1" dirty="0">
                 <a:solidFill>
                   <a:srgbClr val="15224B"/>
                 </a:solidFill>
@@ -26881,36 +26973,36 @@
               </a:rPr>
               <a:t>Not included</a:t>
             </a:r>
-            <a:endParaRPr lang="en-US" sz="1000" dirty="0"/>
-          </a:p>
-        </p:txBody>
-      </p:sp>
-      <p:sp>
-        <p:nvSpPr>
-          <p:cNvPr id="32" name="Text 28"/>
-          <p:cNvSpPr txBox="1"/>
-          <p:nvPr/>
-        </p:nvSpPr>
-        <p:spPr>
-          <a:xfrm>
-            <a:off x="2857500" y="5664200"/>
-            <a:ext cx="8509000" cy="355600"/>
-          </a:xfrm>
-          <a:prstGeom prst="rect">
-            <a:avLst/>
-          </a:prstGeom>
-          <a:noFill/>
-          <a:ln/>
-        </p:spPr>
-        <p:txBody>
-          <a:bodyPr wrap="square" lIns="0" tIns="0" rIns="0" bIns="0" rtlCol="0" anchor="t"/>
-          <a:lstStyle/>
-          <a:p>
-            <a:pPr indent="0" marL="0">
-              <a:buNone/>
-            </a:pPr>
-            <a:r>
-              <a:rPr lang="en-US" sz="1000" dirty="0">
+            <a:endParaRPr lang="en-US" sz="950" dirty="0"/>
+          </a:p>
+        </p:txBody>
+      </p:sp>
+      <p:sp>
+        <p:nvSpPr>
+          <p:cNvPr id="33" name="Text 29"/>
+          <p:cNvSpPr txBox="1"/>
+          <p:nvPr/>
+        </p:nvSpPr>
+        <p:spPr>
+          <a:xfrm>
+            <a:off x="2857500" y="5384800"/>
+            <a:ext cx="8509000" cy="330200"/>
+          </a:xfrm>
+          <a:prstGeom prst="rect">
+            <a:avLst/>
+          </a:prstGeom>
+          <a:noFill/>
+          <a:ln/>
+        </p:spPr>
+        <p:txBody>
+          <a:bodyPr wrap="square" lIns="0" tIns="0" rIns="0" bIns="0" rtlCol="0" anchor="t"/>
+          <a:lstStyle/>
+          <a:p>
+            <a:pPr indent="0" marL="0">
+              <a:buNone/>
+            </a:pPr>
+            <a:r>
+              <a:rPr lang="en-US" sz="950" dirty="0">
                 <a:solidFill>
                   <a:srgbClr val="5B6378"/>
                 </a:solidFill>
@@ -26920,7 +27012,85 @@
               </a:rPr>
               <a:t>Ongoing operation of the listing — that is Managed Marketplace Operations</a:t>
             </a:r>
-            <a:endParaRPr lang="en-US" sz="1000" dirty="0"/>
+            <a:endParaRPr lang="en-US" sz="950" dirty="0"/>
+          </a:p>
+        </p:txBody>
+      </p:sp>
+      <p:sp>
+        <p:nvSpPr>
+          <p:cNvPr id="34" name="Text 30"/>
+          <p:cNvSpPr txBox="1"/>
+          <p:nvPr/>
+        </p:nvSpPr>
+        <p:spPr>
+          <a:xfrm>
+            <a:off x="749300" y="5715000"/>
+            <a:ext cx="1930400" cy="330200"/>
+          </a:xfrm>
+          <a:prstGeom prst="rect">
+            <a:avLst/>
+          </a:prstGeom>
+          <a:noFill/>
+          <a:ln/>
+        </p:spPr>
+        <p:txBody>
+          <a:bodyPr wrap="square" lIns="0" tIns="0" rIns="0" bIns="0" rtlCol="0" anchor="t"/>
+          <a:lstStyle/>
+          <a:p>
+            <a:pPr indent="0" marL="0">
+              <a:buNone/>
+            </a:pPr>
+            <a:r>
+              <a:rPr lang="en-US" sz="950" b="1" dirty="0">
+                <a:solidFill>
+                  <a:srgbClr val="15224B"/>
+                </a:solidFill>
+                <a:latin typeface="Segoe UI" pitchFamily="34" charset="0"/>
+                <a:ea typeface="Segoe UI" pitchFamily="34" charset="-122"/>
+                <a:cs typeface="Segoe UI" pitchFamily="34" charset="-120"/>
+              </a:rPr>
+              <a:t>Why buy it standalone</a:t>
+            </a:r>
+            <a:endParaRPr lang="en-US" sz="950" dirty="0"/>
+          </a:p>
+        </p:txBody>
+      </p:sp>
+      <p:sp>
+        <p:nvSpPr>
+          <p:cNvPr id="35" name="Text 31"/>
+          <p:cNvSpPr txBox="1"/>
+          <p:nvPr/>
+        </p:nvSpPr>
+        <p:spPr>
+          <a:xfrm>
+            <a:off x="2857500" y="5715000"/>
+            <a:ext cx="8509000" cy="330200"/>
+          </a:xfrm>
+          <a:prstGeom prst="rect">
+            <a:avLst/>
+          </a:prstGeom>
+          <a:noFill/>
+          <a:ln/>
+        </p:spPr>
+        <p:txBody>
+          <a:bodyPr wrap="square" lIns="0" tIns="0" rIns="0" bIns="0" rtlCol="0" anchor="t"/>
+          <a:lstStyle/>
+          <a:p>
+            <a:pPr indent="0" marL="0">
+              <a:buNone/>
+            </a:pPr>
+            <a:r>
+              <a:rPr lang="en-US" sz="950" dirty="0">
+                <a:solidFill>
+                  <a:srgbClr val="5B6378"/>
+                </a:solidFill>
+                <a:latin typeface="Segoe UI Semilight" pitchFamily="34" charset="0"/>
+                <a:ea typeface="Segoe UI Semilight" pitchFamily="34" charset="-122"/>
+                <a:cs typeface="Segoe UI Semilight" pitchFamily="34" charset="-120"/>
+              </a:rPr>
+              <a:t>Managed Marketplace Operations Launch covers the same listing work inside a twelve-month retainer. This is the route to a published listing in 14 to 18 business days with no ongoing commitment.</a:t>
+            </a:r>
+            <a:endParaRPr lang="en-US" sz="950" dirty="0"/>
           </a:p>
         </p:txBody>
       </p:sp>

--- a/docs/deck/BOX_Solutions_Revised.pptx
+++ b/docs/deck/BOX_Solutions_Revised.pptx
@@ -3563,7 +3563,7 @@
                 <a:ea typeface="Segoe UI Semilight" pitchFamily="34" charset="-122"/>
                 <a:cs typeface="Segoe UI Semilight" pitchFamily="34" charset="-120"/>
               </a:rPr>
-              <a:t>Bracketed figures are unset. No bracket reaches a customer artifact.</a:t>
+              <a:t>Bracketed items are open for decision. None reaches a customer artifact.</a:t>
             </a:r>
             <a:endParaRPr lang="en-US" sz="850" dirty="0"/>
           </a:p>
@@ -3602,7 +3602,7 @@
                 <a:ea typeface="Segoe UI" pitchFamily="34" charset="-122"/>
                 <a:cs typeface="Segoe UI" pitchFamily="34" charset="-120"/>
               </a:rPr>
-              <a:t>BOX Solutions   ·   revised</a:t>
+              <a:t>BOX Solutions   ·   revised 2026-09-02</a:t>
             </a:r>
             <a:endParaRPr lang="en-US" sz="900" dirty="0"/>
           </a:p>
@@ -11548,7 +11548,7 @@
                 <a:ea typeface="Segoe UI Semilight" pitchFamily="34" charset="-122"/>
                 <a:cs typeface="Segoe UI Semilight" pitchFamily="34" charset="-120"/>
               </a:rPr>
-              <a:t>    Both lines above appear on every customer overview and deck, or the commit column silently acquires a number nobody set.</a:t>
+              <a:t>    Both lines above appear on every customer overview and deck, so no target is ever mistaken for a commitment.</a:t>
             </a:r>
             <a:endParaRPr lang="en-US" sz="1050" dirty="0"/>
           </a:p>
@@ -15590,7 +15590,7 @@
                 <a:ea typeface="Segoe UI Semilight" pitchFamily="34" charset="-122"/>
                 <a:cs typeface="Segoe UI Semilight" pitchFamily="34" charset="-120"/>
               </a:rPr>
-              <a:t>Automatum · BLOCKING</a:t>
+              <a:t>Automatum · needed first</a:t>
             </a:r>
             <a:endParaRPr lang="en-US" sz="850" dirty="0"/>
           </a:p>
@@ -15899,7 +15899,7 @@
                 <a:ea typeface="Segoe UI Semilight" pitchFamily="34" charset="-122"/>
                 <a:cs typeface="Segoe UI Semilight" pitchFamily="34" charset="-120"/>
               </a:rPr>
-              <a:t>    The $10,000 fee and the ladder cannot be validated until OBP knows its share. A split below OBP’s walk-away means the prices are wrong, not the split.</a:t>
+              <a:t>    The fee and the ladder are only validated once the split is known — so these terms come before any repricing.</a:t>
             </a:r>
             <a:endParaRPr lang="en-US" sz="1050" dirty="0"/>
           </a:p>
@@ -18440,7 +18440,7 @@
                 <a:ea typeface="Segoe UI Semilight" pitchFamily="34" charset="-122"/>
                 <a:cs typeface="Segoe UI Semilight" pitchFamily="34" charset="-120"/>
               </a:rPr>
-              <a:t>The whole recommendation is contingent on the 12-month listing clock running per Solution ID from entry. If it runs programme-level, sequencing burns the clock rather than staggering it, and this slide is wrong.</a:t>
+              <a:t>The whole recommendation is contingent on the 12-month listing clock running per Solution ID from entry. If it runs programme-level, sequencing burns the clock rather than staggering it, and the sequence changes.</a:t>
             </a:r>
             <a:endParaRPr lang="en-US" sz="850" dirty="0"/>
           </a:p>
@@ -18750,8 +18750,8 @@
         </p:nvSpPr>
         <p:spPr>
           <a:xfrm>
-            <a:off x="566420" y="2216150"/>
-            <a:ext cx="11055350" cy="292100"/>
+            <a:off x="566420" y="2165350"/>
+            <a:ext cx="11055350" cy="266700"/>
           </a:xfrm>
           <a:prstGeom prst="rect">
             <a:avLst/>
@@ -18770,7 +18770,7 @@
         </p:nvSpPr>
         <p:spPr>
           <a:xfrm>
-            <a:off x="749300" y="2286000"/>
+            <a:off x="749300" y="2235200"/>
             <a:ext cx="4191000" cy="203200"/>
           </a:xfrm>
           <a:prstGeom prst="rect">
@@ -18787,7 +18787,7 @@
               <a:buNone/>
             </a:pPr>
             <a:r>
-              <a:rPr lang="en-US" sz="950" b="1" dirty="0">
+              <a:rPr lang="en-US" sz="900" b="1" dirty="0">
                 <a:solidFill>
                   <a:srgbClr val="FFFFFF"/>
                 </a:solidFill>
@@ -18797,7 +18797,7 @@
               </a:rPr>
               <a:t>Entry condition or item</a:t>
             </a:r>
-            <a:endParaRPr lang="en-US" sz="950" dirty="0"/>
+            <a:endParaRPr lang="en-US" sz="900" dirty="0"/>
           </a:p>
         </p:txBody>
       </p:sp>
@@ -18809,7 +18809,7 @@
         </p:nvSpPr>
         <p:spPr>
           <a:xfrm>
-            <a:off x="5143500" y="2286000"/>
+            <a:off x="5143500" y="2235200"/>
             <a:ext cx="1905000" cy="203200"/>
           </a:xfrm>
           <a:prstGeom prst="rect">
@@ -18826,7 +18826,7 @@
               <a:buNone/>
             </a:pPr>
             <a:r>
-              <a:rPr lang="en-US" sz="950" b="1" dirty="0">
+              <a:rPr lang="en-US" sz="900" b="1" dirty="0">
                 <a:solidFill>
                   <a:srgbClr val="FFFFFF"/>
                 </a:solidFill>
@@ -18836,7 +18836,7 @@
               </a:rPr>
               <a:t>Owner</a:t>
             </a:r>
-            <a:endParaRPr lang="en-US" sz="950" dirty="0"/>
+            <a:endParaRPr lang="en-US" sz="900" dirty="0"/>
           </a:p>
         </p:txBody>
       </p:sp>
@@ -18848,7 +18848,7 @@
         </p:nvSpPr>
         <p:spPr>
           <a:xfrm>
-            <a:off x="7366000" y="2286000"/>
+            <a:off x="7366000" y="2235200"/>
             <a:ext cx="2895600" cy="203200"/>
           </a:xfrm>
           <a:prstGeom prst="rect">
@@ -18865,7 +18865,7 @@
               <a:buNone/>
             </a:pPr>
             <a:r>
-              <a:rPr lang="en-US" sz="950" b="1" dirty="0">
+              <a:rPr lang="en-US" sz="900" b="1" dirty="0">
                 <a:solidFill>
                   <a:srgbClr val="FFFFFF"/>
                 </a:solidFill>
@@ -18875,7 +18875,7 @@
               </a:rPr>
               <a:t>Standing</a:t>
             </a:r>
-            <a:endParaRPr lang="en-US" sz="950" dirty="0"/>
+            <a:endParaRPr lang="en-US" sz="900" dirty="0"/>
           </a:p>
         </p:txBody>
       </p:sp>
@@ -18887,8 +18887,8 @@
         </p:nvSpPr>
         <p:spPr>
           <a:xfrm>
-            <a:off x="566420" y="2851150"/>
-            <a:ext cx="11055350" cy="292100"/>
+            <a:off x="566420" y="2749550"/>
+            <a:ext cx="11055350" cy="266700"/>
           </a:xfrm>
           <a:prstGeom prst="rect">
             <a:avLst/>
@@ -18907,8 +18907,8 @@
         </p:nvSpPr>
         <p:spPr>
           <a:xfrm>
-            <a:off x="566420" y="3435350"/>
-            <a:ext cx="11055350" cy="292100"/>
+            <a:off x="566420" y="3282950"/>
+            <a:ext cx="11055350" cy="266700"/>
           </a:xfrm>
           <a:prstGeom prst="rect">
             <a:avLst/>
@@ -18927,8 +18927,8 @@
         </p:nvSpPr>
         <p:spPr>
           <a:xfrm>
-            <a:off x="566420" y="4019550"/>
-            <a:ext cx="11055350" cy="292100"/>
+            <a:off x="566420" y="3816350"/>
+            <a:ext cx="11055350" cy="266700"/>
           </a:xfrm>
           <a:prstGeom prst="rect">
             <a:avLst/>
@@ -18947,8 +18947,8 @@
         </p:nvSpPr>
         <p:spPr>
           <a:xfrm>
-            <a:off x="566420" y="4603750"/>
-            <a:ext cx="11055350" cy="292100"/>
+            <a:off x="566420" y="4349750"/>
+            <a:ext cx="11055350" cy="266700"/>
           </a:xfrm>
           <a:prstGeom prst="rect">
             <a:avLst/>
@@ -18961,30 +18961,50 @@
       </p:sp>
       <p:sp>
         <p:nvSpPr>
-          <p:cNvPr id="17" name="Text 13"/>
-          <p:cNvSpPr txBox="1"/>
-          <p:nvPr/>
-        </p:nvSpPr>
-        <p:spPr>
-          <a:xfrm>
-            <a:off x="749300" y="2628900"/>
-            <a:ext cx="4191000" cy="292100"/>
-          </a:xfrm>
-          <a:prstGeom prst="rect">
-            <a:avLst/>
-          </a:prstGeom>
-          <a:noFill/>
-          <a:ln/>
-        </p:spPr>
-        <p:txBody>
-          <a:bodyPr wrap="square" lIns="0" tIns="0" rIns="0" bIns="0" rtlCol="0" anchor="t"/>
-          <a:lstStyle/>
-          <a:p>
-            <a:pPr indent="0" marL="0">
-              <a:buNone/>
-            </a:pPr>
-            <a:r>
-              <a:rPr lang="en-US" sz="950" b="1" dirty="0">
+          <p:cNvPr id="17" name="Shape 13"/>
+          <p:cNvSpPr/>
+          <p:nvPr/>
+        </p:nvSpPr>
+        <p:spPr>
+          <a:xfrm>
+            <a:off x="566420" y="4883150"/>
+            <a:ext cx="11055350" cy="266700"/>
+          </a:xfrm>
+          <a:prstGeom prst="rect">
+            <a:avLst/>
+          </a:prstGeom>
+          <a:solidFill>
+            <a:srgbClr val="F5F8FC"/>
+          </a:solidFill>
+          <a:ln/>
+        </p:spPr>
+      </p:sp>
+      <p:sp>
+        <p:nvSpPr>
+          <p:cNvPr id="18" name="Text 14"/>
+          <p:cNvSpPr txBox="1"/>
+          <p:nvPr/>
+        </p:nvSpPr>
+        <p:spPr>
+          <a:xfrm>
+            <a:off x="749300" y="2552700"/>
+            <a:ext cx="4191000" cy="266700"/>
+          </a:xfrm>
+          <a:prstGeom prst="rect">
+            <a:avLst/>
+          </a:prstGeom>
+          <a:noFill/>
+          <a:ln/>
+        </p:spPr>
+        <p:txBody>
+          <a:bodyPr wrap="square" lIns="0" tIns="0" rIns="0" bIns="0" rtlCol="0" anchor="t"/>
+          <a:lstStyle/>
+          <a:p>
+            <a:pPr indent="0" marL="0">
+              <a:buNone/>
+            </a:pPr>
+            <a:r>
+              <a:rPr lang="en-US" sz="900" b="1" dirty="0">
                 <a:solidFill>
                   <a:srgbClr val="15224B"/>
                 </a:solidFill>
@@ -18994,36 +19014,36 @@
               </a:rPr>
               <a:t>Validated or Differentiated held by the lead partner</a:t>
             </a:r>
-            <a:endParaRPr lang="en-US" sz="950" dirty="0"/>
-          </a:p>
-        </p:txBody>
-      </p:sp>
-      <p:sp>
-        <p:nvSpPr>
-          <p:cNvPr id="18" name="Text 14"/>
-          <p:cNvSpPr txBox="1"/>
-          <p:nvPr/>
-        </p:nvSpPr>
-        <p:spPr>
-          <a:xfrm>
-            <a:off x="5143500" y="2628900"/>
-            <a:ext cx="1905000" cy="292100"/>
-          </a:xfrm>
-          <a:prstGeom prst="rect">
-            <a:avLst/>
-          </a:prstGeom>
-          <a:noFill/>
-          <a:ln/>
-        </p:spPr>
-        <p:txBody>
-          <a:bodyPr wrap="square" lIns="0" tIns="0" rIns="0" bIns="0" rtlCol="0" anchor="t"/>
-          <a:lstStyle/>
-          <a:p>
-            <a:pPr indent="0" marL="0">
-              <a:buNone/>
-            </a:pPr>
-            <a:r>
-              <a:rPr lang="en-US" sz="950" dirty="0">
+            <a:endParaRPr lang="en-US" sz="900" dirty="0"/>
+          </a:p>
+        </p:txBody>
+      </p:sp>
+      <p:sp>
+        <p:nvSpPr>
+          <p:cNvPr id="19" name="Text 15"/>
+          <p:cNvSpPr txBox="1"/>
+          <p:nvPr/>
+        </p:nvSpPr>
+        <p:spPr>
+          <a:xfrm>
+            <a:off x="5143500" y="2552700"/>
+            <a:ext cx="1905000" cy="266700"/>
+          </a:xfrm>
+          <a:prstGeom prst="rect">
+            <a:avLst/>
+          </a:prstGeom>
+          <a:noFill/>
+          <a:ln/>
+        </p:spPr>
+        <p:txBody>
+          <a:bodyPr wrap="square" lIns="0" tIns="0" rIns="0" bIns="0" rtlCol="0" anchor="t"/>
+          <a:lstStyle/>
+          <a:p>
+            <a:pPr indent="0" marL="0">
+              <a:buNone/>
+            </a:pPr>
+            <a:r>
+              <a:rPr lang="en-US" sz="900" dirty="0">
                 <a:solidFill>
                   <a:srgbClr val="5B6378"/>
                 </a:solidFill>
@@ -19033,36 +19053,36 @@
               </a:rPr>
               <a:t>Automatum</a:t>
             </a:r>
-            <a:endParaRPr lang="en-US" sz="950" dirty="0"/>
-          </a:p>
-        </p:txBody>
-      </p:sp>
-      <p:sp>
-        <p:nvSpPr>
-          <p:cNvPr id="19" name="Text 15"/>
-          <p:cNvSpPr txBox="1"/>
-          <p:nvPr/>
-        </p:nvSpPr>
-        <p:spPr>
-          <a:xfrm>
-            <a:off x="7366000" y="2628900"/>
-            <a:ext cx="2895600" cy="292100"/>
-          </a:xfrm>
-          <a:prstGeom prst="rect">
-            <a:avLst/>
-          </a:prstGeom>
-          <a:noFill/>
-          <a:ln/>
-        </p:spPr>
-        <p:txBody>
-          <a:bodyPr wrap="square" lIns="0" tIns="0" rIns="0" bIns="0" rtlCol="0" anchor="t"/>
-          <a:lstStyle/>
-          <a:p>
-            <a:pPr indent="0" marL="0">
-              <a:buNone/>
-            </a:pPr>
-            <a:r>
-              <a:rPr lang="en-US" sz="950" dirty="0">
+            <a:endParaRPr lang="en-US" sz="900" dirty="0"/>
+          </a:p>
+        </p:txBody>
+      </p:sp>
+      <p:sp>
+        <p:nvSpPr>
+          <p:cNvPr id="20" name="Text 16"/>
+          <p:cNvSpPr txBox="1"/>
+          <p:nvPr/>
+        </p:nvSpPr>
+        <p:spPr>
+          <a:xfrm>
+            <a:off x="7366000" y="2552700"/>
+            <a:ext cx="2895600" cy="266700"/>
+          </a:xfrm>
+          <a:prstGeom prst="rect">
+            <a:avLst/>
+          </a:prstGeom>
+          <a:noFill/>
+          <a:ln/>
+        </p:spPr>
+        <p:txBody>
+          <a:bodyPr wrap="square" lIns="0" tIns="0" rIns="0" bIns="0" rtlCol="0" anchor="t"/>
+          <a:lstStyle/>
+          <a:p>
+            <a:pPr indent="0" marL="0">
+              <a:buNone/>
+            </a:pPr>
+            <a:r>
+              <a:rPr lang="en-US" sz="900" dirty="0">
                 <a:solidFill>
                   <a:srgbClr val="5B6378"/>
                 </a:solidFill>
@@ -19070,38 +19090,38 @@
                 <a:ea typeface="Segoe UI Semilight" pitchFamily="34" charset="-122"/>
                 <a:cs typeface="Segoe UI Semilight" pitchFamily="34" charset="-120"/>
               </a:rPr>
-              <a:t>Stated by Automatum (Aein, email) — evidence to attach</a:t>
-            </a:r>
-            <a:endParaRPr lang="en-US" sz="950" dirty="0"/>
-          </a:p>
-        </p:txBody>
-      </p:sp>
-      <p:sp>
-        <p:nvSpPr>
-          <p:cNvPr id="20" name="Text 16"/>
-          <p:cNvSpPr txBox="1"/>
-          <p:nvPr/>
-        </p:nvSpPr>
-        <p:spPr>
-          <a:xfrm>
-            <a:off x="749300" y="2921000"/>
-            <a:ext cx="4191000" cy="292100"/>
-          </a:xfrm>
-          <a:prstGeom prst="rect">
-            <a:avLst/>
-          </a:prstGeom>
-          <a:noFill/>
-          <a:ln/>
-        </p:spPr>
-        <p:txBody>
-          <a:bodyPr wrap="square" lIns="0" tIns="0" rIns="0" bIns="0" rtlCol="0" anchor="t"/>
-          <a:lstStyle/>
-          <a:p>
-            <a:pPr indent="0" marL="0">
-              <a:buNone/>
-            </a:pPr>
-            <a:r>
-              <a:rPr lang="en-US" sz="950" b="1" dirty="0">
+              <a:t>Stated by Automatum — Partner Central evidence to attach</a:t>
+            </a:r>
+            <a:endParaRPr lang="en-US" sz="900" dirty="0"/>
+          </a:p>
+        </p:txBody>
+      </p:sp>
+      <p:sp>
+        <p:nvSpPr>
+          <p:cNvPr id="21" name="Text 17"/>
+          <p:cNvSpPr txBox="1"/>
+          <p:nvPr/>
+        </p:nvSpPr>
+        <p:spPr>
+          <a:xfrm>
+            <a:off x="749300" y="2819400"/>
+            <a:ext cx="4191000" cy="266700"/>
+          </a:xfrm>
+          <a:prstGeom prst="rect">
+            <a:avLst/>
+          </a:prstGeom>
+          <a:noFill/>
+          <a:ln/>
+        </p:spPr>
+        <p:txBody>
+          <a:bodyPr wrap="square" lIns="0" tIns="0" rIns="0" bIns="0" rtlCol="0" anchor="t"/>
+          <a:lstStyle/>
+          <a:p>
+            <a:pPr indent="0" marL="0">
+              <a:buNone/>
+            </a:pPr>
+            <a:r>
+              <a:rPr lang="en-US" sz="900" b="1" dirty="0">
                 <a:solidFill>
                   <a:srgbClr val="15224B"/>
                 </a:solidFill>
@@ -19111,36 +19131,36 @@
               </a:rPr>
               <a:t>Automatum is lead partner of record on all four Solution IDs</a:t>
             </a:r>
-            <a:endParaRPr lang="en-US" sz="950" dirty="0"/>
-          </a:p>
-        </p:txBody>
-      </p:sp>
-      <p:sp>
-        <p:nvSpPr>
-          <p:cNvPr id="21" name="Text 17"/>
-          <p:cNvSpPr txBox="1"/>
-          <p:nvPr/>
-        </p:nvSpPr>
-        <p:spPr>
-          <a:xfrm>
-            <a:off x="5143500" y="2921000"/>
-            <a:ext cx="1905000" cy="292100"/>
-          </a:xfrm>
-          <a:prstGeom prst="rect">
-            <a:avLst/>
-          </a:prstGeom>
-          <a:noFill/>
-          <a:ln/>
-        </p:spPr>
-        <p:txBody>
-          <a:bodyPr wrap="square" lIns="0" tIns="0" rIns="0" bIns="0" rtlCol="0" anchor="t"/>
-          <a:lstStyle/>
-          <a:p>
-            <a:pPr indent="0" marL="0">
-              <a:buNone/>
-            </a:pPr>
-            <a:r>
-              <a:rPr lang="en-US" sz="950" dirty="0">
+            <a:endParaRPr lang="en-US" sz="900" dirty="0"/>
+          </a:p>
+        </p:txBody>
+      </p:sp>
+      <p:sp>
+        <p:nvSpPr>
+          <p:cNvPr id="22" name="Text 18"/>
+          <p:cNvSpPr txBox="1"/>
+          <p:nvPr/>
+        </p:nvSpPr>
+        <p:spPr>
+          <a:xfrm>
+            <a:off x="5143500" y="2819400"/>
+            <a:ext cx="1905000" cy="266700"/>
+          </a:xfrm>
+          <a:prstGeom prst="rect">
+            <a:avLst/>
+          </a:prstGeom>
+          <a:noFill/>
+          <a:ln/>
+        </p:spPr>
+        <p:txBody>
+          <a:bodyPr wrap="square" lIns="0" tIns="0" rIns="0" bIns="0" rtlCol="0" anchor="t"/>
+          <a:lstStyle/>
+          <a:p>
+            <a:pPr indent="0" marL="0">
+              <a:buNone/>
+            </a:pPr>
+            <a:r>
+              <a:rPr lang="en-US" sz="900" dirty="0">
                 <a:solidFill>
                   <a:srgbClr val="5B6378"/>
                 </a:solidFill>
@@ -19150,36 +19170,36 @@
               </a:rPr>
               <a:t>Automatum</a:t>
             </a:r>
-            <a:endParaRPr lang="en-US" sz="950" dirty="0"/>
-          </a:p>
-        </p:txBody>
-      </p:sp>
-      <p:sp>
-        <p:nvSpPr>
-          <p:cNvPr id="22" name="Text 18"/>
-          <p:cNvSpPr txBox="1"/>
-          <p:nvPr/>
-        </p:nvSpPr>
-        <p:spPr>
-          <a:xfrm>
-            <a:off x="7366000" y="2921000"/>
-            <a:ext cx="2895600" cy="292100"/>
-          </a:xfrm>
-          <a:prstGeom prst="rect">
-            <a:avLst/>
-          </a:prstGeom>
-          <a:noFill/>
-          <a:ln/>
-        </p:spPr>
-        <p:txBody>
-          <a:bodyPr wrap="square" lIns="0" tIns="0" rIns="0" bIns="0" rtlCol="0" anchor="t"/>
-          <a:lstStyle/>
-          <a:p>
-            <a:pPr indent="0" marL="0">
-              <a:buNone/>
-            </a:pPr>
-            <a:r>
-              <a:rPr lang="en-US" sz="950" dirty="0">
+            <a:endParaRPr lang="en-US" sz="900" dirty="0"/>
+          </a:p>
+        </p:txBody>
+      </p:sp>
+      <p:sp>
+        <p:nvSpPr>
+          <p:cNvPr id="23" name="Text 19"/>
+          <p:cNvSpPr txBox="1"/>
+          <p:nvPr/>
+        </p:nvSpPr>
+        <p:spPr>
+          <a:xfrm>
+            <a:off x="7366000" y="2819400"/>
+            <a:ext cx="2895600" cy="266700"/>
+          </a:xfrm>
+          <a:prstGeom prst="rect">
+            <a:avLst/>
+          </a:prstGeom>
+          <a:noFill/>
+          <a:ln/>
+        </p:spPr>
+        <p:txBody>
+          <a:bodyPr wrap="square" lIns="0" tIns="0" rIns="0" bIns="0" rtlCol="0" anchor="t"/>
+          <a:lstStyle/>
+          <a:p>
+            <a:pPr indent="0" marL="0">
+              <a:buNone/>
+            </a:pPr>
+            <a:r>
+              <a:rPr lang="en-US" sz="900" dirty="0">
                 <a:solidFill>
                   <a:srgbClr val="5B6378"/>
                 </a:solidFill>
@@ -19189,36 +19209,36 @@
               </a:rPr>
               <a:t>To confirm</a:t>
             </a:r>
-            <a:endParaRPr lang="en-US" sz="950" dirty="0"/>
-          </a:p>
-        </p:txBody>
-      </p:sp>
-      <p:sp>
-        <p:nvSpPr>
-          <p:cNvPr id="23" name="Text 19"/>
-          <p:cNvSpPr txBox="1"/>
-          <p:nvPr/>
-        </p:nvSpPr>
-        <p:spPr>
-          <a:xfrm>
-            <a:off x="749300" y="3213100"/>
-            <a:ext cx="4191000" cy="292100"/>
-          </a:xfrm>
-          <a:prstGeom prst="rect">
-            <a:avLst/>
-          </a:prstGeom>
-          <a:noFill/>
-          <a:ln/>
-        </p:spPr>
-        <p:txBody>
-          <a:bodyPr wrap="square" lIns="0" tIns="0" rIns="0" bIns="0" rtlCol="0" anchor="t"/>
-          <a:lstStyle/>
-          <a:p>
-            <a:pPr indent="0" marL="0">
-              <a:buNone/>
-            </a:pPr>
-            <a:r>
-              <a:rPr lang="en-US" sz="950" b="1" dirty="0">
+            <a:endParaRPr lang="en-US" sz="900" dirty="0"/>
+          </a:p>
+        </p:txBody>
+      </p:sp>
+      <p:sp>
+        <p:nvSpPr>
+          <p:cNvPr id="24" name="Text 20"/>
+          <p:cNvSpPr txBox="1"/>
+          <p:nvPr/>
+        </p:nvSpPr>
+        <p:spPr>
+          <a:xfrm>
+            <a:off x="749300" y="3086100"/>
+            <a:ext cx="4191000" cy="266700"/>
+          </a:xfrm>
+          <a:prstGeom prst="rect">
+            <a:avLst/>
+          </a:prstGeom>
+          <a:noFill/>
+          <a:ln/>
+        </p:spPr>
+        <p:txBody>
+          <a:bodyPr wrap="square" lIns="0" tIns="0" rIns="0" bIns="0" rtlCol="0" anchor="t"/>
+          <a:lstStyle/>
+          <a:p>
+            <a:pPr indent="0" marL="0">
+              <a:buNone/>
+            </a:pPr>
+            <a:r>
+              <a:rPr lang="en-US" sz="900" b="1" dirty="0">
                 <a:solidFill>
                   <a:srgbClr val="15224B"/>
                 </a:solidFill>
@@ -19228,36 +19248,36 @@
               </a:rPr>
               <a:t>Solution listed within 12 months</a:t>
             </a:r>
-            <a:endParaRPr lang="en-US" sz="950" dirty="0"/>
-          </a:p>
-        </p:txBody>
-      </p:sp>
-      <p:sp>
-        <p:nvSpPr>
-          <p:cNvPr id="24" name="Text 20"/>
-          <p:cNvSpPr txBox="1"/>
-          <p:nvPr/>
-        </p:nvSpPr>
-        <p:spPr>
-          <a:xfrm>
-            <a:off x="5143500" y="3213100"/>
-            <a:ext cx="1905000" cy="292100"/>
-          </a:xfrm>
-          <a:prstGeom prst="rect">
-            <a:avLst/>
-          </a:prstGeom>
-          <a:noFill/>
-          <a:ln/>
-        </p:spPr>
-        <p:txBody>
-          <a:bodyPr wrap="square" lIns="0" tIns="0" rIns="0" bIns="0" rtlCol="0" anchor="t"/>
-          <a:lstStyle/>
-          <a:p>
-            <a:pPr indent="0" marL="0">
-              <a:buNone/>
-            </a:pPr>
-            <a:r>
-              <a:rPr lang="en-US" sz="950" dirty="0">
+            <a:endParaRPr lang="en-US" sz="900" dirty="0"/>
+          </a:p>
+        </p:txBody>
+      </p:sp>
+      <p:sp>
+        <p:nvSpPr>
+          <p:cNvPr id="25" name="Text 21"/>
+          <p:cNvSpPr txBox="1"/>
+          <p:nvPr/>
+        </p:nvSpPr>
+        <p:spPr>
+          <a:xfrm>
+            <a:off x="5143500" y="3086100"/>
+            <a:ext cx="1905000" cy="266700"/>
+          </a:xfrm>
+          <a:prstGeom prst="rect">
+            <a:avLst/>
+          </a:prstGeom>
+          <a:noFill/>
+          <a:ln/>
+        </p:spPr>
+        <p:txBody>
+          <a:bodyPr wrap="square" lIns="0" tIns="0" rIns="0" bIns="0" rtlCol="0" anchor="t"/>
+          <a:lstStyle/>
+          <a:p>
+            <a:pPr indent="0" marL="0">
+              <a:buNone/>
+            </a:pPr>
+            <a:r>
+              <a:rPr lang="en-US" sz="900" dirty="0">
                 <a:solidFill>
                   <a:srgbClr val="5B6378"/>
                 </a:solidFill>
@@ -19267,36 +19287,36 @@
               </a:rPr>
               <a:t>Automatum + OBP</a:t>
             </a:r>
-            <a:endParaRPr lang="en-US" sz="950" dirty="0"/>
-          </a:p>
-        </p:txBody>
-      </p:sp>
-      <p:sp>
-        <p:nvSpPr>
-          <p:cNvPr id="25" name="Text 21"/>
-          <p:cNvSpPr txBox="1"/>
-          <p:nvPr/>
-        </p:nvSpPr>
-        <p:spPr>
-          <a:xfrm>
-            <a:off x="7366000" y="3213100"/>
-            <a:ext cx="2895600" cy="292100"/>
-          </a:xfrm>
-          <a:prstGeom prst="rect">
-            <a:avLst/>
-          </a:prstGeom>
-          <a:noFill/>
-          <a:ln/>
-        </p:spPr>
-        <p:txBody>
-          <a:bodyPr wrap="square" lIns="0" tIns="0" rIns="0" bIns="0" rtlCol="0" anchor="t"/>
-          <a:lstStyle/>
-          <a:p>
-            <a:pPr indent="0" marL="0">
-              <a:buNone/>
-            </a:pPr>
-            <a:r>
-              <a:rPr lang="en-US" sz="950" dirty="0">
+            <a:endParaRPr lang="en-US" sz="900" dirty="0"/>
+          </a:p>
+        </p:txBody>
+      </p:sp>
+      <p:sp>
+        <p:nvSpPr>
+          <p:cNvPr id="26" name="Text 22"/>
+          <p:cNvSpPr txBox="1"/>
+          <p:nvPr/>
+        </p:nvSpPr>
+        <p:spPr>
+          <a:xfrm>
+            <a:off x="7366000" y="3086100"/>
+            <a:ext cx="2895600" cy="266700"/>
+          </a:xfrm>
+          <a:prstGeom prst="rect">
+            <a:avLst/>
+          </a:prstGeom>
+          <a:noFill/>
+          <a:ln/>
+        </p:spPr>
+        <p:txBody>
+          <a:bodyPr wrap="square" lIns="0" tIns="0" rIns="0" bIns="0" rtlCol="0" anchor="t"/>
+          <a:lstStyle/>
+          <a:p>
+            <a:pPr indent="0" marL="0">
+              <a:buNone/>
+            </a:pPr>
+            <a:r>
+              <a:rPr lang="en-US" sz="900" dirty="0">
                 <a:solidFill>
                   <a:srgbClr val="5B6378"/>
                 </a:solidFill>
@@ -19306,36 +19326,36 @@
               </a:rPr>
               <a:t>[Per-wave deadlines once the clock basis is confirmed]</a:t>
             </a:r>
-            <a:endParaRPr lang="en-US" sz="950" dirty="0"/>
-          </a:p>
-        </p:txBody>
-      </p:sp>
-      <p:sp>
-        <p:nvSpPr>
-          <p:cNvPr id="26" name="Text 22"/>
-          <p:cNvSpPr txBox="1"/>
-          <p:nvPr/>
-        </p:nvSpPr>
-        <p:spPr>
-          <a:xfrm>
-            <a:off x="749300" y="3505200"/>
-            <a:ext cx="4191000" cy="292100"/>
-          </a:xfrm>
-          <a:prstGeom prst="rect">
-            <a:avLst/>
-          </a:prstGeom>
-          <a:noFill/>
-          <a:ln/>
-        </p:spPr>
-        <p:txBody>
-          <a:bodyPr wrap="square" lIns="0" tIns="0" rIns="0" bIns="0" rtlCol="0" anchor="t"/>
-          <a:lstStyle/>
-          <a:p>
-            <a:pPr indent="0" marL="0">
-              <a:buNone/>
-            </a:pPr>
-            <a:r>
-              <a:rPr lang="en-US" sz="950" b="1" dirty="0">
+            <a:endParaRPr lang="en-US" sz="900" dirty="0"/>
+          </a:p>
+        </p:txBody>
+      </p:sp>
+      <p:sp>
+        <p:nvSpPr>
+          <p:cNvPr id="27" name="Text 23"/>
+          <p:cNvSpPr txBox="1"/>
+          <p:nvPr/>
+        </p:nvSpPr>
+        <p:spPr>
+          <a:xfrm>
+            <a:off x="749300" y="3352800"/>
+            <a:ext cx="4191000" cy="266700"/>
+          </a:xfrm>
+          <a:prstGeom prst="rect">
+            <a:avLst/>
+          </a:prstGeom>
+          <a:noFill/>
+          <a:ln/>
+        </p:spPr>
+        <p:txBody>
+          <a:bodyPr wrap="square" lIns="0" tIns="0" rIns="0" bIns="0" rtlCol="0" anchor="t"/>
+          <a:lstStyle/>
+          <a:p>
+            <a:pPr indent="0" marL="0">
+              <a:buNone/>
+            </a:pPr>
+            <a:r>
+              <a:rPr lang="en-US" sz="900" b="1" dirty="0">
                 <a:solidFill>
                   <a:srgbClr val="15224B"/>
                 </a:solidFill>
@@ -19345,36 +19365,36 @@
               </a:rPr>
               <a:t>Five ACE opportunity submissions per solution</a:t>
             </a:r>
-            <a:endParaRPr lang="en-US" sz="950" dirty="0"/>
-          </a:p>
-        </p:txBody>
-      </p:sp>
-      <p:sp>
-        <p:nvSpPr>
-          <p:cNvPr id="27" name="Text 23"/>
-          <p:cNvSpPr txBox="1"/>
-          <p:nvPr/>
-        </p:nvSpPr>
-        <p:spPr>
-          <a:xfrm>
-            <a:off x="5143500" y="3505200"/>
-            <a:ext cx="1905000" cy="292100"/>
-          </a:xfrm>
-          <a:prstGeom prst="rect">
-            <a:avLst/>
-          </a:prstGeom>
-          <a:noFill/>
-          <a:ln/>
-        </p:spPr>
-        <p:txBody>
-          <a:bodyPr wrap="square" lIns="0" tIns="0" rIns="0" bIns="0" rtlCol="0" anchor="t"/>
-          <a:lstStyle/>
-          <a:p>
-            <a:pPr indent="0" marL="0">
-              <a:buNone/>
-            </a:pPr>
-            <a:r>
-              <a:rPr lang="en-US" sz="950" dirty="0">
+            <a:endParaRPr lang="en-US" sz="900" dirty="0"/>
+          </a:p>
+        </p:txBody>
+      </p:sp>
+      <p:sp>
+        <p:nvSpPr>
+          <p:cNvPr id="28" name="Text 24"/>
+          <p:cNvSpPr txBox="1"/>
+          <p:nvPr/>
+        </p:nvSpPr>
+        <p:spPr>
+          <a:xfrm>
+            <a:off x="5143500" y="3352800"/>
+            <a:ext cx="1905000" cy="266700"/>
+          </a:xfrm>
+          <a:prstGeom prst="rect">
+            <a:avLst/>
+          </a:prstGeom>
+          <a:noFill/>
+          <a:ln/>
+        </p:spPr>
+        <p:txBody>
+          <a:bodyPr wrap="square" lIns="0" tIns="0" rIns="0" bIns="0" rtlCol="0" anchor="t"/>
+          <a:lstStyle/>
+          <a:p>
+            <a:pPr indent="0" marL="0">
+              <a:buNone/>
+            </a:pPr>
+            <a:r>
+              <a:rPr lang="en-US" sz="900" dirty="0">
                 <a:solidFill>
                   <a:srgbClr val="5B6378"/>
                 </a:solidFill>
@@ -19384,36 +19404,36 @@
               </a:rPr>
               <a:t>OBP</a:t>
             </a:r>
-            <a:endParaRPr lang="en-US" sz="950" dirty="0"/>
-          </a:p>
-        </p:txBody>
-      </p:sp>
-      <p:sp>
-        <p:nvSpPr>
-          <p:cNvPr id="28" name="Text 24"/>
-          <p:cNvSpPr txBox="1"/>
-          <p:nvPr/>
-        </p:nvSpPr>
-        <p:spPr>
-          <a:xfrm>
-            <a:off x="7366000" y="3505200"/>
-            <a:ext cx="2895600" cy="292100"/>
-          </a:xfrm>
-          <a:prstGeom prst="rect">
-            <a:avLst/>
-          </a:prstGeom>
-          <a:noFill/>
-          <a:ln/>
-        </p:spPr>
-        <p:txBody>
-          <a:bodyPr wrap="square" lIns="0" tIns="0" rIns="0" bIns="0" rtlCol="0" anchor="t"/>
-          <a:lstStyle/>
-          <a:p>
-            <a:pPr indent="0" marL="0">
-              <a:buNone/>
-            </a:pPr>
-            <a:r>
-              <a:rPr lang="en-US" sz="950" dirty="0">
+            <a:endParaRPr lang="en-US" sz="900" dirty="0"/>
+          </a:p>
+        </p:txBody>
+      </p:sp>
+      <p:sp>
+        <p:nvSpPr>
+          <p:cNvPr id="29" name="Text 25"/>
+          <p:cNvSpPr txBox="1"/>
+          <p:nvPr/>
+        </p:nvSpPr>
+        <p:spPr>
+          <a:xfrm>
+            <a:off x="7366000" y="3352800"/>
+            <a:ext cx="2895600" cy="266700"/>
+          </a:xfrm>
+          <a:prstGeom prst="rect">
+            <a:avLst/>
+          </a:prstGeom>
+          <a:noFill/>
+          <a:ln/>
+        </p:spPr>
+        <p:txBody>
+          <a:bodyPr wrap="square" lIns="0" tIns="0" rIns="0" bIns="0" rtlCol="0" anchor="t"/>
+          <a:lstStyle/>
+          <a:p>
+            <a:pPr indent="0" marL="0">
+              <a:buNone/>
+            </a:pPr>
+            <a:r>
+              <a:rPr lang="en-US" sz="900" dirty="0">
                 <a:solidFill>
                   <a:srgbClr val="5B6378"/>
                 </a:solidFill>
@@ -19423,36 +19443,36 @@
               </a:rPr>
               <a:t>Built into each solution’s plan</a:t>
             </a:r>
-            <a:endParaRPr lang="en-US" sz="950" dirty="0"/>
-          </a:p>
-        </p:txBody>
-      </p:sp>
-      <p:sp>
-        <p:nvSpPr>
-          <p:cNvPr id="29" name="Text 25"/>
-          <p:cNvSpPr txBox="1"/>
-          <p:nvPr/>
-        </p:nvSpPr>
-        <p:spPr>
-          <a:xfrm>
-            <a:off x="749300" y="3797300"/>
-            <a:ext cx="4191000" cy="292100"/>
-          </a:xfrm>
-          <a:prstGeom prst="rect">
-            <a:avLst/>
-          </a:prstGeom>
-          <a:noFill/>
-          <a:ln/>
-        </p:spPr>
-        <p:txBody>
-          <a:bodyPr wrap="square" lIns="0" tIns="0" rIns="0" bIns="0" rtlCol="0" anchor="t"/>
-          <a:lstStyle/>
-          <a:p>
-            <a:pPr indent="0" marL="0">
-              <a:buNone/>
-            </a:pPr>
-            <a:r>
-              <a:rPr lang="en-US" sz="950" b="1" dirty="0">
+            <a:endParaRPr lang="en-US" sz="900" dirty="0"/>
+          </a:p>
+        </p:txBody>
+      </p:sp>
+      <p:sp>
+        <p:nvSpPr>
+          <p:cNvPr id="30" name="Text 26"/>
+          <p:cNvSpPr txBox="1"/>
+          <p:nvPr/>
+        </p:nvSpPr>
+        <p:spPr>
+          <a:xfrm>
+            <a:off x="749300" y="3619500"/>
+            <a:ext cx="4191000" cy="266700"/>
+          </a:xfrm>
+          <a:prstGeom prst="rect">
+            <a:avLst/>
+          </a:prstGeom>
+          <a:noFill/>
+          <a:ln/>
+        </p:spPr>
+        <p:txBody>
+          <a:bodyPr wrap="square" lIns="0" tIns="0" rIns="0" bIns="0" rtlCol="0" anchor="t"/>
+          <a:lstStyle/>
+          <a:p>
+            <a:pPr indent="0" marL="0">
+              <a:buNone/>
+            </a:pPr>
+            <a:r>
+              <a:rPr lang="en-US" sz="900" b="1" dirty="0">
                 <a:solidFill>
                   <a:srgbClr val="15224B"/>
                 </a:solidFill>
@@ -19462,36 +19482,36 @@
               </a:rPr>
               <a:t>Milestone 1 Feasibility Study per solution</a:t>
             </a:r>
-            <a:endParaRPr lang="en-US" sz="950" dirty="0"/>
-          </a:p>
-        </p:txBody>
-      </p:sp>
-      <p:sp>
-        <p:nvSpPr>
-          <p:cNvPr id="30" name="Text 26"/>
-          <p:cNvSpPr txBox="1"/>
-          <p:nvPr/>
-        </p:nvSpPr>
-        <p:spPr>
-          <a:xfrm>
-            <a:off x="5143500" y="3797300"/>
-            <a:ext cx="1905000" cy="292100"/>
-          </a:xfrm>
-          <a:prstGeom prst="rect">
-            <a:avLst/>
-          </a:prstGeom>
-          <a:noFill/>
-          <a:ln/>
-        </p:spPr>
-        <p:txBody>
-          <a:bodyPr wrap="square" lIns="0" tIns="0" rIns="0" bIns="0" rtlCol="0" anchor="t"/>
-          <a:lstStyle/>
-          <a:p>
-            <a:pPr indent="0" marL="0">
-              <a:buNone/>
-            </a:pPr>
-            <a:r>
-              <a:rPr lang="en-US" sz="950" dirty="0">
+            <a:endParaRPr lang="en-US" sz="900" dirty="0"/>
+          </a:p>
+        </p:txBody>
+      </p:sp>
+      <p:sp>
+        <p:nvSpPr>
+          <p:cNvPr id="31" name="Text 27"/>
+          <p:cNvSpPr txBox="1"/>
+          <p:nvPr/>
+        </p:nvSpPr>
+        <p:spPr>
+          <a:xfrm>
+            <a:off x="5143500" y="3619500"/>
+            <a:ext cx="1905000" cy="266700"/>
+          </a:xfrm>
+          <a:prstGeom prst="rect">
+            <a:avLst/>
+          </a:prstGeom>
+          <a:noFill/>
+          <a:ln/>
+        </p:spPr>
+        <p:txBody>
+          <a:bodyPr wrap="square" lIns="0" tIns="0" rIns="0" bIns="0" rtlCol="0" anchor="t"/>
+          <a:lstStyle/>
+          <a:p>
+            <a:pPr indent="0" marL="0">
+              <a:buNone/>
+            </a:pPr>
+            <a:r>
+              <a:rPr lang="en-US" sz="900" dirty="0">
                 <a:solidFill>
                   <a:srgbClr val="5B6378"/>
                 </a:solidFill>
@@ -19501,36 +19521,36 @@
               </a:rPr>
               <a:t>OBP</a:t>
             </a:r>
-            <a:endParaRPr lang="en-US" sz="950" dirty="0"/>
-          </a:p>
-        </p:txBody>
-      </p:sp>
-      <p:sp>
-        <p:nvSpPr>
-          <p:cNvPr id="31" name="Text 27"/>
-          <p:cNvSpPr txBox="1"/>
-          <p:nvPr/>
-        </p:nvSpPr>
-        <p:spPr>
-          <a:xfrm>
-            <a:off x="7366000" y="3797300"/>
-            <a:ext cx="2895600" cy="292100"/>
-          </a:xfrm>
-          <a:prstGeom prst="rect">
-            <a:avLst/>
-          </a:prstGeom>
-          <a:noFill/>
-          <a:ln/>
-        </p:spPr>
-        <p:txBody>
-          <a:bodyPr wrap="square" lIns="0" tIns="0" rIns="0" bIns="0" rtlCol="0" anchor="t"/>
-          <a:lstStyle/>
-          <a:p>
-            <a:pPr indent="0" marL="0">
-              <a:buNone/>
-            </a:pPr>
-            <a:r>
-              <a:rPr lang="en-US" sz="950" dirty="0">
+            <a:endParaRPr lang="en-US" sz="900" dirty="0"/>
+          </a:p>
+        </p:txBody>
+      </p:sp>
+      <p:sp>
+        <p:nvSpPr>
+          <p:cNvPr id="32" name="Text 28"/>
+          <p:cNvSpPr txBox="1"/>
+          <p:nvPr/>
+        </p:nvSpPr>
+        <p:spPr>
+          <a:xfrm>
+            <a:off x="7366000" y="3619500"/>
+            <a:ext cx="2895600" cy="266700"/>
+          </a:xfrm>
+          <a:prstGeom prst="rect">
+            <a:avLst/>
+          </a:prstGeom>
+          <a:noFill/>
+          <a:ln/>
+        </p:spPr>
+        <p:txBody>
+          <a:bodyPr wrap="square" lIns="0" tIns="0" rIns="0" bIns="0" rtlCol="0" anchor="t"/>
+          <a:lstStyle/>
+          <a:p>
+            <a:pPr indent="0" marL="0">
+              <a:buNone/>
+            </a:pPr>
+            <a:r>
+              <a:rPr lang="en-US" sz="900" dirty="0">
                 <a:solidFill>
                   <a:srgbClr val="5B6378"/>
                 </a:solidFill>
@@ -19540,36 +19560,36 @@
               </a:rPr>
               <a:t>Drafted from the overviews</a:t>
             </a:r>
-            <a:endParaRPr lang="en-US" sz="950" dirty="0"/>
-          </a:p>
-        </p:txBody>
-      </p:sp>
-      <p:sp>
-        <p:nvSpPr>
-          <p:cNvPr id="32" name="Text 28"/>
-          <p:cNvSpPr txBox="1"/>
-          <p:nvPr/>
-        </p:nvSpPr>
-        <p:spPr>
-          <a:xfrm>
-            <a:off x="749300" y="4089400"/>
-            <a:ext cx="4191000" cy="292100"/>
-          </a:xfrm>
-          <a:prstGeom prst="rect">
-            <a:avLst/>
-          </a:prstGeom>
-          <a:noFill/>
-          <a:ln/>
-        </p:spPr>
-        <p:txBody>
-          <a:bodyPr wrap="square" lIns="0" tIns="0" rIns="0" bIns="0" rtlCol="0" anchor="t"/>
-          <a:lstStyle/>
-          <a:p>
-            <a:pPr indent="0" marL="0">
-              <a:buNone/>
-            </a:pPr>
-            <a:r>
-              <a:rPr lang="en-US" sz="950" b="1" dirty="0">
+            <a:endParaRPr lang="en-US" sz="900" dirty="0"/>
+          </a:p>
+        </p:txBody>
+      </p:sp>
+      <p:sp>
+        <p:nvSpPr>
+          <p:cNvPr id="33" name="Text 29"/>
+          <p:cNvSpPr txBox="1"/>
+          <p:nvPr/>
+        </p:nvSpPr>
+        <p:spPr>
+          <a:xfrm>
+            <a:off x="749300" y="3886200"/>
+            <a:ext cx="4191000" cy="266700"/>
+          </a:xfrm>
+          <a:prstGeom prst="rect">
+            <a:avLst/>
+          </a:prstGeom>
+          <a:noFill/>
+          <a:ln/>
+        </p:spPr>
+        <p:txBody>
+          <a:bodyPr wrap="square" lIns="0" tIns="0" rIns="0" bIns="0" rtlCol="0" anchor="t"/>
+          <a:lstStyle/>
+          <a:p>
+            <a:pPr indent="0" marL="0">
+              <a:buNone/>
+            </a:pPr>
+            <a:r>
+              <a:rPr lang="en-US" sz="900" b="1" dirty="0">
                 <a:solidFill>
                   <a:srgbClr val="15224B"/>
                 </a:solidFill>
@@ -19577,38 +19597,38 @@
                 <a:ea typeface="Segoe UI" pitchFamily="34" charset="-122"/>
                 <a:cs typeface="Segoe UI" pitchFamily="34" charset="-120"/>
               </a:rPr>
-              <a:t>Commit / target set per retainer rung</a:t>
-            </a:r>
-            <a:endParaRPr lang="en-US" sz="950" dirty="0"/>
-          </a:p>
-        </p:txBody>
-      </p:sp>
-      <p:sp>
-        <p:nvSpPr>
-          <p:cNvPr id="33" name="Text 29"/>
-          <p:cNvSpPr txBox="1"/>
-          <p:nvPr/>
-        </p:nvSpPr>
-        <p:spPr>
-          <a:xfrm>
-            <a:off x="5143500" y="4089400"/>
-            <a:ext cx="1905000" cy="292100"/>
-          </a:xfrm>
-          <a:prstGeom prst="rect">
-            <a:avLst/>
-          </a:prstGeom>
-          <a:noFill/>
-          <a:ln/>
-        </p:spPr>
-        <p:txBody>
-          <a:bodyPr wrap="square" lIns="0" tIns="0" rIns="0" bIns="0" rtlCol="0" anchor="t"/>
-          <a:lstStyle/>
-          <a:p>
-            <a:pPr indent="0" marL="0">
-              <a:buNone/>
-            </a:pPr>
-            <a:r>
-              <a:rPr lang="en-US" sz="950" dirty="0">
+              <a:t>Retainer outcomes per rung</a:t>
+            </a:r>
+            <a:endParaRPr lang="en-US" sz="900" dirty="0"/>
+          </a:p>
+        </p:txBody>
+      </p:sp>
+      <p:sp>
+        <p:nvSpPr>
+          <p:cNvPr id="34" name="Text 30"/>
+          <p:cNvSpPr txBox="1"/>
+          <p:nvPr/>
+        </p:nvSpPr>
+        <p:spPr>
+          <a:xfrm>
+            <a:off x="5143500" y="3886200"/>
+            <a:ext cx="1905000" cy="266700"/>
+          </a:xfrm>
+          <a:prstGeom prst="rect">
+            <a:avLst/>
+          </a:prstGeom>
+          <a:noFill/>
+          <a:ln/>
+        </p:spPr>
+        <p:txBody>
+          <a:bodyPr wrap="square" lIns="0" tIns="0" rIns="0" bIns="0" rtlCol="0" anchor="t"/>
+          <a:lstStyle/>
+          <a:p>
+            <a:pPr indent="0" marL="0">
+              <a:buNone/>
+            </a:pPr>
+            <a:r>
+              <a:rPr lang="en-US" sz="900" dirty="0">
                 <a:solidFill>
                   <a:srgbClr val="5B6378"/>
                 </a:solidFill>
@@ -19618,36 +19638,36 @@
               </a:rPr>
               <a:t>OBP</a:t>
             </a:r>
-            <a:endParaRPr lang="en-US" sz="950" dirty="0"/>
-          </a:p>
-        </p:txBody>
-      </p:sp>
-      <p:sp>
-        <p:nvSpPr>
-          <p:cNvPr id="34" name="Text 30"/>
-          <p:cNvSpPr txBox="1"/>
-          <p:nvPr/>
-        </p:nvSpPr>
-        <p:spPr>
-          <a:xfrm>
-            <a:off x="7366000" y="4089400"/>
-            <a:ext cx="2895600" cy="292100"/>
-          </a:xfrm>
-          <a:prstGeom prst="rect">
-            <a:avLst/>
-          </a:prstGeom>
-          <a:noFill/>
-          <a:ln/>
-        </p:spPr>
-        <p:txBody>
-          <a:bodyPr wrap="square" lIns="0" tIns="0" rIns="0" bIns="0" rtlCol="0" anchor="t"/>
-          <a:lstStyle/>
-          <a:p>
-            <a:pPr indent="0" marL="0">
-              <a:buNone/>
-            </a:pPr>
-            <a:r>
-              <a:rPr lang="en-US" sz="950" dirty="0">
+            <a:endParaRPr lang="en-US" sz="900" dirty="0"/>
+          </a:p>
+        </p:txBody>
+      </p:sp>
+      <p:sp>
+        <p:nvSpPr>
+          <p:cNvPr id="35" name="Text 31"/>
+          <p:cNvSpPr txBox="1"/>
+          <p:nvPr/>
+        </p:nvSpPr>
+        <p:spPr>
+          <a:xfrm>
+            <a:off x="7366000" y="3886200"/>
+            <a:ext cx="2895600" cy="266700"/>
+          </a:xfrm>
+          <a:prstGeom prst="rect">
+            <a:avLst/>
+          </a:prstGeom>
+          <a:noFill/>
+          <a:ln/>
+        </p:spPr>
+        <p:txBody>
+          <a:bodyPr wrap="square" lIns="0" tIns="0" rIns="0" bIns="0" rtlCol="0" anchor="t"/>
+          <a:lstStyle/>
+          <a:p>
+            <a:pPr indent="0" marL="0">
+              <a:buNone/>
+            </a:pPr>
+            <a:r>
+              <a:rPr lang="en-US" sz="900" dirty="0">
                 <a:solidFill>
                   <a:srgbClr val="5B6378"/>
                 </a:solidFill>
@@ -19655,38 +19675,38 @@
                 <a:ea typeface="Segoe UI Semilight" pitchFamily="34" charset="-122"/>
                 <a:cs typeface="Segoe UI Semilight" pitchFamily="34" charset="-120"/>
               </a:rPr>
-              <a:t>In draft — placeholders to close by [date]</a:t>
-            </a:r>
-            <a:endParaRPr lang="en-US" sz="950" dirty="0"/>
-          </a:p>
-        </p:txBody>
-      </p:sp>
-      <p:sp>
-        <p:nvSpPr>
-          <p:cNvPr id="35" name="Text 31"/>
-          <p:cNvSpPr txBox="1"/>
-          <p:nvPr/>
-        </p:nvSpPr>
-        <p:spPr>
-          <a:xfrm>
-            <a:off x="749300" y="4381500"/>
-            <a:ext cx="4191000" cy="292100"/>
-          </a:xfrm>
-          <a:prstGeom prst="rect">
-            <a:avLst/>
-          </a:prstGeom>
-          <a:noFill/>
-          <a:ln/>
-        </p:spPr>
-        <p:txBody>
-          <a:bodyPr wrap="square" lIns="0" tIns="0" rIns="0" bIns="0" rtlCol="0" anchor="t"/>
-          <a:lstStyle/>
-          <a:p>
-            <a:pPr indent="0" marL="0">
-              <a:buNone/>
-            </a:pPr>
-            <a:r>
-              <a:rPr lang="en-US" sz="950" b="1" dirty="0">
+              <a:t>Set — all three retainers</a:t>
+            </a:r>
+            <a:endParaRPr lang="en-US" sz="900" dirty="0"/>
+          </a:p>
+        </p:txBody>
+      </p:sp>
+      <p:sp>
+        <p:nvSpPr>
+          <p:cNvPr id="36" name="Text 32"/>
+          <p:cNvSpPr txBox="1"/>
+          <p:nvPr/>
+        </p:nvSpPr>
+        <p:spPr>
+          <a:xfrm>
+            <a:off x="749300" y="4152900"/>
+            <a:ext cx="4191000" cy="266700"/>
+          </a:xfrm>
+          <a:prstGeom prst="rect">
+            <a:avLst/>
+          </a:prstGeom>
+          <a:noFill/>
+          <a:ln/>
+        </p:spPr>
+        <p:txBody>
+          <a:bodyPr wrap="square" lIns="0" tIns="0" rIns="0" bIns="0" rtlCol="0" anchor="t"/>
+          <a:lstStyle/>
+          <a:p>
+            <a:pPr indent="0" marL="0">
+              <a:buNone/>
+            </a:pPr>
+            <a:r>
+              <a:rPr lang="en-US" sz="900" b="1" dirty="0">
                 <a:solidFill>
                   <a:srgbClr val="15224B"/>
                 </a:solidFill>
@@ -19694,38 +19714,38 @@
                 <a:ea typeface="Segoe UI" pitchFamily="34" charset="-122"/>
                 <a:cs typeface="Segoe UI" pitchFamily="34" charset="-120"/>
               </a:rPr>
-              <a:t>Included band and overflow rate per rung</a:t>
-            </a:r>
-            <a:endParaRPr lang="en-US" sz="950" dirty="0"/>
-          </a:p>
-        </p:txBody>
-      </p:sp>
-      <p:sp>
-        <p:nvSpPr>
-          <p:cNvPr id="36" name="Text 32"/>
-          <p:cNvSpPr txBox="1"/>
-          <p:nvPr/>
-        </p:nvSpPr>
-        <p:spPr>
-          <a:xfrm>
-            <a:off x="5143500" y="4381500"/>
-            <a:ext cx="1905000" cy="292100"/>
-          </a:xfrm>
-          <a:prstGeom prst="rect">
-            <a:avLst/>
-          </a:prstGeom>
-          <a:noFill/>
-          <a:ln/>
-        </p:spPr>
-        <p:txBody>
-          <a:bodyPr wrap="square" lIns="0" tIns="0" rIns="0" bIns="0" rtlCol="0" anchor="t"/>
-          <a:lstStyle/>
-          <a:p>
-            <a:pPr indent="0" marL="0">
-              <a:buNone/>
-            </a:pPr>
-            <a:r>
-              <a:rPr lang="en-US" sz="950" dirty="0">
+              <a:t>Staffing, bands and overflow rates behind every rung</a:t>
+            </a:r>
+            <a:endParaRPr lang="en-US" sz="900" dirty="0"/>
+          </a:p>
+        </p:txBody>
+      </p:sp>
+      <p:sp>
+        <p:nvSpPr>
+          <p:cNvPr id="37" name="Text 33"/>
+          <p:cNvSpPr txBox="1"/>
+          <p:nvPr/>
+        </p:nvSpPr>
+        <p:spPr>
+          <a:xfrm>
+            <a:off x="5143500" y="4152900"/>
+            <a:ext cx="1905000" cy="266700"/>
+          </a:xfrm>
+          <a:prstGeom prst="rect">
+            <a:avLst/>
+          </a:prstGeom>
+          <a:noFill/>
+          <a:ln/>
+        </p:spPr>
+        <p:txBody>
+          <a:bodyPr wrap="square" lIns="0" tIns="0" rIns="0" bIns="0" rtlCol="0" anchor="t"/>
+          <a:lstStyle/>
+          <a:p>
+            <a:pPr indent="0" marL="0">
+              <a:buNone/>
+            </a:pPr>
+            <a:r>
+              <a:rPr lang="en-US" sz="900" dirty="0">
                 <a:solidFill>
                   <a:srgbClr val="5B6378"/>
                 </a:solidFill>
@@ -19733,38 +19753,38 @@
                 <a:ea typeface="Segoe UI Semilight" pitchFamily="34" charset="-122"/>
                 <a:cs typeface="Segoe UI Semilight" pitchFamily="34" charset="-120"/>
               </a:rPr>
-              <a:t>OBP commercial</a:t>
-            </a:r>
-            <a:endParaRPr lang="en-US" sz="950" dirty="0"/>
-          </a:p>
-        </p:txBody>
-      </p:sp>
-      <p:sp>
-        <p:nvSpPr>
-          <p:cNvPr id="37" name="Text 33"/>
-          <p:cNvSpPr txBox="1"/>
-          <p:nvPr/>
-        </p:nvSpPr>
-        <p:spPr>
-          <a:xfrm>
-            <a:off x="7366000" y="4381500"/>
-            <a:ext cx="2895600" cy="292100"/>
-          </a:xfrm>
-          <a:prstGeom prst="rect">
-            <a:avLst/>
-          </a:prstGeom>
-          <a:noFill/>
-          <a:ln/>
-        </p:spPr>
-        <p:txBody>
-          <a:bodyPr wrap="square" lIns="0" tIns="0" rIns="0" bIns="0" rtlCol="0" anchor="t"/>
-          <a:lstStyle/>
-          <a:p>
-            <a:pPr indent="0" marL="0">
-              <a:buNone/>
-            </a:pPr>
-            <a:r>
-              <a:rPr lang="en-US" sz="950" dirty="0">
+              <a:t>OBP</a:t>
+            </a:r>
+            <a:endParaRPr lang="en-US" sz="900" dirty="0"/>
+          </a:p>
+        </p:txBody>
+      </p:sp>
+      <p:sp>
+        <p:nvSpPr>
+          <p:cNvPr id="38" name="Text 34"/>
+          <p:cNvSpPr txBox="1"/>
+          <p:nvPr/>
+        </p:nvSpPr>
+        <p:spPr>
+          <a:xfrm>
+            <a:off x="7366000" y="4152900"/>
+            <a:ext cx="2895600" cy="266700"/>
+          </a:xfrm>
+          <a:prstGeom prst="rect">
+            <a:avLst/>
+          </a:prstGeom>
+          <a:noFill/>
+          <a:ln/>
+        </p:spPr>
+        <p:txBody>
+          <a:bodyPr wrap="square" lIns="0" tIns="0" rIns="0" bIns="0" rtlCol="0" anchor="t"/>
+          <a:lstStyle/>
+          <a:p>
+            <a:pPr indent="0" marL="0">
+              <a:buNone/>
+            </a:pPr>
+            <a:r>
+              <a:rPr lang="en-US" sz="900" dirty="0">
                 <a:solidFill>
                   <a:srgbClr val="5B6378"/>
                 </a:solidFill>
@@ -19772,38 +19792,38 @@
                 <a:ea typeface="Segoe UI Semilight" pitchFamily="34" charset="-122"/>
                 <a:cs typeface="Segoe UI Semilight" pitchFamily="34" charset="-120"/>
               </a:rPr>
-              <a:t>To decide</a:t>
-            </a:r>
-            <a:endParaRPr lang="en-US" sz="950" dirty="0"/>
-          </a:p>
-        </p:txBody>
-      </p:sp>
-      <p:sp>
-        <p:nvSpPr>
-          <p:cNvPr id="38" name="Text 34"/>
-          <p:cNvSpPr txBox="1"/>
-          <p:nvPr/>
-        </p:nvSpPr>
-        <p:spPr>
-          <a:xfrm>
-            <a:off x="749300" y="4673600"/>
-            <a:ext cx="4191000" cy="292100"/>
-          </a:xfrm>
-          <a:prstGeom prst="rect">
-            <a:avLst/>
-          </a:prstGeom>
-          <a:noFill/>
-          <a:ln/>
-        </p:spPr>
-        <p:txBody>
-          <a:bodyPr wrap="square" lIns="0" tIns="0" rIns="0" bIns="0" rtlCol="0" anchor="t"/>
-          <a:lstStyle/>
-          <a:p>
-            <a:pPr indent="0" marL="0">
-              <a:buNone/>
-            </a:pPr>
-            <a:r>
-              <a:rPr lang="en-US" sz="950" b="1" dirty="0">
+              <a:t>To capacity-test and price before any customer artifact</a:t>
+            </a:r>
+            <a:endParaRPr lang="en-US" sz="900" dirty="0"/>
+          </a:p>
+        </p:txBody>
+      </p:sp>
+      <p:sp>
+        <p:nvSpPr>
+          <p:cNvPr id="39" name="Text 35"/>
+          <p:cNvSpPr txBox="1"/>
+          <p:nvPr/>
+        </p:nvSpPr>
+        <p:spPr>
+          <a:xfrm>
+            <a:off x="749300" y="4419600"/>
+            <a:ext cx="4191000" cy="266700"/>
+          </a:xfrm>
+          <a:prstGeom prst="rect">
+            <a:avLst/>
+          </a:prstGeom>
+          <a:noFill/>
+          <a:ln/>
+        </p:spPr>
+        <p:txBody>
+          <a:bodyPr wrap="square" lIns="0" tIns="0" rIns="0" bIns="0" rtlCol="0" anchor="t"/>
+          <a:lstStyle/>
+          <a:p>
+            <a:pPr indent="0" marL="0">
+              <a:buNone/>
+            </a:pPr>
+            <a:r>
+              <a:rPr lang="en-US" sz="900" b="1" dirty="0">
                 <a:solidFill>
                   <a:srgbClr val="15224B"/>
                 </a:solidFill>
@@ -19813,36 +19833,36 @@
               </a:rPr>
               <a:t>Automatum back-to-back turnarounds</a:t>
             </a:r>
-            <a:endParaRPr lang="en-US" sz="950" dirty="0"/>
-          </a:p>
-        </p:txBody>
-      </p:sp>
-      <p:sp>
-        <p:nvSpPr>
-          <p:cNvPr id="39" name="Text 35"/>
-          <p:cNvSpPr txBox="1"/>
-          <p:nvPr/>
-        </p:nvSpPr>
-        <p:spPr>
-          <a:xfrm>
-            <a:off x="5143500" y="4673600"/>
-            <a:ext cx="1905000" cy="292100"/>
-          </a:xfrm>
-          <a:prstGeom prst="rect">
-            <a:avLst/>
-          </a:prstGeom>
-          <a:noFill/>
-          <a:ln/>
-        </p:spPr>
-        <p:txBody>
-          <a:bodyPr wrap="square" lIns="0" tIns="0" rIns="0" bIns="0" rtlCol="0" anchor="t"/>
-          <a:lstStyle/>
-          <a:p>
-            <a:pPr indent="0" marL="0">
-              <a:buNone/>
-            </a:pPr>
-            <a:r>
-              <a:rPr lang="en-US" sz="950" dirty="0">
+            <a:endParaRPr lang="en-US" sz="900" dirty="0"/>
+          </a:p>
+        </p:txBody>
+      </p:sp>
+      <p:sp>
+        <p:nvSpPr>
+          <p:cNvPr id="40" name="Text 36"/>
+          <p:cNvSpPr txBox="1"/>
+          <p:nvPr/>
+        </p:nvSpPr>
+        <p:spPr>
+          <a:xfrm>
+            <a:off x="5143500" y="4419600"/>
+            <a:ext cx="1905000" cy="266700"/>
+          </a:xfrm>
+          <a:prstGeom prst="rect">
+            <a:avLst/>
+          </a:prstGeom>
+          <a:noFill/>
+          <a:ln/>
+        </p:spPr>
+        <p:txBody>
+          <a:bodyPr wrap="square" lIns="0" tIns="0" rIns="0" bIns="0" rtlCol="0" anchor="t"/>
+          <a:lstStyle/>
+          <a:p>
+            <a:pPr indent="0" marL="0">
+              <a:buNone/>
+            </a:pPr>
+            <a:r>
+              <a:rPr lang="en-US" sz="900" dirty="0">
                 <a:solidFill>
                   <a:srgbClr val="5B6378"/>
                 </a:solidFill>
@@ -19852,36 +19872,36 @@
               </a:rPr>
               <a:t>Automatum</a:t>
             </a:r>
-            <a:endParaRPr lang="en-US" sz="950" dirty="0"/>
-          </a:p>
-        </p:txBody>
-      </p:sp>
-      <p:sp>
-        <p:nvSpPr>
-          <p:cNvPr id="40" name="Text 36"/>
-          <p:cNvSpPr txBox="1"/>
-          <p:nvPr/>
-        </p:nvSpPr>
-        <p:spPr>
-          <a:xfrm>
-            <a:off x="7366000" y="4673600"/>
-            <a:ext cx="2895600" cy="292100"/>
-          </a:xfrm>
-          <a:prstGeom prst="rect">
-            <a:avLst/>
-          </a:prstGeom>
-          <a:noFill/>
-          <a:ln/>
-        </p:spPr>
-        <p:txBody>
-          <a:bodyPr wrap="square" lIns="0" tIns="0" rIns="0" bIns="0" rtlCol="0" anchor="t"/>
-          <a:lstStyle/>
-          <a:p>
-            <a:pPr indent="0" marL="0">
-              <a:buNone/>
-            </a:pPr>
-            <a:r>
-              <a:rPr lang="en-US" sz="950" dirty="0">
+            <a:endParaRPr lang="en-US" sz="900" dirty="0"/>
+          </a:p>
+        </p:txBody>
+      </p:sp>
+      <p:sp>
+        <p:nvSpPr>
+          <p:cNvPr id="41" name="Text 37"/>
+          <p:cNvSpPr txBox="1"/>
+          <p:nvPr/>
+        </p:nvSpPr>
+        <p:spPr>
+          <a:xfrm>
+            <a:off x="7366000" y="4419600"/>
+            <a:ext cx="2895600" cy="266700"/>
+          </a:xfrm>
+          <a:prstGeom prst="rect">
+            <a:avLst/>
+          </a:prstGeom>
+          <a:noFill/>
+          <a:ln/>
+        </p:spPr>
+        <p:txBody>
+          <a:bodyPr wrap="square" lIns="0" tIns="0" rIns="0" bIns="0" rtlCol="0" anchor="t"/>
+          <a:lstStyle/>
+          <a:p>
+            <a:pPr indent="0" marL="0">
+              <a:buNone/>
+            </a:pPr>
+            <a:r>
+              <a:rPr lang="en-US" sz="900" dirty="0">
                 <a:solidFill>
                   <a:srgbClr val="5B6378"/>
                 </a:solidFill>
@@ -19889,38 +19909,38 @@
                 <a:ea typeface="Segoe UI Semilight" pitchFamily="34" charset="-122"/>
                 <a:cs typeface="Segoe UI Semilight" pitchFamily="34" charset="-120"/>
               </a:rPr>
-              <a:t>To agree on the call</a:t>
-            </a:r>
-            <a:endParaRPr lang="en-US" sz="950" dirty="0"/>
-          </a:p>
-        </p:txBody>
-      </p:sp>
-      <p:sp>
-        <p:nvSpPr>
-          <p:cNvPr id="41" name="Text 37"/>
-          <p:cNvSpPr txBox="1"/>
-          <p:nvPr/>
-        </p:nvSpPr>
-        <p:spPr>
-          <a:xfrm>
-            <a:off x="749300" y="4965700"/>
-            <a:ext cx="4191000" cy="292100"/>
-          </a:xfrm>
-          <a:prstGeom prst="rect">
-            <a:avLst/>
-          </a:prstGeom>
-          <a:noFill/>
-          <a:ln/>
-        </p:spPr>
-        <p:txBody>
-          <a:bodyPr wrap="square" lIns="0" tIns="0" rIns="0" bIns="0" rtlCol="0" anchor="t"/>
-          <a:lstStyle/>
-          <a:p>
-            <a:pPr indent="0" marL="0">
-              <a:buNone/>
-            </a:pPr>
-            <a:r>
-              <a:rPr lang="en-US" sz="950" b="1" dirty="0">
+              <a:t>Needed before any turnaround is published</a:t>
+            </a:r>
+            <a:endParaRPr lang="en-US" sz="900" dirty="0"/>
+          </a:p>
+        </p:txBody>
+      </p:sp>
+      <p:sp>
+        <p:nvSpPr>
+          <p:cNvPr id="42" name="Text 38"/>
+          <p:cNvSpPr txBox="1"/>
+          <p:nvPr/>
+        </p:nvSpPr>
+        <p:spPr>
+          <a:xfrm>
+            <a:off x="749300" y="4686300"/>
+            <a:ext cx="4191000" cy="266700"/>
+          </a:xfrm>
+          <a:prstGeom prst="rect">
+            <a:avLst/>
+          </a:prstGeom>
+          <a:noFill/>
+          <a:ln/>
+        </p:spPr>
+        <p:txBody>
+          <a:bodyPr wrap="square" lIns="0" tIns="0" rIns="0" bIns="0" rtlCol="0" anchor="t"/>
+          <a:lstStyle/>
+          <a:p>
+            <a:pPr indent="0" marL="0">
+              <a:buNone/>
+            </a:pPr>
+            <a:r>
+              <a:rPr lang="en-US" sz="900" b="1" dirty="0">
                 <a:solidFill>
                   <a:srgbClr val="15224B"/>
                 </a:solidFill>
@@ -19928,38 +19948,155 @@
                 <a:ea typeface="Segoe UI" pitchFamily="34" charset="-122"/>
                 <a:cs typeface="Segoe UI" pitchFamily="34" charset="-120"/>
               </a:rPr>
+              <a:t>CPPO boundary — Operations vs Partner Development</a:t>
+            </a:r>
+            <a:endParaRPr lang="en-US" sz="900" dirty="0"/>
+          </a:p>
+        </p:txBody>
+      </p:sp>
+      <p:sp>
+        <p:nvSpPr>
+          <p:cNvPr id="43" name="Text 39"/>
+          <p:cNvSpPr txBox="1"/>
+          <p:nvPr/>
+        </p:nvSpPr>
+        <p:spPr>
+          <a:xfrm>
+            <a:off x="5143500" y="4686300"/>
+            <a:ext cx="1905000" cy="266700"/>
+          </a:xfrm>
+          <a:prstGeom prst="rect">
+            <a:avLst/>
+          </a:prstGeom>
+          <a:noFill/>
+          <a:ln/>
+        </p:spPr>
+        <p:txBody>
+          <a:bodyPr wrap="square" lIns="0" tIns="0" rIns="0" bIns="0" rtlCol="0" anchor="t"/>
+          <a:lstStyle/>
+          <a:p>
+            <a:pPr indent="0" marL="0">
+              <a:buNone/>
+            </a:pPr>
+            <a:r>
+              <a:rPr lang="en-US" sz="900" dirty="0">
+                <a:solidFill>
+                  <a:srgbClr val="5B6378"/>
+                </a:solidFill>
+                <a:latin typeface="Segoe UI Semilight" pitchFamily="34" charset="0"/>
+                <a:ea typeface="Segoe UI Semilight" pitchFamily="34" charset="-122"/>
+                <a:cs typeface="Segoe UI Semilight" pitchFamily="34" charset="-120"/>
+              </a:rPr>
+              <a:t>OBP + Automatum</a:t>
+            </a:r>
+            <a:endParaRPr lang="en-US" sz="900" dirty="0"/>
+          </a:p>
+        </p:txBody>
+      </p:sp>
+      <p:sp>
+        <p:nvSpPr>
+          <p:cNvPr id="44" name="Text 40"/>
+          <p:cNvSpPr txBox="1"/>
+          <p:nvPr/>
+        </p:nvSpPr>
+        <p:spPr>
+          <a:xfrm>
+            <a:off x="7366000" y="4686300"/>
+            <a:ext cx="2895600" cy="266700"/>
+          </a:xfrm>
+          <a:prstGeom prst="rect">
+            <a:avLst/>
+          </a:prstGeom>
+          <a:noFill/>
+          <a:ln/>
+        </p:spPr>
+        <p:txBody>
+          <a:bodyPr wrap="square" lIns="0" tIns="0" rIns="0" bIns="0" rtlCol="0" anchor="t"/>
+          <a:lstStyle/>
+          <a:p>
+            <a:pPr indent="0" marL="0">
+              <a:buNone/>
+            </a:pPr>
+            <a:r>
+              <a:rPr lang="en-US" sz="900" dirty="0">
+                <a:solidFill>
+                  <a:srgbClr val="5B6378"/>
+                </a:solidFill>
+                <a:latin typeface="Segoe UI Semilight" pitchFamily="34" charset="0"/>
+                <a:ea typeface="Segoe UI Semilight" pitchFamily="34" charset="-122"/>
+                <a:cs typeface="Segoe UI Semilight" pitchFamily="34" charset="-120"/>
+              </a:rPr>
+              <a:t>To confirm</a:t>
+            </a:r>
+            <a:endParaRPr lang="en-US" sz="900" dirty="0"/>
+          </a:p>
+        </p:txBody>
+      </p:sp>
+      <p:sp>
+        <p:nvSpPr>
+          <p:cNvPr id="45" name="Text 41"/>
+          <p:cNvSpPr txBox="1"/>
+          <p:nvPr/>
+        </p:nvSpPr>
+        <p:spPr>
+          <a:xfrm>
+            <a:off x="749300" y="4953000"/>
+            <a:ext cx="4191000" cy="266700"/>
+          </a:xfrm>
+          <a:prstGeom prst="rect">
+            <a:avLst/>
+          </a:prstGeom>
+          <a:noFill/>
+          <a:ln/>
+        </p:spPr>
+        <p:txBody>
+          <a:bodyPr wrap="square" lIns="0" tIns="0" rIns="0" bIns="0" rtlCol="0" anchor="t"/>
+          <a:lstStyle/>
+          <a:p>
+            <a:pPr indent="0" marL="0">
+              <a:buNone/>
+            </a:pPr>
+            <a:r>
+              <a:rPr lang="en-US" sz="900" b="1" dirty="0">
+                <a:solidFill>
+                  <a:srgbClr val="15224B"/>
+                </a:solidFill>
+                <a:latin typeface="Segoe UI" pitchFamily="34" charset="0"/>
+                <a:ea typeface="Segoe UI" pitchFamily="34" charset="-122"/>
+                <a:cs typeface="Segoe UI" pitchFamily="34" charset="-120"/>
+              </a:rPr>
               <a:t>Commercial terms between OBP and Automatum</a:t>
             </a:r>
-            <a:endParaRPr lang="en-US" sz="950" dirty="0"/>
-          </a:p>
-        </p:txBody>
-      </p:sp>
-      <p:sp>
-        <p:nvSpPr>
-          <p:cNvPr id="42" name="Text 38"/>
-          <p:cNvSpPr txBox="1"/>
-          <p:nvPr/>
-        </p:nvSpPr>
-        <p:spPr>
-          <a:xfrm>
-            <a:off x="5143500" y="4965700"/>
-            <a:ext cx="1905000" cy="292100"/>
-          </a:xfrm>
-          <a:prstGeom prst="rect">
-            <a:avLst/>
-          </a:prstGeom>
-          <a:noFill/>
-          <a:ln/>
-        </p:spPr>
-        <p:txBody>
-          <a:bodyPr wrap="square" lIns="0" tIns="0" rIns="0" bIns="0" rtlCol="0" anchor="t"/>
-          <a:lstStyle/>
-          <a:p>
-            <a:pPr indent="0" marL="0">
-              <a:buNone/>
-            </a:pPr>
-            <a:r>
-              <a:rPr lang="en-US" sz="950" dirty="0">
+            <a:endParaRPr lang="en-US" sz="900" dirty="0"/>
+          </a:p>
+        </p:txBody>
+      </p:sp>
+      <p:sp>
+        <p:nvSpPr>
+          <p:cNvPr id="46" name="Text 42"/>
+          <p:cNvSpPr txBox="1"/>
+          <p:nvPr/>
+        </p:nvSpPr>
+        <p:spPr>
+          <a:xfrm>
+            <a:off x="5143500" y="4953000"/>
+            <a:ext cx="1905000" cy="266700"/>
+          </a:xfrm>
+          <a:prstGeom prst="rect">
+            <a:avLst/>
+          </a:prstGeom>
+          <a:noFill/>
+          <a:ln/>
+        </p:spPr>
+        <p:txBody>
+          <a:bodyPr wrap="square" lIns="0" tIns="0" rIns="0" bIns="0" rtlCol="0" anchor="t"/>
+          <a:lstStyle/>
+          <a:p>
+            <a:pPr indent="0" marL="0">
+              <a:buNone/>
+            </a:pPr>
+            <a:r>
+              <a:rPr lang="en-US" sz="900" dirty="0">
                 <a:solidFill>
                   <a:srgbClr val="5B6378"/>
                 </a:solidFill>
@@ -19969,36 +20106,36 @@
               </a:rPr>
               <a:t>OBP + Automatum</a:t>
             </a:r>
-            <a:endParaRPr lang="en-US" sz="950" dirty="0"/>
-          </a:p>
-        </p:txBody>
-      </p:sp>
-      <p:sp>
-        <p:nvSpPr>
-          <p:cNvPr id="43" name="Text 39"/>
-          <p:cNvSpPr txBox="1"/>
-          <p:nvPr/>
-        </p:nvSpPr>
-        <p:spPr>
-          <a:xfrm>
-            <a:off x="7366000" y="4965700"/>
-            <a:ext cx="2895600" cy="292100"/>
-          </a:xfrm>
-          <a:prstGeom prst="rect">
-            <a:avLst/>
-          </a:prstGeom>
-          <a:noFill/>
-          <a:ln/>
-        </p:spPr>
-        <p:txBody>
-          <a:bodyPr wrap="square" lIns="0" tIns="0" rIns="0" bIns="0" rtlCol="0" anchor="t"/>
-          <a:lstStyle/>
-          <a:p>
-            <a:pPr indent="0" marL="0">
-              <a:buNone/>
-            </a:pPr>
-            <a:r>
-              <a:rPr lang="en-US" sz="950" dirty="0">
+            <a:endParaRPr lang="en-US" sz="900" dirty="0"/>
+          </a:p>
+        </p:txBody>
+      </p:sp>
+      <p:sp>
+        <p:nvSpPr>
+          <p:cNvPr id="47" name="Text 43"/>
+          <p:cNvSpPr txBox="1"/>
+          <p:nvPr/>
+        </p:nvSpPr>
+        <p:spPr>
+          <a:xfrm>
+            <a:off x="7366000" y="4953000"/>
+            <a:ext cx="2895600" cy="266700"/>
+          </a:xfrm>
+          <a:prstGeom prst="rect">
+            <a:avLst/>
+          </a:prstGeom>
+          <a:noFill/>
+          <a:ln/>
+        </p:spPr>
+        <p:txBody>
+          <a:bodyPr wrap="square" lIns="0" tIns="0" rIns="0" bIns="0" rtlCol="0" anchor="t"/>
+          <a:lstStyle/>
+          <a:p>
+            <a:pPr indent="0" marL="0">
+              <a:buNone/>
+            </a:pPr>
+            <a:r>
+              <a:rPr lang="en-US" sz="900" dirty="0">
                 <a:solidFill>
                   <a:srgbClr val="5B6378"/>
                 </a:solidFill>
@@ -20008,19 +20145,19 @@
               </a:rPr>
               <a:t>On the agenda for [call date]</a:t>
             </a:r>
-            <a:endParaRPr lang="en-US" sz="950" dirty="0"/>
-          </a:p>
-        </p:txBody>
-      </p:sp>
-      <p:sp>
-        <p:nvSpPr>
-          <p:cNvPr id="44" name="Text 40"/>
-          <p:cNvSpPr txBox="1"/>
-          <p:nvPr/>
-        </p:nvSpPr>
-        <p:spPr>
-          <a:xfrm>
-            <a:off x="749300" y="5334000"/>
+            <a:endParaRPr lang="en-US" sz="900" dirty="0"/>
+          </a:p>
+        </p:txBody>
+      </p:sp>
+      <p:sp>
+        <p:nvSpPr>
+          <p:cNvPr id="48" name="Text 44"/>
+          <p:cNvSpPr txBox="1"/>
+          <p:nvPr/>
+        </p:nvSpPr>
+        <p:spPr>
+          <a:xfrm>
+            <a:off x="749300" y="5308600"/>
             <a:ext cx="10795000" cy="355600"/>
           </a:xfrm>
           <a:prstGeom prst="rect">
@@ -20053,7 +20190,7 @@
       </p:sp>
       <p:sp>
         <p:nvSpPr>
-          <p:cNvPr id="45" name="Shape 41"/>
+          <p:cNvPr id="49" name="Shape 45"/>
           <p:cNvSpPr/>
           <p:nvPr/>
         </p:nvSpPr>
@@ -20075,7 +20212,7 @@
       </p:sp>
       <p:sp>
         <p:nvSpPr>
-          <p:cNvPr id="46" name="Text 42"/>
+          <p:cNvPr id="50" name="Text 46"/>
           <p:cNvSpPr txBox="1"/>
           <p:nvPr/>
         </p:nvSpPr>
@@ -20120,7 +20257,7 @@
                 <a:ea typeface="Segoe UI Semilight" pitchFamily="34" charset="-122"/>
                 <a:cs typeface="Segoe UI Semilight" pitchFamily="34" charset="-120"/>
               </a:rPr>
-              <a:t>    Approve the two-wave sequence, confirm the lead partner of record, agree the back-to-back turnarounds, and calendar wave one’s Milestone 1 for [date].</a:t>
+              <a:t>    Approve the two-wave sequence, confirm the lead partner of record, agree the back-to-back turnarounds and the CPPO boundary, and calendar wave one’s Milestone 1 for [date].</a:t>
             </a:r>
             <a:endParaRPr lang="en-US" sz="1050" dirty="0"/>
           </a:p>
@@ -20761,7 +20898,7 @@
                 <a:ea typeface="Segoe UI" pitchFamily="34" charset="-122"/>
                 <a:cs typeface="Segoe UI" pitchFamily="34" charset="-120"/>
               </a:rPr>
-              <a:t>THE RENAME CASCADE — NOBODY HAS PRICED THIS</a:t>
+              <a:t>THE RENAME CASCADE — PRICE IT BEFORE APPROVING</a:t>
             </a:r>
             <a:endParaRPr lang="en-US" sz="800" dirty="0"/>
           </a:p>
@@ -23365,7 +23502,7 @@
                 <a:ea typeface="Segoe UI Semilight" pitchFamily="34" charset="-122"/>
                 <a:cs typeface="Segoe UI Semilight" pitchFamily="34" charset="-120"/>
               </a:rPr>
-              <a:t>[none named in the deck — confirm]</a:t>
+              <a:t>[none named — to confirm]</a:t>
             </a:r>
             <a:endParaRPr lang="en-US" sz="850" dirty="0"/>
           </a:p>
@@ -23404,7 +23541,7 @@
                 <a:ea typeface="Segoe UI Semilight" pitchFamily="34" charset="-122"/>
                 <a:cs typeface="Segoe UI Semilight" pitchFamily="34" charset="-120"/>
               </a:rPr>
-              <a:t>[none named in the deck — confirm]</a:t>
+              <a:t>[none named — to confirm]</a:t>
             </a:r>
             <a:endParaRPr lang="en-US" sz="850" dirty="0"/>
           </a:p>

--- a/docs/deck/BOX_Solutions_Revised.pptx
+++ b/docs/deck/BOX_Solutions_Revised.pptx
@@ -3557,7 +3557,7 @@
             <a:r>
               <a:rPr lang="en-US" sz="850" dirty="0">
                 <a:solidFill>
-                  <a:srgbClr val="6C7BA6"/>
+                  <a:srgbClr val="8FA0C6"/>
                 </a:solidFill>
                 <a:latin typeface="Segoe UI Semilight" pitchFamily="34" charset="0"/>
                 <a:ea typeface="Segoe UI Semilight" pitchFamily="34" charset="-122"/>
@@ -5428,7 +5428,7 @@
         </p:nvSpPr>
         <p:spPr>
           <a:xfrm>
-            <a:off x="657860" y="2603500"/>
+            <a:off x="657860" y="2628900"/>
             <a:ext cx="10871200" cy="203200"/>
           </a:xfrm>
           <a:prstGeom prst="rect">
@@ -5467,7 +5467,7 @@
                 <a:ea typeface="Segoe UI Semilight" pitchFamily="34" charset="-122"/>
                 <a:cs typeface="Segoe UI Semilight" pitchFamily="34" charset="-120"/>
               </a:rPr>
-              <a:t>Acceptance into ISV Accelerate and the Competency programs, MDF availability, BOX Program listings approved, and AWS-sourced leads — every one of these is AWS’s decision, not OBP’s.</a:t>
+              <a:t>ISV Accelerate and Competency acceptance, MDF availability, BOX Program listings approved, and AWS-sourced leads — all AWS’s decisions.</a:t>
             </a:r>
             <a:endParaRPr lang="en-US" sz="950" dirty="0"/>
           </a:p>
@@ -7114,7 +7114,7 @@
         </p:nvSpPr>
         <p:spPr>
           <a:xfrm>
-            <a:off x="657860" y="2603500"/>
+            <a:off x="657860" y="2628900"/>
             <a:ext cx="10871200" cy="203200"/>
           </a:xfrm>
           <a:prstGeom prst="rect">
@@ -8776,7 +8776,7 @@
         </p:nvSpPr>
         <p:spPr>
           <a:xfrm>
-            <a:off x="657860" y="2603500"/>
+            <a:off x="657860" y="2628900"/>
             <a:ext cx="10871200" cy="203200"/>
           </a:xfrm>
           <a:prstGeom prst="rect">
@@ -8815,7 +8815,7 @@
                 <a:ea typeface="Segoe UI Semilight" pitchFamily="34" charset="-122"/>
                 <a:cs typeface="Segoe UI Semilight" pitchFamily="34" charset="-120"/>
               </a:rPr>
-              <a:t>Partners issuing offers — the headline number — plus partner-sourced pipeline and revenue. Each partner clears its own AWS gate, which is the partner’s act, not OBP’s.</a:t>
+              <a:t>Partners issuing offers — the headline number — plus partner-sourced pipeline and revenue. Each partner clears its own AWS gate.</a:t>
             </a:r>
             <a:endParaRPr lang="en-US" sz="950" dirty="0"/>
           </a:p>
@@ -9173,7 +9173,7 @@
                 <a:ea typeface="Segoe UI Semilight" pitchFamily="34" charset="-122"/>
                 <a:cs typeface="Segoe UI Semilight" pitchFamily="34" charset="-120"/>
               </a:rPr>
-              <a:t>Partners issuing offers — reported monthly, the number to hold us to</a:t>
+              <a:t>Partners issuing offers — reported monthly</a:t>
             </a:r>
             <a:endParaRPr lang="en-US" sz="780" dirty="0"/>
           </a:p>
@@ -11744,48 +11744,9 @@
           </a:prstGeom>
         </p:spPr>
       </p:pic>
-      <p:sp>
-        <p:nvSpPr>
-          <p:cNvPr id="7" name="Text 3"/>
-          <p:cNvSpPr txBox="1"/>
-          <p:nvPr/>
-        </p:nvSpPr>
-        <p:spPr>
-          <a:xfrm>
-            <a:off x="657860" y="4368800"/>
-            <a:ext cx="1422400" cy="203200"/>
-          </a:xfrm>
-          <a:prstGeom prst="rect">
-            <a:avLst/>
-          </a:prstGeom>
-          <a:noFill/>
-          <a:ln/>
-        </p:spPr>
-        <p:txBody>
-          <a:bodyPr wrap="square" lIns="0" tIns="0" rIns="0" bIns="0" rtlCol="0" anchor="t"/>
-          <a:lstStyle/>
-          <a:p>
-            <a:pPr indent="0" marL="0">
-              <a:buNone/>
-            </a:pPr>
-            <a:r>
-              <a:rPr lang="en-US" sz="1000" dirty="0">
-                <a:solidFill>
-                  <a:srgbClr val="D3DCEF"/>
-                </a:solidFill>
-                <a:latin typeface="Segoe UI Semilight" pitchFamily="34" charset="0"/>
-                <a:ea typeface="Segoe UI Semilight" pitchFamily="34" charset="-122"/>
-                <a:cs typeface="Segoe UI Semilight" pitchFamily="34" charset="-120"/>
-              </a:rPr>
-              <a:t>Value chain</a:t>
-            </a:r>
-            <a:endParaRPr lang="en-US" sz="1000" dirty="0"/>
-          </a:p>
-        </p:txBody>
-      </p:sp>
       <p:pic>
         <p:nvPicPr>
-          <p:cNvPr id="8" name="Image 2" descr="/home/user/barberbook/docs/deck/assets/tile_c.png">    </p:cNvPr>
+          <p:cNvPr id="7" name="Image 2" descr="/home/user/barberbook/docs/deck/assets/tile_b.png">    </p:cNvPr>
           <p:cNvPicPr>
             <a:picLocks noChangeAspect="1"/>
           </p:cNvPicPr>
@@ -11799,8 +11760,8 @@
         </p:blipFill>
         <p:spPr>
           <a:xfrm>
-            <a:off x="2207260" y="3810000"/>
-            <a:ext cx="431800" cy="431800"/>
+            <a:off x="762000" y="3914140"/>
+            <a:ext cx="224790" cy="224790"/>
           </a:xfrm>
           <a:prstGeom prst="rect">
             <a:avLst/>
@@ -11809,13 +11770,13 @@
       </p:pic>
       <p:sp>
         <p:nvSpPr>
-          <p:cNvPr id="9" name="Text 4"/>
-          <p:cNvSpPr txBox="1"/>
-          <p:nvPr/>
-        </p:nvSpPr>
-        <p:spPr>
-          <a:xfrm>
-            <a:off x="2207260" y="4368800"/>
+          <p:cNvPr id="8" name="Text 3"/>
+          <p:cNvSpPr txBox="1"/>
+          <p:nvPr/>
+        </p:nvSpPr>
+        <p:spPr>
+          <a:xfrm>
+            <a:off x="657860" y="4368800"/>
             <a:ext cx="1422400" cy="203200"/>
           </a:xfrm>
           <a:prstGeom prst="rect">
@@ -11840,7 +11801,7 @@
                 <a:ea typeface="Segoe UI Semilight" pitchFamily="34" charset="-122"/>
                 <a:cs typeface="Segoe UI Semilight" pitchFamily="34" charset="-120"/>
               </a:rPr>
-              <a:t>Components</a:t>
+              <a:t>Value chain</a:t>
             </a:r>
             <a:endParaRPr lang="en-US" sz="1000" dirty="0"/>
           </a:p>
@@ -11848,7 +11809,7 @@
       </p:sp>
       <p:pic>
         <p:nvPicPr>
-          <p:cNvPr id="10" name="Image 3" descr="/home/user/barberbook/docs/deck/assets/tile_h.png">    </p:cNvPr>
+          <p:cNvPr id="9" name="Image 3" descr="/home/user/barberbook/docs/deck/assets/tile_c.png">    </p:cNvPr>
           <p:cNvPicPr>
             <a:picLocks noChangeAspect="1"/>
           </p:cNvPicPr>
@@ -11862,7 +11823,7 @@
         </p:blipFill>
         <p:spPr>
           <a:xfrm>
-            <a:off x="3756660" y="3810000"/>
+            <a:off x="2207260" y="3810000"/>
             <a:ext cx="431800" cy="431800"/>
           </a:xfrm>
           <a:prstGeom prst="rect">
@@ -11870,48 +11831,9 @@
           </a:prstGeom>
         </p:spPr>
       </p:pic>
-      <p:sp>
-        <p:nvSpPr>
-          <p:cNvPr id="11" name="Text 5"/>
-          <p:cNvSpPr txBox="1"/>
-          <p:nvPr/>
-        </p:nvSpPr>
-        <p:spPr>
-          <a:xfrm>
-            <a:off x="3756660" y="4368800"/>
-            <a:ext cx="1422400" cy="203200"/>
-          </a:xfrm>
-          <a:prstGeom prst="rect">
-            <a:avLst/>
-          </a:prstGeom>
-          <a:noFill/>
-          <a:ln/>
-        </p:spPr>
-        <p:txBody>
-          <a:bodyPr wrap="square" lIns="0" tIns="0" rIns="0" bIns="0" rtlCol="0" anchor="t"/>
-          <a:lstStyle/>
-          <a:p>
-            <a:pPr indent="0" marL="0">
-              <a:buNone/>
-            </a:pPr>
-            <a:r>
-              <a:rPr lang="en-US" sz="1000" dirty="0">
-                <a:solidFill>
-                  <a:srgbClr val="D3DCEF"/>
-                </a:solidFill>
-                <a:latin typeface="Segoe UI Semilight" pitchFamily="34" charset="0"/>
-                <a:ea typeface="Segoe UI Semilight" pitchFamily="34" charset="-122"/>
-                <a:cs typeface="Segoe UI Semilight" pitchFamily="34" charset="-120"/>
-              </a:rPr>
-              <a:t>Economics</a:t>
-            </a:r>
-            <a:endParaRPr lang="en-US" sz="1000" dirty="0"/>
-          </a:p>
-        </p:txBody>
-      </p:sp>
       <p:pic>
         <p:nvPicPr>
-          <p:cNvPr id="12" name="Image 4" descr="/home/user/barberbook/docs/deck/assets/tile_i.png">    </p:cNvPr>
+          <p:cNvPr id="10" name="Image 4" descr="/home/user/barberbook/docs/deck/assets/tile_h.png">    </p:cNvPr>
           <p:cNvPicPr>
             <a:picLocks noChangeAspect="1"/>
           </p:cNvPicPr>
@@ -11925,6 +11847,156 @@
         </p:blipFill>
         <p:spPr>
           <a:xfrm>
+            <a:off x="2311400" y="3914140"/>
+            <a:ext cx="224790" cy="224790"/>
+          </a:xfrm>
+          <a:prstGeom prst="rect">
+            <a:avLst/>
+          </a:prstGeom>
+        </p:spPr>
+      </p:pic>
+      <p:sp>
+        <p:nvSpPr>
+          <p:cNvPr id="11" name="Text 4"/>
+          <p:cNvSpPr txBox="1"/>
+          <p:nvPr/>
+        </p:nvSpPr>
+        <p:spPr>
+          <a:xfrm>
+            <a:off x="2207260" y="4368800"/>
+            <a:ext cx="1422400" cy="203200"/>
+          </a:xfrm>
+          <a:prstGeom prst="rect">
+            <a:avLst/>
+          </a:prstGeom>
+          <a:noFill/>
+          <a:ln/>
+        </p:spPr>
+        <p:txBody>
+          <a:bodyPr wrap="square" lIns="0" tIns="0" rIns="0" bIns="0" rtlCol="0" anchor="t"/>
+          <a:lstStyle/>
+          <a:p>
+            <a:pPr indent="0" marL="0">
+              <a:buNone/>
+            </a:pPr>
+            <a:r>
+              <a:rPr lang="en-US" sz="1000" dirty="0">
+                <a:solidFill>
+                  <a:srgbClr val="D3DCEF"/>
+                </a:solidFill>
+                <a:latin typeface="Segoe UI Semilight" pitchFamily="34" charset="0"/>
+                <a:ea typeface="Segoe UI Semilight" pitchFamily="34" charset="-122"/>
+                <a:cs typeface="Segoe UI Semilight" pitchFamily="34" charset="-120"/>
+              </a:rPr>
+              <a:t>Components</a:t>
+            </a:r>
+            <a:endParaRPr lang="en-US" sz="1000" dirty="0"/>
+          </a:p>
+        </p:txBody>
+      </p:sp>
+      <p:pic>
+        <p:nvPicPr>
+          <p:cNvPr id="12" name="Image 5" descr="/home/user/barberbook/docs/deck/assets/tile_d.png">    </p:cNvPr>
+          <p:cNvPicPr>
+            <a:picLocks noChangeAspect="1"/>
+          </p:cNvPicPr>
+          <p:nvPr/>
+        </p:nvPicPr>
+        <p:blipFill>
+          <a:blip r:embed="rId6"/>
+          <a:stretch>
+            <a:fillRect/>
+          </a:stretch>
+        </p:blipFill>
+        <p:spPr>
+          <a:xfrm>
+            <a:off x="3756660" y="3810000"/>
+            <a:ext cx="431800" cy="431800"/>
+          </a:xfrm>
+          <a:prstGeom prst="rect">
+            <a:avLst/>
+          </a:prstGeom>
+        </p:spPr>
+      </p:pic>
+      <p:pic>
+        <p:nvPicPr>
+          <p:cNvPr id="13" name="Image 6" descr="/home/user/barberbook/docs/deck/assets/tile_i.png">    </p:cNvPr>
+          <p:cNvPicPr>
+            <a:picLocks noChangeAspect="1"/>
+          </p:cNvPicPr>
+          <p:nvPr/>
+        </p:nvPicPr>
+        <p:blipFill>
+          <a:blip r:embed="rId7"/>
+          <a:stretch>
+            <a:fillRect/>
+          </a:stretch>
+        </p:blipFill>
+        <p:spPr>
+          <a:xfrm>
+            <a:off x="3860800" y="3914140"/>
+            <a:ext cx="224790" cy="224790"/>
+          </a:xfrm>
+          <a:prstGeom prst="rect">
+            <a:avLst/>
+          </a:prstGeom>
+        </p:spPr>
+      </p:pic>
+      <p:sp>
+        <p:nvSpPr>
+          <p:cNvPr id="14" name="Text 5"/>
+          <p:cNvSpPr txBox="1"/>
+          <p:nvPr/>
+        </p:nvSpPr>
+        <p:spPr>
+          <a:xfrm>
+            <a:off x="3756660" y="4368800"/>
+            <a:ext cx="1422400" cy="203200"/>
+          </a:xfrm>
+          <a:prstGeom prst="rect">
+            <a:avLst/>
+          </a:prstGeom>
+          <a:noFill/>
+          <a:ln/>
+        </p:spPr>
+        <p:txBody>
+          <a:bodyPr wrap="square" lIns="0" tIns="0" rIns="0" bIns="0" rtlCol="0" anchor="t"/>
+          <a:lstStyle/>
+          <a:p>
+            <a:pPr indent="0" marL="0">
+              <a:buNone/>
+            </a:pPr>
+            <a:r>
+              <a:rPr lang="en-US" sz="1000" dirty="0">
+                <a:solidFill>
+                  <a:srgbClr val="D3DCEF"/>
+                </a:solidFill>
+                <a:latin typeface="Segoe UI Semilight" pitchFamily="34" charset="0"/>
+                <a:ea typeface="Segoe UI Semilight" pitchFamily="34" charset="-122"/>
+                <a:cs typeface="Segoe UI Semilight" pitchFamily="34" charset="-120"/>
+              </a:rPr>
+              <a:t>Economics</a:t>
+            </a:r>
+            <a:endParaRPr lang="en-US" sz="1000" dirty="0"/>
+          </a:p>
+        </p:txBody>
+      </p:sp>
+      <p:pic>
+        <p:nvPicPr>
+          <p:cNvPr id="15" name="Image 7" descr="/home/user/barberbook/docs/deck/assets/tile_a.png">    </p:cNvPr>
+          <p:cNvPicPr>
+            <a:picLocks noChangeAspect="1"/>
+          </p:cNvPicPr>
+          <p:nvPr/>
+        </p:nvPicPr>
+        <p:blipFill>
+          <a:blip r:embed="rId8"/>
+          <a:stretch>
+            <a:fillRect/>
+          </a:stretch>
+        </p:blipFill>
+        <p:spPr>
+          <a:xfrm>
             <a:off x="5306060" y="3810000"/>
             <a:ext cx="431800" cy="431800"/>
           </a:xfrm>
@@ -11933,9 +12005,33 @@
           </a:prstGeom>
         </p:spPr>
       </p:pic>
-      <p:sp>
-        <p:nvSpPr>
-          <p:cNvPr id="13" name="Text 6"/>
+      <p:pic>
+        <p:nvPicPr>
+          <p:cNvPr id="16" name="Image 8" descr="/home/user/barberbook/docs/deck/assets/tile_e.png">    </p:cNvPr>
+          <p:cNvPicPr>
+            <a:picLocks noChangeAspect="1"/>
+          </p:cNvPicPr>
+          <p:nvPr/>
+        </p:nvPicPr>
+        <p:blipFill>
+          <a:blip r:embed="rId9"/>
+          <a:stretch>
+            <a:fillRect/>
+          </a:stretch>
+        </p:blipFill>
+        <p:spPr>
+          <a:xfrm>
+            <a:off x="5410200" y="3914140"/>
+            <a:ext cx="224790" cy="224790"/>
+          </a:xfrm>
+          <a:prstGeom prst="rect">
+            <a:avLst/>
+          </a:prstGeom>
+        </p:spPr>
+      </p:pic>
+      <p:sp>
+        <p:nvSpPr>
+          <p:cNvPr id="17" name="Text 6"/>
           <p:cNvSpPr txBox="1"/>
           <p:nvPr/>
         </p:nvSpPr>
@@ -11974,7 +12070,7 @@
       </p:sp>
       <p:sp>
         <p:nvSpPr>
-          <p:cNvPr id="14" name="Text 7"/>
+          <p:cNvPr id="18" name="Text 7"/>
           <p:cNvSpPr txBox="1"/>
           <p:nvPr/>
         </p:nvSpPr>
@@ -12041,7 +12137,7 @@
       </p:sp>
       <p:sp>
         <p:nvSpPr>
-          <p:cNvPr id="15" name="Text 8"/>
+          <p:cNvPr id="19" name="Text 8"/>
           <p:cNvSpPr txBox="1"/>
           <p:nvPr/>
         </p:nvSpPr>
@@ -12383,7 +12479,7 @@
         <p:spPr>
           <a:xfrm>
             <a:off x="1905000" y="2286000"/>
-            <a:ext cx="2311400" cy="330200"/>
+            <a:ext cx="2235200" cy="330200"/>
           </a:xfrm>
           <a:prstGeom prst="rect">
             <a:avLst/>
@@ -12422,7 +12518,7 @@
         <p:spPr>
           <a:xfrm>
             <a:off x="4394200" y="2286000"/>
-            <a:ext cx="2311400" cy="330200"/>
+            <a:ext cx="2235200" cy="330200"/>
           </a:xfrm>
           <a:prstGeom prst="rect">
             <a:avLst/>
@@ -12461,7 +12557,7 @@
         <p:spPr>
           <a:xfrm>
             <a:off x="6883400" y="2286000"/>
-            <a:ext cx="2311400" cy="330200"/>
+            <a:ext cx="2235200" cy="330200"/>
           </a:xfrm>
           <a:prstGeom prst="rect">
             <a:avLst/>
@@ -12500,7 +12596,7 @@
         <p:spPr>
           <a:xfrm>
             <a:off x="9372600" y="2286000"/>
-            <a:ext cx="2311400" cy="330200"/>
+            <a:ext cx="2235200" cy="330200"/>
           </a:xfrm>
           <a:prstGeom prst="rect">
             <a:avLst/>
@@ -12578,7 +12674,7 @@
         <p:spPr>
           <a:xfrm>
             <a:off x="1905000" y="2667000"/>
-            <a:ext cx="2311400" cy="787400"/>
+            <a:ext cx="2235200" cy="787400"/>
           </a:xfrm>
           <a:prstGeom prst="rect">
             <a:avLst/>
@@ -12617,7 +12713,7 @@
         <p:spPr>
           <a:xfrm>
             <a:off x="4394200" y="2667000"/>
-            <a:ext cx="2311400" cy="787400"/>
+            <a:ext cx="2235200" cy="787400"/>
           </a:xfrm>
           <a:prstGeom prst="rect">
             <a:avLst/>
@@ -12656,7 +12752,7 @@
         <p:spPr>
           <a:xfrm>
             <a:off x="6883400" y="2667000"/>
-            <a:ext cx="2311400" cy="787400"/>
+            <a:ext cx="2235200" cy="787400"/>
           </a:xfrm>
           <a:prstGeom prst="rect">
             <a:avLst/>
@@ -12695,7 +12791,7 @@
         <p:spPr>
           <a:xfrm>
             <a:off x="9372600" y="2667000"/>
-            <a:ext cx="2311400" cy="787400"/>
+            <a:ext cx="2235200" cy="787400"/>
           </a:xfrm>
           <a:prstGeom prst="rect">
             <a:avLst/>
@@ -12773,7 +12869,7 @@
         <p:spPr>
           <a:xfrm>
             <a:off x="1905000" y="3454400"/>
-            <a:ext cx="2311400" cy="508000"/>
+            <a:ext cx="2235200" cy="508000"/>
           </a:xfrm>
           <a:prstGeom prst="rect">
             <a:avLst/>
@@ -12812,7 +12908,7 @@
         <p:spPr>
           <a:xfrm>
             <a:off x="4394200" y="3454400"/>
-            <a:ext cx="2311400" cy="508000"/>
+            <a:ext cx="2235200" cy="508000"/>
           </a:xfrm>
           <a:prstGeom prst="rect">
             <a:avLst/>
@@ -12851,7 +12947,7 @@
         <p:spPr>
           <a:xfrm>
             <a:off x="6883400" y="3454400"/>
-            <a:ext cx="2311400" cy="508000"/>
+            <a:ext cx="2235200" cy="508000"/>
           </a:xfrm>
           <a:prstGeom prst="rect">
             <a:avLst/>
@@ -12890,7 +12986,7 @@
         <p:spPr>
           <a:xfrm>
             <a:off x="9372600" y="3454400"/>
-            <a:ext cx="2311400" cy="508000"/>
+            <a:ext cx="2235200" cy="508000"/>
           </a:xfrm>
           <a:prstGeom prst="rect">
             <a:avLst/>
@@ -12968,7 +13064,7 @@
         <p:spPr>
           <a:xfrm>
             <a:off x="1905000" y="3962400"/>
-            <a:ext cx="2311400" cy="838200"/>
+            <a:ext cx="2235200" cy="838200"/>
           </a:xfrm>
           <a:prstGeom prst="rect">
             <a:avLst/>
@@ -13007,7 +13103,7 @@
         <p:spPr>
           <a:xfrm>
             <a:off x="4394200" y="3962400"/>
-            <a:ext cx="2311400" cy="838200"/>
+            <a:ext cx="2235200" cy="838200"/>
           </a:xfrm>
           <a:prstGeom prst="rect">
             <a:avLst/>
@@ -13046,7 +13142,7 @@
         <p:spPr>
           <a:xfrm>
             <a:off x="6883400" y="3962400"/>
-            <a:ext cx="2311400" cy="838200"/>
+            <a:ext cx="2235200" cy="838200"/>
           </a:xfrm>
           <a:prstGeom prst="rect">
             <a:avLst/>
@@ -13085,7 +13181,7 @@
         <p:spPr>
           <a:xfrm>
             <a:off x="9372600" y="3962400"/>
-            <a:ext cx="2311400" cy="838200"/>
+            <a:ext cx="2235200" cy="838200"/>
           </a:xfrm>
           <a:prstGeom prst="rect">
             <a:avLst/>
@@ -13163,7 +13259,7 @@
         <p:spPr>
           <a:xfrm>
             <a:off x="1905000" y="4800600"/>
-            <a:ext cx="2311400" cy="660400"/>
+            <a:ext cx="2235200" cy="660400"/>
           </a:xfrm>
           <a:prstGeom prst="rect">
             <a:avLst/>
@@ -13202,7 +13298,7 @@
         <p:spPr>
           <a:xfrm>
             <a:off x="4394200" y="4800600"/>
-            <a:ext cx="2311400" cy="660400"/>
+            <a:ext cx="2235200" cy="660400"/>
           </a:xfrm>
           <a:prstGeom prst="rect">
             <a:avLst/>
@@ -13241,7 +13337,7 @@
         <p:spPr>
           <a:xfrm>
             <a:off x="6883400" y="4800600"/>
-            <a:ext cx="2311400" cy="660400"/>
+            <a:ext cx="2235200" cy="660400"/>
           </a:xfrm>
           <a:prstGeom prst="rect">
             <a:avLst/>
@@ -13280,7 +13376,7 @@
         <p:spPr>
           <a:xfrm>
             <a:off x="9372600" y="4800600"/>
-            <a:ext cx="2311400" cy="660400"/>
+            <a:ext cx="2235200" cy="660400"/>
           </a:xfrm>
           <a:prstGeom prst="rect">
             <a:avLst/>
@@ -16540,7 +16636,7 @@
             <a:r>
               <a:rPr lang="en-US" sz="850" dirty="0">
                 <a:solidFill>
-                  <a:srgbClr val="9AA2B5"/>
+                  <a:srgbClr val="5B6378"/>
                 </a:solidFill>
                 <a:latin typeface="Segoe UI Semilight" pitchFamily="34" charset="0"/>
                 <a:ea typeface="Segoe UI Semilight" pitchFamily="34" charset="-122"/>
@@ -16560,7 +16656,7 @@
         </p:nvSpPr>
         <p:spPr>
           <a:xfrm>
-            <a:off x="1023620" y="3759200"/>
+            <a:off x="1023620" y="3860800"/>
             <a:ext cx="2730500" cy="584200"/>
           </a:xfrm>
           <a:prstGeom prst="rect">
@@ -16599,8 +16695,8 @@
         </p:nvSpPr>
         <p:spPr>
           <a:xfrm>
-            <a:off x="1023620" y="4140200"/>
-            <a:ext cx="2730500" cy="1524000"/>
+            <a:off x="1023620" y="4241800"/>
+            <a:ext cx="2730500" cy="1422400"/>
           </a:xfrm>
           <a:prstGeom prst="rect">
             <a:avLst/>
@@ -16638,7 +16734,7 @@
         </p:nvSpPr>
         <p:spPr>
           <a:xfrm>
-            <a:off x="4765040" y="3759200"/>
+            <a:off x="4765040" y="3860800"/>
             <a:ext cx="2730500" cy="584200"/>
           </a:xfrm>
           <a:prstGeom prst="rect">
@@ -16677,8 +16773,8 @@
         </p:nvSpPr>
         <p:spPr>
           <a:xfrm>
-            <a:off x="4765040" y="4140200"/>
-            <a:ext cx="2730500" cy="1524000"/>
+            <a:off x="4765040" y="4241800"/>
+            <a:ext cx="2730500" cy="1422400"/>
           </a:xfrm>
           <a:prstGeom prst="rect">
             <a:avLst/>
@@ -16716,7 +16812,7 @@
         </p:nvSpPr>
         <p:spPr>
           <a:xfrm>
-            <a:off x="8506460" y="3759200"/>
+            <a:off x="8506460" y="3860800"/>
             <a:ext cx="2730500" cy="584200"/>
           </a:xfrm>
           <a:prstGeom prst="rect">
@@ -16755,8 +16851,8 @@
         </p:nvSpPr>
         <p:spPr>
           <a:xfrm>
-            <a:off x="8506460" y="4140200"/>
-            <a:ext cx="2730500" cy="1524000"/>
+            <a:off x="8506460" y="4241800"/>
+            <a:ext cx="2730500" cy="1422400"/>
           </a:xfrm>
           <a:prstGeom prst="rect">
             <a:avLst/>
@@ -17134,8 +17230,8 @@
         </p:blipFill>
         <p:spPr>
           <a:xfrm>
-            <a:off x="515620" y="2523490"/>
-            <a:ext cx="3644900" cy="2908300"/>
+            <a:off x="420370" y="2477770"/>
+            <a:ext cx="3868420" cy="2908300"/>
           </a:xfrm>
           <a:prstGeom prst="rect">
             <a:avLst/>
@@ -17144,7 +17240,29 @@
       </p:pic>
       <p:sp>
         <p:nvSpPr>
-          <p:cNvPr id="9" name="Text 4"/>
+          <p:cNvPr id="9" name="Shape 4"/>
+          <p:cNvSpPr/>
+          <p:nvPr/>
+        </p:nvSpPr>
+        <p:spPr>
+          <a:xfrm>
+            <a:off x="566420" y="2523490"/>
+            <a:ext cx="3576320" cy="2651760"/>
+          </a:xfrm>
+          <a:prstGeom prst="roundRect">
+            <a:avLst>
+              <a:gd name="adj" fmla="val 1724"/>
+            </a:avLst>
+          </a:prstGeom>
+          <a:solidFill>
+            <a:srgbClr val="FFFFFF"/>
+          </a:solidFill>
+          <a:ln/>
+        </p:spPr>
+      </p:sp>
+      <p:sp>
+        <p:nvSpPr>
+          <p:cNvPr id="10" name="Text 5"/>
           <p:cNvSpPr txBox="1"/>
           <p:nvPr/>
         </p:nvSpPr>
@@ -17183,7 +17301,7 @@
       </p:sp>
       <p:sp>
         <p:nvSpPr>
-          <p:cNvPr id="10" name="Text 5"/>
+          <p:cNvPr id="11" name="Text 6"/>
           <p:cNvSpPr txBox="1"/>
           <p:nvPr/>
         </p:nvSpPr>
@@ -17222,7 +17340,7 @@
       </p:sp>
       <p:sp>
         <p:nvSpPr>
-          <p:cNvPr id="11" name="Text 6"/>
+          <p:cNvPr id="12" name="Text 7"/>
           <p:cNvSpPr txBox="1"/>
           <p:nvPr/>
         </p:nvSpPr>
@@ -17261,7 +17379,7 @@
       </p:sp>
       <p:pic>
         <p:nvPicPr>
-          <p:cNvPr id="12" name="Image 3" descr="/home/user/barberbook/docs/deck/assets/panel.png">    </p:cNvPr>
+          <p:cNvPr id="13" name="Image 3" descr="/home/user/barberbook/docs/deck/assets/panel.png">    </p:cNvPr>
           <p:cNvPicPr>
             <a:picLocks noChangeAspect="1"/>
           </p:cNvPicPr>
@@ -17275,8 +17393,8 @@
         </p:blipFill>
         <p:spPr>
           <a:xfrm>
-            <a:off x="4257040" y="2523490"/>
-            <a:ext cx="3644900" cy="2908300"/>
+            <a:off x="4161790" y="2477770"/>
+            <a:ext cx="3868420" cy="2908300"/>
           </a:xfrm>
           <a:prstGeom prst="rect">
             <a:avLst/>
@@ -17285,7 +17403,29 @@
       </p:pic>
       <p:sp>
         <p:nvSpPr>
-          <p:cNvPr id="13" name="Text 7"/>
+          <p:cNvPr id="14" name="Shape 8"/>
+          <p:cNvSpPr/>
+          <p:nvPr/>
+        </p:nvSpPr>
+        <p:spPr>
+          <a:xfrm>
+            <a:off x="4307840" y="2523490"/>
+            <a:ext cx="3576320" cy="2651760"/>
+          </a:xfrm>
+          <a:prstGeom prst="roundRect">
+            <a:avLst>
+              <a:gd name="adj" fmla="val 1724"/>
+            </a:avLst>
+          </a:prstGeom>
+          <a:solidFill>
+            <a:srgbClr val="FFFFFF"/>
+          </a:solidFill>
+          <a:ln/>
+        </p:spPr>
+      </p:sp>
+      <p:sp>
+        <p:nvSpPr>
+          <p:cNvPr id="15" name="Text 9"/>
           <p:cNvSpPr txBox="1"/>
           <p:nvPr/>
         </p:nvSpPr>
@@ -17324,7 +17464,7 @@
       </p:sp>
       <p:sp>
         <p:nvSpPr>
-          <p:cNvPr id="14" name="Text 8"/>
+          <p:cNvPr id="16" name="Text 10"/>
           <p:cNvSpPr txBox="1"/>
           <p:nvPr/>
         </p:nvSpPr>
@@ -17363,7 +17503,7 @@
       </p:sp>
       <p:sp>
         <p:nvSpPr>
-          <p:cNvPr id="15" name="Text 9"/>
+          <p:cNvPr id="17" name="Text 11"/>
           <p:cNvSpPr txBox="1"/>
           <p:nvPr/>
         </p:nvSpPr>
@@ -17402,7 +17542,7 @@
       </p:sp>
       <p:pic>
         <p:nvPicPr>
-          <p:cNvPr id="16" name="Image 4" descr="/home/user/barberbook/docs/deck/assets/panel.png">    </p:cNvPr>
+          <p:cNvPr id="18" name="Image 4" descr="/home/user/barberbook/docs/deck/assets/panel.png">    </p:cNvPr>
           <p:cNvPicPr>
             <a:picLocks noChangeAspect="1"/>
           </p:cNvPicPr>
@@ -17416,8 +17556,8 @@
         </p:blipFill>
         <p:spPr>
           <a:xfrm>
-            <a:off x="7998460" y="2523490"/>
-            <a:ext cx="3644900" cy="2908300"/>
+            <a:off x="7903210" y="2477770"/>
+            <a:ext cx="3868420" cy="2908300"/>
           </a:xfrm>
           <a:prstGeom prst="rect">
             <a:avLst/>
@@ -17426,7 +17566,29 @@
       </p:pic>
       <p:sp>
         <p:nvSpPr>
-          <p:cNvPr id="17" name="Text 10"/>
+          <p:cNvPr id="19" name="Shape 12"/>
+          <p:cNvSpPr/>
+          <p:nvPr/>
+        </p:nvSpPr>
+        <p:spPr>
+          <a:xfrm>
+            <a:off x="8049260" y="2523490"/>
+            <a:ext cx="3576320" cy="2651760"/>
+          </a:xfrm>
+          <a:prstGeom prst="roundRect">
+            <a:avLst>
+              <a:gd name="adj" fmla="val 1724"/>
+            </a:avLst>
+          </a:prstGeom>
+          <a:solidFill>
+            <a:srgbClr val="FFFFFF"/>
+          </a:solidFill>
+          <a:ln/>
+        </p:spPr>
+      </p:sp>
+      <p:sp>
+        <p:nvSpPr>
+          <p:cNvPr id="20" name="Text 13"/>
           <p:cNvSpPr txBox="1"/>
           <p:nvPr/>
         </p:nvSpPr>
@@ -17465,7 +17627,7 @@
       </p:sp>
       <p:sp>
         <p:nvSpPr>
-          <p:cNvPr id="18" name="Text 11"/>
+          <p:cNvPr id="21" name="Text 14"/>
           <p:cNvSpPr txBox="1"/>
           <p:nvPr/>
         </p:nvSpPr>
@@ -17504,7 +17666,7 @@
       </p:sp>
       <p:sp>
         <p:nvSpPr>
-          <p:cNvPr id="19" name="Text 12"/>
+          <p:cNvPr id="22" name="Text 15"/>
           <p:cNvSpPr txBox="1"/>
           <p:nvPr/>
         </p:nvSpPr>
@@ -20575,8 +20737,8 @@
         </p:blipFill>
         <p:spPr>
           <a:xfrm>
-            <a:off x="515620" y="2523490"/>
-            <a:ext cx="3644900" cy="2336800"/>
+            <a:off x="420370" y="2477770"/>
+            <a:ext cx="3868420" cy="2339340"/>
           </a:xfrm>
           <a:prstGeom prst="rect">
             <a:avLst/>
@@ -20585,7 +20747,29 @@
       </p:pic>
       <p:sp>
         <p:nvSpPr>
-          <p:cNvPr id="10" name="Text 5"/>
+          <p:cNvPr id="10" name="Shape 5"/>
+          <p:cNvSpPr/>
+          <p:nvPr/>
+        </p:nvSpPr>
+        <p:spPr>
+          <a:xfrm>
+            <a:off x="566420" y="2523490"/>
+            <a:ext cx="3576320" cy="2082800"/>
+          </a:xfrm>
+          <a:prstGeom prst="roundRect">
+            <a:avLst>
+              <a:gd name="adj" fmla="val 2195"/>
+            </a:avLst>
+          </a:prstGeom>
+          <a:solidFill>
+            <a:srgbClr val="FFFFFF"/>
+          </a:solidFill>
+          <a:ln/>
+        </p:spPr>
+      </p:sp>
+      <p:sp>
+        <p:nvSpPr>
+          <p:cNvPr id="11" name="Text 6"/>
           <p:cNvSpPr txBox="1"/>
           <p:nvPr/>
         </p:nvSpPr>
@@ -20624,7 +20808,7 @@
       </p:sp>
       <p:sp>
         <p:nvSpPr>
-          <p:cNvPr id="11" name="Text 6"/>
+          <p:cNvPr id="12" name="Text 7"/>
           <p:cNvSpPr txBox="1"/>
           <p:nvPr/>
         </p:nvSpPr>
@@ -20663,7 +20847,7 @@
       </p:sp>
       <p:pic>
         <p:nvPicPr>
-          <p:cNvPr id="12" name="Image 3" descr="/home/user/barberbook/docs/deck/assets/panel.png">    </p:cNvPr>
+          <p:cNvPr id="13" name="Image 3" descr="/home/user/barberbook/docs/deck/assets/panel.png">    </p:cNvPr>
           <p:cNvPicPr>
             <a:picLocks noChangeAspect="1"/>
           </p:cNvPicPr>
@@ -20677,8 +20861,8 @@
         </p:blipFill>
         <p:spPr>
           <a:xfrm>
-            <a:off x="4257040" y="2523490"/>
-            <a:ext cx="3644900" cy="2336800"/>
+            <a:off x="4161790" y="2477770"/>
+            <a:ext cx="3868420" cy="2339340"/>
           </a:xfrm>
           <a:prstGeom prst="rect">
             <a:avLst/>
@@ -20687,7 +20871,29 @@
       </p:pic>
       <p:sp>
         <p:nvSpPr>
-          <p:cNvPr id="13" name="Text 7"/>
+          <p:cNvPr id="14" name="Shape 8"/>
+          <p:cNvSpPr/>
+          <p:nvPr/>
+        </p:nvSpPr>
+        <p:spPr>
+          <a:xfrm>
+            <a:off x="4307840" y="2523490"/>
+            <a:ext cx="3576320" cy="2082800"/>
+          </a:xfrm>
+          <a:prstGeom prst="roundRect">
+            <a:avLst>
+              <a:gd name="adj" fmla="val 2195"/>
+            </a:avLst>
+          </a:prstGeom>
+          <a:solidFill>
+            <a:srgbClr val="FFFFFF"/>
+          </a:solidFill>
+          <a:ln/>
+        </p:spPr>
+      </p:sp>
+      <p:sp>
+        <p:nvSpPr>
+          <p:cNvPr id="15" name="Text 9"/>
           <p:cNvSpPr txBox="1"/>
           <p:nvPr/>
         </p:nvSpPr>
@@ -20726,7 +20932,7 @@
       </p:sp>
       <p:sp>
         <p:nvSpPr>
-          <p:cNvPr id="14" name="Text 8"/>
+          <p:cNvPr id="16" name="Text 10"/>
           <p:cNvSpPr txBox="1"/>
           <p:nvPr/>
         </p:nvSpPr>
@@ -20765,7 +20971,7 @@
       </p:sp>
       <p:pic>
         <p:nvPicPr>
-          <p:cNvPr id="15" name="Image 4" descr="/home/user/barberbook/docs/deck/assets/panel.png">    </p:cNvPr>
+          <p:cNvPr id="17" name="Image 4" descr="/home/user/barberbook/docs/deck/assets/panel.png">    </p:cNvPr>
           <p:cNvPicPr>
             <a:picLocks noChangeAspect="1"/>
           </p:cNvPicPr>
@@ -20779,8 +20985,8 @@
         </p:blipFill>
         <p:spPr>
           <a:xfrm>
-            <a:off x="7998460" y="2523490"/>
-            <a:ext cx="3644900" cy="2336800"/>
+            <a:off x="7903210" y="2477770"/>
+            <a:ext cx="3868420" cy="2339340"/>
           </a:xfrm>
           <a:prstGeom prst="rect">
             <a:avLst/>
@@ -20789,7 +20995,29 @@
       </p:pic>
       <p:sp>
         <p:nvSpPr>
-          <p:cNvPr id="16" name="Text 9"/>
+          <p:cNvPr id="18" name="Shape 11"/>
+          <p:cNvSpPr/>
+          <p:nvPr/>
+        </p:nvSpPr>
+        <p:spPr>
+          <a:xfrm>
+            <a:off x="8049260" y="2523490"/>
+            <a:ext cx="3576320" cy="2082800"/>
+          </a:xfrm>
+          <a:prstGeom prst="roundRect">
+            <a:avLst>
+              <a:gd name="adj" fmla="val 2195"/>
+            </a:avLst>
+          </a:prstGeom>
+          <a:solidFill>
+            <a:srgbClr val="FFFFFF"/>
+          </a:solidFill>
+          <a:ln/>
+        </p:spPr>
+      </p:sp>
+      <p:sp>
+        <p:nvSpPr>
+          <p:cNvPr id="19" name="Text 12"/>
           <p:cNvSpPr txBox="1"/>
           <p:nvPr/>
         </p:nvSpPr>
@@ -20828,7 +21056,7 @@
       </p:sp>
       <p:sp>
         <p:nvSpPr>
-          <p:cNvPr id="17" name="Text 10"/>
+          <p:cNvPr id="20" name="Text 13"/>
           <p:cNvSpPr txBox="1"/>
           <p:nvPr/>
         </p:nvSpPr>
@@ -20867,7 +21095,7 @@
       </p:sp>
       <p:sp>
         <p:nvSpPr>
-          <p:cNvPr id="18" name="Text 11"/>
+          <p:cNvPr id="21" name="Text 14"/>
           <p:cNvSpPr txBox="1"/>
           <p:nvPr/>
         </p:nvSpPr>
@@ -20906,7 +21134,7 @@
       </p:sp>
       <p:sp>
         <p:nvSpPr>
-          <p:cNvPr id="19" name="Text 12"/>
+          <p:cNvPr id="22" name="Text 15"/>
           <p:cNvSpPr txBox="1"/>
           <p:nvPr/>
         </p:nvSpPr>
@@ -20945,7 +21173,7 @@
       </p:sp>
       <p:sp>
         <p:nvSpPr>
-          <p:cNvPr id="20" name="Shape 13"/>
+          <p:cNvPr id="23" name="Shape 16"/>
           <p:cNvSpPr/>
           <p:nvPr/>
         </p:nvSpPr>
@@ -20967,7 +21195,7 @@
       </p:sp>
       <p:sp>
         <p:nvSpPr>
-          <p:cNvPr id="21" name="Text 14"/>
+          <p:cNvPr id="24" name="Text 17"/>
           <p:cNvSpPr txBox="1"/>
           <p:nvPr/>
         </p:nvSpPr>
@@ -21208,48 +21436,9 @@
           </a:prstGeom>
         </p:spPr>
       </p:pic>
-      <p:sp>
-        <p:nvSpPr>
-          <p:cNvPr id="7" name="Text 3"/>
-          <p:cNvSpPr txBox="1"/>
-          <p:nvPr/>
-        </p:nvSpPr>
-        <p:spPr>
-          <a:xfrm>
-            <a:off x="657860" y="4368800"/>
-            <a:ext cx="1422400" cy="203200"/>
-          </a:xfrm>
-          <a:prstGeom prst="rect">
-            <a:avLst/>
-          </a:prstGeom>
-          <a:noFill/>
-          <a:ln/>
-        </p:spPr>
-        <p:txBody>
-          <a:bodyPr wrap="square" lIns="0" tIns="0" rIns="0" bIns="0" rtlCol="0" anchor="t"/>
-          <a:lstStyle/>
-          <a:p>
-            <a:pPr indent="0" marL="0">
-              <a:buNone/>
-            </a:pPr>
-            <a:r>
-              <a:rPr lang="en-US" sz="1000" dirty="0">
-                <a:solidFill>
-                  <a:srgbClr val="D3DCEF"/>
-                </a:solidFill>
-                <a:latin typeface="Segoe UI Semilight" pitchFamily="34" charset="0"/>
-                <a:ea typeface="Segoe UI Semilight" pitchFamily="34" charset="-122"/>
-                <a:cs typeface="Segoe UI Semilight" pitchFamily="34" charset="-120"/>
-              </a:rPr>
-              <a:t>Portfolio</a:t>
-            </a:r>
-            <a:endParaRPr lang="en-US" sz="1000" dirty="0"/>
-          </a:p>
-        </p:txBody>
-      </p:sp>
       <p:pic>
         <p:nvPicPr>
-          <p:cNvPr id="8" name="Image 2" descr="/home/user/barberbook/docs/deck/assets/tile_b.png">    </p:cNvPr>
+          <p:cNvPr id="7" name="Image 2" descr="/home/user/barberbook/docs/deck/assets/tile_b.png">    </p:cNvPr>
           <p:cNvPicPr>
             <a:picLocks noChangeAspect="1"/>
           </p:cNvPicPr>
@@ -21263,8 +21452,8 @@
         </p:blipFill>
         <p:spPr>
           <a:xfrm>
-            <a:off x="2207260" y="3810000"/>
-            <a:ext cx="431800" cy="431800"/>
+            <a:off x="762000" y="3914140"/>
+            <a:ext cx="224790" cy="224790"/>
           </a:xfrm>
           <a:prstGeom prst="rect">
             <a:avLst/>
@@ -21273,13 +21462,13 @@
       </p:pic>
       <p:sp>
         <p:nvSpPr>
-          <p:cNvPr id="9" name="Text 4"/>
-          <p:cNvSpPr txBox="1"/>
-          <p:nvPr/>
-        </p:nvSpPr>
-        <p:spPr>
-          <a:xfrm>
-            <a:off x="2207260" y="4368800"/>
+          <p:cNvPr id="8" name="Text 3"/>
+          <p:cNvSpPr txBox="1"/>
+          <p:nvPr/>
+        </p:nvSpPr>
+        <p:spPr>
+          <a:xfrm>
+            <a:off x="657860" y="4368800"/>
             <a:ext cx="1422400" cy="203200"/>
           </a:xfrm>
           <a:prstGeom prst="rect">
@@ -21304,7 +21493,7 @@
                 <a:ea typeface="Segoe UI Semilight" pitchFamily="34" charset="-122"/>
                 <a:cs typeface="Segoe UI Semilight" pitchFamily="34" charset="-120"/>
               </a:rPr>
-              <a:t>Buyers</a:t>
+              <a:t>Portfolio</a:t>
             </a:r>
             <a:endParaRPr lang="en-US" sz="1000" dirty="0"/>
           </a:p>
@@ -21312,7 +21501,7 @@
       </p:sp>
       <p:pic>
         <p:nvPicPr>
-          <p:cNvPr id="10" name="Image 3" descr="/home/user/barberbook/docs/deck/assets/tile_d.png">    </p:cNvPr>
+          <p:cNvPr id="9" name="Image 3" descr="/home/user/barberbook/docs/deck/assets/tile_c.png">    </p:cNvPr>
           <p:cNvPicPr>
             <a:picLocks noChangeAspect="1"/>
           </p:cNvPicPr>
@@ -21326,6 +21515,93 @@
         </p:blipFill>
         <p:spPr>
           <a:xfrm>
+            <a:off x="2207260" y="3810000"/>
+            <a:ext cx="431800" cy="431800"/>
+          </a:xfrm>
+          <a:prstGeom prst="rect">
+            <a:avLst/>
+          </a:prstGeom>
+        </p:spPr>
+      </p:pic>
+      <p:pic>
+        <p:nvPicPr>
+          <p:cNvPr id="10" name="Image 4" descr="/home/user/barberbook/docs/deck/assets/tile_b.png">    </p:cNvPr>
+          <p:cNvPicPr>
+            <a:picLocks noChangeAspect="1"/>
+          </p:cNvPicPr>
+          <p:nvPr/>
+        </p:nvPicPr>
+        <p:blipFill>
+          <a:blip r:embed="rId5"/>
+          <a:stretch>
+            <a:fillRect/>
+          </a:stretch>
+        </p:blipFill>
+        <p:spPr>
+          <a:xfrm>
+            <a:off x="2311400" y="3914140"/>
+            <a:ext cx="224790" cy="224790"/>
+          </a:xfrm>
+          <a:prstGeom prst="rect">
+            <a:avLst/>
+          </a:prstGeom>
+        </p:spPr>
+      </p:pic>
+      <p:sp>
+        <p:nvSpPr>
+          <p:cNvPr id="11" name="Text 4"/>
+          <p:cNvSpPr txBox="1"/>
+          <p:nvPr/>
+        </p:nvSpPr>
+        <p:spPr>
+          <a:xfrm>
+            <a:off x="2207260" y="4368800"/>
+            <a:ext cx="1422400" cy="203200"/>
+          </a:xfrm>
+          <a:prstGeom prst="rect">
+            <a:avLst/>
+          </a:prstGeom>
+          <a:noFill/>
+          <a:ln/>
+        </p:spPr>
+        <p:txBody>
+          <a:bodyPr wrap="square" lIns="0" tIns="0" rIns="0" bIns="0" rtlCol="0" anchor="t"/>
+          <a:lstStyle/>
+          <a:p>
+            <a:pPr indent="0" marL="0">
+              <a:buNone/>
+            </a:pPr>
+            <a:r>
+              <a:rPr lang="en-US" sz="1000" dirty="0">
+                <a:solidFill>
+                  <a:srgbClr val="D3DCEF"/>
+                </a:solidFill>
+                <a:latin typeface="Segoe UI Semilight" pitchFamily="34" charset="0"/>
+                <a:ea typeface="Segoe UI Semilight" pitchFamily="34" charset="-122"/>
+                <a:cs typeface="Segoe UI Semilight" pitchFamily="34" charset="-120"/>
+              </a:rPr>
+              <a:t>Buyers</a:t>
+            </a:r>
+            <a:endParaRPr lang="en-US" sz="1000" dirty="0"/>
+          </a:p>
+        </p:txBody>
+      </p:sp>
+      <p:pic>
+        <p:nvPicPr>
+          <p:cNvPr id="12" name="Image 5" descr="/home/user/barberbook/docs/deck/assets/tile_d.png">    </p:cNvPr>
+          <p:cNvPicPr>
+            <a:picLocks noChangeAspect="1"/>
+          </p:cNvPicPr>
+          <p:nvPr/>
+        </p:nvPicPr>
+        <p:blipFill>
+          <a:blip r:embed="rId6"/>
+          <a:stretch>
+            <a:fillRect/>
+          </a:stretch>
+        </p:blipFill>
+        <p:spPr>
+          <a:xfrm>
             <a:off x="3756660" y="3810000"/>
             <a:ext cx="431800" cy="431800"/>
           </a:xfrm>
@@ -21334,9 +21610,33 @@
           </a:prstGeom>
         </p:spPr>
       </p:pic>
-      <p:sp>
-        <p:nvSpPr>
-          <p:cNvPr id="11" name="Text 5"/>
+      <p:pic>
+        <p:nvPicPr>
+          <p:cNvPr id="13" name="Image 6" descr="/home/user/barberbook/docs/deck/assets/tile_e.png">    </p:cNvPr>
+          <p:cNvPicPr>
+            <a:picLocks noChangeAspect="1"/>
+          </p:cNvPicPr>
+          <p:nvPr/>
+        </p:nvPicPr>
+        <p:blipFill>
+          <a:blip r:embed="rId7"/>
+          <a:stretch>
+            <a:fillRect/>
+          </a:stretch>
+        </p:blipFill>
+        <p:spPr>
+          <a:xfrm>
+            <a:off x="3860800" y="3914140"/>
+            <a:ext cx="224790" cy="224790"/>
+          </a:xfrm>
+          <a:prstGeom prst="rect">
+            <a:avLst/>
+          </a:prstGeom>
+        </p:spPr>
+      </p:pic>
+      <p:sp>
+        <p:nvSpPr>
+          <p:cNvPr id="14" name="Text 5"/>
           <p:cNvSpPr txBox="1"/>
           <p:nvPr/>
         </p:nvSpPr>
@@ -21375,7 +21675,7 @@
       </p:sp>
       <p:sp>
         <p:nvSpPr>
-          <p:cNvPr id="12" name="Text 6"/>
+          <p:cNvPr id="15" name="Text 6"/>
           <p:cNvSpPr txBox="1"/>
           <p:nvPr/>
         </p:nvSpPr>
@@ -21442,7 +21742,7 @@
       </p:sp>
       <p:sp>
         <p:nvSpPr>
-          <p:cNvPr id="13" name="Text 7"/>
+          <p:cNvPr id="16" name="Text 7"/>
           <p:cNvSpPr txBox="1"/>
           <p:nvPr/>
         </p:nvSpPr>
@@ -21791,17 +22091,39 @@
         </p:blipFill>
         <p:spPr>
           <a:xfrm>
-            <a:off x="515620" y="2472690"/>
-            <a:ext cx="2819400" cy="2908300"/>
+            <a:off x="420370" y="2426970"/>
+            <a:ext cx="2933700" cy="2908300"/>
           </a:xfrm>
           <a:prstGeom prst="rect">
             <a:avLst/>
           </a:prstGeom>
         </p:spPr>
       </p:pic>
+      <p:sp>
+        <p:nvSpPr>
+          <p:cNvPr id="10" name="Shape 5"/>
+          <p:cNvSpPr/>
+          <p:nvPr/>
+        </p:nvSpPr>
+        <p:spPr>
+          <a:xfrm>
+            <a:off x="566420" y="2472690"/>
+            <a:ext cx="2641600" cy="2651760"/>
+          </a:xfrm>
+          <a:prstGeom prst="roundRect">
+            <a:avLst>
+              <a:gd name="adj" fmla="val 1731"/>
+            </a:avLst>
+          </a:prstGeom>
+          <a:solidFill>
+            <a:srgbClr val="FFFFFF"/>
+          </a:solidFill>
+          <a:ln/>
+        </p:spPr>
+      </p:sp>
       <p:pic>
         <p:nvPicPr>
-          <p:cNvPr id="10" name="Image 3" descr="/home/user/barberbook/docs/deck/assets/icon_a.png">    </p:cNvPr>
+          <p:cNvPr id="11" name="Image 3" descr="/home/user/barberbook/docs/deck/assets/icon_a.png">    </p:cNvPr>
           <p:cNvPicPr>
             <a:picLocks noChangeAspect="1"/>
           </p:cNvPicPr>
@@ -21825,7 +22147,7 @@
       </p:pic>
       <p:sp>
         <p:nvSpPr>
-          <p:cNvPr id="11" name="Text 5"/>
+          <p:cNvPr id="12" name="Text 6"/>
           <p:cNvSpPr txBox="1"/>
           <p:nvPr/>
         </p:nvSpPr>
@@ -21864,7 +22186,7 @@
       </p:sp>
       <p:sp>
         <p:nvSpPr>
-          <p:cNvPr id="12" name="Text 6"/>
+          <p:cNvPr id="13" name="Text 7"/>
           <p:cNvSpPr txBox="1"/>
           <p:nvPr/>
         </p:nvSpPr>
@@ -21903,7 +22225,7 @@
       </p:sp>
       <p:pic>
         <p:nvPicPr>
-          <p:cNvPr id="13" name="Image 4" descr="/home/user/barberbook/docs/deck/assets/panel.png">    </p:cNvPr>
+          <p:cNvPr id="14" name="Image 4" descr="/home/user/barberbook/docs/deck/assets/panel.png">    </p:cNvPr>
           <p:cNvPicPr>
             <a:picLocks noChangeAspect="1"/>
           </p:cNvPicPr>
@@ -21917,17 +22239,39 @@
         </p:blipFill>
         <p:spPr>
           <a:xfrm>
-            <a:off x="3322320" y="2472690"/>
-            <a:ext cx="2819400" cy="2908300"/>
+            <a:off x="3227070" y="2426970"/>
+            <a:ext cx="2933700" cy="2908300"/>
           </a:xfrm>
           <a:prstGeom prst="rect">
             <a:avLst/>
           </a:prstGeom>
         </p:spPr>
       </p:pic>
+      <p:sp>
+        <p:nvSpPr>
+          <p:cNvPr id="15" name="Shape 8"/>
+          <p:cNvSpPr/>
+          <p:nvPr/>
+        </p:nvSpPr>
+        <p:spPr>
+          <a:xfrm>
+            <a:off x="3373120" y="2472690"/>
+            <a:ext cx="2641600" cy="2651760"/>
+          </a:xfrm>
+          <a:prstGeom prst="roundRect">
+            <a:avLst>
+              <a:gd name="adj" fmla="val 1731"/>
+            </a:avLst>
+          </a:prstGeom>
+          <a:solidFill>
+            <a:srgbClr val="FFFFFF"/>
+          </a:solidFill>
+          <a:ln/>
+        </p:spPr>
+      </p:sp>
       <p:pic>
         <p:nvPicPr>
-          <p:cNvPr id="14" name="Image 5" descr="/home/user/barberbook/docs/deck/assets/icon_b.png">    </p:cNvPr>
+          <p:cNvPr id="16" name="Image 5" descr="/home/user/barberbook/docs/deck/assets/icon_b.png">    </p:cNvPr>
           <p:cNvPicPr>
             <a:picLocks noChangeAspect="1"/>
           </p:cNvPicPr>
@@ -21951,7 +22295,7 @@
       </p:pic>
       <p:sp>
         <p:nvSpPr>
-          <p:cNvPr id="15" name="Text 7"/>
+          <p:cNvPr id="17" name="Text 9"/>
           <p:cNvSpPr txBox="1"/>
           <p:nvPr/>
         </p:nvSpPr>
@@ -21990,7 +22334,7 @@
       </p:sp>
       <p:sp>
         <p:nvSpPr>
-          <p:cNvPr id="16" name="Text 8"/>
+          <p:cNvPr id="18" name="Text 10"/>
           <p:cNvSpPr txBox="1"/>
           <p:nvPr/>
         </p:nvSpPr>
@@ -22029,7 +22373,7 @@
       </p:sp>
       <p:pic>
         <p:nvPicPr>
-          <p:cNvPr id="17" name="Image 6" descr="/home/user/barberbook/docs/deck/assets/panel.png">    </p:cNvPr>
+          <p:cNvPr id="19" name="Image 6" descr="/home/user/barberbook/docs/deck/assets/panel.png">    </p:cNvPr>
           <p:cNvPicPr>
             <a:picLocks noChangeAspect="1"/>
           </p:cNvPicPr>
@@ -22043,17 +22387,39 @@
         </p:blipFill>
         <p:spPr>
           <a:xfrm>
-            <a:off x="6129020" y="2472690"/>
-            <a:ext cx="2819400" cy="2908300"/>
+            <a:off x="6033770" y="2426970"/>
+            <a:ext cx="2933700" cy="2908300"/>
           </a:xfrm>
           <a:prstGeom prst="rect">
             <a:avLst/>
           </a:prstGeom>
         </p:spPr>
       </p:pic>
+      <p:sp>
+        <p:nvSpPr>
+          <p:cNvPr id="20" name="Shape 11"/>
+          <p:cNvSpPr/>
+          <p:nvPr/>
+        </p:nvSpPr>
+        <p:spPr>
+          <a:xfrm>
+            <a:off x="6179820" y="2472690"/>
+            <a:ext cx="2641600" cy="2651760"/>
+          </a:xfrm>
+          <a:prstGeom prst="roundRect">
+            <a:avLst>
+              <a:gd name="adj" fmla="val 1731"/>
+            </a:avLst>
+          </a:prstGeom>
+          <a:solidFill>
+            <a:srgbClr val="FFFFFF"/>
+          </a:solidFill>
+          <a:ln/>
+        </p:spPr>
+      </p:sp>
       <p:pic>
         <p:nvPicPr>
-          <p:cNvPr id="18" name="Image 7" descr="/home/user/barberbook/docs/deck/assets/icon_c.png">    </p:cNvPr>
+          <p:cNvPr id="21" name="Image 7" descr="/home/user/barberbook/docs/deck/assets/icon_c.png">    </p:cNvPr>
           <p:cNvPicPr>
             <a:picLocks noChangeAspect="1"/>
           </p:cNvPicPr>
@@ -22077,7 +22443,7 @@
       </p:pic>
       <p:sp>
         <p:nvSpPr>
-          <p:cNvPr id="19" name="Text 9"/>
+          <p:cNvPr id="22" name="Text 12"/>
           <p:cNvSpPr txBox="1"/>
           <p:nvPr/>
         </p:nvSpPr>
@@ -22116,7 +22482,7 @@
       </p:sp>
       <p:sp>
         <p:nvSpPr>
-          <p:cNvPr id="20" name="Text 10"/>
+          <p:cNvPr id="23" name="Text 13"/>
           <p:cNvSpPr txBox="1"/>
           <p:nvPr/>
         </p:nvSpPr>
@@ -22155,7 +22521,7 @@
       </p:sp>
       <p:pic>
         <p:nvPicPr>
-          <p:cNvPr id="21" name="Image 8" descr="/home/user/barberbook/docs/deck/assets/panel.png">    </p:cNvPr>
+          <p:cNvPr id="24" name="Image 8" descr="/home/user/barberbook/docs/deck/assets/panel.png">    </p:cNvPr>
           <p:cNvPicPr>
             <a:picLocks noChangeAspect="1"/>
           </p:cNvPicPr>
@@ -22169,17 +22535,39 @@
         </p:blipFill>
         <p:spPr>
           <a:xfrm>
-            <a:off x="8935720" y="2472690"/>
-            <a:ext cx="2819400" cy="2908300"/>
+            <a:off x="8840470" y="2426970"/>
+            <a:ext cx="2933700" cy="2908300"/>
           </a:xfrm>
           <a:prstGeom prst="rect">
             <a:avLst/>
           </a:prstGeom>
         </p:spPr>
       </p:pic>
+      <p:sp>
+        <p:nvSpPr>
+          <p:cNvPr id="25" name="Shape 14"/>
+          <p:cNvSpPr/>
+          <p:nvPr/>
+        </p:nvSpPr>
+        <p:spPr>
+          <a:xfrm>
+            <a:off x="8986520" y="2472690"/>
+            <a:ext cx="2641600" cy="2651760"/>
+          </a:xfrm>
+          <a:prstGeom prst="roundRect">
+            <a:avLst>
+              <a:gd name="adj" fmla="val 1731"/>
+            </a:avLst>
+          </a:prstGeom>
+          <a:solidFill>
+            <a:srgbClr val="FFFFFF"/>
+          </a:solidFill>
+          <a:ln/>
+        </p:spPr>
+      </p:sp>
       <p:pic>
         <p:nvPicPr>
-          <p:cNvPr id="22" name="Image 9" descr="/home/user/barberbook/docs/deck/assets/icon_d.png">    </p:cNvPr>
+          <p:cNvPr id="26" name="Image 9" descr="/home/user/barberbook/docs/deck/assets/icon_d.png">    </p:cNvPr>
           <p:cNvPicPr>
             <a:picLocks noChangeAspect="1"/>
           </p:cNvPicPr>
@@ -22203,7 +22591,7 @@
       </p:pic>
       <p:sp>
         <p:nvSpPr>
-          <p:cNvPr id="23" name="Text 11"/>
+          <p:cNvPr id="27" name="Text 15"/>
           <p:cNvSpPr txBox="1"/>
           <p:nvPr/>
         </p:nvSpPr>
@@ -22242,7 +22630,7 @@
       </p:sp>
       <p:sp>
         <p:nvSpPr>
-          <p:cNvPr id="24" name="Text 12"/>
+          <p:cNvPr id="28" name="Text 16"/>
           <p:cNvSpPr txBox="1"/>
           <p:nvPr/>
         </p:nvSpPr>
@@ -22281,7 +22669,7 @@
       </p:sp>
       <p:sp>
         <p:nvSpPr>
-          <p:cNvPr id="25" name="Shape 13"/>
+          <p:cNvPr id="29" name="Shape 17"/>
           <p:cNvSpPr/>
           <p:nvPr/>
         </p:nvSpPr>
@@ -22303,7 +22691,7 @@
       </p:sp>
       <p:sp>
         <p:nvSpPr>
-          <p:cNvPr id="26" name="Text 14"/>
+          <p:cNvPr id="30" name="Text 18"/>
           <p:cNvSpPr txBox="1"/>
           <p:nvPr/>
         </p:nvSpPr>
@@ -24207,8 +24595,8 @@
         </p:blipFill>
         <p:spPr>
           <a:xfrm>
-            <a:off x="515620" y="2523490"/>
-            <a:ext cx="3644900" cy="2908300"/>
+            <a:off x="420370" y="2477770"/>
+            <a:ext cx="3868420" cy="2908300"/>
           </a:xfrm>
           <a:prstGeom prst="rect">
             <a:avLst/>
@@ -24217,7 +24605,29 @@
       </p:pic>
       <p:sp>
         <p:nvSpPr>
-          <p:cNvPr id="10" name="Text 5"/>
+          <p:cNvPr id="10" name="Shape 5"/>
+          <p:cNvSpPr/>
+          <p:nvPr/>
+        </p:nvSpPr>
+        <p:spPr>
+          <a:xfrm>
+            <a:off x="566420" y="2523490"/>
+            <a:ext cx="3576320" cy="2651760"/>
+          </a:xfrm>
+          <a:prstGeom prst="roundRect">
+            <a:avLst>
+              <a:gd name="adj" fmla="val 1724"/>
+            </a:avLst>
+          </a:prstGeom>
+          <a:solidFill>
+            <a:srgbClr val="FFFFFF"/>
+          </a:solidFill>
+          <a:ln/>
+        </p:spPr>
+      </p:sp>
+      <p:sp>
+        <p:nvSpPr>
+          <p:cNvPr id="11" name="Text 6"/>
           <p:cNvSpPr txBox="1"/>
           <p:nvPr/>
         </p:nvSpPr>
@@ -24256,7 +24666,7 @@
       </p:sp>
       <p:sp>
         <p:nvSpPr>
-          <p:cNvPr id="11" name="Text 6"/>
+          <p:cNvPr id="12" name="Text 7"/>
           <p:cNvSpPr txBox="1"/>
           <p:nvPr/>
         </p:nvSpPr>
@@ -24295,7 +24705,7 @@
       </p:sp>
       <p:pic>
         <p:nvPicPr>
-          <p:cNvPr id="12" name="Image 3" descr="/home/user/barberbook/docs/deck/assets/panel.png">    </p:cNvPr>
+          <p:cNvPr id="13" name="Image 3" descr="/home/user/barberbook/docs/deck/assets/panel.png">    </p:cNvPr>
           <p:cNvPicPr>
             <a:picLocks noChangeAspect="1"/>
           </p:cNvPicPr>
@@ -24309,8 +24719,8 @@
         </p:blipFill>
         <p:spPr>
           <a:xfrm>
-            <a:off x="4257040" y="2523490"/>
-            <a:ext cx="3644900" cy="2908300"/>
+            <a:off x="4161790" y="2477770"/>
+            <a:ext cx="3868420" cy="2908300"/>
           </a:xfrm>
           <a:prstGeom prst="rect">
             <a:avLst/>
@@ -24319,7 +24729,29 @@
       </p:pic>
       <p:sp>
         <p:nvSpPr>
-          <p:cNvPr id="13" name="Text 7"/>
+          <p:cNvPr id="14" name="Shape 8"/>
+          <p:cNvSpPr/>
+          <p:nvPr/>
+        </p:nvSpPr>
+        <p:spPr>
+          <a:xfrm>
+            <a:off x="4307840" y="2523490"/>
+            <a:ext cx="3576320" cy="2651760"/>
+          </a:xfrm>
+          <a:prstGeom prst="roundRect">
+            <a:avLst>
+              <a:gd name="adj" fmla="val 1724"/>
+            </a:avLst>
+          </a:prstGeom>
+          <a:solidFill>
+            <a:srgbClr val="FFFFFF"/>
+          </a:solidFill>
+          <a:ln/>
+        </p:spPr>
+      </p:sp>
+      <p:sp>
+        <p:nvSpPr>
+          <p:cNvPr id="15" name="Text 9"/>
           <p:cNvSpPr txBox="1"/>
           <p:nvPr/>
         </p:nvSpPr>
@@ -24358,7 +24790,7 @@
       </p:sp>
       <p:sp>
         <p:nvSpPr>
-          <p:cNvPr id="14" name="Text 8"/>
+          <p:cNvPr id="16" name="Text 10"/>
           <p:cNvSpPr txBox="1"/>
           <p:nvPr/>
         </p:nvSpPr>
@@ -24397,7 +24829,7 @@
       </p:sp>
       <p:pic>
         <p:nvPicPr>
-          <p:cNvPr id="15" name="Image 4" descr="/home/user/barberbook/docs/deck/assets/panel.png">    </p:cNvPr>
+          <p:cNvPr id="17" name="Image 4" descr="/home/user/barberbook/docs/deck/assets/panel.png">    </p:cNvPr>
           <p:cNvPicPr>
             <a:picLocks noChangeAspect="1"/>
           </p:cNvPicPr>
@@ -24411,8 +24843,8 @@
         </p:blipFill>
         <p:spPr>
           <a:xfrm>
-            <a:off x="7998460" y="2523490"/>
-            <a:ext cx="3644900" cy="2908300"/>
+            <a:off x="7903210" y="2477770"/>
+            <a:ext cx="3868420" cy="2908300"/>
           </a:xfrm>
           <a:prstGeom prst="rect">
             <a:avLst/>
@@ -24421,7 +24853,29 @@
       </p:pic>
       <p:sp>
         <p:nvSpPr>
-          <p:cNvPr id="16" name="Text 9"/>
+          <p:cNvPr id="18" name="Shape 11"/>
+          <p:cNvSpPr/>
+          <p:nvPr/>
+        </p:nvSpPr>
+        <p:spPr>
+          <a:xfrm>
+            <a:off x="8049260" y="2523490"/>
+            <a:ext cx="3576320" cy="2651760"/>
+          </a:xfrm>
+          <a:prstGeom prst="roundRect">
+            <a:avLst>
+              <a:gd name="adj" fmla="val 1724"/>
+            </a:avLst>
+          </a:prstGeom>
+          <a:solidFill>
+            <a:srgbClr val="FFFFFF"/>
+          </a:solidFill>
+          <a:ln/>
+        </p:spPr>
+      </p:sp>
+      <p:sp>
+        <p:nvSpPr>
+          <p:cNvPr id="19" name="Text 12"/>
           <p:cNvSpPr txBox="1"/>
           <p:nvPr/>
         </p:nvSpPr>
@@ -24460,7 +24914,7 @@
       </p:sp>
       <p:sp>
         <p:nvSpPr>
-          <p:cNvPr id="17" name="Text 10"/>
+          <p:cNvPr id="20" name="Text 13"/>
           <p:cNvSpPr txBox="1"/>
           <p:nvPr/>
         </p:nvSpPr>
@@ -25643,48 +26097,9 @@
           </a:prstGeom>
         </p:spPr>
       </p:pic>
-      <p:sp>
-        <p:nvSpPr>
-          <p:cNvPr id="7" name="Text 3"/>
-          <p:cNvSpPr txBox="1"/>
-          <p:nvPr/>
-        </p:nvSpPr>
-        <p:spPr>
-          <a:xfrm>
-            <a:off x="657860" y="4368800"/>
-            <a:ext cx="1422400" cy="203200"/>
-          </a:xfrm>
-          <a:prstGeom prst="rect">
-            <a:avLst/>
-          </a:prstGeom>
-          <a:noFill/>
-          <a:ln/>
-        </p:spPr>
-        <p:txBody>
-          <a:bodyPr wrap="square" lIns="0" tIns="0" rIns="0" bIns="0" rtlCol="0" anchor="t"/>
-          <a:lstStyle/>
-          <a:p>
-            <a:pPr indent="0" marL="0">
-              <a:buNone/>
-            </a:pPr>
-            <a:r>
-              <a:rPr lang="en-US" sz="1000" dirty="0">
-                <a:solidFill>
-                  <a:srgbClr val="D3DCEF"/>
-                </a:solidFill>
-                <a:latin typeface="Segoe UI Semilight" pitchFamily="34" charset="0"/>
-                <a:ea typeface="Segoe UI Semilight" pitchFamily="34" charset="-122"/>
-                <a:cs typeface="Segoe UI Semilight" pitchFamily="34" charset="-120"/>
-              </a:rPr>
-              <a:t>List</a:t>
-            </a:r>
-            <a:endParaRPr lang="en-US" sz="1000" dirty="0"/>
-          </a:p>
-        </p:txBody>
-      </p:sp>
       <p:pic>
         <p:nvPicPr>
-          <p:cNvPr id="8" name="Image 2" descr="/home/user/barberbook/docs/deck/assets/tile_c.png">    </p:cNvPr>
+          <p:cNvPr id="7" name="Image 2" descr="/home/user/barberbook/docs/deck/assets/tile_e.png">    </p:cNvPr>
           <p:cNvPicPr>
             <a:picLocks noChangeAspect="1"/>
           </p:cNvPicPr>
@@ -25698,8 +26113,8 @@
         </p:blipFill>
         <p:spPr>
           <a:xfrm>
-            <a:off x="2207260" y="3810000"/>
-            <a:ext cx="431800" cy="431800"/>
+            <a:off x="762000" y="3914140"/>
+            <a:ext cx="224790" cy="224790"/>
           </a:xfrm>
           <a:prstGeom prst="rect">
             <a:avLst/>
@@ -25708,13 +26123,13 @@
       </p:pic>
       <p:sp>
         <p:nvSpPr>
-          <p:cNvPr id="9" name="Text 4"/>
-          <p:cNvSpPr txBox="1"/>
-          <p:nvPr/>
-        </p:nvSpPr>
-        <p:spPr>
-          <a:xfrm>
-            <a:off x="2207260" y="4368800"/>
+          <p:cNvPr id="8" name="Text 3"/>
+          <p:cNvSpPr txBox="1"/>
+          <p:nvPr/>
+        </p:nvSpPr>
+        <p:spPr>
+          <a:xfrm>
+            <a:off x="657860" y="4368800"/>
             <a:ext cx="1422400" cy="203200"/>
           </a:xfrm>
           <a:prstGeom prst="rect">
@@ -25739,7 +26154,7 @@
                 <a:ea typeface="Segoe UI Semilight" pitchFamily="34" charset="-122"/>
                 <a:cs typeface="Segoe UI Semilight" pitchFamily="34" charset="-120"/>
               </a:rPr>
-              <a:t>Partner</a:t>
+              <a:t>List</a:t>
             </a:r>
             <a:endParaRPr lang="en-US" sz="1000" dirty="0"/>
           </a:p>
@@ -25747,7 +26162,7 @@
       </p:sp>
       <p:pic>
         <p:nvPicPr>
-          <p:cNvPr id="10" name="Image 3" descr="/home/user/barberbook/docs/deck/assets/tile_f.png">    </p:cNvPr>
+          <p:cNvPr id="9" name="Image 3" descr="/home/user/barberbook/docs/deck/assets/tile_c.png">    </p:cNvPr>
           <p:cNvPicPr>
             <a:picLocks noChangeAspect="1"/>
           </p:cNvPicPr>
@@ -25761,7 +26176,7 @@
         </p:blipFill>
         <p:spPr>
           <a:xfrm>
-            <a:off x="3756660" y="3810000"/>
+            <a:off x="2207260" y="3810000"/>
             <a:ext cx="431800" cy="431800"/>
           </a:xfrm>
           <a:prstGeom prst="rect">
@@ -25769,48 +26184,9 @@
           </a:prstGeom>
         </p:spPr>
       </p:pic>
-      <p:sp>
-        <p:nvSpPr>
-          <p:cNvPr id="11" name="Text 5"/>
-          <p:cNvSpPr txBox="1"/>
-          <p:nvPr/>
-        </p:nvSpPr>
-        <p:spPr>
-          <a:xfrm>
-            <a:off x="3756660" y="4368800"/>
-            <a:ext cx="1422400" cy="203200"/>
-          </a:xfrm>
-          <a:prstGeom prst="rect">
-            <a:avLst/>
-          </a:prstGeom>
-          <a:noFill/>
-          <a:ln/>
-        </p:spPr>
-        <p:txBody>
-          <a:bodyPr wrap="square" lIns="0" tIns="0" rIns="0" bIns="0" rtlCol="0" anchor="t"/>
-          <a:lstStyle/>
-          <a:p>
-            <a:pPr indent="0" marL="0">
-              <a:buNone/>
-            </a:pPr>
-            <a:r>
-              <a:rPr lang="en-US" sz="1000" dirty="0">
-                <a:solidFill>
-                  <a:srgbClr val="D3DCEF"/>
-                </a:solidFill>
-                <a:latin typeface="Segoe UI Semilight" pitchFamily="34" charset="0"/>
-                <a:ea typeface="Segoe UI Semilight" pitchFamily="34" charset="-122"/>
-                <a:cs typeface="Segoe UI Semilight" pitchFamily="34" charset="-120"/>
-              </a:rPr>
-              <a:t>Operate</a:t>
-            </a:r>
-            <a:endParaRPr lang="en-US" sz="1000" dirty="0"/>
-          </a:p>
-        </p:txBody>
-      </p:sp>
       <p:pic>
         <p:nvPicPr>
-          <p:cNvPr id="12" name="Image 4" descr="/home/user/barberbook/docs/deck/assets/tile_g.png">    </p:cNvPr>
+          <p:cNvPr id="10" name="Image 4" descr="/home/user/barberbook/docs/deck/assets/tile_f.png">    </p:cNvPr>
           <p:cNvPicPr>
             <a:picLocks noChangeAspect="1"/>
           </p:cNvPicPr>
@@ -25824,6 +26200,156 @@
         </p:blipFill>
         <p:spPr>
           <a:xfrm>
+            <a:off x="2311400" y="3914140"/>
+            <a:ext cx="224790" cy="224790"/>
+          </a:xfrm>
+          <a:prstGeom prst="rect">
+            <a:avLst/>
+          </a:prstGeom>
+        </p:spPr>
+      </p:pic>
+      <p:sp>
+        <p:nvSpPr>
+          <p:cNvPr id="11" name="Text 4"/>
+          <p:cNvSpPr txBox="1"/>
+          <p:nvPr/>
+        </p:nvSpPr>
+        <p:spPr>
+          <a:xfrm>
+            <a:off x="2207260" y="4368800"/>
+            <a:ext cx="1422400" cy="203200"/>
+          </a:xfrm>
+          <a:prstGeom prst="rect">
+            <a:avLst/>
+          </a:prstGeom>
+          <a:noFill/>
+          <a:ln/>
+        </p:spPr>
+        <p:txBody>
+          <a:bodyPr wrap="square" lIns="0" tIns="0" rIns="0" bIns="0" rtlCol="0" anchor="t"/>
+          <a:lstStyle/>
+          <a:p>
+            <a:pPr indent="0" marL="0">
+              <a:buNone/>
+            </a:pPr>
+            <a:r>
+              <a:rPr lang="en-US" sz="1000" dirty="0">
+                <a:solidFill>
+                  <a:srgbClr val="D3DCEF"/>
+                </a:solidFill>
+                <a:latin typeface="Segoe UI Semilight" pitchFamily="34" charset="0"/>
+                <a:ea typeface="Segoe UI Semilight" pitchFamily="34" charset="-122"/>
+                <a:cs typeface="Segoe UI Semilight" pitchFamily="34" charset="-120"/>
+              </a:rPr>
+              <a:t>Partner</a:t>
+            </a:r>
+            <a:endParaRPr lang="en-US" sz="1000" dirty="0"/>
+          </a:p>
+        </p:txBody>
+      </p:sp>
+      <p:pic>
+        <p:nvPicPr>
+          <p:cNvPr id="12" name="Image 5" descr="/home/user/barberbook/docs/deck/assets/tile_d.png">    </p:cNvPr>
+          <p:cNvPicPr>
+            <a:picLocks noChangeAspect="1"/>
+          </p:cNvPicPr>
+          <p:nvPr/>
+        </p:nvPicPr>
+        <p:blipFill>
+          <a:blip r:embed="rId6"/>
+          <a:stretch>
+            <a:fillRect/>
+          </a:stretch>
+        </p:blipFill>
+        <p:spPr>
+          <a:xfrm>
+            <a:off x="3756660" y="3810000"/>
+            <a:ext cx="431800" cy="431800"/>
+          </a:xfrm>
+          <a:prstGeom prst="rect">
+            <a:avLst/>
+          </a:prstGeom>
+        </p:spPr>
+      </p:pic>
+      <p:pic>
+        <p:nvPicPr>
+          <p:cNvPr id="13" name="Image 6" descr="/home/user/barberbook/docs/deck/assets/tile_g.png">    </p:cNvPr>
+          <p:cNvPicPr>
+            <a:picLocks noChangeAspect="1"/>
+          </p:cNvPicPr>
+          <p:nvPr/>
+        </p:nvPicPr>
+        <p:blipFill>
+          <a:blip r:embed="rId7"/>
+          <a:stretch>
+            <a:fillRect/>
+          </a:stretch>
+        </p:blipFill>
+        <p:spPr>
+          <a:xfrm>
+            <a:off x="3860800" y="3914140"/>
+            <a:ext cx="224790" cy="224790"/>
+          </a:xfrm>
+          <a:prstGeom prst="rect">
+            <a:avLst/>
+          </a:prstGeom>
+        </p:spPr>
+      </p:pic>
+      <p:sp>
+        <p:nvSpPr>
+          <p:cNvPr id="14" name="Text 5"/>
+          <p:cNvSpPr txBox="1"/>
+          <p:nvPr/>
+        </p:nvSpPr>
+        <p:spPr>
+          <a:xfrm>
+            <a:off x="3756660" y="4368800"/>
+            <a:ext cx="1422400" cy="203200"/>
+          </a:xfrm>
+          <a:prstGeom prst="rect">
+            <a:avLst/>
+          </a:prstGeom>
+          <a:noFill/>
+          <a:ln/>
+        </p:spPr>
+        <p:txBody>
+          <a:bodyPr wrap="square" lIns="0" tIns="0" rIns="0" bIns="0" rtlCol="0" anchor="t"/>
+          <a:lstStyle/>
+          <a:p>
+            <a:pPr indent="0" marL="0">
+              <a:buNone/>
+            </a:pPr>
+            <a:r>
+              <a:rPr lang="en-US" sz="1000" dirty="0">
+                <a:solidFill>
+                  <a:srgbClr val="D3DCEF"/>
+                </a:solidFill>
+                <a:latin typeface="Segoe UI Semilight" pitchFamily="34" charset="0"/>
+                <a:ea typeface="Segoe UI Semilight" pitchFamily="34" charset="-122"/>
+                <a:cs typeface="Segoe UI Semilight" pitchFamily="34" charset="-120"/>
+              </a:rPr>
+              <a:t>Operate</a:t>
+            </a:r>
+            <a:endParaRPr lang="en-US" sz="1000" dirty="0"/>
+          </a:p>
+        </p:txBody>
+      </p:sp>
+      <p:pic>
+        <p:nvPicPr>
+          <p:cNvPr id="15" name="Image 7" descr="/home/user/barberbook/docs/deck/assets/tile_a.png">    </p:cNvPr>
+          <p:cNvPicPr>
+            <a:picLocks noChangeAspect="1"/>
+          </p:cNvPicPr>
+          <p:nvPr/>
+        </p:nvPicPr>
+        <p:blipFill>
+          <a:blip r:embed="rId8"/>
+          <a:stretch>
+            <a:fillRect/>
+          </a:stretch>
+        </p:blipFill>
+        <p:spPr>
+          <a:xfrm>
             <a:off x="5306060" y="3810000"/>
             <a:ext cx="431800" cy="431800"/>
           </a:xfrm>
@@ -25832,9 +26358,33 @@
           </a:prstGeom>
         </p:spPr>
       </p:pic>
-      <p:sp>
-        <p:nvSpPr>
-          <p:cNvPr id="13" name="Text 6"/>
+      <p:pic>
+        <p:nvPicPr>
+          <p:cNvPr id="16" name="Image 8" descr="/home/user/barberbook/docs/deck/assets/tile_b.png">    </p:cNvPr>
+          <p:cNvPicPr>
+            <a:picLocks noChangeAspect="1"/>
+          </p:cNvPicPr>
+          <p:nvPr/>
+        </p:nvPicPr>
+        <p:blipFill>
+          <a:blip r:embed="rId9"/>
+          <a:stretch>
+            <a:fillRect/>
+          </a:stretch>
+        </p:blipFill>
+        <p:spPr>
+          <a:xfrm>
+            <a:off x="5410200" y="3914140"/>
+            <a:ext cx="224790" cy="224790"/>
+          </a:xfrm>
+          <a:prstGeom prst="rect">
+            <a:avLst/>
+          </a:prstGeom>
+        </p:spPr>
+      </p:pic>
+      <p:sp>
+        <p:nvSpPr>
+          <p:cNvPr id="17" name="Text 6"/>
           <p:cNvSpPr txBox="1"/>
           <p:nvPr/>
         </p:nvSpPr>
@@ -25873,7 +26423,7 @@
       </p:sp>
       <p:sp>
         <p:nvSpPr>
-          <p:cNvPr id="14" name="Text 7"/>
+          <p:cNvPr id="18" name="Text 7"/>
           <p:cNvSpPr txBox="1"/>
           <p:nvPr/>
         </p:nvSpPr>
@@ -25940,7 +26490,7 @@
       </p:sp>
       <p:sp>
         <p:nvSpPr>
-          <p:cNvPr id="15" name="Text 8"/>
+          <p:cNvPr id="19" name="Text 8"/>
           <p:cNvSpPr txBox="1"/>
           <p:nvPr/>
         </p:nvSpPr>

--- a/docs/deck/BOX_Solutions_Revised.pptx
+++ b/docs/deck/BOX_Solutions_Revised.pptx
@@ -2984,7 +2984,7 @@
                 <a:ea typeface="Segoe UI" pitchFamily="34" charset="-122"/>
                 <a:cs typeface="Segoe UI" pitchFamily="34" charset="-120"/>
               </a:rPr>
-              <a:t>Four jobs an ISV’s AWS</a:t>
+              <a:t>An AWS listing is not</a:t>
             </a:r>
             <a:endParaRPr lang="en-US" sz="4400" dirty="0"/>
           </a:p>
@@ -3004,7 +3004,7 @@
                 <a:ea typeface="Segoe UI" pitchFamily="34" charset="-122"/>
                 <a:cs typeface="Segoe UI" pitchFamily="34" charset="-120"/>
               </a:rPr>
-              <a:t>business needs staffed.</a:t>
+              <a:t>an AWS business.</a:t>
             </a:r>
             <a:endParaRPr lang="en-US" sz="4400" dirty="0"/>
           </a:p>
@@ -3043,7 +3043,7 @@
                 <a:ea typeface="Segoe UI Semilight" pitchFamily="34" charset="-122"/>
                 <a:cs typeface="Segoe UI Semilight" pitchFamily="34" charset="-120"/>
               </a:rPr>
-              <a:t>One fixed-fee project and three twelve-month retainers. This is the internal side-by-side view,</a:t>
+              <a:t>Four jobs stand between the two. One fixed-fee project and three twelve-month retainers —</a:t>
             </a:r>
             <a:endParaRPr lang="en-US" sz="1500" dirty="0"/>
           </a:p>
@@ -3060,7 +3060,7 @@
                 <a:ea typeface="Segoe UI Semilight" pitchFamily="34" charset="-122"/>
                 <a:cs typeface="Segoe UI Semilight" pitchFamily="34" charset="-120"/>
               </a:rPr>
-              <a:t>for OBP and Automatum.</a:t>
+              <a:t>the internal side-by-side view, for OBP and Automatum.</a:t>
             </a:r>
             <a:endParaRPr lang="en-US" sz="1500" dirty="0"/>
           </a:p>
@@ -10259,7 +10259,7 @@
                 <a:ea typeface="Segoe UI" pitchFamily="34" charset="-122"/>
                 <a:cs typeface="Segoe UI" pitchFamily="34" charset="-120"/>
               </a:rPr>
-              <a:t>How every number is settled.</a:t>
+              <a:t>No number without a source.</a:t>
             </a:r>
             <a:endParaRPr lang="en-US" sz="2500" dirty="0"/>
           </a:p>
@@ -14368,7 +14368,7 @@
                 <a:ea typeface="Segoe UI" pitchFamily="34" charset="-122"/>
                 <a:cs typeface="Segoe UI" pitchFamily="34" charset="-120"/>
               </a:rPr>
-              <a:t>The terms to agree between us.</a:t>
+              <a:t>What we owe each other.</a:t>
             </a:r>
             <a:endParaRPr lang="en-US" sz="2500" dirty="0"/>
           </a:p>
@@ -17848,7 +17848,7 @@
                 <a:ea typeface="Segoe UI" pitchFamily="34" charset="-122"/>
                 <a:cs typeface="Segoe UI" pitchFamily="34" charset="-120"/>
               </a:rPr>
-              <a:t>Two waves, along the value chain.</a:t>
+              <a:t>Evidence first, then scale.</a:t>
             </a:r>
             <a:endParaRPr lang="en-US" sz="2500" dirty="0"/>
           </a:p>
@@ -17887,7 +17887,7 @@
                 <a:ea typeface="Segoe UI Semilight" pitchFamily="34" charset="-122"/>
                 <a:cs typeface="Segoe UI Semilight" pitchFamily="34" charset="-120"/>
               </a:rPr>
-              <a:t>Sequence, rather than four at once. The split is p10’s chain down the middle, and it pairs each retainer with the work that precedes it.</a:t>
+              <a:t>Sequence, rather than four at once. The split is the value chain down the middle, and it pairs each retainer with the work that precedes it.</a:t>
             </a:r>
             <a:endParaRPr lang="en-US" sz="1250" dirty="0"/>
           </a:p>
@@ -18753,7 +18753,7 @@
                 <a:ea typeface="Segoe UI" pitchFamily="34" charset="-122"/>
                 <a:cs typeface="Segoe UI" pitchFamily="34" charset="-120"/>
               </a:rPr>
-              <a:t>What we are asking today.</a:t>
+              <a:t>Five decisions, today.</a:t>
             </a:r>
             <a:endParaRPr lang="en-US" sz="2500" dirty="0"/>
           </a:p>
@@ -18792,7 +18792,7 @@
                 <a:ea typeface="Segoe UI Semilight" pitchFamily="34" charset="-122"/>
                 <a:cs typeface="Segoe UI Semilight" pitchFamily="34" charset="-120"/>
               </a:rPr>
-              <a:t>Approve the sequence, confirm the lead partner of record, name the dates.</a:t>
+              <a:t>The sequence, the lead partner of record, the back-to-back turnarounds, the CPPO boundary, and wave one’s date.</a:t>
             </a:r>
             <a:endParaRPr lang="en-US" sz="1250" dirty="0"/>
           </a:p>
@@ -21406,7 +21406,7 @@
                 <a:ea typeface="Segoe UI Semilight" pitchFamily="34" charset="-122"/>
                 <a:cs typeface="Segoe UI Semilight" pitchFamily="34" charset="-120"/>
               </a:rPr>
-              <a:t>Four jobs an ISV’s AWS business needs staffed.</a:t>
+              <a:t>An AWS listing is not an AWS business. Four jobs stand between the two.</a:t>
             </a:r>
             <a:endParaRPr lang="en-US" sz="1300" dirty="0"/>
           </a:p>
@@ -21924,7 +21924,7 @@
                 <a:ea typeface="Segoe UI" pitchFamily="34" charset="-122"/>
                 <a:cs typeface="Segoe UI" pitchFamily="34" charset="-120"/>
               </a:rPr>
-              <a:t>Four jobs an ISV’s AWS business needs staffed.</a:t>
+              <a:t>Four places AWS revenue stalls.</a:t>
             </a:r>
             <a:endParaRPr lang="en-US" sz="2500" dirty="0"/>
           </a:p>
@@ -21963,7 +21963,7 @@
                 <a:ea typeface="Segoe UI Semilight" pitchFamily="34" charset="-122"/>
                 <a:cs typeface="Segoe UI Semilight" pitchFamily="34" charset="-120"/>
               </a:rPr>
-              <a:t>Getting the product listed, running the AWS partnership, operating the Marketplace, and building the reseller channel — covered between the four.</a:t>
+              <a:t>Getting listed, running the partnership, operating the Marketplace, building the channel. One operator for all four.</a:t>
             </a:r>
             <a:endParaRPr lang="en-US" sz="1250" dirty="0"/>
           </a:p>
@@ -22887,7 +22887,7 @@
                 <a:ea typeface="Segoe UI" pitchFamily="34" charset="-122"/>
                 <a:cs typeface="Segoe UI" pitchFamily="34" charset="-120"/>
               </a:rPr>
-              <a:t>Four buyers, four boundaries.</a:t>
+              <a:t>Four buyers. Four budgets. Four Solution IDs.</a:t>
             </a:r>
             <a:endParaRPr lang="en-US" sz="2500" dirty="0"/>
           </a:p>
@@ -22926,7 +22926,7 @@
                 <a:ea typeface="Segoe UI Semilight" pitchFamily="34" charset="-122"/>
                 <a:cs typeface="Segoe UI Semilight" pitchFamily="34" charset="-120"/>
               </a:rPr>
-              <a:t>Same ladder, different job, different buyer, different cost base, different Solution ID.</a:t>
+              <a:t>Same ladder — different job, different buyer, different cost base. AWS treats them as four.</a:t>
             </a:r>
             <a:endParaRPr lang="en-US" sz="1250" dirty="0"/>
           </a:p>
@@ -25096,7 +25096,7 @@
                 <a:ea typeface="Segoe UI" pitchFamily="34" charset="-122"/>
                 <a:cs typeface="Segoe UI" pitchFamily="34" charset="-120"/>
               </a:rPr>
-              <a:t>What a rung is.</a:t>
+              <a:t>What you can hold us to.</a:t>
             </a:r>
             <a:endParaRPr lang="en-US" sz="2500" dirty="0"/>
           </a:p>

--- a/docs/deck/BOX_Solutions_Revised.pptx
+++ b/docs/deck/BOX_Solutions_Revised.pptx
@@ -3524,7 +3524,7 @@
                 <a:ea typeface="Segoe UI Semilight" pitchFamily="34" charset="-122"/>
                 <a:cs typeface="Segoe UI Semilight" pitchFamily="34" charset="-120"/>
               </a:rPr>
-              <a:t>One pricing ladder — a convention, not a product.</a:t>
+              <a:t>Two pricing logics — seniority, and throughput.</a:t>
             </a:r>
             <a:endParaRPr lang="en-US" sz="950" dirty="0"/>
           </a:p>
@@ -3753,7 +3753,7 @@
                 <a:ea typeface="Segoe UI" pitchFamily="34" charset="-122"/>
                 <a:cs typeface="Segoe UI" pitchFamily="34" charset="-120"/>
               </a:rPr>
-              <a:t>Three retainers, one ladder.</a:t>
+              <a:t>Three retainers, two pricing logics.</a:t>
             </a:r>
             <a:endParaRPr lang="en-US" sz="2500" dirty="0"/>
           </a:p>
@@ -3792,7 +3792,7 @@
                 <a:ea typeface="Segoe UI Semilight" pitchFamily="34" charset="-122"/>
                 <a:cs typeface="Segoe UI Semilight" pitchFamily="34" charset="-120"/>
               </a:rPr>
-              <a:t>One ladder is a pricing convention, not a product. Every rung carries what we commit, what we target, an included band and an overflow rate.</a:t>
+              <a:t>Alliances and Partner Development price on seniority — the person on the account. Operations prices on throughput — the same rate per included offer at every rung.</a:t>
             </a:r>
             <a:endParaRPr lang="en-US" sz="1250" dirty="0"/>
           </a:p>
@@ -3912,24 +3912,24 @@
         </p:nvSpPr>
         <p:spPr>
           <a:xfrm>
-            <a:off x="4042410" y="2489200"/>
-            <a:ext cx="2413000" cy="228600"/>
-          </a:xfrm>
-          <a:prstGeom prst="rect">
-            <a:avLst/>
-          </a:prstGeom>
-          <a:noFill/>
-          <a:ln/>
-        </p:spPr>
-        <p:txBody>
-          <a:bodyPr wrap="square" lIns="0" tIns="0" rIns="0" bIns="0" rtlCol="0" anchor="t"/>
-          <a:lstStyle/>
-          <a:p>
-            <a:pPr indent="0" marL="0">
-              <a:buNone/>
-            </a:pPr>
-            <a:r>
-              <a:rPr lang="en-US" sz="1300" b="1" dirty="0">
+            <a:off x="4042410" y="2540000"/>
+            <a:ext cx="2413000" cy="177800"/>
+          </a:xfrm>
+          <a:prstGeom prst="rect">
+            <a:avLst/>
+          </a:prstGeom>
+          <a:noFill/>
+          <a:ln/>
+        </p:spPr>
+        <p:txBody>
+          <a:bodyPr wrap="square" lIns="0" tIns="0" rIns="0" bIns="0" rtlCol="0" anchor="t"/>
+          <a:lstStyle/>
+          <a:p>
+            <a:pPr indent="0" marL="0">
+              <a:buNone/>
+            </a:pPr>
+            <a:r>
+              <a:rPr lang="en-US" sz="850" b="1" spc="110" kern="0" dirty="0">
                 <a:solidFill>
                   <a:srgbClr val="F36F20"/>
                 </a:solidFill>
@@ -3937,9 +3937,9 @@
                 <a:ea typeface="Segoe UI" pitchFamily="34" charset="-122"/>
                 <a:cs typeface="Segoe UI" pitchFamily="34" charset="-120"/>
               </a:rPr>
-              <a:t>$2,500 / month</a:t>
-            </a:r>
-            <a:endParaRPr lang="en-US" sz="1300" dirty="0"/>
+              <a:t>ENTRY RUNG</a:t>
+            </a:r>
+            <a:endParaRPr lang="en-US" sz="850" dirty="0"/>
           </a:p>
         </p:txBody>
       </p:sp>
@@ -3951,24 +3951,24 @@
         </p:nvSpPr>
         <p:spPr>
           <a:xfrm>
-            <a:off x="6630670" y="2489200"/>
-            <a:ext cx="2413000" cy="228600"/>
-          </a:xfrm>
-          <a:prstGeom prst="rect">
-            <a:avLst/>
-          </a:prstGeom>
-          <a:noFill/>
-          <a:ln/>
-        </p:spPr>
-        <p:txBody>
-          <a:bodyPr wrap="square" lIns="0" tIns="0" rIns="0" bIns="0" rtlCol="0" anchor="t"/>
-          <a:lstStyle/>
-          <a:p>
-            <a:pPr indent="0" marL="0">
-              <a:buNone/>
-            </a:pPr>
-            <a:r>
-              <a:rPr lang="en-US" sz="1300" b="1" dirty="0">
+            <a:off x="6630670" y="2540000"/>
+            <a:ext cx="2413000" cy="177800"/>
+          </a:xfrm>
+          <a:prstGeom prst="rect">
+            <a:avLst/>
+          </a:prstGeom>
+          <a:noFill/>
+          <a:ln/>
+        </p:spPr>
+        <p:txBody>
+          <a:bodyPr wrap="square" lIns="0" tIns="0" rIns="0" bIns="0" rtlCol="0" anchor="t"/>
+          <a:lstStyle/>
+          <a:p>
+            <a:pPr indent="0" marL="0">
+              <a:buNone/>
+            </a:pPr>
+            <a:r>
+              <a:rPr lang="en-US" sz="850" b="1" spc="110" kern="0" dirty="0">
                 <a:solidFill>
                   <a:srgbClr val="F36F20"/>
                 </a:solidFill>
@@ -3976,9 +3976,9 @@
                 <a:ea typeface="Segoe UI" pitchFamily="34" charset="-122"/>
                 <a:cs typeface="Segoe UI" pitchFamily="34" charset="-120"/>
               </a:rPr>
-              <a:t>$5,000 / month</a:t>
-            </a:r>
-            <a:endParaRPr lang="en-US" sz="1300" dirty="0"/>
+              <a:t>MIDDLE RUNG</a:t>
+            </a:r>
+            <a:endParaRPr lang="en-US" sz="850" dirty="0"/>
           </a:p>
         </p:txBody>
       </p:sp>
@@ -3990,24 +3990,24 @@
         </p:nvSpPr>
         <p:spPr>
           <a:xfrm>
-            <a:off x="9218930" y="2489200"/>
-            <a:ext cx="2413000" cy="228600"/>
-          </a:xfrm>
-          <a:prstGeom prst="rect">
-            <a:avLst/>
-          </a:prstGeom>
-          <a:noFill/>
-          <a:ln/>
-        </p:spPr>
-        <p:txBody>
-          <a:bodyPr wrap="square" lIns="0" tIns="0" rIns="0" bIns="0" rtlCol="0" anchor="t"/>
-          <a:lstStyle/>
-          <a:p>
-            <a:pPr indent="0" marL="0">
-              <a:buNone/>
-            </a:pPr>
-            <a:r>
-              <a:rPr lang="en-US" sz="1300" b="1" dirty="0">
+            <a:off x="9218930" y="2540000"/>
+            <a:ext cx="2413000" cy="177800"/>
+          </a:xfrm>
+          <a:prstGeom prst="rect">
+            <a:avLst/>
+          </a:prstGeom>
+          <a:noFill/>
+          <a:ln/>
+        </p:spPr>
+        <p:txBody>
+          <a:bodyPr wrap="square" lIns="0" tIns="0" rIns="0" bIns="0" rtlCol="0" anchor="t"/>
+          <a:lstStyle/>
+          <a:p>
+            <a:pPr indent="0" marL="0">
+              <a:buNone/>
+            </a:pPr>
+            <a:r>
+              <a:rPr lang="en-US" sz="850" b="1" spc="110" kern="0" dirty="0">
                 <a:solidFill>
                   <a:srgbClr val="F36F20"/>
                 </a:solidFill>
@@ -4015,9 +4015,9 @@
                 <a:ea typeface="Segoe UI" pitchFamily="34" charset="-122"/>
                 <a:cs typeface="Segoe UI" pitchFamily="34" charset="-120"/>
               </a:rPr>
-              <a:t>$7,500 / month</a:t>
-            </a:r>
-            <a:endParaRPr lang="en-US" sz="1300" dirty="0"/>
+              <a:t>TOP RUNG</a:t>
+            </a:r>
+            <a:endParaRPr lang="en-US" sz="850" dirty="0"/>
           </a:p>
         </p:txBody>
       </p:sp>
@@ -4029,7 +4029,7 @@
         </p:nvSpPr>
         <p:spPr>
           <a:xfrm>
-            <a:off x="749300" y="2946400"/>
+            <a:off x="749300" y="2895600"/>
             <a:ext cx="3175000" cy="228600"/>
           </a:xfrm>
           <a:prstGeom prst="rect">
@@ -4068,7 +4068,7 @@
         </p:nvSpPr>
         <p:spPr>
           <a:xfrm>
-            <a:off x="749300" y="3213100"/>
+            <a:off x="749300" y="3162300"/>
             <a:ext cx="3175000" cy="330200"/>
           </a:xfrm>
           <a:prstGeom prst="rect">
@@ -4093,7 +4093,7 @@
                 <a:ea typeface="Segoe UI Semilight" pitchFamily="34" charset="-122"/>
                 <a:cs typeface="Segoe UI Semilight" pitchFamily="34" charset="-120"/>
               </a:rPr>
-              <a:t>[CEO or CRO] · no component named</a:t>
+              <a:t>[CEO or CRO] · priced on seniority</a:t>
             </a:r>
             <a:endParaRPr lang="en-US" sz="800" dirty="0"/>
           </a:p>
@@ -4107,24 +4107,63 @@
         </p:nvSpPr>
         <p:spPr>
           <a:xfrm>
-            <a:off x="4042410" y="2946400"/>
-            <a:ext cx="2413000" cy="203200"/>
-          </a:xfrm>
-          <a:prstGeom prst="rect">
-            <a:avLst/>
-          </a:prstGeom>
-          <a:noFill/>
-          <a:ln/>
-        </p:spPr>
-        <p:txBody>
-          <a:bodyPr wrap="square" lIns="0" tIns="0" rIns="0" bIns="0" rtlCol="0" anchor="t"/>
-          <a:lstStyle/>
-          <a:p>
-            <a:pPr indent="0" marL="0">
-              <a:buNone/>
-            </a:pPr>
-            <a:r>
-              <a:rPr lang="en-US" sz="1100" b="1" dirty="0">
+            <a:off x="4042410" y="2895600"/>
+            <a:ext cx="2413000" cy="190500"/>
+          </a:xfrm>
+          <a:prstGeom prst="rect">
+            <a:avLst/>
+          </a:prstGeom>
+          <a:noFill/>
+          <a:ln/>
+        </p:spPr>
+        <p:txBody>
+          <a:bodyPr wrap="square" lIns="0" tIns="0" rIns="0" bIns="0" rtlCol="0" anchor="t"/>
+          <a:lstStyle/>
+          <a:p>
+            <a:pPr indent="0" marL="0">
+              <a:buNone/>
+            </a:pPr>
+            <a:r>
+              <a:rPr lang="en-US" sz="1150" b="1" dirty="0">
+                <a:solidFill>
+                  <a:srgbClr val="15224B"/>
+                </a:solidFill>
+                <a:latin typeface="Segoe UI" pitchFamily="34" charset="0"/>
+                <a:ea typeface="Segoe UI" pitchFamily="34" charset="-122"/>
+                <a:cs typeface="Segoe UI" pitchFamily="34" charset="-120"/>
+              </a:rPr>
+              <a:t>$2,500 / mo</a:t>
+            </a:r>
+            <a:endParaRPr lang="en-US" sz="1150" dirty="0"/>
+          </a:p>
+        </p:txBody>
+      </p:sp>
+      <p:sp>
+        <p:nvSpPr>
+          <p:cNvPr id="15" name="Text 11"/>
+          <p:cNvSpPr txBox="1"/>
+          <p:nvPr/>
+        </p:nvSpPr>
+        <p:spPr>
+          <a:xfrm>
+            <a:off x="4042410" y="3098800"/>
+            <a:ext cx="2413000" cy="177800"/>
+          </a:xfrm>
+          <a:prstGeom prst="rect">
+            <a:avLst/>
+          </a:prstGeom>
+          <a:noFill/>
+          <a:ln/>
+        </p:spPr>
+        <p:txBody>
+          <a:bodyPr wrap="square" lIns="0" tIns="0" rIns="0" bIns="0" rtlCol="0" anchor="t"/>
+          <a:lstStyle/>
+          <a:p>
+            <a:pPr indent="0" marL="0">
+              <a:buNone/>
+            </a:pPr>
+            <a:r>
+              <a:rPr lang="en-US" sz="1000" b="1" dirty="0">
                 <a:solidFill>
                   <a:srgbClr val="2E7CC4"/>
                 </a:solidFill>
@@ -4134,20 +4173,20 @@
               </a:rPr>
               <a:t>Essentials</a:t>
             </a:r>
-            <a:endParaRPr lang="en-US" sz="1100" dirty="0"/>
-          </a:p>
-        </p:txBody>
-      </p:sp>
-      <p:sp>
-        <p:nvSpPr>
-          <p:cNvPr id="15" name="Text 11"/>
-          <p:cNvSpPr txBox="1"/>
-          <p:nvPr/>
-        </p:nvSpPr>
-        <p:spPr>
-          <a:xfrm>
-            <a:off x="4042410" y="3162300"/>
-            <a:ext cx="2413000" cy="355600"/>
+            <a:endParaRPr lang="en-US" sz="1000" dirty="0"/>
+          </a:p>
+        </p:txBody>
+      </p:sp>
+      <p:sp>
+        <p:nvSpPr>
+          <p:cNvPr id="16" name="Text 12"/>
+          <p:cNvSpPr txBox="1"/>
+          <p:nvPr/>
+        </p:nvSpPr>
+        <p:spPr>
+          <a:xfrm>
+            <a:off x="4042410" y="3289300"/>
+            <a:ext cx="2413000" cy="330200"/>
           </a:xfrm>
           <a:prstGeom prst="rect">
             <a:avLst/>
@@ -4179,30 +4218,69 @@
       </p:sp>
       <p:sp>
         <p:nvSpPr>
-          <p:cNvPr id="16" name="Text 12"/>
-          <p:cNvSpPr txBox="1"/>
-          <p:nvPr/>
-        </p:nvSpPr>
-        <p:spPr>
-          <a:xfrm>
-            <a:off x="6630670" y="2946400"/>
-            <a:ext cx="2413000" cy="203200"/>
-          </a:xfrm>
-          <a:prstGeom prst="rect">
-            <a:avLst/>
-          </a:prstGeom>
-          <a:noFill/>
-          <a:ln/>
-        </p:spPr>
-        <p:txBody>
-          <a:bodyPr wrap="square" lIns="0" tIns="0" rIns="0" bIns="0" rtlCol="0" anchor="t"/>
-          <a:lstStyle/>
-          <a:p>
-            <a:pPr indent="0" marL="0">
-              <a:buNone/>
-            </a:pPr>
-            <a:r>
-              <a:rPr lang="en-US" sz="1100" b="1" dirty="0">
+          <p:cNvPr id="17" name="Text 13"/>
+          <p:cNvSpPr txBox="1"/>
+          <p:nvPr/>
+        </p:nvSpPr>
+        <p:spPr>
+          <a:xfrm>
+            <a:off x="6630670" y="2895600"/>
+            <a:ext cx="2413000" cy="190500"/>
+          </a:xfrm>
+          <a:prstGeom prst="rect">
+            <a:avLst/>
+          </a:prstGeom>
+          <a:noFill/>
+          <a:ln/>
+        </p:spPr>
+        <p:txBody>
+          <a:bodyPr wrap="square" lIns="0" tIns="0" rIns="0" bIns="0" rtlCol="0" anchor="t"/>
+          <a:lstStyle/>
+          <a:p>
+            <a:pPr indent="0" marL="0">
+              <a:buNone/>
+            </a:pPr>
+            <a:r>
+              <a:rPr lang="en-US" sz="1150" b="1" dirty="0">
+                <a:solidFill>
+                  <a:srgbClr val="15224B"/>
+                </a:solidFill>
+                <a:latin typeface="Segoe UI" pitchFamily="34" charset="0"/>
+                <a:ea typeface="Segoe UI" pitchFamily="34" charset="-122"/>
+                <a:cs typeface="Segoe UI" pitchFamily="34" charset="-120"/>
+              </a:rPr>
+              <a:t>$5,000 / mo</a:t>
+            </a:r>
+            <a:endParaRPr lang="en-US" sz="1150" dirty="0"/>
+          </a:p>
+        </p:txBody>
+      </p:sp>
+      <p:sp>
+        <p:nvSpPr>
+          <p:cNvPr id="18" name="Text 14"/>
+          <p:cNvSpPr txBox="1"/>
+          <p:nvPr/>
+        </p:nvSpPr>
+        <p:spPr>
+          <a:xfrm>
+            <a:off x="6630670" y="3098800"/>
+            <a:ext cx="2413000" cy="177800"/>
+          </a:xfrm>
+          <a:prstGeom prst="rect">
+            <a:avLst/>
+          </a:prstGeom>
+          <a:noFill/>
+          <a:ln/>
+        </p:spPr>
+        <p:txBody>
+          <a:bodyPr wrap="square" lIns="0" tIns="0" rIns="0" bIns="0" rtlCol="0" anchor="t"/>
+          <a:lstStyle/>
+          <a:p>
+            <a:pPr indent="0" marL="0">
+              <a:buNone/>
+            </a:pPr>
+            <a:r>
+              <a:rPr lang="en-US" sz="1000" b="1" dirty="0">
                 <a:solidFill>
                   <a:srgbClr val="2E7CC4"/>
                 </a:solidFill>
@@ -4212,20 +4290,20 @@
               </a:rPr>
               <a:t>Growth</a:t>
             </a:r>
-            <a:endParaRPr lang="en-US" sz="1100" dirty="0"/>
-          </a:p>
-        </p:txBody>
-      </p:sp>
-      <p:sp>
-        <p:nvSpPr>
-          <p:cNvPr id="17" name="Text 13"/>
-          <p:cNvSpPr txBox="1"/>
-          <p:nvPr/>
-        </p:nvSpPr>
-        <p:spPr>
-          <a:xfrm>
-            <a:off x="6630670" y="3162300"/>
-            <a:ext cx="2413000" cy="355600"/>
+            <a:endParaRPr lang="en-US" sz="1000" dirty="0"/>
+          </a:p>
+        </p:txBody>
+      </p:sp>
+      <p:sp>
+        <p:nvSpPr>
+          <p:cNvPr id="19" name="Text 15"/>
+          <p:cNvSpPr txBox="1"/>
+          <p:nvPr/>
+        </p:nvSpPr>
+        <p:spPr>
+          <a:xfrm>
+            <a:off x="6630670" y="3289300"/>
+            <a:ext cx="2413000" cy="330200"/>
           </a:xfrm>
           <a:prstGeom prst="rect">
             <a:avLst/>
@@ -4257,30 +4335,69 @@
       </p:sp>
       <p:sp>
         <p:nvSpPr>
-          <p:cNvPr id="18" name="Text 14"/>
-          <p:cNvSpPr txBox="1"/>
-          <p:nvPr/>
-        </p:nvSpPr>
-        <p:spPr>
-          <a:xfrm>
-            <a:off x="9218930" y="2946400"/>
-            <a:ext cx="2413000" cy="203200"/>
-          </a:xfrm>
-          <a:prstGeom prst="rect">
-            <a:avLst/>
-          </a:prstGeom>
-          <a:noFill/>
-          <a:ln/>
-        </p:spPr>
-        <p:txBody>
-          <a:bodyPr wrap="square" lIns="0" tIns="0" rIns="0" bIns="0" rtlCol="0" anchor="t"/>
-          <a:lstStyle/>
-          <a:p>
-            <a:pPr indent="0" marL="0">
-              <a:buNone/>
-            </a:pPr>
-            <a:r>
-              <a:rPr lang="en-US" sz="1100" b="1" dirty="0">
+          <p:cNvPr id="20" name="Text 16"/>
+          <p:cNvSpPr txBox="1"/>
+          <p:nvPr/>
+        </p:nvSpPr>
+        <p:spPr>
+          <a:xfrm>
+            <a:off x="9218930" y="2895600"/>
+            <a:ext cx="2413000" cy="190500"/>
+          </a:xfrm>
+          <a:prstGeom prst="rect">
+            <a:avLst/>
+          </a:prstGeom>
+          <a:noFill/>
+          <a:ln/>
+        </p:spPr>
+        <p:txBody>
+          <a:bodyPr wrap="square" lIns="0" tIns="0" rIns="0" bIns="0" rtlCol="0" anchor="t"/>
+          <a:lstStyle/>
+          <a:p>
+            <a:pPr indent="0" marL="0">
+              <a:buNone/>
+            </a:pPr>
+            <a:r>
+              <a:rPr lang="en-US" sz="1150" b="1" dirty="0">
+                <a:solidFill>
+                  <a:srgbClr val="15224B"/>
+                </a:solidFill>
+                <a:latin typeface="Segoe UI" pitchFamily="34" charset="0"/>
+                <a:ea typeface="Segoe UI" pitchFamily="34" charset="-122"/>
+                <a:cs typeface="Segoe UI" pitchFamily="34" charset="-120"/>
+              </a:rPr>
+              <a:t>$7,500 / mo</a:t>
+            </a:r>
+            <a:endParaRPr lang="en-US" sz="1150" dirty="0"/>
+          </a:p>
+        </p:txBody>
+      </p:sp>
+      <p:sp>
+        <p:nvSpPr>
+          <p:cNvPr id="21" name="Text 17"/>
+          <p:cNvSpPr txBox="1"/>
+          <p:nvPr/>
+        </p:nvSpPr>
+        <p:spPr>
+          <a:xfrm>
+            <a:off x="9218930" y="3098800"/>
+            <a:ext cx="2413000" cy="177800"/>
+          </a:xfrm>
+          <a:prstGeom prst="rect">
+            <a:avLst/>
+          </a:prstGeom>
+          <a:noFill/>
+          <a:ln/>
+        </p:spPr>
+        <p:txBody>
+          <a:bodyPr wrap="square" lIns="0" tIns="0" rIns="0" bIns="0" rtlCol="0" anchor="t"/>
+          <a:lstStyle/>
+          <a:p>
+            <a:pPr indent="0" marL="0">
+              <a:buNone/>
+            </a:pPr>
+            <a:r>
+              <a:rPr lang="en-US" sz="1000" b="1" dirty="0">
                 <a:solidFill>
                   <a:srgbClr val="2E7CC4"/>
                 </a:solidFill>
@@ -4290,20 +4407,20 @@
               </a:rPr>
               <a:t>Professional</a:t>
             </a:r>
-            <a:endParaRPr lang="en-US" sz="1100" dirty="0"/>
-          </a:p>
-        </p:txBody>
-      </p:sp>
-      <p:sp>
-        <p:nvSpPr>
-          <p:cNvPr id="19" name="Text 15"/>
-          <p:cNvSpPr txBox="1"/>
-          <p:nvPr/>
-        </p:nvSpPr>
-        <p:spPr>
-          <a:xfrm>
-            <a:off x="9218930" y="3162300"/>
-            <a:ext cx="2413000" cy="355600"/>
+            <a:endParaRPr lang="en-US" sz="1000" dirty="0"/>
+          </a:p>
+        </p:txBody>
+      </p:sp>
+      <p:sp>
+        <p:nvSpPr>
+          <p:cNvPr id="22" name="Text 18"/>
+          <p:cNvSpPr txBox="1"/>
+          <p:nvPr/>
+        </p:nvSpPr>
+        <p:spPr>
+          <a:xfrm>
+            <a:off x="9218930" y="3289300"/>
+            <a:ext cx="2413000" cy="330200"/>
           </a:xfrm>
           <a:prstGeom prst="rect">
             <a:avLst/>
@@ -4335,13 +4452,13 @@
       </p:sp>
       <p:sp>
         <p:nvSpPr>
-          <p:cNvPr id="20" name="Text 16"/>
-          <p:cNvSpPr txBox="1"/>
-          <p:nvPr/>
-        </p:nvSpPr>
-        <p:spPr>
-          <a:xfrm>
-            <a:off x="749300" y="3886200"/>
+          <p:cNvPr id="23" name="Text 19"/>
+          <p:cNvSpPr txBox="1"/>
+          <p:nvPr/>
+        </p:nvSpPr>
+        <p:spPr>
+          <a:xfrm>
+            <a:off x="749300" y="3860800"/>
             <a:ext cx="3175000" cy="228600"/>
           </a:xfrm>
           <a:prstGeom prst="rect">
@@ -4374,13 +4491,13 @@
       </p:sp>
       <p:sp>
         <p:nvSpPr>
-          <p:cNvPr id="21" name="Text 17"/>
-          <p:cNvSpPr txBox="1"/>
-          <p:nvPr/>
-        </p:nvSpPr>
-        <p:spPr>
-          <a:xfrm>
-            <a:off x="749300" y="4152900"/>
+          <p:cNvPr id="24" name="Text 20"/>
+          <p:cNvSpPr txBox="1"/>
+          <p:nvPr/>
+        </p:nvSpPr>
+        <p:spPr>
+          <a:xfrm>
+            <a:off x="749300" y="4127500"/>
             <a:ext cx="3175000" cy="330200"/>
           </a:xfrm>
           <a:prstGeom prst="rect">
@@ -4405,7 +4522,7 @@
                 <a:ea typeface="Segoe UI Semilight" pitchFamily="34" charset="-122"/>
                 <a:cs typeface="Segoe UI Semilight" pitchFamily="34" charset="-120"/>
               </a:rPr>
-              <a:t>[RevOps / deal desk] · no component named</a:t>
+              <a:t>[RevOps / deal desk] · priced on throughput</a:t>
             </a:r>
             <a:endParaRPr lang="en-US" sz="800" dirty="0"/>
           </a:p>
@@ -4413,30 +4530,69 @@
       </p:sp>
       <p:sp>
         <p:nvSpPr>
-          <p:cNvPr id="22" name="Text 18"/>
-          <p:cNvSpPr txBox="1"/>
-          <p:nvPr/>
-        </p:nvSpPr>
-        <p:spPr>
-          <a:xfrm>
-            <a:off x="4042410" y="3886200"/>
-            <a:ext cx="2413000" cy="203200"/>
-          </a:xfrm>
-          <a:prstGeom prst="rect">
-            <a:avLst/>
-          </a:prstGeom>
-          <a:noFill/>
-          <a:ln/>
-        </p:spPr>
-        <p:txBody>
-          <a:bodyPr wrap="square" lIns="0" tIns="0" rIns="0" bIns="0" rtlCol="0" anchor="t"/>
-          <a:lstStyle/>
-          <a:p>
-            <a:pPr indent="0" marL="0">
-              <a:buNone/>
-            </a:pPr>
-            <a:r>
-              <a:rPr lang="en-US" sz="1100" b="1" dirty="0">
+          <p:cNvPr id="25" name="Text 21"/>
+          <p:cNvSpPr txBox="1"/>
+          <p:nvPr/>
+        </p:nvSpPr>
+        <p:spPr>
+          <a:xfrm>
+            <a:off x="4042410" y="3860800"/>
+            <a:ext cx="2413000" cy="190500"/>
+          </a:xfrm>
+          <a:prstGeom prst="rect">
+            <a:avLst/>
+          </a:prstGeom>
+          <a:noFill/>
+          <a:ln/>
+        </p:spPr>
+        <p:txBody>
+          <a:bodyPr wrap="square" lIns="0" tIns="0" rIns="0" bIns="0" rtlCol="0" anchor="t"/>
+          <a:lstStyle/>
+          <a:p>
+            <a:pPr indent="0" marL="0">
+              <a:buNone/>
+            </a:pPr>
+            <a:r>
+              <a:rPr lang="en-US" sz="1150" b="1" dirty="0">
+                <a:solidFill>
+                  <a:srgbClr val="15224B"/>
+                </a:solidFill>
+                <a:latin typeface="Segoe UI" pitchFamily="34" charset="0"/>
+                <a:ea typeface="Segoe UI" pitchFamily="34" charset="-122"/>
+                <a:cs typeface="Segoe UI" pitchFamily="34" charset="-120"/>
+              </a:rPr>
+              <a:t>$1,500 / mo</a:t>
+            </a:r>
+            <a:endParaRPr lang="en-US" sz="1150" dirty="0"/>
+          </a:p>
+        </p:txBody>
+      </p:sp>
+      <p:sp>
+        <p:nvSpPr>
+          <p:cNvPr id="26" name="Text 22"/>
+          <p:cNvSpPr txBox="1"/>
+          <p:nvPr/>
+        </p:nvSpPr>
+        <p:spPr>
+          <a:xfrm>
+            <a:off x="4042410" y="4064000"/>
+            <a:ext cx="2413000" cy="177800"/>
+          </a:xfrm>
+          <a:prstGeom prst="rect">
+            <a:avLst/>
+          </a:prstGeom>
+          <a:noFill/>
+          <a:ln/>
+        </p:spPr>
+        <p:txBody>
+          <a:bodyPr wrap="square" lIns="0" tIns="0" rIns="0" bIns="0" rtlCol="0" anchor="t"/>
+          <a:lstStyle/>
+          <a:p>
+            <a:pPr indent="0" marL="0">
+              <a:buNone/>
+            </a:pPr>
+            <a:r>
+              <a:rPr lang="en-US" sz="1000" b="1" dirty="0">
                 <a:solidFill>
                   <a:srgbClr val="2E7CC4"/>
                 </a:solidFill>
@@ -4446,20 +4602,20 @@
               </a:rPr>
               <a:t>Launch</a:t>
             </a:r>
-            <a:endParaRPr lang="en-US" sz="1100" dirty="0"/>
-          </a:p>
-        </p:txBody>
-      </p:sp>
-      <p:sp>
-        <p:nvSpPr>
-          <p:cNvPr id="23" name="Text 19"/>
-          <p:cNvSpPr txBox="1"/>
-          <p:nvPr/>
-        </p:nvSpPr>
-        <p:spPr>
-          <a:xfrm>
-            <a:off x="4042410" y="4102100"/>
-            <a:ext cx="2413000" cy="355600"/>
+            <a:endParaRPr lang="en-US" sz="1000" dirty="0"/>
+          </a:p>
+        </p:txBody>
+      </p:sp>
+      <p:sp>
+        <p:nvSpPr>
+          <p:cNvPr id="27" name="Text 23"/>
+          <p:cNvSpPr txBox="1"/>
+          <p:nvPr/>
+        </p:nvSpPr>
+        <p:spPr>
+          <a:xfrm>
+            <a:off x="4042410" y="4254500"/>
+            <a:ext cx="2413000" cy="330200"/>
           </a:xfrm>
           <a:prstGeom prst="rect">
             <a:avLst/>
@@ -4491,30 +4647,69 @@
       </p:sp>
       <p:sp>
         <p:nvSpPr>
-          <p:cNvPr id="24" name="Text 20"/>
-          <p:cNvSpPr txBox="1"/>
-          <p:nvPr/>
-        </p:nvSpPr>
-        <p:spPr>
-          <a:xfrm>
-            <a:off x="6630670" y="3886200"/>
-            <a:ext cx="2413000" cy="203200"/>
-          </a:xfrm>
-          <a:prstGeom prst="rect">
-            <a:avLst/>
-          </a:prstGeom>
-          <a:noFill/>
-          <a:ln/>
-        </p:spPr>
-        <p:txBody>
-          <a:bodyPr wrap="square" lIns="0" tIns="0" rIns="0" bIns="0" rtlCol="0" anchor="t"/>
-          <a:lstStyle/>
-          <a:p>
-            <a:pPr indent="0" marL="0">
-              <a:buNone/>
-            </a:pPr>
-            <a:r>
-              <a:rPr lang="en-US" sz="1100" b="1" dirty="0">
+          <p:cNvPr id="28" name="Text 24"/>
+          <p:cNvSpPr txBox="1"/>
+          <p:nvPr/>
+        </p:nvSpPr>
+        <p:spPr>
+          <a:xfrm>
+            <a:off x="6630670" y="3860800"/>
+            <a:ext cx="2413000" cy="190500"/>
+          </a:xfrm>
+          <a:prstGeom prst="rect">
+            <a:avLst/>
+          </a:prstGeom>
+          <a:noFill/>
+          <a:ln/>
+        </p:spPr>
+        <p:txBody>
+          <a:bodyPr wrap="square" lIns="0" tIns="0" rIns="0" bIns="0" rtlCol="0" anchor="t"/>
+          <a:lstStyle/>
+          <a:p>
+            <a:pPr indent="0" marL="0">
+              <a:buNone/>
+            </a:pPr>
+            <a:r>
+              <a:rPr lang="en-US" sz="1150" b="1" dirty="0">
+                <a:solidFill>
+                  <a:srgbClr val="15224B"/>
+                </a:solidFill>
+                <a:latin typeface="Segoe UI" pitchFamily="34" charset="0"/>
+                <a:ea typeface="Segoe UI" pitchFamily="34" charset="-122"/>
+                <a:cs typeface="Segoe UI" pitchFamily="34" charset="-120"/>
+              </a:rPr>
+              <a:t>$3,000 / mo</a:t>
+            </a:r>
+            <a:endParaRPr lang="en-US" sz="1150" dirty="0"/>
+          </a:p>
+        </p:txBody>
+      </p:sp>
+      <p:sp>
+        <p:nvSpPr>
+          <p:cNvPr id="29" name="Text 25"/>
+          <p:cNvSpPr txBox="1"/>
+          <p:nvPr/>
+        </p:nvSpPr>
+        <p:spPr>
+          <a:xfrm>
+            <a:off x="6630670" y="4064000"/>
+            <a:ext cx="2413000" cy="177800"/>
+          </a:xfrm>
+          <a:prstGeom prst="rect">
+            <a:avLst/>
+          </a:prstGeom>
+          <a:noFill/>
+          <a:ln/>
+        </p:spPr>
+        <p:txBody>
+          <a:bodyPr wrap="square" lIns="0" tIns="0" rIns="0" bIns="0" rtlCol="0" anchor="t"/>
+          <a:lstStyle/>
+          <a:p>
+            <a:pPr indent="0" marL="0">
+              <a:buNone/>
+            </a:pPr>
+            <a:r>
+              <a:rPr lang="en-US" sz="1000" b="1" dirty="0">
                 <a:solidFill>
                   <a:srgbClr val="2E7CC4"/>
                 </a:solidFill>
@@ -4524,20 +4719,20 @@
               </a:rPr>
               <a:t>Operate</a:t>
             </a:r>
-            <a:endParaRPr lang="en-US" sz="1100" dirty="0"/>
-          </a:p>
-        </p:txBody>
-      </p:sp>
-      <p:sp>
-        <p:nvSpPr>
-          <p:cNvPr id="25" name="Text 21"/>
-          <p:cNvSpPr txBox="1"/>
-          <p:nvPr/>
-        </p:nvSpPr>
-        <p:spPr>
-          <a:xfrm>
-            <a:off x="6630670" y="4102100"/>
-            <a:ext cx="2413000" cy="355600"/>
+            <a:endParaRPr lang="en-US" sz="1000" dirty="0"/>
+          </a:p>
+        </p:txBody>
+      </p:sp>
+      <p:sp>
+        <p:nvSpPr>
+          <p:cNvPr id="30" name="Text 26"/>
+          <p:cNvSpPr txBox="1"/>
+          <p:nvPr/>
+        </p:nvSpPr>
+        <p:spPr>
+          <a:xfrm>
+            <a:off x="6630670" y="4254500"/>
+            <a:ext cx="2413000" cy="330200"/>
           </a:xfrm>
           <a:prstGeom prst="rect">
             <a:avLst/>
@@ -4569,30 +4764,69 @@
       </p:sp>
       <p:sp>
         <p:nvSpPr>
-          <p:cNvPr id="26" name="Text 22"/>
-          <p:cNvSpPr txBox="1"/>
-          <p:nvPr/>
-        </p:nvSpPr>
-        <p:spPr>
-          <a:xfrm>
-            <a:off x="9218930" y="3886200"/>
-            <a:ext cx="2413000" cy="203200"/>
-          </a:xfrm>
-          <a:prstGeom prst="rect">
-            <a:avLst/>
-          </a:prstGeom>
-          <a:noFill/>
-          <a:ln/>
-        </p:spPr>
-        <p:txBody>
-          <a:bodyPr wrap="square" lIns="0" tIns="0" rIns="0" bIns="0" rtlCol="0" anchor="t"/>
-          <a:lstStyle/>
-          <a:p>
-            <a:pPr indent="0" marL="0">
-              <a:buNone/>
-            </a:pPr>
-            <a:r>
-              <a:rPr lang="en-US" sz="1100" b="1" dirty="0">
+          <p:cNvPr id="31" name="Text 27"/>
+          <p:cNvSpPr txBox="1"/>
+          <p:nvPr/>
+        </p:nvSpPr>
+        <p:spPr>
+          <a:xfrm>
+            <a:off x="9218930" y="3860800"/>
+            <a:ext cx="2413000" cy="190500"/>
+          </a:xfrm>
+          <a:prstGeom prst="rect">
+            <a:avLst/>
+          </a:prstGeom>
+          <a:noFill/>
+          <a:ln/>
+        </p:spPr>
+        <p:txBody>
+          <a:bodyPr wrap="square" lIns="0" tIns="0" rIns="0" bIns="0" rtlCol="0" anchor="t"/>
+          <a:lstStyle/>
+          <a:p>
+            <a:pPr indent="0" marL="0">
+              <a:buNone/>
+            </a:pPr>
+            <a:r>
+              <a:rPr lang="en-US" sz="1150" b="1" dirty="0">
+                <a:solidFill>
+                  <a:srgbClr val="15224B"/>
+                </a:solidFill>
+                <a:latin typeface="Segoe UI" pitchFamily="34" charset="0"/>
+                <a:ea typeface="Segoe UI" pitchFamily="34" charset="-122"/>
+                <a:cs typeface="Segoe UI" pitchFamily="34" charset="-120"/>
+              </a:rPr>
+              <a:t>$6,000 / mo</a:t>
+            </a:r>
+            <a:endParaRPr lang="en-US" sz="1150" dirty="0"/>
+          </a:p>
+        </p:txBody>
+      </p:sp>
+      <p:sp>
+        <p:nvSpPr>
+          <p:cNvPr id="32" name="Text 28"/>
+          <p:cNvSpPr txBox="1"/>
+          <p:nvPr/>
+        </p:nvSpPr>
+        <p:spPr>
+          <a:xfrm>
+            <a:off x="9218930" y="4064000"/>
+            <a:ext cx="2413000" cy="177800"/>
+          </a:xfrm>
+          <a:prstGeom prst="rect">
+            <a:avLst/>
+          </a:prstGeom>
+          <a:noFill/>
+          <a:ln/>
+        </p:spPr>
+        <p:txBody>
+          <a:bodyPr wrap="square" lIns="0" tIns="0" rIns="0" bIns="0" rtlCol="0" anchor="t"/>
+          <a:lstStyle/>
+          <a:p>
+            <a:pPr indent="0" marL="0">
+              <a:buNone/>
+            </a:pPr>
+            <a:r>
+              <a:rPr lang="en-US" sz="1000" b="1" dirty="0">
                 <a:solidFill>
                   <a:srgbClr val="2E7CC4"/>
                 </a:solidFill>
@@ -4602,20 +4836,20 @@
               </a:rPr>
               <a:t>Scale</a:t>
             </a:r>
-            <a:endParaRPr lang="en-US" sz="1100" dirty="0"/>
-          </a:p>
-        </p:txBody>
-      </p:sp>
-      <p:sp>
-        <p:nvSpPr>
-          <p:cNvPr id="27" name="Text 23"/>
-          <p:cNvSpPr txBox="1"/>
-          <p:nvPr/>
-        </p:nvSpPr>
-        <p:spPr>
-          <a:xfrm>
-            <a:off x="9218930" y="4102100"/>
-            <a:ext cx="2413000" cy="355600"/>
+            <a:endParaRPr lang="en-US" sz="1000" dirty="0"/>
+          </a:p>
+        </p:txBody>
+      </p:sp>
+      <p:sp>
+        <p:nvSpPr>
+          <p:cNvPr id="33" name="Text 29"/>
+          <p:cNvSpPr txBox="1"/>
+          <p:nvPr/>
+        </p:nvSpPr>
+        <p:spPr>
+          <a:xfrm>
+            <a:off x="9218930" y="4254500"/>
+            <a:ext cx="2413000" cy="330200"/>
           </a:xfrm>
           <a:prstGeom prst="rect">
             <a:avLst/>
@@ -4647,7 +4881,7 @@
       </p:sp>
       <p:sp>
         <p:nvSpPr>
-          <p:cNvPr id="28" name="Text 24"/>
+          <p:cNvPr id="34" name="Text 30"/>
           <p:cNvSpPr txBox="1"/>
           <p:nvPr/>
         </p:nvSpPr>
@@ -4686,7 +4920,7 @@
       </p:sp>
       <p:sp>
         <p:nvSpPr>
-          <p:cNvPr id="29" name="Text 25"/>
+          <p:cNvPr id="35" name="Text 31"/>
           <p:cNvSpPr txBox="1"/>
           <p:nvPr/>
         </p:nvSpPr>
@@ -4717,7 +4951,7 @@
                 <a:ea typeface="Segoe UI Semilight" pitchFamily="34" charset="-122"/>
                 <a:cs typeface="Segoe UI Semilight" pitchFamily="34" charset="-120"/>
               </a:rPr>
-              <a:t>[CRO / VP Channel] · Kiflo Core, inside the fee</a:t>
+              <a:t>[CRO / VP Channel] · priced on seniority</a:t>
             </a:r>
             <a:endParaRPr lang="en-US" sz="800" dirty="0"/>
           </a:p>
@@ -4725,30 +4959,69 @@
       </p:sp>
       <p:sp>
         <p:nvSpPr>
-          <p:cNvPr id="30" name="Text 26"/>
+          <p:cNvPr id="36" name="Text 32"/>
           <p:cNvSpPr txBox="1"/>
           <p:nvPr/>
         </p:nvSpPr>
         <p:spPr>
           <a:xfrm>
             <a:off x="4042410" y="4826000"/>
-            <a:ext cx="2413000" cy="203200"/>
-          </a:xfrm>
-          <a:prstGeom prst="rect">
-            <a:avLst/>
-          </a:prstGeom>
-          <a:noFill/>
-          <a:ln/>
-        </p:spPr>
-        <p:txBody>
-          <a:bodyPr wrap="square" lIns="0" tIns="0" rIns="0" bIns="0" rtlCol="0" anchor="t"/>
-          <a:lstStyle/>
-          <a:p>
-            <a:pPr indent="0" marL="0">
-              <a:buNone/>
-            </a:pPr>
-            <a:r>
-              <a:rPr lang="en-US" sz="1100" b="1" dirty="0">
+            <a:ext cx="2413000" cy="190500"/>
+          </a:xfrm>
+          <a:prstGeom prst="rect">
+            <a:avLst/>
+          </a:prstGeom>
+          <a:noFill/>
+          <a:ln/>
+        </p:spPr>
+        <p:txBody>
+          <a:bodyPr wrap="square" lIns="0" tIns="0" rIns="0" bIns="0" rtlCol="0" anchor="t"/>
+          <a:lstStyle/>
+          <a:p>
+            <a:pPr indent="0" marL="0">
+              <a:buNone/>
+            </a:pPr>
+            <a:r>
+              <a:rPr lang="en-US" sz="1150" b="1" dirty="0">
+                <a:solidFill>
+                  <a:srgbClr val="15224B"/>
+                </a:solidFill>
+                <a:latin typeface="Segoe UI" pitchFamily="34" charset="0"/>
+                <a:ea typeface="Segoe UI" pitchFamily="34" charset="-122"/>
+                <a:cs typeface="Segoe UI" pitchFamily="34" charset="-120"/>
+              </a:rPr>
+              <a:t>$2,500 / mo</a:t>
+            </a:r>
+            <a:endParaRPr lang="en-US" sz="1150" dirty="0"/>
+          </a:p>
+        </p:txBody>
+      </p:sp>
+      <p:sp>
+        <p:nvSpPr>
+          <p:cNvPr id="37" name="Text 33"/>
+          <p:cNvSpPr txBox="1"/>
+          <p:nvPr/>
+        </p:nvSpPr>
+        <p:spPr>
+          <a:xfrm>
+            <a:off x="4042410" y="5029200"/>
+            <a:ext cx="2413000" cy="177800"/>
+          </a:xfrm>
+          <a:prstGeom prst="rect">
+            <a:avLst/>
+          </a:prstGeom>
+          <a:noFill/>
+          <a:ln/>
+        </p:spPr>
+        <p:txBody>
+          <a:bodyPr wrap="square" lIns="0" tIns="0" rIns="0" bIns="0" rtlCol="0" anchor="t"/>
+          <a:lstStyle/>
+          <a:p>
+            <a:pPr indent="0" marL="0">
+              <a:buNone/>
+            </a:pPr>
+            <a:r>
+              <a:rPr lang="en-US" sz="1000" b="1" dirty="0">
                 <a:solidFill>
                   <a:srgbClr val="2E7CC4"/>
                 </a:solidFill>
@@ -4758,20 +5031,20 @@
               </a:rPr>
               <a:t>Establish</a:t>
             </a:r>
-            <a:endParaRPr lang="en-US" sz="1100" dirty="0"/>
-          </a:p>
-        </p:txBody>
-      </p:sp>
-      <p:sp>
-        <p:nvSpPr>
-          <p:cNvPr id="31" name="Text 27"/>
-          <p:cNvSpPr txBox="1"/>
-          <p:nvPr/>
-        </p:nvSpPr>
-        <p:spPr>
-          <a:xfrm>
-            <a:off x="4042410" y="5041900"/>
-            <a:ext cx="2413000" cy="355600"/>
+            <a:endParaRPr lang="en-US" sz="1000" dirty="0"/>
+          </a:p>
+        </p:txBody>
+      </p:sp>
+      <p:sp>
+        <p:nvSpPr>
+          <p:cNvPr id="38" name="Text 34"/>
+          <p:cNvSpPr txBox="1"/>
+          <p:nvPr/>
+        </p:nvSpPr>
+        <p:spPr>
+          <a:xfrm>
+            <a:off x="4042410" y="5219700"/>
+            <a:ext cx="2413000" cy="330200"/>
           </a:xfrm>
           <a:prstGeom prst="rect">
             <a:avLst/>
@@ -4803,30 +5076,69 @@
       </p:sp>
       <p:sp>
         <p:nvSpPr>
-          <p:cNvPr id="32" name="Text 28"/>
+          <p:cNvPr id="39" name="Text 35"/>
           <p:cNvSpPr txBox="1"/>
           <p:nvPr/>
         </p:nvSpPr>
         <p:spPr>
           <a:xfrm>
             <a:off x="6630670" y="4826000"/>
-            <a:ext cx="2413000" cy="203200"/>
-          </a:xfrm>
-          <a:prstGeom prst="rect">
-            <a:avLst/>
-          </a:prstGeom>
-          <a:noFill/>
-          <a:ln/>
-        </p:spPr>
-        <p:txBody>
-          <a:bodyPr wrap="square" lIns="0" tIns="0" rIns="0" bIns="0" rtlCol="0" anchor="t"/>
-          <a:lstStyle/>
-          <a:p>
-            <a:pPr indent="0" marL="0">
-              <a:buNone/>
-            </a:pPr>
-            <a:r>
-              <a:rPr lang="en-US" sz="1100" b="1" dirty="0">
+            <a:ext cx="2413000" cy="190500"/>
+          </a:xfrm>
+          <a:prstGeom prst="rect">
+            <a:avLst/>
+          </a:prstGeom>
+          <a:noFill/>
+          <a:ln/>
+        </p:spPr>
+        <p:txBody>
+          <a:bodyPr wrap="square" lIns="0" tIns="0" rIns="0" bIns="0" rtlCol="0" anchor="t"/>
+          <a:lstStyle/>
+          <a:p>
+            <a:pPr indent="0" marL="0">
+              <a:buNone/>
+            </a:pPr>
+            <a:r>
+              <a:rPr lang="en-US" sz="1150" b="1" dirty="0">
+                <a:solidFill>
+                  <a:srgbClr val="15224B"/>
+                </a:solidFill>
+                <a:latin typeface="Segoe UI" pitchFamily="34" charset="0"/>
+                <a:ea typeface="Segoe UI" pitchFamily="34" charset="-122"/>
+                <a:cs typeface="Segoe UI" pitchFamily="34" charset="-120"/>
+              </a:rPr>
+              <a:t>$5,000 / mo</a:t>
+            </a:r>
+            <a:endParaRPr lang="en-US" sz="1150" dirty="0"/>
+          </a:p>
+        </p:txBody>
+      </p:sp>
+      <p:sp>
+        <p:nvSpPr>
+          <p:cNvPr id="40" name="Text 36"/>
+          <p:cNvSpPr txBox="1"/>
+          <p:nvPr/>
+        </p:nvSpPr>
+        <p:spPr>
+          <a:xfrm>
+            <a:off x="6630670" y="5029200"/>
+            <a:ext cx="2413000" cy="177800"/>
+          </a:xfrm>
+          <a:prstGeom prst="rect">
+            <a:avLst/>
+          </a:prstGeom>
+          <a:noFill/>
+          <a:ln/>
+        </p:spPr>
+        <p:txBody>
+          <a:bodyPr wrap="square" lIns="0" tIns="0" rIns="0" bIns="0" rtlCol="0" anchor="t"/>
+          <a:lstStyle/>
+          <a:p>
+            <a:pPr indent="0" marL="0">
+              <a:buNone/>
+            </a:pPr>
+            <a:r>
+              <a:rPr lang="en-US" sz="1000" b="1" dirty="0">
                 <a:solidFill>
                   <a:srgbClr val="2E7CC4"/>
                 </a:solidFill>
@@ -4836,20 +5148,20 @@
               </a:rPr>
               <a:t>Expand</a:t>
             </a:r>
-            <a:endParaRPr lang="en-US" sz="1100" dirty="0"/>
-          </a:p>
-        </p:txBody>
-      </p:sp>
-      <p:sp>
-        <p:nvSpPr>
-          <p:cNvPr id="33" name="Text 29"/>
-          <p:cNvSpPr txBox="1"/>
-          <p:nvPr/>
-        </p:nvSpPr>
-        <p:spPr>
-          <a:xfrm>
-            <a:off x="6630670" y="5041900"/>
-            <a:ext cx="2413000" cy="355600"/>
+            <a:endParaRPr lang="en-US" sz="1000" dirty="0"/>
+          </a:p>
+        </p:txBody>
+      </p:sp>
+      <p:sp>
+        <p:nvSpPr>
+          <p:cNvPr id="41" name="Text 37"/>
+          <p:cNvSpPr txBox="1"/>
+          <p:nvPr/>
+        </p:nvSpPr>
+        <p:spPr>
+          <a:xfrm>
+            <a:off x="6630670" y="5219700"/>
+            <a:ext cx="2413000" cy="330200"/>
           </a:xfrm>
           <a:prstGeom prst="rect">
             <a:avLst/>
@@ -4881,30 +5193,69 @@
       </p:sp>
       <p:sp>
         <p:nvSpPr>
-          <p:cNvPr id="34" name="Text 30"/>
+          <p:cNvPr id="42" name="Text 38"/>
           <p:cNvSpPr txBox="1"/>
           <p:nvPr/>
         </p:nvSpPr>
         <p:spPr>
           <a:xfrm>
             <a:off x="9218930" y="4826000"/>
-            <a:ext cx="2413000" cy="203200"/>
-          </a:xfrm>
-          <a:prstGeom prst="rect">
-            <a:avLst/>
-          </a:prstGeom>
-          <a:noFill/>
-          <a:ln/>
-        </p:spPr>
-        <p:txBody>
-          <a:bodyPr wrap="square" lIns="0" tIns="0" rIns="0" bIns="0" rtlCol="0" anchor="t"/>
-          <a:lstStyle/>
-          <a:p>
-            <a:pPr indent="0" marL="0">
-              <a:buNone/>
-            </a:pPr>
-            <a:r>
-              <a:rPr lang="en-US" sz="1100" b="1" dirty="0">
+            <a:ext cx="2413000" cy="190500"/>
+          </a:xfrm>
+          <a:prstGeom prst="rect">
+            <a:avLst/>
+          </a:prstGeom>
+          <a:noFill/>
+          <a:ln/>
+        </p:spPr>
+        <p:txBody>
+          <a:bodyPr wrap="square" lIns="0" tIns="0" rIns="0" bIns="0" rtlCol="0" anchor="t"/>
+          <a:lstStyle/>
+          <a:p>
+            <a:pPr indent="0" marL="0">
+              <a:buNone/>
+            </a:pPr>
+            <a:r>
+              <a:rPr lang="en-US" sz="1150" b="1" dirty="0">
+                <a:solidFill>
+                  <a:srgbClr val="15224B"/>
+                </a:solidFill>
+                <a:latin typeface="Segoe UI" pitchFamily="34" charset="0"/>
+                <a:ea typeface="Segoe UI" pitchFamily="34" charset="-122"/>
+                <a:cs typeface="Segoe UI" pitchFamily="34" charset="-120"/>
+              </a:rPr>
+              <a:t>$7,500 / mo</a:t>
+            </a:r>
+            <a:endParaRPr lang="en-US" sz="1150" dirty="0"/>
+          </a:p>
+        </p:txBody>
+      </p:sp>
+      <p:sp>
+        <p:nvSpPr>
+          <p:cNvPr id="43" name="Text 39"/>
+          <p:cNvSpPr txBox="1"/>
+          <p:nvPr/>
+        </p:nvSpPr>
+        <p:spPr>
+          <a:xfrm>
+            <a:off x="9218930" y="5029200"/>
+            <a:ext cx="2413000" cy="177800"/>
+          </a:xfrm>
+          <a:prstGeom prst="rect">
+            <a:avLst/>
+          </a:prstGeom>
+          <a:noFill/>
+          <a:ln/>
+        </p:spPr>
+        <p:txBody>
+          <a:bodyPr wrap="square" lIns="0" tIns="0" rIns="0" bIns="0" rtlCol="0" anchor="t"/>
+          <a:lstStyle/>
+          <a:p>
+            <a:pPr indent="0" marL="0">
+              <a:buNone/>
+            </a:pPr>
+            <a:r>
+              <a:rPr lang="en-US" sz="1000" b="1" dirty="0">
                 <a:solidFill>
                   <a:srgbClr val="2E7CC4"/>
                 </a:solidFill>
@@ -4914,20 +5265,20 @@
               </a:rPr>
               <a:t>Accelerate</a:t>
             </a:r>
-            <a:endParaRPr lang="en-US" sz="1100" dirty="0"/>
-          </a:p>
-        </p:txBody>
-      </p:sp>
-      <p:sp>
-        <p:nvSpPr>
-          <p:cNvPr id="35" name="Text 31"/>
-          <p:cNvSpPr txBox="1"/>
-          <p:nvPr/>
-        </p:nvSpPr>
-        <p:spPr>
-          <a:xfrm>
-            <a:off x="9218930" y="5041900"/>
-            <a:ext cx="2413000" cy="355600"/>
+            <a:endParaRPr lang="en-US" sz="1000" dirty="0"/>
+          </a:p>
+        </p:txBody>
+      </p:sp>
+      <p:sp>
+        <p:nvSpPr>
+          <p:cNvPr id="44" name="Text 40"/>
+          <p:cNvSpPr txBox="1"/>
+          <p:nvPr/>
+        </p:nvSpPr>
+        <p:spPr>
+          <a:xfrm>
+            <a:off x="9218930" y="5219700"/>
+            <a:ext cx="2413000" cy="330200"/>
           </a:xfrm>
           <a:prstGeom prst="rect">
             <a:avLst/>
@@ -4959,7 +5310,7 @@
       </p:sp>
       <p:sp>
         <p:nvSpPr>
-          <p:cNvPr id="36" name="Shape 32"/>
+          <p:cNvPr id="45" name="Shape 41"/>
           <p:cNvSpPr/>
           <p:nvPr/>
         </p:nvSpPr>
@@ -4981,7 +5332,7 @@
       </p:sp>
       <p:sp>
         <p:nvSpPr>
-          <p:cNvPr id="37" name="Text 33"/>
+          <p:cNvPr id="46" name="Text 42"/>
           <p:cNvSpPr txBox="1"/>
           <p:nvPr/>
         </p:nvSpPr>
@@ -5026,7 +5377,7 @@
                 <a:ea typeface="Segoe UI Semilight" pitchFamily="34" charset="-122"/>
                 <a:cs typeface="Segoe UI Semilight" pitchFamily="34" charset="-120"/>
               </a:rPr>
-              <a:t>    Each solution keeps its own overview, deck, Solution ID and milestone submission. The price ladder is the one number they share.</a:t>
+              <a:t>    Each solution keeps its own overview, deck, Solution ID and milestone submission. Two of the three share a ladder; Operations prices to its own band.</a:t>
             </a:r>
             <a:endParaRPr lang="en-US" sz="1050" dirty="0"/>
           </a:p>
@@ -6902,7 +7253,7 @@
                 <a:ea typeface="Segoe UI Semilight" pitchFamily="34" charset="-122"/>
                 <a:cs typeface="Segoe UI Semilight" pitchFamily="34" charset="-120"/>
               </a:rPr>
-              <a:t>Get a listing live and operate it at volume. All nine services at every rung — volume, turnaround and review cadence set the rung.</a:t>
+              <a:t>Get a listing live and operate it at volume. All nine services at every rung, priced to the included offer band — the same rate per offer at each.</a:t>
             </a:r>
             <a:endParaRPr lang="en-US" sz="1250" dirty="0"/>
           </a:p>
@@ -7206,7 +7557,7 @@
                 <a:ea typeface="Segoe UI" pitchFamily="34" charset="-122"/>
                 <a:cs typeface="Segoe UI" pitchFamily="34" charset="-120"/>
               </a:rPr>
-              <a:t>   $2,500 / mo</a:t>
+              <a:t>   $1,500 / mo</a:t>
             </a:r>
             <a:endParaRPr lang="en-US" sz="1200" dirty="0"/>
           </a:p>
@@ -7588,7 +7939,7 @@
                 <a:ea typeface="Segoe UI" pitchFamily="34" charset="-122"/>
                 <a:cs typeface="Segoe UI" pitchFamily="34" charset="-120"/>
               </a:rPr>
-              <a:t>   $5,000 / mo</a:t>
+              <a:t>   $3,000 / mo</a:t>
             </a:r>
             <a:endParaRPr lang="en-US" sz="1200" dirty="0"/>
           </a:p>
@@ -7970,7 +8321,7 @@
                 <a:ea typeface="Segoe UI" pitchFamily="34" charset="-122"/>
                 <a:cs typeface="Segoe UI" pitchFamily="34" charset="-120"/>
               </a:rPr>
-              <a:t>   $7,500 / mo</a:t>
+              <a:t>   $6,000 / mo</a:t>
             </a:r>
             <a:endParaRPr lang="en-US" sz="1200" dirty="0"/>
           </a:p>
@@ -15530,7 +15881,7 @@
                 <a:ea typeface="Segoe UI Semilight" pitchFamily="34" charset="-122"/>
                 <a:cs typeface="Segoe UI Semilight" pitchFamily="34" charset="-120"/>
               </a:rPr>
-              <a:t>ASecureCloud and Kiflo, stress-tested against the $2,500 rung</a:t>
+              <a:t>ASecureCloud and Kiflo, stress-tested against the $1,500 rung</a:t>
             </a:r>
             <a:endParaRPr lang="en-US" sz="850" dirty="0"/>
           </a:p>
@@ -22722,7 +23073,7 @@
                 <a:ea typeface="Segoe UI" pitchFamily="34" charset="-122"/>
                 <a:cs typeface="Segoe UI" pitchFamily="34" charset="-120"/>
               </a:rPr>
-              <a:t>ONE LADDER</a:t>
+              <a:t>TWO PRICING LOGICS</a:t>
             </a:r>
             <a:pPr indent="0" marL="0">
               <a:buNone/>
@@ -22736,7 +23087,7 @@
                 <a:ea typeface="Segoe UI Semilight" pitchFamily="34" charset="-122"/>
                 <a:cs typeface="Segoe UI Semilight" pitchFamily="34" charset="-120"/>
               </a:rPr>
-              <a:t>    The three retainers price on the same $2,500 / $5,000 / $7,500 ladder — a pricing convention, not a product.</a:t>
+              <a:t>    Alliances and Partner Development price on seniority: $2,500 / $5,000 / $7,500. Operations prices on throughput: $1,500 / $3,000 / $6,000.</a:t>
             </a:r>
             <a:endParaRPr lang="en-US" sz="1050" dirty="0"/>
           </a:p>

--- a/docs/deck/BOX_Solutions_Revised.pptx
+++ b/docs/deck/BOX_Solutions_Revised.pptx
@@ -4522,7 +4522,7 @@
                 <a:ea typeface="Segoe UI Semilight" pitchFamily="34" charset="-122"/>
                 <a:cs typeface="Segoe UI Semilight" pitchFamily="34" charset="-120"/>
               </a:rPr>
-              <a:t>[RevOps / deal desk] · priced on throughput</a:t>
+              <a:t>[CRO] · [COO] co-sponsor · priced on throughput</a:t>
             </a:r>
             <a:endParaRPr lang="en-US" sz="800" dirty="0"/>
           </a:p>
@@ -4951,7 +4951,7 @@
                 <a:ea typeface="Segoe UI Semilight" pitchFamily="34" charset="-122"/>
                 <a:cs typeface="Segoe UI Semilight" pitchFamily="34" charset="-120"/>
               </a:rPr>
-              <a:t>[CRO / VP Channel] · priced on seniority</a:t>
+              <a:t>[CRO] · [VP Channel] co-sponsor · priced on seniority</a:t>
             </a:r>
             <a:endParaRPr lang="en-US" sz="800" dirty="0"/>
           </a:p>
@@ -23617,7 +23617,7 @@
                 <a:ea typeface="Segoe UI Semilight" pitchFamily="34" charset="-122"/>
                 <a:cs typeface="Segoe UI Semilight" pitchFamily="34" charset="-120"/>
               </a:rPr>
-              <a:t>[CTO / VP Engineering]</a:t>
+              <a:t>[CRO] · [CISO] co-sponsor</a:t>
             </a:r>
             <a:endParaRPr lang="en-US" sz="850" dirty="0"/>
           </a:p>
@@ -23695,7 +23695,7 @@
                 <a:ea typeface="Segoe UI Semilight" pitchFamily="34" charset="-122"/>
                 <a:cs typeface="Segoe UI Semilight" pitchFamily="34" charset="-120"/>
               </a:rPr>
-              <a:t>[RevOps / deal desk or COO]</a:t>
+              <a:t>[CRO] · [COO] co-sponsor</a:t>
             </a:r>
             <a:endParaRPr lang="en-US" sz="850" dirty="0"/>
           </a:p>
@@ -23734,7 +23734,7 @@
                 <a:ea typeface="Segoe UI Semilight" pitchFamily="34" charset="-122"/>
                 <a:cs typeface="Segoe UI Semilight" pitchFamily="34" charset="-120"/>
               </a:rPr>
-              <a:t>[CRO / VP Channel]</a:t>
+              <a:t>[CRO] · [VP Channel] co-sponsor</a:t>
             </a:r>
             <a:endParaRPr lang="en-US" sz="850" dirty="0"/>
           </a:p>
@@ -23812,7 +23812,7 @@
                 <a:ea typeface="Segoe UI Semilight" pitchFamily="34" charset="-122"/>
                 <a:cs typeface="Segoe UI Semilight" pitchFamily="34" charset="-120"/>
               </a:rPr>
-              <a:t>[N] engineer-weeks on Well-Architected, FTR and seller registration</a:t>
+              <a:t>Enterprise deals lost to Marketplace procurement, plus [N] engineer-weeks of compliance work</a:t>
             </a:r>
             <a:endParaRPr lang="en-US" sz="850" dirty="0"/>
           </a:p>
